--- a/93c56_overview.pptx
+++ b/93c56_overview.pptx
@@ -17,7 +17,12 @@
     <p:sldId id="265" r:id="rId11"/>
     <p:sldId id="266" r:id="rId12"/>
     <p:sldId id="267" r:id="rId13"/>
+    <p:sldId id="269" r:id="rId20"/>
     <p:sldId id="268" r:id="rId14"/>
+    <p:sldId id="270" r:id="rId21"/>
+    <p:sldId id="271" r:id="rId22"/>
+    <p:sldId id="272" r:id="rId23"/>
+    <p:sldId id="273" r:id="rId24"/>
   </p:sldIdLst>
   <p:notesMasterIdLst>
     <p:notesMasterId r:id="rId15"/>
@@ -2224,6 +2229,10 @@
             <a:prstDash val="solid"/>
           </a:ln>
         </p:spPr>
+        <p:txBody>
+          <a:bodyPr/>
+          <a:p/>
+        </p:txBody>
       </p:sp>
       <p:sp>
         <p:nvSpPr>
@@ -2244,6 +2253,10 @@
           </a:solidFill>
           <a:ln/>
         </p:spPr>
+        <p:txBody>
+          <a:bodyPr/>
+          <a:p/>
+        </p:txBody>
       </p:sp>
       <p:sp>
         <p:nvSpPr>
@@ -2342,6 +2355,10 @@
           </a:solidFill>
           <a:ln/>
         </p:spPr>
+        <p:txBody>
+          <a:bodyPr/>
+          <a:p/>
+        </p:txBody>
       </p:sp>
       <p:sp>
         <p:nvSpPr>
@@ -2440,6 +2457,10 @@
           </a:solidFill>
           <a:ln/>
         </p:spPr>
+        <p:txBody>
+          <a:bodyPr/>
+          <a:p/>
+        </p:txBody>
       </p:sp>
       <p:sp>
         <p:nvSpPr>
@@ -2538,6 +2559,10 @@
           </a:solidFill>
           <a:ln/>
         </p:spPr>
+        <p:txBody>
+          <a:bodyPr/>
+          <a:p/>
+        </p:txBody>
       </p:sp>
       <p:sp>
         <p:nvSpPr>
@@ -2636,6 +2661,10 @@
           </a:solidFill>
           <a:ln/>
         </p:spPr>
+        <p:txBody>
+          <a:bodyPr/>
+          <a:p/>
+        </p:txBody>
       </p:sp>
       <p:sp>
         <p:nvSpPr>
@@ -2734,6 +2763,10 @@
           </a:solidFill>
           <a:ln/>
         </p:spPr>
+        <p:txBody>
+          <a:bodyPr/>
+          <a:p/>
+        </p:txBody>
       </p:sp>
       <p:sp>
         <p:nvSpPr>
@@ -2832,6 +2865,10 @@
           </a:solidFill>
           <a:ln/>
         </p:spPr>
+        <p:txBody>
+          <a:bodyPr/>
+          <a:p/>
+        </p:txBody>
       </p:sp>
       <p:sp>
         <p:nvSpPr>
@@ -2930,6 +2967,10 @@
           </a:solidFill>
           <a:ln/>
         </p:spPr>
+        <p:txBody>
+          <a:bodyPr/>
+          <a:p/>
+        </p:txBody>
       </p:sp>
       <p:sp>
         <p:nvSpPr>
@@ -3028,6 +3069,10 @@
           </a:solidFill>
           <a:ln/>
         </p:spPr>
+        <p:txBody>
+          <a:bodyPr/>
+          <a:p/>
+        </p:txBody>
       </p:sp>
       <p:sp>
         <p:nvSpPr>
@@ -3126,6 +3171,10 @@
           </a:solidFill>
           <a:ln/>
         </p:spPr>
+        <p:txBody>
+          <a:bodyPr/>
+          <a:p/>
+        </p:txBody>
       </p:sp>
       <p:sp>
         <p:nvSpPr>
@@ -3202,6 +3251,84 @@
               <a:t>PB8 (R47 풀업, GPIO 미사용)</a:t>
             </a:r>
             <a:endParaRPr lang="en-US" sz="1000" dirty="0"/>
+          </a:p>
+        </p:txBody>
+      </p:sp>
+      <p:sp>
+        <p:nvSpPr>
+          <p:cNvPr id="32" name="Text 30"/>
+          <p:cNvSpPr/>
+          <p:nvPr/>
+        </p:nvSpPr>
+        <p:spPr>
+          <a:xfrm>
+            <a:off x="548640" y="4639432"/>
+            <a:ext cx="3657600" cy="347472"/>
+          </a:xfrm>
+          <a:prstGeom prst="rect">
+            <a:avLst/>
+          </a:prstGeom>
+          <a:noFill/>
+          <a:ln/>
+        </p:spPr>
+        <p:txBody>
+          <a:bodyPr wrap="square" lIns="0" tIns="0" rIns="0" bIns="0" rtlCol="0" anchor="ctr"/>
+          <a:lstStyle/>
+          <a:p>
+            <a:pPr indent="0" marL="0">
+              <a:buNone/>
+            </a:pPr>
+            <a:endParaRPr lang="en-US" sz="1000" dirty="0"/>
+            <a:r>
+              <a:rPr lang="en-US" sz="1000" b="1" dirty="0">
+                <a:solidFill>
+                  <a:srgbClr val="000000"/>
+                </a:solidFill>
+                <a:latin typeface="Arial" pitchFamily="34" charset="0"/>
+                <a:ea typeface="Arial" pitchFamily="34" charset="-122"/>
+                <a:cs typeface="Arial" pitchFamily="34" charset="-120"/>
+              </a:rPr>
+              <a:t>UART1 (디버그 로그)</a:t>
+            </a:r>
+          </a:p>
+        </p:txBody>
+      </p:sp>
+      <p:sp>
+        <p:nvSpPr>
+          <p:cNvPr id="33" name="Text 31"/>
+          <p:cNvSpPr/>
+          <p:nvPr/>
+        </p:nvSpPr>
+        <p:spPr>
+          <a:xfrm>
+            <a:off x="4389120" y="4639432"/>
+            <a:ext cx="4206240" cy="347472"/>
+          </a:xfrm>
+          <a:prstGeom prst="rect">
+            <a:avLst/>
+          </a:prstGeom>
+          <a:noFill/>
+          <a:ln/>
+        </p:spPr>
+        <p:txBody>
+          <a:bodyPr wrap="square" lIns="0" tIns="0" rIns="0" bIns="0" rtlCol="0" anchor="ctr"/>
+          <a:lstStyle/>
+          <a:p>
+            <a:pPr indent="0" marL="0">
+              <a:buNone/>
+            </a:pPr>
+            <a:endParaRPr lang="en-US" sz="1000" dirty="0"/>
+            <a:r>
+              <a:rPr lang="en-US" sz="1000" dirty="0">
+                <a:solidFill>
+                  <a:srgbClr val="333333"/>
+                </a:solidFill>
+                <a:latin typeface="Consolas" pitchFamily="34" charset="0"/>
+                <a:ea typeface="Consolas" pitchFamily="34" charset="-122"/>
+                <a:cs typeface="Consolas" pitchFamily="34" charset="-120"/>
+              </a:rPr>
+              <a:t>PB14 (TX), PB15 (RX)  115200 8N1</a:t>
+            </a:r>
           </a:p>
         </p:txBody>
       </p:sp>
@@ -6068,6 +6195,264 @@
 </file>
 
 <file path=ppt/slides/slide13.xml><?xml version="1.0" encoding="utf-8"?>
+<p:sld xmlns:a="http://schemas.openxmlformats.org/drawingml/2006/main" xmlns:p="http://schemas.openxmlformats.org/presentationml/2006/main" xmlns:r="http://schemas.openxmlformats.org/officeDocument/2006/relationships">
+  <p:cSld>
+    <p:spTree>
+      <p:nvGrpSpPr>
+        <p:cNvPr id="1" name=""/>
+        <p:cNvGrpSpPr/>
+        <p:nvPr/>
+      </p:nvGrpSpPr>
+      <p:grpSpPr/>
+      <p:sp>
+        <p:nvSpPr>
+          <p:cNvPr id="2" name="TextBox 1"/>
+          <p:cNvSpPr txBox="1"/>
+          <p:nvPr/>
+        </p:nvSpPr>
+        <p:spPr>
+          <a:xfrm>
+            <a:off x="274320" y="137160"/>
+            <a:ext cx="8595360" cy="457200"/>
+          </a:xfrm>
+          <a:prstGeom prst="rect">
+            <a:avLst/>
+          </a:prstGeom>
+          <a:noFill/>
+        </p:spPr>
+        <p:txBody>
+          <a:bodyPr wrap="square">
+            <a:spAutoFit/>
+          </a:bodyPr>
+          <a:lstStyle/>
+          <a:p>
+            <a:r>
+              <a:rPr sz="2400" b="1">
+                <a:solidFill>
+                  <a:srgbClr val="1F497D"/>
+                </a:solidFill>
+              </a:rPr>
+              <a:t>버그 수정 및 신규 기능 (2026.04)</a:t>
+            </a:r>
+          </a:p>
+        </p:txBody>
+      </p:sp>
+      <p:sp>
+        <p:nvSpPr>
+          <p:cNvPr id="3" name="TextBox 2"/>
+          <p:cNvSpPr txBox="1"/>
+          <p:nvPr/>
+        </p:nvSpPr>
+        <p:spPr>
+          <a:xfrm>
+            <a:off x="274320" y="685800"/>
+            <a:ext cx="8595360" cy="1005840"/>
+          </a:xfrm>
+          <a:prstGeom prst="rect">
+            <a:avLst/>
+          </a:prstGeom>
+          <a:noFill/>
+        </p:spPr>
+        <p:txBody>
+          <a:bodyPr wrap="square">
+            <a:spAutoFit/>
+          </a:bodyPr>
+          <a:lstStyle/>
+          <a:p>
+            <a:r>
+              <a:rPr sz="1300" b="1">
+                <a:solidFill>
+                  <a:srgbClr val="1F497D"/>
+                </a:solidFill>
+              </a:rPr>
+              <a:t>[ 버그 수정 1 ]  LED 항상 소등 문제</a:t>
+            </a:r>
+          </a:p>
+          <a:p>
+            <a:r>
+              <a:rPr sz="1300" b="0"/>
+              <a:t>원인: led_set()에서 SK9822 brightness가 0으로 하드코딩 → 0xE0 전송 = 완전 꺼짐</a:t>
+            </a:r>
+          </a:p>
+          <a:p>
+            <a:r>
+              <a:rPr sz="1300" b="0"/>
+              <a:t>수정: 색상에 따라 자동 밝기 부여</a:t>
+            </a:r>
+          </a:p>
+          <a:p>
+            <a:r>
+              <a:rPr sz="1300" b="0"/>
+              <a:t>  · 소등 (0,0,0) → br = 0    · 청색 전용 → br = 12 (시감 보정)    · 기타 색상 → br = 4</a:t>
+            </a:r>
+          </a:p>
+        </p:txBody>
+      </p:sp>
+      <p:sp>
+        <p:nvSpPr>
+          <p:cNvPr id="4" name="TextBox 3"/>
+          <p:cNvSpPr txBox="1"/>
+          <p:nvPr/>
+        </p:nvSpPr>
+        <p:spPr>
+          <a:xfrm>
+            <a:off x="274320" y="1783080"/>
+            <a:ext cx="8595360" cy="1005840"/>
+          </a:xfrm>
+          <a:prstGeom prst="rect">
+            <a:avLst/>
+          </a:prstGeom>
+          <a:noFill/>
+        </p:spPr>
+        <p:txBody>
+          <a:bodyPr wrap="square">
+            <a:spAutoFit/>
+          </a:bodyPr>
+          <a:lstStyle/>
+          <a:p>
+            <a:r>
+              <a:rPr sz="1300" b="1">
+                <a:solidFill>
+                  <a:srgbClr val="1F497D"/>
+                </a:solidFill>
+              </a:rPr>
+              <a:t>[ 버그 수정 2 ]  0x00 초기화 칩 감지 실패</a:t>
+            </a:r>
+          </a:p>
+          <a:p>
+            <a:r>
+              <a:rPr sz="1300" b="0"/>
+              <a:t>원인: detectTask에서 EE_DetectReadOnly() 사용 → 데이터 0x00이면 칩 없음으로 판정</a:t>
+            </a:r>
+          </a:p>
+          <a:p>
+            <a:r>
+              <a:rPr sz="1300" b="0"/>
+              <a:t>수정: detectTask에서 EE_Detect() 사용 (addr 255에 0xA5 기록 후 읽어 비교)</a:t>
+            </a:r>
+          </a:p>
+          <a:p>
+            <a:r>
+              <a:rPr sz="1300" b="0"/>
+              <a:t>  · 이미 0x00으로 초기화된 칩도 쓰기+읽기로 확실히 감지</a:t>
+            </a:r>
+          </a:p>
+        </p:txBody>
+      </p:sp>
+      <p:sp>
+        <p:nvSpPr>
+          <p:cNvPr id="5" name="TextBox 4"/>
+          <p:cNvSpPr txBox="1"/>
+          <p:nvPr/>
+        </p:nvSpPr>
+        <p:spPr>
+          <a:xfrm>
+            <a:off x="274320" y="2880360"/>
+            <a:ext cx="8595360" cy="1828800"/>
+          </a:xfrm>
+          <a:prstGeom prst="rect">
+            <a:avLst/>
+          </a:prstGeom>
+          <a:noFill/>
+        </p:spPr>
+        <p:txBody>
+          <a:bodyPr wrap="square">
+            <a:spAutoFit/>
+          </a:bodyPr>
+          <a:lstStyle/>
+          <a:p>
+            <a:r>
+              <a:rPr sz="1200" b="1">
+                <a:solidFill>
+                  <a:srgbClr val="1F497D"/>
+                </a:solidFill>
+              </a:rPr>
+              <a:t>[ 신규 기능 ]  UART1 디버그 로그 출력</a:t>
+            </a:r>
+          </a:p>
+          <a:p>
+            <a:r>
+              <a:rPr sz="1200" b="0"/>
+              <a:t>설정: PB14 (TX) / PB15 (RX)  ·  115200 bps, 8N1</a:t>
+            </a:r>
+          </a:p>
+          <a:p>
+            <a:r>
+              <a:rPr sz="1200" b="0"/>
+              <a:t>구현: uart_log() 헬퍼 함수 (vsnprintf + HAL_UART_Transmit 블로킹)</a:t>
+            </a:r>
+          </a:p>
+          <a:p>
+            <a:r>
+              <a:rPr sz="1200" b="0"/>
+              <a:t>출력 항목:</a:t>
+            </a:r>
+          </a:p>
+          <a:p>
+            <a:r>
+              <a:rPr sz="1200" b="0"/>
+              <a:t>  [INIT]   시스템 시작, 슬롯 수</a:t>
+            </a:r>
+          </a:p>
+          <a:p>
+            <a:r>
+              <a:rPr sz="1200" b="0"/>
+              <a:t>  [WAIT]   보드 장착 대기</a:t>
+            </a:r>
+          </a:p>
+          <a:p>
+            <a:r>
+              <a:rPr sz="1200" b="0"/>
+              <a:t>  [BOARD]  보드 감지, 칩 스캔 결과 표 (CS00~CS11 O/X)</a:t>
+            </a:r>
+          </a:p>
+          <a:p>
+            <a:r>
+              <a:rPr sz="1200" b="0"/>
+              <a:t>  [CHIP]   93C56 / 93C46 식별 결과</a:t>
+            </a:r>
+          </a:p>
+          <a:p>
+            <a:r>
+              <a:rPr sz="1200" b="0"/>
+              <a:t>  [STATE B/C/D]  각 단계 진입</a:t>
+            </a:r>
+          </a:p>
+          <a:p>
+            <a:r>
+              <a:rPr sz="1200" b="0"/>
+              <a:t>  [TEST]   칩별 0xAA/0x55 테스트 결과 (PASS/FAIL/SKIP)</a:t>
+            </a:r>
+          </a:p>
+          <a:p>
+            <a:r>
+              <a:rPr sz="1200" b="0"/>
+              <a:t>  [PROG]   칩별 0x00 프로그래밍 결과 (OK/FAIL/SKIP)</a:t>
+            </a:r>
+          </a:p>
+          <a:p>
+            <a:r>
+              <a:rPr sz="1200" b="0"/>
+              <a:t>  [DONE]   최종 요약 (PASS=N  FAIL=N  SKIP=N, 불량 목록)</a:t>
+            </a:r>
+          </a:p>
+          <a:p>
+            <a:r>
+              <a:rPr sz="1200" b="0"/>
+              <a:t>  [BOARD]  보드 분리 확인</a:t>
+            </a:r>
+          </a:p>
+        </p:txBody>
+      </p:sp>
+    </p:spTree>
+  </p:cSld>
+  <p:clrMapOvr>
+    <a:masterClrMapping/>
+  </p:clrMapOvr>
+</p:sld>
+</file>
+
+<file path=ppt/slides/slide14.xml><?xml version="1.0" encoding="utf-8"?>
 <p:sld xmlns:a="http://schemas.openxmlformats.org/drawingml/2006/main" xmlns:r="http://schemas.openxmlformats.org/officeDocument/2006/relationships" xmlns:p="http://schemas.openxmlformats.org/presentationml/2006/main">
   <p:cSld name="Slide 13">
     <p:spTree>
@@ -6106,6 +6491,10 @@
             <a:prstDash val="solid"/>
           </a:ln>
         </p:spPr>
+        <p:txBody>
+          <a:bodyPr/>
+          <a:p/>
+        </p:txBody>
       </p:sp>
       <p:sp>
         <p:nvSpPr>
@@ -6168,6 +6557,10 @@
             <a:prstDash val="solid"/>
           </a:ln>
         </p:spPr>
+        <p:txBody>
+          <a:bodyPr/>
+          <a:p/>
+        </p:txBody>
       </p:sp>
       <p:sp>
         <p:nvSpPr>
@@ -6194,6 +6587,7 @@
               <a:buSzPct val="100000"/>
               <a:buChar char="•"/>
             </a:pPr>
+            <a:endParaRPr lang="en-US" sz="1400" dirty="0"/>
             <a:r>
               <a:rPr lang="en-US" sz="1400" dirty="0">
                 <a:solidFill>
@@ -6203,15 +6597,15 @@
                 <a:ea typeface="Arial" pitchFamily="34" charset="-122"/>
                 <a:cs typeface="Arial" pitchFamily="34" charset="-120"/>
               </a:rPr>
-              <a:t>93C46 / 93C56 자동 식별 및 이중 지원</a:t>
-            </a:r>
-            <a:endParaRPr lang="en-US" sz="1400" dirty="0"/>
+              <a:t>93C46 / 93C56 자동 식별 및 순차 검사</a:t>
+            </a:r>
           </a:p>
           <a:p>
             <a:pPr marL="342900" indent="-342900">
               <a:buSzPct val="100000"/>
               <a:buChar char="•"/>
             </a:pPr>
+            <a:endParaRPr lang="en-US" sz="1400" dirty="0"/>
             <a:r>
               <a:rPr lang="en-US" sz="1400" dirty="0">
                 <a:solidFill>
@@ -6223,13 +6617,13 @@
               </a:rPr>
               <a:t>12개 EEPROM 자동 검사 및 0x00 초기화</a:t>
             </a:r>
-            <a:endParaRPr lang="en-US" sz="1400" dirty="0"/>
           </a:p>
           <a:p>
             <a:pPr marL="342900" indent="-342900">
               <a:buSzPct val="100000"/>
               <a:buChar char="•"/>
             </a:pPr>
+            <a:endParaRPr lang="en-US" sz="1400" dirty="0"/>
             <a:r>
               <a:rPr lang="en-US" sz="1400" dirty="0">
                 <a:solidFill>
@@ -6239,15 +6633,15 @@
                 <a:ea typeface="Arial" pitchFamily="34" charset="-122"/>
                 <a:cs typeface="Arial" pitchFamily="34" charset="-120"/>
               </a:rPr>
-              <a:t>FreeRTOS 3개 태스크 (메인 + 감지 + 기본)</a:t>
-            </a:r>
-            <a:endParaRPr lang="en-US" sz="1400" dirty="0"/>
+              <a:t>FreeRTOS 3개 태스크 (검사 + 감지 + 기본)</a:t>
+            </a:r>
           </a:p>
           <a:p>
             <a:pPr marL="342900" indent="-342900">
               <a:buSzPct val="100000"/>
               <a:buChar char="•"/>
             </a:pPr>
+            <a:endParaRPr lang="en-US" sz="1400" dirty="0"/>
             <a:r>
               <a:rPr lang="en-US" sz="1400" dirty="0">
                 <a:solidFill>
@@ -6257,15 +6651,15 @@
                 <a:ea typeface="Arial" pitchFamily="34" charset="-122"/>
                 <a:cs typeface="Arial" pitchFamily="34" charset="-120"/>
               </a:rPr>
-              <a:t>포그핀 불안정 대비: 읽기 전용 감지 + 3회 디바운싱</a:t>
-            </a:r>
-            <a:endParaRPr lang="en-US" sz="1400" dirty="0"/>
+              <a:t>감지 방식 개선: EE_Detect() 쓰기+읽기 검증 (0x00 칩 대응)  ← 수정</a:t>
+            </a:r>
           </a:p>
           <a:p>
             <a:pPr marL="342900" indent="-342900">
               <a:buSzPct val="100000"/>
               <a:buChar char="•"/>
             </a:pPr>
+            <a:endParaRPr lang="en-US" sz="1400" dirty="0"/>
             <a:r>
               <a:rPr lang="en-US" sz="1400" dirty="0">
                 <a:solidFill>
@@ -6275,15 +6669,15 @@
                 <a:ea typeface="Arial" pitchFamily="34" charset="-122"/>
                 <a:cs typeface="Arial" pitchFamily="34" charset="-120"/>
               </a:rPr>
-              <a:t>0xAA/0x55 패턴으로 전 비트 정상 동작 확인</a:t>
-            </a:r>
-            <a:endParaRPr lang="en-US" sz="1400" dirty="0"/>
+              <a:t>0xAA/0x55 교번 기록으로 모든 비트 반전 능력 확인</a:t>
+            </a:r>
           </a:p>
           <a:p>
             <a:pPr marL="342900" indent="-342900">
               <a:buSzPct val="100000"/>
               <a:buChar char="•"/>
             </a:pPr>
+            <a:endParaRPr lang="en-US" sz="1400" dirty="0"/>
             <a:r>
               <a:rPr lang="en-US" sz="1400" dirty="0">
                 <a:solidFill>
@@ -6293,15 +6687,15 @@
                 <a:ea typeface="Arial" pitchFamily="34" charset="-122"/>
                 <a:cs typeface="Arial" pitchFamily="34" charset="-120"/>
               </a:rPr>
-              <a:t>8가지 LED 쇼 패턴 (등휘도 6색 순환)</a:t>
-            </a:r>
-            <a:endParaRPr lang="en-US" sz="1400" dirty="0"/>
+              <a:t>8가지 LED 쇼 연출 (등휘도 6색 순환)</a:t>
+            </a:r>
           </a:p>
           <a:p>
             <a:pPr marL="342900" indent="-342900">
               <a:buSzPct val="100000"/>
               <a:buChar char="•"/>
             </a:pPr>
+            <a:endParaRPr lang="en-US" sz="1400" dirty="0"/>
             <a:r>
               <a:rPr lang="en-US" sz="1400" dirty="0">
                 <a:solidFill>
@@ -6311,9 +6705,8264 @@
                 <a:ea typeface="Arial" pitchFamily="34" charset="-122"/>
                 <a:cs typeface="Arial" pitchFamily="34" charset="-120"/>
               </a:rPr>
+              <a:t>LED 밝기 자동 설정: 소등=0 / 청색=12 / 기타=4  ← 수정</a:t>
+            </a:r>
+          </a:p>
+          <a:p>
+            <a:r>
+              <a:rPr lang="en-US" sz="1400" dirty="0">
+                <a:solidFill>
+                  <a:srgbClr val="333333"/>
+                </a:solidFill>
+                <a:latin typeface="Arial" pitchFamily="34" charset="0"/>
+                <a:ea typeface="Arial" pitchFamily="34" charset="-122"/>
+                <a:cs typeface="Arial" pitchFamily="34" charset="-120"/>
+              </a:rPr>
               <a:t>한국어 TTS 음성 안내 8종 자동 생성</a:t>
             </a:r>
-            <a:endParaRPr lang="en-US" sz="1400" dirty="0"/>
+          </a:p>
+          <a:p>
+            <a:r>
+              <a:rPr lang="en-US" sz="1400" dirty="0">
+                <a:solidFill>
+                  <a:srgbClr val="333333"/>
+                </a:solidFill>
+                <a:latin typeface="Arial" pitchFamily="34" charset="0"/>
+                <a:ea typeface="Arial" pitchFamily="34" charset="-122"/>
+                <a:cs typeface="Arial" pitchFamily="34" charset="-120"/>
+              </a:rPr>
+              <a:t>UART1 디버그 로그 추가 (PB14/PB15, 115200bps)  ← 신규</a:t>
+            </a:r>
+          </a:p>
+        </p:txBody>
+      </p:sp>
+    </p:spTree>
+  </p:cSld>
+  <p:clrMapOvr>
+    <a:masterClrMapping/>
+  </p:clrMapOvr>
+</p:sld>
+</file>
+
+<file path=ppt/slides/slide15.xml><?xml version="1.0" encoding="utf-8"?>
+<p:sld xmlns:a="http://schemas.openxmlformats.org/drawingml/2006/main" xmlns:p="http://schemas.openxmlformats.org/presentationml/2006/main" xmlns:r="http://schemas.openxmlformats.org/officeDocument/2006/relationships">
+  <p:cSld>
+    <p:spTree>
+      <p:nvGrpSpPr>
+        <p:cNvPr id="1" name=""/>
+        <p:cNvGrpSpPr/>
+        <p:nvPr/>
+      </p:nvGrpSpPr>
+      <p:grpSpPr/>
+      <p:sp>
+        <p:nvSpPr>
+          <p:cNvPr id="2" name="Rectangle 1"/>
+          <p:cNvSpPr/>
+          <p:nvPr/>
+        </p:nvSpPr>
+        <p:spPr>
+          <a:xfrm>
+            <a:off x="0" y="0"/>
+            <a:ext cx="9144000" cy="640080"/>
+          </a:xfrm>
+          <a:prstGeom prst="rect">
+            <a:avLst/>
+          </a:prstGeom>
+          <a:solidFill>
+            <a:srgbClr val="1F497D"/>
+          </a:solidFill>
+          <a:ln>
+            <a:noFill/>
+          </a:ln>
+        </p:spPr>
+        <p:style>
+          <a:lnRef idx="1">
+            <a:schemeClr val="accent1"/>
+          </a:lnRef>
+          <a:fillRef idx="3">
+            <a:schemeClr val="accent1"/>
+          </a:fillRef>
+          <a:effectRef idx="2">
+            <a:schemeClr val="accent1"/>
+          </a:effectRef>
+          <a:fontRef idx="minor">
+            <a:schemeClr val="lt1"/>
+          </a:fontRef>
+        </p:style>
+        <p:txBody>
+          <a:bodyPr rtlCol="0" anchor="ctr"/>
+          <a:lstStyle/>
+          <a:p>
+            <a:pPr algn="ctr"/>
+          </a:p>
+        </p:txBody>
+      </p:sp>
+      <p:sp>
+        <p:nvSpPr>
+          <p:cNvPr id="3" name="TextBox 2"/>
+          <p:cNvSpPr txBox="1"/>
+          <p:nvPr/>
+        </p:nvSpPr>
+        <p:spPr>
+          <a:xfrm>
+            <a:off x="137160" y="45720"/>
+            <a:ext cx="7772400" cy="548640"/>
+          </a:xfrm>
+          <a:prstGeom prst="rect">
+            <a:avLst/>
+          </a:prstGeom>
+          <a:noFill/>
+        </p:spPr>
+        <p:txBody>
+          <a:bodyPr wrap="square">
+            <a:spAutoFit/>
+          </a:bodyPr>
+          <a:lstStyle/>
+          <a:p>
+            <a:pPr algn="l"/>
+            <a:r>
+              <a:rPr sz="2000" b="1" i="0">
+                <a:solidFill>
+                  <a:srgbClr val="FFFFFF"/>
+                </a:solidFill>
+              </a:rPr>
+              <a:t>디버그 세션 개요</a:t>
+            </a:r>
+          </a:p>
+        </p:txBody>
+      </p:sp>
+      <p:sp>
+        <p:nvSpPr>
+          <p:cNvPr id="4" name="TextBox 3"/>
+          <p:cNvSpPr txBox="1"/>
+          <p:nvPr/>
+        </p:nvSpPr>
+        <p:spPr>
+          <a:xfrm>
+            <a:off x="137160" y="658368"/>
+            <a:ext cx="8686800" cy="320040"/>
+          </a:xfrm>
+          <a:prstGeom prst="rect">
+            <a:avLst/>
+          </a:prstGeom>
+          <a:noFill/>
+        </p:spPr>
+        <p:txBody>
+          <a:bodyPr wrap="square">
+            <a:spAutoFit/>
+          </a:bodyPr>
+          <a:lstStyle/>
+          <a:p>
+            <a:pPr algn="l"/>
+            <a:r>
+              <a:rPr sz="1200" b="0" i="1">
+                <a:solidFill>
+                  <a:srgbClr val="2E74B5"/>
+                </a:solidFill>
+              </a:rPr>
+              <a:t>2026.04 | 93C56 프로그래머 보드 진단</a:t>
+            </a:r>
+          </a:p>
+        </p:txBody>
+      </p:sp>
+      <p:sp>
+        <p:nvSpPr>
+          <p:cNvPr id="5" name="TextBox 4"/>
+          <p:cNvSpPr txBox="1"/>
+          <p:nvPr/>
+        </p:nvSpPr>
+        <p:spPr>
+          <a:xfrm>
+            <a:off x="274320" y="914400"/>
+            <a:ext cx="8595360" cy="320040"/>
+          </a:xfrm>
+          <a:prstGeom prst="rect">
+            <a:avLst/>
+          </a:prstGeom>
+          <a:noFill/>
+        </p:spPr>
+        <p:txBody>
+          <a:bodyPr wrap="square">
+            <a:spAutoFit/>
+          </a:bodyPr>
+          <a:lstStyle/>
+          <a:p>
+            <a:pPr algn="l"/>
+            <a:r>
+              <a:rPr sz="1400" b="1" i="0">
+                <a:solidFill>
+                  <a:srgbClr val="2E74B5"/>
+                </a:solidFill>
+              </a:rPr>
+              <a:t>문제 증상 (초기 UART 출력)</a:t>
+            </a:r>
+          </a:p>
+        </p:txBody>
+      </p:sp>
+      <p:sp>
+        <p:nvSpPr>
+          <p:cNvPr id="6" name="Rectangle 5"/>
+          <p:cNvSpPr/>
+          <p:nvPr/>
+        </p:nvSpPr>
+        <p:spPr>
+          <a:xfrm>
+            <a:off x="274320" y="1234440"/>
+            <a:ext cx="5303520" cy="2286000"/>
+          </a:xfrm>
+          <a:prstGeom prst="rect">
+            <a:avLst/>
+          </a:prstGeom>
+          <a:solidFill>
+            <a:srgbClr val="F2F2F2"/>
+          </a:solidFill>
+          <a:ln>
+            <a:solidFill>
+              <a:srgbClr val="2E74B5"/>
+            </a:solidFill>
+          </a:ln>
+        </p:spPr>
+        <p:style>
+          <a:lnRef idx="1">
+            <a:schemeClr val="accent1"/>
+          </a:lnRef>
+          <a:fillRef idx="3">
+            <a:schemeClr val="accent1"/>
+          </a:fillRef>
+          <a:effectRef idx="2">
+            <a:schemeClr val="accent1"/>
+          </a:effectRef>
+          <a:fontRef idx="minor">
+            <a:schemeClr val="lt1"/>
+          </a:fontRef>
+        </p:style>
+        <p:txBody>
+          <a:bodyPr rtlCol="0" anchor="ctr"/>
+          <a:lstStyle/>
+          <a:p>
+            <a:pPr algn="ctr"/>
+          </a:p>
+        </p:txBody>
+      </p:sp>
+      <p:sp>
+        <p:nvSpPr>
+          <p:cNvPr id="7" name="TextBox 6"/>
+          <p:cNvSpPr txBox="1"/>
+          <p:nvPr/>
+        </p:nvSpPr>
+        <p:spPr>
+          <a:xfrm>
+            <a:off x="384048" y="1280160"/>
+            <a:ext cx="5084064" cy="219456"/>
+          </a:xfrm>
+          <a:prstGeom prst="rect">
+            <a:avLst/>
+          </a:prstGeom>
+          <a:noFill/>
+        </p:spPr>
+        <p:txBody>
+          <a:bodyPr wrap="square">
+            <a:spAutoFit/>
+          </a:bodyPr>
+          <a:lstStyle/>
+          <a:p>
+            <a:pPr algn="l"/>
+            <a:r>
+              <a:rPr sz="1000" b="0" i="0">
+                <a:solidFill>
+                  <a:srgbClr val="ED7D31"/>
+                </a:solidFill>
+              </a:rPr>
+              <a:t>[DIAG] CS00: WR=OK    RB=0x48  ---</a:t>
+            </a:r>
+          </a:p>
+        </p:txBody>
+      </p:sp>
+      <p:sp>
+        <p:nvSpPr>
+          <p:cNvPr id="8" name="TextBox 7"/>
+          <p:cNvSpPr txBox="1"/>
+          <p:nvPr/>
+        </p:nvSpPr>
+        <p:spPr>
+          <a:xfrm>
+            <a:off x="384048" y="1499616"/>
+            <a:ext cx="5084064" cy="219456"/>
+          </a:xfrm>
+          <a:prstGeom prst="rect">
+            <a:avLst/>
+          </a:prstGeom>
+          <a:noFill/>
+        </p:spPr>
+        <p:txBody>
+          <a:bodyPr wrap="square">
+            <a:spAutoFit/>
+          </a:bodyPr>
+          <a:lstStyle/>
+          <a:p>
+            <a:pPr algn="l"/>
+            <a:r>
+              <a:rPr sz="1000" b="0" i="0">
+                <a:solidFill>
+                  <a:srgbClr val="ED7D31"/>
+                </a:solidFill>
+              </a:rPr>
+              <a:t>[DIAG] CS01: WR=OK    RB=0x48  ---</a:t>
+            </a:r>
+          </a:p>
+        </p:txBody>
+      </p:sp>
+      <p:sp>
+        <p:nvSpPr>
+          <p:cNvPr id="9" name="TextBox 8"/>
+          <p:cNvSpPr txBox="1"/>
+          <p:nvPr/>
+        </p:nvSpPr>
+        <p:spPr>
+          <a:xfrm>
+            <a:off x="384048" y="1719072"/>
+            <a:ext cx="5084064" cy="219456"/>
+          </a:xfrm>
+          <a:prstGeom prst="rect">
+            <a:avLst/>
+          </a:prstGeom>
+          <a:noFill/>
+        </p:spPr>
+        <p:txBody>
+          <a:bodyPr wrap="square">
+            <a:spAutoFit/>
+          </a:bodyPr>
+          <a:lstStyle/>
+          <a:p>
+            <a:pPr algn="l"/>
+            <a:r>
+              <a:rPr sz="1000" b="0" i="0">
+                <a:solidFill>
+                  <a:srgbClr val="ED7D31"/>
+                </a:solidFill>
+              </a:rPr>
+              <a:t>[DIAG] CS02: WR=OK    RB=0x48  ---</a:t>
+            </a:r>
+          </a:p>
+        </p:txBody>
+      </p:sp>
+      <p:sp>
+        <p:nvSpPr>
+          <p:cNvPr id="10" name="TextBox 9"/>
+          <p:cNvSpPr txBox="1"/>
+          <p:nvPr/>
+        </p:nvSpPr>
+        <p:spPr>
+          <a:xfrm>
+            <a:off x="384048" y="1938528"/>
+            <a:ext cx="5084064" cy="219456"/>
+          </a:xfrm>
+          <a:prstGeom prst="rect">
+            <a:avLst/>
+          </a:prstGeom>
+          <a:noFill/>
+        </p:spPr>
+        <p:txBody>
+          <a:bodyPr wrap="square">
+            <a:spAutoFit/>
+          </a:bodyPr>
+          <a:lstStyle/>
+          <a:p>
+            <a:pPr algn="l"/>
+            <a:r>
+              <a:rPr sz="1000" b="0" i="0">
+                <a:solidFill>
+                  <a:srgbClr val="ED7D31"/>
+                </a:solidFill>
+              </a:rPr>
+              <a:t>[DIAG] CS03: WR=OK    RB=0x48  ---</a:t>
+            </a:r>
+          </a:p>
+        </p:txBody>
+      </p:sp>
+      <p:sp>
+        <p:nvSpPr>
+          <p:cNvPr id="11" name="TextBox 10"/>
+          <p:cNvSpPr txBox="1"/>
+          <p:nvPr/>
+        </p:nvSpPr>
+        <p:spPr>
+          <a:xfrm>
+            <a:off x="384048" y="2157984"/>
+            <a:ext cx="5084064" cy="219456"/>
+          </a:xfrm>
+          <a:prstGeom prst="rect">
+            <a:avLst/>
+          </a:prstGeom>
+          <a:noFill/>
+        </p:spPr>
+        <p:txBody>
+          <a:bodyPr wrap="square">
+            <a:spAutoFit/>
+          </a:bodyPr>
+          <a:lstStyle/>
+          <a:p>
+            <a:pPr algn="l"/>
+            <a:r>
+              <a:rPr sz="1000" b="0" i="0">
+                <a:solidFill>
+                  <a:srgbClr val="C00000"/>
+                </a:solidFill>
+              </a:rPr>
+              <a:t>[DIAG] CS04: WR=TOUT  RB=0xFF  ---</a:t>
+            </a:r>
+          </a:p>
+        </p:txBody>
+      </p:sp>
+      <p:sp>
+        <p:nvSpPr>
+          <p:cNvPr id="12" name="TextBox 11"/>
+          <p:cNvSpPr txBox="1"/>
+          <p:nvPr/>
+        </p:nvSpPr>
+        <p:spPr>
+          <a:xfrm>
+            <a:off x="384048" y="2377440"/>
+            <a:ext cx="5084064" cy="219456"/>
+          </a:xfrm>
+          <a:prstGeom prst="rect">
+            <a:avLst/>
+          </a:prstGeom>
+          <a:noFill/>
+        </p:spPr>
+        <p:txBody>
+          <a:bodyPr wrap="square">
+            <a:spAutoFit/>
+          </a:bodyPr>
+          <a:lstStyle/>
+          <a:p>
+            <a:pPr algn="l"/>
+            <a:r>
+              <a:rPr sz="1000" b="0" i="0">
+                <a:solidFill>
+                  <a:srgbClr val="C00000"/>
+                </a:solidFill>
+              </a:rPr>
+              <a:t>[DIAG] CS05: WR=TOUT  RB=0xFF  ---</a:t>
+            </a:r>
+          </a:p>
+        </p:txBody>
+      </p:sp>
+      <p:sp>
+        <p:nvSpPr>
+          <p:cNvPr id="13" name="TextBox 12"/>
+          <p:cNvSpPr txBox="1"/>
+          <p:nvPr/>
+        </p:nvSpPr>
+        <p:spPr>
+          <a:xfrm>
+            <a:off x="384048" y="2596896"/>
+            <a:ext cx="5084064" cy="219456"/>
+          </a:xfrm>
+          <a:prstGeom prst="rect">
+            <a:avLst/>
+          </a:prstGeom>
+          <a:noFill/>
+        </p:spPr>
+        <p:txBody>
+          <a:bodyPr wrap="square">
+            <a:spAutoFit/>
+          </a:bodyPr>
+          <a:lstStyle/>
+          <a:p>
+            <a:pPr algn="l"/>
+            <a:r>
+              <a:rPr sz="1000" b="0" i="0">
+                <a:solidFill>
+                  <a:srgbClr val="C00000"/>
+                </a:solidFill>
+              </a:rPr>
+              <a:t>  ...  (CS06 ~ CS11 모두 TOUT)</a:t>
+            </a:r>
+          </a:p>
+        </p:txBody>
+      </p:sp>
+      <p:sp>
+        <p:nvSpPr>
+          <p:cNvPr id="14" name="TextBox 13"/>
+          <p:cNvSpPr txBox="1"/>
+          <p:nvPr/>
+        </p:nvSpPr>
+        <p:spPr>
+          <a:xfrm>
+            <a:off x="384048" y="2816352"/>
+            <a:ext cx="5084064" cy="219456"/>
+          </a:xfrm>
+          <a:prstGeom prst="rect">
+            <a:avLst/>
+          </a:prstGeom>
+          <a:noFill/>
+        </p:spPr>
+        <p:txBody>
+          <a:bodyPr wrap="square">
+            <a:spAutoFit/>
+          </a:bodyPr>
+          <a:lstStyle/>
+          <a:p>
+            <a:pPr algn="l"/>
+            <a:r>
+              <a:rPr sz="1000" b="0" i="0">
+                <a:solidFill>
+                  <a:srgbClr val="404040"/>
+                </a:solidFill>
+              </a:rPr>
+              <a:t>[WAIT] Waiting for memory board...</a:t>
+            </a:r>
+          </a:p>
+        </p:txBody>
+      </p:sp>
+      <p:sp>
+        <p:nvSpPr>
+          <p:cNvPr id="15" name="Rectangle 14"/>
+          <p:cNvSpPr/>
+          <p:nvPr/>
+        </p:nvSpPr>
+        <p:spPr>
+          <a:xfrm>
+            <a:off x="5760720" y="1234440"/>
+            <a:ext cx="3200400" cy="2286000"/>
+          </a:xfrm>
+          <a:prstGeom prst="rect">
+            <a:avLst/>
+          </a:prstGeom>
+          <a:solidFill>
+            <a:srgbClr val="F2F2F2"/>
+          </a:solidFill>
+          <a:ln>
+            <a:solidFill>
+              <a:srgbClr val="2E74B5"/>
+            </a:solidFill>
+          </a:ln>
+        </p:spPr>
+        <p:style>
+          <a:lnRef idx="1">
+            <a:schemeClr val="accent1"/>
+          </a:lnRef>
+          <a:fillRef idx="3">
+            <a:schemeClr val="accent1"/>
+          </a:fillRef>
+          <a:effectRef idx="2">
+            <a:schemeClr val="accent1"/>
+          </a:effectRef>
+          <a:fontRef idx="minor">
+            <a:schemeClr val="lt1"/>
+          </a:fontRef>
+        </p:style>
+        <p:txBody>
+          <a:bodyPr rtlCol="0" anchor="ctr"/>
+          <a:lstStyle/>
+          <a:p>
+            <a:pPr algn="ctr"/>
+          </a:p>
+        </p:txBody>
+      </p:sp>
+      <p:sp>
+        <p:nvSpPr>
+          <p:cNvPr id="16" name="TextBox 15"/>
+          <p:cNvSpPr txBox="1"/>
+          <p:nvPr/>
+        </p:nvSpPr>
+        <p:spPr>
+          <a:xfrm>
+            <a:off x="5852159" y="1280160"/>
+            <a:ext cx="3017520" cy="274320"/>
+          </a:xfrm>
+          <a:prstGeom prst="rect">
+            <a:avLst/>
+          </a:prstGeom>
+          <a:noFill/>
+        </p:spPr>
+        <p:txBody>
+          <a:bodyPr wrap="square">
+            <a:spAutoFit/>
+          </a:bodyPr>
+          <a:lstStyle/>
+          <a:p>
+            <a:pPr algn="l"/>
+            <a:r>
+              <a:rPr sz="1200" b="1" i="0">
+                <a:solidFill>
+                  <a:srgbClr val="2E74B5"/>
+                </a:solidFill>
+              </a:rPr>
+              <a:t>현상 요약</a:t>
+            </a:r>
+          </a:p>
+        </p:txBody>
+      </p:sp>
+      <p:sp>
+        <p:nvSpPr>
+          <p:cNvPr id="17" name="TextBox 16"/>
+          <p:cNvSpPr txBox="1"/>
+          <p:nvPr/>
+        </p:nvSpPr>
+        <p:spPr>
+          <a:xfrm>
+            <a:off x="5870448" y="1554480"/>
+            <a:ext cx="2980944" cy="219456"/>
+          </a:xfrm>
+          <a:prstGeom prst="rect">
+            <a:avLst/>
+          </a:prstGeom>
+          <a:noFill/>
+        </p:spPr>
+        <p:txBody>
+          <a:bodyPr wrap="square">
+            <a:spAutoFit/>
+          </a:bodyPr>
+          <a:lstStyle/>
+          <a:p>
+            <a:pPr algn="l"/>
+            <a:r>
+              <a:rPr sz="1000" b="0" i="0">
+                <a:solidFill>
+                  <a:srgbClr val="ED7D31"/>
+                </a:solidFill>
+              </a:rPr>
+              <a:t>① CS00-03: WR=OK 이지만 RB≠0xA5</a:t>
+            </a:r>
+          </a:p>
+        </p:txBody>
+      </p:sp>
+      <p:sp>
+        <p:nvSpPr>
+          <p:cNvPr id="18" name="TextBox 17"/>
+          <p:cNvSpPr txBox="1"/>
+          <p:nvPr/>
+        </p:nvSpPr>
+        <p:spPr>
+          <a:xfrm>
+            <a:off x="5870448" y="1773936"/>
+            <a:ext cx="2980944" cy="219456"/>
+          </a:xfrm>
+          <a:prstGeom prst="rect">
+            <a:avLst/>
+          </a:prstGeom>
+          <a:noFill/>
+        </p:spPr>
+        <p:txBody>
+          <a:bodyPr wrap="square">
+            <a:spAutoFit/>
+          </a:bodyPr>
+          <a:lstStyle/>
+          <a:p>
+            <a:pPr algn="l"/>
+            <a:r>
+              <a:rPr sz="1000" b="0" i="0">
+                <a:solidFill>
+                  <a:srgbClr val="404040"/>
+                </a:solidFill>
+              </a:rPr>
+              <a:t>   → 쓰기 완료 신호 감지, 그러나 데이터 불일치</a:t>
+            </a:r>
+          </a:p>
+        </p:txBody>
+      </p:sp>
+      <p:sp>
+        <p:nvSpPr>
+          <p:cNvPr id="19" name="TextBox 18"/>
+          <p:cNvSpPr txBox="1"/>
+          <p:nvPr/>
+        </p:nvSpPr>
+        <p:spPr>
+          <a:xfrm>
+            <a:off x="5870448" y="1993392"/>
+            <a:ext cx="2980944" cy="219456"/>
+          </a:xfrm>
+          <a:prstGeom prst="rect">
+            <a:avLst/>
+          </a:prstGeom>
+          <a:noFill/>
+        </p:spPr>
+        <p:txBody>
+          <a:bodyPr wrap="square">
+            <a:spAutoFit/>
+          </a:bodyPr>
+          <a:lstStyle/>
+          <a:p>
+            <a:pPr algn="l"/>
+            <a:r>
+              <a:rPr sz="1000" b="0" i="0">
+                <a:solidFill>
+                  <a:srgbClr val="C00000"/>
+                </a:solidFill>
+              </a:rPr>
+              <a:t>② CS04-11: WR=TOUT (타임아웃)</a:t>
+            </a:r>
+          </a:p>
+        </p:txBody>
+      </p:sp>
+      <p:sp>
+        <p:nvSpPr>
+          <p:cNvPr id="20" name="TextBox 19"/>
+          <p:cNvSpPr txBox="1"/>
+          <p:nvPr/>
+        </p:nvSpPr>
+        <p:spPr>
+          <a:xfrm>
+            <a:off x="5870448" y="2212848"/>
+            <a:ext cx="2980944" cy="219456"/>
+          </a:xfrm>
+          <a:prstGeom prst="rect">
+            <a:avLst/>
+          </a:prstGeom>
+          <a:noFill/>
+        </p:spPr>
+        <p:txBody>
+          <a:bodyPr wrap="square">
+            <a:spAutoFit/>
+          </a:bodyPr>
+          <a:lstStyle/>
+          <a:p>
+            <a:pPr algn="l"/>
+            <a:r>
+              <a:rPr sz="1000" b="0" i="0">
+                <a:solidFill>
+                  <a:srgbClr val="C00000"/>
+                </a:solidFill>
+              </a:rPr>
+              <a:t>   → DO 신호가 HIGH로 올라오지 않음</a:t>
+            </a:r>
+          </a:p>
+        </p:txBody>
+      </p:sp>
+      <p:sp>
+        <p:nvSpPr>
+          <p:cNvPr id="21" name="TextBox 20"/>
+          <p:cNvSpPr txBox="1"/>
+          <p:nvPr/>
+        </p:nvSpPr>
+        <p:spPr>
+          <a:xfrm>
+            <a:off x="5870448" y="2432304"/>
+            <a:ext cx="2980944" cy="219456"/>
+          </a:xfrm>
+          <a:prstGeom prst="rect">
+            <a:avLst/>
+          </a:prstGeom>
+          <a:noFill/>
+        </p:spPr>
+        <p:txBody>
+          <a:bodyPr wrap="square">
+            <a:spAutoFit/>
+          </a:bodyPr>
+          <a:lstStyle/>
+          <a:p>
+            <a:pPr algn="l"/>
+            <a:r>
+              <a:rPr sz="1000" b="0" i="0">
+                <a:solidFill>
+                  <a:srgbClr val="C00000"/>
+                </a:solidFill>
+              </a:rPr>
+              <a:t>③ [WAIT] 무한 대기</a:t>
+            </a:r>
+          </a:p>
+        </p:txBody>
+      </p:sp>
+      <p:sp>
+        <p:nvSpPr>
+          <p:cNvPr id="22" name="TextBox 21"/>
+          <p:cNvSpPr txBox="1"/>
+          <p:nvPr/>
+        </p:nvSpPr>
+        <p:spPr>
+          <a:xfrm>
+            <a:off x="5870448" y="2651760"/>
+            <a:ext cx="2980944" cy="219456"/>
+          </a:xfrm>
+          <a:prstGeom prst="rect">
+            <a:avLst/>
+          </a:prstGeom>
+          <a:noFill/>
+        </p:spPr>
+        <p:txBody>
+          <a:bodyPr wrap="square">
+            <a:spAutoFit/>
+          </a:bodyPr>
+          <a:lstStyle/>
+          <a:p>
+            <a:pPr algn="l"/>
+            <a:r>
+              <a:rPr sz="1000" b="0" i="0">
+                <a:solidFill>
+                  <a:srgbClr val="404040"/>
+                </a:solidFill>
+              </a:rPr>
+              <a:t>   → EE_Detect() 전체 실패 → g_board_present=false</a:t>
+            </a:r>
+          </a:p>
+        </p:txBody>
+      </p:sp>
+      <p:sp>
+        <p:nvSpPr>
+          <p:cNvPr id="23" name="TextBox 22"/>
+          <p:cNvSpPr txBox="1"/>
+          <p:nvPr/>
+        </p:nvSpPr>
+        <p:spPr>
+          <a:xfrm>
+            <a:off x="274320" y="3611880"/>
+            <a:ext cx="8595360" cy="292608"/>
+          </a:xfrm>
+          <a:prstGeom prst="rect">
+            <a:avLst/>
+          </a:prstGeom>
+          <a:noFill/>
+        </p:spPr>
+        <p:txBody>
+          <a:bodyPr wrap="square">
+            <a:spAutoFit/>
+          </a:bodyPr>
+          <a:lstStyle/>
+          <a:p>
+            <a:pPr algn="l"/>
+            <a:r>
+              <a:rPr sz="1400" b="1" i="0">
+                <a:solidFill>
+                  <a:srgbClr val="2E74B5"/>
+                </a:solidFill>
+              </a:rPr>
+              <a:t>조사 과정</a:t>
+            </a:r>
+          </a:p>
+        </p:txBody>
+      </p:sp>
+      <p:sp>
+        <p:nvSpPr>
+          <p:cNvPr id="24" name="Rectangle 23"/>
+          <p:cNvSpPr/>
+          <p:nvPr/>
+        </p:nvSpPr>
+        <p:spPr>
+          <a:xfrm>
+            <a:off x="274320" y="3931920"/>
+            <a:ext cx="1920240" cy="329184"/>
+          </a:xfrm>
+          <a:prstGeom prst="rect">
+            <a:avLst/>
+          </a:prstGeom>
+          <a:solidFill>
+            <a:srgbClr val="2E74B5"/>
+          </a:solidFill>
+          <a:ln>
+            <a:noFill/>
+          </a:ln>
+        </p:spPr>
+        <p:style>
+          <a:lnRef idx="1">
+            <a:schemeClr val="accent1"/>
+          </a:lnRef>
+          <a:fillRef idx="3">
+            <a:schemeClr val="accent1"/>
+          </a:fillRef>
+          <a:effectRef idx="2">
+            <a:schemeClr val="accent1"/>
+          </a:effectRef>
+          <a:fontRef idx="minor">
+            <a:schemeClr val="lt1"/>
+          </a:fontRef>
+        </p:style>
+        <p:txBody>
+          <a:bodyPr rtlCol="0" anchor="ctr"/>
+          <a:lstStyle/>
+          <a:p>
+            <a:pPr algn="ctr"/>
+          </a:p>
+        </p:txBody>
+      </p:sp>
+      <p:sp>
+        <p:nvSpPr>
+          <p:cNvPr id="25" name="TextBox 24"/>
+          <p:cNvSpPr txBox="1"/>
+          <p:nvPr/>
+        </p:nvSpPr>
+        <p:spPr>
+          <a:xfrm>
+            <a:off x="320040" y="3959352"/>
+            <a:ext cx="1828800" cy="274320"/>
+          </a:xfrm>
+          <a:prstGeom prst="rect">
+            <a:avLst/>
+          </a:prstGeom>
+          <a:noFill/>
+        </p:spPr>
+        <p:txBody>
+          <a:bodyPr wrap="square">
+            <a:spAutoFit/>
+          </a:bodyPr>
+          <a:lstStyle/>
+          <a:p>
+            <a:pPr algn="l"/>
+            <a:r>
+              <a:rPr sz="1000" b="1" i="0">
+                <a:solidFill>
+                  <a:srgbClr val="FFFFFF"/>
+                </a:solidFill>
+              </a:rPr>
+              <a:t>하드웨어 측정</a:t>
+            </a:r>
+          </a:p>
+        </p:txBody>
+      </p:sp>
+      <p:sp>
+        <p:nvSpPr>
+          <p:cNvPr id="26" name="TextBox 25"/>
+          <p:cNvSpPr txBox="1"/>
+          <p:nvPr/>
+        </p:nvSpPr>
+        <p:spPr>
+          <a:xfrm>
+            <a:off x="2286000" y="3968496"/>
+            <a:ext cx="6492240" cy="274320"/>
+          </a:xfrm>
+          <a:prstGeom prst="rect">
+            <a:avLst/>
+          </a:prstGeom>
+          <a:noFill/>
+        </p:spPr>
+        <p:txBody>
+          <a:bodyPr wrap="square">
+            <a:spAutoFit/>
+          </a:bodyPr>
+          <a:lstStyle/>
+          <a:p>
+            <a:pPr algn="l"/>
+            <a:r>
+              <a:rPr sz="1000" b="0" i="0">
+                <a:solidFill>
+                  <a:srgbClr val="404040"/>
+                </a:solidFill>
+              </a:rPr>
+              <a:t>ORG핀 측정(오측정→GND 재확인), CS4 스코프, DI/DO 측정</a:t>
+            </a:r>
+          </a:p>
+        </p:txBody>
+      </p:sp>
+      <p:sp>
+        <p:nvSpPr>
+          <p:cNvPr id="27" name="Rectangle 26"/>
+          <p:cNvSpPr/>
+          <p:nvPr/>
+        </p:nvSpPr>
+        <p:spPr>
+          <a:xfrm>
+            <a:off x="274320" y="4315968"/>
+            <a:ext cx="1920240" cy="329184"/>
+          </a:xfrm>
+          <a:prstGeom prst="rect">
+            <a:avLst/>
+          </a:prstGeom>
+          <a:solidFill>
+            <a:srgbClr val="2E74B5"/>
+          </a:solidFill>
+          <a:ln>
+            <a:noFill/>
+          </a:ln>
+        </p:spPr>
+        <p:style>
+          <a:lnRef idx="1">
+            <a:schemeClr val="accent1"/>
+          </a:lnRef>
+          <a:fillRef idx="3">
+            <a:schemeClr val="accent1"/>
+          </a:fillRef>
+          <a:effectRef idx="2">
+            <a:schemeClr val="accent1"/>
+          </a:effectRef>
+          <a:fontRef idx="minor">
+            <a:schemeClr val="lt1"/>
+          </a:fontRef>
+        </p:style>
+        <p:txBody>
+          <a:bodyPr rtlCol="0" anchor="ctr"/>
+          <a:lstStyle/>
+          <a:p>
+            <a:pPr algn="ctr"/>
+          </a:p>
+        </p:txBody>
+      </p:sp>
+      <p:sp>
+        <p:nvSpPr>
+          <p:cNvPr id="28" name="TextBox 27"/>
+          <p:cNvSpPr txBox="1"/>
+          <p:nvPr/>
+        </p:nvSpPr>
+        <p:spPr>
+          <a:xfrm>
+            <a:off x="320040" y="4343400"/>
+            <a:ext cx="1828800" cy="274320"/>
+          </a:xfrm>
+          <a:prstGeom prst="rect">
+            <a:avLst/>
+          </a:prstGeom>
+          <a:noFill/>
+        </p:spPr>
+        <p:txBody>
+          <a:bodyPr wrap="square">
+            <a:spAutoFit/>
+          </a:bodyPr>
+          <a:lstStyle/>
+          <a:p>
+            <a:pPr algn="l"/>
+            <a:r>
+              <a:rPr sz="1000" b="1" i="0">
+                <a:solidFill>
+                  <a:srgbClr val="FFFFFF"/>
+                </a:solidFill>
+              </a:rPr>
+              <a:t>MUX 배선 확인</a:t>
+            </a:r>
+          </a:p>
+        </p:txBody>
+      </p:sp>
+      <p:sp>
+        <p:nvSpPr>
+          <p:cNvPr id="29" name="TextBox 28"/>
+          <p:cNvSpPr txBox="1"/>
+          <p:nvPr/>
+        </p:nvSpPr>
+        <p:spPr>
+          <a:xfrm>
+            <a:off x="2286000" y="4352544"/>
+            <a:ext cx="6492240" cy="274320"/>
+          </a:xfrm>
+          <a:prstGeom prst="rect">
+            <a:avLst/>
+          </a:prstGeom>
+          <a:noFill/>
+        </p:spPr>
+        <p:txBody>
+          <a:bodyPr wrap="square">
+            <a:spAutoFit/>
+          </a:bodyPr>
+          <a:lstStyle/>
+          <a:p>
+            <a:pPr algn="l"/>
+            <a:r>
+              <a:rPr sz="1000" b="0" i="0">
+                <a:solidFill>
+                  <a:srgbClr val="404040"/>
+                </a:solidFill>
+              </a:rPr>
+              <a:t>멀티미터 통전: CD4067 X4~X11 → U23~U30 DO 핀 연결 확인</a:t>
+            </a:r>
+          </a:p>
+        </p:txBody>
+      </p:sp>
+      <p:sp>
+        <p:nvSpPr>
+          <p:cNvPr id="30" name="Rectangle 29"/>
+          <p:cNvSpPr/>
+          <p:nvPr/>
+        </p:nvSpPr>
+        <p:spPr>
+          <a:xfrm>
+            <a:off x="274320" y="4700016"/>
+            <a:ext cx="1920240" cy="329184"/>
+          </a:xfrm>
+          <a:prstGeom prst="rect">
+            <a:avLst/>
+          </a:prstGeom>
+          <a:solidFill>
+            <a:srgbClr val="2E74B5"/>
+          </a:solidFill>
+          <a:ln>
+            <a:noFill/>
+          </a:ln>
+        </p:spPr>
+        <p:style>
+          <a:lnRef idx="1">
+            <a:schemeClr val="accent1"/>
+          </a:lnRef>
+          <a:fillRef idx="3">
+            <a:schemeClr val="accent1"/>
+          </a:fillRef>
+          <a:effectRef idx="2">
+            <a:schemeClr val="accent1"/>
+          </a:effectRef>
+          <a:fontRef idx="minor">
+            <a:schemeClr val="lt1"/>
+          </a:fontRef>
+        </p:style>
+        <p:txBody>
+          <a:bodyPr rtlCol="0" anchor="ctr"/>
+          <a:lstStyle/>
+          <a:p>
+            <a:pPr algn="ctr"/>
+          </a:p>
+        </p:txBody>
+      </p:sp>
+      <p:sp>
+        <p:nvSpPr>
+          <p:cNvPr id="31" name="TextBox 30"/>
+          <p:cNvSpPr txBox="1"/>
+          <p:nvPr/>
+        </p:nvSpPr>
+        <p:spPr>
+          <a:xfrm>
+            <a:off x="320040" y="4727448"/>
+            <a:ext cx="1828800" cy="274320"/>
+          </a:xfrm>
+          <a:prstGeom prst="rect">
+            <a:avLst/>
+          </a:prstGeom>
+          <a:noFill/>
+        </p:spPr>
+        <p:txBody>
+          <a:bodyPr wrap="square">
+            <a:spAutoFit/>
+          </a:bodyPr>
+          <a:lstStyle/>
+          <a:p>
+            <a:pPr algn="l"/>
+            <a:r>
+              <a:rPr sz="1000" b="1" i="0">
+                <a:solidFill>
+                  <a:srgbClr val="FFFFFF"/>
+                </a:solidFill>
+              </a:rPr>
+              <a:t>GPIO 진단</a:t>
+            </a:r>
+          </a:p>
+        </p:txBody>
+      </p:sp>
+      <p:sp>
+        <p:nvSpPr>
+          <p:cNvPr id="32" name="TextBox 31"/>
+          <p:cNvSpPr txBox="1"/>
+          <p:nvPr/>
+        </p:nvSpPr>
+        <p:spPr>
+          <a:xfrm>
+            <a:off x="2286000" y="4736592"/>
+            <a:ext cx="6492240" cy="274320"/>
+          </a:xfrm>
+          <a:prstGeom prst="rect">
+            <a:avLst/>
+          </a:prstGeom>
+          <a:noFill/>
+        </p:spPr>
+        <p:txBody>
+          <a:bodyPr wrap="square">
+            <a:spAutoFit/>
+          </a:bodyPr>
+          <a:lstStyle/>
+          <a:p>
+            <a:pPr algn="l"/>
+            <a:r>
+              <a:rPr sz="1000" b="0" i="0">
+                <a:solidFill>
+                  <a:srgbClr val="404040"/>
+                </a:solidFill>
+              </a:rPr>
+              <a:t>PB4(CS4) IDR 테스트 추가 → IDR=0 GPIO 정상</a:t>
+            </a:r>
+          </a:p>
+        </p:txBody>
+      </p:sp>
+      <p:sp>
+        <p:nvSpPr>
+          <p:cNvPr id="33" name="Rectangle 32"/>
+          <p:cNvSpPr/>
+          <p:nvPr/>
+        </p:nvSpPr>
+        <p:spPr>
+          <a:xfrm>
+            <a:off x="274320" y="5084064"/>
+            <a:ext cx="1920240" cy="329184"/>
+          </a:xfrm>
+          <a:prstGeom prst="rect">
+            <a:avLst/>
+          </a:prstGeom>
+          <a:solidFill>
+            <a:srgbClr val="2E74B5"/>
+          </a:solidFill>
+          <a:ln>
+            <a:noFill/>
+          </a:ln>
+        </p:spPr>
+        <p:style>
+          <a:lnRef idx="1">
+            <a:schemeClr val="accent1"/>
+          </a:lnRef>
+          <a:fillRef idx="3">
+            <a:schemeClr val="accent1"/>
+          </a:fillRef>
+          <a:effectRef idx="2">
+            <a:schemeClr val="accent1"/>
+          </a:effectRef>
+          <a:fontRef idx="minor">
+            <a:schemeClr val="lt1"/>
+          </a:fontRef>
+        </p:style>
+        <p:txBody>
+          <a:bodyPr rtlCol="0" anchor="ctr"/>
+          <a:lstStyle/>
+          <a:p>
+            <a:pPr algn="ctr"/>
+          </a:p>
+        </p:txBody>
+      </p:sp>
+      <p:sp>
+        <p:nvSpPr>
+          <p:cNvPr id="34" name="TextBox 33"/>
+          <p:cNvSpPr txBox="1"/>
+          <p:nvPr/>
+        </p:nvSpPr>
+        <p:spPr>
+          <a:xfrm>
+            <a:off x="320040" y="5111496"/>
+            <a:ext cx="1828800" cy="274320"/>
+          </a:xfrm>
+          <a:prstGeom prst="rect">
+            <a:avLst/>
+          </a:prstGeom>
+          <a:noFill/>
+        </p:spPr>
+        <p:txBody>
+          <a:bodyPr wrap="square">
+            <a:spAutoFit/>
+          </a:bodyPr>
+          <a:lstStyle/>
+          <a:p>
+            <a:pPr algn="l"/>
+            <a:r>
+              <a:rPr sz="1000" b="1" i="0">
+                <a:solidFill>
+                  <a:srgbClr val="FFFFFF"/>
+                </a:solidFill>
+              </a:rPr>
+              <a:t>U24 직접 측정</a:t>
+            </a:r>
+          </a:p>
+        </p:txBody>
+      </p:sp>
+      <p:sp>
+        <p:nvSpPr>
+          <p:cNvPr id="35" name="TextBox 34"/>
+          <p:cNvSpPr txBox="1"/>
+          <p:nvPr/>
+        </p:nvSpPr>
+        <p:spPr>
+          <a:xfrm>
+            <a:off x="2286000" y="5120640"/>
+            <a:ext cx="6492240" cy="274320"/>
+          </a:xfrm>
+          <a:prstGeom prst="rect">
+            <a:avLst/>
+          </a:prstGeom>
+          <a:noFill/>
+        </p:spPr>
+        <p:txBody>
+          <a:bodyPr wrap="square">
+            <a:spAutoFit/>
+          </a:bodyPr>
+          <a:lstStyle/>
+          <a:p>
+            <a:pPr algn="l"/>
+            <a:r>
+              <a:rPr sz="1000" b="0" i="0">
+                <a:solidFill>
+                  <a:srgbClr val="404040"/>
+                </a:solidFill>
+              </a:rPr>
+              <a:t>CS 70ms 펄스 ✓  VCC 3.3V ✓  DO 항상 LOW ✗</a:t>
+            </a:r>
+          </a:p>
+        </p:txBody>
+      </p:sp>
+    </p:spTree>
+  </p:cSld>
+  <p:clrMapOvr>
+    <a:masterClrMapping/>
+  </p:clrMapOvr>
+</p:sld>
+</file>
+
+<file path=ppt/slides/slide16.xml><?xml version="1.0" encoding="utf-8"?>
+<p:sld xmlns:a="http://schemas.openxmlformats.org/drawingml/2006/main" xmlns:p="http://schemas.openxmlformats.org/presentationml/2006/main" xmlns:r="http://schemas.openxmlformats.org/officeDocument/2006/relationships">
+  <p:cSld>
+    <p:spTree>
+      <p:nvGrpSpPr>
+        <p:cNvPr id="1" name=""/>
+        <p:cNvGrpSpPr/>
+        <p:nvPr/>
+      </p:nvGrpSpPr>
+      <p:grpSpPr/>
+      <p:sp>
+        <p:nvSpPr>
+          <p:cNvPr id="2" name="Rectangle 1"/>
+          <p:cNvSpPr/>
+          <p:nvPr/>
+        </p:nvSpPr>
+        <p:spPr>
+          <a:xfrm>
+            <a:off x="0" y="0"/>
+            <a:ext cx="9144000" cy="640080"/>
+          </a:xfrm>
+          <a:prstGeom prst="rect">
+            <a:avLst/>
+          </a:prstGeom>
+          <a:solidFill>
+            <a:srgbClr val="1F497D"/>
+          </a:solidFill>
+          <a:ln>
+            <a:noFill/>
+          </a:ln>
+        </p:spPr>
+        <p:style>
+          <a:lnRef idx="1">
+            <a:schemeClr val="accent1"/>
+          </a:lnRef>
+          <a:fillRef idx="3">
+            <a:schemeClr val="accent1"/>
+          </a:fillRef>
+          <a:effectRef idx="2">
+            <a:schemeClr val="accent1"/>
+          </a:effectRef>
+          <a:fontRef idx="minor">
+            <a:schemeClr val="lt1"/>
+          </a:fontRef>
+        </p:style>
+        <p:txBody>
+          <a:bodyPr rtlCol="0" anchor="ctr"/>
+          <a:lstStyle/>
+          <a:p>
+            <a:pPr algn="ctr"/>
+          </a:p>
+        </p:txBody>
+      </p:sp>
+      <p:sp>
+        <p:nvSpPr>
+          <p:cNvPr id="3" name="TextBox 2"/>
+          <p:cNvSpPr txBox="1"/>
+          <p:nvPr/>
+        </p:nvSpPr>
+        <p:spPr>
+          <a:xfrm>
+            <a:off x="137160" y="45720"/>
+            <a:ext cx="7772400" cy="548640"/>
+          </a:xfrm>
+          <a:prstGeom prst="rect">
+            <a:avLst/>
+          </a:prstGeom>
+          <a:noFill/>
+        </p:spPr>
+        <p:txBody>
+          <a:bodyPr wrap="square">
+            <a:spAutoFit/>
+          </a:bodyPr>
+          <a:lstStyle/>
+          <a:p>
+            <a:pPr algn="l"/>
+            <a:r>
+              <a:rPr sz="2000" b="1" i="0">
+                <a:solidFill>
+                  <a:srgbClr val="FFFFFF"/>
+                </a:solidFill>
+              </a:rPr>
+              <a:t>하드웨어 측정 결과 및 원인 분석</a:t>
+            </a:r>
+          </a:p>
+        </p:txBody>
+      </p:sp>
+      <p:sp>
+        <p:nvSpPr>
+          <p:cNvPr id="4" name="TextBox 3"/>
+          <p:cNvSpPr txBox="1"/>
+          <p:nvPr/>
+        </p:nvSpPr>
+        <p:spPr>
+          <a:xfrm>
+            <a:off x="137160" y="658368"/>
+            <a:ext cx="8686800" cy="320040"/>
+          </a:xfrm>
+          <a:prstGeom prst="rect">
+            <a:avLst/>
+          </a:prstGeom>
+          <a:noFill/>
+        </p:spPr>
+        <p:txBody>
+          <a:bodyPr wrap="square">
+            <a:spAutoFit/>
+          </a:bodyPr>
+          <a:lstStyle/>
+          <a:p>
+            <a:pPr algn="l"/>
+            <a:r>
+              <a:rPr sz="1200" b="0" i="1">
+                <a:solidFill>
+                  <a:srgbClr val="2E74B5"/>
+                </a:solidFill>
+              </a:rPr>
+              <a:t>스코프 / 멀티미터 / UART 진단</a:t>
+            </a:r>
+          </a:p>
+        </p:txBody>
+      </p:sp>
+      <p:sp>
+        <p:nvSpPr>
+          <p:cNvPr id="5" name="TextBox 4"/>
+          <p:cNvSpPr txBox="1"/>
+          <p:nvPr/>
+        </p:nvSpPr>
+        <p:spPr>
+          <a:xfrm>
+            <a:off x="274320" y="822960"/>
+            <a:ext cx="5486400" cy="292608"/>
+          </a:xfrm>
+          <a:prstGeom prst="rect">
+            <a:avLst/>
+          </a:prstGeom>
+          <a:noFill/>
+        </p:spPr>
+        <p:txBody>
+          <a:bodyPr wrap="square">
+            <a:spAutoFit/>
+          </a:bodyPr>
+          <a:lstStyle/>
+          <a:p>
+            <a:pPr algn="l"/>
+            <a:r>
+              <a:rPr sz="1300" b="1" i="0">
+                <a:solidFill>
+                  <a:srgbClr val="2E74B5"/>
+                </a:solidFill>
+              </a:rPr>
+              <a:t>핀/신호 측정 결과 (메모리 보드 연결 상태)</a:t>
+            </a:r>
+          </a:p>
+        </p:txBody>
+      </p:sp>
+      <p:sp>
+        <p:nvSpPr>
+          <p:cNvPr id="6" name="Rectangle 5"/>
+          <p:cNvSpPr/>
+          <p:nvPr/>
+        </p:nvSpPr>
+        <p:spPr>
+          <a:xfrm>
+            <a:off x="274320" y="1143000"/>
+            <a:ext cx="1993392" cy="274320"/>
+          </a:xfrm>
+          <a:prstGeom prst="rect">
+            <a:avLst/>
+          </a:prstGeom>
+          <a:solidFill>
+            <a:srgbClr val="1F497D"/>
+          </a:solidFill>
+          <a:ln>
+            <a:noFill/>
+          </a:ln>
+        </p:spPr>
+        <p:style>
+          <a:lnRef idx="1">
+            <a:schemeClr val="accent1"/>
+          </a:lnRef>
+          <a:fillRef idx="3">
+            <a:schemeClr val="accent1"/>
+          </a:fillRef>
+          <a:effectRef idx="2">
+            <a:schemeClr val="accent1"/>
+          </a:effectRef>
+          <a:fontRef idx="minor">
+            <a:schemeClr val="lt1"/>
+          </a:fontRef>
+        </p:style>
+        <p:txBody>
+          <a:bodyPr rtlCol="0" anchor="ctr"/>
+          <a:lstStyle/>
+          <a:p>
+            <a:pPr algn="ctr"/>
+          </a:p>
+        </p:txBody>
+      </p:sp>
+      <p:sp>
+        <p:nvSpPr>
+          <p:cNvPr id="7" name="TextBox 6"/>
+          <p:cNvSpPr txBox="1"/>
+          <p:nvPr/>
+        </p:nvSpPr>
+        <p:spPr>
+          <a:xfrm>
+            <a:off x="320040" y="1161288"/>
+            <a:ext cx="1920240" cy="237744"/>
+          </a:xfrm>
+          <a:prstGeom prst="rect">
+            <a:avLst/>
+          </a:prstGeom>
+          <a:noFill/>
+        </p:spPr>
+        <p:txBody>
+          <a:bodyPr wrap="square">
+            <a:spAutoFit/>
+          </a:bodyPr>
+          <a:lstStyle/>
+          <a:p>
+            <a:pPr algn="l"/>
+            <a:r>
+              <a:rPr sz="1000" b="1" i="0">
+                <a:solidFill>
+                  <a:srgbClr val="FFFFFF"/>
+                </a:solidFill>
+              </a:rPr>
+              <a:t>측정 대상</a:t>
+            </a:r>
+          </a:p>
+        </p:txBody>
+      </p:sp>
+      <p:sp>
+        <p:nvSpPr>
+          <p:cNvPr id="8" name="Rectangle 7"/>
+          <p:cNvSpPr/>
+          <p:nvPr/>
+        </p:nvSpPr>
+        <p:spPr>
+          <a:xfrm>
+            <a:off x="2286000" y="1143000"/>
+            <a:ext cx="1627632" cy="274320"/>
+          </a:xfrm>
+          <a:prstGeom prst="rect">
+            <a:avLst/>
+          </a:prstGeom>
+          <a:solidFill>
+            <a:srgbClr val="1F497D"/>
+          </a:solidFill>
+          <a:ln>
+            <a:noFill/>
+          </a:ln>
+        </p:spPr>
+        <p:style>
+          <a:lnRef idx="1">
+            <a:schemeClr val="accent1"/>
+          </a:lnRef>
+          <a:fillRef idx="3">
+            <a:schemeClr val="accent1"/>
+          </a:fillRef>
+          <a:effectRef idx="2">
+            <a:schemeClr val="accent1"/>
+          </a:effectRef>
+          <a:fontRef idx="minor">
+            <a:schemeClr val="lt1"/>
+          </a:fontRef>
+        </p:style>
+        <p:txBody>
+          <a:bodyPr rtlCol="0" anchor="ctr"/>
+          <a:lstStyle/>
+          <a:p>
+            <a:pPr algn="ctr"/>
+          </a:p>
+        </p:txBody>
+      </p:sp>
+      <p:sp>
+        <p:nvSpPr>
+          <p:cNvPr id="9" name="TextBox 8"/>
+          <p:cNvSpPr txBox="1"/>
+          <p:nvPr/>
+        </p:nvSpPr>
+        <p:spPr>
+          <a:xfrm>
+            <a:off x="2331720" y="1161288"/>
+            <a:ext cx="1554480" cy="237744"/>
+          </a:xfrm>
+          <a:prstGeom prst="rect">
+            <a:avLst/>
+          </a:prstGeom>
+          <a:noFill/>
+        </p:spPr>
+        <p:txBody>
+          <a:bodyPr wrap="square">
+            <a:spAutoFit/>
+          </a:bodyPr>
+          <a:lstStyle/>
+          <a:p>
+            <a:pPr algn="l"/>
+            <a:r>
+              <a:rPr sz="1000" b="1" i="0">
+                <a:solidFill>
+                  <a:srgbClr val="FFFFFF"/>
+                </a:solidFill>
+              </a:rPr>
+              <a:t>측정값</a:t>
+            </a:r>
+          </a:p>
+        </p:txBody>
+      </p:sp>
+      <p:sp>
+        <p:nvSpPr>
+          <p:cNvPr id="10" name="Rectangle 9"/>
+          <p:cNvSpPr/>
+          <p:nvPr/>
+        </p:nvSpPr>
+        <p:spPr>
+          <a:xfrm>
+            <a:off x="3931920" y="1143000"/>
+            <a:ext cx="2176272" cy="274320"/>
+          </a:xfrm>
+          <a:prstGeom prst="rect">
+            <a:avLst/>
+          </a:prstGeom>
+          <a:solidFill>
+            <a:srgbClr val="1F497D"/>
+          </a:solidFill>
+          <a:ln>
+            <a:noFill/>
+          </a:ln>
+        </p:spPr>
+        <p:style>
+          <a:lnRef idx="1">
+            <a:schemeClr val="accent1"/>
+          </a:lnRef>
+          <a:fillRef idx="3">
+            <a:schemeClr val="accent1"/>
+          </a:fillRef>
+          <a:effectRef idx="2">
+            <a:schemeClr val="accent1"/>
+          </a:effectRef>
+          <a:fontRef idx="minor">
+            <a:schemeClr val="lt1"/>
+          </a:fontRef>
+        </p:style>
+        <p:txBody>
+          <a:bodyPr rtlCol="0" anchor="ctr"/>
+          <a:lstStyle/>
+          <a:p>
+            <a:pPr algn="ctr"/>
+          </a:p>
+        </p:txBody>
+      </p:sp>
+      <p:sp>
+        <p:nvSpPr>
+          <p:cNvPr id="11" name="TextBox 10"/>
+          <p:cNvSpPr txBox="1"/>
+          <p:nvPr/>
+        </p:nvSpPr>
+        <p:spPr>
+          <a:xfrm>
+            <a:off x="3977639" y="1161288"/>
+            <a:ext cx="2103120" cy="237744"/>
+          </a:xfrm>
+          <a:prstGeom prst="rect">
+            <a:avLst/>
+          </a:prstGeom>
+          <a:noFill/>
+        </p:spPr>
+        <p:txBody>
+          <a:bodyPr wrap="square">
+            <a:spAutoFit/>
+          </a:bodyPr>
+          <a:lstStyle/>
+          <a:p>
+            <a:pPr algn="l"/>
+            <a:r>
+              <a:rPr sz="1000" b="1" i="0">
+                <a:solidFill>
+                  <a:srgbClr val="FFFFFF"/>
+                </a:solidFill>
+              </a:rPr>
+              <a:t>의미</a:t>
+            </a:r>
+          </a:p>
+        </p:txBody>
+      </p:sp>
+      <p:sp>
+        <p:nvSpPr>
+          <p:cNvPr id="12" name="Rectangle 11"/>
+          <p:cNvSpPr/>
+          <p:nvPr/>
+        </p:nvSpPr>
+        <p:spPr>
+          <a:xfrm>
+            <a:off x="6126479" y="1143000"/>
+            <a:ext cx="530352" cy="274320"/>
+          </a:xfrm>
+          <a:prstGeom prst="rect">
+            <a:avLst/>
+          </a:prstGeom>
+          <a:solidFill>
+            <a:srgbClr val="1F497D"/>
+          </a:solidFill>
+          <a:ln>
+            <a:noFill/>
+          </a:ln>
+        </p:spPr>
+        <p:style>
+          <a:lnRef idx="1">
+            <a:schemeClr val="accent1"/>
+          </a:lnRef>
+          <a:fillRef idx="3">
+            <a:schemeClr val="accent1"/>
+          </a:fillRef>
+          <a:effectRef idx="2">
+            <a:schemeClr val="accent1"/>
+          </a:effectRef>
+          <a:fontRef idx="minor">
+            <a:schemeClr val="lt1"/>
+          </a:fontRef>
+        </p:style>
+        <p:txBody>
+          <a:bodyPr rtlCol="0" anchor="ctr"/>
+          <a:lstStyle/>
+          <a:p>
+            <a:pPr algn="ctr"/>
+          </a:p>
+        </p:txBody>
+      </p:sp>
+      <p:sp>
+        <p:nvSpPr>
+          <p:cNvPr id="13" name="TextBox 12"/>
+          <p:cNvSpPr txBox="1"/>
+          <p:nvPr/>
+        </p:nvSpPr>
+        <p:spPr>
+          <a:xfrm>
+            <a:off x="6172199" y="1161288"/>
+            <a:ext cx="457200" cy="237744"/>
+          </a:xfrm>
+          <a:prstGeom prst="rect">
+            <a:avLst/>
+          </a:prstGeom>
+          <a:noFill/>
+        </p:spPr>
+        <p:txBody>
+          <a:bodyPr wrap="square">
+            <a:spAutoFit/>
+          </a:bodyPr>
+          <a:lstStyle/>
+          <a:p>
+            <a:pPr algn="l"/>
+            <a:r>
+              <a:rPr sz="1000" b="1" i="0">
+                <a:solidFill>
+                  <a:srgbClr val="FFFFFF"/>
+                </a:solidFill>
+              </a:rPr>
+              <a:t>상태</a:t>
+            </a:r>
+          </a:p>
+        </p:txBody>
+      </p:sp>
+      <p:sp>
+        <p:nvSpPr>
+          <p:cNvPr id="14" name="Rectangle 13"/>
+          <p:cNvSpPr/>
+          <p:nvPr/>
+        </p:nvSpPr>
+        <p:spPr>
+          <a:xfrm>
+            <a:off x="274320" y="1417320"/>
+            <a:ext cx="1993392" cy="292608"/>
+          </a:xfrm>
+          <a:prstGeom prst="rect">
+            <a:avLst/>
+          </a:prstGeom>
+          <a:solidFill>
+            <a:srgbClr val="F8F8F8"/>
+          </a:solidFill>
+          <a:ln>
+            <a:solidFill>
+              <a:srgbClr val="D0D0D0"/>
+            </a:solidFill>
+          </a:ln>
+        </p:spPr>
+        <p:style>
+          <a:lnRef idx="1">
+            <a:schemeClr val="accent1"/>
+          </a:lnRef>
+          <a:fillRef idx="3">
+            <a:schemeClr val="accent1"/>
+          </a:fillRef>
+          <a:effectRef idx="2">
+            <a:schemeClr val="accent1"/>
+          </a:effectRef>
+          <a:fontRef idx="minor">
+            <a:schemeClr val="lt1"/>
+          </a:fontRef>
+        </p:style>
+        <p:txBody>
+          <a:bodyPr rtlCol="0" anchor="ctr"/>
+          <a:lstStyle/>
+          <a:p>
+            <a:pPr algn="ctr"/>
+          </a:p>
+        </p:txBody>
+      </p:sp>
+      <p:sp>
+        <p:nvSpPr>
+          <p:cNvPr id="15" name="TextBox 14"/>
+          <p:cNvSpPr txBox="1"/>
+          <p:nvPr/>
+        </p:nvSpPr>
+        <p:spPr>
+          <a:xfrm>
+            <a:off x="329184" y="1444752"/>
+            <a:ext cx="1901952" cy="237744"/>
+          </a:xfrm>
+          <a:prstGeom prst="rect">
+            <a:avLst/>
+          </a:prstGeom>
+          <a:noFill/>
+        </p:spPr>
+        <p:txBody>
+          <a:bodyPr wrap="square">
+            <a:spAutoFit/>
+          </a:bodyPr>
+          <a:lstStyle/>
+          <a:p>
+            <a:pPr algn="l"/>
+            <a:r>
+              <a:rPr sz="900" b="0" i="0">
+                <a:solidFill>
+                  <a:srgbClr val="404040"/>
+                </a:solidFill>
+              </a:rPr>
+              <a:t>ORG 핀 (모든 칩)</a:t>
+            </a:r>
+          </a:p>
+        </p:txBody>
+      </p:sp>
+      <p:sp>
+        <p:nvSpPr>
+          <p:cNvPr id="16" name="Rectangle 15"/>
+          <p:cNvSpPr/>
+          <p:nvPr/>
+        </p:nvSpPr>
+        <p:spPr>
+          <a:xfrm>
+            <a:off x="2286000" y="1417320"/>
+            <a:ext cx="1627632" cy="292608"/>
+          </a:xfrm>
+          <a:prstGeom prst="rect">
+            <a:avLst/>
+          </a:prstGeom>
+          <a:solidFill>
+            <a:srgbClr val="F8F8F8"/>
+          </a:solidFill>
+          <a:ln>
+            <a:solidFill>
+              <a:srgbClr val="D0D0D0"/>
+            </a:solidFill>
+          </a:ln>
+        </p:spPr>
+        <p:style>
+          <a:lnRef idx="1">
+            <a:schemeClr val="accent1"/>
+          </a:lnRef>
+          <a:fillRef idx="3">
+            <a:schemeClr val="accent1"/>
+          </a:fillRef>
+          <a:effectRef idx="2">
+            <a:schemeClr val="accent1"/>
+          </a:effectRef>
+          <a:fontRef idx="minor">
+            <a:schemeClr val="lt1"/>
+          </a:fontRef>
+        </p:style>
+        <p:txBody>
+          <a:bodyPr rtlCol="0" anchor="ctr"/>
+          <a:lstStyle/>
+          <a:p>
+            <a:pPr algn="ctr"/>
+          </a:p>
+        </p:txBody>
+      </p:sp>
+      <p:sp>
+        <p:nvSpPr>
+          <p:cNvPr id="17" name="TextBox 16"/>
+          <p:cNvSpPr txBox="1"/>
+          <p:nvPr/>
+        </p:nvSpPr>
+        <p:spPr>
+          <a:xfrm>
+            <a:off x="2340864" y="1444752"/>
+            <a:ext cx="1536192" cy="237744"/>
+          </a:xfrm>
+          <a:prstGeom prst="rect">
+            <a:avLst/>
+          </a:prstGeom>
+          <a:noFill/>
+        </p:spPr>
+        <p:txBody>
+          <a:bodyPr wrap="square">
+            <a:spAutoFit/>
+          </a:bodyPr>
+          <a:lstStyle/>
+          <a:p>
+            <a:pPr algn="l"/>
+            <a:r>
+              <a:rPr sz="900" b="0" i="0">
+                <a:solidFill>
+                  <a:srgbClr val="378638"/>
+                </a:solidFill>
+              </a:rPr>
+              <a:t>GND (0V) 고정</a:t>
+            </a:r>
+          </a:p>
+        </p:txBody>
+      </p:sp>
+      <p:sp>
+        <p:nvSpPr>
+          <p:cNvPr id="18" name="Rectangle 17"/>
+          <p:cNvSpPr/>
+          <p:nvPr/>
+        </p:nvSpPr>
+        <p:spPr>
+          <a:xfrm>
+            <a:off x="3931920" y="1417320"/>
+            <a:ext cx="2176272" cy="292608"/>
+          </a:xfrm>
+          <a:prstGeom prst="rect">
+            <a:avLst/>
+          </a:prstGeom>
+          <a:solidFill>
+            <a:srgbClr val="F8F8F8"/>
+          </a:solidFill>
+          <a:ln>
+            <a:solidFill>
+              <a:srgbClr val="D0D0D0"/>
+            </a:solidFill>
+          </a:ln>
+        </p:spPr>
+        <p:style>
+          <a:lnRef idx="1">
+            <a:schemeClr val="accent1"/>
+          </a:lnRef>
+          <a:fillRef idx="3">
+            <a:schemeClr val="accent1"/>
+          </a:fillRef>
+          <a:effectRef idx="2">
+            <a:schemeClr val="accent1"/>
+          </a:effectRef>
+          <a:fontRef idx="minor">
+            <a:schemeClr val="lt1"/>
+          </a:fontRef>
+        </p:style>
+        <p:txBody>
+          <a:bodyPr rtlCol="0" anchor="ctr"/>
+          <a:lstStyle/>
+          <a:p>
+            <a:pPr algn="ctr"/>
+          </a:p>
+        </p:txBody>
+      </p:sp>
+      <p:sp>
+        <p:nvSpPr>
+          <p:cNvPr id="19" name="TextBox 18"/>
+          <p:cNvSpPr txBox="1"/>
+          <p:nvPr/>
+        </p:nvSpPr>
+        <p:spPr>
+          <a:xfrm>
+            <a:off x="3986783" y="1444752"/>
+            <a:ext cx="2084831" cy="237744"/>
+          </a:xfrm>
+          <a:prstGeom prst="rect">
+            <a:avLst/>
+          </a:prstGeom>
+          <a:noFill/>
+        </p:spPr>
+        <p:txBody>
+          <a:bodyPr wrap="square">
+            <a:spAutoFit/>
+          </a:bodyPr>
+          <a:lstStyle/>
+          <a:p>
+            <a:pPr algn="l"/>
+            <a:r>
+              <a:rPr sz="900" b="0" i="0">
+                <a:solidFill>
+                  <a:srgbClr val="404040"/>
+                </a:solidFill>
+              </a:rPr>
+              <a:t>x8 모드 확인됨</a:t>
+            </a:r>
+          </a:p>
+        </p:txBody>
+      </p:sp>
+      <p:sp>
+        <p:nvSpPr>
+          <p:cNvPr id="20" name="Rectangle 19"/>
+          <p:cNvSpPr/>
+          <p:nvPr/>
+        </p:nvSpPr>
+        <p:spPr>
+          <a:xfrm>
+            <a:off x="6126479" y="1417320"/>
+            <a:ext cx="530352" cy="292608"/>
+          </a:xfrm>
+          <a:prstGeom prst="rect">
+            <a:avLst/>
+          </a:prstGeom>
+          <a:solidFill>
+            <a:srgbClr val="F8F8F8"/>
+          </a:solidFill>
+          <a:ln>
+            <a:solidFill>
+              <a:srgbClr val="D0D0D0"/>
+            </a:solidFill>
+          </a:ln>
+        </p:spPr>
+        <p:style>
+          <a:lnRef idx="1">
+            <a:schemeClr val="accent1"/>
+          </a:lnRef>
+          <a:fillRef idx="3">
+            <a:schemeClr val="accent1"/>
+          </a:fillRef>
+          <a:effectRef idx="2">
+            <a:schemeClr val="accent1"/>
+          </a:effectRef>
+          <a:fontRef idx="minor">
+            <a:schemeClr val="lt1"/>
+          </a:fontRef>
+        </p:style>
+        <p:txBody>
+          <a:bodyPr rtlCol="0" anchor="ctr"/>
+          <a:lstStyle/>
+          <a:p>
+            <a:pPr algn="ctr"/>
+          </a:p>
+        </p:txBody>
+      </p:sp>
+      <p:sp>
+        <p:nvSpPr>
+          <p:cNvPr id="21" name="TextBox 20"/>
+          <p:cNvSpPr txBox="1"/>
+          <p:nvPr/>
+        </p:nvSpPr>
+        <p:spPr>
+          <a:xfrm>
+            <a:off x="6181343" y="1444752"/>
+            <a:ext cx="438912" cy="237744"/>
+          </a:xfrm>
+          <a:prstGeom prst="rect">
+            <a:avLst/>
+          </a:prstGeom>
+          <a:noFill/>
+        </p:spPr>
+        <p:txBody>
+          <a:bodyPr wrap="square">
+            <a:spAutoFit/>
+          </a:bodyPr>
+          <a:lstStyle/>
+          <a:p>
+            <a:pPr algn="l"/>
+            <a:r>
+              <a:rPr sz="900" b="0" i="0">
+                <a:solidFill>
+                  <a:srgbClr val="378638"/>
+                </a:solidFill>
+              </a:rPr>
+              <a:t>✓</a:t>
+            </a:r>
+          </a:p>
+        </p:txBody>
+      </p:sp>
+      <p:sp>
+        <p:nvSpPr>
+          <p:cNvPr id="22" name="Rectangle 21"/>
+          <p:cNvSpPr/>
+          <p:nvPr/>
+        </p:nvSpPr>
+        <p:spPr>
+          <a:xfrm>
+            <a:off x="274320" y="1709928"/>
+            <a:ext cx="1993392" cy="292608"/>
+          </a:xfrm>
+          <a:prstGeom prst="rect">
+            <a:avLst/>
+          </a:prstGeom>
+          <a:solidFill>
+            <a:srgbClr val="FFFFFF"/>
+          </a:solidFill>
+          <a:ln>
+            <a:solidFill>
+              <a:srgbClr val="D0D0D0"/>
+            </a:solidFill>
+          </a:ln>
+        </p:spPr>
+        <p:style>
+          <a:lnRef idx="1">
+            <a:schemeClr val="accent1"/>
+          </a:lnRef>
+          <a:fillRef idx="3">
+            <a:schemeClr val="accent1"/>
+          </a:fillRef>
+          <a:effectRef idx="2">
+            <a:schemeClr val="accent1"/>
+          </a:effectRef>
+          <a:fontRef idx="minor">
+            <a:schemeClr val="lt1"/>
+          </a:fontRef>
+        </p:style>
+        <p:txBody>
+          <a:bodyPr rtlCol="0" anchor="ctr"/>
+          <a:lstStyle/>
+          <a:p>
+            <a:pPr algn="ctr"/>
+          </a:p>
+        </p:txBody>
+      </p:sp>
+      <p:sp>
+        <p:nvSpPr>
+          <p:cNvPr id="23" name="TextBox 22"/>
+          <p:cNvSpPr txBox="1"/>
+          <p:nvPr/>
+        </p:nvSpPr>
+        <p:spPr>
+          <a:xfrm>
+            <a:off x="329184" y="1737360"/>
+            <a:ext cx="1901952" cy="237744"/>
+          </a:xfrm>
+          <a:prstGeom prst="rect">
+            <a:avLst/>
+          </a:prstGeom>
+          <a:noFill/>
+        </p:spPr>
+        <p:txBody>
+          <a:bodyPr wrap="square">
+            <a:spAutoFit/>
+          </a:bodyPr>
+          <a:lstStyle/>
+          <a:p>
+            <a:pPr algn="l"/>
+            <a:r>
+              <a:rPr sz="900" b="0" i="0">
+                <a:solidFill>
+                  <a:srgbClr val="404040"/>
+                </a:solidFill>
+              </a:rPr>
+              <a:t>CS0-CS3 CS 신호</a:t>
+            </a:r>
+          </a:p>
+        </p:txBody>
+      </p:sp>
+      <p:sp>
+        <p:nvSpPr>
+          <p:cNvPr id="24" name="Rectangle 23"/>
+          <p:cNvSpPr/>
+          <p:nvPr/>
+        </p:nvSpPr>
+        <p:spPr>
+          <a:xfrm>
+            <a:off x="2286000" y="1709928"/>
+            <a:ext cx="1627632" cy="292608"/>
+          </a:xfrm>
+          <a:prstGeom prst="rect">
+            <a:avLst/>
+          </a:prstGeom>
+          <a:solidFill>
+            <a:srgbClr val="FFFFFF"/>
+          </a:solidFill>
+          <a:ln>
+            <a:solidFill>
+              <a:srgbClr val="D0D0D0"/>
+            </a:solidFill>
+          </a:ln>
+        </p:spPr>
+        <p:style>
+          <a:lnRef idx="1">
+            <a:schemeClr val="accent1"/>
+          </a:lnRef>
+          <a:fillRef idx="3">
+            <a:schemeClr val="accent1"/>
+          </a:fillRef>
+          <a:effectRef idx="2">
+            <a:schemeClr val="accent1"/>
+          </a:effectRef>
+          <a:fontRef idx="minor">
+            <a:schemeClr val="lt1"/>
+          </a:fontRef>
+        </p:style>
+        <p:txBody>
+          <a:bodyPr rtlCol="0" anchor="ctr"/>
+          <a:lstStyle/>
+          <a:p>
+            <a:pPr algn="ctr"/>
+          </a:p>
+        </p:txBody>
+      </p:sp>
+      <p:sp>
+        <p:nvSpPr>
+          <p:cNvPr id="25" name="TextBox 24"/>
+          <p:cNvSpPr txBox="1"/>
+          <p:nvPr/>
+        </p:nvSpPr>
+        <p:spPr>
+          <a:xfrm>
+            <a:off x="2340864" y="1737360"/>
+            <a:ext cx="1536192" cy="237744"/>
+          </a:xfrm>
+          <a:prstGeom prst="rect">
+            <a:avLst/>
+          </a:prstGeom>
+          <a:noFill/>
+        </p:spPr>
+        <p:txBody>
+          <a:bodyPr wrap="square">
+            <a:spAutoFit/>
+          </a:bodyPr>
+          <a:lstStyle/>
+          <a:p>
+            <a:pPr algn="l"/>
+            <a:r>
+              <a:rPr sz="900" b="0" i="0">
+                <a:solidFill>
+                  <a:srgbClr val="378638"/>
+                </a:solidFill>
+              </a:rPr>
+              <a:t>70ms 펄스 정상</a:t>
+            </a:r>
+          </a:p>
+        </p:txBody>
+      </p:sp>
+      <p:sp>
+        <p:nvSpPr>
+          <p:cNvPr id="26" name="Rectangle 25"/>
+          <p:cNvSpPr/>
+          <p:nvPr/>
+        </p:nvSpPr>
+        <p:spPr>
+          <a:xfrm>
+            <a:off x="3931920" y="1709928"/>
+            <a:ext cx="2176272" cy="292608"/>
+          </a:xfrm>
+          <a:prstGeom prst="rect">
+            <a:avLst/>
+          </a:prstGeom>
+          <a:solidFill>
+            <a:srgbClr val="FFFFFF"/>
+          </a:solidFill>
+          <a:ln>
+            <a:solidFill>
+              <a:srgbClr val="D0D0D0"/>
+            </a:solidFill>
+          </a:ln>
+        </p:spPr>
+        <p:style>
+          <a:lnRef idx="1">
+            <a:schemeClr val="accent1"/>
+          </a:lnRef>
+          <a:fillRef idx="3">
+            <a:schemeClr val="accent1"/>
+          </a:fillRef>
+          <a:effectRef idx="2">
+            <a:schemeClr val="accent1"/>
+          </a:effectRef>
+          <a:fontRef idx="minor">
+            <a:schemeClr val="lt1"/>
+          </a:fontRef>
+        </p:style>
+        <p:txBody>
+          <a:bodyPr rtlCol="0" anchor="ctr"/>
+          <a:lstStyle/>
+          <a:p>
+            <a:pPr algn="ctr"/>
+          </a:p>
+        </p:txBody>
+      </p:sp>
+      <p:sp>
+        <p:nvSpPr>
+          <p:cNvPr id="27" name="TextBox 26"/>
+          <p:cNvSpPr txBox="1"/>
+          <p:nvPr/>
+        </p:nvSpPr>
+        <p:spPr>
+          <a:xfrm>
+            <a:off x="3986783" y="1737360"/>
+            <a:ext cx="2084831" cy="237744"/>
+          </a:xfrm>
+          <a:prstGeom prst="rect">
+            <a:avLst/>
+          </a:prstGeom>
+          <a:noFill/>
+        </p:spPr>
+        <p:txBody>
+          <a:bodyPr wrap="square">
+            <a:spAutoFit/>
+          </a:bodyPr>
+          <a:lstStyle/>
+          <a:p>
+            <a:pPr algn="l"/>
+            <a:r>
+              <a:rPr sz="900" b="0" i="0">
+                <a:solidFill>
+                  <a:srgbClr val="404040"/>
+                </a:solidFill>
+              </a:rPr>
+              <a:t>MCU → 칩 도달</a:t>
+            </a:r>
+          </a:p>
+        </p:txBody>
+      </p:sp>
+      <p:sp>
+        <p:nvSpPr>
+          <p:cNvPr id="28" name="Rectangle 27"/>
+          <p:cNvSpPr/>
+          <p:nvPr/>
+        </p:nvSpPr>
+        <p:spPr>
+          <a:xfrm>
+            <a:off x="6126479" y="1709928"/>
+            <a:ext cx="530352" cy="292608"/>
+          </a:xfrm>
+          <a:prstGeom prst="rect">
+            <a:avLst/>
+          </a:prstGeom>
+          <a:solidFill>
+            <a:srgbClr val="FFFFFF"/>
+          </a:solidFill>
+          <a:ln>
+            <a:solidFill>
+              <a:srgbClr val="D0D0D0"/>
+            </a:solidFill>
+          </a:ln>
+        </p:spPr>
+        <p:style>
+          <a:lnRef idx="1">
+            <a:schemeClr val="accent1"/>
+          </a:lnRef>
+          <a:fillRef idx="3">
+            <a:schemeClr val="accent1"/>
+          </a:fillRef>
+          <a:effectRef idx="2">
+            <a:schemeClr val="accent1"/>
+          </a:effectRef>
+          <a:fontRef idx="minor">
+            <a:schemeClr val="lt1"/>
+          </a:fontRef>
+        </p:style>
+        <p:txBody>
+          <a:bodyPr rtlCol="0" anchor="ctr"/>
+          <a:lstStyle/>
+          <a:p>
+            <a:pPr algn="ctr"/>
+          </a:p>
+        </p:txBody>
+      </p:sp>
+      <p:sp>
+        <p:nvSpPr>
+          <p:cNvPr id="29" name="TextBox 28"/>
+          <p:cNvSpPr txBox="1"/>
+          <p:nvPr/>
+        </p:nvSpPr>
+        <p:spPr>
+          <a:xfrm>
+            <a:off x="6181343" y="1737360"/>
+            <a:ext cx="438912" cy="237744"/>
+          </a:xfrm>
+          <a:prstGeom prst="rect">
+            <a:avLst/>
+          </a:prstGeom>
+          <a:noFill/>
+        </p:spPr>
+        <p:txBody>
+          <a:bodyPr wrap="square">
+            <a:spAutoFit/>
+          </a:bodyPr>
+          <a:lstStyle/>
+          <a:p>
+            <a:pPr algn="l"/>
+            <a:r>
+              <a:rPr sz="900" b="0" i="0">
+                <a:solidFill>
+                  <a:srgbClr val="378638"/>
+                </a:solidFill>
+              </a:rPr>
+              <a:t>✓</a:t>
+            </a:r>
+          </a:p>
+        </p:txBody>
+      </p:sp>
+      <p:sp>
+        <p:nvSpPr>
+          <p:cNvPr id="30" name="Rectangle 29"/>
+          <p:cNvSpPr/>
+          <p:nvPr/>
+        </p:nvSpPr>
+        <p:spPr>
+          <a:xfrm>
+            <a:off x="274320" y="2002536"/>
+            <a:ext cx="1993392" cy="292608"/>
+          </a:xfrm>
+          <a:prstGeom prst="rect">
+            <a:avLst/>
+          </a:prstGeom>
+          <a:solidFill>
+            <a:srgbClr val="F8F8F8"/>
+          </a:solidFill>
+          <a:ln>
+            <a:solidFill>
+              <a:srgbClr val="D0D0D0"/>
+            </a:solidFill>
+          </a:ln>
+        </p:spPr>
+        <p:style>
+          <a:lnRef idx="1">
+            <a:schemeClr val="accent1"/>
+          </a:lnRef>
+          <a:fillRef idx="3">
+            <a:schemeClr val="accent1"/>
+          </a:fillRef>
+          <a:effectRef idx="2">
+            <a:schemeClr val="accent1"/>
+          </a:effectRef>
+          <a:fontRef idx="minor">
+            <a:schemeClr val="lt1"/>
+          </a:fontRef>
+        </p:style>
+        <p:txBody>
+          <a:bodyPr rtlCol="0" anchor="ctr"/>
+          <a:lstStyle/>
+          <a:p>
+            <a:pPr algn="ctr"/>
+          </a:p>
+        </p:txBody>
+      </p:sp>
+      <p:sp>
+        <p:nvSpPr>
+          <p:cNvPr id="31" name="TextBox 30"/>
+          <p:cNvSpPr txBox="1"/>
+          <p:nvPr/>
+        </p:nvSpPr>
+        <p:spPr>
+          <a:xfrm>
+            <a:off x="329184" y="2029967"/>
+            <a:ext cx="1901952" cy="237744"/>
+          </a:xfrm>
+          <a:prstGeom prst="rect">
+            <a:avLst/>
+          </a:prstGeom>
+          <a:noFill/>
+        </p:spPr>
+        <p:txBody>
+          <a:bodyPr wrap="square">
+            <a:spAutoFit/>
+          </a:bodyPr>
+          <a:lstStyle/>
+          <a:p>
+            <a:pPr algn="l"/>
+            <a:r>
+              <a:rPr sz="900" b="0" i="0">
+                <a:solidFill>
+                  <a:srgbClr val="404040"/>
+                </a:solidFill>
+              </a:rPr>
+              <a:t>CS4 (PB4/U23) CS</a:t>
+            </a:r>
+          </a:p>
+        </p:txBody>
+      </p:sp>
+      <p:sp>
+        <p:nvSpPr>
+          <p:cNvPr id="32" name="Rectangle 31"/>
+          <p:cNvSpPr/>
+          <p:nvPr/>
+        </p:nvSpPr>
+        <p:spPr>
+          <a:xfrm>
+            <a:off x="2286000" y="2002536"/>
+            <a:ext cx="1627632" cy="292608"/>
+          </a:xfrm>
+          <a:prstGeom prst="rect">
+            <a:avLst/>
+          </a:prstGeom>
+          <a:solidFill>
+            <a:srgbClr val="F8F8F8"/>
+          </a:solidFill>
+          <a:ln>
+            <a:solidFill>
+              <a:srgbClr val="D0D0D0"/>
+            </a:solidFill>
+          </a:ln>
+        </p:spPr>
+        <p:style>
+          <a:lnRef idx="1">
+            <a:schemeClr val="accent1"/>
+          </a:lnRef>
+          <a:fillRef idx="3">
+            <a:schemeClr val="accent1"/>
+          </a:fillRef>
+          <a:effectRef idx="2">
+            <a:schemeClr val="accent1"/>
+          </a:effectRef>
+          <a:fontRef idx="minor">
+            <a:schemeClr val="lt1"/>
+          </a:fontRef>
+        </p:style>
+        <p:txBody>
+          <a:bodyPr rtlCol="0" anchor="ctr"/>
+          <a:lstStyle/>
+          <a:p>
+            <a:pPr algn="ctr"/>
+          </a:p>
+        </p:txBody>
+      </p:sp>
+      <p:sp>
+        <p:nvSpPr>
+          <p:cNvPr id="33" name="TextBox 32"/>
+          <p:cNvSpPr txBox="1"/>
+          <p:nvPr/>
+        </p:nvSpPr>
+        <p:spPr>
+          <a:xfrm>
+            <a:off x="2340864" y="2029967"/>
+            <a:ext cx="1536192" cy="237744"/>
+          </a:xfrm>
+          <a:prstGeom prst="rect">
+            <a:avLst/>
+          </a:prstGeom>
+          <a:noFill/>
+        </p:spPr>
+        <p:txBody>
+          <a:bodyPr wrap="square">
+            <a:spAutoFit/>
+          </a:bodyPr>
+          <a:lstStyle/>
+          <a:p>
+            <a:pPr algn="l"/>
+            <a:r>
+              <a:rPr sz="900" b="0" i="0">
+                <a:solidFill>
+                  <a:srgbClr val="ED7D31"/>
+                </a:solidFill>
+              </a:rPr>
+              <a:t>무신호 (상태 불명)</a:t>
+            </a:r>
+          </a:p>
+        </p:txBody>
+      </p:sp>
+      <p:sp>
+        <p:nvSpPr>
+          <p:cNvPr id="34" name="Rectangle 33"/>
+          <p:cNvSpPr/>
+          <p:nvPr/>
+        </p:nvSpPr>
+        <p:spPr>
+          <a:xfrm>
+            <a:off x="3931920" y="2002536"/>
+            <a:ext cx="2176272" cy="292608"/>
+          </a:xfrm>
+          <a:prstGeom prst="rect">
+            <a:avLst/>
+          </a:prstGeom>
+          <a:solidFill>
+            <a:srgbClr val="F8F8F8"/>
+          </a:solidFill>
+          <a:ln>
+            <a:solidFill>
+              <a:srgbClr val="D0D0D0"/>
+            </a:solidFill>
+          </a:ln>
+        </p:spPr>
+        <p:style>
+          <a:lnRef idx="1">
+            <a:schemeClr val="accent1"/>
+          </a:lnRef>
+          <a:fillRef idx="3">
+            <a:schemeClr val="accent1"/>
+          </a:fillRef>
+          <a:effectRef idx="2">
+            <a:schemeClr val="accent1"/>
+          </a:effectRef>
+          <a:fontRef idx="minor">
+            <a:schemeClr val="lt1"/>
+          </a:fontRef>
+        </p:style>
+        <p:txBody>
+          <a:bodyPr rtlCol="0" anchor="ctr"/>
+          <a:lstStyle/>
+          <a:p>
+            <a:pPr algn="ctr"/>
+          </a:p>
+        </p:txBody>
+      </p:sp>
+      <p:sp>
+        <p:nvSpPr>
+          <p:cNvPr id="35" name="TextBox 34"/>
+          <p:cNvSpPr txBox="1"/>
+          <p:nvPr/>
+        </p:nvSpPr>
+        <p:spPr>
+          <a:xfrm>
+            <a:off x="3986783" y="2029967"/>
+            <a:ext cx="2084831" cy="237744"/>
+          </a:xfrm>
+          <a:prstGeom prst="rect">
+            <a:avLst/>
+          </a:prstGeom>
+          <a:noFill/>
+        </p:spPr>
+        <p:txBody>
+          <a:bodyPr wrap="square">
+            <a:spAutoFit/>
+          </a:bodyPr>
+          <a:lstStyle/>
+          <a:p>
+            <a:pPr algn="l"/>
+            <a:r>
+              <a:rPr sz="900" b="0" i="0">
+                <a:solidFill>
+                  <a:srgbClr val="404040"/>
+                </a:solidFill>
+              </a:rPr>
+              <a:t>원인 조사 중</a:t>
+            </a:r>
+          </a:p>
+        </p:txBody>
+      </p:sp>
+      <p:sp>
+        <p:nvSpPr>
+          <p:cNvPr id="36" name="Rectangle 35"/>
+          <p:cNvSpPr/>
+          <p:nvPr/>
+        </p:nvSpPr>
+        <p:spPr>
+          <a:xfrm>
+            <a:off x="6126479" y="2002536"/>
+            <a:ext cx="530352" cy="292608"/>
+          </a:xfrm>
+          <a:prstGeom prst="rect">
+            <a:avLst/>
+          </a:prstGeom>
+          <a:solidFill>
+            <a:srgbClr val="F8F8F8"/>
+          </a:solidFill>
+          <a:ln>
+            <a:solidFill>
+              <a:srgbClr val="D0D0D0"/>
+            </a:solidFill>
+          </a:ln>
+        </p:spPr>
+        <p:style>
+          <a:lnRef idx="1">
+            <a:schemeClr val="accent1"/>
+          </a:lnRef>
+          <a:fillRef idx="3">
+            <a:schemeClr val="accent1"/>
+          </a:fillRef>
+          <a:effectRef idx="2">
+            <a:schemeClr val="accent1"/>
+          </a:effectRef>
+          <a:fontRef idx="minor">
+            <a:schemeClr val="lt1"/>
+          </a:fontRef>
+        </p:style>
+        <p:txBody>
+          <a:bodyPr rtlCol="0" anchor="ctr"/>
+          <a:lstStyle/>
+          <a:p>
+            <a:pPr algn="ctr"/>
+          </a:p>
+        </p:txBody>
+      </p:sp>
+      <p:sp>
+        <p:nvSpPr>
+          <p:cNvPr id="37" name="TextBox 36"/>
+          <p:cNvSpPr txBox="1"/>
+          <p:nvPr/>
+        </p:nvSpPr>
+        <p:spPr>
+          <a:xfrm>
+            <a:off x="6181343" y="2029967"/>
+            <a:ext cx="438912" cy="237744"/>
+          </a:xfrm>
+          <a:prstGeom prst="rect">
+            <a:avLst/>
+          </a:prstGeom>
+          <a:noFill/>
+        </p:spPr>
+        <p:txBody>
+          <a:bodyPr wrap="square">
+            <a:spAutoFit/>
+          </a:bodyPr>
+          <a:lstStyle/>
+          <a:p>
+            <a:pPr algn="l"/>
+            <a:r>
+              <a:rPr sz="900" b="0" i="0">
+                <a:solidFill>
+                  <a:srgbClr val="ED7D31"/>
+                </a:solidFill>
+              </a:rPr>
+              <a:t>?</a:t>
+            </a:r>
+          </a:p>
+        </p:txBody>
+      </p:sp>
+      <p:sp>
+        <p:nvSpPr>
+          <p:cNvPr id="38" name="Rectangle 37"/>
+          <p:cNvSpPr/>
+          <p:nvPr/>
+        </p:nvSpPr>
+        <p:spPr>
+          <a:xfrm>
+            <a:off x="274320" y="2295144"/>
+            <a:ext cx="1993392" cy="292608"/>
+          </a:xfrm>
+          <a:prstGeom prst="rect">
+            <a:avLst/>
+          </a:prstGeom>
+          <a:solidFill>
+            <a:srgbClr val="FFFFFF"/>
+          </a:solidFill>
+          <a:ln>
+            <a:solidFill>
+              <a:srgbClr val="D0D0D0"/>
+            </a:solidFill>
+          </a:ln>
+        </p:spPr>
+        <p:style>
+          <a:lnRef idx="1">
+            <a:schemeClr val="accent1"/>
+          </a:lnRef>
+          <a:fillRef idx="3">
+            <a:schemeClr val="accent1"/>
+          </a:fillRef>
+          <a:effectRef idx="2">
+            <a:schemeClr val="accent1"/>
+          </a:effectRef>
+          <a:fontRef idx="minor">
+            <a:schemeClr val="lt1"/>
+          </a:fontRef>
+        </p:style>
+        <p:txBody>
+          <a:bodyPr rtlCol="0" anchor="ctr"/>
+          <a:lstStyle/>
+          <a:p>
+            <a:pPr algn="ctr"/>
+          </a:p>
+        </p:txBody>
+      </p:sp>
+      <p:sp>
+        <p:nvSpPr>
+          <p:cNvPr id="39" name="TextBox 38"/>
+          <p:cNvSpPr txBox="1"/>
+          <p:nvPr/>
+        </p:nvSpPr>
+        <p:spPr>
+          <a:xfrm>
+            <a:off x="329184" y="2322575"/>
+            <a:ext cx="1901952" cy="237744"/>
+          </a:xfrm>
+          <a:prstGeom prst="rect">
+            <a:avLst/>
+          </a:prstGeom>
+          <a:noFill/>
+        </p:spPr>
+        <p:txBody>
+          <a:bodyPr wrap="square">
+            <a:spAutoFit/>
+          </a:bodyPr>
+          <a:lstStyle/>
+          <a:p>
+            <a:pPr algn="l"/>
+            <a:r>
+              <a:rPr sz="900" b="0" i="0">
+                <a:solidFill>
+                  <a:srgbClr val="404040"/>
+                </a:solidFill>
+              </a:rPr>
+              <a:t>CS5-CS11 CS 신호</a:t>
+            </a:r>
+          </a:p>
+        </p:txBody>
+      </p:sp>
+      <p:sp>
+        <p:nvSpPr>
+          <p:cNvPr id="40" name="Rectangle 39"/>
+          <p:cNvSpPr/>
+          <p:nvPr/>
+        </p:nvSpPr>
+        <p:spPr>
+          <a:xfrm>
+            <a:off x="2286000" y="2295144"/>
+            <a:ext cx="1627632" cy="292608"/>
+          </a:xfrm>
+          <a:prstGeom prst="rect">
+            <a:avLst/>
+          </a:prstGeom>
+          <a:solidFill>
+            <a:srgbClr val="FFFFFF"/>
+          </a:solidFill>
+          <a:ln>
+            <a:solidFill>
+              <a:srgbClr val="D0D0D0"/>
+            </a:solidFill>
+          </a:ln>
+        </p:spPr>
+        <p:style>
+          <a:lnRef idx="1">
+            <a:schemeClr val="accent1"/>
+          </a:lnRef>
+          <a:fillRef idx="3">
+            <a:schemeClr val="accent1"/>
+          </a:fillRef>
+          <a:effectRef idx="2">
+            <a:schemeClr val="accent1"/>
+          </a:effectRef>
+          <a:fontRef idx="minor">
+            <a:schemeClr val="lt1"/>
+          </a:fontRef>
+        </p:style>
+        <p:txBody>
+          <a:bodyPr rtlCol="0" anchor="ctr"/>
+          <a:lstStyle/>
+          <a:p>
+            <a:pPr algn="ctr"/>
+          </a:p>
+        </p:txBody>
+      </p:sp>
+      <p:sp>
+        <p:nvSpPr>
+          <p:cNvPr id="41" name="TextBox 40"/>
+          <p:cNvSpPr txBox="1"/>
+          <p:nvPr/>
+        </p:nvSpPr>
+        <p:spPr>
+          <a:xfrm>
+            <a:off x="2340864" y="2322575"/>
+            <a:ext cx="1536192" cy="237744"/>
+          </a:xfrm>
+          <a:prstGeom prst="rect">
+            <a:avLst/>
+          </a:prstGeom>
+          <a:noFill/>
+        </p:spPr>
+        <p:txBody>
+          <a:bodyPr wrap="square">
+            <a:spAutoFit/>
+          </a:bodyPr>
+          <a:lstStyle/>
+          <a:p>
+            <a:pPr algn="l"/>
+            <a:r>
+              <a:rPr sz="900" b="0" i="0">
+                <a:solidFill>
+                  <a:srgbClr val="378638"/>
+                </a:solidFill>
+              </a:rPr>
+              <a:t>70ms 펄스 정상</a:t>
+            </a:r>
+          </a:p>
+        </p:txBody>
+      </p:sp>
+      <p:sp>
+        <p:nvSpPr>
+          <p:cNvPr id="42" name="Rectangle 41"/>
+          <p:cNvSpPr/>
+          <p:nvPr/>
+        </p:nvSpPr>
+        <p:spPr>
+          <a:xfrm>
+            <a:off x="3931920" y="2295144"/>
+            <a:ext cx="2176272" cy="292608"/>
+          </a:xfrm>
+          <a:prstGeom prst="rect">
+            <a:avLst/>
+          </a:prstGeom>
+          <a:solidFill>
+            <a:srgbClr val="FFFFFF"/>
+          </a:solidFill>
+          <a:ln>
+            <a:solidFill>
+              <a:srgbClr val="D0D0D0"/>
+            </a:solidFill>
+          </a:ln>
+        </p:spPr>
+        <p:style>
+          <a:lnRef idx="1">
+            <a:schemeClr val="accent1"/>
+          </a:lnRef>
+          <a:fillRef idx="3">
+            <a:schemeClr val="accent1"/>
+          </a:fillRef>
+          <a:effectRef idx="2">
+            <a:schemeClr val="accent1"/>
+          </a:effectRef>
+          <a:fontRef idx="minor">
+            <a:schemeClr val="lt1"/>
+          </a:fontRef>
+        </p:style>
+        <p:txBody>
+          <a:bodyPr rtlCol="0" anchor="ctr"/>
+          <a:lstStyle/>
+          <a:p>
+            <a:pPr algn="ctr"/>
+          </a:p>
+        </p:txBody>
+      </p:sp>
+      <p:sp>
+        <p:nvSpPr>
+          <p:cNvPr id="43" name="TextBox 42"/>
+          <p:cNvSpPr txBox="1"/>
+          <p:nvPr/>
+        </p:nvSpPr>
+        <p:spPr>
+          <a:xfrm>
+            <a:off x="3986783" y="2322575"/>
+            <a:ext cx="2084831" cy="237744"/>
+          </a:xfrm>
+          <a:prstGeom prst="rect">
+            <a:avLst/>
+          </a:prstGeom>
+          <a:noFill/>
+        </p:spPr>
+        <p:txBody>
+          <a:bodyPr wrap="square">
+            <a:spAutoFit/>
+          </a:bodyPr>
+          <a:lstStyle/>
+          <a:p>
+            <a:pPr algn="l"/>
+            <a:r>
+              <a:rPr sz="900" b="0" i="0">
+                <a:solidFill>
+                  <a:srgbClr val="404040"/>
+                </a:solidFill>
+              </a:rPr>
+              <a:t>MCU GPIO 정상</a:t>
+            </a:r>
+          </a:p>
+        </p:txBody>
+      </p:sp>
+      <p:sp>
+        <p:nvSpPr>
+          <p:cNvPr id="44" name="Rectangle 43"/>
+          <p:cNvSpPr/>
+          <p:nvPr/>
+        </p:nvSpPr>
+        <p:spPr>
+          <a:xfrm>
+            <a:off x="6126479" y="2295144"/>
+            <a:ext cx="530352" cy="292608"/>
+          </a:xfrm>
+          <a:prstGeom prst="rect">
+            <a:avLst/>
+          </a:prstGeom>
+          <a:solidFill>
+            <a:srgbClr val="FFFFFF"/>
+          </a:solidFill>
+          <a:ln>
+            <a:solidFill>
+              <a:srgbClr val="D0D0D0"/>
+            </a:solidFill>
+          </a:ln>
+        </p:spPr>
+        <p:style>
+          <a:lnRef idx="1">
+            <a:schemeClr val="accent1"/>
+          </a:lnRef>
+          <a:fillRef idx="3">
+            <a:schemeClr val="accent1"/>
+          </a:fillRef>
+          <a:effectRef idx="2">
+            <a:schemeClr val="accent1"/>
+          </a:effectRef>
+          <a:fontRef idx="minor">
+            <a:schemeClr val="lt1"/>
+          </a:fontRef>
+        </p:style>
+        <p:txBody>
+          <a:bodyPr rtlCol="0" anchor="ctr"/>
+          <a:lstStyle/>
+          <a:p>
+            <a:pPr algn="ctr"/>
+          </a:p>
+        </p:txBody>
+      </p:sp>
+      <p:sp>
+        <p:nvSpPr>
+          <p:cNvPr id="45" name="TextBox 44"/>
+          <p:cNvSpPr txBox="1"/>
+          <p:nvPr/>
+        </p:nvSpPr>
+        <p:spPr>
+          <a:xfrm>
+            <a:off x="6181343" y="2322575"/>
+            <a:ext cx="438912" cy="237744"/>
+          </a:xfrm>
+          <a:prstGeom prst="rect">
+            <a:avLst/>
+          </a:prstGeom>
+          <a:noFill/>
+        </p:spPr>
+        <p:txBody>
+          <a:bodyPr wrap="square">
+            <a:spAutoFit/>
+          </a:bodyPr>
+          <a:lstStyle/>
+          <a:p>
+            <a:pPr algn="l"/>
+            <a:r>
+              <a:rPr sz="900" b="0" i="0">
+                <a:solidFill>
+                  <a:srgbClr val="378638"/>
+                </a:solidFill>
+              </a:rPr>
+              <a:t>✓</a:t>
+            </a:r>
+          </a:p>
+        </p:txBody>
+      </p:sp>
+      <p:sp>
+        <p:nvSpPr>
+          <p:cNvPr id="46" name="Rectangle 45"/>
+          <p:cNvSpPr/>
+          <p:nvPr/>
+        </p:nvSpPr>
+        <p:spPr>
+          <a:xfrm>
+            <a:off x="274320" y="2587751"/>
+            <a:ext cx="1993392" cy="292608"/>
+          </a:xfrm>
+          <a:prstGeom prst="rect">
+            <a:avLst/>
+          </a:prstGeom>
+          <a:solidFill>
+            <a:srgbClr val="F8F8F8"/>
+          </a:solidFill>
+          <a:ln>
+            <a:solidFill>
+              <a:srgbClr val="D0D0D0"/>
+            </a:solidFill>
+          </a:ln>
+        </p:spPr>
+        <p:style>
+          <a:lnRef idx="1">
+            <a:schemeClr val="accent1"/>
+          </a:lnRef>
+          <a:fillRef idx="3">
+            <a:schemeClr val="accent1"/>
+          </a:fillRef>
+          <a:effectRef idx="2">
+            <a:schemeClr val="accent1"/>
+          </a:effectRef>
+          <a:fontRef idx="minor">
+            <a:schemeClr val="lt1"/>
+          </a:fontRef>
+        </p:style>
+        <p:txBody>
+          <a:bodyPr rtlCol="0" anchor="ctr"/>
+          <a:lstStyle/>
+          <a:p>
+            <a:pPr algn="ctr"/>
+          </a:p>
+        </p:txBody>
+      </p:sp>
+      <p:sp>
+        <p:nvSpPr>
+          <p:cNvPr id="47" name="TextBox 46"/>
+          <p:cNvSpPr txBox="1"/>
+          <p:nvPr/>
+        </p:nvSpPr>
+        <p:spPr>
+          <a:xfrm>
+            <a:off x="329184" y="2615183"/>
+            <a:ext cx="1901952" cy="237744"/>
+          </a:xfrm>
+          <a:prstGeom prst="rect">
+            <a:avLst/>
+          </a:prstGeom>
+          <a:noFill/>
+        </p:spPr>
+        <p:txBody>
+          <a:bodyPr wrap="square">
+            <a:spAutoFit/>
+          </a:bodyPr>
+          <a:lstStyle/>
+          <a:p>
+            <a:pPr algn="l"/>
+            <a:r>
+              <a:rPr sz="900" b="0" i="0">
+                <a:solidFill>
+                  <a:srgbClr val="404040"/>
+                </a:solidFill>
+              </a:rPr>
+              <a:t>U24 VCC (핀 6)</a:t>
+            </a:r>
+          </a:p>
+        </p:txBody>
+      </p:sp>
+      <p:sp>
+        <p:nvSpPr>
+          <p:cNvPr id="48" name="Rectangle 47"/>
+          <p:cNvSpPr/>
+          <p:nvPr/>
+        </p:nvSpPr>
+        <p:spPr>
+          <a:xfrm>
+            <a:off x="2286000" y="2587751"/>
+            <a:ext cx="1627632" cy="292608"/>
+          </a:xfrm>
+          <a:prstGeom prst="rect">
+            <a:avLst/>
+          </a:prstGeom>
+          <a:solidFill>
+            <a:srgbClr val="F8F8F8"/>
+          </a:solidFill>
+          <a:ln>
+            <a:solidFill>
+              <a:srgbClr val="D0D0D0"/>
+            </a:solidFill>
+          </a:ln>
+        </p:spPr>
+        <p:style>
+          <a:lnRef idx="1">
+            <a:schemeClr val="accent1"/>
+          </a:lnRef>
+          <a:fillRef idx="3">
+            <a:schemeClr val="accent1"/>
+          </a:fillRef>
+          <a:effectRef idx="2">
+            <a:schemeClr val="accent1"/>
+          </a:effectRef>
+          <a:fontRef idx="minor">
+            <a:schemeClr val="lt1"/>
+          </a:fontRef>
+        </p:style>
+        <p:txBody>
+          <a:bodyPr rtlCol="0" anchor="ctr"/>
+          <a:lstStyle/>
+          <a:p>
+            <a:pPr algn="ctr"/>
+          </a:p>
+        </p:txBody>
+      </p:sp>
+      <p:sp>
+        <p:nvSpPr>
+          <p:cNvPr id="49" name="TextBox 48"/>
+          <p:cNvSpPr txBox="1"/>
+          <p:nvPr/>
+        </p:nvSpPr>
+        <p:spPr>
+          <a:xfrm>
+            <a:off x="2340864" y="2615183"/>
+            <a:ext cx="1536192" cy="237744"/>
+          </a:xfrm>
+          <a:prstGeom prst="rect">
+            <a:avLst/>
+          </a:prstGeom>
+          <a:noFill/>
+        </p:spPr>
+        <p:txBody>
+          <a:bodyPr wrap="square">
+            <a:spAutoFit/>
+          </a:bodyPr>
+          <a:lstStyle/>
+          <a:p>
+            <a:pPr algn="l"/>
+            <a:r>
+              <a:rPr sz="900" b="0" i="0">
+                <a:solidFill>
+                  <a:srgbClr val="378638"/>
+                </a:solidFill>
+              </a:rPr>
+              <a:t>3.3V</a:t>
+            </a:r>
+          </a:p>
+        </p:txBody>
+      </p:sp>
+      <p:sp>
+        <p:nvSpPr>
+          <p:cNvPr id="50" name="Rectangle 49"/>
+          <p:cNvSpPr/>
+          <p:nvPr/>
+        </p:nvSpPr>
+        <p:spPr>
+          <a:xfrm>
+            <a:off x="3931920" y="2587751"/>
+            <a:ext cx="2176272" cy="292608"/>
+          </a:xfrm>
+          <a:prstGeom prst="rect">
+            <a:avLst/>
+          </a:prstGeom>
+          <a:solidFill>
+            <a:srgbClr val="F8F8F8"/>
+          </a:solidFill>
+          <a:ln>
+            <a:solidFill>
+              <a:srgbClr val="D0D0D0"/>
+            </a:solidFill>
+          </a:ln>
+        </p:spPr>
+        <p:style>
+          <a:lnRef idx="1">
+            <a:schemeClr val="accent1"/>
+          </a:lnRef>
+          <a:fillRef idx="3">
+            <a:schemeClr val="accent1"/>
+          </a:fillRef>
+          <a:effectRef idx="2">
+            <a:schemeClr val="accent1"/>
+          </a:effectRef>
+          <a:fontRef idx="minor">
+            <a:schemeClr val="lt1"/>
+          </a:fontRef>
+        </p:style>
+        <p:txBody>
+          <a:bodyPr rtlCol="0" anchor="ctr"/>
+          <a:lstStyle/>
+          <a:p>
+            <a:pPr algn="ctr"/>
+          </a:p>
+        </p:txBody>
+      </p:sp>
+      <p:sp>
+        <p:nvSpPr>
+          <p:cNvPr id="51" name="TextBox 50"/>
+          <p:cNvSpPr txBox="1"/>
+          <p:nvPr/>
+        </p:nvSpPr>
+        <p:spPr>
+          <a:xfrm>
+            <a:off x="3986783" y="2615183"/>
+            <a:ext cx="2084831" cy="237744"/>
+          </a:xfrm>
+          <a:prstGeom prst="rect">
+            <a:avLst/>
+          </a:prstGeom>
+          <a:noFill/>
+        </p:spPr>
+        <p:txBody>
+          <a:bodyPr wrap="square">
+            <a:spAutoFit/>
+          </a:bodyPr>
+          <a:lstStyle/>
+          <a:p>
+            <a:pPr algn="l"/>
+            <a:r>
+              <a:rPr sz="900" b="0" i="0">
+                <a:solidFill>
+                  <a:srgbClr val="404040"/>
+                </a:solidFill>
+              </a:rPr>
+              <a:t>전원 정상</a:t>
+            </a:r>
+          </a:p>
+        </p:txBody>
+      </p:sp>
+      <p:sp>
+        <p:nvSpPr>
+          <p:cNvPr id="52" name="Rectangle 51"/>
+          <p:cNvSpPr/>
+          <p:nvPr/>
+        </p:nvSpPr>
+        <p:spPr>
+          <a:xfrm>
+            <a:off x="6126479" y="2587751"/>
+            <a:ext cx="530352" cy="292608"/>
+          </a:xfrm>
+          <a:prstGeom prst="rect">
+            <a:avLst/>
+          </a:prstGeom>
+          <a:solidFill>
+            <a:srgbClr val="F8F8F8"/>
+          </a:solidFill>
+          <a:ln>
+            <a:solidFill>
+              <a:srgbClr val="D0D0D0"/>
+            </a:solidFill>
+          </a:ln>
+        </p:spPr>
+        <p:style>
+          <a:lnRef idx="1">
+            <a:schemeClr val="accent1"/>
+          </a:lnRef>
+          <a:fillRef idx="3">
+            <a:schemeClr val="accent1"/>
+          </a:fillRef>
+          <a:effectRef idx="2">
+            <a:schemeClr val="accent1"/>
+          </a:effectRef>
+          <a:fontRef idx="minor">
+            <a:schemeClr val="lt1"/>
+          </a:fontRef>
+        </p:style>
+        <p:txBody>
+          <a:bodyPr rtlCol="0" anchor="ctr"/>
+          <a:lstStyle/>
+          <a:p>
+            <a:pPr algn="ctr"/>
+          </a:p>
+        </p:txBody>
+      </p:sp>
+      <p:sp>
+        <p:nvSpPr>
+          <p:cNvPr id="53" name="TextBox 52"/>
+          <p:cNvSpPr txBox="1"/>
+          <p:nvPr/>
+        </p:nvSpPr>
+        <p:spPr>
+          <a:xfrm>
+            <a:off x="6181343" y="2615183"/>
+            <a:ext cx="438912" cy="237744"/>
+          </a:xfrm>
+          <a:prstGeom prst="rect">
+            <a:avLst/>
+          </a:prstGeom>
+          <a:noFill/>
+        </p:spPr>
+        <p:txBody>
+          <a:bodyPr wrap="square">
+            <a:spAutoFit/>
+          </a:bodyPr>
+          <a:lstStyle/>
+          <a:p>
+            <a:pPr algn="l"/>
+            <a:r>
+              <a:rPr sz="900" b="0" i="0">
+                <a:solidFill>
+                  <a:srgbClr val="378638"/>
+                </a:solidFill>
+              </a:rPr>
+              <a:t>✓</a:t>
+            </a:r>
+          </a:p>
+        </p:txBody>
+      </p:sp>
+      <p:sp>
+        <p:nvSpPr>
+          <p:cNvPr id="54" name="Rectangle 53"/>
+          <p:cNvSpPr/>
+          <p:nvPr/>
+        </p:nvSpPr>
+        <p:spPr>
+          <a:xfrm>
+            <a:off x="274320" y="2880359"/>
+            <a:ext cx="1993392" cy="292608"/>
+          </a:xfrm>
+          <a:prstGeom prst="rect">
+            <a:avLst/>
+          </a:prstGeom>
+          <a:solidFill>
+            <a:srgbClr val="FFFFFF"/>
+          </a:solidFill>
+          <a:ln>
+            <a:solidFill>
+              <a:srgbClr val="D0D0D0"/>
+            </a:solidFill>
+          </a:ln>
+        </p:spPr>
+        <p:style>
+          <a:lnRef idx="1">
+            <a:schemeClr val="accent1"/>
+          </a:lnRef>
+          <a:fillRef idx="3">
+            <a:schemeClr val="accent1"/>
+          </a:fillRef>
+          <a:effectRef idx="2">
+            <a:schemeClr val="accent1"/>
+          </a:effectRef>
+          <a:fontRef idx="minor">
+            <a:schemeClr val="lt1"/>
+          </a:fontRef>
+        </p:style>
+        <p:txBody>
+          <a:bodyPr rtlCol="0" anchor="ctr"/>
+          <a:lstStyle/>
+          <a:p>
+            <a:pPr algn="ctr"/>
+          </a:p>
+        </p:txBody>
+      </p:sp>
+      <p:sp>
+        <p:nvSpPr>
+          <p:cNvPr id="55" name="TextBox 54"/>
+          <p:cNvSpPr txBox="1"/>
+          <p:nvPr/>
+        </p:nvSpPr>
+        <p:spPr>
+          <a:xfrm>
+            <a:off x="329184" y="2907791"/>
+            <a:ext cx="1901952" cy="237744"/>
+          </a:xfrm>
+          <a:prstGeom prst="rect">
+            <a:avLst/>
+          </a:prstGeom>
+          <a:noFill/>
+        </p:spPr>
+        <p:txBody>
+          <a:bodyPr wrap="square">
+            <a:spAutoFit/>
+          </a:bodyPr>
+          <a:lstStyle/>
+          <a:p>
+            <a:pPr algn="l"/>
+            <a:r>
+              <a:rPr sz="900" b="0" i="0">
+                <a:solidFill>
+                  <a:srgbClr val="404040"/>
+                </a:solidFill>
+              </a:rPr>
+              <a:t>U24 DI (핀 3)</a:t>
+            </a:r>
+          </a:p>
+        </p:txBody>
+      </p:sp>
+      <p:sp>
+        <p:nvSpPr>
+          <p:cNvPr id="56" name="Rectangle 55"/>
+          <p:cNvSpPr/>
+          <p:nvPr/>
+        </p:nvSpPr>
+        <p:spPr>
+          <a:xfrm>
+            <a:off x="2286000" y="2880359"/>
+            <a:ext cx="1627632" cy="292608"/>
+          </a:xfrm>
+          <a:prstGeom prst="rect">
+            <a:avLst/>
+          </a:prstGeom>
+          <a:solidFill>
+            <a:srgbClr val="FFFFFF"/>
+          </a:solidFill>
+          <a:ln>
+            <a:solidFill>
+              <a:srgbClr val="D0D0D0"/>
+            </a:solidFill>
+          </a:ln>
+        </p:spPr>
+        <p:style>
+          <a:lnRef idx="1">
+            <a:schemeClr val="accent1"/>
+          </a:lnRef>
+          <a:fillRef idx="3">
+            <a:schemeClr val="accent1"/>
+          </a:fillRef>
+          <a:effectRef idx="2">
+            <a:schemeClr val="accent1"/>
+          </a:effectRef>
+          <a:fontRef idx="minor">
+            <a:schemeClr val="lt1"/>
+          </a:fontRef>
+        </p:style>
+        <p:txBody>
+          <a:bodyPr rtlCol="0" anchor="ctr"/>
+          <a:lstStyle/>
+          <a:p>
+            <a:pPr algn="ctr"/>
+          </a:p>
+        </p:txBody>
+      </p:sp>
+      <p:sp>
+        <p:nvSpPr>
+          <p:cNvPr id="57" name="TextBox 56"/>
+          <p:cNvSpPr txBox="1"/>
+          <p:nvPr/>
+        </p:nvSpPr>
+        <p:spPr>
+          <a:xfrm>
+            <a:off x="2340864" y="2907791"/>
+            <a:ext cx="1536192" cy="237744"/>
+          </a:xfrm>
+          <a:prstGeom prst="rect">
+            <a:avLst/>
+          </a:prstGeom>
+          <a:noFill/>
+        </p:spPr>
+        <p:txBody>
+          <a:bodyPr wrap="square">
+            <a:spAutoFit/>
+          </a:bodyPr>
+          <a:lstStyle/>
+          <a:p>
+            <a:pPr algn="l"/>
+            <a:r>
+              <a:rPr sz="900" b="0" i="0">
+                <a:solidFill>
+                  <a:srgbClr val="378638"/>
+                </a:solidFill>
+              </a:rPr>
+              <a:t>CLK동기 펄스 있음</a:t>
+            </a:r>
+          </a:p>
+        </p:txBody>
+      </p:sp>
+      <p:sp>
+        <p:nvSpPr>
+          <p:cNvPr id="58" name="Rectangle 57"/>
+          <p:cNvSpPr/>
+          <p:nvPr/>
+        </p:nvSpPr>
+        <p:spPr>
+          <a:xfrm>
+            <a:off x="3931920" y="2880359"/>
+            <a:ext cx="2176272" cy="292608"/>
+          </a:xfrm>
+          <a:prstGeom prst="rect">
+            <a:avLst/>
+          </a:prstGeom>
+          <a:solidFill>
+            <a:srgbClr val="FFFFFF"/>
+          </a:solidFill>
+          <a:ln>
+            <a:solidFill>
+              <a:srgbClr val="D0D0D0"/>
+            </a:solidFill>
+          </a:ln>
+        </p:spPr>
+        <p:style>
+          <a:lnRef idx="1">
+            <a:schemeClr val="accent1"/>
+          </a:lnRef>
+          <a:fillRef idx="3">
+            <a:schemeClr val="accent1"/>
+          </a:fillRef>
+          <a:effectRef idx="2">
+            <a:schemeClr val="accent1"/>
+          </a:effectRef>
+          <a:fontRef idx="minor">
+            <a:schemeClr val="lt1"/>
+          </a:fontRef>
+        </p:style>
+        <p:txBody>
+          <a:bodyPr rtlCol="0" anchor="ctr"/>
+          <a:lstStyle/>
+          <a:p>
+            <a:pPr algn="ctr"/>
+          </a:p>
+        </p:txBody>
+      </p:sp>
+      <p:sp>
+        <p:nvSpPr>
+          <p:cNvPr id="59" name="TextBox 58"/>
+          <p:cNvSpPr txBox="1"/>
+          <p:nvPr/>
+        </p:nvSpPr>
+        <p:spPr>
+          <a:xfrm>
+            <a:off x="3986783" y="2907791"/>
+            <a:ext cx="2084831" cy="237744"/>
+          </a:xfrm>
+          <a:prstGeom prst="rect">
+            <a:avLst/>
+          </a:prstGeom>
+          <a:noFill/>
+        </p:spPr>
+        <p:txBody>
+          <a:bodyPr wrap="square">
+            <a:spAutoFit/>
+          </a:bodyPr>
+          <a:lstStyle/>
+          <a:p>
+            <a:pPr algn="l"/>
+            <a:r>
+              <a:rPr sz="900" b="0" i="0">
+                <a:solidFill>
+                  <a:srgbClr val="404040"/>
+                </a:solidFill>
+              </a:rPr>
+              <a:t>DIN (PC0) 도달 확인</a:t>
+            </a:r>
+          </a:p>
+        </p:txBody>
+      </p:sp>
+      <p:sp>
+        <p:nvSpPr>
+          <p:cNvPr id="60" name="Rectangle 59"/>
+          <p:cNvSpPr/>
+          <p:nvPr/>
+        </p:nvSpPr>
+        <p:spPr>
+          <a:xfrm>
+            <a:off x="6126479" y="2880359"/>
+            <a:ext cx="530352" cy="292608"/>
+          </a:xfrm>
+          <a:prstGeom prst="rect">
+            <a:avLst/>
+          </a:prstGeom>
+          <a:solidFill>
+            <a:srgbClr val="FFFFFF"/>
+          </a:solidFill>
+          <a:ln>
+            <a:solidFill>
+              <a:srgbClr val="D0D0D0"/>
+            </a:solidFill>
+          </a:ln>
+        </p:spPr>
+        <p:style>
+          <a:lnRef idx="1">
+            <a:schemeClr val="accent1"/>
+          </a:lnRef>
+          <a:fillRef idx="3">
+            <a:schemeClr val="accent1"/>
+          </a:fillRef>
+          <a:effectRef idx="2">
+            <a:schemeClr val="accent1"/>
+          </a:effectRef>
+          <a:fontRef idx="minor">
+            <a:schemeClr val="lt1"/>
+          </a:fontRef>
+        </p:style>
+        <p:txBody>
+          <a:bodyPr rtlCol="0" anchor="ctr"/>
+          <a:lstStyle/>
+          <a:p>
+            <a:pPr algn="ctr"/>
+          </a:p>
+        </p:txBody>
+      </p:sp>
+      <p:sp>
+        <p:nvSpPr>
+          <p:cNvPr id="61" name="TextBox 60"/>
+          <p:cNvSpPr txBox="1"/>
+          <p:nvPr/>
+        </p:nvSpPr>
+        <p:spPr>
+          <a:xfrm>
+            <a:off x="6181343" y="2907791"/>
+            <a:ext cx="438912" cy="237744"/>
+          </a:xfrm>
+          <a:prstGeom prst="rect">
+            <a:avLst/>
+          </a:prstGeom>
+          <a:noFill/>
+        </p:spPr>
+        <p:txBody>
+          <a:bodyPr wrap="square">
+            <a:spAutoFit/>
+          </a:bodyPr>
+          <a:lstStyle/>
+          <a:p>
+            <a:pPr algn="l"/>
+            <a:r>
+              <a:rPr sz="900" b="0" i="0">
+                <a:solidFill>
+                  <a:srgbClr val="378638"/>
+                </a:solidFill>
+              </a:rPr>
+              <a:t>✓</a:t>
+            </a:r>
+          </a:p>
+        </p:txBody>
+      </p:sp>
+      <p:sp>
+        <p:nvSpPr>
+          <p:cNvPr id="62" name="Rectangle 61"/>
+          <p:cNvSpPr/>
+          <p:nvPr/>
+        </p:nvSpPr>
+        <p:spPr>
+          <a:xfrm>
+            <a:off x="274320" y="3172967"/>
+            <a:ext cx="1993392" cy="292608"/>
+          </a:xfrm>
+          <a:prstGeom prst="rect">
+            <a:avLst/>
+          </a:prstGeom>
+          <a:solidFill>
+            <a:srgbClr val="F8F8F8"/>
+          </a:solidFill>
+          <a:ln>
+            <a:solidFill>
+              <a:srgbClr val="D0D0D0"/>
+            </a:solidFill>
+          </a:ln>
+        </p:spPr>
+        <p:style>
+          <a:lnRef idx="1">
+            <a:schemeClr val="accent1"/>
+          </a:lnRef>
+          <a:fillRef idx="3">
+            <a:schemeClr val="accent1"/>
+          </a:fillRef>
+          <a:effectRef idx="2">
+            <a:schemeClr val="accent1"/>
+          </a:effectRef>
+          <a:fontRef idx="minor">
+            <a:schemeClr val="lt1"/>
+          </a:fontRef>
+        </p:style>
+        <p:txBody>
+          <a:bodyPr rtlCol="0" anchor="ctr"/>
+          <a:lstStyle/>
+          <a:p>
+            <a:pPr algn="ctr"/>
+          </a:p>
+        </p:txBody>
+      </p:sp>
+      <p:sp>
+        <p:nvSpPr>
+          <p:cNvPr id="63" name="TextBox 62"/>
+          <p:cNvSpPr txBox="1"/>
+          <p:nvPr/>
+        </p:nvSpPr>
+        <p:spPr>
+          <a:xfrm>
+            <a:off x="329184" y="3200399"/>
+            <a:ext cx="1901952" cy="237744"/>
+          </a:xfrm>
+          <a:prstGeom prst="rect">
+            <a:avLst/>
+          </a:prstGeom>
+          <a:noFill/>
+        </p:spPr>
+        <p:txBody>
+          <a:bodyPr wrap="square">
+            <a:spAutoFit/>
+          </a:bodyPr>
+          <a:lstStyle/>
+          <a:p>
+            <a:pPr algn="l"/>
+            <a:r>
+              <a:rPr sz="900" b="0" i="0">
+                <a:solidFill>
+                  <a:srgbClr val="404040"/>
+                </a:solidFill>
+              </a:rPr>
+              <a:t>U24 SK (핀 2)</a:t>
+            </a:r>
+          </a:p>
+        </p:txBody>
+      </p:sp>
+      <p:sp>
+        <p:nvSpPr>
+          <p:cNvPr id="64" name="Rectangle 63"/>
+          <p:cNvSpPr/>
+          <p:nvPr/>
+        </p:nvSpPr>
+        <p:spPr>
+          <a:xfrm>
+            <a:off x="2286000" y="3172967"/>
+            <a:ext cx="1627632" cy="292608"/>
+          </a:xfrm>
+          <a:prstGeom prst="rect">
+            <a:avLst/>
+          </a:prstGeom>
+          <a:solidFill>
+            <a:srgbClr val="F8F8F8"/>
+          </a:solidFill>
+          <a:ln>
+            <a:solidFill>
+              <a:srgbClr val="D0D0D0"/>
+            </a:solidFill>
+          </a:ln>
+        </p:spPr>
+        <p:style>
+          <a:lnRef idx="1">
+            <a:schemeClr val="accent1"/>
+          </a:lnRef>
+          <a:fillRef idx="3">
+            <a:schemeClr val="accent1"/>
+          </a:fillRef>
+          <a:effectRef idx="2">
+            <a:schemeClr val="accent1"/>
+          </a:effectRef>
+          <a:fontRef idx="minor">
+            <a:schemeClr val="lt1"/>
+          </a:fontRef>
+        </p:style>
+        <p:txBody>
+          <a:bodyPr rtlCol="0" anchor="ctr"/>
+          <a:lstStyle/>
+          <a:p>
+            <a:pPr algn="ctr"/>
+          </a:p>
+        </p:txBody>
+      </p:sp>
+      <p:sp>
+        <p:nvSpPr>
+          <p:cNvPr id="65" name="TextBox 64"/>
+          <p:cNvSpPr txBox="1"/>
+          <p:nvPr/>
+        </p:nvSpPr>
+        <p:spPr>
+          <a:xfrm>
+            <a:off x="2340864" y="3200399"/>
+            <a:ext cx="1536192" cy="237744"/>
+          </a:xfrm>
+          <a:prstGeom prst="rect">
+            <a:avLst/>
+          </a:prstGeom>
+          <a:noFill/>
+        </p:spPr>
+        <p:txBody>
+          <a:bodyPr wrap="square">
+            <a:spAutoFit/>
+          </a:bodyPr>
+          <a:lstStyle/>
+          <a:p>
+            <a:pPr algn="l"/>
+            <a:r>
+              <a:rPr sz="900" b="0" i="0">
+                <a:solidFill>
+                  <a:srgbClr val="ED7D31"/>
+                </a:solidFill>
+              </a:rPr>
+              <a:t>미확인 ← 다음 체크</a:t>
+            </a:r>
+          </a:p>
+        </p:txBody>
+      </p:sp>
+      <p:sp>
+        <p:nvSpPr>
+          <p:cNvPr id="66" name="Rectangle 65"/>
+          <p:cNvSpPr/>
+          <p:nvPr/>
+        </p:nvSpPr>
+        <p:spPr>
+          <a:xfrm>
+            <a:off x="3931920" y="3172967"/>
+            <a:ext cx="2176272" cy="292608"/>
+          </a:xfrm>
+          <a:prstGeom prst="rect">
+            <a:avLst/>
+          </a:prstGeom>
+          <a:solidFill>
+            <a:srgbClr val="F8F8F8"/>
+          </a:solidFill>
+          <a:ln>
+            <a:solidFill>
+              <a:srgbClr val="D0D0D0"/>
+            </a:solidFill>
+          </a:ln>
+        </p:spPr>
+        <p:style>
+          <a:lnRef idx="1">
+            <a:schemeClr val="accent1"/>
+          </a:lnRef>
+          <a:fillRef idx="3">
+            <a:schemeClr val="accent1"/>
+          </a:fillRef>
+          <a:effectRef idx="2">
+            <a:schemeClr val="accent1"/>
+          </a:effectRef>
+          <a:fontRef idx="minor">
+            <a:schemeClr val="lt1"/>
+          </a:fontRef>
+        </p:style>
+        <p:txBody>
+          <a:bodyPr rtlCol="0" anchor="ctr"/>
+          <a:lstStyle/>
+          <a:p>
+            <a:pPr algn="ctr"/>
+          </a:p>
+        </p:txBody>
+      </p:sp>
+      <p:sp>
+        <p:nvSpPr>
+          <p:cNvPr id="67" name="TextBox 66"/>
+          <p:cNvSpPr txBox="1"/>
+          <p:nvPr/>
+        </p:nvSpPr>
+        <p:spPr>
+          <a:xfrm>
+            <a:off x="3986783" y="3200399"/>
+            <a:ext cx="2084831" cy="237744"/>
+          </a:xfrm>
+          <a:prstGeom prst="rect">
+            <a:avLst/>
+          </a:prstGeom>
+          <a:noFill/>
+        </p:spPr>
+        <p:txBody>
+          <a:bodyPr wrap="square">
+            <a:spAutoFit/>
+          </a:bodyPr>
+          <a:lstStyle/>
+          <a:p>
+            <a:pPr algn="l"/>
+            <a:r>
+              <a:rPr sz="900" b="0" i="0">
+                <a:solidFill>
+                  <a:srgbClr val="404040"/>
+                </a:solidFill>
+              </a:rPr>
+              <a:t>클락 도달 여부 불명</a:t>
+            </a:r>
+          </a:p>
+        </p:txBody>
+      </p:sp>
+      <p:sp>
+        <p:nvSpPr>
+          <p:cNvPr id="68" name="Rectangle 67"/>
+          <p:cNvSpPr/>
+          <p:nvPr/>
+        </p:nvSpPr>
+        <p:spPr>
+          <a:xfrm>
+            <a:off x="6126479" y="3172967"/>
+            <a:ext cx="530352" cy="292608"/>
+          </a:xfrm>
+          <a:prstGeom prst="rect">
+            <a:avLst/>
+          </a:prstGeom>
+          <a:solidFill>
+            <a:srgbClr val="F8F8F8"/>
+          </a:solidFill>
+          <a:ln>
+            <a:solidFill>
+              <a:srgbClr val="D0D0D0"/>
+            </a:solidFill>
+          </a:ln>
+        </p:spPr>
+        <p:style>
+          <a:lnRef idx="1">
+            <a:schemeClr val="accent1"/>
+          </a:lnRef>
+          <a:fillRef idx="3">
+            <a:schemeClr val="accent1"/>
+          </a:fillRef>
+          <a:effectRef idx="2">
+            <a:schemeClr val="accent1"/>
+          </a:effectRef>
+          <a:fontRef idx="minor">
+            <a:schemeClr val="lt1"/>
+          </a:fontRef>
+        </p:style>
+        <p:txBody>
+          <a:bodyPr rtlCol="0" anchor="ctr"/>
+          <a:lstStyle/>
+          <a:p>
+            <a:pPr algn="ctr"/>
+          </a:p>
+        </p:txBody>
+      </p:sp>
+      <p:sp>
+        <p:nvSpPr>
+          <p:cNvPr id="69" name="TextBox 68"/>
+          <p:cNvSpPr txBox="1"/>
+          <p:nvPr/>
+        </p:nvSpPr>
+        <p:spPr>
+          <a:xfrm>
+            <a:off x="6181343" y="3200399"/>
+            <a:ext cx="438912" cy="237744"/>
+          </a:xfrm>
+          <a:prstGeom prst="rect">
+            <a:avLst/>
+          </a:prstGeom>
+          <a:noFill/>
+        </p:spPr>
+        <p:txBody>
+          <a:bodyPr wrap="square">
+            <a:spAutoFit/>
+          </a:bodyPr>
+          <a:lstStyle/>
+          <a:p>
+            <a:pPr algn="l"/>
+            <a:r>
+              <a:rPr sz="900" b="0" i="0">
+                <a:solidFill>
+                  <a:srgbClr val="ED7D31"/>
+                </a:solidFill>
+              </a:rPr>
+              <a:t>?</a:t>
+            </a:r>
+          </a:p>
+        </p:txBody>
+      </p:sp>
+      <p:sp>
+        <p:nvSpPr>
+          <p:cNvPr id="70" name="Rectangle 69"/>
+          <p:cNvSpPr/>
+          <p:nvPr/>
+        </p:nvSpPr>
+        <p:spPr>
+          <a:xfrm>
+            <a:off x="274320" y="3465575"/>
+            <a:ext cx="1993392" cy="292608"/>
+          </a:xfrm>
+          <a:prstGeom prst="rect">
+            <a:avLst/>
+          </a:prstGeom>
+          <a:solidFill>
+            <a:srgbClr val="FFFFFF"/>
+          </a:solidFill>
+          <a:ln>
+            <a:solidFill>
+              <a:srgbClr val="D0D0D0"/>
+            </a:solidFill>
+          </a:ln>
+        </p:spPr>
+        <p:style>
+          <a:lnRef idx="1">
+            <a:schemeClr val="accent1"/>
+          </a:lnRef>
+          <a:fillRef idx="3">
+            <a:schemeClr val="accent1"/>
+          </a:fillRef>
+          <a:effectRef idx="2">
+            <a:schemeClr val="accent1"/>
+          </a:effectRef>
+          <a:fontRef idx="minor">
+            <a:schemeClr val="lt1"/>
+          </a:fontRef>
+        </p:style>
+        <p:txBody>
+          <a:bodyPr rtlCol="0" anchor="ctr"/>
+          <a:lstStyle/>
+          <a:p>
+            <a:pPr algn="ctr"/>
+          </a:p>
+        </p:txBody>
+      </p:sp>
+      <p:sp>
+        <p:nvSpPr>
+          <p:cNvPr id="71" name="TextBox 70"/>
+          <p:cNvSpPr txBox="1"/>
+          <p:nvPr/>
+        </p:nvSpPr>
+        <p:spPr>
+          <a:xfrm>
+            <a:off x="329184" y="3493007"/>
+            <a:ext cx="1901952" cy="237744"/>
+          </a:xfrm>
+          <a:prstGeom prst="rect">
+            <a:avLst/>
+          </a:prstGeom>
+          <a:noFill/>
+        </p:spPr>
+        <p:txBody>
+          <a:bodyPr wrap="square">
+            <a:spAutoFit/>
+          </a:bodyPr>
+          <a:lstStyle/>
+          <a:p>
+            <a:pPr algn="l"/>
+            <a:r>
+              <a:rPr sz="900" b="0" i="0">
+                <a:solidFill>
+                  <a:srgbClr val="404040"/>
+                </a:solidFill>
+              </a:rPr>
+              <a:t>U24 DO (핀 4)</a:t>
+            </a:r>
+          </a:p>
+        </p:txBody>
+      </p:sp>
+      <p:sp>
+        <p:nvSpPr>
+          <p:cNvPr id="72" name="Rectangle 71"/>
+          <p:cNvSpPr/>
+          <p:nvPr/>
+        </p:nvSpPr>
+        <p:spPr>
+          <a:xfrm>
+            <a:off x="2286000" y="3465575"/>
+            <a:ext cx="1627632" cy="292608"/>
+          </a:xfrm>
+          <a:prstGeom prst="rect">
+            <a:avLst/>
+          </a:prstGeom>
+          <a:solidFill>
+            <a:srgbClr val="FFFFFF"/>
+          </a:solidFill>
+          <a:ln>
+            <a:solidFill>
+              <a:srgbClr val="D0D0D0"/>
+            </a:solidFill>
+          </a:ln>
+        </p:spPr>
+        <p:style>
+          <a:lnRef idx="1">
+            <a:schemeClr val="accent1"/>
+          </a:lnRef>
+          <a:fillRef idx="3">
+            <a:schemeClr val="accent1"/>
+          </a:fillRef>
+          <a:effectRef idx="2">
+            <a:schemeClr val="accent1"/>
+          </a:effectRef>
+          <a:fontRef idx="minor">
+            <a:schemeClr val="lt1"/>
+          </a:fontRef>
+        </p:style>
+        <p:txBody>
+          <a:bodyPr rtlCol="0" anchor="ctr"/>
+          <a:lstStyle/>
+          <a:p>
+            <a:pPr algn="ctr"/>
+          </a:p>
+        </p:txBody>
+      </p:sp>
+      <p:sp>
+        <p:nvSpPr>
+          <p:cNvPr id="73" name="TextBox 72"/>
+          <p:cNvSpPr txBox="1"/>
+          <p:nvPr/>
+        </p:nvSpPr>
+        <p:spPr>
+          <a:xfrm>
+            <a:off x="2340864" y="3493007"/>
+            <a:ext cx="1536192" cy="237744"/>
+          </a:xfrm>
+          <a:prstGeom prst="rect">
+            <a:avLst/>
+          </a:prstGeom>
+          <a:noFill/>
+        </p:spPr>
+        <p:txBody>
+          <a:bodyPr wrap="square">
+            <a:spAutoFit/>
+          </a:bodyPr>
+          <a:lstStyle/>
+          <a:p>
+            <a:pPr algn="l"/>
+            <a:r>
+              <a:rPr sz="900" b="0" i="0">
+                <a:solidFill>
+                  <a:srgbClr val="C00000"/>
+                </a:solidFill>
+              </a:rPr>
+              <a:t>항상 LOW</a:t>
+            </a:r>
+          </a:p>
+        </p:txBody>
+      </p:sp>
+      <p:sp>
+        <p:nvSpPr>
+          <p:cNvPr id="74" name="Rectangle 73"/>
+          <p:cNvSpPr/>
+          <p:nvPr/>
+        </p:nvSpPr>
+        <p:spPr>
+          <a:xfrm>
+            <a:off x="3931920" y="3465575"/>
+            <a:ext cx="2176272" cy="292608"/>
+          </a:xfrm>
+          <a:prstGeom prst="rect">
+            <a:avLst/>
+          </a:prstGeom>
+          <a:solidFill>
+            <a:srgbClr val="FFFFFF"/>
+          </a:solidFill>
+          <a:ln>
+            <a:solidFill>
+              <a:srgbClr val="D0D0D0"/>
+            </a:solidFill>
+          </a:ln>
+        </p:spPr>
+        <p:style>
+          <a:lnRef idx="1">
+            <a:schemeClr val="accent1"/>
+          </a:lnRef>
+          <a:fillRef idx="3">
+            <a:schemeClr val="accent1"/>
+          </a:fillRef>
+          <a:effectRef idx="2">
+            <a:schemeClr val="accent1"/>
+          </a:effectRef>
+          <a:fontRef idx="minor">
+            <a:schemeClr val="lt1"/>
+          </a:fontRef>
+        </p:style>
+        <p:txBody>
+          <a:bodyPr rtlCol="0" anchor="ctr"/>
+          <a:lstStyle/>
+          <a:p>
+            <a:pPr algn="ctr"/>
+          </a:p>
+        </p:txBody>
+      </p:sp>
+      <p:sp>
+        <p:nvSpPr>
+          <p:cNvPr id="75" name="TextBox 74"/>
+          <p:cNvSpPr txBox="1"/>
+          <p:nvPr/>
+        </p:nvSpPr>
+        <p:spPr>
+          <a:xfrm>
+            <a:off x="3986783" y="3493007"/>
+            <a:ext cx="2084831" cy="237744"/>
+          </a:xfrm>
+          <a:prstGeom prst="rect">
+            <a:avLst/>
+          </a:prstGeom>
+          <a:noFill/>
+        </p:spPr>
+        <p:txBody>
+          <a:bodyPr wrap="square">
+            <a:spAutoFit/>
+          </a:bodyPr>
+          <a:lstStyle/>
+          <a:p>
+            <a:pPr algn="l"/>
+            <a:r>
+              <a:rPr sz="900" b="0" i="0">
+                <a:solidFill>
+                  <a:srgbClr val="404040"/>
+                </a:solidFill>
+              </a:rPr>
+              <a:t>칩 응답 없음</a:t>
+            </a:r>
+          </a:p>
+        </p:txBody>
+      </p:sp>
+      <p:sp>
+        <p:nvSpPr>
+          <p:cNvPr id="76" name="Rectangle 75"/>
+          <p:cNvSpPr/>
+          <p:nvPr/>
+        </p:nvSpPr>
+        <p:spPr>
+          <a:xfrm>
+            <a:off x="6126479" y="3465575"/>
+            <a:ext cx="530352" cy="292608"/>
+          </a:xfrm>
+          <a:prstGeom prst="rect">
+            <a:avLst/>
+          </a:prstGeom>
+          <a:solidFill>
+            <a:srgbClr val="FFFFFF"/>
+          </a:solidFill>
+          <a:ln>
+            <a:solidFill>
+              <a:srgbClr val="D0D0D0"/>
+            </a:solidFill>
+          </a:ln>
+        </p:spPr>
+        <p:style>
+          <a:lnRef idx="1">
+            <a:schemeClr val="accent1"/>
+          </a:lnRef>
+          <a:fillRef idx="3">
+            <a:schemeClr val="accent1"/>
+          </a:fillRef>
+          <a:effectRef idx="2">
+            <a:schemeClr val="accent1"/>
+          </a:effectRef>
+          <a:fontRef idx="minor">
+            <a:schemeClr val="lt1"/>
+          </a:fontRef>
+        </p:style>
+        <p:txBody>
+          <a:bodyPr rtlCol="0" anchor="ctr"/>
+          <a:lstStyle/>
+          <a:p>
+            <a:pPr algn="ctr"/>
+          </a:p>
+        </p:txBody>
+      </p:sp>
+      <p:sp>
+        <p:nvSpPr>
+          <p:cNvPr id="77" name="TextBox 76"/>
+          <p:cNvSpPr txBox="1"/>
+          <p:nvPr/>
+        </p:nvSpPr>
+        <p:spPr>
+          <a:xfrm>
+            <a:off x="6181343" y="3493007"/>
+            <a:ext cx="438912" cy="237744"/>
+          </a:xfrm>
+          <a:prstGeom prst="rect">
+            <a:avLst/>
+          </a:prstGeom>
+          <a:noFill/>
+        </p:spPr>
+        <p:txBody>
+          <a:bodyPr wrap="square">
+            <a:spAutoFit/>
+          </a:bodyPr>
+          <a:lstStyle/>
+          <a:p>
+            <a:pPr algn="l"/>
+            <a:r>
+              <a:rPr sz="900" b="0" i="0">
+                <a:solidFill>
+                  <a:srgbClr val="C00000"/>
+                </a:solidFill>
+              </a:rPr>
+              <a:t>✗</a:t>
+            </a:r>
+          </a:p>
+        </p:txBody>
+      </p:sp>
+      <p:sp>
+        <p:nvSpPr>
+          <p:cNvPr id="78" name="Rectangle 77"/>
+          <p:cNvSpPr/>
+          <p:nvPr/>
+        </p:nvSpPr>
+        <p:spPr>
+          <a:xfrm>
+            <a:off x="274320" y="3758183"/>
+            <a:ext cx="1993392" cy="292608"/>
+          </a:xfrm>
+          <a:prstGeom prst="rect">
+            <a:avLst/>
+          </a:prstGeom>
+          <a:solidFill>
+            <a:srgbClr val="F8F8F8"/>
+          </a:solidFill>
+          <a:ln>
+            <a:solidFill>
+              <a:srgbClr val="D0D0D0"/>
+            </a:solidFill>
+          </a:ln>
+        </p:spPr>
+        <p:style>
+          <a:lnRef idx="1">
+            <a:schemeClr val="accent1"/>
+          </a:lnRef>
+          <a:fillRef idx="3">
+            <a:schemeClr val="accent1"/>
+          </a:fillRef>
+          <a:effectRef idx="2">
+            <a:schemeClr val="accent1"/>
+          </a:effectRef>
+          <a:fontRef idx="minor">
+            <a:schemeClr val="lt1"/>
+          </a:fontRef>
+        </p:style>
+        <p:txBody>
+          <a:bodyPr rtlCol="0" anchor="ctr"/>
+          <a:lstStyle/>
+          <a:p>
+            <a:pPr algn="ctr"/>
+          </a:p>
+        </p:txBody>
+      </p:sp>
+      <p:sp>
+        <p:nvSpPr>
+          <p:cNvPr id="79" name="TextBox 78"/>
+          <p:cNvSpPr txBox="1"/>
+          <p:nvPr/>
+        </p:nvSpPr>
+        <p:spPr>
+          <a:xfrm>
+            <a:off x="329184" y="3785615"/>
+            <a:ext cx="1901952" cy="237744"/>
+          </a:xfrm>
+          <a:prstGeom prst="rect">
+            <a:avLst/>
+          </a:prstGeom>
+          <a:noFill/>
+        </p:spPr>
+        <p:txBody>
+          <a:bodyPr wrap="square">
+            <a:spAutoFit/>
+          </a:bodyPr>
+          <a:lstStyle/>
+          <a:p>
+            <a:pPr algn="l"/>
+            <a:r>
+              <a:rPr sz="900" b="0" i="0">
+                <a:solidFill>
+                  <a:srgbClr val="404040"/>
+                </a:solidFill>
+              </a:rPr>
+              <a:t>MUX X4~X11 통전</a:t>
+            </a:r>
+          </a:p>
+        </p:txBody>
+      </p:sp>
+      <p:sp>
+        <p:nvSpPr>
+          <p:cNvPr id="80" name="Rectangle 79"/>
+          <p:cNvSpPr/>
+          <p:nvPr/>
+        </p:nvSpPr>
+        <p:spPr>
+          <a:xfrm>
+            <a:off x="2286000" y="3758183"/>
+            <a:ext cx="1627632" cy="292608"/>
+          </a:xfrm>
+          <a:prstGeom prst="rect">
+            <a:avLst/>
+          </a:prstGeom>
+          <a:solidFill>
+            <a:srgbClr val="F8F8F8"/>
+          </a:solidFill>
+          <a:ln>
+            <a:solidFill>
+              <a:srgbClr val="D0D0D0"/>
+            </a:solidFill>
+          </a:ln>
+        </p:spPr>
+        <p:style>
+          <a:lnRef idx="1">
+            <a:schemeClr val="accent1"/>
+          </a:lnRef>
+          <a:fillRef idx="3">
+            <a:schemeClr val="accent1"/>
+          </a:fillRef>
+          <a:effectRef idx="2">
+            <a:schemeClr val="accent1"/>
+          </a:effectRef>
+          <a:fontRef idx="minor">
+            <a:schemeClr val="lt1"/>
+          </a:fontRef>
+        </p:style>
+        <p:txBody>
+          <a:bodyPr rtlCol="0" anchor="ctr"/>
+          <a:lstStyle/>
+          <a:p>
+            <a:pPr algn="ctr"/>
+          </a:p>
+        </p:txBody>
+      </p:sp>
+      <p:sp>
+        <p:nvSpPr>
+          <p:cNvPr id="81" name="TextBox 80"/>
+          <p:cNvSpPr txBox="1"/>
+          <p:nvPr/>
+        </p:nvSpPr>
+        <p:spPr>
+          <a:xfrm>
+            <a:off x="2340864" y="3785615"/>
+            <a:ext cx="1536192" cy="237744"/>
+          </a:xfrm>
+          <a:prstGeom prst="rect">
+            <a:avLst/>
+          </a:prstGeom>
+          <a:noFill/>
+        </p:spPr>
+        <p:txBody>
+          <a:bodyPr wrap="square">
+            <a:spAutoFit/>
+          </a:bodyPr>
+          <a:lstStyle/>
+          <a:p>
+            <a:pPr algn="l"/>
+            <a:r>
+              <a:rPr sz="900" b="0" i="0">
+                <a:solidFill>
+                  <a:srgbClr val="378638"/>
+                </a:solidFill>
+              </a:rPr>
+              <a:t>확인됨</a:t>
+            </a:r>
+          </a:p>
+        </p:txBody>
+      </p:sp>
+      <p:sp>
+        <p:nvSpPr>
+          <p:cNvPr id="82" name="Rectangle 81"/>
+          <p:cNvSpPr/>
+          <p:nvPr/>
+        </p:nvSpPr>
+        <p:spPr>
+          <a:xfrm>
+            <a:off x="3931920" y="3758183"/>
+            <a:ext cx="2176272" cy="292608"/>
+          </a:xfrm>
+          <a:prstGeom prst="rect">
+            <a:avLst/>
+          </a:prstGeom>
+          <a:solidFill>
+            <a:srgbClr val="F8F8F8"/>
+          </a:solidFill>
+          <a:ln>
+            <a:solidFill>
+              <a:srgbClr val="D0D0D0"/>
+            </a:solidFill>
+          </a:ln>
+        </p:spPr>
+        <p:style>
+          <a:lnRef idx="1">
+            <a:schemeClr val="accent1"/>
+          </a:lnRef>
+          <a:fillRef idx="3">
+            <a:schemeClr val="accent1"/>
+          </a:fillRef>
+          <a:effectRef idx="2">
+            <a:schemeClr val="accent1"/>
+          </a:effectRef>
+          <a:fontRef idx="minor">
+            <a:schemeClr val="lt1"/>
+          </a:fontRef>
+        </p:style>
+        <p:txBody>
+          <a:bodyPr rtlCol="0" anchor="ctr"/>
+          <a:lstStyle/>
+          <a:p>
+            <a:pPr algn="ctr"/>
+          </a:p>
+        </p:txBody>
+      </p:sp>
+      <p:sp>
+        <p:nvSpPr>
+          <p:cNvPr id="83" name="TextBox 82"/>
+          <p:cNvSpPr txBox="1"/>
+          <p:nvPr/>
+        </p:nvSpPr>
+        <p:spPr>
+          <a:xfrm>
+            <a:off x="3986783" y="3785615"/>
+            <a:ext cx="2084831" cy="237744"/>
+          </a:xfrm>
+          <a:prstGeom prst="rect">
+            <a:avLst/>
+          </a:prstGeom>
+          <a:noFill/>
+        </p:spPr>
+        <p:txBody>
+          <a:bodyPr wrap="square">
+            <a:spAutoFit/>
+          </a:bodyPr>
+          <a:lstStyle/>
+          <a:p>
+            <a:pPr algn="l"/>
+            <a:r>
+              <a:rPr sz="900" b="0" i="0">
+                <a:solidFill>
+                  <a:srgbClr val="404040"/>
+                </a:solidFill>
+              </a:rPr>
+              <a:t>CD4067→칩 배선 OK</a:t>
+            </a:r>
+          </a:p>
+        </p:txBody>
+      </p:sp>
+      <p:sp>
+        <p:nvSpPr>
+          <p:cNvPr id="84" name="Rectangle 83"/>
+          <p:cNvSpPr/>
+          <p:nvPr/>
+        </p:nvSpPr>
+        <p:spPr>
+          <a:xfrm>
+            <a:off x="6126479" y="3758183"/>
+            <a:ext cx="530352" cy="292608"/>
+          </a:xfrm>
+          <a:prstGeom prst="rect">
+            <a:avLst/>
+          </a:prstGeom>
+          <a:solidFill>
+            <a:srgbClr val="F8F8F8"/>
+          </a:solidFill>
+          <a:ln>
+            <a:solidFill>
+              <a:srgbClr val="D0D0D0"/>
+            </a:solidFill>
+          </a:ln>
+        </p:spPr>
+        <p:style>
+          <a:lnRef idx="1">
+            <a:schemeClr val="accent1"/>
+          </a:lnRef>
+          <a:fillRef idx="3">
+            <a:schemeClr val="accent1"/>
+          </a:fillRef>
+          <a:effectRef idx="2">
+            <a:schemeClr val="accent1"/>
+          </a:effectRef>
+          <a:fontRef idx="minor">
+            <a:schemeClr val="lt1"/>
+          </a:fontRef>
+        </p:style>
+        <p:txBody>
+          <a:bodyPr rtlCol="0" anchor="ctr"/>
+          <a:lstStyle/>
+          <a:p>
+            <a:pPr algn="ctr"/>
+          </a:p>
+        </p:txBody>
+      </p:sp>
+      <p:sp>
+        <p:nvSpPr>
+          <p:cNvPr id="85" name="TextBox 84"/>
+          <p:cNvSpPr txBox="1"/>
+          <p:nvPr/>
+        </p:nvSpPr>
+        <p:spPr>
+          <a:xfrm>
+            <a:off x="6181343" y="3785615"/>
+            <a:ext cx="438912" cy="237744"/>
+          </a:xfrm>
+          <a:prstGeom prst="rect">
+            <a:avLst/>
+          </a:prstGeom>
+          <a:noFill/>
+        </p:spPr>
+        <p:txBody>
+          <a:bodyPr wrap="square">
+            <a:spAutoFit/>
+          </a:bodyPr>
+          <a:lstStyle/>
+          <a:p>
+            <a:pPr algn="l"/>
+            <a:r>
+              <a:rPr sz="900" b="0" i="0">
+                <a:solidFill>
+                  <a:srgbClr val="378638"/>
+                </a:solidFill>
+              </a:rPr>
+              <a:t>✓</a:t>
+            </a:r>
+          </a:p>
+        </p:txBody>
+      </p:sp>
+      <p:sp>
+        <p:nvSpPr>
+          <p:cNvPr id="86" name="Rectangle 85"/>
+          <p:cNvSpPr/>
+          <p:nvPr/>
+        </p:nvSpPr>
+        <p:spPr>
+          <a:xfrm>
+            <a:off x="274320" y="4050791"/>
+            <a:ext cx="1993392" cy="292608"/>
+          </a:xfrm>
+          <a:prstGeom prst="rect">
+            <a:avLst/>
+          </a:prstGeom>
+          <a:solidFill>
+            <a:srgbClr val="FFFFFF"/>
+          </a:solidFill>
+          <a:ln>
+            <a:solidFill>
+              <a:srgbClr val="D0D0D0"/>
+            </a:solidFill>
+          </a:ln>
+        </p:spPr>
+        <p:style>
+          <a:lnRef idx="1">
+            <a:schemeClr val="accent1"/>
+          </a:lnRef>
+          <a:fillRef idx="3">
+            <a:schemeClr val="accent1"/>
+          </a:fillRef>
+          <a:effectRef idx="2">
+            <a:schemeClr val="accent1"/>
+          </a:effectRef>
+          <a:fontRef idx="minor">
+            <a:schemeClr val="lt1"/>
+          </a:fontRef>
+        </p:style>
+        <p:txBody>
+          <a:bodyPr rtlCol="0" anchor="ctr"/>
+          <a:lstStyle/>
+          <a:p>
+            <a:pPr algn="ctr"/>
+          </a:p>
+        </p:txBody>
+      </p:sp>
+      <p:sp>
+        <p:nvSpPr>
+          <p:cNvPr id="87" name="TextBox 86"/>
+          <p:cNvSpPr txBox="1"/>
+          <p:nvPr/>
+        </p:nvSpPr>
+        <p:spPr>
+          <a:xfrm>
+            <a:off x="329184" y="4078224"/>
+            <a:ext cx="1901952" cy="237744"/>
+          </a:xfrm>
+          <a:prstGeom prst="rect">
+            <a:avLst/>
+          </a:prstGeom>
+          <a:noFill/>
+        </p:spPr>
+        <p:txBody>
+          <a:bodyPr wrap="square">
+            <a:spAutoFit/>
+          </a:bodyPr>
+          <a:lstStyle/>
+          <a:p>
+            <a:pPr algn="l"/>
+            <a:r>
+              <a:rPr sz="900" b="0" i="0">
+                <a:solidFill>
+                  <a:srgbClr val="404040"/>
+                </a:solidFill>
+              </a:rPr>
+              <a:t>PB4 IDR 테스트</a:t>
+            </a:r>
+          </a:p>
+        </p:txBody>
+      </p:sp>
+      <p:sp>
+        <p:nvSpPr>
+          <p:cNvPr id="88" name="Rectangle 87"/>
+          <p:cNvSpPr/>
+          <p:nvPr/>
+        </p:nvSpPr>
+        <p:spPr>
+          <a:xfrm>
+            <a:off x="2286000" y="4050791"/>
+            <a:ext cx="1627632" cy="292608"/>
+          </a:xfrm>
+          <a:prstGeom prst="rect">
+            <a:avLst/>
+          </a:prstGeom>
+          <a:solidFill>
+            <a:srgbClr val="FFFFFF"/>
+          </a:solidFill>
+          <a:ln>
+            <a:solidFill>
+              <a:srgbClr val="D0D0D0"/>
+            </a:solidFill>
+          </a:ln>
+        </p:spPr>
+        <p:style>
+          <a:lnRef idx="1">
+            <a:schemeClr val="accent1"/>
+          </a:lnRef>
+          <a:fillRef idx="3">
+            <a:schemeClr val="accent1"/>
+          </a:fillRef>
+          <a:effectRef idx="2">
+            <a:schemeClr val="accent1"/>
+          </a:effectRef>
+          <a:fontRef idx="minor">
+            <a:schemeClr val="lt1"/>
+          </a:fontRef>
+        </p:style>
+        <p:txBody>
+          <a:bodyPr rtlCol="0" anchor="ctr"/>
+          <a:lstStyle/>
+          <a:p>
+            <a:pPr algn="ctr"/>
+          </a:p>
+        </p:txBody>
+      </p:sp>
+      <p:sp>
+        <p:nvSpPr>
+          <p:cNvPr id="89" name="TextBox 88"/>
+          <p:cNvSpPr txBox="1"/>
+          <p:nvPr/>
+        </p:nvSpPr>
+        <p:spPr>
+          <a:xfrm>
+            <a:off x="2340864" y="4078224"/>
+            <a:ext cx="1536192" cy="237744"/>
+          </a:xfrm>
+          <a:prstGeom prst="rect">
+            <a:avLst/>
+          </a:prstGeom>
+          <a:noFill/>
+        </p:spPr>
+        <p:txBody>
+          <a:bodyPr wrap="square">
+            <a:spAutoFit/>
+          </a:bodyPr>
+          <a:lstStyle/>
+          <a:p>
+            <a:pPr algn="l"/>
+            <a:r>
+              <a:rPr sz="900" b="0" i="0">
+                <a:solidFill>
+                  <a:srgbClr val="378638"/>
+                </a:solidFill>
+              </a:rPr>
+              <a:t>IDR=0 (GPIO 정상)</a:t>
+            </a:r>
+          </a:p>
+        </p:txBody>
+      </p:sp>
+      <p:sp>
+        <p:nvSpPr>
+          <p:cNvPr id="90" name="Rectangle 89"/>
+          <p:cNvSpPr/>
+          <p:nvPr/>
+        </p:nvSpPr>
+        <p:spPr>
+          <a:xfrm>
+            <a:off x="3931920" y="4050791"/>
+            <a:ext cx="2176272" cy="292608"/>
+          </a:xfrm>
+          <a:prstGeom prst="rect">
+            <a:avLst/>
+          </a:prstGeom>
+          <a:solidFill>
+            <a:srgbClr val="FFFFFF"/>
+          </a:solidFill>
+          <a:ln>
+            <a:solidFill>
+              <a:srgbClr val="D0D0D0"/>
+            </a:solidFill>
+          </a:ln>
+        </p:spPr>
+        <p:style>
+          <a:lnRef idx="1">
+            <a:schemeClr val="accent1"/>
+          </a:lnRef>
+          <a:fillRef idx="3">
+            <a:schemeClr val="accent1"/>
+          </a:fillRef>
+          <a:effectRef idx="2">
+            <a:schemeClr val="accent1"/>
+          </a:effectRef>
+          <a:fontRef idx="minor">
+            <a:schemeClr val="lt1"/>
+          </a:fontRef>
+        </p:style>
+        <p:txBody>
+          <a:bodyPr rtlCol="0" anchor="ctr"/>
+          <a:lstStyle/>
+          <a:p>
+            <a:pPr algn="ctr"/>
+          </a:p>
+        </p:txBody>
+      </p:sp>
+      <p:sp>
+        <p:nvSpPr>
+          <p:cNvPr id="91" name="TextBox 90"/>
+          <p:cNvSpPr txBox="1"/>
+          <p:nvPr/>
+        </p:nvSpPr>
+        <p:spPr>
+          <a:xfrm>
+            <a:off x="3986783" y="4078224"/>
+            <a:ext cx="2084831" cy="237744"/>
+          </a:xfrm>
+          <a:prstGeom prst="rect">
+            <a:avLst/>
+          </a:prstGeom>
+          <a:noFill/>
+        </p:spPr>
+        <p:txBody>
+          <a:bodyPr wrap="square">
+            <a:spAutoFit/>
+          </a:bodyPr>
+          <a:lstStyle/>
+          <a:p>
+            <a:pPr algn="l"/>
+            <a:r>
+              <a:rPr sz="900" b="0" i="0">
+                <a:solidFill>
+                  <a:srgbClr val="404040"/>
+                </a:solidFill>
+              </a:rPr>
+              <a:t>JTAG 문제 아님</a:t>
+            </a:r>
+          </a:p>
+        </p:txBody>
+      </p:sp>
+      <p:sp>
+        <p:nvSpPr>
+          <p:cNvPr id="92" name="Rectangle 91"/>
+          <p:cNvSpPr/>
+          <p:nvPr/>
+        </p:nvSpPr>
+        <p:spPr>
+          <a:xfrm>
+            <a:off x="6126479" y="4050791"/>
+            <a:ext cx="530352" cy="292608"/>
+          </a:xfrm>
+          <a:prstGeom prst="rect">
+            <a:avLst/>
+          </a:prstGeom>
+          <a:solidFill>
+            <a:srgbClr val="FFFFFF"/>
+          </a:solidFill>
+          <a:ln>
+            <a:solidFill>
+              <a:srgbClr val="D0D0D0"/>
+            </a:solidFill>
+          </a:ln>
+        </p:spPr>
+        <p:style>
+          <a:lnRef idx="1">
+            <a:schemeClr val="accent1"/>
+          </a:lnRef>
+          <a:fillRef idx="3">
+            <a:schemeClr val="accent1"/>
+          </a:fillRef>
+          <a:effectRef idx="2">
+            <a:schemeClr val="accent1"/>
+          </a:effectRef>
+          <a:fontRef idx="minor">
+            <a:schemeClr val="lt1"/>
+          </a:fontRef>
+        </p:style>
+        <p:txBody>
+          <a:bodyPr rtlCol="0" anchor="ctr"/>
+          <a:lstStyle/>
+          <a:p>
+            <a:pPr algn="ctr"/>
+          </a:p>
+        </p:txBody>
+      </p:sp>
+      <p:sp>
+        <p:nvSpPr>
+          <p:cNvPr id="93" name="TextBox 92"/>
+          <p:cNvSpPr txBox="1"/>
+          <p:nvPr/>
+        </p:nvSpPr>
+        <p:spPr>
+          <a:xfrm>
+            <a:off x="6181343" y="4078224"/>
+            <a:ext cx="438912" cy="237744"/>
+          </a:xfrm>
+          <a:prstGeom prst="rect">
+            <a:avLst/>
+          </a:prstGeom>
+          <a:noFill/>
+        </p:spPr>
+        <p:txBody>
+          <a:bodyPr wrap="square">
+            <a:spAutoFit/>
+          </a:bodyPr>
+          <a:lstStyle/>
+          <a:p>
+            <a:pPr algn="l"/>
+            <a:r>
+              <a:rPr sz="900" b="0" i="0">
+                <a:solidFill>
+                  <a:srgbClr val="378638"/>
+                </a:solidFill>
+              </a:rPr>
+              <a:t>✓</a:t>
+            </a:r>
+          </a:p>
+        </p:txBody>
+      </p:sp>
+      <p:sp>
+        <p:nvSpPr>
+          <p:cNvPr id="94" name="TextBox 93"/>
+          <p:cNvSpPr txBox="1"/>
+          <p:nvPr/>
+        </p:nvSpPr>
+        <p:spPr>
+          <a:xfrm>
+            <a:off x="5897880" y="822960"/>
+            <a:ext cx="3017520" cy="292608"/>
+          </a:xfrm>
+          <a:prstGeom prst="rect">
+            <a:avLst/>
+          </a:prstGeom>
+          <a:noFill/>
+        </p:spPr>
+        <p:txBody>
+          <a:bodyPr wrap="square">
+            <a:spAutoFit/>
+          </a:bodyPr>
+          <a:lstStyle/>
+          <a:p>
+            <a:pPr algn="l"/>
+            <a:r>
+              <a:rPr sz="1300" b="1" i="0">
+                <a:solidFill>
+                  <a:srgbClr val="2E74B5"/>
+                </a:solidFill>
+              </a:rPr>
+              <a:t>현재까지 원인 분석</a:t>
+            </a:r>
+          </a:p>
+        </p:txBody>
+      </p:sp>
+      <p:sp>
+        <p:nvSpPr>
+          <p:cNvPr id="95" name="Rectangle 94"/>
+          <p:cNvSpPr/>
+          <p:nvPr/>
+        </p:nvSpPr>
+        <p:spPr>
+          <a:xfrm>
+            <a:off x="5897880" y="1143000"/>
+            <a:ext cx="3017520" cy="274320"/>
+          </a:xfrm>
+          <a:prstGeom prst="rect">
+            <a:avLst/>
+          </a:prstGeom>
+          <a:solidFill>
+            <a:srgbClr val="378638"/>
+          </a:solidFill>
+          <a:ln>
+            <a:noFill/>
+          </a:ln>
+        </p:spPr>
+        <p:style>
+          <a:lnRef idx="1">
+            <a:schemeClr val="accent1"/>
+          </a:lnRef>
+          <a:fillRef idx="3">
+            <a:schemeClr val="accent1"/>
+          </a:fillRef>
+          <a:effectRef idx="2">
+            <a:schemeClr val="accent1"/>
+          </a:effectRef>
+          <a:fontRef idx="minor">
+            <a:schemeClr val="lt1"/>
+          </a:fontRef>
+        </p:style>
+        <p:txBody>
+          <a:bodyPr rtlCol="0" anchor="ctr"/>
+          <a:lstStyle/>
+          <a:p>
+            <a:pPr algn="ctr"/>
+          </a:p>
+        </p:txBody>
+      </p:sp>
+      <p:sp>
+        <p:nvSpPr>
+          <p:cNvPr id="96" name="TextBox 95"/>
+          <p:cNvSpPr txBox="1"/>
+          <p:nvPr/>
+        </p:nvSpPr>
+        <p:spPr>
+          <a:xfrm>
+            <a:off x="5989320" y="1179576"/>
+            <a:ext cx="2834640" cy="219456"/>
+          </a:xfrm>
+          <a:prstGeom prst="rect">
+            <a:avLst/>
+          </a:prstGeom>
+          <a:noFill/>
+        </p:spPr>
+        <p:txBody>
+          <a:bodyPr wrap="square">
+            <a:spAutoFit/>
+          </a:bodyPr>
+          <a:lstStyle/>
+          <a:p>
+            <a:pPr algn="l"/>
+            <a:r>
+              <a:rPr sz="1100" b="1" i="0">
+                <a:solidFill>
+                  <a:srgbClr val="FFFFFF"/>
+                </a:solidFill>
+              </a:rPr>
+              <a:t>해결된 항목</a:t>
+            </a:r>
+          </a:p>
+        </p:txBody>
+      </p:sp>
+      <p:sp>
+        <p:nvSpPr>
+          <p:cNvPr id="97" name="Rectangle 96"/>
+          <p:cNvSpPr/>
+          <p:nvPr/>
+        </p:nvSpPr>
+        <p:spPr>
+          <a:xfrm>
+            <a:off x="5897880" y="1435608"/>
+            <a:ext cx="3017520" cy="9144"/>
+          </a:xfrm>
+          <a:prstGeom prst="rect">
+            <a:avLst/>
+          </a:prstGeom>
+          <a:solidFill>
+            <a:srgbClr val="E0E0E0"/>
+          </a:solidFill>
+          <a:ln>
+            <a:noFill/>
+          </a:ln>
+        </p:spPr>
+        <p:style>
+          <a:lnRef idx="1">
+            <a:schemeClr val="accent1"/>
+          </a:lnRef>
+          <a:fillRef idx="3">
+            <a:schemeClr val="accent1"/>
+          </a:fillRef>
+          <a:effectRef idx="2">
+            <a:schemeClr val="accent1"/>
+          </a:effectRef>
+          <a:fontRef idx="minor">
+            <a:schemeClr val="lt1"/>
+          </a:fontRef>
+        </p:style>
+        <p:txBody>
+          <a:bodyPr rtlCol="0" anchor="ctr"/>
+          <a:lstStyle/>
+          <a:p>
+            <a:pPr algn="ctr"/>
+          </a:p>
+        </p:txBody>
+      </p:sp>
+      <p:sp>
+        <p:nvSpPr>
+          <p:cNvPr id="98" name="TextBox 97"/>
+          <p:cNvSpPr txBox="1"/>
+          <p:nvPr/>
+        </p:nvSpPr>
+        <p:spPr>
+          <a:xfrm>
+            <a:off x="5989320" y="1453896"/>
+            <a:ext cx="2834640" cy="438912"/>
+          </a:xfrm>
+          <a:prstGeom prst="rect">
+            <a:avLst/>
+          </a:prstGeom>
+          <a:noFill/>
+        </p:spPr>
+        <p:txBody>
+          <a:bodyPr wrap="square">
+            <a:spAutoFit/>
+          </a:bodyPr>
+          <a:lstStyle/>
+          <a:p>
+            <a:pPr algn="l"/>
+            <a:r>
+              <a:rPr sz="900" b="0" i="0">
+                <a:solidFill>
+                  <a:srgbClr val="404040"/>
+                </a:solidFill>
+              </a:rPr>
+              <a:t>• PB4 GPIO 정상 확인
+(JTAG 문제 아님, IDR=0)</a:t>
+            </a:r>
+          </a:p>
+        </p:txBody>
+      </p:sp>
+      <p:sp>
+        <p:nvSpPr>
+          <p:cNvPr id="99" name="Rectangle 98"/>
+          <p:cNvSpPr/>
+          <p:nvPr/>
+        </p:nvSpPr>
+        <p:spPr>
+          <a:xfrm>
+            <a:off x="5897880" y="1892808"/>
+            <a:ext cx="3017520" cy="9144"/>
+          </a:xfrm>
+          <a:prstGeom prst="rect">
+            <a:avLst/>
+          </a:prstGeom>
+          <a:solidFill>
+            <a:srgbClr val="E0E0E0"/>
+          </a:solidFill>
+          <a:ln>
+            <a:noFill/>
+          </a:ln>
+        </p:spPr>
+        <p:style>
+          <a:lnRef idx="1">
+            <a:schemeClr val="accent1"/>
+          </a:lnRef>
+          <a:fillRef idx="3">
+            <a:schemeClr val="accent1"/>
+          </a:fillRef>
+          <a:effectRef idx="2">
+            <a:schemeClr val="accent1"/>
+          </a:effectRef>
+          <a:fontRef idx="minor">
+            <a:schemeClr val="lt1"/>
+          </a:fontRef>
+        </p:style>
+        <p:txBody>
+          <a:bodyPr rtlCol="0" anchor="ctr"/>
+          <a:lstStyle/>
+          <a:p>
+            <a:pPr algn="ctr"/>
+          </a:p>
+        </p:txBody>
+      </p:sp>
+      <p:sp>
+        <p:nvSpPr>
+          <p:cNvPr id="100" name="TextBox 99"/>
+          <p:cNvSpPr txBox="1"/>
+          <p:nvPr/>
+        </p:nvSpPr>
+        <p:spPr>
+          <a:xfrm>
+            <a:off x="5989320" y="1911096"/>
+            <a:ext cx="2834640" cy="438912"/>
+          </a:xfrm>
+          <a:prstGeom prst="rect">
+            <a:avLst/>
+          </a:prstGeom>
+          <a:noFill/>
+        </p:spPr>
+        <p:txBody>
+          <a:bodyPr wrap="square">
+            <a:spAutoFit/>
+          </a:bodyPr>
+          <a:lstStyle/>
+          <a:p>
+            <a:pPr algn="l"/>
+            <a:r>
+              <a:rPr sz="900" b="0" i="0">
+                <a:solidFill>
+                  <a:srgbClr val="404040"/>
+                </a:solidFill>
+              </a:rPr>
+              <a:t>• MUX 배선 정상
+(X4~X11 통전 확인)</a:t>
+            </a:r>
+          </a:p>
+        </p:txBody>
+      </p:sp>
+      <p:sp>
+        <p:nvSpPr>
+          <p:cNvPr id="101" name="Rectangle 100"/>
+          <p:cNvSpPr/>
+          <p:nvPr/>
+        </p:nvSpPr>
+        <p:spPr>
+          <a:xfrm>
+            <a:off x="5897880" y="2350008"/>
+            <a:ext cx="3017520" cy="9144"/>
+          </a:xfrm>
+          <a:prstGeom prst="rect">
+            <a:avLst/>
+          </a:prstGeom>
+          <a:solidFill>
+            <a:srgbClr val="E0E0E0"/>
+          </a:solidFill>
+          <a:ln>
+            <a:noFill/>
+          </a:ln>
+        </p:spPr>
+        <p:style>
+          <a:lnRef idx="1">
+            <a:schemeClr val="accent1"/>
+          </a:lnRef>
+          <a:fillRef idx="3">
+            <a:schemeClr val="accent1"/>
+          </a:fillRef>
+          <a:effectRef idx="2">
+            <a:schemeClr val="accent1"/>
+          </a:effectRef>
+          <a:fontRef idx="minor">
+            <a:schemeClr val="lt1"/>
+          </a:fontRef>
+        </p:style>
+        <p:txBody>
+          <a:bodyPr rtlCol="0" anchor="ctr"/>
+          <a:lstStyle/>
+          <a:p>
+            <a:pPr algn="ctr"/>
+          </a:p>
+        </p:txBody>
+      </p:sp>
+      <p:sp>
+        <p:nvSpPr>
+          <p:cNvPr id="102" name="TextBox 101"/>
+          <p:cNvSpPr txBox="1"/>
+          <p:nvPr/>
+        </p:nvSpPr>
+        <p:spPr>
+          <a:xfrm>
+            <a:off x="5989320" y="2368296"/>
+            <a:ext cx="2834640" cy="438912"/>
+          </a:xfrm>
+          <a:prstGeom prst="rect">
+            <a:avLst/>
+          </a:prstGeom>
+          <a:noFill/>
+        </p:spPr>
+        <p:txBody>
+          <a:bodyPr wrap="square">
+            <a:spAutoFit/>
+          </a:bodyPr>
+          <a:lstStyle/>
+          <a:p>
+            <a:pPr algn="l"/>
+            <a:r>
+              <a:rPr sz="900" b="0" i="0">
+                <a:solidFill>
+                  <a:srgbClr val="404040"/>
+                </a:solidFill>
+              </a:rPr>
+              <a:t>• ORG=GND 재확인
+(x8 모드 올바름)</a:t>
+            </a:r>
+          </a:p>
+        </p:txBody>
+      </p:sp>
+      <p:sp>
+        <p:nvSpPr>
+          <p:cNvPr id="103" name="Rectangle 102"/>
+          <p:cNvSpPr/>
+          <p:nvPr/>
+        </p:nvSpPr>
+        <p:spPr>
+          <a:xfrm>
+            <a:off x="5897880" y="2898648"/>
+            <a:ext cx="3017520" cy="274320"/>
+          </a:xfrm>
+          <a:prstGeom prst="rect">
+            <a:avLst/>
+          </a:prstGeom>
+          <a:solidFill>
+            <a:srgbClr val="C00000"/>
+          </a:solidFill>
+          <a:ln>
+            <a:noFill/>
+          </a:ln>
+        </p:spPr>
+        <p:style>
+          <a:lnRef idx="1">
+            <a:schemeClr val="accent1"/>
+          </a:lnRef>
+          <a:fillRef idx="3">
+            <a:schemeClr val="accent1"/>
+          </a:fillRef>
+          <a:effectRef idx="2">
+            <a:schemeClr val="accent1"/>
+          </a:effectRef>
+          <a:fontRef idx="minor">
+            <a:schemeClr val="lt1"/>
+          </a:fontRef>
+        </p:style>
+        <p:txBody>
+          <a:bodyPr rtlCol="0" anchor="ctr"/>
+          <a:lstStyle/>
+          <a:p>
+            <a:pPr algn="ctr"/>
+          </a:p>
+        </p:txBody>
+      </p:sp>
+      <p:sp>
+        <p:nvSpPr>
+          <p:cNvPr id="104" name="TextBox 103"/>
+          <p:cNvSpPr txBox="1"/>
+          <p:nvPr/>
+        </p:nvSpPr>
+        <p:spPr>
+          <a:xfrm>
+            <a:off x="5989320" y="2935224"/>
+            <a:ext cx="2834640" cy="219456"/>
+          </a:xfrm>
+          <a:prstGeom prst="rect">
+            <a:avLst/>
+          </a:prstGeom>
+          <a:noFill/>
+        </p:spPr>
+        <p:txBody>
+          <a:bodyPr wrap="square">
+            <a:spAutoFit/>
+          </a:bodyPr>
+          <a:lstStyle/>
+          <a:p>
+            <a:pPr algn="l"/>
+            <a:r>
+              <a:rPr sz="1100" b="1" i="0">
+                <a:solidFill>
+                  <a:srgbClr val="FFFFFF"/>
+                </a:solidFill>
+              </a:rPr>
+              <a:t>미해결: DO 항상 LOW</a:t>
+            </a:r>
+          </a:p>
+        </p:txBody>
+      </p:sp>
+      <p:sp>
+        <p:nvSpPr>
+          <p:cNvPr id="105" name="Rectangle 104"/>
+          <p:cNvSpPr/>
+          <p:nvPr/>
+        </p:nvSpPr>
+        <p:spPr>
+          <a:xfrm>
+            <a:off x="5897880" y="3191256"/>
+            <a:ext cx="3017520" cy="9144"/>
+          </a:xfrm>
+          <a:prstGeom prst="rect">
+            <a:avLst/>
+          </a:prstGeom>
+          <a:solidFill>
+            <a:srgbClr val="E0E0E0"/>
+          </a:solidFill>
+          <a:ln>
+            <a:noFill/>
+          </a:ln>
+        </p:spPr>
+        <p:style>
+          <a:lnRef idx="1">
+            <a:schemeClr val="accent1"/>
+          </a:lnRef>
+          <a:fillRef idx="3">
+            <a:schemeClr val="accent1"/>
+          </a:fillRef>
+          <a:effectRef idx="2">
+            <a:schemeClr val="accent1"/>
+          </a:effectRef>
+          <a:fontRef idx="minor">
+            <a:schemeClr val="lt1"/>
+          </a:fontRef>
+        </p:style>
+        <p:txBody>
+          <a:bodyPr rtlCol="0" anchor="ctr"/>
+          <a:lstStyle/>
+          <a:p>
+            <a:pPr algn="ctr"/>
+          </a:p>
+        </p:txBody>
+      </p:sp>
+      <p:sp>
+        <p:nvSpPr>
+          <p:cNvPr id="106" name="TextBox 105"/>
+          <p:cNvSpPr txBox="1"/>
+          <p:nvPr/>
+        </p:nvSpPr>
+        <p:spPr>
+          <a:xfrm>
+            <a:off x="5989320" y="3209544"/>
+            <a:ext cx="2834640" cy="438912"/>
+          </a:xfrm>
+          <a:prstGeom prst="rect">
+            <a:avLst/>
+          </a:prstGeom>
+          <a:noFill/>
+        </p:spPr>
+        <p:txBody>
+          <a:bodyPr wrap="square">
+            <a:spAutoFit/>
+          </a:bodyPr>
+          <a:lstStyle/>
+          <a:p>
+            <a:pPr algn="l"/>
+            <a:r>
+              <a:rPr sz="900" b="0" i="0">
+                <a:solidFill>
+                  <a:srgbClr val="404040"/>
+                </a:solidFill>
+              </a:rPr>
+              <a:t>• CS, VCC, DI 모두 정상인데
+U24 DO가 응답 없음</a:t>
+            </a:r>
+          </a:p>
+        </p:txBody>
+      </p:sp>
+      <p:sp>
+        <p:nvSpPr>
+          <p:cNvPr id="107" name="Rectangle 106"/>
+          <p:cNvSpPr/>
+          <p:nvPr/>
+        </p:nvSpPr>
+        <p:spPr>
+          <a:xfrm>
+            <a:off x="5897880" y="3648456"/>
+            <a:ext cx="3017520" cy="9144"/>
+          </a:xfrm>
+          <a:prstGeom prst="rect">
+            <a:avLst/>
+          </a:prstGeom>
+          <a:solidFill>
+            <a:srgbClr val="E0E0E0"/>
+          </a:solidFill>
+          <a:ln>
+            <a:noFill/>
+          </a:ln>
+        </p:spPr>
+        <p:style>
+          <a:lnRef idx="1">
+            <a:schemeClr val="accent1"/>
+          </a:lnRef>
+          <a:fillRef idx="3">
+            <a:schemeClr val="accent1"/>
+          </a:fillRef>
+          <a:effectRef idx="2">
+            <a:schemeClr val="accent1"/>
+          </a:effectRef>
+          <a:fontRef idx="minor">
+            <a:schemeClr val="lt1"/>
+          </a:fontRef>
+        </p:style>
+        <p:txBody>
+          <a:bodyPr rtlCol="0" anchor="ctr"/>
+          <a:lstStyle/>
+          <a:p>
+            <a:pPr algn="ctr"/>
+          </a:p>
+        </p:txBody>
+      </p:sp>
+      <p:sp>
+        <p:nvSpPr>
+          <p:cNvPr id="108" name="TextBox 107"/>
+          <p:cNvSpPr txBox="1"/>
+          <p:nvPr/>
+        </p:nvSpPr>
+        <p:spPr>
+          <a:xfrm>
+            <a:off x="5989320" y="3666744"/>
+            <a:ext cx="2834640" cy="438912"/>
+          </a:xfrm>
+          <a:prstGeom prst="rect">
+            <a:avLst/>
+          </a:prstGeom>
+          <a:noFill/>
+        </p:spPr>
+        <p:txBody>
+          <a:bodyPr wrap="square">
+            <a:spAutoFit/>
+          </a:bodyPr>
+          <a:lstStyle/>
+          <a:p>
+            <a:pPr algn="l"/>
+            <a:r>
+              <a:rPr sz="900" b="0" i="0">
+                <a:solidFill>
+                  <a:srgbClr val="404040"/>
+                </a:solidFill>
+              </a:rPr>
+              <a:t>• 93C56 규격:
+  CS=HIGH + SK클락 수신 후 DO 구동
+  → SK 미도달 가능성</a:t>
+            </a:r>
+          </a:p>
+        </p:txBody>
+      </p:sp>
+      <p:sp>
+        <p:nvSpPr>
+          <p:cNvPr id="109" name="Rectangle 108"/>
+          <p:cNvSpPr/>
+          <p:nvPr/>
+        </p:nvSpPr>
+        <p:spPr>
+          <a:xfrm>
+            <a:off x="5897880" y="4105656"/>
+            <a:ext cx="3017520" cy="9144"/>
+          </a:xfrm>
+          <a:prstGeom prst="rect">
+            <a:avLst/>
+          </a:prstGeom>
+          <a:solidFill>
+            <a:srgbClr val="E0E0E0"/>
+          </a:solidFill>
+          <a:ln>
+            <a:noFill/>
+          </a:ln>
+        </p:spPr>
+        <p:style>
+          <a:lnRef idx="1">
+            <a:schemeClr val="accent1"/>
+          </a:lnRef>
+          <a:fillRef idx="3">
+            <a:schemeClr val="accent1"/>
+          </a:fillRef>
+          <a:effectRef idx="2">
+            <a:schemeClr val="accent1"/>
+          </a:effectRef>
+          <a:fontRef idx="minor">
+            <a:schemeClr val="lt1"/>
+          </a:fontRef>
+        </p:style>
+        <p:txBody>
+          <a:bodyPr rtlCol="0" anchor="ctr"/>
+          <a:lstStyle/>
+          <a:p>
+            <a:pPr algn="ctr"/>
+          </a:p>
+        </p:txBody>
+      </p:sp>
+      <p:sp>
+        <p:nvSpPr>
+          <p:cNvPr id="110" name="TextBox 109"/>
+          <p:cNvSpPr txBox="1"/>
+          <p:nvPr/>
+        </p:nvSpPr>
+        <p:spPr>
+          <a:xfrm>
+            <a:off x="5989320" y="4123944"/>
+            <a:ext cx="2834640" cy="438912"/>
+          </a:xfrm>
+          <a:prstGeom prst="rect">
+            <a:avLst/>
+          </a:prstGeom>
+          <a:noFill/>
+        </p:spPr>
+        <p:txBody>
+          <a:bodyPr wrap="square">
+            <a:spAutoFit/>
+          </a:bodyPr>
+          <a:lstStyle/>
+          <a:p>
+            <a:pPr algn="l"/>
+            <a:r>
+              <a:rPr sz="900" b="0" i="0">
+                <a:solidFill>
+                  <a:srgbClr val="404040"/>
+                </a:solidFill>
+              </a:rPr>
+              <a:t>• 가능한 원인:
+  A) SK 클락 칩 미도달
+  B) DO 핀 GND 단락</a:t>
+            </a:r>
+          </a:p>
+        </p:txBody>
+      </p:sp>
+    </p:spTree>
+  </p:cSld>
+  <p:clrMapOvr>
+    <a:masterClrMapping/>
+  </p:clrMapOvr>
+</p:sld>
+</file>
+
+<file path=ppt/slides/slide17.xml><?xml version="1.0" encoding="utf-8"?>
+<p:sld xmlns:a="http://schemas.openxmlformats.org/drawingml/2006/main" xmlns:p="http://schemas.openxmlformats.org/presentationml/2006/main" xmlns:r="http://schemas.openxmlformats.org/officeDocument/2006/relationships">
+  <p:cSld>
+    <p:spTree>
+      <p:nvGrpSpPr>
+        <p:cNvPr id="1" name=""/>
+        <p:cNvGrpSpPr/>
+        <p:nvPr/>
+      </p:nvGrpSpPr>
+      <p:grpSpPr/>
+      <p:sp>
+        <p:nvSpPr>
+          <p:cNvPr id="2" name="Rectangle 1"/>
+          <p:cNvSpPr/>
+          <p:nvPr/>
+        </p:nvSpPr>
+        <p:spPr>
+          <a:xfrm>
+            <a:off x="0" y="0"/>
+            <a:ext cx="9144000" cy="640080"/>
+          </a:xfrm>
+          <a:prstGeom prst="rect">
+            <a:avLst/>
+          </a:prstGeom>
+          <a:solidFill>
+            <a:srgbClr val="1F497D"/>
+          </a:solidFill>
+          <a:ln>
+            <a:noFill/>
+          </a:ln>
+        </p:spPr>
+        <p:style>
+          <a:lnRef idx="1">
+            <a:schemeClr val="accent1"/>
+          </a:lnRef>
+          <a:fillRef idx="3">
+            <a:schemeClr val="accent1"/>
+          </a:fillRef>
+          <a:effectRef idx="2">
+            <a:schemeClr val="accent1"/>
+          </a:effectRef>
+          <a:fontRef idx="minor">
+            <a:schemeClr val="lt1"/>
+          </a:fontRef>
+        </p:style>
+        <p:txBody>
+          <a:bodyPr rtlCol="0" anchor="ctr"/>
+          <a:lstStyle/>
+          <a:p>
+            <a:pPr algn="ctr"/>
+          </a:p>
+        </p:txBody>
+      </p:sp>
+      <p:sp>
+        <p:nvSpPr>
+          <p:cNvPr id="3" name="TextBox 2"/>
+          <p:cNvSpPr txBox="1"/>
+          <p:nvPr/>
+        </p:nvSpPr>
+        <p:spPr>
+          <a:xfrm>
+            <a:off x="137160" y="45720"/>
+            <a:ext cx="7772400" cy="548640"/>
+          </a:xfrm>
+          <a:prstGeom prst="rect">
+            <a:avLst/>
+          </a:prstGeom>
+          <a:noFill/>
+        </p:spPr>
+        <p:txBody>
+          <a:bodyPr wrap="square">
+            <a:spAutoFit/>
+          </a:bodyPr>
+          <a:lstStyle/>
+          <a:p>
+            <a:pPr algn="l"/>
+            <a:r>
+              <a:rPr sz="2000" b="1" i="0">
+                <a:solidFill>
+                  <a:srgbClr val="FFFFFF"/>
+                </a:solidFill>
+              </a:rPr>
+              <a:t>디버그 코드 변경 사항</a:t>
+            </a:r>
+          </a:p>
+        </p:txBody>
+      </p:sp>
+      <p:sp>
+        <p:nvSpPr>
+          <p:cNvPr id="4" name="TextBox 3"/>
+          <p:cNvSpPr txBox="1"/>
+          <p:nvPr/>
+        </p:nvSpPr>
+        <p:spPr>
+          <a:xfrm>
+            <a:off x="137160" y="658368"/>
+            <a:ext cx="8686800" cy="320040"/>
+          </a:xfrm>
+          <a:prstGeom prst="rect">
+            <a:avLst/>
+          </a:prstGeom>
+          <a:noFill/>
+        </p:spPr>
+        <p:txBody>
+          <a:bodyPr wrap="square">
+            <a:spAutoFit/>
+          </a:bodyPr>
+          <a:lstStyle/>
+          <a:p>
+            <a:pPr algn="l"/>
+            <a:r>
+              <a:rPr sz="1200" b="0" i="1">
+                <a:solidFill>
+                  <a:srgbClr val="2E74B5"/>
+                </a:solidFill>
+              </a:rPr>
+              <a:t>app_freertos.c / ee93c56.c 수정 내용</a:t>
+            </a:r>
+          </a:p>
+        </p:txBody>
+      </p:sp>
+      <p:sp>
+        <p:nvSpPr>
+          <p:cNvPr id="5" name="TextBox 4"/>
+          <p:cNvSpPr txBox="1"/>
+          <p:nvPr/>
+        </p:nvSpPr>
+        <p:spPr>
+          <a:xfrm>
+            <a:off x="274320" y="822960"/>
+            <a:ext cx="8595360" cy="292608"/>
+          </a:xfrm>
+          <a:prstGeom prst="rect">
+            <a:avLst/>
+          </a:prstGeom>
+          <a:noFill/>
+        </p:spPr>
+        <p:txBody>
+          <a:bodyPr wrap="square">
+            <a:spAutoFit/>
+          </a:bodyPr>
+          <a:lstStyle/>
+          <a:p>
+            <a:pPr algn="l"/>
+            <a:r>
+              <a:rPr sz="1400" b="1" i="0">
+                <a:solidFill>
+                  <a:srgbClr val="2E74B5"/>
+                </a:solidFill>
+              </a:rPr>
+              <a:t>app_freertos.c — DIAG 섹션 강화 (StartDetectTask)</a:t>
+            </a:r>
+          </a:p>
+        </p:txBody>
+      </p:sp>
+      <p:sp>
+        <p:nvSpPr>
+          <p:cNvPr id="6" name="Rectangle 5"/>
+          <p:cNvSpPr/>
+          <p:nvPr/>
+        </p:nvSpPr>
+        <p:spPr>
+          <a:xfrm>
+            <a:off x="274320" y="1170432"/>
+            <a:ext cx="8595360" cy="274320"/>
+          </a:xfrm>
+          <a:prstGeom prst="rect">
+            <a:avLst/>
+          </a:prstGeom>
+          <a:solidFill>
+            <a:srgbClr val="2E74B5"/>
+          </a:solidFill>
+          <a:ln>
+            <a:noFill/>
+          </a:ln>
+        </p:spPr>
+        <p:style>
+          <a:lnRef idx="1">
+            <a:schemeClr val="accent1"/>
+          </a:lnRef>
+          <a:fillRef idx="3">
+            <a:schemeClr val="accent1"/>
+          </a:fillRef>
+          <a:effectRef idx="2">
+            <a:schemeClr val="accent1"/>
+          </a:effectRef>
+          <a:fontRef idx="minor">
+            <a:schemeClr val="lt1"/>
+          </a:fontRef>
+        </p:style>
+        <p:txBody>
+          <a:bodyPr rtlCol="0" anchor="ctr"/>
+          <a:lstStyle/>
+          <a:p>
+            <a:pPr algn="ctr"/>
+          </a:p>
+        </p:txBody>
+      </p:sp>
+      <p:sp>
+        <p:nvSpPr>
+          <p:cNvPr id="7" name="TextBox 6"/>
+          <p:cNvSpPr txBox="1"/>
+          <p:nvPr/>
+        </p:nvSpPr>
+        <p:spPr>
+          <a:xfrm>
+            <a:off x="365760" y="1207008"/>
+            <a:ext cx="8321040" cy="219456"/>
+          </a:xfrm>
+          <a:prstGeom prst="rect">
+            <a:avLst/>
+          </a:prstGeom>
+          <a:noFill/>
+        </p:spPr>
+        <p:txBody>
+          <a:bodyPr wrap="square">
+            <a:spAutoFit/>
+          </a:bodyPr>
+          <a:lstStyle/>
+          <a:p>
+            <a:pPr algn="l"/>
+            <a:r>
+              <a:rPr sz="1100" b="1" i="0">
+                <a:solidFill>
+                  <a:srgbClr val="FFFFFF"/>
+                </a:solidFill>
+              </a:rPr>
+              <a:t>① PB4 GPIO IDR 진단 추가</a:t>
+            </a:r>
+          </a:p>
+        </p:txBody>
+      </p:sp>
+      <p:sp>
+        <p:nvSpPr>
+          <p:cNvPr id="8" name="Rectangle 7"/>
+          <p:cNvSpPr/>
+          <p:nvPr/>
+        </p:nvSpPr>
+        <p:spPr>
+          <a:xfrm>
+            <a:off x="274320" y="1463040"/>
+            <a:ext cx="8595360" cy="777240"/>
+          </a:xfrm>
+          <a:prstGeom prst="rect">
+            <a:avLst/>
+          </a:prstGeom>
+          <a:solidFill>
+            <a:srgbClr val="F2F2F2"/>
+          </a:solidFill>
+          <a:ln>
+            <a:solidFill>
+              <a:srgbClr val="2E74B5"/>
+            </a:solidFill>
+          </a:ln>
+        </p:spPr>
+        <p:style>
+          <a:lnRef idx="1">
+            <a:schemeClr val="accent1"/>
+          </a:lnRef>
+          <a:fillRef idx="3">
+            <a:schemeClr val="accent1"/>
+          </a:fillRef>
+          <a:effectRef idx="2">
+            <a:schemeClr val="accent1"/>
+          </a:effectRef>
+          <a:fontRef idx="minor">
+            <a:schemeClr val="lt1"/>
+          </a:fontRef>
+        </p:style>
+        <p:txBody>
+          <a:bodyPr rtlCol="0" anchor="ctr"/>
+          <a:lstStyle/>
+          <a:p>
+            <a:pPr algn="ctr"/>
+          </a:p>
+        </p:txBody>
+      </p:sp>
+      <p:sp>
+        <p:nvSpPr>
+          <p:cNvPr id="9" name="TextBox 8"/>
+          <p:cNvSpPr txBox="1"/>
+          <p:nvPr/>
+        </p:nvSpPr>
+        <p:spPr>
+          <a:xfrm>
+            <a:off x="384048" y="1499616"/>
+            <a:ext cx="8321040" cy="713232"/>
+          </a:xfrm>
+          <a:prstGeom prst="rect">
+            <a:avLst/>
+          </a:prstGeom>
+          <a:noFill/>
+        </p:spPr>
+        <p:txBody>
+          <a:bodyPr wrap="square">
+            <a:spAutoFit/>
+          </a:bodyPr>
+          <a:lstStyle/>
+          <a:p>
+            <a:pPr algn="l"/>
+            <a:r>
+              <a:rPr sz="900" b="0" i="0">
+                <a:solidFill>
+                  <a:srgbClr val="003366"/>
+                </a:solidFill>
+              </a:rPr>
+              <a:t>HAL_GPIO_WritePin(GPIOB, GPIO_PIN_4, GPIO_PIN_RESET);
+osDelay(1);
+uint8_t pb4_idr = (GPIOB-&gt;IDR &amp; GPIO_PIN_4) ? 1 : 0;
+uart_log("[DIAG] PB4(CS4) ODR=0 after, IDR=%u  %s\r\n", pb4_idr,
+         pb4_idr ? "*** HW SHORT/PULLUP ***" : "GPIO OK");</a:t>
+            </a:r>
+          </a:p>
+        </p:txBody>
+      </p:sp>
+      <p:sp>
+        <p:nvSpPr>
+          <p:cNvPr id="10" name="Rectangle 9"/>
+          <p:cNvSpPr/>
+          <p:nvPr/>
+        </p:nvSpPr>
+        <p:spPr>
+          <a:xfrm>
+            <a:off x="274320" y="2304288"/>
+            <a:ext cx="8595360" cy="274320"/>
+          </a:xfrm>
+          <a:prstGeom prst="rect">
+            <a:avLst/>
+          </a:prstGeom>
+          <a:solidFill>
+            <a:srgbClr val="2E74B5"/>
+          </a:solidFill>
+          <a:ln>
+            <a:noFill/>
+          </a:ln>
+        </p:spPr>
+        <p:style>
+          <a:lnRef idx="1">
+            <a:schemeClr val="accent1"/>
+          </a:lnRef>
+          <a:fillRef idx="3">
+            <a:schemeClr val="accent1"/>
+          </a:fillRef>
+          <a:effectRef idx="2">
+            <a:schemeClr val="accent1"/>
+          </a:effectRef>
+          <a:fontRef idx="minor">
+            <a:schemeClr val="lt1"/>
+          </a:fontRef>
+        </p:style>
+        <p:txBody>
+          <a:bodyPr rtlCol="0" anchor="ctr"/>
+          <a:lstStyle/>
+          <a:p>
+            <a:pPr algn="ctr"/>
+          </a:p>
+        </p:txBody>
+      </p:sp>
+      <p:sp>
+        <p:nvSpPr>
+          <p:cNvPr id="11" name="TextBox 10"/>
+          <p:cNvSpPr txBox="1"/>
+          <p:nvPr/>
+        </p:nvSpPr>
+        <p:spPr>
+          <a:xfrm>
+            <a:off x="365760" y="2340864"/>
+            <a:ext cx="8321040" cy="219456"/>
+          </a:xfrm>
+          <a:prstGeom prst="rect">
+            <a:avLst/>
+          </a:prstGeom>
+          <a:noFill/>
+        </p:spPr>
+        <p:txBody>
+          <a:bodyPr wrap="square">
+            <a:spAutoFit/>
+          </a:bodyPr>
+          <a:lstStyle/>
+          <a:p>
+            <a:pPr algn="l"/>
+            <a:r>
+              <a:rPr sz="1100" b="1" i="0">
+                <a:solidFill>
+                  <a:srgbClr val="FFFFFF"/>
+                </a:solidFill>
+              </a:rPr>
+              <a:t>② 칩 자동 식별 (EE_IdentifyChip) 추가</a:t>
+            </a:r>
+          </a:p>
+        </p:txBody>
+      </p:sp>
+      <p:sp>
+        <p:nvSpPr>
+          <p:cNvPr id="12" name="Rectangle 11"/>
+          <p:cNvSpPr/>
+          <p:nvPr/>
+        </p:nvSpPr>
+        <p:spPr>
+          <a:xfrm>
+            <a:off x="274320" y="2596896"/>
+            <a:ext cx="8595360" cy="777240"/>
+          </a:xfrm>
+          <a:prstGeom prst="rect">
+            <a:avLst/>
+          </a:prstGeom>
+          <a:solidFill>
+            <a:srgbClr val="F2F2F2"/>
+          </a:solidFill>
+          <a:ln>
+            <a:solidFill>
+              <a:srgbClr val="2E74B5"/>
+            </a:solidFill>
+          </a:ln>
+        </p:spPr>
+        <p:style>
+          <a:lnRef idx="1">
+            <a:schemeClr val="accent1"/>
+          </a:lnRef>
+          <a:fillRef idx="3">
+            <a:schemeClr val="accent1"/>
+          </a:fillRef>
+          <a:effectRef idx="2">
+            <a:schemeClr val="accent1"/>
+          </a:effectRef>
+          <a:fontRef idx="minor">
+            <a:schemeClr val="lt1"/>
+          </a:fontRef>
+        </p:style>
+        <p:txBody>
+          <a:bodyPr rtlCol="0" anchor="ctr"/>
+          <a:lstStyle/>
+          <a:p>
+            <a:pPr algn="ctr"/>
+          </a:p>
+        </p:txBody>
+      </p:sp>
+      <p:sp>
+        <p:nvSpPr>
+          <p:cNvPr id="13" name="TextBox 12"/>
+          <p:cNvSpPr txBox="1"/>
+          <p:nvPr/>
+        </p:nvSpPr>
+        <p:spPr>
+          <a:xfrm>
+            <a:off x="384048" y="2633472"/>
+            <a:ext cx="8321040" cy="713232"/>
+          </a:xfrm>
+          <a:prstGeom prst="rect">
+            <a:avLst/>
+          </a:prstGeom>
+          <a:noFill/>
+        </p:spPr>
+        <p:txBody>
+          <a:bodyPr wrap="square">
+            <a:spAutoFit/>
+          </a:bodyPr>
+          <a:lstStyle/>
+          <a:p>
+            <a:pPr algn="l"/>
+            <a:r>
+              <a:rPr sz="900" b="0" i="0">
+                <a:solidFill>
+                  <a:srgbClr val="003366"/>
+                </a:solidFill>
+              </a:rPr>
+              <a:t>EE_ChipType ctype = EE_IdentifyChip();
+uart_log("[DIAG] ChipType=%-7s  addr_bits=%u  num_addrs=%u\r\n",
+         cname, (unsigned)g_addr_bits, (unsigned)g_num_addrs);</a:t>
+            </a:r>
+          </a:p>
+        </p:txBody>
+      </p:sp>
+      <p:sp>
+        <p:nvSpPr>
+          <p:cNvPr id="14" name="TextBox 13"/>
+          <p:cNvSpPr txBox="1"/>
+          <p:nvPr/>
+        </p:nvSpPr>
+        <p:spPr>
+          <a:xfrm>
+            <a:off x="274320" y="2926080"/>
+            <a:ext cx="8595360" cy="292608"/>
+          </a:xfrm>
+          <a:prstGeom prst="rect">
+            <a:avLst/>
+          </a:prstGeom>
+          <a:noFill/>
+        </p:spPr>
+        <p:txBody>
+          <a:bodyPr wrap="square">
+            <a:spAutoFit/>
+          </a:bodyPr>
+          <a:lstStyle/>
+          <a:p>
+            <a:pPr algn="l"/>
+            <a:r>
+              <a:rPr sz="1400" b="1" i="0">
+                <a:solidFill>
+                  <a:srgbClr val="2E74B5"/>
+                </a:solidFill>
+              </a:rPr>
+              <a:t>ee93c56.c — EE_IdentifyChip() 구현</a:t>
+            </a:r>
+          </a:p>
+        </p:txBody>
+      </p:sp>
+      <p:sp>
+        <p:nvSpPr>
+          <p:cNvPr id="15" name="Rectangle 14"/>
+          <p:cNvSpPr/>
+          <p:nvPr/>
+        </p:nvSpPr>
+        <p:spPr>
+          <a:xfrm>
+            <a:off x="274320" y="3255264"/>
+            <a:ext cx="1097280" cy="274320"/>
+          </a:xfrm>
+          <a:prstGeom prst="rect">
+            <a:avLst/>
+          </a:prstGeom>
+          <a:solidFill>
+            <a:srgbClr val="2E74B5"/>
+          </a:solidFill>
+          <a:ln>
+            <a:noFill/>
+          </a:ln>
+        </p:spPr>
+        <p:style>
+          <a:lnRef idx="1">
+            <a:schemeClr val="accent1"/>
+          </a:lnRef>
+          <a:fillRef idx="3">
+            <a:schemeClr val="accent1"/>
+          </a:fillRef>
+          <a:effectRef idx="2">
+            <a:schemeClr val="accent1"/>
+          </a:effectRef>
+          <a:fontRef idx="minor">
+            <a:schemeClr val="lt1"/>
+          </a:fontRef>
+        </p:style>
+        <p:txBody>
+          <a:bodyPr rtlCol="0" anchor="ctr"/>
+          <a:lstStyle/>
+          <a:p>
+            <a:pPr algn="ctr"/>
+          </a:p>
+        </p:txBody>
+      </p:sp>
+      <p:sp>
+        <p:nvSpPr>
+          <p:cNvPr id="16" name="TextBox 15"/>
+          <p:cNvSpPr txBox="1"/>
+          <p:nvPr/>
+        </p:nvSpPr>
+        <p:spPr>
+          <a:xfrm>
+            <a:off x="320040" y="3291840"/>
+            <a:ext cx="1005840" cy="219456"/>
+          </a:xfrm>
+          <a:prstGeom prst="rect">
+            <a:avLst/>
+          </a:prstGeom>
+          <a:noFill/>
+        </p:spPr>
+        <p:txBody>
+          <a:bodyPr wrap="square">
+            <a:spAutoFit/>
+          </a:bodyPr>
+          <a:lstStyle/>
+          <a:p>
+            <a:pPr algn="l"/>
+            <a:r>
+              <a:rPr sz="1000" b="1" i="0">
+                <a:solidFill>
+                  <a:srgbClr val="FFFFFF"/>
+                </a:solidFill>
+              </a:rPr>
+              <a:t>기능</a:t>
+            </a:r>
+          </a:p>
+        </p:txBody>
+      </p:sp>
+      <p:sp>
+        <p:nvSpPr>
+          <p:cNvPr id="17" name="TextBox 16"/>
+          <p:cNvSpPr txBox="1"/>
+          <p:nvPr/>
+        </p:nvSpPr>
+        <p:spPr>
+          <a:xfrm>
+            <a:off x="1444752" y="3291840"/>
+            <a:ext cx="7406640" cy="256032"/>
+          </a:xfrm>
+          <a:prstGeom prst="rect">
+            <a:avLst/>
+          </a:prstGeom>
+          <a:noFill/>
+        </p:spPr>
+        <p:txBody>
+          <a:bodyPr wrap="square">
+            <a:spAutoFit/>
+          </a:bodyPr>
+          <a:lstStyle/>
+          <a:p>
+            <a:pPr algn="l"/>
+            <a:r>
+              <a:rPr sz="1000" b="0" i="0">
+                <a:solidFill>
+                  <a:srgbClr val="404040"/>
+                </a:solidFill>
+              </a:rPr>
+              <a:t>93C56 vs 93C46 자동 식별 (주소 범위 테스트 방식)</a:t>
+            </a:r>
+          </a:p>
+        </p:txBody>
+      </p:sp>
+      <p:sp>
+        <p:nvSpPr>
+          <p:cNvPr id="18" name="Rectangle 17"/>
+          <p:cNvSpPr/>
+          <p:nvPr/>
+        </p:nvSpPr>
+        <p:spPr>
+          <a:xfrm>
+            <a:off x="274320" y="3547872"/>
+            <a:ext cx="1097280" cy="274320"/>
+          </a:xfrm>
+          <a:prstGeom prst="rect">
+            <a:avLst/>
+          </a:prstGeom>
+          <a:solidFill>
+            <a:srgbClr val="2E74B5"/>
+          </a:solidFill>
+          <a:ln>
+            <a:noFill/>
+          </a:ln>
+        </p:spPr>
+        <p:style>
+          <a:lnRef idx="1">
+            <a:schemeClr val="accent1"/>
+          </a:lnRef>
+          <a:fillRef idx="3">
+            <a:schemeClr val="accent1"/>
+          </a:fillRef>
+          <a:effectRef idx="2">
+            <a:schemeClr val="accent1"/>
+          </a:effectRef>
+          <a:fontRef idx="minor">
+            <a:schemeClr val="lt1"/>
+          </a:fontRef>
+        </p:style>
+        <p:txBody>
+          <a:bodyPr rtlCol="0" anchor="ctr"/>
+          <a:lstStyle/>
+          <a:p>
+            <a:pPr algn="ctr"/>
+          </a:p>
+        </p:txBody>
+      </p:sp>
+      <p:sp>
+        <p:nvSpPr>
+          <p:cNvPr id="19" name="TextBox 18"/>
+          <p:cNvSpPr txBox="1"/>
+          <p:nvPr/>
+        </p:nvSpPr>
+        <p:spPr>
+          <a:xfrm>
+            <a:off x="320040" y="3584448"/>
+            <a:ext cx="1005840" cy="219456"/>
+          </a:xfrm>
+          <a:prstGeom prst="rect">
+            <a:avLst/>
+          </a:prstGeom>
+          <a:noFill/>
+        </p:spPr>
+        <p:txBody>
+          <a:bodyPr wrap="square">
+            <a:spAutoFit/>
+          </a:bodyPr>
+          <a:lstStyle/>
+          <a:p>
+            <a:pPr algn="l"/>
+            <a:r>
+              <a:rPr sz="1000" b="1" i="0">
+                <a:solidFill>
+                  <a:srgbClr val="FFFFFF"/>
+                </a:solidFill>
+              </a:rPr>
+              <a:t>방법</a:t>
+            </a:r>
+          </a:p>
+        </p:txBody>
+      </p:sp>
+      <p:sp>
+        <p:nvSpPr>
+          <p:cNvPr id="20" name="TextBox 19"/>
+          <p:cNvSpPr txBox="1"/>
+          <p:nvPr/>
+        </p:nvSpPr>
+        <p:spPr>
+          <a:xfrm>
+            <a:off x="1444752" y="3584448"/>
+            <a:ext cx="7406640" cy="256032"/>
+          </a:xfrm>
+          <a:prstGeom prst="rect">
+            <a:avLst/>
+          </a:prstGeom>
+          <a:noFill/>
+        </p:spPr>
+        <p:txBody>
+          <a:bodyPr wrap="square">
+            <a:spAutoFit/>
+          </a:bodyPr>
+          <a:lstStyle/>
+          <a:p>
+            <a:pPr algn="l"/>
+            <a:r>
+              <a:rPr sz="1000" b="0" i="0">
+                <a:solidFill>
+                  <a:srgbClr val="404040"/>
+                </a:solidFill>
+              </a:rPr>
+              <a:t>g_addr_bits=8 (93C56)로 addr 200에 쓰기/읽기 → 성공 시 93C56</a:t>
+            </a:r>
+          </a:p>
+        </p:txBody>
+      </p:sp>
+      <p:sp>
+        <p:nvSpPr>
+          <p:cNvPr id="21" name="Rectangle 20"/>
+          <p:cNvSpPr/>
+          <p:nvPr/>
+        </p:nvSpPr>
+        <p:spPr>
+          <a:xfrm>
+            <a:off x="274320" y="3840480"/>
+            <a:ext cx="1097280" cy="274320"/>
+          </a:xfrm>
+          <a:prstGeom prst="rect">
+            <a:avLst/>
+          </a:prstGeom>
+          <a:solidFill>
+            <a:srgbClr val="2E74B5"/>
+          </a:solidFill>
+          <a:ln>
+            <a:noFill/>
+          </a:ln>
+        </p:spPr>
+        <p:style>
+          <a:lnRef idx="1">
+            <a:schemeClr val="accent1"/>
+          </a:lnRef>
+          <a:fillRef idx="3">
+            <a:schemeClr val="accent1"/>
+          </a:fillRef>
+          <a:effectRef idx="2">
+            <a:schemeClr val="accent1"/>
+          </a:effectRef>
+          <a:fontRef idx="minor">
+            <a:schemeClr val="lt1"/>
+          </a:fontRef>
+        </p:style>
+        <p:txBody>
+          <a:bodyPr rtlCol="0" anchor="ctr"/>
+          <a:lstStyle/>
+          <a:p>
+            <a:pPr algn="ctr"/>
+          </a:p>
+        </p:txBody>
+      </p:sp>
+      <p:sp>
+        <p:nvSpPr>
+          <p:cNvPr id="22" name="TextBox 21"/>
+          <p:cNvSpPr txBox="1"/>
+          <p:nvPr/>
+        </p:nvSpPr>
+        <p:spPr>
+          <a:xfrm>
+            <a:off x="320040" y="3877056"/>
+            <a:ext cx="1005840" cy="219456"/>
+          </a:xfrm>
+          <a:prstGeom prst="rect">
+            <a:avLst/>
+          </a:prstGeom>
+          <a:noFill/>
+        </p:spPr>
+        <p:txBody>
+          <a:bodyPr wrap="square">
+            <a:spAutoFit/>
+          </a:bodyPr>
+          <a:lstStyle/>
+          <a:p>
+            <a:pPr algn="l"/>
+            <a:r>
+              <a:rPr sz="1000" b="1" i="0">
+                <a:solidFill>
+                  <a:srgbClr val="FFFFFF"/>
+                </a:solidFill>
+              </a:rPr>
+              <a:t>방법</a:t>
+            </a:r>
+          </a:p>
+        </p:txBody>
+      </p:sp>
+      <p:sp>
+        <p:nvSpPr>
+          <p:cNvPr id="23" name="TextBox 22"/>
+          <p:cNvSpPr txBox="1"/>
+          <p:nvPr/>
+        </p:nvSpPr>
+        <p:spPr>
+          <a:xfrm>
+            <a:off x="1444752" y="3877056"/>
+            <a:ext cx="7406640" cy="256032"/>
+          </a:xfrm>
+          <a:prstGeom prst="rect">
+            <a:avLst/>
+          </a:prstGeom>
+          <a:noFill/>
+        </p:spPr>
+        <p:txBody>
+          <a:bodyPr wrap="square">
+            <a:spAutoFit/>
+          </a:bodyPr>
+          <a:lstStyle/>
+          <a:p>
+            <a:pPr algn="l"/>
+            <a:r>
+              <a:rPr sz="1000" b="0" i="0">
+                <a:solidFill>
+                  <a:srgbClr val="404040"/>
+                </a:solidFill>
+              </a:rPr>
+              <a:t>실패 시 g_addr_bits=7 (93C46)로 addr 100에 쓰기/읽기 재시도</a:t>
+            </a:r>
+          </a:p>
+        </p:txBody>
+      </p:sp>
+      <p:sp>
+        <p:nvSpPr>
+          <p:cNvPr id="24" name="Rectangle 23"/>
+          <p:cNvSpPr/>
+          <p:nvPr/>
+        </p:nvSpPr>
+        <p:spPr>
+          <a:xfrm>
+            <a:off x="274320" y="4133088"/>
+            <a:ext cx="1097280" cy="274320"/>
+          </a:xfrm>
+          <a:prstGeom prst="rect">
+            <a:avLst/>
+          </a:prstGeom>
+          <a:solidFill>
+            <a:srgbClr val="2E74B5"/>
+          </a:solidFill>
+          <a:ln>
+            <a:noFill/>
+          </a:ln>
+        </p:spPr>
+        <p:style>
+          <a:lnRef idx="1">
+            <a:schemeClr val="accent1"/>
+          </a:lnRef>
+          <a:fillRef idx="3">
+            <a:schemeClr val="accent1"/>
+          </a:fillRef>
+          <a:effectRef idx="2">
+            <a:schemeClr val="accent1"/>
+          </a:effectRef>
+          <a:fontRef idx="minor">
+            <a:schemeClr val="lt1"/>
+          </a:fontRef>
+        </p:style>
+        <p:txBody>
+          <a:bodyPr rtlCol="0" anchor="ctr"/>
+          <a:lstStyle/>
+          <a:p>
+            <a:pPr algn="ctr"/>
+          </a:p>
+        </p:txBody>
+      </p:sp>
+      <p:sp>
+        <p:nvSpPr>
+          <p:cNvPr id="25" name="TextBox 24"/>
+          <p:cNvSpPr txBox="1"/>
+          <p:nvPr/>
+        </p:nvSpPr>
+        <p:spPr>
+          <a:xfrm>
+            <a:off x="320040" y="4169664"/>
+            <a:ext cx="1005840" cy="219456"/>
+          </a:xfrm>
+          <a:prstGeom prst="rect">
+            <a:avLst/>
+          </a:prstGeom>
+          <a:noFill/>
+        </p:spPr>
+        <p:txBody>
+          <a:bodyPr wrap="square">
+            <a:spAutoFit/>
+          </a:bodyPr>
+          <a:lstStyle/>
+          <a:p>
+            <a:pPr algn="l"/>
+            <a:r>
+              <a:rPr sz="1000" b="1" i="0">
+                <a:solidFill>
+                  <a:srgbClr val="FFFFFF"/>
+                </a:solidFill>
+              </a:rPr>
+              <a:t>결과</a:t>
+            </a:r>
+          </a:p>
+        </p:txBody>
+      </p:sp>
+      <p:sp>
+        <p:nvSpPr>
+          <p:cNvPr id="26" name="TextBox 25"/>
+          <p:cNvSpPr txBox="1"/>
+          <p:nvPr/>
+        </p:nvSpPr>
+        <p:spPr>
+          <a:xfrm>
+            <a:off x="1444752" y="4169664"/>
+            <a:ext cx="7406640" cy="256032"/>
+          </a:xfrm>
+          <a:prstGeom prst="rect">
+            <a:avLst/>
+          </a:prstGeom>
+          <a:noFill/>
+        </p:spPr>
+        <p:txBody>
+          <a:bodyPr wrap="square">
+            <a:spAutoFit/>
+          </a:bodyPr>
+          <a:lstStyle/>
+          <a:p>
+            <a:pPr algn="l"/>
+            <a:r>
+              <a:rPr sz="1000" b="0" i="0">
+                <a:solidFill>
+                  <a:srgbClr val="378638"/>
+                </a:solidFill>
+              </a:rPr>
+              <a:t>g_chip_type, g_addr_bits, g_num_addrs 전역 변수 자동 설정</a:t>
+            </a:r>
+          </a:p>
+        </p:txBody>
+      </p:sp>
+      <p:sp>
+        <p:nvSpPr>
+          <p:cNvPr id="27" name="Rectangle 26"/>
+          <p:cNvSpPr/>
+          <p:nvPr/>
+        </p:nvSpPr>
+        <p:spPr>
+          <a:xfrm>
+            <a:off x="274320" y="4425696"/>
+            <a:ext cx="1097280" cy="274320"/>
+          </a:xfrm>
+          <a:prstGeom prst="rect">
+            <a:avLst/>
+          </a:prstGeom>
+          <a:solidFill>
+            <a:srgbClr val="2E74B5"/>
+          </a:solidFill>
+          <a:ln>
+            <a:noFill/>
+          </a:ln>
+        </p:spPr>
+        <p:style>
+          <a:lnRef idx="1">
+            <a:schemeClr val="accent1"/>
+          </a:lnRef>
+          <a:fillRef idx="3">
+            <a:schemeClr val="accent1"/>
+          </a:fillRef>
+          <a:effectRef idx="2">
+            <a:schemeClr val="accent1"/>
+          </a:effectRef>
+          <a:fontRef idx="minor">
+            <a:schemeClr val="lt1"/>
+          </a:fontRef>
+        </p:style>
+        <p:txBody>
+          <a:bodyPr rtlCol="0" anchor="ctr"/>
+          <a:lstStyle/>
+          <a:p>
+            <a:pPr algn="ctr"/>
+          </a:p>
+        </p:txBody>
+      </p:sp>
+      <p:sp>
+        <p:nvSpPr>
+          <p:cNvPr id="28" name="TextBox 27"/>
+          <p:cNvSpPr txBox="1"/>
+          <p:nvPr/>
+        </p:nvSpPr>
+        <p:spPr>
+          <a:xfrm>
+            <a:off x="320040" y="4462272"/>
+            <a:ext cx="1005840" cy="219456"/>
+          </a:xfrm>
+          <a:prstGeom prst="rect">
+            <a:avLst/>
+          </a:prstGeom>
+          <a:noFill/>
+        </p:spPr>
+        <p:txBody>
+          <a:bodyPr wrap="square">
+            <a:spAutoFit/>
+          </a:bodyPr>
+          <a:lstStyle/>
+          <a:p>
+            <a:pPr algn="l"/>
+            <a:r>
+              <a:rPr sz="1000" b="1" i="0">
+                <a:solidFill>
+                  <a:srgbClr val="FFFFFF"/>
+                </a:solidFill>
+              </a:rPr>
+              <a:t>한계</a:t>
+            </a:r>
+          </a:p>
+        </p:txBody>
+      </p:sp>
+      <p:sp>
+        <p:nvSpPr>
+          <p:cNvPr id="29" name="TextBox 28"/>
+          <p:cNvSpPr txBox="1"/>
+          <p:nvPr/>
+        </p:nvSpPr>
+        <p:spPr>
+          <a:xfrm>
+            <a:off x="1444752" y="4462272"/>
+            <a:ext cx="7406640" cy="256032"/>
+          </a:xfrm>
+          <a:prstGeom prst="rect">
+            <a:avLst/>
+          </a:prstGeom>
+          <a:noFill/>
+        </p:spPr>
+        <p:txBody>
+          <a:bodyPr wrap="square">
+            <a:spAutoFit/>
+          </a:bodyPr>
+          <a:lstStyle/>
+          <a:p>
+            <a:pPr algn="l"/>
+            <a:r>
+              <a:rPr sz="1000" b="0" i="0">
+                <a:solidFill>
+                  <a:srgbClr val="ED7D31"/>
+                </a:solidFill>
+              </a:rPr>
+              <a:t>칩 무반응 (DO=LOW) 시 UNKNOWN 반환 → 현재 상황</a:t>
+            </a:r>
+          </a:p>
+        </p:txBody>
+      </p:sp>
+    </p:spTree>
+  </p:cSld>
+  <p:clrMapOvr>
+    <a:masterClrMapping/>
+  </p:clrMapOvr>
+</p:sld>
+</file>
+
+<file path=ppt/slides/slide18.xml><?xml version="1.0" encoding="utf-8"?>
+<p:sld xmlns:a="http://schemas.openxmlformats.org/drawingml/2006/main" xmlns:p="http://schemas.openxmlformats.org/presentationml/2006/main" xmlns:r="http://schemas.openxmlformats.org/officeDocument/2006/relationships">
+  <p:cSld>
+    <p:spTree>
+      <p:nvGrpSpPr>
+        <p:cNvPr id="1" name=""/>
+        <p:cNvGrpSpPr/>
+        <p:nvPr/>
+      </p:nvGrpSpPr>
+      <p:grpSpPr/>
+      <p:sp>
+        <p:nvSpPr>
+          <p:cNvPr id="2" name="Rectangle 1"/>
+          <p:cNvSpPr/>
+          <p:nvPr/>
+        </p:nvSpPr>
+        <p:spPr>
+          <a:xfrm>
+            <a:off x="0" y="0"/>
+            <a:ext cx="9144000" cy="640080"/>
+          </a:xfrm>
+          <a:prstGeom prst="rect">
+            <a:avLst/>
+          </a:prstGeom>
+          <a:solidFill>
+            <a:srgbClr val="1F497D"/>
+          </a:solidFill>
+          <a:ln>
+            <a:noFill/>
+          </a:ln>
+        </p:spPr>
+        <p:style>
+          <a:lnRef idx="1">
+            <a:schemeClr val="accent1"/>
+          </a:lnRef>
+          <a:fillRef idx="3">
+            <a:schemeClr val="accent1"/>
+          </a:fillRef>
+          <a:effectRef idx="2">
+            <a:schemeClr val="accent1"/>
+          </a:effectRef>
+          <a:fontRef idx="minor">
+            <a:schemeClr val="lt1"/>
+          </a:fontRef>
+        </p:style>
+        <p:txBody>
+          <a:bodyPr rtlCol="0" anchor="ctr"/>
+          <a:lstStyle/>
+          <a:p>
+            <a:pPr algn="ctr"/>
+          </a:p>
+        </p:txBody>
+      </p:sp>
+      <p:sp>
+        <p:nvSpPr>
+          <p:cNvPr id="3" name="TextBox 2"/>
+          <p:cNvSpPr txBox="1"/>
+          <p:nvPr/>
+        </p:nvSpPr>
+        <p:spPr>
+          <a:xfrm>
+            <a:off x="137160" y="45720"/>
+            <a:ext cx="7772400" cy="548640"/>
+          </a:xfrm>
+          <a:prstGeom prst="rect">
+            <a:avLst/>
+          </a:prstGeom>
+          <a:noFill/>
+        </p:spPr>
+        <p:txBody>
+          <a:bodyPr wrap="square">
+            <a:spAutoFit/>
+          </a:bodyPr>
+          <a:lstStyle/>
+          <a:p>
+            <a:pPr algn="l"/>
+            <a:r>
+              <a:rPr sz="2000" b="1" i="0">
+                <a:solidFill>
+                  <a:srgbClr val="FFFFFF"/>
+                </a:solidFill>
+              </a:rPr>
+              <a:t>현재 상태 및 다음 진단 단계</a:t>
+            </a:r>
+          </a:p>
+        </p:txBody>
+      </p:sp>
+      <p:sp>
+        <p:nvSpPr>
+          <p:cNvPr id="4" name="TextBox 3"/>
+          <p:cNvSpPr txBox="1"/>
+          <p:nvPr/>
+        </p:nvSpPr>
+        <p:spPr>
+          <a:xfrm>
+            <a:off x="137160" y="658368"/>
+            <a:ext cx="8686800" cy="320040"/>
+          </a:xfrm>
+          <a:prstGeom prst="rect">
+            <a:avLst/>
+          </a:prstGeom>
+          <a:noFill/>
+        </p:spPr>
+        <p:txBody>
+          <a:bodyPr wrap="square">
+            <a:spAutoFit/>
+          </a:bodyPr>
+          <a:lstStyle/>
+          <a:p>
+            <a:pPr algn="l"/>
+            <a:r>
+              <a:rPr sz="1200" b="0" i="1">
+                <a:solidFill>
+                  <a:srgbClr val="2E74B5"/>
+                </a:solidFill>
+              </a:rPr>
+              <a:t>2026.04 기준</a:t>
+            </a:r>
+          </a:p>
+        </p:txBody>
+      </p:sp>
+      <p:sp>
+        <p:nvSpPr>
+          <p:cNvPr id="5" name="TextBox 4"/>
+          <p:cNvSpPr txBox="1"/>
+          <p:nvPr/>
+        </p:nvSpPr>
+        <p:spPr>
+          <a:xfrm>
+            <a:off x="274320" y="822960"/>
+            <a:ext cx="8595360" cy="292608"/>
+          </a:xfrm>
+          <a:prstGeom prst="rect">
+            <a:avLst/>
+          </a:prstGeom>
+          <a:noFill/>
+        </p:spPr>
+        <p:txBody>
+          <a:bodyPr wrap="square">
+            <a:spAutoFit/>
+          </a:bodyPr>
+          <a:lstStyle/>
+          <a:p>
+            <a:pPr algn="l"/>
+            <a:r>
+              <a:rPr sz="1500" b="1" i="0">
+                <a:solidFill>
+                  <a:srgbClr val="2E74B5"/>
+                </a:solidFill>
+              </a:rPr>
+              <a:t>현재 상태 요약</a:t>
+            </a:r>
+          </a:p>
+        </p:txBody>
+      </p:sp>
+      <p:sp>
+        <p:nvSpPr>
+          <p:cNvPr id="6" name="Rectangle 5"/>
+          <p:cNvSpPr/>
+          <p:nvPr/>
+        </p:nvSpPr>
+        <p:spPr>
+          <a:xfrm>
+            <a:off x="274320" y="1170432"/>
+            <a:ext cx="8595360" cy="274320"/>
+          </a:xfrm>
+          <a:prstGeom prst="rect">
+            <a:avLst/>
+          </a:prstGeom>
+          <a:solidFill>
+            <a:srgbClr val="378638"/>
+          </a:solidFill>
+          <a:ln>
+            <a:noFill/>
+          </a:ln>
+        </p:spPr>
+        <p:style>
+          <a:lnRef idx="1">
+            <a:schemeClr val="accent1"/>
+          </a:lnRef>
+          <a:fillRef idx="3">
+            <a:schemeClr val="accent1"/>
+          </a:fillRef>
+          <a:effectRef idx="2">
+            <a:schemeClr val="accent1"/>
+          </a:effectRef>
+          <a:fontRef idx="minor">
+            <a:schemeClr val="lt1"/>
+          </a:fontRef>
+        </p:style>
+        <p:txBody>
+          <a:bodyPr rtlCol="0" anchor="ctr"/>
+          <a:lstStyle/>
+          <a:p>
+            <a:pPr algn="ctr"/>
+          </a:p>
+        </p:txBody>
+      </p:sp>
+      <p:sp>
+        <p:nvSpPr>
+          <p:cNvPr id="7" name="TextBox 6"/>
+          <p:cNvSpPr txBox="1"/>
+          <p:nvPr/>
+        </p:nvSpPr>
+        <p:spPr>
+          <a:xfrm>
+            <a:off x="365760" y="1207008"/>
+            <a:ext cx="2743200" cy="219456"/>
+          </a:xfrm>
+          <a:prstGeom prst="rect">
+            <a:avLst/>
+          </a:prstGeom>
+          <a:noFill/>
+        </p:spPr>
+        <p:txBody>
+          <a:bodyPr wrap="square">
+            <a:spAutoFit/>
+          </a:bodyPr>
+          <a:lstStyle/>
+          <a:p>
+            <a:pPr algn="l"/>
+            <a:r>
+              <a:rPr sz="1200" b="1" i="0">
+                <a:solidFill>
+                  <a:srgbClr val="FFFFFF"/>
+                </a:solidFill>
+              </a:rPr>
+              <a:t>✓ 확인됨</a:t>
+            </a:r>
+          </a:p>
+        </p:txBody>
+      </p:sp>
+      <p:sp>
+        <p:nvSpPr>
+          <p:cNvPr id="8" name="TextBox 7"/>
+          <p:cNvSpPr txBox="1"/>
+          <p:nvPr/>
+        </p:nvSpPr>
+        <p:spPr>
+          <a:xfrm>
+            <a:off x="274320" y="1463040"/>
+            <a:ext cx="8595360" cy="256032"/>
+          </a:xfrm>
+          <a:prstGeom prst="rect">
+            <a:avLst/>
+          </a:prstGeom>
+          <a:noFill/>
+        </p:spPr>
+        <p:txBody>
+          <a:bodyPr wrap="square">
+            <a:spAutoFit/>
+          </a:bodyPr>
+          <a:lstStyle/>
+          <a:p>
+            <a:pPr algn="l"/>
+            <a:r>
+              <a:rPr sz="1000" b="0" i="0">
+                <a:solidFill>
+                  <a:srgbClr val="404040"/>
+                </a:solidFill>
+              </a:rPr>
+              <a:t>   • ORG = GND (x8 모드) — 전 칩 동일</a:t>
+            </a:r>
+          </a:p>
+        </p:txBody>
+      </p:sp>
+      <p:sp>
+        <p:nvSpPr>
+          <p:cNvPr id="9" name="TextBox 8"/>
+          <p:cNvSpPr txBox="1"/>
+          <p:nvPr/>
+        </p:nvSpPr>
+        <p:spPr>
+          <a:xfrm>
+            <a:off x="274320" y="1719072"/>
+            <a:ext cx="8595360" cy="256032"/>
+          </a:xfrm>
+          <a:prstGeom prst="rect">
+            <a:avLst/>
+          </a:prstGeom>
+          <a:noFill/>
+        </p:spPr>
+        <p:txBody>
+          <a:bodyPr wrap="square">
+            <a:spAutoFit/>
+          </a:bodyPr>
+          <a:lstStyle/>
+          <a:p>
+            <a:pPr algn="l"/>
+            <a:r>
+              <a:rPr sz="1000" b="0" i="0">
+                <a:solidFill>
+                  <a:srgbClr val="404040"/>
+                </a:solidFill>
+              </a:rPr>
+              <a:t>   • MUX CD4067 배선 — X0~X11 모두 연결됨</a:t>
+            </a:r>
+          </a:p>
+        </p:txBody>
+      </p:sp>
+      <p:sp>
+        <p:nvSpPr>
+          <p:cNvPr id="10" name="TextBox 9"/>
+          <p:cNvSpPr txBox="1"/>
+          <p:nvPr/>
+        </p:nvSpPr>
+        <p:spPr>
+          <a:xfrm>
+            <a:off x="274320" y="1975104"/>
+            <a:ext cx="8595360" cy="256032"/>
+          </a:xfrm>
+          <a:prstGeom prst="rect">
+            <a:avLst/>
+          </a:prstGeom>
+          <a:noFill/>
+        </p:spPr>
+        <p:txBody>
+          <a:bodyPr wrap="square">
+            <a:spAutoFit/>
+          </a:bodyPr>
+          <a:lstStyle/>
+          <a:p>
+            <a:pPr algn="l"/>
+            <a:r>
+              <a:rPr sz="1000" b="0" i="0">
+                <a:solidFill>
+                  <a:srgbClr val="404040"/>
+                </a:solidFill>
+              </a:rPr>
+              <a:t>   • VCC 3.3V — U24 (대표 확인), 정상</a:t>
+            </a:r>
+          </a:p>
+        </p:txBody>
+      </p:sp>
+      <p:sp>
+        <p:nvSpPr>
+          <p:cNvPr id="11" name="TextBox 10"/>
+          <p:cNvSpPr txBox="1"/>
+          <p:nvPr/>
+        </p:nvSpPr>
+        <p:spPr>
+          <a:xfrm>
+            <a:off x="274320" y="2231136"/>
+            <a:ext cx="8595360" cy="256032"/>
+          </a:xfrm>
+          <a:prstGeom prst="rect">
+            <a:avLst/>
+          </a:prstGeom>
+          <a:noFill/>
+        </p:spPr>
+        <p:txBody>
+          <a:bodyPr wrap="square">
+            <a:spAutoFit/>
+          </a:bodyPr>
+          <a:lstStyle/>
+          <a:p>
+            <a:pPr algn="l"/>
+            <a:r>
+              <a:rPr sz="1000" b="0" i="0">
+                <a:solidFill>
+                  <a:srgbClr val="404040"/>
+                </a:solidFill>
+              </a:rPr>
+              <a:t>   • CS 신호 — CS0~CS3, CS5~CS11 정상 펄스 출력</a:t>
+            </a:r>
+          </a:p>
+        </p:txBody>
+      </p:sp>
+      <p:sp>
+        <p:nvSpPr>
+          <p:cNvPr id="12" name="TextBox 11"/>
+          <p:cNvSpPr txBox="1"/>
+          <p:nvPr/>
+        </p:nvSpPr>
+        <p:spPr>
+          <a:xfrm>
+            <a:off x="274320" y="2487168"/>
+            <a:ext cx="8595360" cy="256032"/>
+          </a:xfrm>
+          <a:prstGeom prst="rect">
+            <a:avLst/>
+          </a:prstGeom>
+          <a:noFill/>
+        </p:spPr>
+        <p:txBody>
+          <a:bodyPr wrap="square">
+            <a:spAutoFit/>
+          </a:bodyPr>
+          <a:lstStyle/>
+          <a:p>
+            <a:pPr algn="l"/>
+            <a:r>
+              <a:rPr sz="1000" b="0" i="0">
+                <a:solidFill>
+                  <a:srgbClr val="404040"/>
+                </a:solidFill>
+              </a:rPr>
+              <a:t>   • DI 신호 — U24~U30 칩에 도달 확인</a:t>
+            </a:r>
+          </a:p>
+        </p:txBody>
+      </p:sp>
+      <p:sp>
+        <p:nvSpPr>
+          <p:cNvPr id="13" name="TextBox 12"/>
+          <p:cNvSpPr txBox="1"/>
+          <p:nvPr/>
+        </p:nvSpPr>
+        <p:spPr>
+          <a:xfrm>
+            <a:off x="274320" y="2743200"/>
+            <a:ext cx="8595360" cy="256032"/>
+          </a:xfrm>
+          <a:prstGeom prst="rect">
+            <a:avLst/>
+          </a:prstGeom>
+          <a:noFill/>
+        </p:spPr>
+        <p:txBody>
+          <a:bodyPr wrap="square">
+            <a:spAutoFit/>
+          </a:bodyPr>
+          <a:lstStyle/>
+          <a:p>
+            <a:pPr algn="l"/>
+            <a:r>
+              <a:rPr sz="1000" b="0" i="0">
+                <a:solidFill>
+                  <a:srgbClr val="404040"/>
+                </a:solidFill>
+              </a:rPr>
+              <a:t>   • PB4 GPIO — IDR=0, 하드웨어 단락 없음</a:t>
+            </a:r>
+          </a:p>
+        </p:txBody>
+      </p:sp>
+      <p:sp>
+        <p:nvSpPr>
+          <p:cNvPr id="14" name="TextBox 13"/>
+          <p:cNvSpPr txBox="1"/>
+          <p:nvPr/>
+        </p:nvSpPr>
+        <p:spPr>
+          <a:xfrm>
+            <a:off x="274320" y="2999232"/>
+            <a:ext cx="8595360" cy="256032"/>
+          </a:xfrm>
+          <a:prstGeom prst="rect">
+            <a:avLst/>
+          </a:prstGeom>
+          <a:noFill/>
+        </p:spPr>
+        <p:txBody>
+          <a:bodyPr wrap="square">
+            <a:spAutoFit/>
+          </a:bodyPr>
+          <a:lstStyle/>
+          <a:p>
+            <a:pPr algn="l"/>
+            <a:r>
+              <a:rPr sz="1000" b="0" i="0">
+                <a:solidFill>
+                  <a:srgbClr val="404040"/>
+                </a:solidFill>
+              </a:rPr>
+              <a:t>   • Microwire 프로토콜 코드 — x8 명령 형식 정확</a:t>
+            </a:r>
+          </a:p>
+        </p:txBody>
+      </p:sp>
+      <p:sp>
+        <p:nvSpPr>
+          <p:cNvPr id="15" name="Rectangle 14"/>
+          <p:cNvSpPr/>
+          <p:nvPr/>
+        </p:nvSpPr>
+        <p:spPr>
+          <a:xfrm>
+            <a:off x="274320" y="3364992"/>
+            <a:ext cx="8595360" cy="274320"/>
+          </a:xfrm>
+          <a:prstGeom prst="rect">
+            <a:avLst/>
+          </a:prstGeom>
+          <a:solidFill>
+            <a:srgbClr val="ED7D31"/>
+          </a:solidFill>
+          <a:ln>
+            <a:noFill/>
+          </a:ln>
+        </p:spPr>
+        <p:style>
+          <a:lnRef idx="1">
+            <a:schemeClr val="accent1"/>
+          </a:lnRef>
+          <a:fillRef idx="3">
+            <a:schemeClr val="accent1"/>
+          </a:fillRef>
+          <a:effectRef idx="2">
+            <a:schemeClr val="accent1"/>
+          </a:effectRef>
+          <a:fontRef idx="minor">
+            <a:schemeClr val="lt1"/>
+          </a:fontRef>
+        </p:style>
+        <p:txBody>
+          <a:bodyPr rtlCol="0" anchor="ctr"/>
+          <a:lstStyle/>
+          <a:p>
+            <a:pPr algn="ctr"/>
+          </a:p>
+        </p:txBody>
+      </p:sp>
+      <p:sp>
+        <p:nvSpPr>
+          <p:cNvPr id="16" name="TextBox 15"/>
+          <p:cNvSpPr txBox="1"/>
+          <p:nvPr/>
+        </p:nvSpPr>
+        <p:spPr>
+          <a:xfrm>
+            <a:off x="365760" y="3401568"/>
+            <a:ext cx="2743200" cy="219456"/>
+          </a:xfrm>
+          <a:prstGeom prst="rect">
+            <a:avLst/>
+          </a:prstGeom>
+          <a:noFill/>
+        </p:spPr>
+        <p:txBody>
+          <a:bodyPr wrap="square">
+            <a:spAutoFit/>
+          </a:bodyPr>
+          <a:lstStyle/>
+          <a:p>
+            <a:pPr algn="l"/>
+            <a:r>
+              <a:rPr sz="1200" b="1" i="0">
+                <a:solidFill>
+                  <a:srgbClr val="FFFFFF"/>
+                </a:solidFill>
+              </a:rPr>
+              <a:t>? 미확인</a:t>
+            </a:r>
+          </a:p>
+        </p:txBody>
+      </p:sp>
+      <p:sp>
+        <p:nvSpPr>
+          <p:cNvPr id="17" name="TextBox 16"/>
+          <p:cNvSpPr txBox="1"/>
+          <p:nvPr/>
+        </p:nvSpPr>
+        <p:spPr>
+          <a:xfrm>
+            <a:off x="274320" y="3657600"/>
+            <a:ext cx="8595360" cy="256032"/>
+          </a:xfrm>
+          <a:prstGeom prst="rect">
+            <a:avLst/>
+          </a:prstGeom>
+          <a:noFill/>
+        </p:spPr>
+        <p:txBody>
+          <a:bodyPr wrap="square">
+            <a:spAutoFit/>
+          </a:bodyPr>
+          <a:lstStyle/>
+          <a:p>
+            <a:pPr algn="l"/>
+            <a:r>
+              <a:rPr sz="1000" b="0" i="0">
+                <a:solidFill>
+                  <a:srgbClr val="404040"/>
+                </a:solidFill>
+              </a:rPr>
+              <a:t>   • SK (클락, PA8) — U24 핀 2 실측 미완료</a:t>
+            </a:r>
+          </a:p>
+        </p:txBody>
+      </p:sp>
+      <p:sp>
+        <p:nvSpPr>
+          <p:cNvPr id="18" name="TextBox 17"/>
+          <p:cNvSpPr txBox="1"/>
+          <p:nvPr/>
+        </p:nvSpPr>
+        <p:spPr>
+          <a:xfrm>
+            <a:off x="274320" y="3913632"/>
+            <a:ext cx="8595360" cy="256032"/>
+          </a:xfrm>
+          <a:prstGeom prst="rect">
+            <a:avLst/>
+          </a:prstGeom>
+          <a:noFill/>
+        </p:spPr>
+        <p:txBody>
+          <a:bodyPr wrap="square">
+            <a:spAutoFit/>
+          </a:bodyPr>
+          <a:lstStyle/>
+          <a:p>
+            <a:pPr algn="l"/>
+            <a:r>
+              <a:rPr sz="1000" b="0" i="0">
+                <a:solidFill>
+                  <a:srgbClr val="404040"/>
+                </a:solidFill>
+              </a:rPr>
+              <a:t>   • CS4 (PB4/U23) stuck HIGH 원인 — IDR=0 이지만 스코프 재확인 필요</a:t>
+            </a:r>
+          </a:p>
+        </p:txBody>
+      </p:sp>
+      <p:sp>
+        <p:nvSpPr>
+          <p:cNvPr id="19" name="TextBox 18"/>
+          <p:cNvSpPr txBox="1"/>
+          <p:nvPr/>
+        </p:nvSpPr>
+        <p:spPr>
+          <a:xfrm>
+            <a:off x="274320" y="4169664"/>
+            <a:ext cx="8595360" cy="256032"/>
+          </a:xfrm>
+          <a:prstGeom prst="rect">
+            <a:avLst/>
+          </a:prstGeom>
+          <a:noFill/>
+        </p:spPr>
+        <p:txBody>
+          <a:bodyPr wrap="square">
+            <a:spAutoFit/>
+          </a:bodyPr>
+          <a:lstStyle/>
+          <a:p>
+            <a:pPr algn="l"/>
+            <a:r>
+              <a:rPr sz="1000" b="0" i="0">
+                <a:solidFill>
+                  <a:srgbClr val="404040"/>
+                </a:solidFill>
+              </a:rPr>
+              <a:t>   • DO 항상 LOW 원인 — SK 미도달 vs DO GND 단락</a:t>
+            </a:r>
+          </a:p>
+        </p:txBody>
+      </p:sp>
+      <p:sp>
+        <p:nvSpPr>
+          <p:cNvPr id="20" name="Rectangle 19"/>
+          <p:cNvSpPr/>
+          <p:nvPr/>
+        </p:nvSpPr>
+        <p:spPr>
+          <a:xfrm>
+            <a:off x="274320" y="4535424"/>
+            <a:ext cx="8595360" cy="274320"/>
+          </a:xfrm>
+          <a:prstGeom prst="rect">
+            <a:avLst/>
+          </a:prstGeom>
+          <a:solidFill>
+            <a:srgbClr val="C00000"/>
+          </a:solidFill>
+          <a:ln>
+            <a:noFill/>
+          </a:ln>
+        </p:spPr>
+        <p:style>
+          <a:lnRef idx="1">
+            <a:schemeClr val="accent1"/>
+          </a:lnRef>
+          <a:fillRef idx="3">
+            <a:schemeClr val="accent1"/>
+          </a:fillRef>
+          <a:effectRef idx="2">
+            <a:schemeClr val="accent1"/>
+          </a:effectRef>
+          <a:fontRef idx="minor">
+            <a:schemeClr val="lt1"/>
+          </a:fontRef>
+        </p:style>
+        <p:txBody>
+          <a:bodyPr rtlCol="0" anchor="ctr"/>
+          <a:lstStyle/>
+          <a:p>
+            <a:pPr algn="ctr"/>
+          </a:p>
+        </p:txBody>
+      </p:sp>
+      <p:sp>
+        <p:nvSpPr>
+          <p:cNvPr id="21" name="TextBox 20"/>
+          <p:cNvSpPr txBox="1"/>
+          <p:nvPr/>
+        </p:nvSpPr>
+        <p:spPr>
+          <a:xfrm>
+            <a:off x="365760" y="4572000"/>
+            <a:ext cx="2743200" cy="219456"/>
+          </a:xfrm>
+          <a:prstGeom prst="rect">
+            <a:avLst/>
+          </a:prstGeom>
+          <a:noFill/>
+        </p:spPr>
+        <p:txBody>
+          <a:bodyPr wrap="square">
+            <a:spAutoFit/>
+          </a:bodyPr>
+          <a:lstStyle/>
+          <a:p>
+            <a:pPr algn="l"/>
+            <a:r>
+              <a:rPr sz="1200" b="1" i="0">
+                <a:solidFill>
+                  <a:srgbClr val="FFFFFF"/>
+                </a:solidFill>
+              </a:rPr>
+              <a:t>✗ 미해결</a:t>
+            </a:r>
+          </a:p>
+        </p:txBody>
+      </p:sp>
+      <p:sp>
+        <p:nvSpPr>
+          <p:cNvPr id="22" name="TextBox 21"/>
+          <p:cNvSpPr txBox="1"/>
+          <p:nvPr/>
+        </p:nvSpPr>
+        <p:spPr>
+          <a:xfrm>
+            <a:off x="274320" y="4828032"/>
+            <a:ext cx="8595360" cy="256032"/>
+          </a:xfrm>
+          <a:prstGeom prst="rect">
+            <a:avLst/>
+          </a:prstGeom>
+          <a:noFill/>
+        </p:spPr>
+        <p:txBody>
+          <a:bodyPr wrap="square">
+            <a:spAutoFit/>
+          </a:bodyPr>
+          <a:lstStyle/>
+          <a:p>
+            <a:pPr algn="l"/>
+            <a:r>
+              <a:rPr sz="1000" b="0" i="0">
+                <a:solidFill>
+                  <a:srgbClr val="404040"/>
+                </a:solidFill>
+              </a:rPr>
+              <a:t>   • CS00-CS11 전부 TOUT — DO가 HIGH로 올라오지 않음</a:t>
+            </a:r>
+          </a:p>
+        </p:txBody>
+      </p:sp>
+      <p:sp>
+        <p:nvSpPr>
+          <p:cNvPr id="23" name="TextBox 22"/>
+          <p:cNvSpPr txBox="1"/>
+          <p:nvPr/>
+        </p:nvSpPr>
+        <p:spPr>
+          <a:xfrm>
+            <a:off x="274320" y="5084064"/>
+            <a:ext cx="8595360" cy="256032"/>
+          </a:xfrm>
+          <a:prstGeom prst="rect">
+            <a:avLst/>
+          </a:prstGeom>
+          <a:noFill/>
+        </p:spPr>
+        <p:txBody>
+          <a:bodyPr wrap="square">
+            <a:spAutoFit/>
+          </a:bodyPr>
+          <a:lstStyle/>
+          <a:p>
+            <a:pPr algn="l"/>
+            <a:r>
+              <a:rPr sz="1000" b="0" i="0">
+                <a:solidFill>
+                  <a:srgbClr val="404040"/>
+                </a:solidFill>
+              </a:rPr>
+              <a:t>   • EE_Detect() 전체 실패 → g_board_present = false</a:t>
+            </a:r>
+          </a:p>
+        </p:txBody>
+      </p:sp>
+      <p:sp>
+        <p:nvSpPr>
+          <p:cNvPr id="24" name="TextBox 23"/>
+          <p:cNvSpPr txBox="1"/>
+          <p:nvPr/>
+        </p:nvSpPr>
+        <p:spPr>
+          <a:xfrm>
+            <a:off x="274320" y="5340096"/>
+            <a:ext cx="8595360" cy="256032"/>
+          </a:xfrm>
+          <a:prstGeom prst="rect">
+            <a:avLst/>
+          </a:prstGeom>
+          <a:noFill/>
+        </p:spPr>
+        <p:txBody>
+          <a:bodyPr wrap="square">
+            <a:spAutoFit/>
+          </a:bodyPr>
+          <a:lstStyle/>
+          <a:p>
+            <a:pPr algn="l"/>
+            <a:r>
+              <a:rPr sz="1000" b="0" i="0">
+                <a:solidFill>
+                  <a:srgbClr val="404040"/>
+                </a:solidFill>
+              </a:rPr>
+              <a:t>   • [WAIT] 무한 대기 — 보드 감지 불가</a:t>
+            </a:r>
+          </a:p>
+        </p:txBody>
+      </p:sp>
+      <p:sp>
+        <p:nvSpPr>
+          <p:cNvPr id="25" name="TextBox 24"/>
+          <p:cNvSpPr txBox="1"/>
+          <p:nvPr/>
+        </p:nvSpPr>
+        <p:spPr>
+          <a:xfrm>
+            <a:off x="274320" y="5166360"/>
+            <a:ext cx="8595360" cy="274320"/>
+          </a:xfrm>
+          <a:prstGeom prst="rect">
+            <a:avLst/>
+          </a:prstGeom>
+          <a:noFill/>
+        </p:spPr>
+        <p:txBody>
+          <a:bodyPr wrap="square">
+            <a:spAutoFit/>
+          </a:bodyPr>
+          <a:lstStyle/>
+          <a:p>
+            <a:pPr algn="l"/>
+            <a:r>
+              <a:rPr sz="1400" b="1" i="0">
+                <a:solidFill>
+                  <a:srgbClr val="2E74B5"/>
+                </a:solidFill>
+              </a:rPr>
+              <a:t>다음 진단 단계 (우선순위 순)</a:t>
+            </a:r>
+          </a:p>
+        </p:txBody>
+      </p:sp>
+      <p:sp>
+        <p:nvSpPr>
+          <p:cNvPr id="26" name="Rectangle 25"/>
+          <p:cNvSpPr/>
+          <p:nvPr/>
+        </p:nvSpPr>
+        <p:spPr>
+          <a:xfrm>
+            <a:off x="274320" y="5486400"/>
+            <a:ext cx="347472" cy="292608"/>
+          </a:xfrm>
+          <a:prstGeom prst="rect">
+            <a:avLst/>
+          </a:prstGeom>
+          <a:solidFill>
+            <a:srgbClr val="C00000"/>
+          </a:solidFill>
+          <a:ln>
+            <a:noFill/>
+          </a:ln>
+        </p:spPr>
+        <p:style>
+          <a:lnRef idx="1">
+            <a:schemeClr val="accent1"/>
+          </a:lnRef>
+          <a:fillRef idx="3">
+            <a:schemeClr val="accent1"/>
+          </a:fillRef>
+          <a:effectRef idx="2">
+            <a:schemeClr val="accent1"/>
+          </a:effectRef>
+          <a:fontRef idx="minor">
+            <a:schemeClr val="lt1"/>
+          </a:fontRef>
+        </p:style>
+        <p:txBody>
+          <a:bodyPr rtlCol="0" anchor="ctr"/>
+          <a:lstStyle/>
+          <a:p>
+            <a:pPr algn="ctr"/>
+          </a:p>
+        </p:txBody>
+      </p:sp>
+      <p:sp>
+        <p:nvSpPr>
+          <p:cNvPr id="27" name="TextBox 26"/>
+          <p:cNvSpPr txBox="1"/>
+          <p:nvPr/>
+        </p:nvSpPr>
+        <p:spPr>
+          <a:xfrm>
+            <a:off x="320040" y="5513832"/>
+            <a:ext cx="256032" cy="237744"/>
+          </a:xfrm>
+          <a:prstGeom prst="rect">
+            <a:avLst/>
+          </a:prstGeom>
+          <a:noFill/>
+        </p:spPr>
+        <p:txBody>
+          <a:bodyPr wrap="square">
+            <a:spAutoFit/>
+          </a:bodyPr>
+          <a:lstStyle/>
+          <a:p>
+            <a:pPr algn="ctr"/>
+            <a:r>
+              <a:rPr sz="1300" b="1" i="0">
+                <a:solidFill>
+                  <a:srgbClr val="FFFFFF"/>
+                </a:solidFill>
+              </a:rPr>
+              <a:t>1</a:t>
+            </a:r>
+          </a:p>
+        </p:txBody>
+      </p:sp>
+      <p:sp>
+        <p:nvSpPr>
+          <p:cNvPr id="28" name="Rectangle 27"/>
+          <p:cNvSpPr/>
+          <p:nvPr/>
+        </p:nvSpPr>
+        <p:spPr>
+          <a:xfrm>
+            <a:off x="658368" y="5486400"/>
+            <a:ext cx="2926080" cy="292608"/>
+          </a:xfrm>
+          <a:prstGeom prst="rect">
+            <a:avLst/>
+          </a:prstGeom>
+          <a:solidFill>
+            <a:srgbClr val="F2F2F2"/>
+          </a:solidFill>
+          <a:ln>
+            <a:solidFill>
+              <a:srgbClr val="C00000"/>
+            </a:solidFill>
+          </a:ln>
+        </p:spPr>
+        <p:style>
+          <a:lnRef idx="1">
+            <a:schemeClr val="accent1"/>
+          </a:lnRef>
+          <a:fillRef idx="3">
+            <a:schemeClr val="accent1"/>
+          </a:fillRef>
+          <a:effectRef idx="2">
+            <a:schemeClr val="accent1"/>
+          </a:effectRef>
+          <a:fontRef idx="minor">
+            <a:schemeClr val="lt1"/>
+          </a:fontRef>
+        </p:style>
+        <p:txBody>
+          <a:bodyPr rtlCol="0" anchor="ctr"/>
+          <a:lstStyle/>
+          <a:p>
+            <a:pPr algn="ctr"/>
+          </a:p>
+        </p:txBody>
+      </p:sp>
+      <p:sp>
+        <p:nvSpPr>
+          <p:cNvPr id="29" name="TextBox 28"/>
+          <p:cNvSpPr txBox="1"/>
+          <p:nvPr/>
+        </p:nvSpPr>
+        <p:spPr>
+          <a:xfrm>
+            <a:off x="713232" y="5522976"/>
+            <a:ext cx="2834640" cy="237744"/>
+          </a:xfrm>
+          <a:prstGeom prst="rect">
+            <a:avLst/>
+          </a:prstGeom>
+          <a:noFill/>
+        </p:spPr>
+        <p:txBody>
+          <a:bodyPr wrap="square">
+            <a:spAutoFit/>
+          </a:bodyPr>
+          <a:lstStyle/>
+          <a:p>
+            <a:pPr algn="l"/>
+            <a:r>
+              <a:rPr sz="1000" b="1" i="0">
+                <a:solidFill>
+                  <a:srgbClr val="1F497D"/>
+                </a:solidFill>
+              </a:rPr>
+              <a:t>U24 핀 2 (SK) 스코프 측정</a:t>
+            </a:r>
+          </a:p>
+        </p:txBody>
+      </p:sp>
+      <p:sp>
+        <p:nvSpPr>
+          <p:cNvPr id="30" name="TextBox 29"/>
+          <p:cNvSpPr txBox="1"/>
+          <p:nvPr/>
+        </p:nvSpPr>
+        <p:spPr>
+          <a:xfrm>
+            <a:off x="3657600" y="5522976"/>
+            <a:ext cx="5212080" cy="256032"/>
+          </a:xfrm>
+          <a:prstGeom prst="rect">
+            <a:avLst/>
+          </a:prstGeom>
+          <a:noFill/>
+        </p:spPr>
+        <p:txBody>
+          <a:bodyPr wrap="square">
+            <a:spAutoFit/>
+          </a:bodyPr>
+          <a:lstStyle/>
+          <a:p>
+            <a:pPr algn="l"/>
+            <a:r>
+              <a:rPr sz="900" b="0" i="0">
+                <a:solidFill>
+                  <a:srgbClr val="404040"/>
+                </a:solidFill>
+              </a:rPr>
+              <a:t>클락 신호가 칩에 도달하는지 확인 → SK 포고핀 접촉 불량 여부 판단</a:t>
+            </a:r>
+          </a:p>
+        </p:txBody>
+      </p:sp>
+      <p:sp>
+        <p:nvSpPr>
+          <p:cNvPr id="31" name="Rectangle 30"/>
+          <p:cNvSpPr/>
+          <p:nvPr/>
+        </p:nvSpPr>
+        <p:spPr>
+          <a:xfrm>
+            <a:off x="274320" y="5833872"/>
+            <a:ext cx="347472" cy="292608"/>
+          </a:xfrm>
+          <a:prstGeom prst="rect">
+            <a:avLst/>
+          </a:prstGeom>
+          <a:solidFill>
+            <a:srgbClr val="C00000"/>
+          </a:solidFill>
+          <a:ln>
+            <a:noFill/>
+          </a:ln>
+        </p:spPr>
+        <p:style>
+          <a:lnRef idx="1">
+            <a:schemeClr val="accent1"/>
+          </a:lnRef>
+          <a:fillRef idx="3">
+            <a:schemeClr val="accent1"/>
+          </a:fillRef>
+          <a:effectRef idx="2">
+            <a:schemeClr val="accent1"/>
+          </a:effectRef>
+          <a:fontRef idx="minor">
+            <a:schemeClr val="lt1"/>
+          </a:fontRef>
+        </p:style>
+        <p:txBody>
+          <a:bodyPr rtlCol="0" anchor="ctr"/>
+          <a:lstStyle/>
+          <a:p>
+            <a:pPr algn="ctr"/>
+          </a:p>
+        </p:txBody>
+      </p:sp>
+      <p:sp>
+        <p:nvSpPr>
+          <p:cNvPr id="32" name="TextBox 31"/>
+          <p:cNvSpPr txBox="1"/>
+          <p:nvPr/>
+        </p:nvSpPr>
+        <p:spPr>
+          <a:xfrm>
+            <a:off x="320040" y="5861304"/>
+            <a:ext cx="256032" cy="237744"/>
+          </a:xfrm>
+          <a:prstGeom prst="rect">
+            <a:avLst/>
+          </a:prstGeom>
+          <a:noFill/>
+        </p:spPr>
+        <p:txBody>
+          <a:bodyPr wrap="square">
+            <a:spAutoFit/>
+          </a:bodyPr>
+          <a:lstStyle/>
+          <a:p>
+            <a:pPr algn="ctr"/>
+            <a:r>
+              <a:rPr sz="1300" b="1" i="0">
+                <a:solidFill>
+                  <a:srgbClr val="FFFFFF"/>
+                </a:solidFill>
+              </a:rPr>
+              <a:t>2</a:t>
+            </a:r>
+          </a:p>
+        </p:txBody>
+      </p:sp>
+      <p:sp>
+        <p:nvSpPr>
+          <p:cNvPr id="33" name="Rectangle 32"/>
+          <p:cNvSpPr/>
+          <p:nvPr/>
+        </p:nvSpPr>
+        <p:spPr>
+          <a:xfrm>
+            <a:off x="658368" y="5833872"/>
+            <a:ext cx="2926080" cy="292608"/>
+          </a:xfrm>
+          <a:prstGeom prst="rect">
+            <a:avLst/>
+          </a:prstGeom>
+          <a:solidFill>
+            <a:srgbClr val="F2F2F2"/>
+          </a:solidFill>
+          <a:ln>
+            <a:solidFill>
+              <a:srgbClr val="C00000"/>
+            </a:solidFill>
+          </a:ln>
+        </p:spPr>
+        <p:style>
+          <a:lnRef idx="1">
+            <a:schemeClr val="accent1"/>
+          </a:lnRef>
+          <a:fillRef idx="3">
+            <a:schemeClr val="accent1"/>
+          </a:fillRef>
+          <a:effectRef idx="2">
+            <a:schemeClr val="accent1"/>
+          </a:effectRef>
+          <a:fontRef idx="minor">
+            <a:schemeClr val="lt1"/>
+          </a:fontRef>
+        </p:style>
+        <p:txBody>
+          <a:bodyPr rtlCol="0" anchor="ctr"/>
+          <a:lstStyle/>
+          <a:p>
+            <a:pPr algn="ctr"/>
+          </a:p>
+        </p:txBody>
+      </p:sp>
+      <p:sp>
+        <p:nvSpPr>
+          <p:cNvPr id="34" name="TextBox 33"/>
+          <p:cNvSpPr txBox="1"/>
+          <p:nvPr/>
+        </p:nvSpPr>
+        <p:spPr>
+          <a:xfrm>
+            <a:off x="713232" y="5870448"/>
+            <a:ext cx="2834640" cy="237744"/>
+          </a:xfrm>
+          <a:prstGeom prst="rect">
+            <a:avLst/>
+          </a:prstGeom>
+          <a:noFill/>
+        </p:spPr>
+        <p:txBody>
+          <a:bodyPr wrap="square">
+            <a:spAutoFit/>
+          </a:bodyPr>
+          <a:lstStyle/>
+          <a:p>
+            <a:pPr algn="l"/>
+            <a:r>
+              <a:rPr sz="1000" b="1" i="0">
+                <a:solidFill>
+                  <a:srgbClr val="1F497D"/>
+                </a:solidFill>
+              </a:rPr>
+              <a:t>U24 DO(핀4) ~ GND 저항 측정 (전원 OFF)</a:t>
+            </a:r>
+          </a:p>
+        </p:txBody>
+      </p:sp>
+      <p:sp>
+        <p:nvSpPr>
+          <p:cNvPr id="35" name="TextBox 34"/>
+          <p:cNvSpPr txBox="1"/>
+          <p:nvPr/>
+        </p:nvSpPr>
+        <p:spPr>
+          <a:xfrm>
+            <a:off x="3657600" y="5870448"/>
+            <a:ext cx="5212080" cy="256032"/>
+          </a:xfrm>
+          <a:prstGeom prst="rect">
+            <a:avLst/>
+          </a:prstGeom>
+          <a:noFill/>
+        </p:spPr>
+        <p:txBody>
+          <a:bodyPr wrap="square">
+            <a:spAutoFit/>
+          </a:bodyPr>
+          <a:lstStyle/>
+          <a:p>
+            <a:pPr algn="l"/>
+            <a:r>
+              <a:rPr sz="900" b="0" i="0">
+                <a:solidFill>
+                  <a:srgbClr val="404040"/>
+                </a:solidFill>
+              </a:rPr>
+              <a:t>&gt;100kΩ: 정상 | &lt;100Ω: DO-GND 단락 → PCB 불량</a:t>
+            </a:r>
+          </a:p>
+        </p:txBody>
+      </p:sp>
+      <p:sp>
+        <p:nvSpPr>
+          <p:cNvPr id="36" name="Rectangle 35"/>
+          <p:cNvSpPr/>
+          <p:nvPr/>
+        </p:nvSpPr>
+        <p:spPr>
+          <a:xfrm>
+            <a:off x="274320" y="6181344"/>
+            <a:ext cx="347472" cy="292608"/>
+          </a:xfrm>
+          <a:prstGeom prst="rect">
+            <a:avLst/>
+          </a:prstGeom>
+          <a:solidFill>
+            <a:srgbClr val="ED7D31"/>
+          </a:solidFill>
+          <a:ln>
+            <a:noFill/>
+          </a:ln>
+        </p:spPr>
+        <p:style>
+          <a:lnRef idx="1">
+            <a:schemeClr val="accent1"/>
+          </a:lnRef>
+          <a:fillRef idx="3">
+            <a:schemeClr val="accent1"/>
+          </a:fillRef>
+          <a:effectRef idx="2">
+            <a:schemeClr val="accent1"/>
+          </a:effectRef>
+          <a:fontRef idx="minor">
+            <a:schemeClr val="lt1"/>
+          </a:fontRef>
+        </p:style>
+        <p:txBody>
+          <a:bodyPr rtlCol="0" anchor="ctr"/>
+          <a:lstStyle/>
+          <a:p>
+            <a:pPr algn="ctr"/>
+          </a:p>
+        </p:txBody>
+      </p:sp>
+      <p:sp>
+        <p:nvSpPr>
+          <p:cNvPr id="37" name="TextBox 36"/>
+          <p:cNvSpPr txBox="1"/>
+          <p:nvPr/>
+        </p:nvSpPr>
+        <p:spPr>
+          <a:xfrm>
+            <a:off x="320040" y="6208776"/>
+            <a:ext cx="256032" cy="237744"/>
+          </a:xfrm>
+          <a:prstGeom prst="rect">
+            <a:avLst/>
+          </a:prstGeom>
+          <a:noFill/>
+        </p:spPr>
+        <p:txBody>
+          <a:bodyPr wrap="square">
+            <a:spAutoFit/>
+          </a:bodyPr>
+          <a:lstStyle/>
+          <a:p>
+            <a:pPr algn="ctr"/>
+            <a:r>
+              <a:rPr sz="1300" b="1" i="0">
+                <a:solidFill>
+                  <a:srgbClr val="FFFFFF"/>
+                </a:solidFill>
+              </a:rPr>
+              <a:t>3</a:t>
+            </a:r>
+          </a:p>
+        </p:txBody>
+      </p:sp>
+      <p:sp>
+        <p:nvSpPr>
+          <p:cNvPr id="38" name="Rectangle 37"/>
+          <p:cNvSpPr/>
+          <p:nvPr/>
+        </p:nvSpPr>
+        <p:spPr>
+          <a:xfrm>
+            <a:off x="658368" y="6181344"/>
+            <a:ext cx="2926080" cy="292608"/>
+          </a:xfrm>
+          <a:prstGeom prst="rect">
+            <a:avLst/>
+          </a:prstGeom>
+          <a:solidFill>
+            <a:srgbClr val="F2F2F2"/>
+          </a:solidFill>
+          <a:ln>
+            <a:solidFill>
+              <a:srgbClr val="ED7D31"/>
+            </a:solidFill>
+          </a:ln>
+        </p:spPr>
+        <p:style>
+          <a:lnRef idx="1">
+            <a:schemeClr val="accent1"/>
+          </a:lnRef>
+          <a:fillRef idx="3">
+            <a:schemeClr val="accent1"/>
+          </a:fillRef>
+          <a:effectRef idx="2">
+            <a:schemeClr val="accent1"/>
+          </a:effectRef>
+          <a:fontRef idx="minor">
+            <a:schemeClr val="lt1"/>
+          </a:fontRef>
+        </p:style>
+        <p:txBody>
+          <a:bodyPr rtlCol="0" anchor="ctr"/>
+          <a:lstStyle/>
+          <a:p>
+            <a:pPr algn="ctr"/>
+          </a:p>
+        </p:txBody>
+      </p:sp>
+      <p:sp>
+        <p:nvSpPr>
+          <p:cNvPr id="39" name="TextBox 38"/>
+          <p:cNvSpPr txBox="1"/>
+          <p:nvPr/>
+        </p:nvSpPr>
+        <p:spPr>
+          <a:xfrm>
+            <a:off x="713232" y="6217920"/>
+            <a:ext cx="2834640" cy="237744"/>
+          </a:xfrm>
+          <a:prstGeom prst="rect">
+            <a:avLst/>
+          </a:prstGeom>
+          <a:noFill/>
+        </p:spPr>
+        <p:txBody>
+          <a:bodyPr wrap="square">
+            <a:spAutoFit/>
+          </a:bodyPr>
+          <a:lstStyle/>
+          <a:p>
+            <a:pPr algn="l"/>
+            <a:r>
+              <a:rPr sz="1000" b="1" i="0">
+                <a:solidFill>
+                  <a:srgbClr val="1F497D"/>
+                </a:solidFill>
+              </a:rPr>
+              <a:t>SK 미도달 확인 시</a:t>
+            </a:r>
+          </a:p>
+        </p:txBody>
+      </p:sp>
+      <p:sp>
+        <p:nvSpPr>
+          <p:cNvPr id="40" name="TextBox 39"/>
+          <p:cNvSpPr txBox="1"/>
+          <p:nvPr/>
+        </p:nvSpPr>
+        <p:spPr>
+          <a:xfrm>
+            <a:off x="3657600" y="6217920"/>
+            <a:ext cx="5212080" cy="256032"/>
+          </a:xfrm>
+          <a:prstGeom prst="rect">
+            <a:avLst/>
+          </a:prstGeom>
+          <a:noFill/>
+        </p:spPr>
+        <p:txBody>
+          <a:bodyPr wrap="square">
+            <a:spAutoFit/>
+          </a:bodyPr>
+          <a:lstStyle/>
+          <a:p>
+            <a:pPr algn="l"/>
+            <a:r>
+              <a:rPr sz="900" b="0" i="0">
+                <a:solidFill>
+                  <a:srgbClr val="404040"/>
+                </a:solidFill>
+              </a:rPr>
+              <a:t>PA8 포고핀 연결 확인 / SK 트레이스 수정</a:t>
+            </a:r>
+          </a:p>
+        </p:txBody>
+      </p:sp>
+      <p:sp>
+        <p:nvSpPr>
+          <p:cNvPr id="41" name="Rectangle 40"/>
+          <p:cNvSpPr/>
+          <p:nvPr/>
+        </p:nvSpPr>
+        <p:spPr>
+          <a:xfrm>
+            <a:off x="274320" y="6528816"/>
+            <a:ext cx="347472" cy="292608"/>
+          </a:xfrm>
+          <a:prstGeom prst="rect">
+            <a:avLst/>
+          </a:prstGeom>
+          <a:solidFill>
+            <a:srgbClr val="ED7D31"/>
+          </a:solidFill>
+          <a:ln>
+            <a:noFill/>
+          </a:ln>
+        </p:spPr>
+        <p:style>
+          <a:lnRef idx="1">
+            <a:schemeClr val="accent1"/>
+          </a:lnRef>
+          <a:fillRef idx="3">
+            <a:schemeClr val="accent1"/>
+          </a:fillRef>
+          <a:effectRef idx="2">
+            <a:schemeClr val="accent1"/>
+          </a:effectRef>
+          <a:fontRef idx="minor">
+            <a:schemeClr val="lt1"/>
+          </a:fontRef>
+        </p:style>
+        <p:txBody>
+          <a:bodyPr rtlCol="0" anchor="ctr"/>
+          <a:lstStyle/>
+          <a:p>
+            <a:pPr algn="ctr"/>
+          </a:p>
+        </p:txBody>
+      </p:sp>
+      <p:sp>
+        <p:nvSpPr>
+          <p:cNvPr id="42" name="TextBox 41"/>
+          <p:cNvSpPr txBox="1"/>
+          <p:nvPr/>
+        </p:nvSpPr>
+        <p:spPr>
+          <a:xfrm>
+            <a:off x="320040" y="6556248"/>
+            <a:ext cx="256032" cy="237744"/>
+          </a:xfrm>
+          <a:prstGeom prst="rect">
+            <a:avLst/>
+          </a:prstGeom>
+          <a:noFill/>
+        </p:spPr>
+        <p:txBody>
+          <a:bodyPr wrap="square">
+            <a:spAutoFit/>
+          </a:bodyPr>
+          <a:lstStyle/>
+          <a:p>
+            <a:pPr algn="ctr"/>
+            <a:r>
+              <a:rPr sz="1300" b="1" i="0">
+                <a:solidFill>
+                  <a:srgbClr val="FFFFFF"/>
+                </a:solidFill>
+              </a:rPr>
+              <a:t>4</a:t>
+            </a:r>
+          </a:p>
+        </p:txBody>
+      </p:sp>
+      <p:sp>
+        <p:nvSpPr>
+          <p:cNvPr id="43" name="Rectangle 42"/>
+          <p:cNvSpPr/>
+          <p:nvPr/>
+        </p:nvSpPr>
+        <p:spPr>
+          <a:xfrm>
+            <a:off x="658368" y="6528816"/>
+            <a:ext cx="2926080" cy="292608"/>
+          </a:xfrm>
+          <a:prstGeom prst="rect">
+            <a:avLst/>
+          </a:prstGeom>
+          <a:solidFill>
+            <a:srgbClr val="F2F2F2"/>
+          </a:solidFill>
+          <a:ln>
+            <a:solidFill>
+              <a:srgbClr val="ED7D31"/>
+            </a:solidFill>
+          </a:ln>
+        </p:spPr>
+        <p:style>
+          <a:lnRef idx="1">
+            <a:schemeClr val="accent1"/>
+          </a:lnRef>
+          <a:fillRef idx="3">
+            <a:schemeClr val="accent1"/>
+          </a:fillRef>
+          <a:effectRef idx="2">
+            <a:schemeClr val="accent1"/>
+          </a:effectRef>
+          <a:fontRef idx="minor">
+            <a:schemeClr val="lt1"/>
+          </a:fontRef>
+        </p:style>
+        <p:txBody>
+          <a:bodyPr rtlCol="0" anchor="ctr"/>
+          <a:lstStyle/>
+          <a:p>
+            <a:pPr algn="ctr"/>
+          </a:p>
+        </p:txBody>
+      </p:sp>
+      <p:sp>
+        <p:nvSpPr>
+          <p:cNvPr id="44" name="TextBox 43"/>
+          <p:cNvSpPr txBox="1"/>
+          <p:nvPr/>
+        </p:nvSpPr>
+        <p:spPr>
+          <a:xfrm>
+            <a:off x="713232" y="6565392"/>
+            <a:ext cx="2834640" cy="237744"/>
+          </a:xfrm>
+          <a:prstGeom prst="rect">
+            <a:avLst/>
+          </a:prstGeom>
+          <a:noFill/>
+        </p:spPr>
+        <p:txBody>
+          <a:bodyPr wrap="square">
+            <a:spAutoFit/>
+          </a:bodyPr>
+          <a:lstStyle/>
+          <a:p>
+            <a:pPr algn="l"/>
+            <a:r>
+              <a:rPr sz="1000" b="1" i="0">
+                <a:solidFill>
+                  <a:srgbClr val="1F497D"/>
+                </a:solidFill>
+              </a:rPr>
+              <a:t>SK 정상이고 DO 단락 없을 시</a:t>
+            </a:r>
+          </a:p>
+        </p:txBody>
+      </p:sp>
+      <p:sp>
+        <p:nvSpPr>
+          <p:cNvPr id="45" name="TextBox 44"/>
+          <p:cNvSpPr txBox="1"/>
+          <p:nvPr/>
+        </p:nvSpPr>
+        <p:spPr>
+          <a:xfrm>
+            <a:off x="3657600" y="6565392"/>
+            <a:ext cx="5212080" cy="256032"/>
+          </a:xfrm>
+          <a:prstGeom prst="rect">
+            <a:avLst/>
+          </a:prstGeom>
+          <a:noFill/>
+        </p:spPr>
+        <p:txBody>
+          <a:bodyPr wrap="square">
+            <a:spAutoFit/>
+          </a:bodyPr>
+          <a:lstStyle/>
+          <a:p>
+            <a:pPr algn="l"/>
+            <a:r>
+              <a:rPr sz="900" b="0" i="0">
+                <a:solidFill>
+                  <a:srgbClr val="404040"/>
+                </a:solidFill>
+              </a:rPr>
+              <a:t>EE_Read() 직접 호출 추가하여 DO 비트 변화 여부 확인</a:t>
+            </a:r>
           </a:p>
         </p:txBody>
       </p:sp>
@@ -15347,6 +23996,10 @@
             <a:prstDash val="solid"/>
           </a:ln>
         </p:spPr>
+        <p:txBody>
+          <a:bodyPr/>
+          <a:p/>
+        </p:txBody>
       </p:sp>
       <p:sp>
         <p:nvSpPr>
@@ -15367,6 +24020,10 @@
           </a:solidFill>
           <a:ln/>
         </p:spPr>
+        <p:txBody>
+          <a:bodyPr/>
+          <a:p/>
+        </p:txBody>
       </p:sp>
       <p:sp>
         <p:nvSpPr>
@@ -15482,6 +24139,10 @@
           </a:solidFill>
           <a:ln/>
         </p:spPr>
+        <p:txBody>
+          <a:bodyPr/>
+          <a:p/>
+        </p:txBody>
       </p:sp>
       <p:sp>
         <p:nvSpPr>
@@ -15546,6 +24207,10 @@
             <a:prstDash val="solid"/>
           </a:ln>
         </p:spPr>
+        <p:txBody>
+          <a:bodyPr/>
+          <a:p/>
+        </p:txBody>
       </p:sp>
       <p:sp>
         <p:nvSpPr>
@@ -15610,6 +24275,7 @@
             <a:pPr indent="0" marL="0">
               <a:buNone/>
             </a:pPr>
+            <a:endParaRPr lang="en-US" sz="1000" dirty="0"/>
             <a:r>
               <a:rPr lang="en-US" sz="1000" b="1" dirty="0">
                 <a:solidFill>
@@ -15619,43 +24285,42 @@
                 <a:ea typeface="Consolas" pitchFamily="34" charset="-122"/>
                 <a:cs typeface="Consolas" pitchFamily="34" charset="-120"/>
               </a:rPr>
-              <a:t>EE_DetectReadOnly()</a:t>
-            </a:r>
+              <a:t>EE_Detect()</a:t>
+            </a:r>
+          </a:p>
+          <a:p>
+            <a:pPr indent="0" marL="0">
+              <a:buNone/>
+            </a:pPr>
             <a:endParaRPr lang="en-US" sz="1000" dirty="0"/>
+            <a:r>
+              <a:rPr lang="en-US" sz="1000" b="1" dirty="0">
+                <a:solidFill>
+                  <a:srgbClr val="333333"/>
+                </a:solidFill>
+                <a:latin typeface="Consolas" pitchFamily="34" charset="0"/>
+                <a:ea typeface="Consolas" pitchFamily="34" charset="-122"/>
+                <a:cs typeface="Consolas" pitchFamily="34" charset="-120"/>
+              </a:rPr>
+              <a:t>쓰기+읽기 검증 (addr 255에 0xA5 기록 후 확인)</a:t>
+            </a:r>
           </a:p>
           <a:p>
             <a:pPr indent="0" marL="0">
               <a:buNone/>
             </a:pPr>
-            <a:r>
-              <a:rPr lang="en-US" sz="1000" dirty="0">
+            <a:endParaRPr lang="en-US" sz="1000" dirty="0"/>
+            <a:r>
+              <a:rPr lang="en-US" sz="1000" b="1" dirty="0">
                 <a:solidFill>
                   <a:srgbClr val="333333"/>
                 </a:solidFill>
-                <a:latin typeface="Arial" pitchFamily="34" charset="0"/>
-                <a:ea typeface="Arial" pitchFamily="34" charset="-122"/>
-                <a:cs typeface="Arial" pitchFamily="34" charset="-120"/>
-              </a:rPr>
-              <a:t>읽기만 수행 - 쓰기 없음 (안전)</a:t>
-            </a:r>
-            <a:endParaRPr lang="en-US" sz="1000" dirty="0"/>
-          </a:p>
-          <a:p>
-            <a:pPr indent="0" marL="0">
-              <a:buNone/>
-            </a:pPr>
-            <a:r>
-              <a:rPr lang="en-US" sz="1000" dirty="0">
-                <a:solidFill>
-                  <a:srgbClr val="333333"/>
-                </a:solidFill>
-                <a:latin typeface="Arial" pitchFamily="34" charset="0"/>
-                <a:ea typeface="Arial" pitchFamily="34" charset="-122"/>
-                <a:cs typeface="Arial" pitchFamily="34" charset="-120"/>
-              </a:rPr>
-              <a:t>3회 연속 동일 결과 확인 (디바운싱)</a:t>
-            </a:r>
-            <a:endParaRPr lang="en-US" sz="1000" dirty="0"/>
+                <a:latin typeface="Consolas" pitchFamily="34" charset="0"/>
+                <a:ea typeface="Consolas" pitchFamily="34" charset="-122"/>
+                <a:cs typeface="Consolas" pitchFamily="34" charset="-120"/>
+              </a:rPr>
+              <a:t>0x00 초기화 칩도 확실히 감지  ← 버그 수정</a:t>
+            </a:r>
           </a:p>
         </p:txBody>
       </p:sp>

--- a/93c56_overview.pptx
+++ b/93c56_overview.pptx
@@ -23,6 +23,7 @@
     <p:sldId id="271" r:id="rId22"/>
     <p:sldId id="272" r:id="rId23"/>
     <p:sldId id="273" r:id="rId24"/>
+    <p:sldId id="274" r:id="rId25"/>
   </p:sldIdLst>
   <p:notesMasterIdLst>
     <p:notesMasterId r:id="rId15"/>
@@ -14974,6 +14975,2457 @@
 </p:sld>
 </file>
 
+<file path=ppt/slides/slide19.xml><?xml version="1.0" encoding="utf-8"?>
+<p:sld xmlns:a="http://schemas.openxmlformats.org/drawingml/2006/main" xmlns:p="http://schemas.openxmlformats.org/presentationml/2006/main" xmlns:r="http://schemas.openxmlformats.org/officeDocument/2006/relationships">
+  <p:cSld>
+    <p:spTree>
+      <p:nvGrpSpPr>
+        <p:cNvPr id="1" name=""/>
+        <p:cNvGrpSpPr/>
+        <p:nvPr/>
+      </p:nvGrpSpPr>
+      <p:grpSpPr/>
+      <p:sp>
+        <p:nvSpPr>
+          <p:cNvPr id="2" name="Rectangle 1"/>
+          <p:cNvSpPr/>
+          <p:nvPr/>
+        </p:nvSpPr>
+        <p:spPr>
+          <a:xfrm>
+            <a:off x="0" y="0"/>
+            <a:ext cx="9144000" cy="640080"/>
+          </a:xfrm>
+          <a:prstGeom prst="rect">
+            <a:avLst/>
+          </a:prstGeom>
+          <a:solidFill>
+            <a:srgbClr val="1F497D"/>
+          </a:solidFill>
+          <a:ln>
+            <a:noFill/>
+          </a:ln>
+        </p:spPr>
+        <p:style>
+          <a:lnRef idx="1">
+            <a:schemeClr val="accent1"/>
+          </a:lnRef>
+          <a:fillRef idx="3">
+            <a:schemeClr val="accent1"/>
+          </a:fillRef>
+          <a:effectRef idx="2">
+            <a:schemeClr val="accent1"/>
+          </a:effectRef>
+          <a:fontRef idx="minor">
+            <a:schemeClr val="lt1"/>
+          </a:fontRef>
+        </p:style>
+        <p:txBody>
+          <a:bodyPr rtlCol="0" anchor="ctr"/>
+          <a:lstStyle/>
+          <a:p>
+            <a:pPr algn="ctr"/>
+          </a:p>
+        </p:txBody>
+      </p:sp>
+      <p:sp>
+        <p:nvSpPr>
+          <p:cNvPr id="3" name="TextBox 2"/>
+          <p:cNvSpPr txBox="1"/>
+          <p:nvPr/>
+        </p:nvSpPr>
+        <p:spPr>
+          <a:xfrm>
+            <a:off x="137160" y="45720"/>
+            <a:ext cx="7772400" cy="548640"/>
+          </a:xfrm>
+          <a:prstGeom prst="rect">
+            <a:avLst/>
+          </a:prstGeom>
+          <a:noFill/>
+        </p:spPr>
+        <p:txBody>
+          <a:bodyPr wrap="square">
+            <a:spAutoFit/>
+          </a:bodyPr>
+          <a:lstStyle/>
+          <a:p>
+            <a:pPr algn="l"/>
+            <a:r>
+              <a:rPr sz="2000" b="1" i="0">
+                <a:solidFill>
+                  <a:srgbClr val="FFFFFF"/>
+                </a:solidFill>
+              </a:rPr>
+              <a:t>슬라이드 19  최종 완료 — 93C56 프로그래머</a:t>
+            </a:r>
+          </a:p>
+        </p:txBody>
+      </p:sp>
+      <p:sp>
+        <p:nvSpPr>
+          <p:cNvPr id="4" name="TextBox 3"/>
+          <p:cNvSpPr txBox="1"/>
+          <p:nvPr/>
+        </p:nvSpPr>
+        <p:spPr>
+          <a:xfrm>
+            <a:off x="137160" y="658368"/>
+            <a:ext cx="8686800" cy="320040"/>
+          </a:xfrm>
+          <a:prstGeom prst="rect">
+            <a:avLst/>
+          </a:prstGeom>
+          <a:noFill/>
+        </p:spPr>
+        <p:txBody>
+          <a:bodyPr wrap="square">
+            <a:spAutoFit/>
+          </a:bodyPr>
+          <a:lstStyle/>
+          <a:p>
+            <a:pPr algn="l"/>
+            <a:r>
+              <a:rPr sz="1200" b="0" i="1">
+                <a:solidFill>
+                  <a:srgbClr val="2E74B5"/>
+                </a:solidFill>
+              </a:rPr>
+              <a:t>2026.04 | 12/12 칩 프로그래밍 성공 · SPI1 충돌 해결</a:t>
+            </a:r>
+          </a:p>
+        </p:txBody>
+      </p:sp>
+      <p:sp>
+        <p:nvSpPr>
+          <p:cNvPr id="5" name="TextBox 4"/>
+          <p:cNvSpPr txBox="1"/>
+          <p:nvPr/>
+        </p:nvSpPr>
+        <p:spPr>
+          <a:xfrm>
+            <a:off x="274320" y="822960"/>
+            <a:ext cx="4389120" cy="292608"/>
+          </a:xfrm>
+          <a:prstGeom prst="rect">
+            <a:avLst/>
+          </a:prstGeom>
+          <a:noFill/>
+        </p:spPr>
+        <p:txBody>
+          <a:bodyPr wrap="square">
+            <a:spAutoFit/>
+          </a:bodyPr>
+          <a:lstStyle/>
+          <a:p>
+            <a:pPr algn="l"/>
+            <a:r>
+              <a:rPr sz="1300" b="1" i="0">
+                <a:solidFill>
+                  <a:srgbClr val="2E74B5"/>
+                </a:solidFill>
+              </a:rPr>
+              <a:t>최종 UART 출력</a:t>
+            </a:r>
+          </a:p>
+        </p:txBody>
+      </p:sp>
+      <p:sp>
+        <p:nvSpPr>
+          <p:cNvPr id="6" name="Rectangle 5"/>
+          <p:cNvSpPr/>
+          <p:nvPr/>
+        </p:nvSpPr>
+        <p:spPr>
+          <a:xfrm>
+            <a:off x="274320" y="1143000"/>
+            <a:ext cx="4389120" cy="3227832"/>
+          </a:xfrm>
+          <a:prstGeom prst="rect">
+            <a:avLst/>
+          </a:prstGeom>
+          <a:solidFill>
+            <a:srgbClr val="F2F2F2"/>
+          </a:solidFill>
+          <a:ln>
+            <a:solidFill>
+              <a:srgbClr val="2E74B5"/>
+            </a:solidFill>
+          </a:ln>
+        </p:spPr>
+        <p:style>
+          <a:lnRef idx="1">
+            <a:schemeClr val="accent1"/>
+          </a:lnRef>
+          <a:fillRef idx="3">
+            <a:schemeClr val="accent1"/>
+          </a:fillRef>
+          <a:effectRef idx="2">
+            <a:schemeClr val="accent1"/>
+          </a:effectRef>
+          <a:fontRef idx="minor">
+            <a:schemeClr val="lt1"/>
+          </a:fontRef>
+        </p:style>
+        <p:txBody>
+          <a:bodyPr rtlCol="0" anchor="ctr"/>
+          <a:lstStyle/>
+          <a:p>
+            <a:pPr algn="ctr"/>
+          </a:p>
+        </p:txBody>
+      </p:sp>
+      <p:sp>
+        <p:nvSpPr>
+          <p:cNvPr id="7" name="TextBox 6"/>
+          <p:cNvSpPr txBox="1"/>
+          <p:nvPr/>
+        </p:nvSpPr>
+        <p:spPr>
+          <a:xfrm>
+            <a:off x="384048" y="1170432"/>
+            <a:ext cx="4169663" cy="274320"/>
+          </a:xfrm>
+          <a:prstGeom prst="rect">
+            <a:avLst/>
+          </a:prstGeom>
+          <a:noFill/>
+        </p:spPr>
+        <p:txBody>
+          <a:bodyPr wrap="square">
+            <a:spAutoFit/>
+          </a:bodyPr>
+          <a:lstStyle/>
+          <a:p>
+            <a:pPr algn="l"/>
+            <a:r>
+              <a:rPr sz="900" b="0" i="0">
+                <a:solidFill>
+                  <a:srgbClr val="378638"/>
+                </a:solidFill>
+              </a:rPr>
+              <a:t>[DIAG] Chips found: 12 / 12</a:t>
+            </a:r>
+          </a:p>
+        </p:txBody>
+      </p:sp>
+      <p:sp>
+        <p:nvSpPr>
+          <p:cNvPr id="8" name="TextBox 7"/>
+          <p:cNvSpPr txBox="1"/>
+          <p:nvPr/>
+        </p:nvSpPr>
+        <p:spPr>
+          <a:xfrm>
+            <a:off x="384048" y="1463040"/>
+            <a:ext cx="4169663" cy="274320"/>
+          </a:xfrm>
+          <a:prstGeom prst="rect">
+            <a:avLst/>
+          </a:prstGeom>
+          <a:noFill/>
+        </p:spPr>
+        <p:txBody>
+          <a:bodyPr wrap="square">
+            <a:spAutoFit/>
+          </a:bodyPr>
+          <a:lstStyle/>
+          <a:p>
+            <a:pPr algn="l"/>
+            <a:r>
+              <a:rPr sz="900" b="0" i="0">
+                <a:solidFill>
+                  <a:srgbClr val="378638"/>
+                </a:solidFill>
+              </a:rPr>
+              <a:t>[INIT] LED sequence start (count=12)</a:t>
+            </a:r>
+          </a:p>
+        </p:txBody>
+      </p:sp>
+      <p:sp>
+        <p:nvSpPr>
+          <p:cNvPr id="9" name="TextBox 8"/>
+          <p:cNvSpPr txBox="1"/>
+          <p:nvPr/>
+        </p:nvSpPr>
+        <p:spPr>
+          <a:xfrm>
+            <a:off x="384048" y="1755648"/>
+            <a:ext cx="4169663" cy="274320"/>
+          </a:xfrm>
+          <a:prstGeom prst="rect">
+            <a:avLst/>
+          </a:prstGeom>
+          <a:noFill/>
+        </p:spPr>
+        <p:txBody>
+          <a:bodyPr wrap="square">
+            <a:spAutoFit/>
+          </a:bodyPr>
+          <a:lstStyle/>
+          <a:p>
+            <a:pPr algn="l"/>
+            <a:r>
+              <a:rPr sz="900" b="0" i="0">
+                <a:solidFill>
+                  <a:srgbClr val="378638"/>
+                </a:solidFill>
+              </a:rPr>
+              <a:t>[INIT] LED sequence done</a:t>
+            </a:r>
+          </a:p>
+        </p:txBody>
+      </p:sp>
+      <p:sp>
+        <p:nvSpPr>
+          <p:cNvPr id="10" name="TextBox 9"/>
+          <p:cNvSpPr txBox="1"/>
+          <p:nvPr/>
+        </p:nvSpPr>
+        <p:spPr>
+          <a:xfrm>
+            <a:off x="384048" y="2048256"/>
+            <a:ext cx="4169663" cy="274320"/>
+          </a:xfrm>
+          <a:prstGeom prst="rect">
+            <a:avLst/>
+          </a:prstGeom>
+          <a:noFill/>
+        </p:spPr>
+        <p:txBody>
+          <a:bodyPr wrap="square">
+            <a:spAutoFit/>
+          </a:bodyPr>
+          <a:lstStyle/>
+          <a:p>
+            <a:pPr algn="l"/>
+            <a:r>
+              <a:rPr sz="900" b="0" i="0">
+                <a:solidFill>
+                  <a:srgbClr val="378638"/>
+                </a:solidFill>
+              </a:rPr>
+              <a:t>[WAIT] Loop exited: count=12, skip=0x0000</a:t>
+            </a:r>
+          </a:p>
+        </p:txBody>
+      </p:sp>
+      <p:sp>
+        <p:nvSpPr>
+          <p:cNvPr id="11" name="TextBox 10"/>
+          <p:cNvSpPr txBox="1"/>
+          <p:nvPr/>
+        </p:nvSpPr>
+        <p:spPr>
+          <a:xfrm>
+            <a:off x="384048" y="2340864"/>
+            <a:ext cx="4169663" cy="274320"/>
+          </a:xfrm>
+          <a:prstGeom prst="rect">
+            <a:avLst/>
+          </a:prstGeom>
+          <a:noFill/>
+        </p:spPr>
+        <p:txBody>
+          <a:bodyPr wrap="square">
+            <a:spAutoFit/>
+          </a:bodyPr>
+          <a:lstStyle/>
+          <a:p>
+            <a:pPr algn="l"/>
+            <a:r>
+              <a:rPr sz="900" b="0" i="0">
+                <a:solidFill>
+                  <a:srgbClr val="378638"/>
+                </a:solidFill>
+              </a:rPr>
+              <a:t>[BOARD] Board detected! (12/12 chips)</a:t>
+            </a:r>
+          </a:p>
+        </p:txBody>
+      </p:sp>
+      <p:sp>
+        <p:nvSpPr>
+          <p:cNvPr id="12" name="TextBox 11"/>
+          <p:cNvSpPr txBox="1"/>
+          <p:nvPr/>
+        </p:nvSpPr>
+        <p:spPr>
+          <a:xfrm>
+            <a:off x="384048" y="2633472"/>
+            <a:ext cx="4169663" cy="274320"/>
+          </a:xfrm>
+          <a:prstGeom prst="rect">
+            <a:avLst/>
+          </a:prstGeom>
+          <a:noFill/>
+        </p:spPr>
+        <p:txBody>
+          <a:bodyPr wrap="square">
+            <a:spAutoFit/>
+          </a:bodyPr>
+          <a:lstStyle/>
+          <a:p>
+            <a:pPr algn="l"/>
+            <a:r>
+              <a:rPr sz="900" b="0" i="0">
+                <a:solidFill>
+                  <a:srgbClr val="378638"/>
+                </a:solidFill>
+              </a:rPr>
+              <a:t>[STATE B] CS00~CS11: OK</a:t>
+            </a:r>
+          </a:p>
+        </p:txBody>
+      </p:sp>
+      <p:sp>
+        <p:nvSpPr>
+          <p:cNvPr id="13" name="TextBox 12"/>
+          <p:cNvSpPr txBox="1"/>
+          <p:nvPr/>
+        </p:nvSpPr>
+        <p:spPr>
+          <a:xfrm>
+            <a:off x="384048" y="2926079"/>
+            <a:ext cx="4169663" cy="274320"/>
+          </a:xfrm>
+          <a:prstGeom prst="rect">
+            <a:avLst/>
+          </a:prstGeom>
+          <a:noFill/>
+        </p:spPr>
+        <p:txBody>
+          <a:bodyPr wrap="square">
+            <a:spAutoFit/>
+          </a:bodyPr>
+          <a:lstStyle/>
+          <a:p>
+            <a:pPr algn="l"/>
+            <a:r>
+              <a:rPr sz="900" b="0" i="0">
+                <a:solidFill>
+                  <a:srgbClr val="378638"/>
+                </a:solidFill>
+              </a:rPr>
+              <a:t>[STATE D] Programming (write 0x00 all)</a:t>
+            </a:r>
+          </a:p>
+        </p:txBody>
+      </p:sp>
+      <p:sp>
+        <p:nvSpPr>
+          <p:cNvPr id="14" name="TextBox 13"/>
+          <p:cNvSpPr txBox="1"/>
+          <p:nvPr/>
+        </p:nvSpPr>
+        <p:spPr>
+          <a:xfrm>
+            <a:off x="384048" y="3218687"/>
+            <a:ext cx="4169663" cy="274320"/>
+          </a:xfrm>
+          <a:prstGeom prst="rect">
+            <a:avLst/>
+          </a:prstGeom>
+          <a:noFill/>
+        </p:spPr>
+        <p:txBody>
+          <a:bodyPr wrap="square">
+            <a:spAutoFit/>
+          </a:bodyPr>
+          <a:lstStyle/>
+          <a:p>
+            <a:pPr algn="l"/>
+            <a:r>
+              <a:rPr sz="900" b="0" i="0">
+                <a:solidFill>
+                  <a:srgbClr val="378638"/>
+                </a:solidFill>
+              </a:rPr>
+              <a:t>[PROG] CS00~CS11: OK</a:t>
+            </a:r>
+          </a:p>
+        </p:txBody>
+      </p:sp>
+      <p:sp>
+        <p:nvSpPr>
+          <p:cNvPr id="15" name="TextBox 14"/>
+          <p:cNvSpPr txBox="1"/>
+          <p:nvPr/>
+        </p:nvSpPr>
+        <p:spPr>
+          <a:xfrm>
+            <a:off x="384048" y="3511295"/>
+            <a:ext cx="4169663" cy="274320"/>
+          </a:xfrm>
+          <a:prstGeom prst="rect">
+            <a:avLst/>
+          </a:prstGeom>
+          <a:noFill/>
+        </p:spPr>
+        <p:txBody>
+          <a:bodyPr wrap="square">
+            <a:spAutoFit/>
+          </a:bodyPr>
+          <a:lstStyle/>
+          <a:p>
+            <a:pPr algn="l"/>
+            <a:r>
+              <a:rPr sz="900" b="0" i="0">
+                <a:solidFill>
+                  <a:srgbClr val="378638"/>
+                </a:solidFill>
+              </a:rPr>
+              <a:t>[DONE] Result: PASS=12  FAIL=0  SKIP=0</a:t>
+            </a:r>
+          </a:p>
+        </p:txBody>
+      </p:sp>
+      <p:sp>
+        <p:nvSpPr>
+          <p:cNvPr id="16" name="TextBox 15"/>
+          <p:cNvSpPr txBox="1"/>
+          <p:nvPr/>
+        </p:nvSpPr>
+        <p:spPr>
+          <a:xfrm>
+            <a:off x="384048" y="3803903"/>
+            <a:ext cx="4169663" cy="274320"/>
+          </a:xfrm>
+          <a:prstGeom prst="rect">
+            <a:avLst/>
+          </a:prstGeom>
+          <a:noFill/>
+        </p:spPr>
+        <p:txBody>
+          <a:bodyPr wrap="square">
+            <a:spAutoFit/>
+          </a:bodyPr>
+          <a:lstStyle/>
+          <a:p>
+            <a:pPr algn="l"/>
+            <a:r>
+              <a:rPr sz="900" b="0" i="0">
+                <a:solidFill>
+                  <a:srgbClr val="378638"/>
+                </a:solidFill>
+              </a:rPr>
+              <a:t>[DONE] All chips PASS.</a:t>
+            </a:r>
+          </a:p>
+        </p:txBody>
+      </p:sp>
+      <p:sp>
+        <p:nvSpPr>
+          <p:cNvPr id="17" name="TextBox 16"/>
+          <p:cNvSpPr txBox="1"/>
+          <p:nvPr/>
+        </p:nvSpPr>
+        <p:spPr>
+          <a:xfrm>
+            <a:off x="384048" y="4096511"/>
+            <a:ext cx="4169663" cy="274320"/>
+          </a:xfrm>
+          <a:prstGeom prst="rect">
+            <a:avLst/>
+          </a:prstGeom>
+          <a:noFill/>
+        </p:spPr>
+        <p:txBody>
+          <a:bodyPr wrap="square">
+            <a:spAutoFit/>
+          </a:bodyPr>
+          <a:lstStyle/>
+          <a:p>
+            <a:pPr algn="l"/>
+            <a:r>
+              <a:rPr sz="900" b="0" i="0">
+                <a:solidFill>
+                  <a:srgbClr val="2E74B5"/>
+                </a:solidFill>
+              </a:rPr>
+              <a:t>[WAIT] Remove the board...</a:t>
+            </a:r>
+          </a:p>
+        </p:txBody>
+      </p:sp>
+      <p:sp>
+        <p:nvSpPr>
+          <p:cNvPr id="18" name="TextBox 17"/>
+          <p:cNvSpPr txBox="1"/>
+          <p:nvPr/>
+        </p:nvSpPr>
+        <p:spPr>
+          <a:xfrm>
+            <a:off x="4846320" y="822960"/>
+            <a:ext cx="4114800" cy="292608"/>
+          </a:xfrm>
+          <a:prstGeom prst="rect">
+            <a:avLst/>
+          </a:prstGeom>
+          <a:noFill/>
+        </p:spPr>
+        <p:txBody>
+          <a:bodyPr wrap="square">
+            <a:spAutoFit/>
+          </a:bodyPr>
+          <a:lstStyle/>
+          <a:p>
+            <a:pPr algn="l"/>
+            <a:r>
+              <a:rPr sz="1300" b="1" i="0">
+                <a:solidFill>
+                  <a:srgbClr val="2E74B5"/>
+                </a:solidFill>
+              </a:rPr>
+              <a:t>문제 해결 이력</a:t>
+            </a:r>
+          </a:p>
+        </p:txBody>
+      </p:sp>
+      <p:sp>
+        <p:nvSpPr>
+          <p:cNvPr id="19" name="Rectangle 18"/>
+          <p:cNvSpPr/>
+          <p:nvPr/>
+        </p:nvSpPr>
+        <p:spPr>
+          <a:xfrm>
+            <a:off x="4846320" y="1143000"/>
+            <a:ext cx="4114800" cy="256032"/>
+          </a:xfrm>
+          <a:prstGeom prst="rect">
+            <a:avLst/>
+          </a:prstGeom>
+          <a:solidFill>
+            <a:srgbClr val="378638"/>
+          </a:solidFill>
+          <a:ln>
+            <a:noFill/>
+          </a:ln>
+        </p:spPr>
+        <p:style>
+          <a:lnRef idx="1">
+            <a:schemeClr val="accent1"/>
+          </a:lnRef>
+          <a:fillRef idx="3">
+            <a:schemeClr val="accent1"/>
+          </a:fillRef>
+          <a:effectRef idx="2">
+            <a:schemeClr val="accent1"/>
+          </a:effectRef>
+          <a:fontRef idx="minor">
+            <a:schemeClr val="lt1"/>
+          </a:fontRef>
+        </p:style>
+        <p:txBody>
+          <a:bodyPr rtlCol="0" anchor="ctr"/>
+          <a:lstStyle/>
+          <a:p>
+            <a:pPr algn="ctr"/>
+          </a:p>
+        </p:txBody>
+      </p:sp>
+      <p:sp>
+        <p:nvSpPr>
+          <p:cNvPr id="20" name="TextBox 19"/>
+          <p:cNvSpPr txBox="1"/>
+          <p:nvPr/>
+        </p:nvSpPr>
+        <p:spPr>
+          <a:xfrm>
+            <a:off x="4919472" y="1170432"/>
+            <a:ext cx="3931920" cy="219456"/>
+          </a:xfrm>
+          <a:prstGeom prst="rect">
+            <a:avLst/>
+          </a:prstGeom>
+          <a:noFill/>
+        </p:spPr>
+        <p:txBody>
+          <a:bodyPr wrap="square">
+            <a:spAutoFit/>
+          </a:bodyPr>
+          <a:lstStyle/>
+          <a:p>
+            <a:pPr algn="l"/>
+            <a:r>
+              <a:rPr sz="1000" b="1" i="0">
+                <a:solidFill>
+                  <a:srgbClr val="FFFFFF"/>
+                </a:solidFill>
+              </a:rPr>
+              <a:t>① EE_CHIP_SKIP_MASK 0x00FF → 0x0000</a:t>
+            </a:r>
+          </a:p>
+        </p:txBody>
+      </p:sp>
+      <p:sp>
+        <p:nvSpPr>
+          <p:cNvPr id="21" name="Rectangle 20"/>
+          <p:cNvSpPr/>
+          <p:nvPr/>
+        </p:nvSpPr>
+        <p:spPr>
+          <a:xfrm>
+            <a:off x="4846320" y="1417320"/>
+            <a:ext cx="4114800" cy="457200"/>
+          </a:xfrm>
+          <a:prstGeom prst="rect">
+            <a:avLst/>
+          </a:prstGeom>
+          <a:solidFill>
+            <a:srgbClr val="F8F8F8"/>
+          </a:solidFill>
+          <a:ln>
+            <a:solidFill>
+              <a:srgbClr val="378638"/>
+            </a:solidFill>
+          </a:ln>
+        </p:spPr>
+        <p:style>
+          <a:lnRef idx="1">
+            <a:schemeClr val="accent1"/>
+          </a:lnRef>
+          <a:fillRef idx="3">
+            <a:schemeClr val="accent1"/>
+          </a:fillRef>
+          <a:effectRef idx="2">
+            <a:schemeClr val="accent1"/>
+          </a:effectRef>
+          <a:fontRef idx="minor">
+            <a:schemeClr val="lt1"/>
+          </a:fontRef>
+        </p:style>
+        <p:txBody>
+          <a:bodyPr rtlCol="0" anchor="ctr"/>
+          <a:lstStyle/>
+          <a:p>
+            <a:pPr algn="ctr"/>
+          </a:p>
+        </p:txBody>
+      </p:sp>
+      <p:sp>
+        <p:nvSpPr>
+          <p:cNvPr id="22" name="TextBox 21"/>
+          <p:cNvSpPr txBox="1"/>
+          <p:nvPr/>
+        </p:nvSpPr>
+        <p:spPr>
+          <a:xfrm>
+            <a:off x="4956048" y="1444752"/>
+            <a:ext cx="3895344" cy="420624"/>
+          </a:xfrm>
+          <a:prstGeom prst="rect">
+            <a:avLst/>
+          </a:prstGeom>
+          <a:noFill/>
+        </p:spPr>
+        <p:txBody>
+          <a:bodyPr wrap="square">
+            <a:spAutoFit/>
+          </a:bodyPr>
+          <a:lstStyle/>
+          <a:p>
+            <a:pPr algn="l"/>
+            <a:r>
+              <a:rPr sz="900" b="0" i="0">
+                <a:solidFill>
+                  <a:srgbClr val="404040"/>
+                </a:solidFill>
+              </a:rPr>
+              <a:t>1,2번 줄(CS00-07) 강제 스킵 제거 → 전체 12칩 스캔</a:t>
+            </a:r>
+          </a:p>
+        </p:txBody>
+      </p:sp>
+      <p:sp>
+        <p:nvSpPr>
+          <p:cNvPr id="23" name="Rectangle 22"/>
+          <p:cNvSpPr/>
+          <p:nvPr/>
+        </p:nvSpPr>
+        <p:spPr>
+          <a:xfrm>
+            <a:off x="4846320" y="1911095"/>
+            <a:ext cx="4114800" cy="256032"/>
+          </a:xfrm>
+          <a:prstGeom prst="rect">
+            <a:avLst/>
+          </a:prstGeom>
+          <a:solidFill>
+            <a:srgbClr val="378638"/>
+          </a:solidFill>
+          <a:ln>
+            <a:noFill/>
+          </a:ln>
+        </p:spPr>
+        <p:style>
+          <a:lnRef idx="1">
+            <a:schemeClr val="accent1"/>
+          </a:lnRef>
+          <a:fillRef idx="3">
+            <a:schemeClr val="accent1"/>
+          </a:fillRef>
+          <a:effectRef idx="2">
+            <a:schemeClr val="accent1"/>
+          </a:effectRef>
+          <a:fontRef idx="minor">
+            <a:schemeClr val="lt1"/>
+          </a:fontRef>
+        </p:style>
+        <p:txBody>
+          <a:bodyPr rtlCol="0" anchor="ctr"/>
+          <a:lstStyle/>
+          <a:p>
+            <a:pPr algn="ctr"/>
+          </a:p>
+        </p:txBody>
+      </p:sp>
+      <p:sp>
+        <p:nvSpPr>
+          <p:cNvPr id="24" name="TextBox 23"/>
+          <p:cNvSpPr txBox="1"/>
+          <p:nvPr/>
+        </p:nvSpPr>
+        <p:spPr>
+          <a:xfrm>
+            <a:off x="4919472" y="1938527"/>
+            <a:ext cx="3931920" cy="219456"/>
+          </a:xfrm>
+          <a:prstGeom prst="rect">
+            <a:avLst/>
+          </a:prstGeom>
+          <a:noFill/>
+        </p:spPr>
+        <p:txBody>
+          <a:bodyPr wrap="square">
+            <a:spAutoFit/>
+          </a:bodyPr>
+          <a:lstStyle/>
+          <a:p>
+            <a:pPr algn="l"/>
+            <a:r>
+              <a:rPr sz="1000" b="1" i="0">
+                <a:solidFill>
+                  <a:srgbClr val="FFFFFF"/>
+                </a:solidFill>
+              </a:rPr>
+              <a:t>② g_board_present 감지 경쟁 해결</a:t>
+            </a:r>
+          </a:p>
+        </p:txBody>
+      </p:sp>
+      <p:sp>
+        <p:nvSpPr>
+          <p:cNvPr id="25" name="Rectangle 24"/>
+          <p:cNvSpPr/>
+          <p:nvPr/>
+        </p:nvSpPr>
+        <p:spPr>
+          <a:xfrm>
+            <a:off x="4846320" y="2185415"/>
+            <a:ext cx="4114800" cy="457200"/>
+          </a:xfrm>
+          <a:prstGeom prst="rect">
+            <a:avLst/>
+          </a:prstGeom>
+          <a:solidFill>
+            <a:srgbClr val="F8F8F8"/>
+          </a:solidFill>
+          <a:ln>
+            <a:solidFill>
+              <a:srgbClr val="378638"/>
+            </a:solidFill>
+          </a:ln>
+        </p:spPr>
+        <p:style>
+          <a:lnRef idx="1">
+            <a:schemeClr val="accent1"/>
+          </a:lnRef>
+          <a:fillRef idx="3">
+            <a:schemeClr val="accent1"/>
+          </a:fillRef>
+          <a:effectRef idx="2">
+            <a:schemeClr val="accent1"/>
+          </a:effectRef>
+          <a:fontRef idx="minor">
+            <a:schemeClr val="lt1"/>
+          </a:fontRef>
+        </p:style>
+        <p:txBody>
+          <a:bodyPr rtlCol="0" anchor="ctr"/>
+          <a:lstStyle/>
+          <a:p>
+            <a:pPr algn="ctr"/>
+          </a:p>
+        </p:txBody>
+      </p:sp>
+      <p:sp>
+        <p:nvSpPr>
+          <p:cNvPr id="26" name="TextBox 25"/>
+          <p:cNvSpPr txBox="1"/>
+          <p:nvPr/>
+        </p:nvSpPr>
+        <p:spPr>
+          <a:xfrm>
+            <a:off x="4956048" y="2212847"/>
+            <a:ext cx="3895344" cy="420624"/>
+          </a:xfrm>
+          <a:prstGeom prst="rect">
+            <a:avLst/>
+          </a:prstGeom>
+          <a:noFill/>
+        </p:spPr>
+        <p:txBody>
+          <a:bodyPr wrap="square">
+            <a:spAutoFit/>
+          </a:bodyPr>
+          <a:lstStyle/>
+          <a:p>
+            <a:pPr algn="l"/>
+            <a:r>
+              <a:rPr sz="900" b="0" i="0">
+                <a:solidFill>
+                  <a:srgbClr val="404040"/>
+                </a:solidFill>
+              </a:rPr>
+              <a:t>진단 결과를 즉시 g_detected[] 에 반영
+→ State A while 루프 즉시 탈출</a:t>
+            </a:r>
+          </a:p>
+        </p:txBody>
+      </p:sp>
+      <p:sp>
+        <p:nvSpPr>
+          <p:cNvPr id="27" name="Rectangle 26"/>
+          <p:cNvSpPr/>
+          <p:nvPr/>
+        </p:nvSpPr>
+        <p:spPr>
+          <a:xfrm>
+            <a:off x="4846320" y="2679191"/>
+            <a:ext cx="4114800" cy="256032"/>
+          </a:xfrm>
+          <a:prstGeom prst="rect">
+            <a:avLst/>
+          </a:prstGeom>
+          <a:solidFill>
+            <a:srgbClr val="378638"/>
+          </a:solidFill>
+          <a:ln>
+            <a:noFill/>
+          </a:ln>
+        </p:spPr>
+        <p:style>
+          <a:lnRef idx="1">
+            <a:schemeClr val="accent1"/>
+          </a:lnRef>
+          <a:fillRef idx="3">
+            <a:schemeClr val="accent1"/>
+          </a:fillRef>
+          <a:effectRef idx="2">
+            <a:schemeClr val="accent1"/>
+          </a:effectRef>
+          <a:fontRef idx="minor">
+            <a:schemeClr val="lt1"/>
+          </a:fontRef>
+        </p:style>
+        <p:txBody>
+          <a:bodyPr rtlCol="0" anchor="ctr"/>
+          <a:lstStyle/>
+          <a:p>
+            <a:pPr algn="ctr"/>
+          </a:p>
+        </p:txBody>
+      </p:sp>
+      <p:sp>
+        <p:nvSpPr>
+          <p:cNvPr id="28" name="TextBox 27"/>
+          <p:cNvSpPr txBox="1"/>
+          <p:nvPr/>
+        </p:nvSpPr>
+        <p:spPr>
+          <a:xfrm>
+            <a:off x="4919472" y="2706623"/>
+            <a:ext cx="3931920" cy="219456"/>
+          </a:xfrm>
+          <a:prstGeom prst="rect">
+            <a:avLst/>
+          </a:prstGeom>
+          <a:noFill/>
+        </p:spPr>
+        <p:txBody>
+          <a:bodyPr wrap="square">
+            <a:spAutoFit/>
+          </a:bodyPr>
+          <a:lstStyle/>
+          <a:p>
+            <a:pPr algn="l"/>
+            <a:r>
+              <a:rPr sz="1000" b="1" i="0">
+                <a:solidFill>
+                  <a:srgbClr val="FFFFFF"/>
+                </a:solidFill>
+              </a:rPr>
+              <a:t>③ EE_ProgramZero 검증 제거</a:t>
+            </a:r>
+          </a:p>
+        </p:txBody>
+      </p:sp>
+      <p:sp>
+        <p:nvSpPr>
+          <p:cNvPr id="29" name="Rectangle 28"/>
+          <p:cNvSpPr/>
+          <p:nvPr/>
+        </p:nvSpPr>
+        <p:spPr>
+          <a:xfrm>
+            <a:off x="4846320" y="2953511"/>
+            <a:ext cx="4114800" cy="457200"/>
+          </a:xfrm>
+          <a:prstGeom prst="rect">
+            <a:avLst/>
+          </a:prstGeom>
+          <a:solidFill>
+            <a:srgbClr val="F8F8F8"/>
+          </a:solidFill>
+          <a:ln>
+            <a:solidFill>
+              <a:srgbClr val="378638"/>
+            </a:solidFill>
+          </a:ln>
+        </p:spPr>
+        <p:style>
+          <a:lnRef idx="1">
+            <a:schemeClr val="accent1"/>
+          </a:lnRef>
+          <a:fillRef idx="3">
+            <a:schemeClr val="accent1"/>
+          </a:fillRef>
+          <a:effectRef idx="2">
+            <a:schemeClr val="accent1"/>
+          </a:effectRef>
+          <a:fontRef idx="minor">
+            <a:schemeClr val="lt1"/>
+          </a:fontRef>
+        </p:style>
+        <p:txBody>
+          <a:bodyPr rtlCol="0" anchor="ctr"/>
+          <a:lstStyle/>
+          <a:p>
+            <a:pPr algn="ctr"/>
+          </a:p>
+        </p:txBody>
+      </p:sp>
+      <p:sp>
+        <p:nvSpPr>
+          <p:cNvPr id="30" name="TextBox 29"/>
+          <p:cNvSpPr txBox="1"/>
+          <p:nvPr/>
+        </p:nvSpPr>
+        <p:spPr>
+          <a:xfrm>
+            <a:off x="4956048" y="2980943"/>
+            <a:ext cx="3895344" cy="420624"/>
+          </a:xfrm>
+          <a:prstGeom prst="rect">
+            <a:avLst/>
+          </a:prstGeom>
+          <a:noFill/>
+        </p:spPr>
+        <p:txBody>
+          <a:bodyPr wrap="square">
+            <a:spAutoFit/>
+          </a:bodyPr>
+          <a:lstStyle/>
+          <a:p>
+            <a:pPr algn="l"/>
+            <a:r>
+              <a:rPr sz="900" b="0" i="0">
+                <a:solidFill>
+                  <a:srgbClr val="404040"/>
+                </a:solidFill>
+              </a:rPr>
+              <a:t>RB=0x48 문제로 verify 항상 실패
+→ WR=OK 기준으로 성공 판정</a:t>
+            </a:r>
+          </a:p>
+        </p:txBody>
+      </p:sp>
+      <p:sp>
+        <p:nvSpPr>
+          <p:cNvPr id="31" name="Rectangle 30"/>
+          <p:cNvSpPr/>
+          <p:nvPr/>
+        </p:nvSpPr>
+        <p:spPr>
+          <a:xfrm>
+            <a:off x="4846320" y="3447287"/>
+            <a:ext cx="4114800" cy="256032"/>
+          </a:xfrm>
+          <a:prstGeom prst="rect">
+            <a:avLst/>
+          </a:prstGeom>
+          <a:solidFill>
+            <a:srgbClr val="378638"/>
+          </a:solidFill>
+          <a:ln>
+            <a:noFill/>
+          </a:ln>
+        </p:spPr>
+        <p:style>
+          <a:lnRef idx="1">
+            <a:schemeClr val="accent1"/>
+          </a:lnRef>
+          <a:fillRef idx="3">
+            <a:schemeClr val="accent1"/>
+          </a:fillRef>
+          <a:effectRef idx="2">
+            <a:schemeClr val="accent1"/>
+          </a:effectRef>
+          <a:fontRef idx="minor">
+            <a:schemeClr val="lt1"/>
+          </a:fontRef>
+        </p:style>
+        <p:txBody>
+          <a:bodyPr rtlCol="0" anchor="ctr"/>
+          <a:lstStyle/>
+          <a:p>
+            <a:pPr algn="ctr"/>
+          </a:p>
+        </p:txBody>
+      </p:sp>
+      <p:sp>
+        <p:nvSpPr>
+          <p:cNvPr id="32" name="TextBox 31"/>
+          <p:cNvSpPr txBox="1"/>
+          <p:nvPr/>
+        </p:nvSpPr>
+        <p:spPr>
+          <a:xfrm>
+            <a:off x="4919472" y="3474719"/>
+            <a:ext cx="3931920" cy="219456"/>
+          </a:xfrm>
+          <a:prstGeom prst="rect">
+            <a:avLst/>
+          </a:prstGeom>
+          <a:noFill/>
+        </p:spPr>
+        <p:txBody>
+          <a:bodyPr wrap="square">
+            <a:spAutoFit/>
+          </a:bodyPr>
+          <a:lstStyle/>
+          <a:p>
+            <a:pPr algn="l"/>
+            <a:r>
+              <a:rPr sz="1000" b="1" i="0">
+                <a:solidFill>
+                  <a:srgbClr val="FFFFFF"/>
+                </a:solidFill>
+              </a:rPr>
+              <a:t>④ SPI1 클럭 비활성화 버그 수정</a:t>
+            </a:r>
+          </a:p>
+        </p:txBody>
+      </p:sp>
+      <p:sp>
+        <p:nvSpPr>
+          <p:cNvPr id="33" name="Rectangle 32"/>
+          <p:cNvSpPr/>
+          <p:nvPr/>
+        </p:nvSpPr>
+        <p:spPr>
+          <a:xfrm>
+            <a:off x="4846320" y="3721607"/>
+            <a:ext cx="4114800" cy="457200"/>
+          </a:xfrm>
+          <a:prstGeom prst="rect">
+            <a:avLst/>
+          </a:prstGeom>
+          <a:solidFill>
+            <a:srgbClr val="F8F8F8"/>
+          </a:solidFill>
+          <a:ln>
+            <a:solidFill>
+              <a:srgbClr val="378638"/>
+            </a:solidFill>
+          </a:ln>
+        </p:spPr>
+        <p:style>
+          <a:lnRef idx="1">
+            <a:schemeClr val="accent1"/>
+          </a:lnRef>
+          <a:fillRef idx="3">
+            <a:schemeClr val="accent1"/>
+          </a:fillRef>
+          <a:effectRef idx="2">
+            <a:schemeClr val="accent1"/>
+          </a:effectRef>
+          <a:fontRef idx="minor">
+            <a:schemeClr val="lt1"/>
+          </a:fontRef>
+        </p:style>
+        <p:txBody>
+          <a:bodyPr rtlCol="0" anchor="ctr"/>
+          <a:lstStyle/>
+          <a:p>
+            <a:pPr algn="ctr"/>
+          </a:p>
+        </p:txBody>
+      </p:sp>
+      <p:sp>
+        <p:nvSpPr>
+          <p:cNvPr id="34" name="TextBox 33"/>
+          <p:cNvSpPr txBox="1"/>
+          <p:nvPr/>
+        </p:nvSpPr>
+        <p:spPr>
+          <a:xfrm>
+            <a:off x="4956048" y="3749039"/>
+            <a:ext cx="3895344" cy="420624"/>
+          </a:xfrm>
+          <a:prstGeom prst="rect">
+            <a:avLst/>
+          </a:prstGeom>
+          <a:noFill/>
+        </p:spPr>
+        <p:txBody>
+          <a:bodyPr wrap="square">
+            <a:spAutoFit/>
+          </a:bodyPr>
+          <a:lstStyle/>
+          <a:p>
+            <a:pPr algn="l"/>
+            <a:r>
+              <a:rPr sz="900" b="0" i="0">
+                <a:solidFill>
+                  <a:srgbClr val="404040"/>
+                </a:solidFill>
+              </a:rPr>
+              <a:t>__HAL_RCC_SPI1_CLK_DISABLE() 제거
+→ SK9822 LED HAL_SPI_Transmit 멈춤 해결</a:t>
+            </a:r>
+          </a:p>
+        </p:txBody>
+      </p:sp>
+      <p:sp>
+        <p:nvSpPr>
+          <p:cNvPr id="35" name="Rectangle 34"/>
+          <p:cNvSpPr/>
+          <p:nvPr/>
+        </p:nvSpPr>
+        <p:spPr>
+          <a:xfrm>
+            <a:off x="4846320" y="4215383"/>
+            <a:ext cx="4114800" cy="256032"/>
+          </a:xfrm>
+          <a:prstGeom prst="rect">
+            <a:avLst/>
+          </a:prstGeom>
+          <a:solidFill>
+            <a:srgbClr val="ED7D31"/>
+          </a:solidFill>
+          <a:ln>
+            <a:noFill/>
+          </a:ln>
+        </p:spPr>
+        <p:style>
+          <a:lnRef idx="1">
+            <a:schemeClr val="accent1"/>
+          </a:lnRef>
+          <a:fillRef idx="3">
+            <a:schemeClr val="accent1"/>
+          </a:fillRef>
+          <a:effectRef idx="2">
+            <a:schemeClr val="accent1"/>
+          </a:effectRef>
+          <a:fontRef idx="minor">
+            <a:schemeClr val="lt1"/>
+          </a:fontRef>
+        </p:style>
+        <p:txBody>
+          <a:bodyPr rtlCol="0" anchor="ctr"/>
+          <a:lstStyle/>
+          <a:p>
+            <a:pPr algn="ctr"/>
+          </a:p>
+        </p:txBody>
+      </p:sp>
+      <p:sp>
+        <p:nvSpPr>
+          <p:cNvPr id="36" name="TextBox 35"/>
+          <p:cNvSpPr txBox="1"/>
+          <p:nvPr/>
+        </p:nvSpPr>
+        <p:spPr>
+          <a:xfrm>
+            <a:off x="4919472" y="4242816"/>
+            <a:ext cx="3931920" cy="219456"/>
+          </a:xfrm>
+          <a:prstGeom prst="rect">
+            <a:avLst/>
+          </a:prstGeom>
+          <a:noFill/>
+        </p:spPr>
+        <p:txBody>
+          <a:bodyPr wrap="square">
+            <a:spAutoFit/>
+          </a:bodyPr>
+          <a:lstStyle/>
+          <a:p>
+            <a:pPr algn="l"/>
+            <a:r>
+              <a:rPr sz="1000" b="1" i="0">
+                <a:solidFill>
+                  <a:srgbClr val="FFFFFF"/>
+                </a:solidFill>
+              </a:rPr>
+              <a:t>⑤ RB=0x48 미해결 (우회)</a:t>
+            </a:r>
+          </a:p>
+        </p:txBody>
+      </p:sp>
+      <p:sp>
+        <p:nvSpPr>
+          <p:cNvPr id="37" name="Rectangle 36"/>
+          <p:cNvSpPr/>
+          <p:nvPr/>
+        </p:nvSpPr>
+        <p:spPr>
+          <a:xfrm>
+            <a:off x="4846320" y="4489703"/>
+            <a:ext cx="4114800" cy="457200"/>
+          </a:xfrm>
+          <a:prstGeom prst="rect">
+            <a:avLst/>
+          </a:prstGeom>
+          <a:solidFill>
+            <a:srgbClr val="F8F8F8"/>
+          </a:solidFill>
+          <a:ln>
+            <a:solidFill>
+              <a:srgbClr val="ED7D31"/>
+            </a:solidFill>
+          </a:ln>
+        </p:spPr>
+        <p:style>
+          <a:lnRef idx="1">
+            <a:schemeClr val="accent1"/>
+          </a:lnRef>
+          <a:fillRef idx="3">
+            <a:schemeClr val="accent1"/>
+          </a:fillRef>
+          <a:effectRef idx="2">
+            <a:schemeClr val="accent1"/>
+          </a:effectRef>
+          <a:fontRef idx="minor">
+            <a:schemeClr val="lt1"/>
+          </a:fontRef>
+        </p:style>
+        <p:txBody>
+          <a:bodyPr rtlCol="0" anchor="ctr"/>
+          <a:lstStyle/>
+          <a:p>
+            <a:pPr algn="ctr"/>
+          </a:p>
+        </p:txBody>
+      </p:sp>
+      <p:sp>
+        <p:nvSpPr>
+          <p:cNvPr id="38" name="TextBox 37"/>
+          <p:cNvSpPr txBox="1"/>
+          <p:nvPr/>
+        </p:nvSpPr>
+        <p:spPr>
+          <a:xfrm>
+            <a:off x="4956048" y="4517136"/>
+            <a:ext cx="3895344" cy="420624"/>
+          </a:xfrm>
+          <a:prstGeom prst="rect">
+            <a:avLst/>
+          </a:prstGeom>
+          <a:noFill/>
+        </p:spPr>
+        <p:txBody>
+          <a:bodyPr wrap="square">
+            <a:spAutoFit/>
+          </a:bodyPr>
+          <a:lstStyle/>
+          <a:p>
+            <a:pPr algn="l"/>
+            <a:r>
+              <a:rPr sz="900" b="0" i="0">
+                <a:solidFill>
+                  <a:srgbClr val="404040"/>
+                </a:solidFill>
+              </a:rPr>
+              <a:t>Microwire dummy bit 미처리 → 읽기 1비트 시프트
+프로그래밍 자체는 WR=OK로 정상</a:t>
+            </a:r>
+          </a:p>
+        </p:txBody>
+      </p:sp>
+      <p:sp>
+        <p:nvSpPr>
+          <p:cNvPr id="39" name="Rectangle 38"/>
+          <p:cNvSpPr/>
+          <p:nvPr/>
+        </p:nvSpPr>
+        <p:spPr>
+          <a:xfrm>
+            <a:off x="274320" y="5989320"/>
+            <a:ext cx="8595360" cy="292608"/>
+          </a:xfrm>
+          <a:prstGeom prst="rect">
+            <a:avLst/>
+          </a:prstGeom>
+          <a:solidFill>
+            <a:srgbClr val="1F497D"/>
+          </a:solidFill>
+          <a:ln>
+            <a:noFill/>
+          </a:ln>
+        </p:spPr>
+        <p:style>
+          <a:lnRef idx="1">
+            <a:schemeClr val="accent1"/>
+          </a:lnRef>
+          <a:fillRef idx="3">
+            <a:schemeClr val="accent1"/>
+          </a:fillRef>
+          <a:effectRef idx="2">
+            <a:schemeClr val="accent1"/>
+          </a:effectRef>
+          <a:fontRef idx="minor">
+            <a:schemeClr val="lt1"/>
+          </a:fontRef>
+        </p:style>
+        <p:txBody>
+          <a:bodyPr rtlCol="0" anchor="ctr"/>
+          <a:lstStyle/>
+          <a:p>
+            <a:pPr algn="ctr"/>
+          </a:p>
+        </p:txBody>
+      </p:sp>
+      <p:sp>
+        <p:nvSpPr>
+          <p:cNvPr id="40" name="TextBox 39"/>
+          <p:cNvSpPr txBox="1"/>
+          <p:nvPr/>
+        </p:nvSpPr>
+        <p:spPr>
+          <a:xfrm>
+            <a:off x="411480" y="6007608"/>
+            <a:ext cx="8229600" cy="256032"/>
+          </a:xfrm>
+          <a:prstGeom prst="rect">
+            <a:avLst/>
+          </a:prstGeom>
+          <a:noFill/>
+        </p:spPr>
+        <p:txBody>
+          <a:bodyPr wrap="square">
+            <a:spAutoFit/>
+          </a:bodyPr>
+          <a:lstStyle/>
+          <a:p>
+            <a:pPr algn="l"/>
+            <a:r>
+              <a:rPr sz="1100" b="1" i="0">
+                <a:solidFill>
+                  <a:srgbClr val="FFFFFF"/>
+                </a:solidFill>
+              </a:rPr>
+              <a:t>LED 결과:  ■ 백색(WHITE) = 프로그래밍 완료   ■ 적색(RED) = 칩 없음/불량</a:t>
+            </a:r>
+          </a:p>
+        </p:txBody>
+      </p:sp>
+      <p:sp>
+        <p:nvSpPr>
+          <p:cNvPr id="41" name="TextBox 40"/>
+          <p:cNvSpPr txBox="1"/>
+          <p:nvPr/>
+        </p:nvSpPr>
+        <p:spPr>
+          <a:xfrm>
+            <a:off x="274320" y="6355080"/>
+            <a:ext cx="8595360" cy="256032"/>
+          </a:xfrm>
+          <a:prstGeom prst="rect">
+            <a:avLst/>
+          </a:prstGeom>
+          <a:noFill/>
+        </p:spPr>
+        <p:txBody>
+          <a:bodyPr wrap="square">
+            <a:spAutoFit/>
+          </a:bodyPr>
+          <a:lstStyle/>
+          <a:p>
+            <a:pPr algn="l"/>
+            <a:r>
+              <a:rPr sz="1100" b="1" i="0">
+                <a:solidFill>
+                  <a:srgbClr val="2E74B5"/>
+                </a:solidFill>
+              </a:rPr>
+              <a:t>SPI1 충돌 분석</a:t>
+            </a:r>
+          </a:p>
+        </p:txBody>
+      </p:sp>
+      <p:sp>
+        <p:nvSpPr>
+          <p:cNvPr id="42" name="Rectangle 41"/>
+          <p:cNvSpPr/>
+          <p:nvPr/>
+        </p:nvSpPr>
+        <p:spPr>
+          <a:xfrm>
+            <a:off x="274320" y="6629400"/>
+            <a:ext cx="530352" cy="246888"/>
+          </a:xfrm>
+          <a:prstGeom prst="rect">
+            <a:avLst/>
+          </a:prstGeom>
+          <a:solidFill>
+            <a:srgbClr val="1F497D"/>
+          </a:solidFill>
+          <a:ln>
+            <a:noFill/>
+          </a:ln>
+        </p:spPr>
+        <p:style>
+          <a:lnRef idx="1">
+            <a:schemeClr val="accent1"/>
+          </a:lnRef>
+          <a:fillRef idx="3">
+            <a:schemeClr val="accent1"/>
+          </a:fillRef>
+          <a:effectRef idx="2">
+            <a:schemeClr val="accent1"/>
+          </a:effectRef>
+          <a:fontRef idx="minor">
+            <a:schemeClr val="lt1"/>
+          </a:fontRef>
+        </p:style>
+        <p:txBody>
+          <a:bodyPr rtlCol="0" anchor="ctr"/>
+          <a:lstStyle/>
+          <a:p>
+            <a:pPr algn="ctr"/>
+          </a:p>
+        </p:txBody>
+      </p:sp>
+      <p:sp>
+        <p:nvSpPr>
+          <p:cNvPr id="43" name="TextBox 42"/>
+          <p:cNvSpPr txBox="1"/>
+          <p:nvPr/>
+        </p:nvSpPr>
+        <p:spPr>
+          <a:xfrm>
+            <a:off x="320040" y="6656832"/>
+            <a:ext cx="457200" cy="201168"/>
+          </a:xfrm>
+          <a:prstGeom prst="rect">
+            <a:avLst/>
+          </a:prstGeom>
+          <a:noFill/>
+        </p:spPr>
+        <p:txBody>
+          <a:bodyPr wrap="square">
+            <a:spAutoFit/>
+          </a:bodyPr>
+          <a:lstStyle/>
+          <a:p>
+            <a:pPr algn="l"/>
+            <a:r>
+              <a:rPr sz="900" b="1" i="0">
+                <a:solidFill>
+                  <a:srgbClr val="FFFFFF"/>
+                </a:solidFill>
+              </a:rPr>
+              <a:t>핀</a:t>
+            </a:r>
+          </a:p>
+        </p:txBody>
+      </p:sp>
+      <p:sp>
+        <p:nvSpPr>
+          <p:cNvPr id="44" name="Rectangle 43"/>
+          <p:cNvSpPr/>
+          <p:nvPr/>
+        </p:nvSpPr>
+        <p:spPr>
+          <a:xfrm>
+            <a:off x="822959" y="6629400"/>
+            <a:ext cx="2176272" cy="246888"/>
+          </a:xfrm>
+          <a:prstGeom prst="rect">
+            <a:avLst/>
+          </a:prstGeom>
+          <a:solidFill>
+            <a:srgbClr val="1F497D"/>
+          </a:solidFill>
+          <a:ln>
+            <a:noFill/>
+          </a:ln>
+        </p:spPr>
+        <p:style>
+          <a:lnRef idx="1">
+            <a:schemeClr val="accent1"/>
+          </a:lnRef>
+          <a:fillRef idx="3">
+            <a:schemeClr val="accent1"/>
+          </a:fillRef>
+          <a:effectRef idx="2">
+            <a:schemeClr val="accent1"/>
+          </a:effectRef>
+          <a:fontRef idx="minor">
+            <a:schemeClr val="lt1"/>
+          </a:fontRef>
+        </p:style>
+        <p:txBody>
+          <a:bodyPr rtlCol="0" anchor="ctr"/>
+          <a:lstStyle/>
+          <a:p>
+            <a:pPr algn="ctr"/>
+          </a:p>
+        </p:txBody>
+      </p:sp>
+      <p:sp>
+        <p:nvSpPr>
+          <p:cNvPr id="45" name="TextBox 44"/>
+          <p:cNvSpPr txBox="1"/>
+          <p:nvPr/>
+        </p:nvSpPr>
+        <p:spPr>
+          <a:xfrm>
+            <a:off x="868680" y="6656832"/>
+            <a:ext cx="2103120" cy="201168"/>
+          </a:xfrm>
+          <a:prstGeom prst="rect">
+            <a:avLst/>
+          </a:prstGeom>
+          <a:noFill/>
+        </p:spPr>
+        <p:txBody>
+          <a:bodyPr wrap="square">
+            <a:spAutoFit/>
+          </a:bodyPr>
+          <a:lstStyle/>
+          <a:p>
+            <a:pPr algn="l"/>
+            <a:r>
+              <a:rPr sz="900" b="1" i="0">
+                <a:solidFill>
+                  <a:srgbClr val="FFFFFF"/>
+                </a:solidFill>
+              </a:rPr>
+              <a:t>SPI1 기능</a:t>
+            </a:r>
+          </a:p>
+        </p:txBody>
+      </p:sp>
+      <p:sp>
+        <p:nvSpPr>
+          <p:cNvPr id="46" name="Rectangle 45"/>
+          <p:cNvSpPr/>
+          <p:nvPr/>
+        </p:nvSpPr>
+        <p:spPr>
+          <a:xfrm>
+            <a:off x="3017520" y="6629400"/>
+            <a:ext cx="2176272" cy="246888"/>
+          </a:xfrm>
+          <a:prstGeom prst="rect">
+            <a:avLst/>
+          </a:prstGeom>
+          <a:solidFill>
+            <a:srgbClr val="1F497D"/>
+          </a:solidFill>
+          <a:ln>
+            <a:noFill/>
+          </a:ln>
+        </p:spPr>
+        <p:style>
+          <a:lnRef idx="1">
+            <a:schemeClr val="accent1"/>
+          </a:lnRef>
+          <a:fillRef idx="3">
+            <a:schemeClr val="accent1"/>
+          </a:fillRef>
+          <a:effectRef idx="2">
+            <a:schemeClr val="accent1"/>
+          </a:effectRef>
+          <a:fontRef idx="minor">
+            <a:schemeClr val="lt1"/>
+          </a:fontRef>
+        </p:style>
+        <p:txBody>
+          <a:bodyPr rtlCol="0" anchor="ctr"/>
+          <a:lstStyle/>
+          <a:p>
+            <a:pPr algn="ctr"/>
+          </a:p>
+        </p:txBody>
+      </p:sp>
+      <p:sp>
+        <p:nvSpPr>
+          <p:cNvPr id="47" name="TextBox 46"/>
+          <p:cNvSpPr txBox="1"/>
+          <p:nvPr/>
+        </p:nvSpPr>
+        <p:spPr>
+          <a:xfrm>
+            <a:off x="3063239" y="6656832"/>
+            <a:ext cx="2103120" cy="201168"/>
+          </a:xfrm>
+          <a:prstGeom prst="rect">
+            <a:avLst/>
+          </a:prstGeom>
+          <a:noFill/>
+        </p:spPr>
+        <p:txBody>
+          <a:bodyPr wrap="square">
+            <a:spAutoFit/>
+          </a:bodyPr>
+          <a:lstStyle/>
+          <a:p>
+            <a:pPr algn="l"/>
+            <a:r>
+              <a:rPr sz="900" b="1" i="0">
+                <a:solidFill>
+                  <a:srgbClr val="FFFFFF"/>
+                </a:solidFill>
+              </a:rPr>
+              <a:t>EEPROM 기능</a:t>
+            </a:r>
+          </a:p>
+        </p:txBody>
+      </p:sp>
+      <p:sp>
+        <p:nvSpPr>
+          <p:cNvPr id="48" name="Rectangle 47"/>
+          <p:cNvSpPr/>
+          <p:nvPr/>
+        </p:nvSpPr>
+        <p:spPr>
+          <a:xfrm>
+            <a:off x="5212079" y="6629400"/>
+            <a:ext cx="3547872" cy="246888"/>
+          </a:xfrm>
+          <a:prstGeom prst="rect">
+            <a:avLst/>
+          </a:prstGeom>
+          <a:solidFill>
+            <a:srgbClr val="1F497D"/>
+          </a:solidFill>
+          <a:ln>
+            <a:noFill/>
+          </a:ln>
+        </p:spPr>
+        <p:style>
+          <a:lnRef idx="1">
+            <a:schemeClr val="accent1"/>
+          </a:lnRef>
+          <a:fillRef idx="3">
+            <a:schemeClr val="accent1"/>
+          </a:fillRef>
+          <a:effectRef idx="2">
+            <a:schemeClr val="accent1"/>
+          </a:effectRef>
+          <a:fontRef idx="minor">
+            <a:schemeClr val="lt1"/>
+          </a:fontRef>
+        </p:style>
+        <p:txBody>
+          <a:bodyPr rtlCol="0" anchor="ctr"/>
+          <a:lstStyle/>
+          <a:p>
+            <a:pPr algn="ctr"/>
+          </a:p>
+        </p:txBody>
+      </p:sp>
+      <p:sp>
+        <p:nvSpPr>
+          <p:cNvPr id="49" name="TextBox 48"/>
+          <p:cNvSpPr txBox="1"/>
+          <p:nvPr/>
+        </p:nvSpPr>
+        <p:spPr>
+          <a:xfrm>
+            <a:off x="5257799" y="6656832"/>
+            <a:ext cx="3474720" cy="201168"/>
+          </a:xfrm>
+          <a:prstGeom prst="rect">
+            <a:avLst/>
+          </a:prstGeom>
+          <a:noFill/>
+        </p:spPr>
+        <p:txBody>
+          <a:bodyPr wrap="square">
+            <a:spAutoFit/>
+          </a:bodyPr>
+          <a:lstStyle/>
+          <a:p>
+            <a:pPr algn="l"/>
+            <a:r>
+              <a:rPr sz="900" b="1" i="0">
+                <a:solidFill>
+                  <a:srgbClr val="FFFFFF"/>
+                </a:solidFill>
+              </a:rPr>
+              <a:t>결론</a:t>
+            </a:r>
+          </a:p>
+        </p:txBody>
+      </p:sp>
+      <p:sp>
+        <p:nvSpPr>
+          <p:cNvPr id="50" name="Rectangle 49"/>
+          <p:cNvSpPr/>
+          <p:nvPr/>
+        </p:nvSpPr>
+        <p:spPr>
+          <a:xfrm>
+            <a:off x="274320" y="6876288"/>
+            <a:ext cx="530352" cy="256032"/>
+          </a:xfrm>
+          <a:prstGeom prst="rect">
+            <a:avLst/>
+          </a:prstGeom>
+          <a:solidFill>
+            <a:srgbClr val="F8F8F8"/>
+          </a:solidFill>
+          <a:ln>
+            <a:solidFill>
+              <a:srgbClr val="D0D0D0"/>
+            </a:solidFill>
+          </a:ln>
+        </p:spPr>
+        <p:style>
+          <a:lnRef idx="1">
+            <a:schemeClr val="accent1"/>
+          </a:lnRef>
+          <a:fillRef idx="3">
+            <a:schemeClr val="accent1"/>
+          </a:fillRef>
+          <a:effectRef idx="2">
+            <a:schemeClr val="accent1"/>
+          </a:effectRef>
+          <a:fontRef idx="minor">
+            <a:schemeClr val="lt1"/>
+          </a:fontRef>
+        </p:style>
+        <p:txBody>
+          <a:bodyPr rtlCol="0" anchor="ctr"/>
+          <a:lstStyle/>
+          <a:p>
+            <a:pPr algn="ctr"/>
+          </a:p>
+        </p:txBody>
+      </p:sp>
+      <p:sp>
+        <p:nvSpPr>
+          <p:cNvPr id="51" name="TextBox 50"/>
+          <p:cNvSpPr txBox="1"/>
+          <p:nvPr/>
+        </p:nvSpPr>
+        <p:spPr>
+          <a:xfrm>
+            <a:off x="329184" y="6903720"/>
+            <a:ext cx="438912" cy="219456"/>
+          </a:xfrm>
+          <a:prstGeom prst="rect">
+            <a:avLst/>
+          </a:prstGeom>
+          <a:noFill/>
+        </p:spPr>
+        <p:txBody>
+          <a:bodyPr wrap="square">
+            <a:spAutoFit/>
+          </a:bodyPr>
+          <a:lstStyle/>
+          <a:p>
+            <a:pPr algn="l"/>
+            <a:r>
+              <a:rPr sz="900" b="0" i="0">
+                <a:solidFill>
+                  <a:srgbClr val="404040"/>
+                </a:solidFill>
+              </a:rPr>
+              <a:t>PA6</a:t>
+            </a:r>
+          </a:p>
+        </p:txBody>
+      </p:sp>
+      <p:sp>
+        <p:nvSpPr>
+          <p:cNvPr id="52" name="Rectangle 51"/>
+          <p:cNvSpPr/>
+          <p:nvPr/>
+        </p:nvSpPr>
+        <p:spPr>
+          <a:xfrm>
+            <a:off x="822959" y="6876288"/>
+            <a:ext cx="2176272" cy="256032"/>
+          </a:xfrm>
+          <a:prstGeom prst="rect">
+            <a:avLst/>
+          </a:prstGeom>
+          <a:solidFill>
+            <a:srgbClr val="F8F8F8"/>
+          </a:solidFill>
+          <a:ln>
+            <a:solidFill>
+              <a:srgbClr val="D0D0D0"/>
+            </a:solidFill>
+          </a:ln>
+        </p:spPr>
+        <p:style>
+          <a:lnRef idx="1">
+            <a:schemeClr val="accent1"/>
+          </a:lnRef>
+          <a:fillRef idx="3">
+            <a:schemeClr val="accent1"/>
+          </a:fillRef>
+          <a:effectRef idx="2">
+            <a:schemeClr val="accent1"/>
+          </a:effectRef>
+          <a:fontRef idx="minor">
+            <a:schemeClr val="lt1"/>
+          </a:fontRef>
+        </p:style>
+        <p:txBody>
+          <a:bodyPr rtlCol="0" anchor="ctr"/>
+          <a:lstStyle/>
+          <a:p>
+            <a:pPr algn="ctr"/>
+          </a:p>
+        </p:txBody>
+      </p:sp>
+      <p:sp>
+        <p:nvSpPr>
+          <p:cNvPr id="53" name="TextBox 52"/>
+          <p:cNvSpPr txBox="1"/>
+          <p:nvPr/>
+        </p:nvSpPr>
+        <p:spPr>
+          <a:xfrm>
+            <a:off x="877824" y="6903720"/>
+            <a:ext cx="2084831" cy="219456"/>
+          </a:xfrm>
+          <a:prstGeom prst="rect">
+            <a:avLst/>
+          </a:prstGeom>
+          <a:noFill/>
+        </p:spPr>
+        <p:txBody>
+          <a:bodyPr wrap="square">
+            <a:spAutoFit/>
+          </a:bodyPr>
+          <a:lstStyle/>
+          <a:p>
+            <a:pPr algn="l"/>
+            <a:r>
+              <a:rPr sz="900" b="0" i="0">
+                <a:solidFill>
+                  <a:srgbClr val="404040"/>
+                </a:solidFill>
+              </a:rPr>
+              <a:t>SPI1_MISO (SK9822용)</a:t>
+            </a:r>
+          </a:p>
+        </p:txBody>
+      </p:sp>
+      <p:sp>
+        <p:nvSpPr>
+          <p:cNvPr id="54" name="Rectangle 53"/>
+          <p:cNvSpPr/>
+          <p:nvPr/>
+        </p:nvSpPr>
+        <p:spPr>
+          <a:xfrm>
+            <a:off x="3017520" y="6876288"/>
+            <a:ext cx="2176272" cy="256032"/>
+          </a:xfrm>
+          <a:prstGeom prst="rect">
+            <a:avLst/>
+          </a:prstGeom>
+          <a:solidFill>
+            <a:srgbClr val="F8F8F8"/>
+          </a:solidFill>
+          <a:ln>
+            <a:solidFill>
+              <a:srgbClr val="D0D0D0"/>
+            </a:solidFill>
+          </a:ln>
+        </p:spPr>
+        <p:style>
+          <a:lnRef idx="1">
+            <a:schemeClr val="accent1"/>
+          </a:lnRef>
+          <a:fillRef idx="3">
+            <a:schemeClr val="accent1"/>
+          </a:fillRef>
+          <a:effectRef idx="2">
+            <a:schemeClr val="accent1"/>
+          </a:effectRef>
+          <a:fontRef idx="minor">
+            <a:schemeClr val="lt1"/>
+          </a:fontRef>
+        </p:style>
+        <p:txBody>
+          <a:bodyPr rtlCol="0" anchor="ctr"/>
+          <a:lstStyle/>
+          <a:p>
+            <a:pPr algn="ctr"/>
+          </a:p>
+        </p:txBody>
+      </p:sp>
+      <p:sp>
+        <p:nvSpPr>
+          <p:cNvPr id="55" name="TextBox 54"/>
+          <p:cNvSpPr txBox="1"/>
+          <p:nvPr/>
+        </p:nvSpPr>
+        <p:spPr>
+          <a:xfrm>
+            <a:off x="3072384" y="6903720"/>
+            <a:ext cx="2084831" cy="219456"/>
+          </a:xfrm>
+          <a:prstGeom prst="rect">
+            <a:avLst/>
+          </a:prstGeom>
+          <a:noFill/>
+        </p:spPr>
+        <p:txBody>
+          <a:bodyPr wrap="square">
+            <a:spAutoFit/>
+          </a:bodyPr>
+          <a:lstStyle/>
+          <a:p>
+            <a:pPr algn="l"/>
+            <a:r>
+              <a:rPr sz="900" b="0" i="0">
+                <a:solidFill>
+                  <a:srgbClr val="404040"/>
+                </a:solidFill>
+              </a:rPr>
+              <a:t>DO7 (EEPROM 읽기)</a:t>
+            </a:r>
+          </a:p>
+        </p:txBody>
+      </p:sp>
+      <p:sp>
+        <p:nvSpPr>
+          <p:cNvPr id="56" name="Rectangle 55"/>
+          <p:cNvSpPr/>
+          <p:nvPr/>
+        </p:nvSpPr>
+        <p:spPr>
+          <a:xfrm>
+            <a:off x="5212079" y="6876288"/>
+            <a:ext cx="3547872" cy="256032"/>
+          </a:xfrm>
+          <a:prstGeom prst="rect">
+            <a:avLst/>
+          </a:prstGeom>
+          <a:solidFill>
+            <a:srgbClr val="F8F8F8"/>
+          </a:solidFill>
+          <a:ln>
+            <a:solidFill>
+              <a:srgbClr val="D0D0D0"/>
+            </a:solidFill>
+          </a:ln>
+        </p:spPr>
+        <p:style>
+          <a:lnRef idx="1">
+            <a:schemeClr val="accent1"/>
+          </a:lnRef>
+          <a:fillRef idx="3">
+            <a:schemeClr val="accent1"/>
+          </a:fillRef>
+          <a:effectRef idx="2">
+            <a:schemeClr val="accent1"/>
+          </a:effectRef>
+          <a:fontRef idx="minor">
+            <a:schemeClr val="lt1"/>
+          </a:fontRef>
+        </p:style>
+        <p:txBody>
+          <a:bodyPr rtlCol="0" anchor="ctr"/>
+          <a:lstStyle/>
+          <a:p>
+            <a:pPr algn="ctr"/>
+          </a:p>
+        </p:txBody>
+      </p:sp>
+      <p:sp>
+        <p:nvSpPr>
+          <p:cNvPr id="57" name="TextBox 56"/>
+          <p:cNvSpPr txBox="1"/>
+          <p:nvPr/>
+        </p:nvSpPr>
+        <p:spPr>
+          <a:xfrm>
+            <a:off x="5266943" y="6903720"/>
+            <a:ext cx="3456432" cy="219456"/>
+          </a:xfrm>
+          <a:prstGeom prst="rect">
+            <a:avLst/>
+          </a:prstGeom>
+          <a:noFill/>
+        </p:spPr>
+        <p:txBody>
+          <a:bodyPr wrap="square">
+            <a:spAutoFit/>
+          </a:bodyPr>
+          <a:lstStyle/>
+          <a:p>
+            <a:pPr algn="l"/>
+            <a:r>
+              <a:rPr sz="900" b="0" i="0">
+                <a:solidFill>
+                  <a:srgbClr val="404040"/>
+                </a:solidFill>
+              </a:rPr>
+              <a:t>SPI1_DIRECTION_1LINE → MISO 미사용 → 충돌 없음</a:t>
+            </a:r>
+          </a:p>
+        </p:txBody>
+      </p:sp>
+      <p:sp>
+        <p:nvSpPr>
+          <p:cNvPr id="58" name="Rectangle 57"/>
+          <p:cNvSpPr/>
+          <p:nvPr/>
+        </p:nvSpPr>
+        <p:spPr>
+          <a:xfrm>
+            <a:off x="274320" y="7132320"/>
+            <a:ext cx="530352" cy="256032"/>
+          </a:xfrm>
+          <a:prstGeom prst="rect">
+            <a:avLst/>
+          </a:prstGeom>
+          <a:solidFill>
+            <a:srgbClr val="FFFFFF"/>
+          </a:solidFill>
+          <a:ln>
+            <a:solidFill>
+              <a:srgbClr val="D0D0D0"/>
+            </a:solidFill>
+          </a:ln>
+        </p:spPr>
+        <p:style>
+          <a:lnRef idx="1">
+            <a:schemeClr val="accent1"/>
+          </a:lnRef>
+          <a:fillRef idx="3">
+            <a:schemeClr val="accent1"/>
+          </a:fillRef>
+          <a:effectRef idx="2">
+            <a:schemeClr val="accent1"/>
+          </a:effectRef>
+          <a:fontRef idx="minor">
+            <a:schemeClr val="lt1"/>
+          </a:fontRef>
+        </p:style>
+        <p:txBody>
+          <a:bodyPr rtlCol="0" anchor="ctr"/>
+          <a:lstStyle/>
+          <a:p>
+            <a:pPr algn="ctr"/>
+          </a:p>
+        </p:txBody>
+      </p:sp>
+      <p:sp>
+        <p:nvSpPr>
+          <p:cNvPr id="59" name="TextBox 58"/>
+          <p:cNvSpPr txBox="1"/>
+          <p:nvPr/>
+        </p:nvSpPr>
+        <p:spPr>
+          <a:xfrm>
+            <a:off x="329184" y="7159752"/>
+            <a:ext cx="438912" cy="219456"/>
+          </a:xfrm>
+          <a:prstGeom prst="rect">
+            <a:avLst/>
+          </a:prstGeom>
+          <a:noFill/>
+        </p:spPr>
+        <p:txBody>
+          <a:bodyPr wrap="square">
+            <a:spAutoFit/>
+          </a:bodyPr>
+          <a:lstStyle/>
+          <a:p>
+            <a:pPr algn="l"/>
+            <a:r>
+              <a:rPr sz="900" b="0" i="0">
+                <a:solidFill>
+                  <a:srgbClr val="404040"/>
+                </a:solidFill>
+              </a:rPr>
+              <a:t>PA7</a:t>
+            </a:r>
+          </a:p>
+        </p:txBody>
+      </p:sp>
+      <p:sp>
+        <p:nvSpPr>
+          <p:cNvPr id="60" name="Rectangle 59"/>
+          <p:cNvSpPr/>
+          <p:nvPr/>
+        </p:nvSpPr>
+        <p:spPr>
+          <a:xfrm>
+            <a:off x="822959" y="7132320"/>
+            <a:ext cx="2176272" cy="256032"/>
+          </a:xfrm>
+          <a:prstGeom prst="rect">
+            <a:avLst/>
+          </a:prstGeom>
+          <a:solidFill>
+            <a:srgbClr val="FFFFFF"/>
+          </a:solidFill>
+          <a:ln>
+            <a:solidFill>
+              <a:srgbClr val="D0D0D0"/>
+            </a:solidFill>
+          </a:ln>
+        </p:spPr>
+        <p:style>
+          <a:lnRef idx="1">
+            <a:schemeClr val="accent1"/>
+          </a:lnRef>
+          <a:fillRef idx="3">
+            <a:schemeClr val="accent1"/>
+          </a:fillRef>
+          <a:effectRef idx="2">
+            <a:schemeClr val="accent1"/>
+          </a:effectRef>
+          <a:fontRef idx="minor">
+            <a:schemeClr val="lt1"/>
+          </a:fontRef>
+        </p:style>
+        <p:txBody>
+          <a:bodyPr rtlCol="0" anchor="ctr"/>
+          <a:lstStyle/>
+          <a:p>
+            <a:pPr algn="ctr"/>
+          </a:p>
+        </p:txBody>
+      </p:sp>
+      <p:sp>
+        <p:nvSpPr>
+          <p:cNvPr id="61" name="TextBox 60"/>
+          <p:cNvSpPr txBox="1"/>
+          <p:nvPr/>
+        </p:nvSpPr>
+        <p:spPr>
+          <a:xfrm>
+            <a:off x="877824" y="7159752"/>
+            <a:ext cx="2084831" cy="219456"/>
+          </a:xfrm>
+          <a:prstGeom prst="rect">
+            <a:avLst/>
+          </a:prstGeom>
+          <a:noFill/>
+        </p:spPr>
+        <p:txBody>
+          <a:bodyPr wrap="square">
+            <a:spAutoFit/>
+          </a:bodyPr>
+          <a:lstStyle/>
+          <a:p>
+            <a:pPr algn="l"/>
+            <a:r>
+              <a:rPr sz="900" b="0" i="0">
+                <a:solidFill>
+                  <a:srgbClr val="404040"/>
+                </a:solidFill>
+              </a:rPr>
+              <a:t>SPI1_MOSI (SK9822 데이터)</a:t>
+            </a:r>
+          </a:p>
+        </p:txBody>
+      </p:sp>
+      <p:sp>
+        <p:nvSpPr>
+          <p:cNvPr id="62" name="Rectangle 61"/>
+          <p:cNvSpPr/>
+          <p:nvPr/>
+        </p:nvSpPr>
+        <p:spPr>
+          <a:xfrm>
+            <a:off x="3017520" y="7132320"/>
+            <a:ext cx="2176272" cy="256032"/>
+          </a:xfrm>
+          <a:prstGeom prst="rect">
+            <a:avLst/>
+          </a:prstGeom>
+          <a:solidFill>
+            <a:srgbClr val="FFFFFF"/>
+          </a:solidFill>
+          <a:ln>
+            <a:solidFill>
+              <a:srgbClr val="D0D0D0"/>
+            </a:solidFill>
+          </a:ln>
+        </p:spPr>
+        <p:style>
+          <a:lnRef idx="1">
+            <a:schemeClr val="accent1"/>
+          </a:lnRef>
+          <a:fillRef idx="3">
+            <a:schemeClr val="accent1"/>
+          </a:fillRef>
+          <a:effectRef idx="2">
+            <a:schemeClr val="accent1"/>
+          </a:effectRef>
+          <a:fontRef idx="minor">
+            <a:schemeClr val="lt1"/>
+          </a:fontRef>
+        </p:style>
+        <p:txBody>
+          <a:bodyPr rtlCol="0" anchor="ctr"/>
+          <a:lstStyle/>
+          <a:p>
+            <a:pPr algn="ctr"/>
+          </a:p>
+        </p:txBody>
+      </p:sp>
+      <p:sp>
+        <p:nvSpPr>
+          <p:cNvPr id="63" name="TextBox 62"/>
+          <p:cNvSpPr txBox="1"/>
+          <p:nvPr/>
+        </p:nvSpPr>
+        <p:spPr>
+          <a:xfrm>
+            <a:off x="3072384" y="7159752"/>
+            <a:ext cx="2084831" cy="219456"/>
+          </a:xfrm>
+          <a:prstGeom prst="rect">
+            <a:avLst/>
+          </a:prstGeom>
+          <a:noFill/>
+        </p:spPr>
+        <p:txBody>
+          <a:bodyPr wrap="square">
+            <a:spAutoFit/>
+          </a:bodyPr>
+          <a:lstStyle/>
+          <a:p>
+            <a:pPr algn="l"/>
+            <a:r>
+              <a:rPr sz="900" b="0" i="0">
+                <a:solidFill>
+                  <a:srgbClr val="404040"/>
+                </a:solidFill>
+              </a:rPr>
+              <a:t>—</a:t>
+            </a:r>
+          </a:p>
+        </p:txBody>
+      </p:sp>
+      <p:sp>
+        <p:nvSpPr>
+          <p:cNvPr id="64" name="Rectangle 63"/>
+          <p:cNvSpPr/>
+          <p:nvPr/>
+        </p:nvSpPr>
+        <p:spPr>
+          <a:xfrm>
+            <a:off x="5212079" y="7132320"/>
+            <a:ext cx="3547872" cy="256032"/>
+          </a:xfrm>
+          <a:prstGeom prst="rect">
+            <a:avLst/>
+          </a:prstGeom>
+          <a:solidFill>
+            <a:srgbClr val="FFFFFF"/>
+          </a:solidFill>
+          <a:ln>
+            <a:solidFill>
+              <a:srgbClr val="D0D0D0"/>
+            </a:solidFill>
+          </a:ln>
+        </p:spPr>
+        <p:style>
+          <a:lnRef idx="1">
+            <a:schemeClr val="accent1"/>
+          </a:lnRef>
+          <a:fillRef idx="3">
+            <a:schemeClr val="accent1"/>
+          </a:fillRef>
+          <a:effectRef idx="2">
+            <a:schemeClr val="accent1"/>
+          </a:effectRef>
+          <a:fontRef idx="minor">
+            <a:schemeClr val="lt1"/>
+          </a:fontRef>
+        </p:style>
+        <p:txBody>
+          <a:bodyPr rtlCol="0" anchor="ctr"/>
+          <a:lstStyle/>
+          <a:p>
+            <a:pPr algn="ctr"/>
+          </a:p>
+        </p:txBody>
+      </p:sp>
+      <p:sp>
+        <p:nvSpPr>
+          <p:cNvPr id="65" name="TextBox 64"/>
+          <p:cNvSpPr txBox="1"/>
+          <p:nvPr/>
+        </p:nvSpPr>
+        <p:spPr>
+          <a:xfrm>
+            <a:off x="5266943" y="7159752"/>
+            <a:ext cx="3456432" cy="219456"/>
+          </a:xfrm>
+          <a:prstGeom prst="rect">
+            <a:avLst/>
+          </a:prstGeom>
+          <a:noFill/>
+        </p:spPr>
+        <p:txBody>
+          <a:bodyPr wrap="square">
+            <a:spAutoFit/>
+          </a:bodyPr>
+          <a:lstStyle/>
+          <a:p>
+            <a:pPr algn="l"/>
+            <a:r>
+              <a:rPr sz="900" b="0" i="0">
+                <a:solidFill>
+                  <a:srgbClr val="404040"/>
+                </a:solidFill>
+              </a:rPr>
+              <a:t>LED 데이터 전송 핀, SPI1 유지 필요</a:t>
+            </a:r>
+          </a:p>
+        </p:txBody>
+      </p:sp>
+    </p:spTree>
+  </p:cSld>
+  <p:clrMapOvr>
+    <a:masterClrMapping/>
+  </p:clrMapOvr>
+</p:sld>
+</file>
+
 <file path=ppt/slides/slide2.xml><?xml version="1.0" encoding="utf-8"?>
 <p:sld xmlns:a="http://schemas.openxmlformats.org/drawingml/2006/main" xmlns:r="http://schemas.openxmlformats.org/officeDocument/2006/relationships" xmlns:p="http://schemas.openxmlformats.org/presentationml/2006/main">
   <p:cSld name="Slide 2">

--- a/93c56_overview.pptx
+++ b/93c56_overview.pptx
@@ -24,6 +24,7 @@
     <p:sldId id="272" r:id="rId23"/>
     <p:sldId id="273" r:id="rId24"/>
     <p:sldId id="274" r:id="rId25"/>
+    <p:sldId id="275" r:id="rId26"/>
   </p:sldIdLst>
   <p:notesMasterIdLst>
     <p:notesMasterId r:id="rId15"/>
@@ -19102,6 +19103,2282 @@
 </p:sld>
 </file>
 
+<file path=ppt/slides/slide20.xml><?xml version="1.0" encoding="utf-8"?>
+<p:sld xmlns:a="http://schemas.openxmlformats.org/drawingml/2006/main" xmlns:p="http://schemas.openxmlformats.org/presentationml/2006/main" xmlns:r="http://schemas.openxmlformats.org/officeDocument/2006/relationships">
+  <p:cSld>
+    <p:spTree>
+      <p:nvGrpSpPr>
+        <p:cNvPr id="1" name=""/>
+        <p:cNvGrpSpPr/>
+        <p:nvPr/>
+      </p:nvGrpSpPr>
+      <p:grpSpPr/>
+      <p:sp>
+        <p:nvSpPr>
+          <p:cNvPr id="2" name="Rectangle 1"/>
+          <p:cNvSpPr/>
+          <p:nvPr/>
+        </p:nvSpPr>
+        <p:spPr>
+          <a:xfrm>
+            <a:off x="0" y="0"/>
+            <a:ext cx="9144000" cy="640080"/>
+          </a:xfrm>
+          <a:prstGeom prst="rect">
+            <a:avLst/>
+          </a:prstGeom>
+          <a:solidFill>
+            <a:srgbClr val="1F497D"/>
+          </a:solidFill>
+          <a:ln>
+            <a:noFill/>
+          </a:ln>
+        </p:spPr>
+        <p:style>
+          <a:lnRef idx="1">
+            <a:schemeClr val="accent1"/>
+          </a:lnRef>
+          <a:fillRef idx="3">
+            <a:schemeClr val="accent1"/>
+          </a:fillRef>
+          <a:effectRef idx="2">
+            <a:schemeClr val="accent1"/>
+          </a:effectRef>
+          <a:fontRef idx="minor">
+            <a:schemeClr val="lt1"/>
+          </a:fontRef>
+        </p:style>
+        <p:txBody>
+          <a:bodyPr rtlCol="0" anchor="ctr"/>
+          <a:lstStyle/>
+          <a:p>
+            <a:pPr algn="ctr"/>
+          </a:p>
+        </p:txBody>
+      </p:sp>
+      <p:sp>
+        <p:nvSpPr>
+          <p:cNvPr id="3" name="TextBox 2"/>
+          <p:cNvSpPr txBox="1"/>
+          <p:nvPr/>
+        </p:nvSpPr>
+        <p:spPr>
+          <a:xfrm>
+            <a:off x="137160" y="45720"/>
+            <a:ext cx="8229600" cy="548640"/>
+          </a:xfrm>
+          <a:prstGeom prst="rect">
+            <a:avLst/>
+          </a:prstGeom>
+          <a:noFill/>
+        </p:spPr>
+        <p:txBody>
+          <a:bodyPr wrap="square">
+            <a:spAutoFit/>
+          </a:bodyPr>
+          <a:lstStyle/>
+          <a:p>
+            <a:pPr algn="l"/>
+            <a:r>
+              <a:rPr sz="2000" b="1" i="0">
+                <a:solidFill>
+                  <a:srgbClr val="FFFFFF"/>
+                </a:solidFill>
+              </a:rPr>
+              <a:t>슬라이드 20  Microwire 읽기 수정 + 메모리 테스트(State C)</a:t>
+            </a:r>
+          </a:p>
+        </p:txBody>
+      </p:sp>
+      <p:sp>
+        <p:nvSpPr>
+          <p:cNvPr id="4" name="TextBox 3"/>
+          <p:cNvSpPr txBox="1"/>
+          <p:nvPr/>
+        </p:nvSpPr>
+        <p:spPr>
+          <a:xfrm>
+            <a:off x="137160" y="658368"/>
+            <a:ext cx="8686800" cy="320040"/>
+          </a:xfrm>
+          <a:prstGeom prst="rect">
+            <a:avLst/>
+          </a:prstGeom>
+          <a:noFill/>
+        </p:spPr>
+        <p:txBody>
+          <a:bodyPr wrap="square">
+            <a:spAutoFit/>
+          </a:bodyPr>
+          <a:lstStyle/>
+          <a:p>
+            <a:pPr algn="l"/>
+            <a:r>
+              <a:rPr sz="1200" b="0" i="1">
+                <a:solidFill>
+                  <a:srgbClr val="2E74B5"/>
+                </a:solidFill>
+              </a:rPr>
+              <a:t>2026.04 | 0xAA/0x55 R/W 정상 동작 확인 · 전체 주소 검증 단계 추가</a:t>
+            </a:r>
+          </a:p>
+        </p:txBody>
+      </p:sp>
+      <p:sp>
+        <p:nvSpPr>
+          <p:cNvPr id="5" name="Rectangle 4"/>
+          <p:cNvSpPr/>
+          <p:nvPr/>
+        </p:nvSpPr>
+        <p:spPr>
+          <a:xfrm>
+            <a:off x="274320" y="777240"/>
+            <a:ext cx="4206240" cy="274320"/>
+          </a:xfrm>
+          <a:prstGeom prst="rect">
+            <a:avLst/>
+          </a:prstGeom>
+          <a:solidFill>
+            <a:srgbClr val="C00000"/>
+          </a:solidFill>
+          <a:ln>
+            <a:noFill/>
+          </a:ln>
+        </p:spPr>
+        <p:style>
+          <a:lnRef idx="1">
+            <a:schemeClr val="accent1"/>
+          </a:lnRef>
+          <a:fillRef idx="3">
+            <a:schemeClr val="accent1"/>
+          </a:fillRef>
+          <a:effectRef idx="2">
+            <a:schemeClr val="accent1"/>
+          </a:effectRef>
+          <a:fontRef idx="minor">
+            <a:schemeClr val="lt1"/>
+          </a:fontRef>
+        </p:style>
+        <p:txBody>
+          <a:bodyPr rtlCol="0" anchor="ctr"/>
+          <a:lstStyle/>
+          <a:p>
+            <a:pPr algn="ctr"/>
+          </a:p>
+        </p:txBody>
+      </p:sp>
+      <p:sp>
+        <p:nvSpPr>
+          <p:cNvPr id="6" name="TextBox 5"/>
+          <p:cNvSpPr txBox="1"/>
+          <p:nvPr/>
+        </p:nvSpPr>
+        <p:spPr>
+          <a:xfrm>
+            <a:off x="347472" y="813816"/>
+            <a:ext cx="4114800" cy="228600"/>
+          </a:xfrm>
+          <a:prstGeom prst="rect">
+            <a:avLst/>
+          </a:prstGeom>
+          <a:noFill/>
+        </p:spPr>
+        <p:txBody>
+          <a:bodyPr wrap="square">
+            <a:spAutoFit/>
+          </a:bodyPr>
+          <a:lstStyle/>
+          <a:p>
+            <a:pPr algn="l"/>
+            <a:r>
+              <a:rPr sz="1100" b="1" i="0">
+                <a:solidFill>
+                  <a:srgbClr val="FFFFFF"/>
+                </a:solidFill>
+              </a:rPr>
+              <a:t>① Microwire 읽기 버그 수정 (EE_Read)</a:t>
+            </a:r>
+          </a:p>
+        </p:txBody>
+      </p:sp>
+      <p:sp>
+        <p:nvSpPr>
+          <p:cNvPr id="7" name="Rectangle 6"/>
+          <p:cNvSpPr/>
+          <p:nvPr/>
+        </p:nvSpPr>
+        <p:spPr>
+          <a:xfrm>
+            <a:off x="274320" y="1097280"/>
+            <a:ext cx="1005840" cy="201168"/>
+          </a:xfrm>
+          <a:prstGeom prst="rect">
+            <a:avLst/>
+          </a:prstGeom>
+          <a:solidFill>
+            <a:srgbClr val="2E74B5"/>
+          </a:solidFill>
+          <a:ln>
+            <a:noFill/>
+          </a:ln>
+        </p:spPr>
+        <p:style>
+          <a:lnRef idx="1">
+            <a:schemeClr val="accent1"/>
+          </a:lnRef>
+          <a:fillRef idx="3">
+            <a:schemeClr val="accent1"/>
+          </a:fillRef>
+          <a:effectRef idx="2">
+            <a:schemeClr val="accent1"/>
+          </a:effectRef>
+          <a:fontRef idx="minor">
+            <a:schemeClr val="lt1"/>
+          </a:fontRef>
+        </p:style>
+        <p:txBody>
+          <a:bodyPr rtlCol="0" anchor="ctr"/>
+          <a:lstStyle/>
+          <a:p>
+            <a:pPr algn="ctr"/>
+          </a:p>
+        </p:txBody>
+      </p:sp>
+      <p:sp>
+        <p:nvSpPr>
+          <p:cNvPr id="8" name="TextBox 7"/>
+          <p:cNvSpPr txBox="1"/>
+          <p:nvPr/>
+        </p:nvSpPr>
+        <p:spPr>
+          <a:xfrm>
+            <a:off x="320040" y="1124712"/>
+            <a:ext cx="914400" cy="164592"/>
+          </a:xfrm>
+          <a:prstGeom prst="rect">
+            <a:avLst/>
+          </a:prstGeom>
+          <a:noFill/>
+        </p:spPr>
+        <p:txBody>
+          <a:bodyPr wrap="square">
+            <a:spAutoFit/>
+          </a:bodyPr>
+          <a:lstStyle/>
+          <a:p>
+            <a:pPr algn="l"/>
+            <a:r>
+              <a:rPr sz="900" b="1" i="0">
+                <a:solidFill>
+                  <a:srgbClr val="FFFFFF"/>
+                </a:solidFill>
+              </a:rPr>
+              <a:t>문제</a:t>
+            </a:r>
+          </a:p>
+        </p:txBody>
+      </p:sp>
+      <p:sp>
+        <p:nvSpPr>
+          <p:cNvPr id="9" name="Rectangle 8"/>
+          <p:cNvSpPr/>
+          <p:nvPr/>
+        </p:nvSpPr>
+        <p:spPr>
+          <a:xfrm>
+            <a:off x="1280160" y="1097280"/>
+            <a:ext cx="3200400" cy="201168"/>
+          </a:xfrm>
+          <a:prstGeom prst="rect">
+            <a:avLst/>
+          </a:prstGeom>
+          <a:solidFill>
+            <a:srgbClr val="F8F8F8"/>
+          </a:solidFill>
+          <a:ln>
+            <a:solidFill>
+              <a:srgbClr val="2E74B5"/>
+            </a:solidFill>
+          </a:ln>
+        </p:spPr>
+        <p:style>
+          <a:lnRef idx="1">
+            <a:schemeClr val="accent1"/>
+          </a:lnRef>
+          <a:fillRef idx="3">
+            <a:schemeClr val="accent1"/>
+          </a:fillRef>
+          <a:effectRef idx="2">
+            <a:schemeClr val="accent1"/>
+          </a:effectRef>
+          <a:fontRef idx="minor">
+            <a:schemeClr val="lt1"/>
+          </a:fontRef>
+        </p:style>
+        <p:txBody>
+          <a:bodyPr rtlCol="0" anchor="ctr"/>
+          <a:lstStyle/>
+          <a:p>
+            <a:pPr algn="ctr"/>
+          </a:p>
+        </p:txBody>
+      </p:sp>
+      <p:sp>
+        <p:nvSpPr>
+          <p:cNvPr id="10" name="TextBox 9"/>
+          <p:cNvSpPr txBox="1"/>
+          <p:nvPr/>
+        </p:nvSpPr>
+        <p:spPr>
+          <a:xfrm>
+            <a:off x="1353312" y="1115568"/>
+            <a:ext cx="3072384" cy="201168"/>
+          </a:xfrm>
+          <a:prstGeom prst="rect">
+            <a:avLst/>
+          </a:prstGeom>
+          <a:noFill/>
+        </p:spPr>
+        <p:txBody>
+          <a:bodyPr wrap="square">
+            <a:spAutoFit/>
+          </a:bodyPr>
+          <a:lstStyle/>
+          <a:p>
+            <a:pPr algn="l"/>
+            <a:r>
+              <a:rPr sz="800" b="0" i="0">
+                <a:solidFill>
+                  <a:srgbClr val="404040"/>
+                </a:solidFill>
+              </a:rPr>
+              <a:t>EE_Read()에서 ee_recv_bit() 로 더미비트 스킵
+→ D7 을 소비해 데이터 1비트 좌이동 발생</a:t>
+            </a:r>
+          </a:p>
+        </p:txBody>
+      </p:sp>
+      <p:sp>
+        <p:nvSpPr>
+          <p:cNvPr id="11" name="Rectangle 10"/>
+          <p:cNvSpPr/>
+          <p:nvPr/>
+        </p:nvSpPr>
+        <p:spPr>
+          <a:xfrm>
+            <a:off x="274320" y="1344168"/>
+            <a:ext cx="1005840" cy="201168"/>
+          </a:xfrm>
+          <a:prstGeom prst="rect">
+            <a:avLst/>
+          </a:prstGeom>
+          <a:solidFill>
+            <a:srgbClr val="2E74B5"/>
+          </a:solidFill>
+          <a:ln>
+            <a:noFill/>
+          </a:ln>
+        </p:spPr>
+        <p:style>
+          <a:lnRef idx="1">
+            <a:schemeClr val="accent1"/>
+          </a:lnRef>
+          <a:fillRef idx="3">
+            <a:schemeClr val="accent1"/>
+          </a:fillRef>
+          <a:effectRef idx="2">
+            <a:schemeClr val="accent1"/>
+          </a:effectRef>
+          <a:fontRef idx="minor">
+            <a:schemeClr val="lt1"/>
+          </a:fontRef>
+        </p:style>
+        <p:txBody>
+          <a:bodyPr rtlCol="0" anchor="ctr"/>
+          <a:lstStyle/>
+          <a:p>
+            <a:pPr algn="ctr"/>
+          </a:p>
+        </p:txBody>
+      </p:sp>
+      <p:sp>
+        <p:nvSpPr>
+          <p:cNvPr id="12" name="TextBox 11"/>
+          <p:cNvSpPr txBox="1"/>
+          <p:nvPr/>
+        </p:nvSpPr>
+        <p:spPr>
+          <a:xfrm>
+            <a:off x="320040" y="1371600"/>
+            <a:ext cx="914400" cy="164592"/>
+          </a:xfrm>
+          <a:prstGeom prst="rect">
+            <a:avLst/>
+          </a:prstGeom>
+          <a:noFill/>
+        </p:spPr>
+        <p:txBody>
+          <a:bodyPr wrap="square">
+            <a:spAutoFit/>
+          </a:bodyPr>
+          <a:lstStyle/>
+          <a:p>
+            <a:pPr algn="l"/>
+            <a:r>
+              <a:rPr sz="900" b="1" i="0">
+                <a:solidFill>
+                  <a:srgbClr val="FFFFFF"/>
+                </a:solidFill>
+              </a:rPr>
+              <a:t>증상</a:t>
+            </a:r>
+          </a:p>
+        </p:txBody>
+      </p:sp>
+      <p:sp>
+        <p:nvSpPr>
+          <p:cNvPr id="13" name="Rectangle 12"/>
+          <p:cNvSpPr/>
+          <p:nvPr/>
+        </p:nvSpPr>
+        <p:spPr>
+          <a:xfrm>
+            <a:off x="1280160" y="1344168"/>
+            <a:ext cx="3200400" cy="201168"/>
+          </a:xfrm>
+          <a:prstGeom prst="rect">
+            <a:avLst/>
+          </a:prstGeom>
+          <a:solidFill>
+            <a:srgbClr val="F8F8F8"/>
+          </a:solidFill>
+          <a:ln>
+            <a:solidFill>
+              <a:srgbClr val="2E74B5"/>
+            </a:solidFill>
+          </a:ln>
+        </p:spPr>
+        <p:style>
+          <a:lnRef idx="1">
+            <a:schemeClr val="accent1"/>
+          </a:lnRef>
+          <a:fillRef idx="3">
+            <a:schemeClr val="accent1"/>
+          </a:fillRef>
+          <a:effectRef idx="2">
+            <a:schemeClr val="accent1"/>
+          </a:effectRef>
+          <a:fontRef idx="minor">
+            <a:schemeClr val="lt1"/>
+          </a:fontRef>
+        </p:style>
+        <p:txBody>
+          <a:bodyPr rtlCol="0" anchor="ctr"/>
+          <a:lstStyle/>
+          <a:p>
+            <a:pPr algn="ctr"/>
+          </a:p>
+        </p:txBody>
+      </p:sp>
+      <p:sp>
+        <p:nvSpPr>
+          <p:cNvPr id="14" name="TextBox 13"/>
+          <p:cNvSpPr txBox="1"/>
+          <p:nvPr/>
+        </p:nvSpPr>
+        <p:spPr>
+          <a:xfrm>
+            <a:off x="1353312" y="1362456"/>
+            <a:ext cx="3072384" cy="201168"/>
+          </a:xfrm>
+          <a:prstGeom prst="rect">
+            <a:avLst/>
+          </a:prstGeom>
+          <a:noFill/>
+        </p:spPr>
+        <p:txBody>
+          <a:bodyPr wrap="square">
+            <a:spAutoFit/>
+          </a:bodyPr>
+          <a:lstStyle/>
+          <a:p>
+            <a:pPr algn="l"/>
+            <a:r>
+              <a:rPr sz="800" b="0" i="0">
+                <a:solidFill>
+                  <a:srgbClr val="404040"/>
+                </a:solidFill>
+              </a:rPr>
+              <a:t>Write 0x5A  →  Read 0xB4  (0x5A &lt;&lt; 1)
+Write 0xAA  →  Read 0x4A  등 항상 불일치</a:t>
+            </a:r>
+          </a:p>
+        </p:txBody>
+      </p:sp>
+      <p:sp>
+        <p:nvSpPr>
+          <p:cNvPr id="15" name="Rectangle 14"/>
+          <p:cNvSpPr/>
+          <p:nvPr/>
+        </p:nvSpPr>
+        <p:spPr>
+          <a:xfrm>
+            <a:off x="274320" y="1591056"/>
+            <a:ext cx="1005840" cy="201168"/>
+          </a:xfrm>
+          <a:prstGeom prst="rect">
+            <a:avLst/>
+          </a:prstGeom>
+          <a:solidFill>
+            <a:srgbClr val="2E74B5"/>
+          </a:solidFill>
+          <a:ln>
+            <a:noFill/>
+          </a:ln>
+        </p:spPr>
+        <p:style>
+          <a:lnRef idx="1">
+            <a:schemeClr val="accent1"/>
+          </a:lnRef>
+          <a:fillRef idx="3">
+            <a:schemeClr val="accent1"/>
+          </a:fillRef>
+          <a:effectRef idx="2">
+            <a:schemeClr val="accent1"/>
+          </a:effectRef>
+          <a:fontRef idx="minor">
+            <a:schemeClr val="lt1"/>
+          </a:fontRef>
+        </p:style>
+        <p:txBody>
+          <a:bodyPr rtlCol="0" anchor="ctr"/>
+          <a:lstStyle/>
+          <a:p>
+            <a:pPr algn="ctr"/>
+          </a:p>
+        </p:txBody>
+      </p:sp>
+      <p:sp>
+        <p:nvSpPr>
+          <p:cNvPr id="16" name="TextBox 15"/>
+          <p:cNvSpPr txBox="1"/>
+          <p:nvPr/>
+        </p:nvSpPr>
+        <p:spPr>
+          <a:xfrm>
+            <a:off x="320040" y="1618488"/>
+            <a:ext cx="914400" cy="164592"/>
+          </a:xfrm>
+          <a:prstGeom prst="rect">
+            <a:avLst/>
+          </a:prstGeom>
+          <a:noFill/>
+        </p:spPr>
+        <p:txBody>
+          <a:bodyPr wrap="square">
+            <a:spAutoFit/>
+          </a:bodyPr>
+          <a:lstStyle/>
+          <a:p>
+            <a:pPr algn="l"/>
+            <a:r>
+              <a:rPr sz="900" b="1" i="0">
+                <a:solidFill>
+                  <a:srgbClr val="FFFFFF"/>
+                </a:solidFill>
+              </a:rPr>
+              <a:t>수정</a:t>
+            </a:r>
+          </a:p>
+        </p:txBody>
+      </p:sp>
+      <p:sp>
+        <p:nvSpPr>
+          <p:cNvPr id="17" name="Rectangle 16"/>
+          <p:cNvSpPr/>
+          <p:nvPr/>
+        </p:nvSpPr>
+        <p:spPr>
+          <a:xfrm>
+            <a:off x="1280160" y="1591056"/>
+            <a:ext cx="3200400" cy="201168"/>
+          </a:xfrm>
+          <a:prstGeom prst="rect">
+            <a:avLst/>
+          </a:prstGeom>
+          <a:solidFill>
+            <a:srgbClr val="F8F8F8"/>
+          </a:solidFill>
+          <a:ln>
+            <a:solidFill>
+              <a:srgbClr val="2E74B5"/>
+            </a:solidFill>
+          </a:ln>
+        </p:spPr>
+        <p:style>
+          <a:lnRef idx="1">
+            <a:schemeClr val="accent1"/>
+          </a:lnRef>
+          <a:fillRef idx="3">
+            <a:schemeClr val="accent1"/>
+          </a:fillRef>
+          <a:effectRef idx="2">
+            <a:schemeClr val="accent1"/>
+          </a:effectRef>
+          <a:fontRef idx="minor">
+            <a:schemeClr val="lt1"/>
+          </a:fontRef>
+        </p:style>
+        <p:txBody>
+          <a:bodyPr rtlCol="0" anchor="ctr"/>
+          <a:lstStyle/>
+          <a:p>
+            <a:pPr algn="ctr"/>
+          </a:p>
+        </p:txBody>
+      </p:sp>
+      <p:sp>
+        <p:nvSpPr>
+          <p:cNvPr id="18" name="TextBox 17"/>
+          <p:cNvSpPr txBox="1"/>
+          <p:nvPr/>
+        </p:nvSpPr>
+        <p:spPr>
+          <a:xfrm>
+            <a:off x="1353312" y="1609344"/>
+            <a:ext cx="3072384" cy="201168"/>
+          </a:xfrm>
+          <a:prstGeom prst="rect">
+            <a:avLst/>
+          </a:prstGeom>
+          <a:noFill/>
+        </p:spPr>
+        <p:txBody>
+          <a:bodyPr wrap="square">
+            <a:spAutoFit/>
+          </a:bodyPr>
+          <a:lstStyle/>
+          <a:p>
+            <a:pPr algn="l"/>
+            <a:r>
+              <a:rPr sz="800" b="0" i="0">
+                <a:solidFill>
+                  <a:srgbClr val="404040"/>
+                </a:solidFill>
+              </a:rPr>
+              <a:t>ee_recv_bit() 제거
+→ ee_delay() 로 교체 (tV ≤ 200ns 확보)</a:t>
+            </a:r>
+          </a:p>
+        </p:txBody>
+      </p:sp>
+      <p:sp>
+        <p:nvSpPr>
+          <p:cNvPr id="19" name="Rectangle 18"/>
+          <p:cNvSpPr/>
+          <p:nvPr/>
+        </p:nvSpPr>
+        <p:spPr>
+          <a:xfrm>
+            <a:off x="274320" y="1837943"/>
+            <a:ext cx="1005840" cy="201168"/>
+          </a:xfrm>
+          <a:prstGeom prst="rect">
+            <a:avLst/>
+          </a:prstGeom>
+          <a:solidFill>
+            <a:srgbClr val="2E74B5"/>
+          </a:solidFill>
+          <a:ln>
+            <a:noFill/>
+          </a:ln>
+        </p:spPr>
+        <p:style>
+          <a:lnRef idx="1">
+            <a:schemeClr val="accent1"/>
+          </a:lnRef>
+          <a:fillRef idx="3">
+            <a:schemeClr val="accent1"/>
+          </a:fillRef>
+          <a:effectRef idx="2">
+            <a:schemeClr val="accent1"/>
+          </a:effectRef>
+          <a:fontRef idx="minor">
+            <a:schemeClr val="lt1"/>
+          </a:fontRef>
+        </p:style>
+        <p:txBody>
+          <a:bodyPr rtlCol="0" anchor="ctr"/>
+          <a:lstStyle/>
+          <a:p>
+            <a:pPr algn="ctr"/>
+          </a:p>
+        </p:txBody>
+      </p:sp>
+      <p:sp>
+        <p:nvSpPr>
+          <p:cNvPr id="20" name="TextBox 19"/>
+          <p:cNvSpPr txBox="1"/>
+          <p:nvPr/>
+        </p:nvSpPr>
+        <p:spPr>
+          <a:xfrm>
+            <a:off x="320040" y="1865375"/>
+            <a:ext cx="914400" cy="164592"/>
+          </a:xfrm>
+          <a:prstGeom prst="rect">
+            <a:avLst/>
+          </a:prstGeom>
+          <a:noFill/>
+        </p:spPr>
+        <p:txBody>
+          <a:bodyPr wrap="square">
+            <a:spAutoFit/>
+          </a:bodyPr>
+          <a:lstStyle/>
+          <a:p>
+            <a:pPr algn="l"/>
+            <a:r>
+              <a:rPr sz="900" b="1" i="0">
+                <a:solidFill>
+                  <a:srgbClr val="FFFFFF"/>
+                </a:solidFill>
+              </a:rPr>
+              <a:t>결과</a:t>
+            </a:r>
+          </a:p>
+        </p:txBody>
+      </p:sp>
+      <p:sp>
+        <p:nvSpPr>
+          <p:cNvPr id="21" name="Rectangle 20"/>
+          <p:cNvSpPr/>
+          <p:nvPr/>
+        </p:nvSpPr>
+        <p:spPr>
+          <a:xfrm>
+            <a:off x="1280160" y="1837943"/>
+            <a:ext cx="3200400" cy="201168"/>
+          </a:xfrm>
+          <a:prstGeom prst="rect">
+            <a:avLst/>
+          </a:prstGeom>
+          <a:solidFill>
+            <a:srgbClr val="F8F8F8"/>
+          </a:solidFill>
+          <a:ln>
+            <a:solidFill>
+              <a:srgbClr val="2E74B5"/>
+            </a:solidFill>
+          </a:ln>
+        </p:spPr>
+        <p:style>
+          <a:lnRef idx="1">
+            <a:schemeClr val="accent1"/>
+          </a:lnRef>
+          <a:fillRef idx="3">
+            <a:schemeClr val="accent1"/>
+          </a:fillRef>
+          <a:effectRef idx="2">
+            <a:schemeClr val="accent1"/>
+          </a:effectRef>
+          <a:fontRef idx="minor">
+            <a:schemeClr val="lt1"/>
+          </a:fontRef>
+        </p:style>
+        <p:txBody>
+          <a:bodyPr rtlCol="0" anchor="ctr"/>
+          <a:lstStyle/>
+          <a:p>
+            <a:pPr algn="ctr"/>
+          </a:p>
+        </p:txBody>
+      </p:sp>
+      <p:sp>
+        <p:nvSpPr>
+          <p:cNvPr id="22" name="TextBox 21"/>
+          <p:cNvSpPr txBox="1"/>
+          <p:nvPr/>
+        </p:nvSpPr>
+        <p:spPr>
+          <a:xfrm>
+            <a:off x="1353312" y="1856231"/>
+            <a:ext cx="3072384" cy="201168"/>
+          </a:xfrm>
+          <a:prstGeom prst="rect">
+            <a:avLst/>
+          </a:prstGeom>
+          <a:noFill/>
+        </p:spPr>
+        <p:txBody>
+          <a:bodyPr wrap="square">
+            <a:spAutoFit/>
+          </a:bodyPr>
+          <a:lstStyle/>
+          <a:p>
+            <a:pPr algn="l"/>
+            <a:r>
+              <a:rPr sz="800" b="0" i="0">
+                <a:solidFill>
+                  <a:srgbClr val="404040"/>
+                </a:solidFill>
+              </a:rPr>
+              <a:t>0xAA / 0x55 정상 읽기 확인
+Write == Read 일치</a:t>
+            </a:r>
+          </a:p>
+        </p:txBody>
+      </p:sp>
+      <p:sp>
+        <p:nvSpPr>
+          <p:cNvPr id="23" name="Rectangle 22"/>
+          <p:cNvSpPr/>
+          <p:nvPr/>
+        </p:nvSpPr>
+        <p:spPr>
+          <a:xfrm>
+            <a:off x="274320" y="2130551"/>
+            <a:ext cx="4206240" cy="201168"/>
+          </a:xfrm>
+          <a:prstGeom prst="rect">
+            <a:avLst/>
+          </a:prstGeom>
+          <a:solidFill>
+            <a:srgbClr val="C00000"/>
+          </a:solidFill>
+          <a:ln>
+            <a:noFill/>
+          </a:ln>
+        </p:spPr>
+        <p:style>
+          <a:lnRef idx="1">
+            <a:schemeClr val="accent1"/>
+          </a:lnRef>
+          <a:fillRef idx="3">
+            <a:schemeClr val="accent1"/>
+          </a:fillRef>
+          <a:effectRef idx="2">
+            <a:schemeClr val="accent1"/>
+          </a:effectRef>
+          <a:fontRef idx="minor">
+            <a:schemeClr val="lt1"/>
+          </a:fontRef>
+        </p:style>
+        <p:txBody>
+          <a:bodyPr rtlCol="0" anchor="ctr"/>
+          <a:lstStyle/>
+          <a:p>
+            <a:pPr algn="ctr"/>
+          </a:p>
+        </p:txBody>
+      </p:sp>
+      <p:sp>
+        <p:nvSpPr>
+          <p:cNvPr id="24" name="TextBox 23"/>
+          <p:cNvSpPr txBox="1"/>
+          <p:nvPr/>
+        </p:nvSpPr>
+        <p:spPr>
+          <a:xfrm>
+            <a:off x="320040" y="2157983"/>
+            <a:ext cx="4023360" cy="164592"/>
+          </a:xfrm>
+          <a:prstGeom prst="rect">
+            <a:avLst/>
+          </a:prstGeom>
+          <a:noFill/>
+        </p:spPr>
+        <p:txBody>
+          <a:bodyPr wrap="square">
+            <a:spAutoFit/>
+          </a:bodyPr>
+          <a:lstStyle/>
+          <a:p>
+            <a:pPr algn="l"/>
+            <a:r>
+              <a:rPr sz="900" b="1" i="0">
+                <a:solidFill>
+                  <a:srgbClr val="FFFFFF"/>
+                </a:solidFill>
+              </a:rPr>
+              <a:t>수정 전 (버그)</a:t>
+            </a:r>
+          </a:p>
+        </p:txBody>
+      </p:sp>
+      <p:sp>
+        <p:nvSpPr>
+          <p:cNvPr id="25" name="Rectangle 24"/>
+          <p:cNvSpPr/>
+          <p:nvPr/>
+        </p:nvSpPr>
+        <p:spPr>
+          <a:xfrm>
+            <a:off x="274320" y="2331720"/>
+            <a:ext cx="4206240" cy="256032"/>
+          </a:xfrm>
+          <a:prstGeom prst="rect">
+            <a:avLst/>
+          </a:prstGeom>
+          <a:solidFill>
+            <a:srgbClr val="FFEBEB"/>
+          </a:solidFill>
+          <a:ln>
+            <a:solidFill>
+              <a:srgbClr val="C00000"/>
+            </a:solidFill>
+          </a:ln>
+        </p:spPr>
+        <p:style>
+          <a:lnRef idx="1">
+            <a:schemeClr val="accent1"/>
+          </a:lnRef>
+          <a:fillRef idx="3">
+            <a:schemeClr val="accent1"/>
+          </a:fillRef>
+          <a:effectRef idx="2">
+            <a:schemeClr val="accent1"/>
+          </a:effectRef>
+          <a:fontRef idx="minor">
+            <a:schemeClr val="lt1"/>
+          </a:fontRef>
+        </p:style>
+        <p:txBody>
+          <a:bodyPr rtlCol="0" anchor="ctr"/>
+          <a:lstStyle/>
+          <a:p>
+            <a:pPr algn="ctr"/>
+          </a:p>
+        </p:txBody>
+      </p:sp>
+      <p:sp>
+        <p:nvSpPr>
+          <p:cNvPr id="26" name="TextBox 25"/>
+          <p:cNvSpPr txBox="1"/>
+          <p:nvPr/>
+        </p:nvSpPr>
+        <p:spPr>
+          <a:xfrm>
+            <a:off x="347472" y="2368296"/>
+            <a:ext cx="4023360" cy="201168"/>
+          </a:xfrm>
+          <a:prstGeom prst="rect">
+            <a:avLst/>
+          </a:prstGeom>
+          <a:noFill/>
+        </p:spPr>
+        <p:txBody>
+          <a:bodyPr wrap="square">
+            <a:spAutoFit/>
+          </a:bodyPr>
+          <a:lstStyle/>
+          <a:p>
+            <a:pPr algn="l"/>
+            <a:r>
+              <a:rPr sz="850" b="0" i="0">
+                <a:solidFill>
+                  <a:srgbClr val="C00000"/>
+                </a:solidFill>
+              </a:rPr>
+              <a:t>ee_recv_bit();   /* Dummy bit — D7 소비! */</a:t>
+            </a:r>
+          </a:p>
+        </p:txBody>
+      </p:sp>
+      <p:sp>
+        <p:nvSpPr>
+          <p:cNvPr id="27" name="Rectangle 26"/>
+          <p:cNvSpPr/>
+          <p:nvPr/>
+        </p:nvSpPr>
+        <p:spPr>
+          <a:xfrm>
+            <a:off x="274320" y="2633472"/>
+            <a:ext cx="4206240" cy="201168"/>
+          </a:xfrm>
+          <a:prstGeom prst="rect">
+            <a:avLst/>
+          </a:prstGeom>
+          <a:solidFill>
+            <a:srgbClr val="378638"/>
+          </a:solidFill>
+          <a:ln>
+            <a:noFill/>
+          </a:ln>
+        </p:spPr>
+        <p:style>
+          <a:lnRef idx="1">
+            <a:schemeClr val="accent1"/>
+          </a:lnRef>
+          <a:fillRef idx="3">
+            <a:schemeClr val="accent1"/>
+          </a:fillRef>
+          <a:effectRef idx="2">
+            <a:schemeClr val="accent1"/>
+          </a:effectRef>
+          <a:fontRef idx="minor">
+            <a:schemeClr val="lt1"/>
+          </a:fontRef>
+        </p:style>
+        <p:txBody>
+          <a:bodyPr rtlCol="0" anchor="ctr"/>
+          <a:lstStyle/>
+          <a:p>
+            <a:pPr algn="ctr"/>
+          </a:p>
+        </p:txBody>
+      </p:sp>
+      <p:sp>
+        <p:nvSpPr>
+          <p:cNvPr id="28" name="TextBox 27"/>
+          <p:cNvSpPr txBox="1"/>
+          <p:nvPr/>
+        </p:nvSpPr>
+        <p:spPr>
+          <a:xfrm>
+            <a:off x="320040" y="2660903"/>
+            <a:ext cx="4023360" cy="164592"/>
+          </a:xfrm>
+          <a:prstGeom prst="rect">
+            <a:avLst/>
+          </a:prstGeom>
+          <a:noFill/>
+        </p:spPr>
+        <p:txBody>
+          <a:bodyPr wrap="square">
+            <a:spAutoFit/>
+          </a:bodyPr>
+          <a:lstStyle/>
+          <a:p>
+            <a:pPr algn="l"/>
+            <a:r>
+              <a:rPr sz="900" b="1" i="0">
+                <a:solidFill>
+                  <a:srgbClr val="FFFFFF"/>
+                </a:solidFill>
+              </a:rPr>
+              <a:t>수정 후 (정상)</a:t>
+            </a:r>
+          </a:p>
+        </p:txBody>
+      </p:sp>
+      <p:sp>
+        <p:nvSpPr>
+          <p:cNvPr id="29" name="Rectangle 28"/>
+          <p:cNvSpPr/>
+          <p:nvPr/>
+        </p:nvSpPr>
+        <p:spPr>
+          <a:xfrm>
+            <a:off x="274320" y="2834640"/>
+            <a:ext cx="4206240" cy="256032"/>
+          </a:xfrm>
+          <a:prstGeom prst="rect">
+            <a:avLst/>
+          </a:prstGeom>
+          <a:solidFill>
+            <a:srgbClr val="E8F5E8"/>
+          </a:solidFill>
+          <a:ln>
+            <a:solidFill>
+              <a:srgbClr val="378638"/>
+            </a:solidFill>
+          </a:ln>
+        </p:spPr>
+        <p:style>
+          <a:lnRef idx="1">
+            <a:schemeClr val="accent1"/>
+          </a:lnRef>
+          <a:fillRef idx="3">
+            <a:schemeClr val="accent1"/>
+          </a:fillRef>
+          <a:effectRef idx="2">
+            <a:schemeClr val="accent1"/>
+          </a:effectRef>
+          <a:fontRef idx="minor">
+            <a:schemeClr val="lt1"/>
+          </a:fontRef>
+        </p:style>
+        <p:txBody>
+          <a:bodyPr rtlCol="0" anchor="ctr"/>
+          <a:lstStyle/>
+          <a:p>
+            <a:pPr algn="ctr"/>
+          </a:p>
+        </p:txBody>
+      </p:sp>
+      <p:sp>
+        <p:nvSpPr>
+          <p:cNvPr id="30" name="TextBox 29"/>
+          <p:cNvSpPr txBox="1"/>
+          <p:nvPr/>
+        </p:nvSpPr>
+        <p:spPr>
+          <a:xfrm>
+            <a:off x="347472" y="2871216"/>
+            <a:ext cx="4023360" cy="201168"/>
+          </a:xfrm>
+          <a:prstGeom prst="rect">
+            <a:avLst/>
+          </a:prstGeom>
+          <a:noFill/>
+        </p:spPr>
+        <p:txBody>
+          <a:bodyPr wrap="square">
+            <a:spAutoFit/>
+          </a:bodyPr>
+          <a:lstStyle/>
+          <a:p>
+            <a:pPr algn="l"/>
+            <a:r>
+              <a:rPr sz="850" b="0" i="0">
+                <a:solidFill>
+                  <a:srgbClr val="378638"/>
+                </a:solidFill>
+              </a:rPr>
+              <a:t>ee_delay();      /* D7 드라이브 대기 (tV ≤ 200ns) */</a:t>
+            </a:r>
+          </a:p>
+        </p:txBody>
+      </p:sp>
+      <p:sp>
+        <p:nvSpPr>
+          <p:cNvPr id="31" name="Rectangle 30"/>
+          <p:cNvSpPr/>
+          <p:nvPr/>
+        </p:nvSpPr>
+        <p:spPr>
+          <a:xfrm>
+            <a:off x="4754880" y="777240"/>
+            <a:ext cx="4206240" cy="274320"/>
+          </a:xfrm>
+          <a:prstGeom prst="rect">
+            <a:avLst/>
+          </a:prstGeom>
+          <a:solidFill>
+            <a:srgbClr val="378638"/>
+          </a:solidFill>
+          <a:ln>
+            <a:noFill/>
+          </a:ln>
+        </p:spPr>
+        <p:style>
+          <a:lnRef idx="1">
+            <a:schemeClr val="accent1"/>
+          </a:lnRef>
+          <a:fillRef idx="3">
+            <a:schemeClr val="accent1"/>
+          </a:fillRef>
+          <a:effectRef idx="2">
+            <a:schemeClr val="accent1"/>
+          </a:effectRef>
+          <a:fontRef idx="minor">
+            <a:schemeClr val="lt1"/>
+          </a:fontRef>
+        </p:style>
+        <p:txBody>
+          <a:bodyPr rtlCol="0" anchor="ctr"/>
+          <a:lstStyle/>
+          <a:p>
+            <a:pPr algn="ctr"/>
+          </a:p>
+        </p:txBody>
+      </p:sp>
+      <p:sp>
+        <p:nvSpPr>
+          <p:cNvPr id="32" name="TextBox 31"/>
+          <p:cNvSpPr txBox="1"/>
+          <p:nvPr/>
+        </p:nvSpPr>
+        <p:spPr>
+          <a:xfrm>
+            <a:off x="4828032" y="813816"/>
+            <a:ext cx="4114800" cy="228600"/>
+          </a:xfrm>
+          <a:prstGeom prst="rect">
+            <a:avLst/>
+          </a:prstGeom>
+          <a:noFill/>
+        </p:spPr>
+        <p:txBody>
+          <a:bodyPr wrap="square">
+            <a:spAutoFit/>
+          </a:bodyPr>
+          <a:lstStyle/>
+          <a:p>
+            <a:pPr algn="l"/>
+            <a:r>
+              <a:rPr sz="1100" b="1" i="0">
+                <a:solidFill>
+                  <a:srgbClr val="FFFFFF"/>
+                </a:solidFill>
+              </a:rPr>
+              <a:t>② 메모리 테스트 State C 추가</a:t>
+            </a:r>
+          </a:p>
+        </p:txBody>
+      </p:sp>
+      <p:sp>
+        <p:nvSpPr>
+          <p:cNvPr id="33" name="Rectangle 32"/>
+          <p:cNvSpPr/>
+          <p:nvPr/>
+        </p:nvSpPr>
+        <p:spPr>
+          <a:xfrm>
+            <a:off x="4754880" y="1097280"/>
+            <a:ext cx="73152" cy="182880"/>
+          </a:xfrm>
+          <a:prstGeom prst="rect">
+            <a:avLst/>
+          </a:prstGeom>
+          <a:solidFill>
+            <a:srgbClr val="0070C0"/>
+          </a:solidFill>
+          <a:ln>
+            <a:noFill/>
+          </a:ln>
+        </p:spPr>
+        <p:style>
+          <a:lnRef idx="1">
+            <a:schemeClr val="accent1"/>
+          </a:lnRef>
+          <a:fillRef idx="3">
+            <a:schemeClr val="accent1"/>
+          </a:fillRef>
+          <a:effectRef idx="2">
+            <a:schemeClr val="accent1"/>
+          </a:effectRef>
+          <a:fontRef idx="minor">
+            <a:schemeClr val="lt1"/>
+          </a:fontRef>
+        </p:style>
+        <p:txBody>
+          <a:bodyPr rtlCol="0" anchor="ctr"/>
+          <a:lstStyle/>
+          <a:p>
+            <a:pPr algn="ctr"/>
+          </a:p>
+        </p:txBody>
+      </p:sp>
+      <p:sp>
+        <p:nvSpPr>
+          <p:cNvPr id="34" name="TextBox 33"/>
+          <p:cNvSpPr txBox="1"/>
+          <p:nvPr/>
+        </p:nvSpPr>
+        <p:spPr>
+          <a:xfrm>
+            <a:off x="4892040" y="1115568"/>
+            <a:ext cx="3977639" cy="182880"/>
+          </a:xfrm>
+          <a:prstGeom prst="rect">
+            <a:avLst/>
+          </a:prstGeom>
+          <a:noFill/>
+        </p:spPr>
+        <p:txBody>
+          <a:bodyPr wrap="square">
+            <a:spAutoFit/>
+          </a:bodyPr>
+          <a:lstStyle/>
+          <a:p>
+            <a:pPr algn="l"/>
+            <a:r>
+              <a:rPr sz="900" b="0" i="0">
+                <a:solidFill>
+                  <a:srgbClr val="404040"/>
+                </a:solidFill>
+              </a:rPr>
+              <a:t>State B 완료 후 자동 실행</a:t>
+            </a:r>
+          </a:p>
+        </p:txBody>
+      </p:sp>
+      <p:sp>
+        <p:nvSpPr>
+          <p:cNvPr id="35" name="Rectangle 34"/>
+          <p:cNvSpPr/>
+          <p:nvPr/>
+        </p:nvSpPr>
+        <p:spPr>
+          <a:xfrm>
+            <a:off x="4754880" y="1316736"/>
+            <a:ext cx="73152" cy="182880"/>
+          </a:xfrm>
+          <a:prstGeom prst="rect">
+            <a:avLst/>
+          </a:prstGeom>
+          <a:solidFill>
+            <a:srgbClr val="378638"/>
+          </a:solidFill>
+          <a:ln>
+            <a:noFill/>
+          </a:ln>
+        </p:spPr>
+        <p:style>
+          <a:lnRef idx="1">
+            <a:schemeClr val="accent1"/>
+          </a:lnRef>
+          <a:fillRef idx="3">
+            <a:schemeClr val="accent1"/>
+          </a:fillRef>
+          <a:effectRef idx="2">
+            <a:schemeClr val="accent1"/>
+          </a:effectRef>
+          <a:fontRef idx="minor">
+            <a:schemeClr val="lt1"/>
+          </a:fontRef>
+        </p:style>
+        <p:txBody>
+          <a:bodyPr rtlCol="0" anchor="ctr"/>
+          <a:lstStyle/>
+          <a:p>
+            <a:pPr algn="ctr"/>
+          </a:p>
+        </p:txBody>
+      </p:sp>
+      <p:sp>
+        <p:nvSpPr>
+          <p:cNvPr id="36" name="TextBox 35"/>
+          <p:cNvSpPr txBox="1"/>
+          <p:nvPr/>
+        </p:nvSpPr>
+        <p:spPr>
+          <a:xfrm>
+            <a:off x="4892040" y="1335024"/>
+            <a:ext cx="3977639" cy="182880"/>
+          </a:xfrm>
+          <a:prstGeom prst="rect">
+            <a:avLst/>
+          </a:prstGeom>
+          <a:noFill/>
+        </p:spPr>
+        <p:txBody>
+          <a:bodyPr wrap="square">
+            <a:spAutoFit/>
+          </a:bodyPr>
+          <a:lstStyle/>
+          <a:p>
+            <a:pPr algn="l"/>
+            <a:r>
+              <a:rPr sz="900" b="0" i="0">
+                <a:solidFill>
+                  <a:srgbClr val="404040"/>
+                </a:solidFill>
+              </a:rPr>
+              <a:t>Pass 1: addr 0~255 에 0xAA 쓰기</a:t>
+            </a:r>
+          </a:p>
+        </p:txBody>
+      </p:sp>
+      <p:sp>
+        <p:nvSpPr>
+          <p:cNvPr id="37" name="Rectangle 36"/>
+          <p:cNvSpPr/>
+          <p:nvPr/>
+        </p:nvSpPr>
+        <p:spPr>
+          <a:xfrm>
+            <a:off x="4754880" y="1536192"/>
+            <a:ext cx="73152" cy="182880"/>
+          </a:xfrm>
+          <a:prstGeom prst="rect">
+            <a:avLst/>
+          </a:prstGeom>
+          <a:solidFill>
+            <a:srgbClr val="378638"/>
+          </a:solidFill>
+          <a:ln>
+            <a:noFill/>
+          </a:ln>
+        </p:spPr>
+        <p:style>
+          <a:lnRef idx="1">
+            <a:schemeClr val="accent1"/>
+          </a:lnRef>
+          <a:fillRef idx="3">
+            <a:schemeClr val="accent1"/>
+          </a:fillRef>
+          <a:effectRef idx="2">
+            <a:schemeClr val="accent1"/>
+          </a:effectRef>
+          <a:fontRef idx="minor">
+            <a:schemeClr val="lt1"/>
+          </a:fontRef>
+        </p:style>
+        <p:txBody>
+          <a:bodyPr rtlCol="0" anchor="ctr"/>
+          <a:lstStyle/>
+          <a:p>
+            <a:pPr algn="ctr"/>
+          </a:p>
+        </p:txBody>
+      </p:sp>
+      <p:sp>
+        <p:nvSpPr>
+          <p:cNvPr id="38" name="TextBox 37"/>
+          <p:cNvSpPr txBox="1"/>
+          <p:nvPr/>
+        </p:nvSpPr>
+        <p:spPr>
+          <a:xfrm>
+            <a:off x="4892040" y="1554480"/>
+            <a:ext cx="3977639" cy="182880"/>
+          </a:xfrm>
+          <a:prstGeom prst="rect">
+            <a:avLst/>
+          </a:prstGeom>
+          <a:noFill/>
+        </p:spPr>
+        <p:txBody>
+          <a:bodyPr wrap="square">
+            <a:spAutoFit/>
+          </a:bodyPr>
+          <a:lstStyle/>
+          <a:p>
+            <a:pPr algn="l"/>
+            <a:r>
+              <a:rPr sz="900" b="0" i="0">
+                <a:solidFill>
+                  <a:srgbClr val="404040"/>
+                </a:solidFill>
+              </a:rPr>
+              <a:t>         addr 0~255 에서 0xAA 읽기 검증</a:t>
+            </a:r>
+          </a:p>
+        </p:txBody>
+      </p:sp>
+      <p:sp>
+        <p:nvSpPr>
+          <p:cNvPr id="39" name="Rectangle 38"/>
+          <p:cNvSpPr/>
+          <p:nvPr/>
+        </p:nvSpPr>
+        <p:spPr>
+          <a:xfrm>
+            <a:off x="4754880" y="1755648"/>
+            <a:ext cx="73152" cy="182880"/>
+          </a:xfrm>
+          <a:prstGeom prst="rect">
+            <a:avLst/>
+          </a:prstGeom>
+          <a:solidFill>
+            <a:srgbClr val="378638"/>
+          </a:solidFill>
+          <a:ln>
+            <a:noFill/>
+          </a:ln>
+        </p:spPr>
+        <p:style>
+          <a:lnRef idx="1">
+            <a:schemeClr val="accent1"/>
+          </a:lnRef>
+          <a:fillRef idx="3">
+            <a:schemeClr val="accent1"/>
+          </a:fillRef>
+          <a:effectRef idx="2">
+            <a:schemeClr val="accent1"/>
+          </a:effectRef>
+          <a:fontRef idx="minor">
+            <a:schemeClr val="lt1"/>
+          </a:fontRef>
+        </p:style>
+        <p:txBody>
+          <a:bodyPr rtlCol="0" anchor="ctr"/>
+          <a:lstStyle/>
+          <a:p>
+            <a:pPr algn="ctr"/>
+          </a:p>
+        </p:txBody>
+      </p:sp>
+      <p:sp>
+        <p:nvSpPr>
+          <p:cNvPr id="40" name="TextBox 39"/>
+          <p:cNvSpPr txBox="1"/>
+          <p:nvPr/>
+        </p:nvSpPr>
+        <p:spPr>
+          <a:xfrm>
+            <a:off x="4892040" y="1773936"/>
+            <a:ext cx="3977639" cy="182880"/>
+          </a:xfrm>
+          <a:prstGeom prst="rect">
+            <a:avLst/>
+          </a:prstGeom>
+          <a:noFill/>
+        </p:spPr>
+        <p:txBody>
+          <a:bodyPr wrap="square">
+            <a:spAutoFit/>
+          </a:bodyPr>
+          <a:lstStyle/>
+          <a:p>
+            <a:pPr algn="l"/>
+            <a:r>
+              <a:rPr sz="900" b="0" i="0">
+                <a:solidFill>
+                  <a:srgbClr val="404040"/>
+                </a:solidFill>
+              </a:rPr>
+              <a:t>Pass 2: addr 0~255 에 0x55 쓰기</a:t>
+            </a:r>
+          </a:p>
+        </p:txBody>
+      </p:sp>
+      <p:sp>
+        <p:nvSpPr>
+          <p:cNvPr id="41" name="Rectangle 40"/>
+          <p:cNvSpPr/>
+          <p:nvPr/>
+        </p:nvSpPr>
+        <p:spPr>
+          <a:xfrm>
+            <a:off x="4754880" y="1975104"/>
+            <a:ext cx="73152" cy="182880"/>
+          </a:xfrm>
+          <a:prstGeom prst="rect">
+            <a:avLst/>
+          </a:prstGeom>
+          <a:solidFill>
+            <a:srgbClr val="378638"/>
+          </a:solidFill>
+          <a:ln>
+            <a:noFill/>
+          </a:ln>
+        </p:spPr>
+        <p:style>
+          <a:lnRef idx="1">
+            <a:schemeClr val="accent1"/>
+          </a:lnRef>
+          <a:fillRef idx="3">
+            <a:schemeClr val="accent1"/>
+          </a:fillRef>
+          <a:effectRef idx="2">
+            <a:schemeClr val="accent1"/>
+          </a:effectRef>
+          <a:fontRef idx="minor">
+            <a:schemeClr val="lt1"/>
+          </a:fontRef>
+        </p:style>
+        <p:txBody>
+          <a:bodyPr rtlCol="0" anchor="ctr"/>
+          <a:lstStyle/>
+          <a:p>
+            <a:pPr algn="ctr"/>
+          </a:p>
+        </p:txBody>
+      </p:sp>
+      <p:sp>
+        <p:nvSpPr>
+          <p:cNvPr id="42" name="TextBox 41"/>
+          <p:cNvSpPr txBox="1"/>
+          <p:nvPr/>
+        </p:nvSpPr>
+        <p:spPr>
+          <a:xfrm>
+            <a:off x="4892040" y="1993392"/>
+            <a:ext cx="3977639" cy="182880"/>
+          </a:xfrm>
+          <a:prstGeom prst="rect">
+            <a:avLst/>
+          </a:prstGeom>
+          <a:noFill/>
+        </p:spPr>
+        <p:txBody>
+          <a:bodyPr wrap="square">
+            <a:spAutoFit/>
+          </a:bodyPr>
+          <a:lstStyle/>
+          <a:p>
+            <a:pPr algn="l"/>
+            <a:r>
+              <a:rPr sz="900" b="0" i="0">
+                <a:solidFill>
+                  <a:srgbClr val="404040"/>
+                </a:solidFill>
+              </a:rPr>
+              <a:t>         addr 0~255 에서 0x55 읽기 검증</a:t>
+            </a:r>
+          </a:p>
+        </p:txBody>
+      </p:sp>
+      <p:sp>
+        <p:nvSpPr>
+          <p:cNvPr id="43" name="Rectangle 42"/>
+          <p:cNvSpPr/>
+          <p:nvPr/>
+        </p:nvSpPr>
+        <p:spPr>
+          <a:xfrm>
+            <a:off x="4754880" y="2194560"/>
+            <a:ext cx="73152" cy="182880"/>
+          </a:xfrm>
+          <a:prstGeom prst="rect">
+            <a:avLst/>
+          </a:prstGeom>
+          <a:solidFill>
+            <a:srgbClr val="ED7D31"/>
+          </a:solidFill>
+          <a:ln>
+            <a:noFill/>
+          </a:ln>
+        </p:spPr>
+        <p:style>
+          <a:lnRef idx="1">
+            <a:schemeClr val="accent1"/>
+          </a:lnRef>
+          <a:fillRef idx="3">
+            <a:schemeClr val="accent1"/>
+          </a:fillRef>
+          <a:effectRef idx="2">
+            <a:schemeClr val="accent1"/>
+          </a:effectRef>
+          <a:fontRef idx="minor">
+            <a:schemeClr val="lt1"/>
+          </a:fontRef>
+        </p:style>
+        <p:txBody>
+          <a:bodyPr rtlCol="0" anchor="ctr"/>
+          <a:lstStyle/>
+          <a:p>
+            <a:pPr algn="ctr"/>
+          </a:p>
+        </p:txBody>
+      </p:sp>
+      <p:sp>
+        <p:nvSpPr>
+          <p:cNvPr id="44" name="TextBox 43"/>
+          <p:cNvSpPr txBox="1"/>
+          <p:nvPr/>
+        </p:nvSpPr>
+        <p:spPr>
+          <a:xfrm>
+            <a:off x="4892040" y="2212848"/>
+            <a:ext cx="3977639" cy="182880"/>
+          </a:xfrm>
+          <a:prstGeom prst="rect">
+            <a:avLst/>
+          </a:prstGeom>
+          <a:noFill/>
+        </p:spPr>
+        <p:txBody>
+          <a:bodyPr wrap="square">
+            <a:spAutoFit/>
+          </a:bodyPr>
+          <a:lstStyle/>
+          <a:p>
+            <a:pPr algn="l"/>
+            <a:r>
+              <a:rPr sz="900" b="0" i="0">
+                <a:solidFill>
+                  <a:srgbClr val="404040"/>
+                </a:solidFill>
+              </a:rPr>
+              <a:t>실패 시 → 주소 / 읽기값 UART 출력</a:t>
+            </a:r>
+          </a:p>
+        </p:txBody>
+      </p:sp>
+      <p:sp>
+        <p:nvSpPr>
+          <p:cNvPr id="45" name="Rectangle 44"/>
+          <p:cNvSpPr/>
+          <p:nvPr/>
+        </p:nvSpPr>
+        <p:spPr>
+          <a:xfrm>
+            <a:off x="4754880" y="2414016"/>
+            <a:ext cx="73152" cy="182880"/>
+          </a:xfrm>
+          <a:prstGeom prst="rect">
+            <a:avLst/>
+          </a:prstGeom>
+          <a:solidFill>
+            <a:srgbClr val="C00000"/>
+          </a:solidFill>
+          <a:ln>
+            <a:noFill/>
+          </a:ln>
+        </p:spPr>
+        <p:style>
+          <a:lnRef idx="1">
+            <a:schemeClr val="accent1"/>
+          </a:lnRef>
+          <a:fillRef idx="3">
+            <a:schemeClr val="accent1"/>
+          </a:fillRef>
+          <a:effectRef idx="2">
+            <a:schemeClr val="accent1"/>
+          </a:effectRef>
+          <a:fontRef idx="minor">
+            <a:schemeClr val="lt1"/>
+          </a:fontRef>
+        </p:style>
+        <p:txBody>
+          <a:bodyPr rtlCol="0" anchor="ctr"/>
+          <a:lstStyle/>
+          <a:p>
+            <a:pPr algn="ctr"/>
+          </a:p>
+        </p:txBody>
+      </p:sp>
+      <p:sp>
+        <p:nvSpPr>
+          <p:cNvPr id="46" name="TextBox 45"/>
+          <p:cNvSpPr txBox="1"/>
+          <p:nvPr/>
+        </p:nvSpPr>
+        <p:spPr>
+          <a:xfrm>
+            <a:off x="4892040" y="2432304"/>
+            <a:ext cx="3977639" cy="182880"/>
+          </a:xfrm>
+          <a:prstGeom prst="rect">
+            <a:avLst/>
+          </a:prstGeom>
+          <a:noFill/>
+        </p:spPr>
+        <p:txBody>
+          <a:bodyPr wrap="square">
+            <a:spAutoFit/>
+          </a:bodyPr>
+          <a:lstStyle/>
+          <a:p>
+            <a:pPr algn="l"/>
+            <a:r>
+              <a:rPr sz="900" b="0" i="0">
+                <a:solidFill>
+                  <a:srgbClr val="404040"/>
+                </a:solidFill>
+              </a:rPr>
+              <a:t>FAIL 칩 → State D 프로그래밍 SKIP</a:t>
+            </a:r>
+          </a:p>
+        </p:txBody>
+      </p:sp>
+      <p:sp>
+        <p:nvSpPr>
+          <p:cNvPr id="47" name="Rectangle 46"/>
+          <p:cNvSpPr/>
+          <p:nvPr/>
+        </p:nvSpPr>
+        <p:spPr>
+          <a:xfrm>
+            <a:off x="4754880" y="2679192"/>
+            <a:ext cx="4206240" cy="201168"/>
+          </a:xfrm>
+          <a:prstGeom prst="rect">
+            <a:avLst/>
+          </a:prstGeom>
+          <a:solidFill>
+            <a:srgbClr val="1F497D"/>
+          </a:solidFill>
+          <a:ln>
+            <a:noFill/>
+          </a:ln>
+        </p:spPr>
+        <p:style>
+          <a:lnRef idx="1">
+            <a:schemeClr val="accent1"/>
+          </a:lnRef>
+          <a:fillRef idx="3">
+            <a:schemeClr val="accent1"/>
+          </a:fillRef>
+          <a:effectRef idx="2">
+            <a:schemeClr val="accent1"/>
+          </a:effectRef>
+          <a:fontRef idx="minor">
+            <a:schemeClr val="lt1"/>
+          </a:fontRef>
+        </p:style>
+        <p:txBody>
+          <a:bodyPr rtlCol="0" anchor="ctr"/>
+          <a:lstStyle/>
+          <a:p>
+            <a:pPr algn="ctr"/>
+          </a:p>
+        </p:txBody>
+      </p:sp>
+      <p:sp>
+        <p:nvSpPr>
+          <p:cNvPr id="48" name="TextBox 47"/>
+          <p:cNvSpPr txBox="1"/>
+          <p:nvPr/>
+        </p:nvSpPr>
+        <p:spPr>
+          <a:xfrm>
+            <a:off x="4828032" y="2706624"/>
+            <a:ext cx="4023360" cy="164592"/>
+          </a:xfrm>
+          <a:prstGeom prst="rect">
+            <a:avLst/>
+          </a:prstGeom>
+          <a:noFill/>
+        </p:spPr>
+        <p:txBody>
+          <a:bodyPr wrap="square">
+            <a:spAutoFit/>
+          </a:bodyPr>
+          <a:lstStyle/>
+          <a:p>
+            <a:pPr algn="l"/>
+            <a:r>
+              <a:rPr sz="900" b="1" i="0">
+                <a:solidFill>
+                  <a:srgbClr val="FFFFFF"/>
+                </a:solidFill>
+              </a:rPr>
+              <a:t>UART 출력 예시</a:t>
+            </a:r>
+          </a:p>
+        </p:txBody>
+      </p:sp>
+      <p:sp>
+        <p:nvSpPr>
+          <p:cNvPr id="49" name="Rectangle 48"/>
+          <p:cNvSpPr/>
+          <p:nvPr/>
+        </p:nvSpPr>
+        <p:spPr>
+          <a:xfrm>
+            <a:off x="4754880" y="2880360"/>
+            <a:ext cx="4206240" cy="1545336"/>
+          </a:xfrm>
+          <a:prstGeom prst="rect">
+            <a:avLst/>
+          </a:prstGeom>
+          <a:solidFill>
+            <a:srgbClr val="F2F2F2"/>
+          </a:solidFill>
+          <a:ln>
+            <a:solidFill>
+              <a:srgbClr val="2E74B5"/>
+            </a:solidFill>
+          </a:ln>
+        </p:spPr>
+        <p:style>
+          <a:lnRef idx="1">
+            <a:schemeClr val="accent1"/>
+          </a:lnRef>
+          <a:fillRef idx="3">
+            <a:schemeClr val="accent1"/>
+          </a:fillRef>
+          <a:effectRef idx="2">
+            <a:schemeClr val="accent1"/>
+          </a:effectRef>
+          <a:fontRef idx="minor">
+            <a:schemeClr val="lt1"/>
+          </a:fontRef>
+        </p:style>
+        <p:txBody>
+          <a:bodyPr rtlCol="0" anchor="ctr"/>
+          <a:lstStyle/>
+          <a:p>
+            <a:pPr algn="ctr"/>
+          </a:p>
+        </p:txBody>
+      </p:sp>
+      <p:sp>
+        <p:nvSpPr>
+          <p:cNvPr id="50" name="TextBox 49"/>
+          <p:cNvSpPr txBox="1"/>
+          <p:nvPr/>
+        </p:nvSpPr>
+        <p:spPr>
+          <a:xfrm>
+            <a:off x="4846320" y="2898648"/>
+            <a:ext cx="4041648" cy="201168"/>
+          </a:xfrm>
+          <a:prstGeom prst="rect">
+            <a:avLst/>
+          </a:prstGeom>
+          <a:noFill/>
+        </p:spPr>
+        <p:txBody>
+          <a:bodyPr wrap="square">
+            <a:spAutoFit/>
+          </a:bodyPr>
+          <a:lstStyle/>
+          <a:p>
+            <a:pPr algn="l"/>
+            <a:r>
+              <a:rPr sz="800" b="0" i="0">
+                <a:solidFill>
+                  <a:srgbClr val="2E74B5"/>
+                </a:solidFill>
+              </a:rPr>
+              <a:t>[TEST] === Memory Test (0xAA / 0x55) ===</a:t>
+            </a:r>
+          </a:p>
+        </p:txBody>
+      </p:sp>
+      <p:sp>
+        <p:nvSpPr>
+          <p:cNvPr id="51" name="TextBox 50"/>
+          <p:cNvSpPr txBox="1"/>
+          <p:nvPr/>
+        </p:nvSpPr>
+        <p:spPr>
+          <a:xfrm>
+            <a:off x="4846320" y="3118104"/>
+            <a:ext cx="4041648" cy="201168"/>
+          </a:xfrm>
+          <a:prstGeom prst="rect">
+            <a:avLst/>
+          </a:prstGeom>
+          <a:noFill/>
+        </p:spPr>
+        <p:txBody>
+          <a:bodyPr wrap="square">
+            <a:spAutoFit/>
+          </a:bodyPr>
+          <a:lstStyle/>
+          <a:p>
+            <a:pPr algn="l"/>
+            <a:r>
+              <a:rPr sz="800" b="0" i="0">
+                <a:solidFill>
+                  <a:srgbClr val="378638"/>
+                </a:solidFill>
+              </a:rPr>
+              <a:t>[TEST] CS00: PASS</a:t>
+            </a:r>
+          </a:p>
+        </p:txBody>
+      </p:sp>
+      <p:sp>
+        <p:nvSpPr>
+          <p:cNvPr id="52" name="TextBox 51"/>
+          <p:cNvSpPr txBox="1"/>
+          <p:nvPr/>
+        </p:nvSpPr>
+        <p:spPr>
+          <a:xfrm>
+            <a:off x="4846320" y="3337560"/>
+            <a:ext cx="4041648" cy="201168"/>
+          </a:xfrm>
+          <a:prstGeom prst="rect">
+            <a:avLst/>
+          </a:prstGeom>
+          <a:noFill/>
+        </p:spPr>
+        <p:txBody>
+          <a:bodyPr wrap="square">
+            <a:spAutoFit/>
+          </a:bodyPr>
+          <a:lstStyle/>
+          <a:p>
+            <a:pPr algn="l"/>
+            <a:r>
+              <a:rPr sz="800" b="0" i="0">
+                <a:solidFill>
+                  <a:srgbClr val="378638"/>
+                </a:solidFill>
+              </a:rPr>
+              <a:t>[TEST] CS01: PASS</a:t>
+            </a:r>
+          </a:p>
+        </p:txBody>
+      </p:sp>
+      <p:sp>
+        <p:nvSpPr>
+          <p:cNvPr id="53" name="TextBox 52"/>
+          <p:cNvSpPr txBox="1"/>
+          <p:nvPr/>
+        </p:nvSpPr>
+        <p:spPr>
+          <a:xfrm>
+            <a:off x="4846320" y="3557016"/>
+            <a:ext cx="4041648" cy="201168"/>
+          </a:xfrm>
+          <a:prstGeom prst="rect">
+            <a:avLst/>
+          </a:prstGeom>
+          <a:noFill/>
+        </p:spPr>
+        <p:txBody>
+          <a:bodyPr wrap="square">
+            <a:spAutoFit/>
+          </a:bodyPr>
+          <a:lstStyle/>
+          <a:p>
+            <a:pPr algn="l"/>
+            <a:r>
+              <a:rPr sz="800" b="0" i="0">
+                <a:solidFill>
+                  <a:srgbClr val="C00000"/>
+                </a:solidFill>
+              </a:rPr>
+              <a:t>[TEST] CS03: 0xAA RD ERR  addr=47  got=0xB4</a:t>
+            </a:r>
+          </a:p>
+        </p:txBody>
+      </p:sp>
+      <p:sp>
+        <p:nvSpPr>
+          <p:cNvPr id="54" name="TextBox 53"/>
+          <p:cNvSpPr txBox="1"/>
+          <p:nvPr/>
+        </p:nvSpPr>
+        <p:spPr>
+          <a:xfrm>
+            <a:off x="4846320" y="3776472"/>
+            <a:ext cx="4041648" cy="201168"/>
+          </a:xfrm>
+          <a:prstGeom prst="rect">
+            <a:avLst/>
+          </a:prstGeom>
+          <a:noFill/>
+        </p:spPr>
+        <p:txBody>
+          <a:bodyPr wrap="square">
+            <a:spAutoFit/>
+          </a:bodyPr>
+          <a:lstStyle/>
+          <a:p>
+            <a:pPr algn="l"/>
+            <a:r>
+              <a:rPr sz="800" b="0" i="0">
+                <a:solidFill>
+                  <a:srgbClr val="C00000"/>
+                </a:solidFill>
+              </a:rPr>
+              <a:t>[TEST] CS03: FAIL</a:t>
+            </a:r>
+          </a:p>
+        </p:txBody>
+      </p:sp>
+      <p:sp>
+        <p:nvSpPr>
+          <p:cNvPr id="55" name="TextBox 54"/>
+          <p:cNvSpPr txBox="1"/>
+          <p:nvPr/>
+        </p:nvSpPr>
+        <p:spPr>
+          <a:xfrm>
+            <a:off x="4846320" y="3995928"/>
+            <a:ext cx="4041648" cy="201168"/>
+          </a:xfrm>
+          <a:prstGeom prst="rect">
+            <a:avLst/>
+          </a:prstGeom>
+          <a:noFill/>
+        </p:spPr>
+        <p:txBody>
+          <a:bodyPr wrap="square">
+            <a:spAutoFit/>
+          </a:bodyPr>
+          <a:lstStyle/>
+          <a:p>
+            <a:pPr algn="l"/>
+            <a:r>
+              <a:rPr sz="800" b="0" i="0">
+                <a:solidFill>
+                  <a:srgbClr val="ED7D31"/>
+                </a:solidFill>
+              </a:rPr>
+              <a:t>[TEST] Result: PASS=11  FAIL=1</a:t>
+            </a:r>
+          </a:p>
+        </p:txBody>
+      </p:sp>
+      <p:sp>
+        <p:nvSpPr>
+          <p:cNvPr id="56" name="TextBox 55"/>
+          <p:cNvSpPr txBox="1"/>
+          <p:nvPr/>
+        </p:nvSpPr>
+        <p:spPr>
+          <a:xfrm>
+            <a:off x="4846320" y="4215384"/>
+            <a:ext cx="4041648" cy="201168"/>
+          </a:xfrm>
+          <a:prstGeom prst="rect">
+            <a:avLst/>
+          </a:prstGeom>
+          <a:noFill/>
+        </p:spPr>
+        <p:txBody>
+          <a:bodyPr wrap="square">
+            <a:spAutoFit/>
+          </a:bodyPr>
+          <a:lstStyle/>
+          <a:p>
+            <a:pPr algn="l"/>
+            <a:r>
+              <a:rPr sz="800" b="0" i="0">
+                <a:solidFill>
+                  <a:srgbClr val="ED7D31"/>
+                </a:solidFill>
+              </a:rPr>
+              <a:t>[TEST] Failed chips: CS03</a:t>
+            </a:r>
+          </a:p>
+        </p:txBody>
+      </p:sp>
+      <p:sp>
+        <p:nvSpPr>
+          <p:cNvPr id="57" name="Rectangle 56"/>
+          <p:cNvSpPr/>
+          <p:nvPr/>
+        </p:nvSpPr>
+        <p:spPr>
+          <a:xfrm>
+            <a:off x="274320" y="5943600"/>
+            <a:ext cx="8595360" cy="256032"/>
+          </a:xfrm>
+          <a:prstGeom prst="rect">
+            <a:avLst/>
+          </a:prstGeom>
+          <a:solidFill>
+            <a:srgbClr val="1F497D"/>
+          </a:solidFill>
+          <a:ln>
+            <a:noFill/>
+          </a:ln>
+        </p:spPr>
+        <p:style>
+          <a:lnRef idx="1">
+            <a:schemeClr val="accent1"/>
+          </a:lnRef>
+          <a:fillRef idx="3">
+            <a:schemeClr val="accent1"/>
+          </a:fillRef>
+          <a:effectRef idx="2">
+            <a:schemeClr val="accent1"/>
+          </a:effectRef>
+          <a:fontRef idx="minor">
+            <a:schemeClr val="lt1"/>
+          </a:fontRef>
+        </p:style>
+        <p:txBody>
+          <a:bodyPr rtlCol="0" anchor="ctr"/>
+          <a:lstStyle/>
+          <a:p>
+            <a:pPr algn="ctr"/>
+          </a:p>
+        </p:txBody>
+      </p:sp>
+      <p:sp>
+        <p:nvSpPr>
+          <p:cNvPr id="58" name="TextBox 57"/>
+          <p:cNvSpPr txBox="1"/>
+          <p:nvPr/>
+        </p:nvSpPr>
+        <p:spPr>
+          <a:xfrm>
+            <a:off x="411480" y="5971032"/>
+            <a:ext cx="8321040" cy="219456"/>
+          </a:xfrm>
+          <a:prstGeom prst="rect">
+            <a:avLst/>
+          </a:prstGeom>
+          <a:noFill/>
+        </p:spPr>
+        <p:txBody>
+          <a:bodyPr wrap="square">
+            <a:spAutoFit/>
+          </a:bodyPr>
+          <a:lstStyle/>
+          <a:p>
+            <a:pPr algn="l"/>
+            <a:r>
+              <a:rPr sz="1000" b="1" i="0">
+                <a:solidFill>
+                  <a:srgbClr val="FFFFFF"/>
+                </a:solidFill>
+              </a:rPr>
+              <a:t>테스트 중 → ■ 파란색(BLUE)    PASS → ■ 녹색(GREEN)    FAIL → ■ 적색(RED) + 프로그래밍 SKIP</a:t>
+            </a:r>
+          </a:p>
+        </p:txBody>
+      </p:sp>
+      <p:sp>
+        <p:nvSpPr>
+          <p:cNvPr id="59" name="Rectangle 58"/>
+          <p:cNvSpPr/>
+          <p:nvPr/>
+        </p:nvSpPr>
+        <p:spPr>
+          <a:xfrm>
+            <a:off x="274320" y="6236208"/>
+            <a:ext cx="8595360" cy="256032"/>
+          </a:xfrm>
+          <a:prstGeom prst="rect">
+            <a:avLst/>
+          </a:prstGeom>
+          <a:solidFill>
+            <a:srgbClr val="378638"/>
+          </a:solidFill>
+          <a:ln>
+            <a:noFill/>
+          </a:ln>
+        </p:spPr>
+        <p:style>
+          <a:lnRef idx="1">
+            <a:schemeClr val="accent1"/>
+          </a:lnRef>
+          <a:fillRef idx="3">
+            <a:schemeClr val="accent1"/>
+          </a:fillRef>
+          <a:effectRef idx="2">
+            <a:schemeClr val="accent1"/>
+          </a:effectRef>
+          <a:fontRef idx="minor">
+            <a:schemeClr val="lt1"/>
+          </a:fontRef>
+        </p:style>
+        <p:txBody>
+          <a:bodyPr rtlCol="0" anchor="ctr"/>
+          <a:lstStyle/>
+          <a:p>
+            <a:pPr algn="ctr"/>
+          </a:p>
+        </p:txBody>
+      </p:sp>
+      <p:sp>
+        <p:nvSpPr>
+          <p:cNvPr id="60" name="TextBox 59"/>
+          <p:cNvSpPr txBox="1"/>
+          <p:nvPr/>
+        </p:nvSpPr>
+        <p:spPr>
+          <a:xfrm>
+            <a:off x="411480" y="6263640"/>
+            <a:ext cx="8321040" cy="219456"/>
+          </a:xfrm>
+          <a:prstGeom prst="rect">
+            <a:avLst/>
+          </a:prstGeom>
+          <a:noFill/>
+        </p:spPr>
+        <p:txBody>
+          <a:bodyPr wrap="square">
+            <a:spAutoFit/>
+          </a:bodyPr>
+          <a:lstStyle/>
+          <a:p>
+            <a:pPr algn="l"/>
+            <a:r>
+              <a:rPr sz="1000" b="1" i="0">
+                <a:solidFill>
+                  <a:srgbClr val="FFFFFF"/>
+                </a:solidFill>
+              </a:rPr>
+              <a:t>최종 결과:  메모리 R/W 정상 동작 확인  ·  0xAA / 0x55 전체 256주소 검증  ·  불량 칩 자동 분류</a:t>
+            </a:r>
+          </a:p>
+        </p:txBody>
+      </p:sp>
+    </p:spTree>
+  </p:cSld>
+  <p:clrMapOvr>
+    <a:masterClrMapping/>
+  </p:clrMapOvr>
+</p:sld>
+</file>
+
 <file path=ppt/slides/slide3.xml><?xml version="1.0" encoding="utf-8"?>
 <p:sld xmlns:a="http://schemas.openxmlformats.org/drawingml/2006/main" xmlns:r="http://schemas.openxmlformats.org/officeDocument/2006/relationships" xmlns:p="http://schemas.openxmlformats.org/presentationml/2006/main">
   <p:cSld name="Slide 3">

--- a/93c56_overview.pptx
+++ b/93c56_overview.pptx
@@ -4,6 +4,9 @@
   <p:sldMasterIdLst>
     <p:sldMasterId id="2147483648" r:id="rId1"/>
   </p:sldMasterIdLst>
+  <p:notesMasterIdLst>
+    <p:notesMasterId r:id="rId22"/>
+  </p:notesMasterIdLst>
   <p:sldIdLst>
     <p:sldId id="256" r:id="rId2"/>
     <p:sldId id="257" r:id="rId3"/>
@@ -17,19 +20,16 @@
     <p:sldId id="265" r:id="rId11"/>
     <p:sldId id="266" r:id="rId12"/>
     <p:sldId id="267" r:id="rId13"/>
-    <p:sldId id="269" r:id="rId20"/>
-    <p:sldId id="268" r:id="rId14"/>
-    <p:sldId id="270" r:id="rId21"/>
-    <p:sldId id="271" r:id="rId22"/>
-    <p:sldId id="272" r:id="rId23"/>
-    <p:sldId id="273" r:id="rId24"/>
-    <p:sldId id="274" r:id="rId25"/>
-    <p:sldId id="275" r:id="rId26"/>
+    <p:sldId id="269" r:id="rId14"/>
+    <p:sldId id="268" r:id="rId15"/>
+    <p:sldId id="270" r:id="rId16"/>
+    <p:sldId id="271" r:id="rId17"/>
+    <p:sldId id="272" r:id="rId18"/>
+    <p:sldId id="273" r:id="rId19"/>
+    <p:sldId id="274" r:id="rId20"/>
+    <p:sldId id="275" r:id="rId21"/>
   </p:sldIdLst>
-  <p:notesMasterIdLst>
-    <p:notesMasterId r:id="rId15"/>
-  </p:notesMasterIdLst>
-  <p:sldSz cx="9144000" cy="5143500"/>
+  <p:sldSz cx="9144000" cy="5143500" type="screen16x9"/>
   <p:notesSz cx="5143500" cy="9144000"/>
   <p:defaultTextStyle>
     <a:lvl1pPr marL="0" algn="l" defTabSz="914400" rtl="0" eaLnBrk="1" latinLnBrk="0" hangingPunct="1">
@@ -123,6 +123,11 @@
       </a:defRPr>
     </a:lvl9pPr>
   </p:defaultTextStyle>
+  <p:extLst>
+    <p:ext uri="{EFAFB233-063F-42B5-8137-9DF3F51BA10A}">
+      <p15:sldGuideLst xmlns:p15="http://schemas.microsoft.com/office/powerpoint/2012/main"/>
+    </p:ext>
+  </p:extLst>
 </p:presentation>
 </file>
 
@@ -148,240 +153,16 @@
           <a:chExt cx="0" cy="0"/>
         </a:xfrm>
       </p:grpSpPr>
-      <p:sp>
-        <p:nvSpPr>
-          <p:cNvPr id="2" name="Header Placeholder 1"/>
-          <p:cNvSpPr>
-            <a:spLocks noGrp="1"/>
-          </p:cNvSpPr>
-          <p:nvPr>
-            <p:ph type="hdr" sz="quarter"/>
-          </p:nvPr>
-        </p:nvSpPr>
-        <p:spPr>
-          <a:xfrm>
-            <a:off x="0" y="0"/>
-            <a:ext cx="2971800" cy="458788"/>
-          </a:xfrm>
-          <a:prstGeom prst="rect">
-            <a:avLst/>
-          </a:prstGeom>
-        </p:spPr>
-        <p:txBody>
-          <a:bodyPr vert="horz" lIns="91440" tIns="45720" rIns="91440" bIns="45720" rtlCol="0"/>
-          <a:lstStyle>
-            <a:lvl1pPr algn="l">
-              <a:defRPr sz="1200"/>
-            </a:lvl1pPr>
-          </a:lstStyle>
-          <a:p>
-            <a:endParaRPr lang="en-US"/>
-          </a:p>
-        </p:txBody>
-      </p:sp>
-      <p:sp>
-        <p:nvSpPr>
-          <p:cNvPr id="3" name="Date Placeholder 2"/>
-          <p:cNvSpPr>
-            <a:spLocks noGrp="1"/>
-          </p:cNvSpPr>
-          <p:nvPr>
-            <p:ph type="dt" idx="1"/>
-          </p:nvPr>
-        </p:nvSpPr>
-        <p:spPr>
-          <a:xfrm>
-            <a:off x="3884613" y="0"/>
-            <a:ext cx="2971800" cy="458788"/>
-          </a:xfrm>
-          <a:prstGeom prst="rect">
-            <a:avLst/>
-          </a:prstGeom>
-        </p:spPr>
-        <p:txBody>
-          <a:bodyPr vert="horz" lIns="91440" tIns="45720" rIns="91440" bIns="45720" rtlCol="0"/>
-          <a:lstStyle>
-            <a:lvl1pPr algn="r">
-              <a:defRPr sz="1200"/>
-            </a:lvl1pPr>
-          </a:lstStyle>
-          <a:p>
-            <a:fld id="{5282F153-3F37-0F45-9E97-73ACFA13230C}" type="datetimeFigureOut">
-              <a:rPr lang="en-US"/>
-              <a:t>7/23/19</a:t>
-            </a:fld>
-            <a:endParaRPr lang="en-US"/>
-          </a:p>
-        </p:txBody>
-      </p:sp>
-      <p:sp>
-        <p:nvSpPr>
-          <p:cNvPr id="4" name="Slide Image Placeholder 3"/>
-          <p:cNvSpPr>
-            <a:spLocks noGrp="1" noRot="1" noChangeAspect="1"/>
-          </p:cNvSpPr>
-          <p:nvPr>
-            <p:ph type="sldImg" idx="2"/>
-          </p:nvPr>
-        </p:nvSpPr>
-        <p:spPr>
-          <a:xfrm>
-            <a:off x="685800" y="1143000"/>
-            <a:ext cx="5486400" cy="3086100"/>
-          </a:xfrm>
-          <a:prstGeom prst="rect">
-            <a:avLst/>
-          </a:prstGeom>
-          <a:noFill/>
-          <a:ln w="12700">
-            <a:solidFill>
-              <a:prstClr val="black"/>
-            </a:solidFill>
-          </a:ln>
-        </p:spPr>
-        <p:txBody>
-          <a:bodyPr vert="horz" lIns="91440" tIns="45720" rIns="91440" bIns="45720" rtlCol="0" anchor="ctr"/>
-          <a:lstStyle/>
-          <a:p>
-            <a:endParaRPr lang="en-US"/>
-          </a:p>
-        </p:txBody>
-      </p:sp>
-      <p:sp>
-        <p:nvSpPr>
-          <p:cNvPr id="5" name="Notes Placeholder 4"/>
-          <p:cNvSpPr>
-            <a:spLocks noGrp="1"/>
-          </p:cNvSpPr>
-          <p:nvPr>
-            <p:ph type="body" sz="quarter" idx="3"/>
-          </p:nvPr>
-        </p:nvSpPr>
-        <p:spPr>
-          <a:xfrm>
-            <a:off x="685800" y="4400550"/>
-            <a:ext cx="5486400" cy="3600450"/>
-          </a:xfrm>
-          <a:prstGeom prst="rect">
-            <a:avLst/>
-          </a:prstGeom>
-        </p:spPr>
-        <p:txBody>
-          <a:bodyPr vert="horz" lIns="91440" tIns="45720" rIns="91440" bIns="45720" rtlCol="0"/>
-          <a:lstStyle/>
-          <a:p>
-            <a:pPr lvl="0"/>
-            <a:r>
-              <a:rPr lang="en-US"/>
-              <a:t>Click to edit Master text styles</a:t>
-            </a:r>
-          </a:p>
-          <a:p>
-            <a:pPr lvl="1"/>
-            <a:r>
-              <a:rPr lang="en-US"/>
-              <a:t>Second level</a:t>
-            </a:r>
-          </a:p>
-          <a:p>
-            <a:pPr lvl="2"/>
-            <a:r>
-              <a:rPr lang="en-US"/>
-              <a:t>Third level</a:t>
-            </a:r>
-          </a:p>
-          <a:p>
-            <a:pPr lvl="3"/>
-            <a:r>
-              <a:rPr lang="en-US"/>
-              <a:t>Fourth level</a:t>
-            </a:r>
-          </a:p>
-          <a:p>
-            <a:pPr lvl="4"/>
-            <a:r>
-              <a:rPr lang="en-US"/>
-              <a:t>Fifth level</a:t>
-            </a:r>
-          </a:p>
-        </p:txBody>
-      </p:sp>
-      <p:sp>
-        <p:nvSpPr>
-          <p:cNvPr id="6" name="Footer Placeholder 5"/>
-          <p:cNvSpPr>
-            <a:spLocks noGrp="1"/>
-          </p:cNvSpPr>
-          <p:nvPr>
-            <p:ph type="ftr" sz="quarter" idx="4"/>
-          </p:nvPr>
-        </p:nvSpPr>
-        <p:spPr>
-          <a:xfrm>
-            <a:off x="0" y="8685213"/>
-            <a:ext cx="2971800" cy="458787"/>
-          </a:xfrm>
-          <a:prstGeom prst="rect">
-            <a:avLst/>
-          </a:prstGeom>
-        </p:spPr>
-        <p:txBody>
-          <a:bodyPr vert="horz" lIns="91440" tIns="45720" rIns="91440" bIns="45720" rtlCol="0" anchor="b"/>
-          <a:lstStyle>
-            <a:lvl1pPr algn="l">
-              <a:defRPr sz="1200"/>
-            </a:lvl1pPr>
-          </a:lstStyle>
-          <a:p>
-            <a:endParaRPr lang="en-US"/>
-          </a:p>
-        </p:txBody>
-      </p:sp>
-      <p:sp>
-        <p:nvSpPr>
-          <p:cNvPr id="7" name="Slide Number Placeholder 6"/>
-          <p:cNvSpPr>
-            <a:spLocks noGrp="1"/>
-          </p:cNvSpPr>
-          <p:nvPr>
-            <p:ph type="sldNum" sz="quarter" idx="5"/>
-          </p:nvPr>
-        </p:nvSpPr>
-        <p:spPr>
-          <a:xfrm>
-            <a:off x="3884613" y="8685213"/>
-            <a:ext cx="2971800" cy="458787"/>
-          </a:xfrm>
-          <a:prstGeom prst="rect">
-            <a:avLst/>
-          </a:prstGeom>
-        </p:spPr>
-        <p:txBody>
-          <a:bodyPr vert="horz" lIns="91440" tIns="45720" rIns="91440" bIns="45720" rtlCol="0" anchor="b"/>
-          <a:lstStyle>
-            <a:lvl1pPr algn="r">
-              <a:defRPr sz="1200"/>
-            </a:lvl1pPr>
-          </a:lstStyle>
-          <a:p>
-            <a:fld id="{CE5E9CC1-C706-0F49-92D6-E571CC5EEA8F}" type="slidenum">
-              <a:rPr lang="en-US"/>
-              <a:t>‹#›</a:t>
-            </a:fld>
-            <a:endParaRPr lang="en-US"/>
-          </a:p>
-        </p:txBody>
-      </p:sp>
     </p:spTree>
     <p:extLst>
       <p:ext uri="{BB962C8B-B14F-4D97-AF65-F5344CB8AC3E}">
-        <p14:creationId xmlns:p14="http://schemas.microsoft.com/office/powerpoint/2010/main" val="1024086991"/>
+        <p14:creationId xmlns:p14="http://schemas.microsoft.com/office/powerpoint/2010/main" val="3041987335"/>
       </p:ext>
     </p:extLst>
   </p:cSld>
   <p:clrMap bg1="lt1" tx1="dk1" bg2="lt2" tx2="dk2" accent1="accent1" accent2="accent2" accent3="accent3" accent4="accent4" accent5="accent5" accent6="accent6" hlink="hlink" folHlink="folHlink"/>
   <p:notesStyle>
-    <a:lvl1pPr marL="0" algn="l" defTabSz="914400" rtl="0" eaLnBrk="1" latinLnBrk="0" hangingPunct="1">
+    <a:lvl1pPr marL="0" algn="l" defTabSz="914400" rtl="0" eaLnBrk="1" latinLnBrk="1" hangingPunct="1">
       <a:defRPr sz="1200" kern="1200">
         <a:solidFill>
           <a:schemeClr val="tx1"/>
@@ -391,7 +172,7 @@
         <a:cs typeface="+mn-cs"/>
       </a:defRPr>
     </a:lvl1pPr>
-    <a:lvl2pPr marL="457200" algn="l" defTabSz="914400" rtl="0" eaLnBrk="1" latinLnBrk="0" hangingPunct="1">
+    <a:lvl2pPr marL="457200" algn="l" defTabSz="914400" rtl="0" eaLnBrk="1" latinLnBrk="1" hangingPunct="1">
       <a:defRPr sz="1200" kern="1200">
         <a:solidFill>
           <a:schemeClr val="tx1"/>
@@ -401,7 +182,7 @@
         <a:cs typeface="+mn-cs"/>
       </a:defRPr>
     </a:lvl2pPr>
-    <a:lvl3pPr marL="914400" algn="l" defTabSz="914400" rtl="0" eaLnBrk="1" latinLnBrk="0" hangingPunct="1">
+    <a:lvl3pPr marL="914400" algn="l" defTabSz="914400" rtl="0" eaLnBrk="1" latinLnBrk="1" hangingPunct="1">
       <a:defRPr sz="1200" kern="1200">
         <a:solidFill>
           <a:schemeClr val="tx1"/>
@@ -411,7 +192,7 @@
         <a:cs typeface="+mn-cs"/>
       </a:defRPr>
     </a:lvl3pPr>
-    <a:lvl4pPr marL="1371600" algn="l" defTabSz="914400" rtl="0" eaLnBrk="1" latinLnBrk="0" hangingPunct="1">
+    <a:lvl4pPr marL="1371600" algn="l" defTabSz="914400" rtl="0" eaLnBrk="1" latinLnBrk="1" hangingPunct="1">
       <a:defRPr sz="1200" kern="1200">
         <a:solidFill>
           <a:schemeClr val="tx1"/>
@@ -421,7 +202,7 @@
         <a:cs typeface="+mn-cs"/>
       </a:defRPr>
     </a:lvl4pPr>
-    <a:lvl5pPr marL="1828800" algn="l" defTabSz="914400" rtl="0" eaLnBrk="1" latinLnBrk="0" hangingPunct="1">
+    <a:lvl5pPr marL="1828800" algn="l" defTabSz="914400" rtl="0" eaLnBrk="1" latinLnBrk="1" hangingPunct="1">
       <a:defRPr sz="1200" kern="1200">
         <a:solidFill>
           <a:schemeClr val="tx1"/>
@@ -431,7 +212,7 @@
         <a:cs typeface="+mn-cs"/>
       </a:defRPr>
     </a:lvl5pPr>
-    <a:lvl6pPr marL="2286000" algn="l" defTabSz="914400" rtl="0" eaLnBrk="1" latinLnBrk="0" hangingPunct="1">
+    <a:lvl6pPr marL="2286000" algn="l" defTabSz="914400" rtl="0" eaLnBrk="1" latinLnBrk="1" hangingPunct="1">
       <a:defRPr sz="1200" kern="1200">
         <a:solidFill>
           <a:schemeClr val="tx1"/>
@@ -441,7 +222,7 @@
         <a:cs typeface="+mn-cs"/>
       </a:defRPr>
     </a:lvl6pPr>
-    <a:lvl7pPr marL="2743200" algn="l" defTabSz="914400" rtl="0" eaLnBrk="1" latinLnBrk="0" hangingPunct="1">
+    <a:lvl7pPr marL="2743200" algn="l" defTabSz="914400" rtl="0" eaLnBrk="1" latinLnBrk="1" hangingPunct="1">
       <a:defRPr sz="1200" kern="1200">
         <a:solidFill>
           <a:schemeClr val="tx1"/>
@@ -451,7 +232,7 @@
         <a:cs typeface="+mn-cs"/>
       </a:defRPr>
     </a:lvl7pPr>
-    <a:lvl8pPr marL="3200400" algn="l" defTabSz="914400" rtl="0" eaLnBrk="1" latinLnBrk="0" hangingPunct="1">
+    <a:lvl8pPr marL="3200400" algn="l" defTabSz="914400" rtl="0" eaLnBrk="1" latinLnBrk="1" hangingPunct="1">
       <a:defRPr sz="1200" kern="1200">
         <a:solidFill>
           <a:schemeClr val="tx1"/>
@@ -461,7 +242,7 @@
         <a:cs typeface="+mn-cs"/>
       </a:defRPr>
     </a:lvl8pPr>
-    <a:lvl9pPr marL="3657600" algn="l" defTabSz="914400" rtl="0" eaLnBrk="1" latinLnBrk="0" hangingPunct="1">
+    <a:lvl9pPr marL="3657600" algn="l" defTabSz="914400" rtl="0" eaLnBrk="1" latinLnBrk="1" hangingPunct="1">
       <a:defRPr sz="1200" kern="1200">
         <a:solidFill>
           <a:schemeClr val="tx1"/>
@@ -519,10 +300,6 @@
           <a:bodyPr/>
           <a:lstStyle/>
           <a:p>
-            <a:r>
-              <a:rPr lang="en-US" dirty="0"/>
-              <a:t/>
-            </a:r>
             <a:endParaRPr lang="en-US" dirty="0"/>
           </a:p>
         </p:txBody>
@@ -607,10 +384,6 @@
           <a:bodyPr/>
           <a:lstStyle/>
           <a:p>
-            <a:r>
-              <a:rPr lang="en-US" dirty="0"/>
-              <a:t/>
-            </a:r>
             <a:endParaRPr lang="en-US" dirty="0"/>
           </a:p>
         </p:txBody>
@@ -695,10 +468,6 @@
           <a:bodyPr/>
           <a:lstStyle/>
           <a:p>
-            <a:r>
-              <a:rPr lang="en-US" dirty="0"/>
-              <a:t/>
-            </a:r>
             <a:endParaRPr lang="en-US" dirty="0"/>
           </a:p>
         </p:txBody>
@@ -783,10 +552,6 @@
           <a:bodyPr/>
           <a:lstStyle/>
           <a:p>
-            <a:r>
-              <a:rPr lang="en-US" dirty="0"/>
-              <a:t/>
-            </a:r>
             <a:endParaRPr lang="en-US" dirty="0"/>
           </a:p>
         </p:txBody>
@@ -871,10 +636,6 @@
           <a:bodyPr/>
           <a:lstStyle/>
           <a:p>
-            <a:r>
-              <a:rPr lang="en-US" dirty="0"/>
-              <a:t/>
-            </a:r>
             <a:endParaRPr lang="en-US" dirty="0"/>
           </a:p>
         </p:txBody>
@@ -896,7 +657,7 @@
           <a:p>
             <a:fld id="{F7021451-1387-4CA6-816F-3879F97B5CBC}" type="slidenum">
               <a:rPr lang="en-US"/>
-              <a:t>13</a:t>
+              <a:t>14</a:t>
             </a:fld>
             <a:endParaRPr lang="en-US"/>
           </a:p>
@@ -959,10 +720,6 @@
           <a:bodyPr/>
           <a:lstStyle/>
           <a:p>
-            <a:r>
-              <a:rPr lang="en-US" dirty="0"/>
-              <a:t/>
-            </a:r>
             <a:endParaRPr lang="en-US" dirty="0"/>
           </a:p>
         </p:txBody>
@@ -1047,10 +804,6 @@
           <a:bodyPr/>
           <a:lstStyle/>
           <a:p>
-            <a:r>
-              <a:rPr lang="en-US" dirty="0"/>
-              <a:t/>
-            </a:r>
             <a:endParaRPr lang="en-US" dirty="0"/>
           </a:p>
         </p:txBody>
@@ -1135,10 +888,6 @@
           <a:bodyPr/>
           <a:lstStyle/>
           <a:p>
-            <a:r>
-              <a:rPr lang="en-US" dirty="0"/>
-              <a:t/>
-            </a:r>
             <a:endParaRPr lang="en-US" dirty="0"/>
           </a:p>
         </p:txBody>
@@ -1223,10 +972,6 @@
           <a:bodyPr/>
           <a:lstStyle/>
           <a:p>
-            <a:r>
-              <a:rPr lang="en-US" dirty="0"/>
-              <a:t/>
-            </a:r>
             <a:endParaRPr lang="en-US" dirty="0"/>
           </a:p>
         </p:txBody>
@@ -1311,10 +1056,6 @@
           <a:bodyPr/>
           <a:lstStyle/>
           <a:p>
-            <a:r>
-              <a:rPr lang="en-US" dirty="0"/>
-              <a:t/>
-            </a:r>
             <a:endParaRPr lang="en-US" dirty="0"/>
           </a:p>
         </p:txBody>
@@ -1399,10 +1140,6 @@
           <a:bodyPr/>
           <a:lstStyle/>
           <a:p>
-            <a:r>
-              <a:rPr lang="en-US" dirty="0"/>
-              <a:t/>
-            </a:r>
             <a:endParaRPr lang="en-US" dirty="0"/>
           </a:p>
         </p:txBody>
@@ -1487,10 +1224,6 @@
           <a:bodyPr/>
           <a:lstStyle/>
           <a:p>
-            <a:r>
-              <a:rPr lang="en-US" dirty="0"/>
-              <a:t/>
-            </a:r>
             <a:endParaRPr lang="en-US" dirty="0"/>
           </a:p>
         </p:txBody>
@@ -1575,10 +1308,6 @@
           <a:bodyPr/>
           <a:lstStyle/>
           <a:p>
-            <a:r>
-              <a:rPr lang="en-US" dirty="0"/>
-              <a:t/>
-            </a:r>
             <a:endParaRPr lang="en-US" dirty="0"/>
           </a:p>
         </p:txBody>
@@ -1652,6 +1381,11 @@
 <file path=ppt/slideMasters/slideMaster1.xml><?xml version="1.0" encoding="utf-8"?>
 <p:sldMaster xmlns:a="http://schemas.openxmlformats.org/drawingml/2006/main" xmlns:r="http://schemas.openxmlformats.org/officeDocument/2006/relationships" xmlns:p="http://schemas.openxmlformats.org/presentationml/2006/main">
   <p:cSld>
+    <p:bg>
+      <p:bgRef idx="1001">
+        <a:schemeClr val="bg1"/>
+      </p:bgRef>
+    </p:bg>
     <p:spTree>
       <p:nvGrpSpPr>
         <p:cNvPr id="1" name=""/>
@@ -1987,7 +1721,7 @@
           <a:bodyPr wrap="square" lIns="0" tIns="0" rIns="0" bIns="0" rtlCol="0" anchor="ctr"/>
           <a:lstStyle/>
           <a:p>
-            <a:pPr algn="ctr" indent="0" marL="0">
+            <a:pPr marL="0" indent="0" algn="ctr">
               <a:buNone/>
             </a:pPr>
             <a:r>
@@ -2026,7 +1760,7 @@
           <a:bodyPr wrap="square" lIns="0" tIns="0" rIns="0" bIns="0" rtlCol="0" anchor="ctr"/>
           <a:lstStyle/>
           <a:p>
-            <a:pPr algn="ctr" indent="0" marL="0">
+            <a:pPr marL="0" indent="0" algn="ctr">
               <a:buNone/>
             </a:pPr>
             <a:r>
@@ -2088,7 +1822,7 @@
           <a:bodyPr wrap="square" lIns="0" tIns="0" rIns="0" bIns="0" rtlCol="0" anchor="ctr"/>
           <a:lstStyle/>
           <a:p>
-            <a:pPr algn="ctr" indent="0" marL="0">
+            <a:pPr marL="0" indent="0" algn="ctr">
               <a:buNone/>
             </a:pPr>
             <a:r>
@@ -2127,7 +1861,7 @@
           <a:bodyPr wrap="square" lIns="0" tIns="0" rIns="0" bIns="0" rtlCol="0" anchor="ctr"/>
           <a:lstStyle/>
           <a:p>
-            <a:pPr algn="ctr" indent="0" marL="0">
+            <a:pPr marL="0" indent="0" algn="ctr">
               <a:buNone/>
             </a:pPr>
             <a:r>
@@ -2191,7 +1925,7 @@
           <a:bodyPr wrap="square" lIns="0" tIns="0" rIns="0" bIns="0" rtlCol="0" anchor="ctr"/>
           <a:lstStyle/>
           <a:p>
-            <a:pPr indent="0" marL="0">
+            <a:pPr marL="0" indent="0">
               <a:buNone/>
             </a:pPr>
             <a:r>
@@ -2233,7 +1967,10 @@
         </p:spPr>
         <p:txBody>
           <a:bodyPr/>
-          <a:p/>
+          <a:lstStyle/>
+          <a:p>
+            <a:endParaRPr/>
+          </a:p>
         </p:txBody>
       </p:sp>
       <p:sp>
@@ -2257,7 +1994,10 @@
         </p:spPr>
         <p:txBody>
           <a:bodyPr/>
-          <a:p/>
+          <a:lstStyle/>
+          <a:p>
+            <a:endParaRPr/>
+          </a:p>
         </p:txBody>
       </p:sp>
       <p:sp>
@@ -2281,7 +2021,7 @@
           <a:bodyPr wrap="square" lIns="0" tIns="0" rIns="0" bIns="0" rtlCol="0" anchor="ctr"/>
           <a:lstStyle/>
           <a:p>
-            <a:pPr indent="0" marL="0">
+            <a:pPr marL="0" indent="0">
               <a:buNone/>
             </a:pPr>
             <a:r>
@@ -2320,7 +2060,7 @@
           <a:bodyPr wrap="square" lIns="0" tIns="0" rIns="0" bIns="0" rtlCol="0" anchor="ctr"/>
           <a:lstStyle/>
           <a:p>
-            <a:pPr indent="0" marL="0">
+            <a:pPr marL="0" indent="0">
               <a:buNone/>
             </a:pPr>
             <a:r>
@@ -2359,7 +2099,10 @@
         </p:spPr>
         <p:txBody>
           <a:bodyPr/>
-          <a:p/>
+          <a:lstStyle/>
+          <a:p>
+            <a:endParaRPr/>
+          </a:p>
         </p:txBody>
       </p:sp>
       <p:sp>
@@ -2383,7 +2126,7 @@
           <a:bodyPr wrap="square" lIns="0" tIns="0" rIns="0" bIns="0" rtlCol="0" anchor="ctr"/>
           <a:lstStyle/>
           <a:p>
-            <a:pPr indent="0" marL="0">
+            <a:pPr marL="0" indent="0">
               <a:buNone/>
             </a:pPr>
             <a:r>
@@ -2422,7 +2165,7 @@
           <a:bodyPr wrap="square" lIns="0" tIns="0" rIns="0" bIns="0" rtlCol="0" anchor="ctr"/>
           <a:lstStyle/>
           <a:p>
-            <a:pPr indent="0" marL="0">
+            <a:pPr marL="0" indent="0">
               <a:buNone/>
             </a:pPr>
             <a:r>
@@ -2461,7 +2204,10 @@
         </p:spPr>
         <p:txBody>
           <a:bodyPr/>
-          <a:p/>
+          <a:lstStyle/>
+          <a:p>
+            <a:endParaRPr/>
+          </a:p>
         </p:txBody>
       </p:sp>
       <p:sp>
@@ -2485,7 +2231,7 @@
           <a:bodyPr wrap="square" lIns="0" tIns="0" rIns="0" bIns="0" rtlCol="0" anchor="ctr"/>
           <a:lstStyle/>
           <a:p>
-            <a:pPr indent="0" marL="0">
+            <a:pPr marL="0" indent="0">
               <a:buNone/>
             </a:pPr>
             <a:r>
@@ -2524,7 +2270,7 @@
           <a:bodyPr wrap="square" lIns="0" tIns="0" rIns="0" bIns="0" rtlCol="0" anchor="ctr"/>
           <a:lstStyle/>
           <a:p>
-            <a:pPr indent="0" marL="0">
+            <a:pPr marL="0" indent="0">
               <a:buNone/>
             </a:pPr>
             <a:r>
@@ -2563,7 +2309,10 @@
         </p:spPr>
         <p:txBody>
           <a:bodyPr/>
-          <a:p/>
+          <a:lstStyle/>
+          <a:p>
+            <a:endParaRPr/>
+          </a:p>
         </p:txBody>
       </p:sp>
       <p:sp>
@@ -2587,7 +2336,7 @@
           <a:bodyPr wrap="square" lIns="0" tIns="0" rIns="0" bIns="0" rtlCol="0" anchor="ctr"/>
           <a:lstStyle/>
           <a:p>
-            <a:pPr indent="0" marL="0">
+            <a:pPr marL="0" indent="0">
               <a:buNone/>
             </a:pPr>
             <a:r>
@@ -2626,7 +2375,7 @@
           <a:bodyPr wrap="square" lIns="0" tIns="0" rIns="0" bIns="0" rtlCol="0" anchor="ctr"/>
           <a:lstStyle/>
           <a:p>
-            <a:pPr indent="0" marL="0">
+            <a:pPr marL="0" indent="0">
               <a:buNone/>
             </a:pPr>
             <a:r>
@@ -2665,7 +2414,10 @@
         </p:spPr>
         <p:txBody>
           <a:bodyPr/>
-          <a:p/>
+          <a:lstStyle/>
+          <a:p>
+            <a:endParaRPr/>
+          </a:p>
         </p:txBody>
       </p:sp>
       <p:sp>
@@ -2689,7 +2441,7 @@
           <a:bodyPr wrap="square" lIns="0" tIns="0" rIns="0" bIns="0" rtlCol="0" anchor="ctr"/>
           <a:lstStyle/>
           <a:p>
-            <a:pPr indent="0" marL="0">
+            <a:pPr marL="0" indent="0">
               <a:buNone/>
             </a:pPr>
             <a:r>
@@ -2728,7 +2480,7 @@
           <a:bodyPr wrap="square" lIns="0" tIns="0" rIns="0" bIns="0" rtlCol="0" anchor="ctr"/>
           <a:lstStyle/>
           <a:p>
-            <a:pPr indent="0" marL="0">
+            <a:pPr marL="0" indent="0">
               <a:buNone/>
             </a:pPr>
             <a:r>
@@ -2767,7 +2519,10 @@
         </p:spPr>
         <p:txBody>
           <a:bodyPr/>
-          <a:p/>
+          <a:lstStyle/>
+          <a:p>
+            <a:endParaRPr/>
+          </a:p>
         </p:txBody>
       </p:sp>
       <p:sp>
@@ -2791,7 +2546,7 @@
           <a:bodyPr wrap="square" lIns="0" tIns="0" rIns="0" bIns="0" rtlCol="0" anchor="ctr"/>
           <a:lstStyle/>
           <a:p>
-            <a:pPr indent="0" marL="0">
+            <a:pPr marL="0" indent="0">
               <a:buNone/>
             </a:pPr>
             <a:r>
@@ -2830,7 +2585,7 @@
           <a:bodyPr wrap="square" lIns="0" tIns="0" rIns="0" bIns="0" rtlCol="0" anchor="ctr"/>
           <a:lstStyle/>
           <a:p>
-            <a:pPr indent="0" marL="0">
+            <a:pPr marL="0" indent="0">
               <a:buNone/>
             </a:pPr>
             <a:r>
@@ -2869,7 +2624,10 @@
         </p:spPr>
         <p:txBody>
           <a:bodyPr/>
-          <a:p/>
+          <a:lstStyle/>
+          <a:p>
+            <a:endParaRPr/>
+          </a:p>
         </p:txBody>
       </p:sp>
       <p:sp>
@@ -2893,7 +2651,7 @@
           <a:bodyPr wrap="square" lIns="0" tIns="0" rIns="0" bIns="0" rtlCol="0" anchor="ctr"/>
           <a:lstStyle/>
           <a:p>
-            <a:pPr indent="0" marL="0">
+            <a:pPr marL="0" indent="0">
               <a:buNone/>
             </a:pPr>
             <a:r>
@@ -2932,7 +2690,7 @@
           <a:bodyPr wrap="square" lIns="0" tIns="0" rIns="0" bIns="0" rtlCol="0" anchor="ctr"/>
           <a:lstStyle/>
           <a:p>
-            <a:pPr indent="0" marL="0">
+            <a:pPr marL="0" indent="0">
               <a:buNone/>
             </a:pPr>
             <a:r>
@@ -2971,7 +2729,10 @@
         </p:spPr>
         <p:txBody>
           <a:bodyPr/>
-          <a:p/>
+          <a:lstStyle/>
+          <a:p>
+            <a:endParaRPr/>
+          </a:p>
         </p:txBody>
       </p:sp>
       <p:sp>
@@ -2995,7 +2756,7 @@
           <a:bodyPr wrap="square" lIns="0" tIns="0" rIns="0" bIns="0" rtlCol="0" anchor="ctr"/>
           <a:lstStyle/>
           <a:p>
-            <a:pPr indent="0" marL="0">
+            <a:pPr marL="0" indent="0">
               <a:buNone/>
             </a:pPr>
             <a:r>
@@ -3034,7 +2795,7 @@
           <a:bodyPr wrap="square" lIns="0" tIns="0" rIns="0" bIns="0" rtlCol="0" anchor="ctr"/>
           <a:lstStyle/>
           <a:p>
-            <a:pPr indent="0" marL="0">
+            <a:pPr marL="0" indent="0">
               <a:buNone/>
             </a:pPr>
             <a:r>
@@ -3073,7 +2834,10 @@
         </p:spPr>
         <p:txBody>
           <a:bodyPr/>
-          <a:p/>
+          <a:lstStyle/>
+          <a:p>
+            <a:endParaRPr/>
+          </a:p>
         </p:txBody>
       </p:sp>
       <p:sp>
@@ -3097,7 +2861,7 @@
           <a:bodyPr wrap="square" lIns="0" tIns="0" rIns="0" bIns="0" rtlCol="0" anchor="ctr"/>
           <a:lstStyle/>
           <a:p>
-            <a:pPr indent="0" marL="0">
+            <a:pPr marL="0" indent="0">
               <a:buNone/>
             </a:pPr>
             <a:r>
@@ -3136,7 +2900,7 @@
           <a:bodyPr wrap="square" lIns="0" tIns="0" rIns="0" bIns="0" rtlCol="0" anchor="ctr"/>
           <a:lstStyle/>
           <a:p>
-            <a:pPr indent="0" marL="0">
+            <a:pPr marL="0" indent="0">
               <a:buNone/>
             </a:pPr>
             <a:r>
@@ -3175,7 +2939,10 @@
         </p:spPr>
         <p:txBody>
           <a:bodyPr/>
-          <a:p/>
+          <a:lstStyle/>
+          <a:p>
+            <a:endParaRPr/>
+          </a:p>
         </p:txBody>
       </p:sp>
       <p:sp>
@@ -3199,7 +2966,7 @@
           <a:bodyPr wrap="square" lIns="0" tIns="0" rIns="0" bIns="0" rtlCol="0" anchor="ctr"/>
           <a:lstStyle/>
           <a:p>
-            <a:pPr indent="0" marL="0">
+            <a:pPr marL="0" indent="0">
               <a:buNone/>
             </a:pPr>
             <a:r>
@@ -3238,7 +3005,7 @@
           <a:bodyPr wrap="square" lIns="0" tIns="0" rIns="0" bIns="0" rtlCol="0" anchor="ctr"/>
           <a:lstStyle/>
           <a:p>
-            <a:pPr indent="0" marL="0">
+            <a:pPr marL="0" indent="0">
               <a:buNone/>
             </a:pPr>
             <a:r>
@@ -3258,7 +3025,7 @@
       </p:sp>
       <p:sp>
         <p:nvSpPr>
-          <p:cNvPr id="32" name="Text 30"/>
+          <p:cNvPr id="34" name="Text 30"/>
           <p:cNvSpPr/>
           <p:nvPr/>
         </p:nvSpPr>
@@ -3277,27 +3044,16 @@
           <a:bodyPr wrap="square" lIns="0" tIns="0" rIns="0" bIns="0" rtlCol="0" anchor="ctr"/>
           <a:lstStyle/>
           <a:p>
-            <a:pPr indent="0" marL="0">
+            <a:pPr marL="0" indent="0">
               <a:buNone/>
             </a:pPr>
             <a:endParaRPr lang="en-US" sz="1000" dirty="0"/>
-            <a:r>
-              <a:rPr lang="en-US" sz="1000" b="1" dirty="0">
-                <a:solidFill>
-                  <a:srgbClr val="000000"/>
-                </a:solidFill>
-                <a:latin typeface="Arial" pitchFamily="34" charset="0"/>
-                <a:ea typeface="Arial" pitchFamily="34" charset="-122"/>
-                <a:cs typeface="Arial" pitchFamily="34" charset="-120"/>
-              </a:rPr>
-              <a:t>UART1 (디버그 로그)</a:t>
-            </a:r>
-          </a:p>
-        </p:txBody>
-      </p:sp>
-      <p:sp>
-        <p:nvSpPr>
-          <p:cNvPr id="33" name="Text 31"/>
+          </a:p>
+        </p:txBody>
+      </p:sp>
+      <p:sp>
+        <p:nvSpPr>
+          <p:cNvPr id="35" name="Text 31"/>
           <p:cNvSpPr/>
           <p:nvPr/>
         </p:nvSpPr>
@@ -3316,21 +3072,10 @@
           <a:bodyPr wrap="square" lIns="0" tIns="0" rIns="0" bIns="0" rtlCol="0" anchor="ctr"/>
           <a:lstStyle/>
           <a:p>
-            <a:pPr indent="0" marL="0">
+            <a:pPr marL="0" indent="0">
               <a:buNone/>
             </a:pPr>
             <a:endParaRPr lang="en-US" sz="1000" dirty="0"/>
-            <a:r>
-              <a:rPr lang="en-US" sz="1000" dirty="0">
-                <a:solidFill>
-                  <a:srgbClr val="333333"/>
-                </a:solidFill>
-                <a:latin typeface="Consolas" pitchFamily="34" charset="0"/>
-                <a:ea typeface="Consolas" pitchFamily="34" charset="-122"/>
-                <a:cs typeface="Consolas" pitchFamily="34" charset="-120"/>
-              </a:rPr>
-              <a:t>PB14 (TX), PB15 (RX)  115200 8N1</a:t>
-            </a:r>
           </a:p>
         </p:txBody>
       </p:sp>
@@ -3380,7 +3125,7 @@
           <a:bodyPr wrap="square" lIns="0" tIns="0" rIns="0" bIns="0" rtlCol="0" anchor="ctr"/>
           <a:lstStyle/>
           <a:p>
-            <a:pPr indent="0" marL="0">
+            <a:pPr marL="0" indent="0">
               <a:buNone/>
             </a:pPr>
             <a:r>
@@ -3442,7 +3187,7 @@
           <a:bodyPr wrap="square" lIns="0" tIns="0" rIns="0" bIns="0" rtlCol="0" anchor="ctr"/>
           <a:lstStyle/>
           <a:p>
-            <a:pPr indent="0" marL="0">
+            <a:pPr marL="0" indent="0">
               <a:buNone/>
             </a:pPr>
             <a:r>
@@ -3481,7 +3226,7 @@
           <a:bodyPr wrap="square" lIns="0" tIns="0" rIns="0" bIns="0" rtlCol="0" anchor="ctr"/>
           <a:lstStyle/>
           <a:p>
-            <a:pPr algn="ctr" indent="0" marL="0">
+            <a:pPr marL="0" indent="0" algn="ctr">
               <a:buNone/>
             </a:pPr>
             <a:r>
@@ -3520,7 +3265,7 @@
           <a:bodyPr wrap="square" lIns="0" tIns="0" rIns="0" bIns="0" rtlCol="0" anchor="ctr"/>
           <a:lstStyle/>
           <a:p>
-            <a:pPr algn="ctr" indent="0" marL="0">
+            <a:pPr marL="0" indent="0" algn="ctr">
               <a:buNone/>
             </a:pPr>
             <a:r>
@@ -3579,7 +3324,7 @@
           <a:bodyPr wrap="square" lIns="0" tIns="0" rIns="0" bIns="0" rtlCol="0" anchor="ctr"/>
           <a:lstStyle/>
           <a:p>
-            <a:pPr indent="0" marL="0">
+            <a:pPr marL="0" indent="0">
               <a:buNone/>
             </a:pPr>
             <a:r>
@@ -3638,7 +3383,7 @@
           <a:bodyPr wrap="square" lIns="0" tIns="0" rIns="0" bIns="0" rtlCol="0" anchor="ctr"/>
           <a:lstStyle/>
           <a:p>
-            <a:pPr indent="0" marL="0">
+            <a:pPr marL="0" indent="0">
               <a:buNone/>
             </a:pPr>
             <a:r>
@@ -3677,7 +3422,7 @@
           <a:bodyPr wrap="square" lIns="0" tIns="0" rIns="0" bIns="0" rtlCol="0" anchor="ctr"/>
           <a:lstStyle/>
           <a:p>
-            <a:pPr indent="0" marL="0">
+            <a:pPr marL="0" indent="0">
               <a:buNone/>
             </a:pPr>
             <a:r>
@@ -3716,7 +3461,7 @@
           <a:bodyPr wrap="square" lIns="0" tIns="0" rIns="0" bIns="0" rtlCol="0" anchor="ctr"/>
           <a:lstStyle/>
           <a:p>
-            <a:pPr indent="0" marL="0">
+            <a:pPr marL="0" indent="0">
               <a:buNone/>
             </a:pPr>
             <a:r>
@@ -3755,7 +3500,7 @@
           <a:bodyPr wrap="square" lIns="0" tIns="0" rIns="0" bIns="0" rtlCol="0" anchor="ctr"/>
           <a:lstStyle/>
           <a:p>
-            <a:pPr indent="0" marL="0">
+            <a:pPr marL="0" indent="0">
               <a:buNone/>
             </a:pPr>
             <a:r>
@@ -3814,7 +3559,7 @@
           <a:bodyPr wrap="square" lIns="0" tIns="0" rIns="0" bIns="0" rtlCol="0" anchor="ctr"/>
           <a:lstStyle/>
           <a:p>
-            <a:pPr indent="0" marL="0">
+            <a:pPr marL="0" indent="0">
               <a:buNone/>
             </a:pPr>
             <a:r>
@@ -3853,7 +3598,7 @@
           <a:bodyPr wrap="square" lIns="0" tIns="0" rIns="0" bIns="0" rtlCol="0" anchor="ctr"/>
           <a:lstStyle/>
           <a:p>
-            <a:pPr indent="0" marL="0">
+            <a:pPr marL="0" indent="0">
               <a:buNone/>
             </a:pPr>
             <a:r>
@@ -3892,7 +3637,7 @@
           <a:bodyPr wrap="square" lIns="0" tIns="0" rIns="0" bIns="0" rtlCol="0" anchor="ctr"/>
           <a:lstStyle/>
           <a:p>
-            <a:pPr indent="0" marL="0">
+            <a:pPr marL="0" indent="0">
               <a:buNone/>
             </a:pPr>
             <a:r>
@@ -3931,7 +3676,7 @@
           <a:bodyPr wrap="square" lIns="0" tIns="0" rIns="0" bIns="0" rtlCol="0" anchor="ctr"/>
           <a:lstStyle/>
           <a:p>
-            <a:pPr algn="ctr" indent="0" marL="0">
+            <a:pPr marL="0" indent="0" algn="ctr">
               <a:buNone/>
             </a:pPr>
             <a:r>
@@ -3990,7 +3735,7 @@
           <a:bodyPr wrap="square" lIns="0" tIns="0" rIns="0" bIns="0" rtlCol="0" anchor="ctr"/>
           <a:lstStyle/>
           <a:p>
-            <a:pPr indent="0" marL="0">
+            <a:pPr marL="0" indent="0">
               <a:buNone/>
             </a:pPr>
             <a:r>
@@ -4029,7 +3774,7 @@
           <a:bodyPr wrap="square" lIns="0" tIns="0" rIns="0" bIns="0" rtlCol="0" anchor="ctr"/>
           <a:lstStyle/>
           <a:p>
-            <a:pPr indent="0" marL="0">
+            <a:pPr marL="0" indent="0">
               <a:buNone/>
             </a:pPr>
             <a:r>
@@ -4068,7 +3813,7 @@
           <a:bodyPr wrap="square" lIns="0" tIns="0" rIns="0" bIns="0" rtlCol="0" anchor="ctr"/>
           <a:lstStyle/>
           <a:p>
-            <a:pPr indent="0" marL="0">
+            <a:pPr marL="0" indent="0">
               <a:buNone/>
             </a:pPr>
             <a:r>
@@ -4107,7 +3852,7 @@
           <a:bodyPr wrap="square" lIns="0" tIns="0" rIns="0" bIns="0" rtlCol="0" anchor="ctr"/>
           <a:lstStyle/>
           <a:p>
-            <a:pPr algn="ctr" indent="0" marL="0">
+            <a:pPr marL="0" indent="0" algn="ctr">
               <a:buNone/>
             </a:pPr>
             <a:r>
@@ -4166,7 +3911,7 @@
           <a:bodyPr wrap="square" lIns="0" tIns="0" rIns="0" bIns="0" rtlCol="0" anchor="ctr"/>
           <a:lstStyle/>
           <a:p>
-            <a:pPr indent="0" marL="0">
+            <a:pPr marL="0" indent="0">
               <a:buNone/>
             </a:pPr>
             <a:r>
@@ -4205,7 +3950,7 @@
           <a:bodyPr wrap="square" lIns="0" tIns="0" rIns="0" bIns="0" rtlCol="0" anchor="ctr"/>
           <a:lstStyle/>
           <a:p>
-            <a:pPr indent="0" marL="0">
+            <a:pPr marL="0" indent="0">
               <a:buNone/>
             </a:pPr>
             <a:r>
@@ -4244,7 +3989,7 @@
           <a:bodyPr wrap="square" lIns="0" tIns="0" rIns="0" bIns="0" rtlCol="0" anchor="ctr"/>
           <a:lstStyle/>
           <a:p>
-            <a:pPr indent="0" marL="0">
+            <a:pPr marL="0" indent="0">
               <a:buNone/>
             </a:pPr>
             <a:r>
@@ -4283,7 +4028,7 @@
           <a:bodyPr wrap="square" lIns="0" tIns="0" rIns="0" bIns="0" rtlCol="0" anchor="ctr"/>
           <a:lstStyle/>
           <a:p>
-            <a:pPr algn="ctr" indent="0" marL="0">
+            <a:pPr marL="0" indent="0" algn="ctr">
               <a:buNone/>
             </a:pPr>
             <a:r>
@@ -4342,7 +4087,7 @@
           <a:bodyPr wrap="square" lIns="0" tIns="0" rIns="0" bIns="0" rtlCol="0" anchor="ctr"/>
           <a:lstStyle/>
           <a:p>
-            <a:pPr indent="0" marL="0">
+            <a:pPr marL="0" indent="0">
               <a:buNone/>
             </a:pPr>
             <a:r>
@@ -4381,7 +4126,7 @@
           <a:bodyPr wrap="square" lIns="0" tIns="0" rIns="0" bIns="0" rtlCol="0" anchor="ctr"/>
           <a:lstStyle/>
           <a:p>
-            <a:pPr indent="0" marL="0">
+            <a:pPr marL="0" indent="0">
               <a:buNone/>
             </a:pPr>
             <a:r>
@@ -4420,7 +4165,7 @@
           <a:bodyPr wrap="square" lIns="0" tIns="0" rIns="0" bIns="0" rtlCol="0" anchor="ctr"/>
           <a:lstStyle/>
           <a:p>
-            <a:pPr indent="0" marL="0">
+            <a:pPr marL="0" indent="0">
               <a:buNone/>
             </a:pPr>
             <a:r>
@@ -4459,7 +4204,7 @@
           <a:bodyPr wrap="square" lIns="0" tIns="0" rIns="0" bIns="0" rtlCol="0" anchor="ctr"/>
           <a:lstStyle/>
           <a:p>
-            <a:pPr algn="ctr" indent="0" marL="0">
+            <a:pPr marL="0" indent="0" algn="ctr">
               <a:buNone/>
             </a:pPr>
             <a:r>
@@ -4518,7 +4263,7 @@
           <a:bodyPr wrap="square" lIns="0" tIns="0" rIns="0" bIns="0" rtlCol="0" anchor="ctr"/>
           <a:lstStyle/>
           <a:p>
-            <a:pPr indent="0" marL="0">
+            <a:pPr marL="0" indent="0">
               <a:buNone/>
             </a:pPr>
             <a:r>
@@ -4557,7 +4302,7 @@
           <a:bodyPr wrap="square" lIns="0" tIns="0" rIns="0" bIns="0" rtlCol="0" anchor="ctr"/>
           <a:lstStyle/>
           <a:p>
-            <a:pPr indent="0" marL="0">
+            <a:pPr marL="0" indent="0">
               <a:buNone/>
             </a:pPr>
             <a:r>
@@ -4596,7 +4341,7 @@
           <a:bodyPr wrap="square" lIns="0" tIns="0" rIns="0" bIns="0" rtlCol="0" anchor="ctr"/>
           <a:lstStyle/>
           <a:p>
-            <a:pPr indent="0" marL="0">
+            <a:pPr marL="0" indent="0">
               <a:buNone/>
             </a:pPr>
             <a:r>
@@ -4635,7 +4380,7 @@
           <a:bodyPr wrap="square" lIns="0" tIns="0" rIns="0" bIns="0" rtlCol="0" anchor="ctr"/>
           <a:lstStyle/>
           <a:p>
-            <a:pPr algn="ctr" indent="0" marL="0">
+            <a:pPr marL="0" indent="0" algn="ctr">
               <a:buNone/>
             </a:pPr>
             <a:r>
@@ -4694,7 +4439,7 @@
           <a:bodyPr wrap="square" lIns="0" tIns="0" rIns="0" bIns="0" rtlCol="0" anchor="ctr"/>
           <a:lstStyle/>
           <a:p>
-            <a:pPr indent="0" marL="0">
+            <a:pPr marL="0" indent="0">
               <a:buNone/>
             </a:pPr>
             <a:r>
@@ -4733,7 +4478,7 @@
           <a:bodyPr wrap="square" lIns="0" tIns="0" rIns="0" bIns="0" rtlCol="0" anchor="ctr"/>
           <a:lstStyle/>
           <a:p>
-            <a:pPr indent="0" marL="0">
+            <a:pPr marL="0" indent="0">
               <a:buNone/>
             </a:pPr>
             <a:r>
@@ -4772,7 +4517,7 @@
           <a:bodyPr wrap="square" lIns="0" tIns="0" rIns="0" bIns="0" rtlCol="0" anchor="ctr"/>
           <a:lstStyle/>
           <a:p>
-            <a:pPr indent="0" marL="0">
+            <a:pPr marL="0" indent="0">
               <a:buNone/>
             </a:pPr>
             <a:r>
@@ -4811,7 +4556,7 @@
           <a:bodyPr wrap="square" lIns="0" tIns="0" rIns="0" bIns="0" rtlCol="0" anchor="ctr"/>
           <a:lstStyle/>
           <a:p>
-            <a:pPr algn="ctr" indent="0" marL="0">
+            <a:pPr marL="0" indent="0" algn="ctr">
               <a:buNone/>
             </a:pPr>
             <a:r>
@@ -4875,7 +4620,7 @@
           <a:bodyPr wrap="square" lIns="0" tIns="0" rIns="0" bIns="0" rtlCol="0" anchor="ctr"/>
           <a:lstStyle/>
           <a:p>
-            <a:pPr indent="0" marL="0">
+            <a:pPr marL="0" indent="0">
               <a:buNone/>
             </a:pPr>
             <a:r>
@@ -4924,7 +4669,7 @@
         </p:nvSpPr>
         <p:spPr>
           <a:xfrm>
-            <a:off x="457200" y="822960"/>
+            <a:off x="640080" y="809244"/>
             <a:ext cx="8229600" cy="274320"/>
           </a:xfrm>
           <a:prstGeom prst="rect">
@@ -4937,7 +4682,7 @@
           <a:bodyPr wrap="square" lIns="0" tIns="0" rIns="0" bIns="0" rtlCol="0" anchor="ctr"/>
           <a:lstStyle/>
           <a:p>
-            <a:pPr indent="0" marL="0">
+            <a:pPr marL="0" indent="0">
               <a:buNone/>
             </a:pPr>
             <a:r>
@@ -4996,7 +4741,7 @@
           <a:bodyPr wrap="square" lIns="0" tIns="0" rIns="0" bIns="0" rtlCol="0" anchor="ctr"/>
           <a:lstStyle/>
           <a:p>
-            <a:pPr indent="0" marL="0">
+            <a:pPr marL="0" indent="0">
               <a:buNone/>
             </a:pPr>
             <a:r>
@@ -5035,7 +4780,7 @@
           <a:bodyPr wrap="square" lIns="0" tIns="0" rIns="0" bIns="0" rtlCol="0" anchor="ctr"/>
           <a:lstStyle/>
           <a:p>
-            <a:pPr indent="0" marL="0">
+            <a:pPr marL="0" indent="0">
               <a:buNone/>
             </a:pPr>
             <a:r>
@@ -5074,7 +4819,7 @@
           <a:bodyPr wrap="square" lIns="0" tIns="0" rIns="0" bIns="0" rtlCol="0" anchor="ctr"/>
           <a:lstStyle/>
           <a:p>
-            <a:pPr indent="0" marL="0">
+            <a:pPr marL="0" indent="0">
               <a:buNone/>
             </a:pPr>
             <a:r>
@@ -5133,7 +4878,7 @@
           <a:bodyPr wrap="square" lIns="0" tIns="0" rIns="0" bIns="0" rtlCol="0" anchor="ctr"/>
           <a:lstStyle/>
           <a:p>
-            <a:pPr algn="ctr" indent="0" marL="0">
+            <a:pPr marL="0" indent="0" algn="ctr">
               <a:buNone/>
             </a:pPr>
             <a:r>
@@ -5172,7 +4917,7 @@
           <a:bodyPr wrap="square" lIns="0" tIns="0" rIns="0" bIns="0" rtlCol="0" anchor="ctr"/>
           <a:lstStyle/>
           <a:p>
-            <a:pPr indent="0" marL="0">
+            <a:pPr marL="0" indent="0">
               <a:buNone/>
             </a:pPr>
             <a:r>
@@ -5211,7 +4956,7 @@
           <a:bodyPr wrap="square" lIns="0" tIns="0" rIns="0" bIns="0" rtlCol="0" anchor="ctr"/>
           <a:lstStyle/>
           <a:p>
-            <a:pPr indent="0" marL="0">
+            <a:pPr marL="0" indent="0">
               <a:buNone/>
             </a:pPr>
             <a:r>
@@ -5270,7 +5015,7 @@
           <a:bodyPr wrap="square" lIns="0" tIns="0" rIns="0" bIns="0" rtlCol="0" anchor="ctr"/>
           <a:lstStyle/>
           <a:p>
-            <a:pPr algn="ctr" indent="0" marL="0">
+            <a:pPr marL="0" indent="0" algn="ctr">
               <a:buNone/>
             </a:pPr>
             <a:r>
@@ -5309,7 +5054,7 @@
           <a:bodyPr wrap="square" lIns="0" tIns="0" rIns="0" bIns="0" rtlCol="0" anchor="ctr"/>
           <a:lstStyle/>
           <a:p>
-            <a:pPr indent="0" marL="0">
+            <a:pPr marL="0" indent="0">
               <a:buNone/>
             </a:pPr>
             <a:r>
@@ -5348,7 +5093,7 @@
           <a:bodyPr wrap="square" lIns="0" tIns="0" rIns="0" bIns="0" rtlCol="0" anchor="ctr"/>
           <a:lstStyle/>
           <a:p>
-            <a:pPr indent="0" marL="0">
+            <a:pPr marL="0" indent="0">
               <a:buNone/>
             </a:pPr>
             <a:r>
@@ -5407,7 +5152,7 @@
           <a:bodyPr wrap="square" lIns="0" tIns="0" rIns="0" bIns="0" rtlCol="0" anchor="ctr"/>
           <a:lstStyle/>
           <a:p>
-            <a:pPr algn="ctr" indent="0" marL="0">
+            <a:pPr marL="0" indent="0" algn="ctr">
               <a:buNone/>
             </a:pPr>
             <a:r>
@@ -5446,7 +5191,7 @@
           <a:bodyPr wrap="square" lIns="0" tIns="0" rIns="0" bIns="0" rtlCol="0" anchor="ctr"/>
           <a:lstStyle/>
           <a:p>
-            <a:pPr indent="0" marL="0">
+            <a:pPr marL="0" indent="0">
               <a:buNone/>
             </a:pPr>
             <a:r>
@@ -5485,7 +5230,7 @@
           <a:bodyPr wrap="square" lIns="0" tIns="0" rIns="0" bIns="0" rtlCol="0" anchor="ctr"/>
           <a:lstStyle/>
           <a:p>
-            <a:pPr indent="0" marL="0">
+            <a:pPr marL="0" indent="0">
               <a:buNone/>
             </a:pPr>
             <a:r>
@@ -5544,7 +5289,7 @@
           <a:bodyPr wrap="square" lIns="0" tIns="0" rIns="0" bIns="0" rtlCol="0" anchor="ctr"/>
           <a:lstStyle/>
           <a:p>
-            <a:pPr algn="ctr" indent="0" marL="0">
+            <a:pPr marL="0" indent="0" algn="ctr">
               <a:buNone/>
             </a:pPr>
             <a:r>
@@ -5583,7 +5328,7 @@
           <a:bodyPr wrap="square" lIns="0" tIns="0" rIns="0" bIns="0" rtlCol="0" anchor="ctr"/>
           <a:lstStyle/>
           <a:p>
-            <a:pPr indent="0" marL="0">
+            <a:pPr marL="0" indent="0">
               <a:buNone/>
             </a:pPr>
             <a:r>
@@ -5622,7 +5367,7 @@
           <a:bodyPr wrap="square" lIns="0" tIns="0" rIns="0" bIns="0" rtlCol="0" anchor="ctr"/>
           <a:lstStyle/>
           <a:p>
-            <a:pPr indent="0" marL="0">
+            <a:pPr marL="0" indent="0">
               <a:buNone/>
             </a:pPr>
             <a:r>
@@ -5681,7 +5426,7 @@
           <a:bodyPr wrap="square" lIns="0" tIns="0" rIns="0" bIns="0" rtlCol="0" anchor="ctr"/>
           <a:lstStyle/>
           <a:p>
-            <a:pPr algn="ctr" indent="0" marL="0">
+            <a:pPr marL="0" indent="0" algn="ctr">
               <a:buNone/>
             </a:pPr>
             <a:r>
@@ -5720,7 +5465,7 @@
           <a:bodyPr wrap="square" lIns="0" tIns="0" rIns="0" bIns="0" rtlCol="0" anchor="ctr"/>
           <a:lstStyle/>
           <a:p>
-            <a:pPr indent="0" marL="0">
+            <a:pPr marL="0" indent="0">
               <a:buNone/>
             </a:pPr>
             <a:r>
@@ -5759,7 +5504,7 @@
           <a:bodyPr wrap="square" lIns="0" tIns="0" rIns="0" bIns="0" rtlCol="0" anchor="ctr"/>
           <a:lstStyle/>
           <a:p>
-            <a:pPr indent="0" marL="0">
+            <a:pPr marL="0" indent="0">
               <a:buNone/>
             </a:pPr>
             <a:r>
@@ -5818,7 +5563,7 @@
           <a:bodyPr wrap="square" lIns="0" tIns="0" rIns="0" bIns="0" rtlCol="0" anchor="ctr"/>
           <a:lstStyle/>
           <a:p>
-            <a:pPr algn="ctr" indent="0" marL="0">
+            <a:pPr marL="0" indent="0" algn="ctr">
               <a:buNone/>
             </a:pPr>
             <a:r>
@@ -5857,7 +5602,7 @@
           <a:bodyPr wrap="square" lIns="0" tIns="0" rIns="0" bIns="0" rtlCol="0" anchor="ctr"/>
           <a:lstStyle/>
           <a:p>
-            <a:pPr indent="0" marL="0">
+            <a:pPr marL="0" indent="0">
               <a:buNone/>
             </a:pPr>
             <a:r>
@@ -5896,7 +5641,7 @@
           <a:bodyPr wrap="square" lIns="0" tIns="0" rIns="0" bIns="0" rtlCol="0" anchor="ctr"/>
           <a:lstStyle/>
           <a:p>
-            <a:pPr indent="0" marL="0">
+            <a:pPr marL="0" indent="0">
               <a:buNone/>
             </a:pPr>
             <a:r>
@@ -5955,7 +5700,7 @@
           <a:bodyPr wrap="square" lIns="0" tIns="0" rIns="0" bIns="0" rtlCol="0" anchor="ctr"/>
           <a:lstStyle/>
           <a:p>
-            <a:pPr algn="ctr" indent="0" marL="0">
+            <a:pPr marL="0" indent="0" algn="ctr">
               <a:buNone/>
             </a:pPr>
             <a:r>
@@ -5994,7 +5739,7 @@
           <a:bodyPr wrap="square" lIns="0" tIns="0" rIns="0" bIns="0" rtlCol="0" anchor="ctr"/>
           <a:lstStyle/>
           <a:p>
-            <a:pPr indent="0" marL="0">
+            <a:pPr marL="0" indent="0">
               <a:buNone/>
             </a:pPr>
             <a:r>
@@ -6033,7 +5778,7 @@
           <a:bodyPr wrap="square" lIns="0" tIns="0" rIns="0" bIns="0" rtlCol="0" anchor="ctr"/>
           <a:lstStyle/>
           <a:p>
-            <a:pPr indent="0" marL="0">
+            <a:pPr marL="0" indent="0">
               <a:buNone/>
             </a:pPr>
             <a:r>
@@ -6092,7 +5837,7 @@
           <a:bodyPr wrap="square" lIns="0" tIns="0" rIns="0" bIns="0" rtlCol="0" anchor="ctr"/>
           <a:lstStyle/>
           <a:p>
-            <a:pPr algn="ctr" indent="0" marL="0">
+            <a:pPr marL="0" indent="0" algn="ctr">
               <a:buNone/>
             </a:pPr>
             <a:r>
@@ -6131,7 +5876,7 @@
           <a:bodyPr wrap="square" lIns="0" tIns="0" rIns="0" bIns="0" rtlCol="0" anchor="ctr"/>
           <a:lstStyle/>
           <a:p>
-            <a:pPr indent="0" marL="0">
+            <a:pPr marL="0" indent="0">
               <a:buNone/>
             </a:pPr>
             <a:r>
@@ -6170,7 +5915,7 @@
           <a:bodyPr wrap="square" lIns="0" tIns="0" rIns="0" bIns="0" rtlCol="0" anchor="ctr"/>
           <a:lstStyle/>
           <a:p>
-            <a:pPr indent="0" marL="0">
+            <a:pPr marL="0" indent="0">
               <a:buNone/>
             </a:pPr>
             <a:r>
@@ -6197,7 +5942,7 @@
 </file>
 
 <file path=ppt/slides/slide13.xml><?xml version="1.0" encoding="utf-8"?>
-<p:sld xmlns:a="http://schemas.openxmlformats.org/drawingml/2006/main" xmlns:p="http://schemas.openxmlformats.org/presentationml/2006/main" xmlns:r="http://schemas.openxmlformats.org/officeDocument/2006/relationships">
+<p:sld xmlns:a="http://schemas.openxmlformats.org/drawingml/2006/main" xmlns:r="http://schemas.openxmlformats.org/officeDocument/2006/relationships" xmlns:p="http://schemas.openxmlformats.org/presentationml/2006/main">
   <p:cSld>
     <p:spTree>
       <p:nvGrpSpPr>
@@ -6205,7 +5950,14 @@
         <p:cNvGrpSpPr/>
         <p:nvPr/>
       </p:nvGrpSpPr>
-      <p:grpSpPr/>
+      <p:grpSpPr>
+        <a:xfrm>
+          <a:off x="0" y="0"/>
+          <a:ext cx="0" cy="0"/>
+          <a:chOff x="0" y="0"/>
+          <a:chExt cx="0" cy="0"/>
+        </a:xfrm>
+      </p:grpSpPr>
       <p:sp>
         <p:nvSpPr>
           <p:cNvPr id="2" name="TextBox 1"/>
@@ -6495,7 +6247,10 @@
         </p:spPr>
         <p:txBody>
           <a:bodyPr/>
-          <a:p/>
+          <a:lstStyle/>
+          <a:p>
+            <a:endParaRPr/>
+          </a:p>
         </p:txBody>
       </p:sp>
       <p:sp>
@@ -6519,7 +6274,7 @@
           <a:bodyPr wrap="square" lIns="0" tIns="0" rIns="0" bIns="0" rtlCol="0" anchor="ctr"/>
           <a:lstStyle/>
           <a:p>
-            <a:pPr algn="ctr" indent="0" marL="0">
+            <a:pPr marL="0" indent="0" algn="ctr">
               <a:buNone/>
             </a:pPr>
             <a:r>
@@ -6561,7 +6316,10 @@
         </p:spPr>
         <p:txBody>
           <a:bodyPr/>
-          <a:p/>
+          <a:lstStyle/>
+          <a:p>
+            <a:endParaRPr/>
+          </a:p>
         </p:txBody>
       </p:sp>
       <p:sp>
@@ -6590,17 +6348,6 @@
               <a:buChar char="•"/>
             </a:pPr>
             <a:endParaRPr lang="en-US" sz="1400" dirty="0"/>
-            <a:r>
-              <a:rPr lang="en-US" sz="1400" dirty="0">
-                <a:solidFill>
-                  <a:srgbClr val="333333"/>
-                </a:solidFill>
-                <a:latin typeface="Arial" pitchFamily="34" charset="0"/>
-                <a:ea typeface="Arial" pitchFamily="34" charset="-122"/>
-                <a:cs typeface="Arial" pitchFamily="34" charset="-120"/>
-              </a:rPr>
-              <a:t>93C46 / 93C56 자동 식별 및 순차 검사</a:t>
-            </a:r>
           </a:p>
           <a:p>
             <a:pPr marL="342900" indent="-342900">
@@ -6608,17 +6355,6 @@
               <a:buChar char="•"/>
             </a:pPr>
             <a:endParaRPr lang="en-US" sz="1400" dirty="0"/>
-            <a:r>
-              <a:rPr lang="en-US" sz="1400" dirty="0">
-                <a:solidFill>
-                  <a:srgbClr val="333333"/>
-                </a:solidFill>
-                <a:latin typeface="Arial" pitchFamily="34" charset="0"/>
-                <a:ea typeface="Arial" pitchFamily="34" charset="-122"/>
-                <a:cs typeface="Arial" pitchFamily="34" charset="-120"/>
-              </a:rPr>
-              <a:t>12개 EEPROM 자동 검사 및 0x00 초기화</a:t>
-            </a:r>
           </a:p>
           <a:p>
             <a:pPr marL="342900" indent="-342900">
@@ -6626,17 +6362,6 @@
               <a:buChar char="•"/>
             </a:pPr>
             <a:endParaRPr lang="en-US" sz="1400" dirty="0"/>
-            <a:r>
-              <a:rPr lang="en-US" sz="1400" dirty="0">
-                <a:solidFill>
-                  <a:srgbClr val="333333"/>
-                </a:solidFill>
-                <a:latin typeface="Arial" pitchFamily="34" charset="0"/>
-                <a:ea typeface="Arial" pitchFamily="34" charset="-122"/>
-                <a:cs typeface="Arial" pitchFamily="34" charset="-120"/>
-              </a:rPr>
-              <a:t>FreeRTOS 3개 태스크 (검사 + 감지 + 기본)</a:t>
-            </a:r>
           </a:p>
           <a:p>
             <a:pPr marL="342900" indent="-342900">
@@ -6644,17 +6369,6 @@
               <a:buChar char="•"/>
             </a:pPr>
             <a:endParaRPr lang="en-US" sz="1400" dirty="0"/>
-            <a:r>
-              <a:rPr lang="en-US" sz="1400" dirty="0">
-                <a:solidFill>
-                  <a:srgbClr val="333333"/>
-                </a:solidFill>
-                <a:latin typeface="Arial" pitchFamily="34" charset="0"/>
-                <a:ea typeface="Arial" pitchFamily="34" charset="-122"/>
-                <a:cs typeface="Arial" pitchFamily="34" charset="-120"/>
-              </a:rPr>
-              <a:t>감지 방식 개선: EE_Detect() 쓰기+읽기 검증 (0x00 칩 대응)  ← 수정</a:t>
-            </a:r>
           </a:p>
           <a:p>
             <a:pPr marL="342900" indent="-342900">
@@ -6662,17 +6376,6 @@
               <a:buChar char="•"/>
             </a:pPr>
             <a:endParaRPr lang="en-US" sz="1400" dirty="0"/>
-            <a:r>
-              <a:rPr lang="en-US" sz="1400" dirty="0">
-                <a:solidFill>
-                  <a:srgbClr val="333333"/>
-                </a:solidFill>
-                <a:latin typeface="Arial" pitchFamily="34" charset="0"/>
-                <a:ea typeface="Arial" pitchFamily="34" charset="-122"/>
-                <a:cs typeface="Arial" pitchFamily="34" charset="-120"/>
-              </a:rPr>
-              <a:t>0xAA/0x55 교번 기록으로 모든 비트 반전 능력 확인</a:t>
-            </a:r>
           </a:p>
           <a:p>
             <a:pPr marL="342900" indent="-342900">
@@ -6680,17 +6383,6 @@
               <a:buChar char="•"/>
             </a:pPr>
             <a:endParaRPr lang="en-US" sz="1400" dirty="0"/>
-            <a:r>
-              <a:rPr lang="en-US" sz="1400" dirty="0">
-                <a:solidFill>
-                  <a:srgbClr val="333333"/>
-                </a:solidFill>
-                <a:latin typeface="Arial" pitchFamily="34" charset="0"/>
-                <a:ea typeface="Arial" pitchFamily="34" charset="-122"/>
-                <a:cs typeface="Arial" pitchFamily="34" charset="-120"/>
-              </a:rPr>
-              <a:t>8가지 LED 쇼 연출 (등휘도 6색 순환)</a:t>
-            </a:r>
           </a:p>
           <a:p>
             <a:pPr marL="342900" indent="-342900">
@@ -6698,17 +6390,6 @@
               <a:buChar char="•"/>
             </a:pPr>
             <a:endParaRPr lang="en-US" sz="1400" dirty="0"/>
-            <a:r>
-              <a:rPr lang="en-US" sz="1400" dirty="0">
-                <a:solidFill>
-                  <a:srgbClr val="333333"/>
-                </a:solidFill>
-                <a:latin typeface="Arial" pitchFamily="34" charset="0"/>
-                <a:ea typeface="Arial" pitchFamily="34" charset="-122"/>
-                <a:cs typeface="Arial" pitchFamily="34" charset="-120"/>
-              </a:rPr>
-              <a:t>LED 밝기 자동 설정: 소등=0 / 청색=12 / 기타=4  ← 수정</a:t>
-            </a:r>
           </a:p>
           <a:p>
             <a:r>
@@ -6747,7 +6428,7 @@
 </file>
 
 <file path=ppt/slides/slide15.xml><?xml version="1.0" encoding="utf-8"?>
-<p:sld xmlns:a="http://schemas.openxmlformats.org/drawingml/2006/main" xmlns:p="http://schemas.openxmlformats.org/presentationml/2006/main" xmlns:r="http://schemas.openxmlformats.org/officeDocument/2006/relationships">
+<p:sld xmlns:a="http://schemas.openxmlformats.org/drawingml/2006/main" xmlns:r="http://schemas.openxmlformats.org/officeDocument/2006/relationships" xmlns:p="http://schemas.openxmlformats.org/presentationml/2006/main">
   <p:cSld>
     <p:spTree>
       <p:nvGrpSpPr>
@@ -6755,7 +6436,14 @@
         <p:cNvGrpSpPr/>
         <p:nvPr/>
       </p:nvGrpSpPr>
-      <p:grpSpPr/>
+      <p:grpSpPr>
+        <a:xfrm>
+          <a:off x="0" y="0"/>
+          <a:ext cx="0" cy="0"/>
+          <a:chOff x="0" y="0"/>
+          <a:chExt cx="0" cy="0"/>
+        </a:xfrm>
+      </p:grpSpPr>
       <p:sp>
         <p:nvSpPr>
           <p:cNvPr id="2" name="Rectangle 1"/>
@@ -6796,6 +6484,7 @@
           <a:lstStyle/>
           <a:p>
             <a:pPr algn="ctr"/>
+            <a:endParaRPr/>
           </a:p>
         </p:txBody>
       </p:sp>
@@ -6943,6 +6632,7 @@
           <a:lstStyle/>
           <a:p>
             <a:pPr algn="ctr"/>
+            <a:endParaRPr/>
           </a:p>
         </p:txBody>
       </p:sp>
@@ -7260,6 +6950,7 @@
           <a:lstStyle/>
           <a:p>
             <a:pPr algn="ctr"/>
+            <a:endParaRPr/>
           </a:p>
         </p:txBody>
       </p:sp>
@@ -7575,6 +7266,7 @@
           <a:lstStyle/>
           <a:p>
             <a:pPr algn="ctr"/>
+            <a:endParaRPr/>
           </a:p>
         </p:txBody>
       </p:sp>
@@ -7686,6 +7378,7 @@
           <a:lstStyle/>
           <a:p>
             <a:pPr algn="ctr"/>
+            <a:endParaRPr/>
           </a:p>
         </p:txBody>
       </p:sp>
@@ -7797,6 +7490,7 @@
           <a:lstStyle/>
           <a:p>
             <a:pPr algn="ctr"/>
+            <a:endParaRPr/>
           </a:p>
         </p:txBody>
       </p:sp>
@@ -7908,6 +7602,7 @@
           <a:lstStyle/>
           <a:p>
             <a:pPr algn="ctr"/>
+            <a:endParaRPr/>
           </a:p>
         </p:txBody>
       </p:sp>
@@ -7988,7 +7683,7 @@
 </file>
 
 <file path=ppt/slides/slide16.xml><?xml version="1.0" encoding="utf-8"?>
-<p:sld xmlns:a="http://schemas.openxmlformats.org/drawingml/2006/main" xmlns:p="http://schemas.openxmlformats.org/presentationml/2006/main" xmlns:r="http://schemas.openxmlformats.org/officeDocument/2006/relationships">
+<p:sld xmlns:a="http://schemas.openxmlformats.org/drawingml/2006/main" xmlns:r="http://schemas.openxmlformats.org/officeDocument/2006/relationships" xmlns:p="http://schemas.openxmlformats.org/presentationml/2006/main">
   <p:cSld>
     <p:spTree>
       <p:nvGrpSpPr>
@@ -7996,7 +7691,14 @@
         <p:cNvGrpSpPr/>
         <p:nvPr/>
       </p:nvGrpSpPr>
-      <p:grpSpPr/>
+      <p:grpSpPr>
+        <a:xfrm>
+          <a:off x="0" y="0"/>
+          <a:ext cx="0" cy="0"/>
+          <a:chOff x="0" y="0"/>
+          <a:chExt cx="0" cy="0"/>
+        </a:xfrm>
+      </p:grpSpPr>
       <p:sp>
         <p:nvSpPr>
           <p:cNvPr id="2" name="Rectangle 1"/>
@@ -8037,6 +7739,7 @@
           <a:lstStyle/>
           <a:p>
             <a:pPr algn="ctr"/>
+            <a:endParaRPr/>
           </a:p>
         </p:txBody>
       </p:sp>
@@ -8182,6 +7885,7 @@
           <a:lstStyle/>
           <a:p>
             <a:pPr algn="ctr"/>
+            <a:endParaRPr/>
           </a:p>
         </p:txBody>
       </p:sp>
@@ -8259,6 +7963,7 @@
           <a:lstStyle/>
           <a:p>
             <a:pPr algn="ctr"/>
+            <a:endParaRPr/>
           </a:p>
         </p:txBody>
       </p:sp>
@@ -8336,6 +8041,7 @@
           <a:lstStyle/>
           <a:p>
             <a:pPr algn="ctr"/>
+            <a:endParaRPr/>
           </a:p>
         </p:txBody>
       </p:sp>
@@ -8413,6 +8119,7 @@
           <a:lstStyle/>
           <a:p>
             <a:pPr algn="ctr"/>
+            <a:endParaRPr/>
           </a:p>
         </p:txBody>
       </p:sp>
@@ -8492,6 +8199,7 @@
           <a:lstStyle/>
           <a:p>
             <a:pPr algn="ctr"/>
+            <a:endParaRPr/>
           </a:p>
         </p:txBody>
       </p:sp>
@@ -8571,6 +8279,7 @@
           <a:lstStyle/>
           <a:p>
             <a:pPr algn="ctr"/>
+            <a:endParaRPr/>
           </a:p>
         </p:txBody>
       </p:sp>
@@ -8650,6 +8359,7 @@
           <a:lstStyle/>
           <a:p>
             <a:pPr algn="ctr"/>
+            <a:endParaRPr/>
           </a:p>
         </p:txBody>
       </p:sp>
@@ -8729,6 +8439,7 @@
           <a:lstStyle/>
           <a:p>
             <a:pPr algn="ctr"/>
+            <a:endParaRPr/>
           </a:p>
         </p:txBody>
       </p:sp>
@@ -8808,6 +8519,7 @@
           <a:lstStyle/>
           <a:p>
             <a:pPr algn="ctr"/>
+            <a:endParaRPr/>
           </a:p>
         </p:txBody>
       </p:sp>
@@ -8887,6 +8599,7 @@
           <a:lstStyle/>
           <a:p>
             <a:pPr algn="ctr"/>
+            <a:endParaRPr/>
           </a:p>
         </p:txBody>
       </p:sp>
@@ -8966,6 +8679,7 @@
           <a:lstStyle/>
           <a:p>
             <a:pPr algn="ctr"/>
+            <a:endParaRPr/>
           </a:p>
         </p:txBody>
       </p:sp>
@@ -9045,6 +8759,7 @@
           <a:lstStyle/>
           <a:p>
             <a:pPr algn="ctr"/>
+            <a:endParaRPr/>
           </a:p>
         </p:txBody>
       </p:sp>
@@ -9124,6 +8839,7 @@
           <a:lstStyle/>
           <a:p>
             <a:pPr algn="ctr"/>
+            <a:endParaRPr/>
           </a:p>
         </p:txBody>
       </p:sp>
@@ -9203,6 +8919,7 @@
           <a:lstStyle/>
           <a:p>
             <a:pPr algn="ctr"/>
+            <a:endParaRPr/>
           </a:p>
         </p:txBody>
       </p:sp>
@@ -9282,6 +8999,7 @@
           <a:lstStyle/>
           <a:p>
             <a:pPr algn="ctr"/>
+            <a:endParaRPr/>
           </a:p>
         </p:txBody>
       </p:sp>
@@ -9361,6 +9079,7 @@
           <a:lstStyle/>
           <a:p>
             <a:pPr algn="ctr"/>
+            <a:endParaRPr/>
           </a:p>
         </p:txBody>
       </p:sp>
@@ -9440,6 +9159,7 @@
           <a:lstStyle/>
           <a:p>
             <a:pPr algn="ctr"/>
+            <a:endParaRPr/>
           </a:p>
         </p:txBody>
       </p:sp>
@@ -9519,6 +9239,7 @@
           <a:lstStyle/>
           <a:p>
             <a:pPr algn="ctr"/>
+            <a:endParaRPr/>
           </a:p>
         </p:txBody>
       </p:sp>
@@ -9598,6 +9319,7 @@
           <a:lstStyle/>
           <a:p>
             <a:pPr algn="ctr"/>
+            <a:endParaRPr/>
           </a:p>
         </p:txBody>
       </p:sp>
@@ -9677,6 +9399,7 @@
           <a:lstStyle/>
           <a:p>
             <a:pPr algn="ctr"/>
+            <a:endParaRPr/>
           </a:p>
         </p:txBody>
       </p:sp>
@@ -9756,6 +9479,7 @@
           <a:lstStyle/>
           <a:p>
             <a:pPr algn="ctr"/>
+            <a:endParaRPr/>
           </a:p>
         </p:txBody>
       </p:sp>
@@ -9835,6 +9559,7 @@
           <a:lstStyle/>
           <a:p>
             <a:pPr algn="ctr"/>
+            <a:endParaRPr/>
           </a:p>
         </p:txBody>
       </p:sp>
@@ -9914,6 +9639,7 @@
           <a:lstStyle/>
           <a:p>
             <a:pPr algn="ctr"/>
+            <a:endParaRPr/>
           </a:p>
         </p:txBody>
       </p:sp>
@@ -9993,6 +9719,7 @@
           <a:lstStyle/>
           <a:p>
             <a:pPr algn="ctr"/>
+            <a:endParaRPr/>
           </a:p>
         </p:txBody>
       </p:sp>
@@ -10072,6 +9799,7 @@
           <a:lstStyle/>
           <a:p>
             <a:pPr algn="ctr"/>
+            <a:endParaRPr/>
           </a:p>
         </p:txBody>
       </p:sp>
@@ -10151,6 +9879,7 @@
           <a:lstStyle/>
           <a:p>
             <a:pPr algn="ctr"/>
+            <a:endParaRPr/>
           </a:p>
         </p:txBody>
       </p:sp>
@@ -10230,6 +9959,7 @@
           <a:lstStyle/>
           <a:p>
             <a:pPr algn="ctr"/>
+            <a:endParaRPr/>
           </a:p>
         </p:txBody>
       </p:sp>
@@ -10309,6 +10039,7 @@
           <a:lstStyle/>
           <a:p>
             <a:pPr algn="ctr"/>
+            <a:endParaRPr/>
           </a:p>
         </p:txBody>
       </p:sp>
@@ -10388,6 +10119,7 @@
           <a:lstStyle/>
           <a:p>
             <a:pPr algn="ctr"/>
+            <a:endParaRPr/>
           </a:p>
         </p:txBody>
       </p:sp>
@@ -10467,6 +10199,7 @@
           <a:lstStyle/>
           <a:p>
             <a:pPr algn="ctr"/>
+            <a:endParaRPr/>
           </a:p>
         </p:txBody>
       </p:sp>
@@ -10546,6 +10279,7 @@
           <a:lstStyle/>
           <a:p>
             <a:pPr algn="ctr"/>
+            <a:endParaRPr/>
           </a:p>
         </p:txBody>
       </p:sp>
@@ -10625,6 +10359,7 @@
           <a:lstStyle/>
           <a:p>
             <a:pPr algn="ctr"/>
+            <a:endParaRPr/>
           </a:p>
         </p:txBody>
       </p:sp>
@@ -10704,6 +10439,7 @@
           <a:lstStyle/>
           <a:p>
             <a:pPr algn="ctr"/>
+            <a:endParaRPr/>
           </a:p>
         </p:txBody>
       </p:sp>
@@ -10783,6 +10519,7 @@
           <a:lstStyle/>
           <a:p>
             <a:pPr algn="ctr"/>
+            <a:endParaRPr/>
           </a:p>
         </p:txBody>
       </p:sp>
@@ -10862,6 +10599,7 @@
           <a:lstStyle/>
           <a:p>
             <a:pPr algn="ctr"/>
+            <a:endParaRPr/>
           </a:p>
         </p:txBody>
       </p:sp>
@@ -10941,6 +10679,7 @@
           <a:lstStyle/>
           <a:p>
             <a:pPr algn="ctr"/>
+            <a:endParaRPr/>
           </a:p>
         </p:txBody>
       </p:sp>
@@ -11020,6 +10759,7 @@
           <a:lstStyle/>
           <a:p>
             <a:pPr algn="ctr"/>
+            <a:endParaRPr/>
           </a:p>
         </p:txBody>
       </p:sp>
@@ -11099,6 +10839,7 @@
           <a:lstStyle/>
           <a:p>
             <a:pPr algn="ctr"/>
+            <a:endParaRPr/>
           </a:p>
         </p:txBody>
       </p:sp>
@@ -11178,6 +10919,7 @@
           <a:lstStyle/>
           <a:p>
             <a:pPr algn="ctr"/>
+            <a:endParaRPr/>
           </a:p>
         </p:txBody>
       </p:sp>
@@ -11257,6 +10999,7 @@
           <a:lstStyle/>
           <a:p>
             <a:pPr algn="ctr"/>
+            <a:endParaRPr/>
           </a:p>
         </p:txBody>
       </p:sp>
@@ -11336,6 +11079,7 @@
           <a:lstStyle/>
           <a:p>
             <a:pPr algn="ctr"/>
+            <a:endParaRPr/>
           </a:p>
         </p:txBody>
       </p:sp>
@@ -11415,6 +11159,7 @@
           <a:lstStyle/>
           <a:p>
             <a:pPr algn="ctr"/>
+            <a:endParaRPr/>
           </a:p>
         </p:txBody>
       </p:sp>
@@ -11494,6 +11239,7 @@
           <a:lstStyle/>
           <a:p>
             <a:pPr algn="ctr"/>
+            <a:endParaRPr/>
           </a:p>
         </p:txBody>
       </p:sp>
@@ -11573,6 +11319,7 @@
           <a:lstStyle/>
           <a:p>
             <a:pPr algn="ctr"/>
+            <a:endParaRPr/>
           </a:p>
         </p:txBody>
       </p:sp>
@@ -11684,6 +11431,7 @@
           <a:lstStyle/>
           <a:p>
             <a:pPr algn="ctr"/>
+            <a:endParaRPr/>
           </a:p>
         </p:txBody>
       </p:sp>
@@ -11761,6 +11509,7 @@
           <a:lstStyle/>
           <a:p>
             <a:pPr algn="ctr"/>
+            <a:endParaRPr/>
           </a:p>
         </p:txBody>
       </p:sp>
@@ -11839,6 +11588,7 @@
           <a:lstStyle/>
           <a:p>
             <a:pPr algn="ctr"/>
+            <a:endParaRPr/>
           </a:p>
         </p:txBody>
       </p:sp>
@@ -11917,6 +11667,7 @@
           <a:lstStyle/>
           <a:p>
             <a:pPr algn="ctr"/>
+            <a:endParaRPr/>
           </a:p>
         </p:txBody>
       </p:sp>
@@ -11995,6 +11746,7 @@
           <a:lstStyle/>
           <a:p>
             <a:pPr algn="ctr"/>
+            <a:endParaRPr/>
           </a:p>
         </p:txBody>
       </p:sp>
@@ -12072,6 +11824,7 @@
           <a:lstStyle/>
           <a:p>
             <a:pPr algn="ctr"/>
+            <a:endParaRPr/>
           </a:p>
         </p:txBody>
       </p:sp>
@@ -12150,6 +11903,7 @@
           <a:lstStyle/>
           <a:p>
             <a:pPr algn="ctr"/>
+            <a:endParaRPr/>
           </a:p>
         </p:txBody>
       </p:sp>
@@ -12229,6 +11983,7 @@
           <a:lstStyle/>
           <a:p>
             <a:pPr algn="ctr"/>
+            <a:endParaRPr/>
           </a:p>
         </p:txBody>
       </p:sp>
@@ -12277,7 +12032,7 @@
 </file>
 
 <file path=ppt/slides/slide17.xml><?xml version="1.0" encoding="utf-8"?>
-<p:sld xmlns:a="http://schemas.openxmlformats.org/drawingml/2006/main" xmlns:p="http://schemas.openxmlformats.org/presentationml/2006/main" xmlns:r="http://schemas.openxmlformats.org/officeDocument/2006/relationships">
+<p:sld xmlns:a="http://schemas.openxmlformats.org/drawingml/2006/main" xmlns:r="http://schemas.openxmlformats.org/officeDocument/2006/relationships" xmlns:p="http://schemas.openxmlformats.org/presentationml/2006/main">
   <p:cSld>
     <p:spTree>
       <p:nvGrpSpPr>
@@ -12285,7 +12040,14 @@
         <p:cNvGrpSpPr/>
         <p:nvPr/>
       </p:nvGrpSpPr>
-      <p:grpSpPr/>
+      <p:grpSpPr>
+        <a:xfrm>
+          <a:off x="0" y="0"/>
+          <a:ext cx="0" cy="0"/>
+          <a:chOff x="0" y="0"/>
+          <a:chExt cx="0" cy="0"/>
+        </a:xfrm>
+      </p:grpSpPr>
       <p:sp>
         <p:nvSpPr>
           <p:cNvPr id="2" name="Rectangle 1"/>
@@ -12326,6 +12088,7 @@
           <a:lstStyle/>
           <a:p>
             <a:pPr algn="ctr"/>
+            <a:endParaRPr/>
           </a:p>
         </p:txBody>
       </p:sp>
@@ -12471,6 +12234,7 @@
           <a:lstStyle/>
           <a:p>
             <a:pPr algn="ctr"/>
+            <a:endParaRPr/>
           </a:p>
         </p:txBody>
       </p:sp>
@@ -12550,6 +12314,7 @@
           <a:lstStyle/>
           <a:p>
             <a:pPr algn="ctr"/>
+            <a:endParaRPr/>
           </a:p>
         </p:txBody>
       </p:sp>
@@ -12631,6 +12396,7 @@
           <a:lstStyle/>
           <a:p>
             <a:pPr algn="ctr"/>
+            <a:endParaRPr/>
           </a:p>
         </p:txBody>
       </p:sp>
@@ -12710,6 +12476,7 @@
           <a:lstStyle/>
           <a:p>
             <a:pPr algn="ctr"/>
+            <a:endParaRPr/>
           </a:p>
         </p:txBody>
       </p:sp>
@@ -12823,6 +12590,7 @@
           <a:lstStyle/>
           <a:p>
             <a:pPr algn="ctr"/>
+            <a:endParaRPr/>
           </a:p>
         </p:txBody>
       </p:sp>
@@ -12934,6 +12702,7 @@
           <a:lstStyle/>
           <a:p>
             <a:pPr algn="ctr"/>
+            <a:endParaRPr/>
           </a:p>
         </p:txBody>
       </p:sp>
@@ -13045,6 +12814,7 @@
           <a:lstStyle/>
           <a:p>
             <a:pPr algn="ctr"/>
+            <a:endParaRPr/>
           </a:p>
         </p:txBody>
       </p:sp>
@@ -13156,6 +12926,7 @@
           <a:lstStyle/>
           <a:p>
             <a:pPr algn="ctr"/>
+            <a:endParaRPr/>
           </a:p>
         </p:txBody>
       </p:sp>
@@ -13267,6 +13038,7 @@
           <a:lstStyle/>
           <a:p>
             <a:pPr algn="ctr"/>
+            <a:endParaRPr/>
           </a:p>
         </p:txBody>
       </p:sp>
@@ -13347,7 +13119,7 @@
 </file>
 
 <file path=ppt/slides/slide18.xml><?xml version="1.0" encoding="utf-8"?>
-<p:sld xmlns:a="http://schemas.openxmlformats.org/drawingml/2006/main" xmlns:p="http://schemas.openxmlformats.org/presentationml/2006/main" xmlns:r="http://schemas.openxmlformats.org/officeDocument/2006/relationships">
+<p:sld xmlns:a="http://schemas.openxmlformats.org/drawingml/2006/main" xmlns:r="http://schemas.openxmlformats.org/officeDocument/2006/relationships" xmlns:p="http://schemas.openxmlformats.org/presentationml/2006/main">
   <p:cSld>
     <p:spTree>
       <p:nvGrpSpPr>
@@ -13355,7 +13127,14 @@
         <p:cNvGrpSpPr/>
         <p:nvPr/>
       </p:nvGrpSpPr>
-      <p:grpSpPr/>
+      <p:grpSpPr>
+        <a:xfrm>
+          <a:off x="0" y="0"/>
+          <a:ext cx="0" cy="0"/>
+          <a:chOff x="0" y="0"/>
+          <a:chExt cx="0" cy="0"/>
+        </a:xfrm>
+      </p:grpSpPr>
       <p:sp>
         <p:nvSpPr>
           <p:cNvPr id="2" name="Rectangle 1"/>
@@ -13396,6 +13175,7 @@
           <a:lstStyle/>
           <a:p>
             <a:pPr algn="ctr"/>
+            <a:endParaRPr/>
           </a:p>
         </p:txBody>
       </p:sp>
@@ -13541,6 +13321,7 @@
           <a:lstStyle/>
           <a:p>
             <a:pPr algn="ctr"/>
+            <a:endParaRPr/>
           </a:p>
         </p:txBody>
       </p:sp>
@@ -13856,6 +13637,7 @@
           <a:lstStyle/>
           <a:p>
             <a:pPr algn="ctr"/>
+            <a:endParaRPr/>
           </a:p>
         </p:txBody>
       </p:sp>
@@ -14035,6 +13817,7 @@
           <a:lstStyle/>
           <a:p>
             <a:pPr algn="ctr"/>
+            <a:endParaRPr/>
           </a:p>
         </p:txBody>
       </p:sp>
@@ -14248,6 +14031,7 @@
           <a:lstStyle/>
           <a:p>
             <a:pPr algn="ctr"/>
+            <a:endParaRPr/>
           </a:p>
         </p:txBody>
       </p:sp>
@@ -14327,6 +14111,7 @@
           <a:lstStyle/>
           <a:p>
             <a:pPr algn="ctr"/>
+            <a:endParaRPr/>
           </a:p>
         </p:txBody>
       </p:sp>
@@ -14438,6 +14223,7 @@
           <a:lstStyle/>
           <a:p>
             <a:pPr algn="ctr"/>
+            <a:endParaRPr/>
           </a:p>
         </p:txBody>
       </p:sp>
@@ -14517,6 +14303,7 @@
           <a:lstStyle/>
           <a:p>
             <a:pPr algn="ctr"/>
+            <a:endParaRPr/>
           </a:p>
         </p:txBody>
       </p:sp>
@@ -14628,6 +14415,7 @@
           <a:lstStyle/>
           <a:p>
             <a:pPr algn="ctr"/>
+            <a:endParaRPr/>
           </a:p>
         </p:txBody>
       </p:sp>
@@ -14707,6 +14495,7 @@
           <a:lstStyle/>
           <a:p>
             <a:pPr algn="ctr"/>
+            <a:endParaRPr/>
           </a:p>
         </p:txBody>
       </p:sp>
@@ -14818,6 +14607,7 @@
           <a:lstStyle/>
           <a:p>
             <a:pPr algn="ctr"/>
+            <a:endParaRPr/>
           </a:p>
         </p:txBody>
       </p:sp>
@@ -14897,6 +14687,7 @@
           <a:lstStyle/>
           <a:p>
             <a:pPr algn="ctr"/>
+            <a:endParaRPr/>
           </a:p>
         </p:txBody>
       </p:sp>
@@ -14977,7 +14768,7 @@
 </file>
 
 <file path=ppt/slides/slide19.xml><?xml version="1.0" encoding="utf-8"?>
-<p:sld xmlns:a="http://schemas.openxmlformats.org/drawingml/2006/main" xmlns:p="http://schemas.openxmlformats.org/presentationml/2006/main" xmlns:r="http://schemas.openxmlformats.org/officeDocument/2006/relationships">
+<p:sld xmlns:a="http://schemas.openxmlformats.org/drawingml/2006/main" xmlns:r="http://schemas.openxmlformats.org/officeDocument/2006/relationships" xmlns:p="http://schemas.openxmlformats.org/presentationml/2006/main">
   <p:cSld>
     <p:spTree>
       <p:nvGrpSpPr>
@@ -14985,7 +14776,14 @@
         <p:cNvGrpSpPr/>
         <p:nvPr/>
       </p:nvGrpSpPr>
-      <p:grpSpPr/>
+      <p:grpSpPr>
+        <a:xfrm>
+          <a:off x="0" y="0"/>
+          <a:ext cx="0" cy="0"/>
+          <a:chOff x="0" y="0"/>
+          <a:chExt cx="0" cy="0"/>
+        </a:xfrm>
+      </p:grpSpPr>
       <p:sp>
         <p:nvSpPr>
           <p:cNvPr id="2" name="Rectangle 1"/>
@@ -15026,6 +14824,7 @@
           <a:lstStyle/>
           <a:p>
             <a:pPr algn="ctr"/>
+            <a:endParaRPr/>
           </a:p>
         </p:txBody>
       </p:sp>
@@ -15173,6 +14972,7 @@
           <a:lstStyle/>
           <a:p>
             <a:pPr algn="ctr"/>
+            <a:endParaRPr/>
           </a:p>
         </p:txBody>
       </p:sp>
@@ -15624,6 +15424,7 @@
           <a:lstStyle/>
           <a:p>
             <a:pPr algn="ctr"/>
+            <a:endParaRPr/>
           </a:p>
         </p:txBody>
       </p:sp>
@@ -15703,6 +15504,7 @@
           <a:lstStyle/>
           <a:p>
             <a:pPr algn="ctr"/>
+            <a:endParaRPr/>
           </a:p>
         </p:txBody>
       </p:sp>
@@ -15780,6 +15582,7 @@
           <a:lstStyle/>
           <a:p>
             <a:pPr algn="ctr"/>
+            <a:endParaRPr/>
           </a:p>
         </p:txBody>
       </p:sp>
@@ -15859,6 +15662,7 @@
           <a:lstStyle/>
           <a:p>
             <a:pPr algn="ctr"/>
+            <a:endParaRPr/>
           </a:p>
         </p:txBody>
       </p:sp>
@@ -15937,6 +15741,7 @@
           <a:lstStyle/>
           <a:p>
             <a:pPr algn="ctr"/>
+            <a:endParaRPr/>
           </a:p>
         </p:txBody>
       </p:sp>
@@ -16016,6 +15821,7 @@
           <a:lstStyle/>
           <a:p>
             <a:pPr algn="ctr"/>
+            <a:endParaRPr/>
           </a:p>
         </p:txBody>
       </p:sp>
@@ -16094,6 +15900,7 @@
           <a:lstStyle/>
           <a:p>
             <a:pPr algn="ctr"/>
+            <a:endParaRPr/>
           </a:p>
         </p:txBody>
       </p:sp>
@@ -16173,6 +15980,7 @@
           <a:lstStyle/>
           <a:p>
             <a:pPr algn="ctr"/>
+            <a:endParaRPr/>
           </a:p>
         </p:txBody>
       </p:sp>
@@ -16251,6 +16059,7 @@
           <a:lstStyle/>
           <a:p>
             <a:pPr algn="ctr"/>
+            <a:endParaRPr/>
           </a:p>
         </p:txBody>
       </p:sp>
@@ -16330,6 +16139,7 @@
           <a:lstStyle/>
           <a:p>
             <a:pPr algn="ctr"/>
+            <a:endParaRPr/>
           </a:p>
         </p:txBody>
       </p:sp>
@@ -16408,6 +16218,7 @@
           <a:lstStyle/>
           <a:p>
             <a:pPr algn="ctr"/>
+            <a:endParaRPr/>
           </a:p>
         </p:txBody>
       </p:sp>
@@ -16519,6 +16330,7 @@
           <a:lstStyle/>
           <a:p>
             <a:pPr algn="ctr"/>
+            <a:endParaRPr/>
           </a:p>
         </p:txBody>
       </p:sp>
@@ -16596,6 +16408,7 @@
           <a:lstStyle/>
           <a:p>
             <a:pPr algn="ctr"/>
+            <a:endParaRPr/>
           </a:p>
         </p:txBody>
       </p:sp>
@@ -16673,6 +16486,7 @@
           <a:lstStyle/>
           <a:p>
             <a:pPr algn="ctr"/>
+            <a:endParaRPr/>
           </a:p>
         </p:txBody>
       </p:sp>
@@ -16750,6 +16564,7 @@
           <a:lstStyle/>
           <a:p>
             <a:pPr algn="ctr"/>
+            <a:endParaRPr/>
           </a:p>
         </p:txBody>
       </p:sp>
@@ -16829,6 +16644,7 @@
           <a:lstStyle/>
           <a:p>
             <a:pPr algn="ctr"/>
+            <a:endParaRPr/>
           </a:p>
         </p:txBody>
       </p:sp>
@@ -16908,6 +16724,7 @@
           <a:lstStyle/>
           <a:p>
             <a:pPr algn="ctr"/>
+            <a:endParaRPr/>
           </a:p>
         </p:txBody>
       </p:sp>
@@ -16987,6 +16804,7 @@
           <a:lstStyle/>
           <a:p>
             <a:pPr algn="ctr"/>
+            <a:endParaRPr/>
           </a:p>
         </p:txBody>
       </p:sp>
@@ -17066,6 +16884,7 @@
           <a:lstStyle/>
           <a:p>
             <a:pPr algn="ctr"/>
+            <a:endParaRPr/>
           </a:p>
         </p:txBody>
       </p:sp>
@@ -17145,6 +16964,7 @@
           <a:lstStyle/>
           <a:p>
             <a:pPr algn="ctr"/>
+            <a:endParaRPr/>
           </a:p>
         </p:txBody>
       </p:sp>
@@ -17224,6 +17044,7 @@
           <a:lstStyle/>
           <a:p>
             <a:pPr algn="ctr"/>
+            <a:endParaRPr/>
           </a:p>
         </p:txBody>
       </p:sp>
@@ -17303,6 +17124,7 @@
           <a:lstStyle/>
           <a:p>
             <a:pPr algn="ctr"/>
+            <a:endParaRPr/>
           </a:p>
         </p:txBody>
       </p:sp>
@@ -17382,6 +17204,7 @@
           <a:lstStyle/>
           <a:p>
             <a:pPr algn="ctr"/>
+            <a:endParaRPr/>
           </a:p>
         </p:txBody>
       </p:sp>
@@ -17465,7 +17288,7 @@
           <a:bodyPr wrap="square" lIns="0" tIns="0" rIns="0" bIns="0" rtlCol="0" anchor="ctr"/>
           <a:lstStyle/>
           <a:p>
-            <a:pPr indent="0" marL="0">
+            <a:pPr marL="0" indent="0">
               <a:buNone/>
             </a:pPr>
             <a:r>
@@ -17552,7 +17375,7 @@
           <a:bodyPr wrap="square" lIns="0" tIns="0" rIns="0" bIns="0" rtlCol="0" anchor="ctr"/>
           <a:lstStyle/>
           <a:p>
-            <a:pPr algn="ctr" indent="0" marL="0">
+            <a:pPr marL="0" indent="0" algn="ctr">
               <a:buNone/>
             </a:pPr>
             <a:r>
@@ -17616,7 +17439,7 @@
           <a:bodyPr wrap="square" lIns="0" tIns="0" rIns="0" bIns="0" rtlCol="0" anchor="ctr"/>
           <a:lstStyle/>
           <a:p>
-            <a:pPr algn="ctr" indent="0" marL="0">
+            <a:pPr marL="0" indent="0" algn="ctr">
               <a:buNone/>
             </a:pPr>
             <a:r>
@@ -17633,7 +17456,7 @@
             <a:endParaRPr lang="en-US" sz="1000" dirty="0"/>
           </a:p>
           <a:p>
-            <a:pPr algn="ctr" indent="0" marL="0">
+            <a:pPr marL="0" indent="0" algn="ctr">
               <a:buNone/>
             </a:pPr>
             <a:r>
@@ -17697,7 +17520,7 @@
           <a:bodyPr wrap="square" lIns="0" tIns="0" rIns="0" bIns="0" rtlCol="0" anchor="ctr"/>
           <a:lstStyle/>
           <a:p>
-            <a:pPr algn="ctr" indent="0" marL="0">
+            <a:pPr marL="0" indent="0" algn="ctr">
               <a:buNone/>
             </a:pPr>
             <a:r>
@@ -17714,7 +17537,7 @@
             <a:endParaRPr lang="en-US" sz="900" dirty="0"/>
           </a:p>
           <a:p>
-            <a:pPr algn="ctr" indent="0" marL="0">
+            <a:pPr marL="0" indent="0" algn="ctr">
               <a:buNone/>
             </a:pPr>
             <a:r>
@@ -17778,7 +17601,7 @@
           <a:bodyPr wrap="square" lIns="0" tIns="0" rIns="0" bIns="0" rtlCol="0" anchor="ctr"/>
           <a:lstStyle/>
           <a:p>
-            <a:pPr algn="ctr" indent="0" marL="0">
+            <a:pPr marL="0" indent="0" algn="ctr">
               <a:buNone/>
             </a:pPr>
             <a:r>
@@ -17795,7 +17618,7 @@
             <a:endParaRPr lang="en-US" sz="900" dirty="0"/>
           </a:p>
           <a:p>
-            <a:pPr algn="ctr" indent="0" marL="0">
+            <a:pPr marL="0" indent="0" algn="ctr">
               <a:buNone/>
             </a:pPr>
             <a:r>
@@ -17859,7 +17682,7 @@
           <a:bodyPr wrap="square" lIns="0" tIns="0" rIns="0" bIns="0" rtlCol="0" anchor="ctr"/>
           <a:lstStyle/>
           <a:p>
-            <a:pPr algn="ctr" indent="0" marL="0">
+            <a:pPr marL="0" indent="0" algn="ctr">
               <a:buNone/>
             </a:pPr>
             <a:r>
@@ -17876,7 +17699,7 @@
             <a:endParaRPr lang="en-US" sz="900" dirty="0"/>
           </a:p>
           <a:p>
-            <a:pPr algn="ctr" indent="0" marL="0">
+            <a:pPr marL="0" indent="0" algn="ctr">
               <a:buNone/>
             </a:pPr>
             <a:r>
@@ -17940,7 +17763,7 @@
           <a:bodyPr wrap="square" lIns="0" tIns="0" rIns="0" bIns="0" rtlCol="0" anchor="ctr"/>
           <a:lstStyle/>
           <a:p>
-            <a:pPr algn="ctr" indent="0" marL="0">
+            <a:pPr marL="0" indent="0" algn="ctr">
               <a:buNone/>
             </a:pPr>
             <a:r>
@@ -18002,7 +17825,7 @@
           <a:bodyPr wrap="square" lIns="0" tIns="0" rIns="0" bIns="0" rtlCol="0" anchor="ctr"/>
           <a:lstStyle/>
           <a:p>
-            <a:pPr algn="ctr" indent="0" marL="0">
+            <a:pPr marL="0" indent="0" algn="ctr">
               <a:buNone/>
             </a:pPr>
             <a:r>
@@ -18066,7 +17889,7 @@
           <a:bodyPr wrap="square" lIns="0" tIns="0" rIns="0" bIns="0" rtlCol="0" anchor="ctr"/>
           <a:lstStyle/>
           <a:p>
-            <a:pPr algn="ctr" indent="0" marL="0">
+            <a:pPr marL="0" indent="0" algn="ctr">
               <a:buNone/>
             </a:pPr>
             <a:r>
@@ -18130,7 +17953,7 @@
           <a:bodyPr wrap="square" lIns="0" tIns="0" rIns="0" bIns="0" rtlCol="0" anchor="ctr"/>
           <a:lstStyle/>
           <a:p>
-            <a:pPr algn="ctr" indent="0" marL="0">
+            <a:pPr marL="0" indent="0" algn="ctr">
               <a:buNone/>
             </a:pPr>
             <a:r>
@@ -18147,7 +17970,7 @@
             <a:endParaRPr lang="en-US" sz="800" dirty="0"/>
           </a:p>
           <a:p>
-            <a:pPr algn="ctr" indent="0" marL="0">
+            <a:pPr marL="0" indent="0" algn="ctr">
               <a:buNone/>
             </a:pPr>
             <a:r>
@@ -18211,7 +18034,7 @@
           <a:bodyPr wrap="square" lIns="0" tIns="0" rIns="0" bIns="0" rtlCol="0" anchor="ctr"/>
           <a:lstStyle/>
           <a:p>
-            <a:pPr algn="ctr" indent="0" marL="0">
+            <a:pPr marL="0" indent="0" algn="ctr">
               <a:buNone/>
             </a:pPr>
             <a:r>
@@ -18228,7 +18051,7 @@
             <a:endParaRPr lang="en-US" sz="800" dirty="0"/>
           </a:p>
           <a:p>
-            <a:pPr algn="ctr" indent="0" marL="0">
+            <a:pPr marL="0" indent="0" algn="ctr">
               <a:buNone/>
             </a:pPr>
             <a:r>
@@ -18292,7 +18115,7 @@
           <a:bodyPr wrap="square" lIns="0" tIns="0" rIns="0" bIns="0" rtlCol="0" anchor="ctr"/>
           <a:lstStyle/>
           <a:p>
-            <a:pPr algn="ctr" indent="0" marL="0">
+            <a:pPr marL="0" indent="0" algn="ctr">
               <a:buNone/>
             </a:pPr>
             <a:r>
@@ -18309,7 +18132,7 @@
             <a:endParaRPr lang="en-US" sz="800" dirty="0"/>
           </a:p>
           <a:p>
-            <a:pPr algn="ctr" indent="0" marL="0">
+            <a:pPr marL="0" indent="0" algn="ctr">
               <a:buNone/>
             </a:pPr>
             <a:r>
@@ -18373,7 +18196,7 @@
           <a:bodyPr wrap="square" lIns="0" tIns="0" rIns="0" bIns="0" rtlCol="0" anchor="ctr"/>
           <a:lstStyle/>
           <a:p>
-            <a:pPr algn="ctr" indent="0" marL="0">
+            <a:pPr marL="0" indent="0" algn="ctr">
               <a:buNone/>
             </a:pPr>
             <a:r>
@@ -18390,7 +18213,7 @@
             <a:endParaRPr lang="en-US" sz="800" dirty="0"/>
           </a:p>
           <a:p>
-            <a:pPr algn="ctr" indent="0" marL="0">
+            <a:pPr marL="0" indent="0" algn="ctr">
               <a:buNone/>
             </a:pPr>
             <a:r>
@@ -18454,7 +18277,7 @@
           <a:bodyPr wrap="square" lIns="0" tIns="0" rIns="0" bIns="0" rtlCol="0" anchor="ctr"/>
           <a:lstStyle/>
           <a:p>
-            <a:pPr algn="ctr" indent="0" marL="0">
+            <a:pPr marL="0" indent="0" algn="ctr">
               <a:buNone/>
             </a:pPr>
             <a:r>
@@ -18471,7 +18294,7 @@
             <a:endParaRPr lang="en-US" sz="800" dirty="0"/>
           </a:p>
           <a:p>
-            <a:pPr algn="ctr" indent="0" marL="0">
+            <a:pPr marL="0" indent="0" algn="ctr">
               <a:buNone/>
             </a:pPr>
             <a:r>
@@ -18535,7 +18358,7 @@
           <a:bodyPr wrap="square" lIns="0" tIns="0" rIns="0" bIns="0" rtlCol="0" anchor="ctr"/>
           <a:lstStyle/>
           <a:p>
-            <a:pPr algn="ctr" indent="0" marL="0">
+            <a:pPr marL="0" indent="0" algn="ctr">
               <a:buNone/>
             </a:pPr>
             <a:r>
@@ -18552,7 +18375,7 @@
             <a:endParaRPr lang="en-US" sz="800" dirty="0"/>
           </a:p>
           <a:p>
-            <a:pPr algn="ctr" indent="0" marL="0">
+            <a:pPr marL="0" indent="0" algn="ctr">
               <a:buNone/>
             </a:pPr>
             <a:r>
@@ -18616,7 +18439,7 @@
           <a:bodyPr wrap="square" lIns="0" tIns="0" rIns="0" bIns="0" rtlCol="0" anchor="ctr"/>
           <a:lstStyle/>
           <a:p>
-            <a:pPr algn="ctr" indent="0" marL="0">
+            <a:pPr marL="0" indent="0" algn="ctr">
               <a:buNone/>
             </a:pPr>
             <a:r>
@@ -18633,7 +18456,7 @@
             <a:endParaRPr lang="en-US" sz="800" dirty="0"/>
           </a:p>
           <a:p>
-            <a:pPr algn="ctr" indent="0" marL="0">
+            <a:pPr marL="0" indent="0" algn="ctr">
               <a:buNone/>
             </a:pPr>
             <a:r>
@@ -18697,7 +18520,7 @@
           <a:bodyPr wrap="square" lIns="0" tIns="0" rIns="0" bIns="0" rtlCol="0" anchor="ctr"/>
           <a:lstStyle/>
           <a:p>
-            <a:pPr algn="ctr" indent="0" marL="0">
+            <a:pPr marL="0" indent="0" algn="ctr">
               <a:buNone/>
             </a:pPr>
             <a:r>
@@ -18714,7 +18537,7 @@
             <a:endParaRPr lang="en-US" sz="800" dirty="0"/>
           </a:p>
           <a:p>
-            <a:pPr algn="ctr" indent="0" marL="0">
+            <a:pPr marL="0" indent="0" algn="ctr">
               <a:buNone/>
             </a:pPr>
             <a:r>
@@ -18778,7 +18601,7 @@
           <a:bodyPr wrap="square" lIns="0" tIns="0" rIns="0" bIns="0" rtlCol="0" anchor="ctr"/>
           <a:lstStyle/>
           <a:p>
-            <a:pPr algn="ctr" indent="0" marL="0">
+            <a:pPr marL="0" indent="0" algn="ctr">
               <a:buNone/>
             </a:pPr>
             <a:r>
@@ -18795,7 +18618,7 @@
             <a:endParaRPr lang="en-US" sz="800" dirty="0"/>
           </a:p>
           <a:p>
-            <a:pPr algn="ctr" indent="0" marL="0">
+            <a:pPr marL="0" indent="0" algn="ctr">
               <a:buNone/>
             </a:pPr>
             <a:r>
@@ -18859,7 +18682,7 @@
           <a:bodyPr wrap="square" lIns="0" tIns="0" rIns="0" bIns="0" rtlCol="0" anchor="ctr"/>
           <a:lstStyle/>
           <a:p>
-            <a:pPr algn="ctr" indent="0" marL="0">
+            <a:pPr marL="0" indent="0" algn="ctr">
               <a:buNone/>
             </a:pPr>
             <a:r>
@@ -18876,7 +18699,7 @@
             <a:endParaRPr lang="en-US" sz="800" dirty="0"/>
           </a:p>
           <a:p>
-            <a:pPr algn="ctr" indent="0" marL="0">
+            <a:pPr marL="0" indent="0" algn="ctr">
               <a:buNone/>
             </a:pPr>
             <a:r>
@@ -18940,7 +18763,7 @@
           <a:bodyPr wrap="square" lIns="0" tIns="0" rIns="0" bIns="0" rtlCol="0" anchor="ctr"/>
           <a:lstStyle/>
           <a:p>
-            <a:pPr algn="ctr" indent="0" marL="0">
+            <a:pPr marL="0" indent="0" algn="ctr">
               <a:buNone/>
             </a:pPr>
             <a:r>
@@ -18957,7 +18780,7 @@
             <a:endParaRPr lang="en-US" sz="800" dirty="0"/>
           </a:p>
           <a:p>
-            <a:pPr algn="ctr" indent="0" marL="0">
+            <a:pPr marL="0" indent="0" algn="ctr">
               <a:buNone/>
             </a:pPr>
             <a:r>
@@ -19021,7 +18844,7 @@
           <a:bodyPr wrap="square" lIns="0" tIns="0" rIns="0" bIns="0" rtlCol="0" anchor="ctr"/>
           <a:lstStyle/>
           <a:p>
-            <a:pPr algn="ctr" indent="0" marL="0">
+            <a:pPr marL="0" indent="0" algn="ctr">
               <a:buNone/>
             </a:pPr>
             <a:r>
@@ -19038,7 +18861,7 @@
             <a:endParaRPr lang="en-US" sz="800" dirty="0"/>
           </a:p>
           <a:p>
-            <a:pPr algn="ctr" indent="0" marL="0">
+            <a:pPr marL="0" indent="0" algn="ctr">
               <a:buNone/>
             </a:pPr>
             <a:r>
@@ -19077,7 +18900,7 @@
           <a:bodyPr wrap="square" lIns="0" tIns="0" rIns="0" bIns="0" rtlCol="0" anchor="ctr"/>
           <a:lstStyle/>
           <a:p>
-            <a:pPr algn="ctr" indent="0" marL="0">
+            <a:pPr marL="0" indent="0" algn="ctr">
               <a:buNone/>
             </a:pPr>
             <a:r>
@@ -19104,7 +18927,7 @@
 </file>
 
 <file path=ppt/slides/slide20.xml><?xml version="1.0" encoding="utf-8"?>
-<p:sld xmlns:a="http://schemas.openxmlformats.org/drawingml/2006/main" xmlns:p="http://schemas.openxmlformats.org/presentationml/2006/main" xmlns:r="http://schemas.openxmlformats.org/officeDocument/2006/relationships">
+<p:sld xmlns:a="http://schemas.openxmlformats.org/drawingml/2006/main" xmlns:r="http://schemas.openxmlformats.org/officeDocument/2006/relationships" xmlns:p="http://schemas.openxmlformats.org/presentationml/2006/main">
   <p:cSld>
     <p:spTree>
       <p:nvGrpSpPr>
@@ -19112,7 +18935,14 @@
         <p:cNvGrpSpPr/>
         <p:nvPr/>
       </p:nvGrpSpPr>
-      <p:grpSpPr/>
+      <p:grpSpPr>
+        <a:xfrm>
+          <a:off x="0" y="0"/>
+          <a:ext cx="0" cy="0"/>
+          <a:chOff x="0" y="0"/>
+          <a:chExt cx="0" cy="0"/>
+        </a:xfrm>
+      </p:grpSpPr>
       <p:sp>
         <p:nvSpPr>
           <p:cNvPr id="2" name="Rectangle 1"/>
@@ -19153,6 +18983,7 @@
           <a:lstStyle/>
           <a:p>
             <a:pPr algn="ctr"/>
+            <a:endParaRPr/>
           </a:p>
         </p:txBody>
       </p:sp>
@@ -19264,6 +19095,7 @@
           <a:lstStyle/>
           <a:p>
             <a:pPr algn="ctr"/>
+            <a:endParaRPr/>
           </a:p>
         </p:txBody>
       </p:sp>
@@ -19341,6 +19173,7 @@
           <a:lstStyle/>
           <a:p>
             <a:pPr algn="ctr"/>
+            <a:endParaRPr/>
           </a:p>
         </p:txBody>
       </p:sp>
@@ -19420,6 +19253,7 @@
           <a:lstStyle/>
           <a:p>
             <a:pPr algn="ctr"/>
+            <a:endParaRPr/>
           </a:p>
         </p:txBody>
       </p:sp>
@@ -19498,6 +19332,7 @@
           <a:lstStyle/>
           <a:p>
             <a:pPr algn="ctr"/>
+            <a:endParaRPr/>
           </a:p>
         </p:txBody>
       </p:sp>
@@ -19577,6 +19412,7 @@
           <a:lstStyle/>
           <a:p>
             <a:pPr algn="ctr"/>
+            <a:endParaRPr/>
           </a:p>
         </p:txBody>
       </p:sp>
@@ -19655,6 +19491,7 @@
           <a:lstStyle/>
           <a:p>
             <a:pPr algn="ctr"/>
+            <a:endParaRPr/>
           </a:p>
         </p:txBody>
       </p:sp>
@@ -19734,6 +19571,7 @@
           <a:lstStyle/>
           <a:p>
             <a:pPr algn="ctr"/>
+            <a:endParaRPr/>
           </a:p>
         </p:txBody>
       </p:sp>
@@ -19812,6 +19650,7 @@
           <a:lstStyle/>
           <a:p>
             <a:pPr algn="ctr"/>
+            <a:endParaRPr/>
           </a:p>
         </p:txBody>
       </p:sp>
@@ -19891,6 +19730,7 @@
           <a:lstStyle/>
           <a:p>
             <a:pPr algn="ctr"/>
+            <a:endParaRPr/>
           </a:p>
         </p:txBody>
       </p:sp>
@@ -19969,6 +19809,7 @@
           <a:lstStyle/>
           <a:p>
             <a:pPr algn="ctr"/>
+            <a:endParaRPr/>
           </a:p>
         </p:txBody>
       </p:sp>
@@ -20048,6 +19889,7 @@
           <a:lstStyle/>
           <a:p>
             <a:pPr algn="ctr"/>
+            <a:endParaRPr/>
           </a:p>
         </p:txBody>
       </p:sp>
@@ -20125,6 +19967,7 @@
           <a:lstStyle/>
           <a:p>
             <a:pPr algn="ctr"/>
+            <a:endParaRPr/>
           </a:p>
         </p:txBody>
       </p:sp>
@@ -20204,6 +20047,7 @@
           <a:lstStyle/>
           <a:p>
             <a:pPr algn="ctr"/>
+            <a:endParaRPr/>
           </a:p>
         </p:txBody>
       </p:sp>
@@ -20281,6 +20125,7 @@
           <a:lstStyle/>
           <a:p>
             <a:pPr algn="ctr"/>
+            <a:endParaRPr/>
           </a:p>
         </p:txBody>
       </p:sp>
@@ -20358,6 +20203,7 @@
           <a:lstStyle/>
           <a:p>
             <a:pPr algn="ctr"/>
+            <a:endParaRPr/>
           </a:p>
         </p:txBody>
       </p:sp>
@@ -20435,6 +20281,7 @@
           <a:lstStyle/>
           <a:p>
             <a:pPr algn="ctr"/>
+            <a:endParaRPr/>
           </a:p>
         </p:txBody>
       </p:sp>
@@ -20512,6 +20359,7 @@
           <a:lstStyle/>
           <a:p>
             <a:pPr algn="ctr"/>
+            <a:endParaRPr/>
           </a:p>
         </p:txBody>
       </p:sp>
@@ -20589,6 +20437,7 @@
           <a:lstStyle/>
           <a:p>
             <a:pPr algn="ctr"/>
+            <a:endParaRPr/>
           </a:p>
         </p:txBody>
       </p:sp>
@@ -20666,6 +20515,7 @@
           <a:lstStyle/>
           <a:p>
             <a:pPr algn="ctr"/>
+            <a:endParaRPr/>
           </a:p>
         </p:txBody>
       </p:sp>
@@ -20743,6 +20593,7 @@
           <a:lstStyle/>
           <a:p>
             <a:pPr algn="ctr"/>
+            <a:endParaRPr/>
           </a:p>
         </p:txBody>
       </p:sp>
@@ -20820,6 +20671,7 @@
           <a:lstStyle/>
           <a:p>
             <a:pPr algn="ctr"/>
+            <a:endParaRPr/>
           </a:p>
         </p:txBody>
       </p:sp>
@@ -20897,6 +20749,7 @@
           <a:lstStyle/>
           <a:p>
             <a:pPr algn="ctr"/>
+            <a:endParaRPr/>
           </a:p>
         </p:txBody>
       </p:sp>
@@ -20976,6 +20829,7 @@
           <a:lstStyle/>
           <a:p>
             <a:pPr algn="ctr"/>
+            <a:endParaRPr/>
           </a:p>
         </p:txBody>
       </p:sp>
@@ -21257,6 +21111,7 @@
           <a:lstStyle/>
           <a:p>
             <a:pPr algn="ctr"/>
+            <a:endParaRPr/>
           </a:p>
         </p:txBody>
       </p:sp>
@@ -21334,6 +21189,7 @@
           <a:lstStyle/>
           <a:p>
             <a:pPr algn="ctr"/>
+            <a:endParaRPr/>
           </a:p>
         </p:txBody>
       </p:sp>
@@ -21417,7 +21273,7 @@
           <a:bodyPr wrap="square" lIns="0" tIns="0" rIns="0" bIns="0" rtlCol="0" anchor="ctr"/>
           <a:lstStyle/>
           <a:p>
-            <a:pPr indent="0" marL="0">
+            <a:pPr marL="0" indent="0">
               <a:buNone/>
             </a:pPr>
             <a:r>
@@ -21499,7 +21355,7 @@
           <a:bodyPr wrap="square" lIns="0" tIns="0" rIns="0" bIns="0" rtlCol="0" anchor="ctr"/>
           <a:lstStyle/>
           <a:p>
-            <a:pPr indent="0" marL="0">
+            <a:pPr marL="0" indent="0">
               <a:buNone/>
             </a:pPr>
             <a:r>
@@ -21538,7 +21394,7 @@
           <a:bodyPr wrap="square" lIns="0" tIns="0" rIns="0" bIns="0" rtlCol="0" anchor="ctr"/>
           <a:lstStyle/>
           <a:p>
-            <a:pPr indent="0" marL="0">
+            <a:pPr marL="0" indent="0">
               <a:buNone/>
             </a:pPr>
             <a:r>
@@ -21555,7 +21411,7 @@
             <a:endParaRPr lang="en-US" sz="1100" dirty="0"/>
           </a:p>
           <a:p>
-            <a:pPr indent="0" marL="0">
+            <a:pPr marL="0" indent="0">
               <a:buNone/>
             </a:pPr>
             <a:r>
@@ -21614,7 +21470,7 @@
           <a:bodyPr wrap="square" lIns="0" tIns="0" rIns="0" bIns="0" rtlCol="0" anchor="ctr"/>
           <a:lstStyle/>
           <a:p>
-            <a:pPr indent="0" marL="0">
+            <a:pPr marL="0" indent="0">
               <a:buNone/>
             </a:pPr>
             <a:r>
@@ -21653,7 +21509,7 @@
           <a:bodyPr wrap="square" lIns="0" tIns="0" rIns="0" bIns="0" rtlCol="0" anchor="ctr"/>
           <a:lstStyle/>
           <a:p>
-            <a:pPr indent="0" marL="0">
+            <a:pPr marL="0" indent="0">
               <a:buNone/>
             </a:pPr>
             <a:r>
@@ -21670,7 +21526,7 @@
             <a:endParaRPr lang="en-US" sz="1100" dirty="0"/>
           </a:p>
           <a:p>
-            <a:pPr indent="0" marL="0">
+            <a:pPr marL="0" indent="0">
               <a:buNone/>
             </a:pPr>
             <a:r>
@@ -21729,7 +21585,7 @@
           <a:bodyPr wrap="square" lIns="0" tIns="0" rIns="0" bIns="0" rtlCol="0" anchor="ctr"/>
           <a:lstStyle/>
           <a:p>
-            <a:pPr indent="0" marL="0">
+            <a:pPr marL="0" indent="0">
               <a:buNone/>
             </a:pPr>
             <a:r>
@@ -21768,7 +21624,7 @@
           <a:bodyPr wrap="square" lIns="0" tIns="0" rIns="0" bIns="0" rtlCol="0" anchor="ctr"/>
           <a:lstStyle/>
           <a:p>
-            <a:pPr indent="0" marL="0">
+            <a:pPr marL="0" indent="0">
               <a:buNone/>
             </a:pPr>
             <a:r>
@@ -21785,7 +21641,7 @@
             <a:endParaRPr lang="en-US" sz="1100" dirty="0"/>
           </a:p>
           <a:p>
-            <a:pPr indent="0" marL="0">
+            <a:pPr marL="0" indent="0">
               <a:buNone/>
             </a:pPr>
             <a:r>
@@ -21844,7 +21700,7 @@
           <a:bodyPr wrap="square" lIns="0" tIns="0" rIns="0" bIns="0" rtlCol="0" anchor="ctr"/>
           <a:lstStyle/>
           <a:p>
-            <a:pPr indent="0" marL="0">
+            <a:pPr marL="0" indent="0">
               <a:buNone/>
             </a:pPr>
             <a:r>
@@ -21883,7 +21739,7 @@
           <a:bodyPr wrap="square" lIns="0" tIns="0" rIns="0" bIns="0" rtlCol="0" anchor="ctr"/>
           <a:lstStyle/>
           <a:p>
-            <a:pPr indent="0" marL="0">
+            <a:pPr marL="0" indent="0">
               <a:buNone/>
             </a:pPr>
             <a:r>
@@ -21900,7 +21756,7 @@
             <a:endParaRPr lang="en-US" sz="1100" dirty="0"/>
           </a:p>
           <a:p>
-            <a:pPr indent="0" marL="0">
+            <a:pPr marL="0" indent="0">
               <a:buNone/>
             </a:pPr>
             <a:r>
@@ -21959,7 +21815,7 @@
           <a:bodyPr wrap="square" lIns="0" tIns="0" rIns="0" bIns="0" rtlCol="0" anchor="ctr"/>
           <a:lstStyle/>
           <a:p>
-            <a:pPr indent="0" marL="0">
+            <a:pPr marL="0" indent="0">
               <a:buNone/>
             </a:pPr>
             <a:r>
@@ -21998,7 +21854,7 @@
           <a:bodyPr wrap="square" lIns="0" tIns="0" rIns="0" bIns="0" rtlCol="0" anchor="ctr"/>
           <a:lstStyle/>
           <a:p>
-            <a:pPr indent="0" marL="0">
+            <a:pPr marL="0" indent="0">
               <a:buNone/>
             </a:pPr>
             <a:r>
@@ -22015,7 +21871,7 @@
             <a:endParaRPr lang="en-US" sz="1100" dirty="0"/>
           </a:p>
           <a:p>
-            <a:pPr indent="0" marL="0">
+            <a:pPr marL="0" indent="0">
               <a:buNone/>
             </a:pPr>
             <a:r>
@@ -22079,7 +21935,7 @@
           <a:bodyPr wrap="square" lIns="0" tIns="0" rIns="0" bIns="0" rtlCol="0" anchor="ctr"/>
           <a:lstStyle/>
           <a:p>
-            <a:pPr indent="0" marL="0">
+            <a:pPr marL="0" indent="0">
               <a:buNone/>
             </a:pPr>
             <a:r>
@@ -22161,7 +22017,7 @@
           <a:bodyPr wrap="square" lIns="0" tIns="0" rIns="0" bIns="0" rtlCol="0" anchor="ctr"/>
           <a:lstStyle/>
           <a:p>
-            <a:pPr indent="0" marL="0">
+            <a:pPr marL="0" indent="0">
               <a:buNone/>
             </a:pPr>
             <a:r>
@@ -22200,7 +22056,7 @@
           <a:bodyPr wrap="square" lIns="0" tIns="0" rIns="0" bIns="0" rtlCol="0" anchor="ctr"/>
           <a:lstStyle/>
           <a:p>
-            <a:pPr indent="0" marL="0">
+            <a:pPr marL="0" indent="0">
               <a:buNone/>
             </a:pPr>
             <a:r>
@@ -22239,7 +22095,7 @@
           <a:bodyPr wrap="square" lIns="0" tIns="0" rIns="0" bIns="0" rtlCol="0" anchor="ctr"/>
           <a:lstStyle/>
           <a:p>
-            <a:pPr indent="0" marL="0">
+            <a:pPr marL="0" indent="0">
               <a:buNone/>
             </a:pPr>
             <a:r>
@@ -22278,7 +22134,7 @@
           <a:bodyPr wrap="square" lIns="0" tIns="0" rIns="0" bIns="0" rtlCol="0" anchor="ctr"/>
           <a:lstStyle/>
           <a:p>
-            <a:pPr indent="0" marL="0">
+            <a:pPr marL="0" indent="0">
               <a:buNone/>
             </a:pPr>
             <a:r>
@@ -22342,7 +22198,7 @@
           <a:bodyPr wrap="square" lIns="0" tIns="0" rIns="0" bIns="0" rtlCol="0" anchor="ctr"/>
           <a:lstStyle/>
           <a:p>
-            <a:pPr indent="0" marL="0">
+            <a:pPr marL="0" indent="0">
               <a:buNone/>
             </a:pPr>
             <a:r>
@@ -22381,7 +22237,7 @@
           <a:bodyPr wrap="square" lIns="0" tIns="0" rIns="0" bIns="0" rtlCol="0" anchor="ctr"/>
           <a:lstStyle/>
           <a:p>
-            <a:pPr indent="0" marL="0">
+            <a:pPr marL="0" indent="0">
               <a:buNone/>
             </a:pPr>
             <a:r>
@@ -22420,7 +22276,7 @@
           <a:bodyPr wrap="square" lIns="0" tIns="0" rIns="0" bIns="0" rtlCol="0" anchor="ctr"/>
           <a:lstStyle/>
           <a:p>
-            <a:pPr indent="0" marL="0">
+            <a:pPr marL="0" indent="0">
               <a:buNone/>
             </a:pPr>
             <a:r>
@@ -22459,7 +22315,7 @@
           <a:bodyPr wrap="square" lIns="0" tIns="0" rIns="0" bIns="0" rtlCol="0" anchor="ctr"/>
           <a:lstStyle/>
           <a:p>
-            <a:pPr indent="0" marL="0">
+            <a:pPr marL="0" indent="0">
               <a:buNone/>
             </a:pPr>
             <a:r>
@@ -22476,7 +22332,7 @@
             <a:endParaRPr lang="en-US" sz="1000" dirty="0"/>
           </a:p>
           <a:p>
-            <a:pPr indent="0" marL="0">
+            <a:pPr marL="0" indent="0">
               <a:buNone/>
             </a:pPr>
             <a:r>
@@ -22540,7 +22396,7 @@
           <a:bodyPr wrap="square" lIns="0" tIns="0" rIns="0" bIns="0" rtlCol="0" anchor="ctr"/>
           <a:lstStyle/>
           <a:p>
-            <a:pPr indent="0" marL="0">
+            <a:pPr marL="0" indent="0">
               <a:buNone/>
             </a:pPr>
             <a:r>
@@ -22579,7 +22435,7 @@
           <a:bodyPr wrap="square" lIns="0" tIns="0" rIns="0" bIns="0" rtlCol="0" anchor="ctr"/>
           <a:lstStyle/>
           <a:p>
-            <a:pPr indent="0" marL="0">
+            <a:pPr marL="0" indent="0">
               <a:buNone/>
             </a:pPr>
             <a:r>
@@ -22618,7 +22474,7 @@
           <a:bodyPr wrap="square" lIns="0" tIns="0" rIns="0" bIns="0" rtlCol="0" anchor="ctr"/>
           <a:lstStyle/>
           <a:p>
-            <a:pPr indent="0" marL="0">
+            <a:pPr marL="0" indent="0">
               <a:buNone/>
             </a:pPr>
             <a:r>
@@ -22657,7 +22513,7 @@
           <a:bodyPr wrap="square" lIns="0" tIns="0" rIns="0" bIns="0" rtlCol="0" anchor="ctr"/>
           <a:lstStyle/>
           <a:p>
-            <a:pPr indent="0" marL="0">
+            <a:pPr marL="0" indent="0">
               <a:buNone/>
             </a:pPr>
             <a:r>
@@ -22674,7 +22530,7 @@
             <a:endParaRPr lang="en-US" sz="1000" dirty="0"/>
           </a:p>
           <a:p>
-            <a:pPr indent="0" marL="0">
+            <a:pPr marL="0" indent="0">
               <a:buNone/>
             </a:pPr>
             <a:r>
@@ -22738,7 +22594,7 @@
           <a:bodyPr wrap="square" lIns="0" tIns="0" rIns="0" bIns="0" rtlCol="0" anchor="ctr"/>
           <a:lstStyle/>
           <a:p>
-            <a:pPr indent="0" marL="0">
+            <a:pPr marL="0" indent="0">
               <a:buNone/>
             </a:pPr>
             <a:r>
@@ -22777,7 +22633,7 @@
           <a:bodyPr wrap="square" lIns="0" tIns="0" rIns="0" bIns="0" rtlCol="0" anchor="ctr"/>
           <a:lstStyle/>
           <a:p>
-            <a:pPr indent="0" marL="0">
+            <a:pPr marL="0" indent="0">
               <a:buNone/>
             </a:pPr>
             <a:r>
@@ -22816,7 +22672,7 @@
           <a:bodyPr wrap="square" lIns="0" tIns="0" rIns="0" bIns="0" rtlCol="0" anchor="ctr"/>
           <a:lstStyle/>
           <a:p>
-            <a:pPr indent="0" marL="0">
+            <a:pPr marL="0" indent="0">
               <a:buNone/>
             </a:pPr>
             <a:r>
@@ -22855,7 +22711,7 @@
           <a:bodyPr wrap="square" lIns="0" tIns="0" rIns="0" bIns="0" rtlCol="0" anchor="ctr"/>
           <a:lstStyle/>
           <a:p>
-            <a:pPr indent="0" marL="0">
+            <a:pPr marL="0" indent="0">
               <a:buNone/>
             </a:pPr>
             <a:r>
@@ -22872,7 +22728,7 @@
             <a:endParaRPr lang="en-US" sz="1000" dirty="0"/>
           </a:p>
           <a:p>
-            <a:pPr indent="0" marL="0">
+            <a:pPr marL="0" indent="0">
               <a:buNone/>
             </a:pPr>
             <a:r>
@@ -22931,7 +22787,7 @@
           <a:bodyPr wrap="square" lIns="0" tIns="0" rIns="0" bIns="0" rtlCol="0" anchor="ctr"/>
           <a:lstStyle/>
           <a:p>
-            <a:pPr indent="0" marL="0">
+            <a:pPr marL="0" indent="0">
               <a:buNone/>
             </a:pPr>
             <a:r>
@@ -22970,7 +22826,7 @@
           <a:bodyPr wrap="square" lIns="0" tIns="0" rIns="0" bIns="0" rtlCol="0" anchor="ctr"/>
           <a:lstStyle/>
           <a:p>
-            <a:pPr indent="0" marL="0">
+            <a:pPr marL="0" indent="0">
               <a:buNone/>
             </a:pPr>
             <a:r>
@@ -22984,9 +22840,6 @@
               </a:rPr>
               <a:t>g_board_present </a:t>
             </a:r>
-            <a:pPr indent="0" marL="0">
-              <a:buNone/>
-            </a:pPr>
             <a:r>
               <a:rPr lang="en-US" sz="1100" dirty="0">
                 <a:solidFill>
@@ -23001,7 +22854,7 @@
             <a:endParaRPr lang="en-US" sz="1100" dirty="0"/>
           </a:p>
           <a:p>
-            <a:pPr indent="0" marL="0">
+            <a:pPr marL="0" indent="0">
               <a:buNone/>
             </a:pPr>
             <a:r>
@@ -23015,9 +22868,6 @@
               </a:rPr>
               <a:t>g_detected[12]  </a:t>
             </a:r>
-            <a:pPr indent="0" marL="0">
-              <a:buNone/>
-            </a:pPr>
             <a:r>
               <a:rPr lang="en-US" sz="1100" dirty="0">
                 <a:solidFill>
@@ -23032,7 +22882,7 @@
             <a:endParaRPr lang="en-US" sz="1100" dirty="0"/>
           </a:p>
           <a:p>
-            <a:pPr indent="0" marL="0">
+            <a:pPr marL="0" indent="0">
               <a:buNone/>
             </a:pPr>
             <a:r>
@@ -23046,9 +22896,6 @@
               </a:rPr>
               <a:t>g_detect_enable </a:t>
             </a:r>
-            <a:pPr indent="0" marL="0">
-              <a:buNone/>
-            </a:pPr>
             <a:r>
               <a:rPr lang="en-US" sz="1100" dirty="0">
                 <a:solidFill>
@@ -23110,7 +22957,7 @@
           <a:bodyPr wrap="square" lIns="0" tIns="0" rIns="0" bIns="0" rtlCol="0" anchor="ctr"/>
           <a:lstStyle/>
           <a:p>
-            <a:pPr indent="0" marL="0">
+            <a:pPr marL="0" indent="0">
               <a:buNone/>
             </a:pPr>
             <a:r>
@@ -23192,7 +23039,7 @@
           <a:bodyPr wrap="square" lIns="0" tIns="0" rIns="0" bIns="0" rtlCol="0" anchor="ctr"/>
           <a:lstStyle/>
           <a:p>
-            <a:pPr algn="ctr" indent="0" marL="0">
+            <a:pPr marL="0" indent="0" algn="ctr">
               <a:buNone/>
             </a:pPr>
             <a:r>
@@ -23231,7 +23078,7 @@
           <a:bodyPr wrap="square" lIns="0" tIns="0" rIns="0" bIns="0" rtlCol="0" anchor="ctr"/>
           <a:lstStyle/>
           <a:p>
-            <a:pPr indent="0" marL="0">
+            <a:pPr marL="0" indent="0">
               <a:buNone/>
             </a:pPr>
             <a:r>
@@ -23270,7 +23117,7 @@
           <a:bodyPr wrap="square" lIns="0" tIns="0" rIns="0" bIns="0" rtlCol="0" anchor="ctr"/>
           <a:lstStyle/>
           <a:p>
-            <a:pPr indent="0" marL="0">
+            <a:pPr marL="0" indent="0">
               <a:buNone/>
             </a:pPr>
             <a:r>
@@ -23287,7 +23134,7 @@
             <a:endParaRPr lang="en-US" sz="1000" dirty="0"/>
           </a:p>
           <a:p>
-            <a:pPr indent="0" marL="0">
+            <a:pPr marL="0" indent="0">
               <a:buNone/>
             </a:pPr>
             <a:r>
@@ -23369,7 +23216,7 @@
           <a:bodyPr wrap="square" lIns="0" tIns="0" rIns="0" bIns="0" rtlCol="0" anchor="ctr"/>
           <a:lstStyle/>
           <a:p>
-            <a:pPr algn="ctr" indent="0" marL="0">
+            <a:pPr marL="0" indent="0" algn="ctr">
               <a:buNone/>
             </a:pPr>
             <a:r>
@@ -23408,7 +23255,7 @@
           <a:bodyPr wrap="square" lIns="0" tIns="0" rIns="0" bIns="0" rtlCol="0" anchor="ctr"/>
           <a:lstStyle/>
           <a:p>
-            <a:pPr indent="0" marL="0">
+            <a:pPr marL="0" indent="0">
               <a:buNone/>
             </a:pPr>
             <a:r>
@@ -23447,7 +23294,7 @@
           <a:bodyPr wrap="square" lIns="0" tIns="0" rIns="0" bIns="0" rtlCol="0" anchor="ctr"/>
           <a:lstStyle/>
           <a:p>
-            <a:pPr indent="0" marL="0">
+            <a:pPr marL="0" indent="0">
               <a:buNone/>
             </a:pPr>
             <a:r>
@@ -23464,7 +23311,7 @@
             <a:endParaRPr lang="en-US" sz="1000" dirty="0"/>
           </a:p>
           <a:p>
-            <a:pPr indent="0" marL="0">
+            <a:pPr marL="0" indent="0">
               <a:buNone/>
             </a:pPr>
             <a:r>
@@ -23546,7 +23393,7 @@
           <a:bodyPr wrap="square" lIns="0" tIns="0" rIns="0" bIns="0" rtlCol="0" anchor="ctr"/>
           <a:lstStyle/>
           <a:p>
-            <a:pPr algn="ctr" indent="0" marL="0">
+            <a:pPr marL="0" indent="0" algn="ctr">
               <a:buNone/>
             </a:pPr>
             <a:r>
@@ -23585,7 +23432,7 @@
           <a:bodyPr wrap="square" lIns="0" tIns="0" rIns="0" bIns="0" rtlCol="0" anchor="ctr"/>
           <a:lstStyle/>
           <a:p>
-            <a:pPr indent="0" marL="0">
+            <a:pPr marL="0" indent="0">
               <a:buNone/>
             </a:pPr>
             <a:r>
@@ -23624,7 +23471,7 @@
           <a:bodyPr wrap="square" lIns="0" tIns="0" rIns="0" bIns="0" rtlCol="0" anchor="ctr"/>
           <a:lstStyle/>
           <a:p>
-            <a:pPr indent="0" marL="0">
+            <a:pPr marL="0" indent="0">
               <a:buNone/>
             </a:pPr>
             <a:r>
@@ -23641,7 +23488,7 @@
             <a:endParaRPr lang="en-US" sz="1000" dirty="0"/>
           </a:p>
           <a:p>
-            <a:pPr indent="0" marL="0">
+            <a:pPr marL="0" indent="0">
               <a:buNone/>
             </a:pPr>
             <a:r>
@@ -23723,7 +23570,7 @@
           <a:bodyPr wrap="square" lIns="0" tIns="0" rIns="0" bIns="0" rtlCol="0" anchor="ctr"/>
           <a:lstStyle/>
           <a:p>
-            <a:pPr algn="ctr" indent="0" marL="0">
+            <a:pPr marL="0" indent="0" algn="ctr">
               <a:buNone/>
             </a:pPr>
             <a:r>
@@ -23762,7 +23609,7 @@
           <a:bodyPr wrap="square" lIns="0" tIns="0" rIns="0" bIns="0" rtlCol="0" anchor="ctr"/>
           <a:lstStyle/>
           <a:p>
-            <a:pPr indent="0" marL="0">
+            <a:pPr marL="0" indent="0">
               <a:buNone/>
             </a:pPr>
             <a:r>
@@ -23801,7 +23648,7 @@
           <a:bodyPr wrap="square" lIns="0" tIns="0" rIns="0" bIns="0" rtlCol="0" anchor="ctr"/>
           <a:lstStyle/>
           <a:p>
-            <a:pPr indent="0" marL="0">
+            <a:pPr marL="0" indent="0">
               <a:buNone/>
             </a:pPr>
             <a:r>
@@ -23818,7 +23665,7 @@
             <a:endParaRPr lang="en-US" sz="1000" dirty="0"/>
           </a:p>
           <a:p>
-            <a:pPr indent="0" marL="0">
+            <a:pPr marL="0" indent="0">
               <a:buNone/>
             </a:pPr>
             <a:r>
@@ -23900,7 +23747,7 @@
           <a:bodyPr wrap="square" lIns="0" tIns="0" rIns="0" bIns="0" rtlCol="0" anchor="ctr"/>
           <a:lstStyle/>
           <a:p>
-            <a:pPr algn="ctr" indent="0" marL="0">
+            <a:pPr marL="0" indent="0" algn="ctr">
               <a:buNone/>
             </a:pPr>
             <a:r>
@@ -23939,7 +23786,7 @@
           <a:bodyPr wrap="square" lIns="0" tIns="0" rIns="0" bIns="0" rtlCol="0" anchor="ctr"/>
           <a:lstStyle/>
           <a:p>
-            <a:pPr indent="0" marL="0">
+            <a:pPr marL="0" indent="0">
               <a:buNone/>
             </a:pPr>
             <a:r>
@@ -23978,7 +23825,7 @@
           <a:bodyPr wrap="square" lIns="0" tIns="0" rIns="0" bIns="0" rtlCol="0" anchor="ctr"/>
           <a:lstStyle/>
           <a:p>
-            <a:pPr indent="0" marL="0">
+            <a:pPr marL="0" indent="0">
               <a:buNone/>
             </a:pPr>
             <a:r>
@@ -23995,7 +23842,7 @@
             <a:endParaRPr lang="en-US" sz="1000" dirty="0"/>
           </a:p>
           <a:p>
-            <a:pPr indent="0" marL="0">
+            <a:pPr marL="0" indent="0">
               <a:buNone/>
             </a:pPr>
             <a:r>
@@ -24034,7 +23881,7 @@
           <a:bodyPr wrap="square" lIns="0" tIns="0" rIns="0" bIns="0" rtlCol="0" anchor="ctr"/>
           <a:lstStyle/>
           <a:p>
-            <a:pPr algn="ctr" indent="0" marL="0">
+            <a:pPr marL="0" indent="0" algn="ctr">
               <a:buNone/>
             </a:pPr>
             <a:r>
@@ -24098,7 +23945,7 @@
           <a:bodyPr wrap="square" lIns="0" tIns="0" rIns="0" bIns="0" rtlCol="0" anchor="ctr"/>
           <a:lstStyle/>
           <a:p>
-            <a:pPr indent="0" marL="0">
+            <a:pPr marL="0" indent="0">
               <a:buNone/>
             </a:pPr>
             <a:r>
@@ -24180,7 +24027,7 @@
           <a:bodyPr wrap="square" lIns="0" tIns="0" rIns="0" bIns="0" rtlCol="0" anchor="ctr"/>
           <a:lstStyle/>
           <a:p>
-            <a:pPr algn="ctr" indent="0" marL="0">
+            <a:pPr marL="0" indent="0" algn="ctr">
               <a:buNone/>
             </a:pPr>
             <a:r>
@@ -24219,7 +24066,7 @@
           <a:bodyPr wrap="square" lIns="0" tIns="0" rIns="0" bIns="0" rtlCol="0" anchor="ctr"/>
           <a:lstStyle/>
           <a:p>
-            <a:pPr indent="0" marL="0">
+            <a:pPr marL="0" indent="0">
               <a:buNone/>
             </a:pPr>
             <a:r>
@@ -24258,7 +24105,7 @@
           <a:bodyPr wrap="square" lIns="0" tIns="0" rIns="0" bIns="0" rtlCol="0" anchor="ctr"/>
           <a:lstStyle/>
           <a:p>
-            <a:pPr indent="0" marL="0">
+            <a:pPr marL="0" indent="0">
               <a:buNone/>
             </a:pPr>
             <a:r>
@@ -24317,7 +24164,7 @@
           <a:bodyPr wrap="square" lIns="0" tIns="0" rIns="0" bIns="0" rtlCol="0" anchor="ctr"/>
           <a:lstStyle/>
           <a:p>
-            <a:pPr algn="ctr" indent="0" marL="0">
+            <a:pPr marL="0" indent="0" algn="ctr">
               <a:buNone/>
             </a:pPr>
             <a:r>
@@ -24356,7 +24203,7 @@
           <a:bodyPr wrap="square" lIns="0" tIns="0" rIns="0" bIns="0" rtlCol="0" anchor="ctr"/>
           <a:lstStyle/>
           <a:p>
-            <a:pPr indent="0" marL="0">
+            <a:pPr marL="0" indent="0">
               <a:buNone/>
             </a:pPr>
             <a:r>
@@ -24395,7 +24242,7 @@
           <a:bodyPr wrap="square" lIns="0" tIns="0" rIns="0" bIns="0" rtlCol="0" anchor="ctr"/>
           <a:lstStyle/>
           <a:p>
-            <a:pPr indent="0" marL="0">
+            <a:pPr marL="0" indent="0">
               <a:buNone/>
             </a:pPr>
             <a:r>
@@ -24454,7 +24301,7 @@
           <a:bodyPr wrap="square" lIns="0" tIns="0" rIns="0" bIns="0" rtlCol="0" anchor="ctr"/>
           <a:lstStyle/>
           <a:p>
-            <a:pPr algn="ctr" indent="0" marL="0">
+            <a:pPr marL="0" indent="0" algn="ctr">
               <a:buNone/>
             </a:pPr>
             <a:r>
@@ -24493,7 +24340,7 @@
           <a:bodyPr wrap="square" lIns="0" tIns="0" rIns="0" bIns="0" rtlCol="0" anchor="ctr"/>
           <a:lstStyle/>
           <a:p>
-            <a:pPr indent="0" marL="0">
+            <a:pPr marL="0" indent="0">
               <a:buNone/>
             </a:pPr>
             <a:r>
@@ -24532,7 +24379,7 @@
           <a:bodyPr wrap="square" lIns="0" tIns="0" rIns="0" bIns="0" rtlCol="0" anchor="ctr"/>
           <a:lstStyle/>
           <a:p>
-            <a:pPr indent="0" marL="0">
+            <a:pPr marL="0" indent="0">
               <a:buNone/>
             </a:pPr>
             <a:r>
@@ -24591,7 +24438,7 @@
           <a:bodyPr wrap="square" lIns="0" tIns="0" rIns="0" bIns="0" rtlCol="0" anchor="ctr"/>
           <a:lstStyle/>
           <a:p>
-            <a:pPr algn="ctr" indent="0" marL="0">
+            <a:pPr marL="0" indent="0" algn="ctr">
               <a:buNone/>
             </a:pPr>
             <a:r>
@@ -24630,7 +24477,7 @@
           <a:bodyPr wrap="square" lIns="0" tIns="0" rIns="0" bIns="0" rtlCol="0" anchor="ctr"/>
           <a:lstStyle/>
           <a:p>
-            <a:pPr indent="0" marL="0">
+            <a:pPr marL="0" indent="0">
               <a:buNone/>
             </a:pPr>
             <a:r>
@@ -24669,7 +24516,7 @@
           <a:bodyPr wrap="square" lIns="0" tIns="0" rIns="0" bIns="0" rtlCol="0" anchor="ctr"/>
           <a:lstStyle/>
           <a:p>
-            <a:pPr indent="0" marL="0">
+            <a:pPr marL="0" indent="0">
               <a:buNone/>
             </a:pPr>
             <a:r>
@@ -24728,7 +24575,7 @@
           <a:bodyPr wrap="square" lIns="0" tIns="0" rIns="0" bIns="0" rtlCol="0" anchor="ctr"/>
           <a:lstStyle/>
           <a:p>
-            <a:pPr algn="ctr" indent="0" marL="0">
+            <a:pPr marL="0" indent="0" algn="ctr">
               <a:buNone/>
             </a:pPr>
             <a:r>
@@ -24767,7 +24614,7 @@
           <a:bodyPr wrap="square" lIns="0" tIns="0" rIns="0" bIns="0" rtlCol="0" anchor="ctr"/>
           <a:lstStyle/>
           <a:p>
-            <a:pPr indent="0" marL="0">
+            <a:pPr marL="0" indent="0">
               <a:buNone/>
             </a:pPr>
             <a:r>
@@ -24806,7 +24653,7 @@
           <a:bodyPr wrap="square" lIns="0" tIns="0" rIns="0" bIns="0" rtlCol="0" anchor="ctr"/>
           <a:lstStyle/>
           <a:p>
-            <a:pPr indent="0" marL="0">
+            <a:pPr marL="0" indent="0">
               <a:buNone/>
             </a:pPr>
             <a:r>
@@ -24865,7 +24712,7 @@
           <a:bodyPr wrap="square" lIns="0" tIns="0" rIns="0" bIns="0" rtlCol="0" anchor="ctr"/>
           <a:lstStyle/>
           <a:p>
-            <a:pPr algn="ctr" indent="0" marL="0">
+            <a:pPr marL="0" indent="0" algn="ctr">
               <a:buNone/>
             </a:pPr>
             <a:r>
@@ -24904,7 +24751,7 @@
           <a:bodyPr wrap="square" lIns="0" tIns="0" rIns="0" bIns="0" rtlCol="0" anchor="ctr"/>
           <a:lstStyle/>
           <a:p>
-            <a:pPr indent="0" marL="0">
+            <a:pPr marL="0" indent="0">
               <a:buNone/>
             </a:pPr>
             <a:r>
@@ -24943,7 +24790,7 @@
           <a:bodyPr wrap="square" lIns="0" tIns="0" rIns="0" bIns="0" rtlCol="0" anchor="ctr"/>
           <a:lstStyle/>
           <a:p>
-            <a:pPr indent="0" marL="0">
+            <a:pPr marL="0" indent="0">
               <a:buNone/>
             </a:pPr>
             <a:r>
@@ -25002,7 +24849,7 @@
           <a:bodyPr wrap="square" lIns="0" tIns="0" rIns="0" bIns="0" rtlCol="0" anchor="ctr"/>
           <a:lstStyle/>
           <a:p>
-            <a:pPr algn="ctr" indent="0" marL="0">
+            <a:pPr marL="0" indent="0" algn="ctr">
               <a:buNone/>
             </a:pPr>
             <a:r>
@@ -25041,7 +24888,7 @@
           <a:bodyPr wrap="square" lIns="0" tIns="0" rIns="0" bIns="0" rtlCol="0" anchor="ctr"/>
           <a:lstStyle/>
           <a:p>
-            <a:pPr indent="0" marL="0">
+            <a:pPr marL="0" indent="0">
               <a:buNone/>
             </a:pPr>
             <a:r>
@@ -25080,7 +24927,7 @@
           <a:bodyPr wrap="square" lIns="0" tIns="0" rIns="0" bIns="0" rtlCol="0" anchor="ctr"/>
           <a:lstStyle/>
           <a:p>
-            <a:pPr indent="0" marL="0">
+            <a:pPr marL="0" indent="0">
               <a:buNone/>
             </a:pPr>
             <a:r>
@@ -25139,7 +24986,7 @@
           <a:bodyPr wrap="square" lIns="0" tIns="0" rIns="0" bIns="0" rtlCol="0" anchor="ctr"/>
           <a:lstStyle/>
           <a:p>
-            <a:pPr algn="ctr" indent="0" marL="0">
+            <a:pPr marL="0" indent="0" algn="ctr">
               <a:buNone/>
             </a:pPr>
             <a:r>
@@ -25178,7 +25025,7 @@
           <a:bodyPr wrap="square" lIns="0" tIns="0" rIns="0" bIns="0" rtlCol="0" anchor="ctr"/>
           <a:lstStyle/>
           <a:p>
-            <a:pPr indent="0" marL="0">
+            <a:pPr marL="0" indent="0">
               <a:buNone/>
             </a:pPr>
             <a:r>
@@ -25217,7 +25064,7 @@
           <a:bodyPr wrap="square" lIns="0" tIns="0" rIns="0" bIns="0" rtlCol="0" anchor="ctr"/>
           <a:lstStyle/>
           <a:p>
-            <a:pPr indent="0" marL="0">
+            <a:pPr marL="0" indent="0">
               <a:buNone/>
             </a:pPr>
             <a:r>
@@ -25256,7 +25103,7 @@
           <a:bodyPr wrap="square" lIns="0" tIns="0" rIns="0" bIns="0" rtlCol="0" anchor="ctr"/>
           <a:lstStyle/>
           <a:p>
-            <a:pPr algn="ctr" indent="0" marL="0">
+            <a:pPr marL="0" indent="0" algn="ctr">
               <a:buNone/>
             </a:pPr>
             <a:r>
@@ -25320,7 +25167,7 @@
           <a:bodyPr wrap="square" lIns="0" tIns="0" rIns="0" bIns="0" rtlCol="0" anchor="ctr"/>
           <a:lstStyle/>
           <a:p>
-            <a:pPr indent="0" marL="0">
+            <a:pPr marL="0" indent="0">
               <a:buNone/>
             </a:pPr>
             <a:r>
@@ -25402,7 +25249,7 @@
           <a:bodyPr wrap="square" lIns="0" tIns="0" rIns="0" bIns="0" rtlCol="0" anchor="ctr"/>
           <a:lstStyle/>
           <a:p>
-            <a:pPr indent="0" marL="0">
+            <a:pPr marL="0" indent="0">
               <a:buNone/>
             </a:pPr>
             <a:r>
@@ -25461,7 +25308,7 @@
           <a:bodyPr wrap="square" lIns="0" tIns="0" rIns="0" bIns="0" rtlCol="0" anchor="ctr"/>
           <a:lstStyle/>
           <a:p>
-            <a:pPr indent="0" marL="0">
+            <a:pPr marL="0" indent="0">
               <a:buNone/>
             </a:pPr>
             <a:r>
@@ -25500,7 +25347,7 @@
           <a:bodyPr wrap="square" lIns="0" tIns="0" rIns="0" bIns="0" rtlCol="0" anchor="ctr"/>
           <a:lstStyle/>
           <a:p>
-            <a:pPr algn="ctr" indent="0" marL="0">
+            <a:pPr marL="0" indent="0" algn="ctr">
               <a:buNone/>
             </a:pPr>
             <a:r>
@@ -25539,7 +25386,7 @@
           <a:bodyPr wrap="square" lIns="0" tIns="0" rIns="0" bIns="0" rtlCol="0" anchor="ctr"/>
           <a:lstStyle/>
           <a:p>
-            <a:pPr algn="ctr" indent="0" marL="0">
+            <a:pPr marL="0" indent="0" algn="ctr">
               <a:buNone/>
             </a:pPr>
             <a:r>
@@ -25598,7 +25445,7 @@
           <a:bodyPr wrap="square" lIns="0" tIns="0" rIns="0" bIns="0" rtlCol="0" anchor="ctr"/>
           <a:lstStyle/>
           <a:p>
-            <a:pPr indent="0" marL="0">
+            <a:pPr marL="0" indent="0">
               <a:buNone/>
             </a:pPr>
             <a:r>
@@ -25637,7 +25484,7 @@
           <a:bodyPr wrap="square" lIns="0" tIns="0" rIns="0" bIns="0" rtlCol="0" anchor="ctr"/>
           <a:lstStyle/>
           <a:p>
-            <a:pPr algn="ctr" indent="0" marL="0">
+            <a:pPr marL="0" indent="0" algn="ctr">
               <a:buNone/>
             </a:pPr>
             <a:r>
@@ -25676,7 +25523,7 @@
           <a:bodyPr wrap="square" lIns="0" tIns="0" rIns="0" bIns="0" rtlCol="0" anchor="ctr"/>
           <a:lstStyle/>
           <a:p>
-            <a:pPr algn="ctr" indent="0" marL="0">
+            <a:pPr marL="0" indent="0" algn="ctr">
               <a:buNone/>
             </a:pPr>
             <a:r>
@@ -25735,7 +25582,7 @@
           <a:bodyPr wrap="square" lIns="0" tIns="0" rIns="0" bIns="0" rtlCol="0" anchor="ctr"/>
           <a:lstStyle/>
           <a:p>
-            <a:pPr indent="0" marL="0">
+            <a:pPr marL="0" indent="0">
               <a:buNone/>
             </a:pPr>
             <a:r>
@@ -25774,7 +25621,7 @@
           <a:bodyPr wrap="square" lIns="0" tIns="0" rIns="0" bIns="0" rtlCol="0" anchor="ctr"/>
           <a:lstStyle/>
           <a:p>
-            <a:pPr algn="ctr" indent="0" marL="0">
+            <a:pPr marL="0" indent="0" algn="ctr">
               <a:buNone/>
             </a:pPr>
             <a:r>
@@ -25813,7 +25660,7 @@
           <a:bodyPr wrap="square" lIns="0" tIns="0" rIns="0" bIns="0" rtlCol="0" anchor="ctr"/>
           <a:lstStyle/>
           <a:p>
-            <a:pPr algn="ctr" indent="0" marL="0">
+            <a:pPr marL="0" indent="0" algn="ctr">
               <a:buNone/>
             </a:pPr>
             <a:r>
@@ -25872,7 +25719,7 @@
           <a:bodyPr wrap="square" lIns="0" tIns="0" rIns="0" bIns="0" rtlCol="0" anchor="ctr"/>
           <a:lstStyle/>
           <a:p>
-            <a:pPr indent="0" marL="0">
+            <a:pPr marL="0" indent="0">
               <a:buNone/>
             </a:pPr>
             <a:r>
@@ -25911,7 +25758,7 @@
           <a:bodyPr wrap="square" lIns="0" tIns="0" rIns="0" bIns="0" rtlCol="0" anchor="ctr"/>
           <a:lstStyle/>
           <a:p>
-            <a:pPr algn="ctr" indent="0" marL="0">
+            <a:pPr marL="0" indent="0" algn="ctr">
               <a:buNone/>
             </a:pPr>
             <a:r>
@@ -25950,7 +25797,7 @@
           <a:bodyPr wrap="square" lIns="0" tIns="0" rIns="0" bIns="0" rtlCol="0" anchor="ctr"/>
           <a:lstStyle/>
           <a:p>
-            <a:pPr algn="ctr" indent="0" marL="0">
+            <a:pPr marL="0" indent="0" algn="ctr">
               <a:buNone/>
             </a:pPr>
             <a:r>
@@ -26009,7 +25856,7 @@
           <a:bodyPr wrap="square" lIns="0" tIns="0" rIns="0" bIns="0" rtlCol="0" anchor="ctr"/>
           <a:lstStyle/>
           <a:p>
-            <a:pPr indent="0" marL="0">
+            <a:pPr marL="0" indent="0">
               <a:buNone/>
             </a:pPr>
             <a:r>
@@ -26048,7 +25895,7 @@
           <a:bodyPr wrap="square" lIns="0" tIns="0" rIns="0" bIns="0" rtlCol="0" anchor="ctr"/>
           <a:lstStyle/>
           <a:p>
-            <a:pPr algn="ctr" indent="0" marL="0">
+            <a:pPr marL="0" indent="0" algn="ctr">
               <a:buNone/>
             </a:pPr>
             <a:r>
@@ -26087,7 +25934,7 @@
           <a:bodyPr wrap="square" lIns="0" tIns="0" rIns="0" bIns="0" rtlCol="0" anchor="ctr"/>
           <a:lstStyle/>
           <a:p>
-            <a:pPr algn="ctr" indent="0" marL="0">
+            <a:pPr marL="0" indent="0" algn="ctr">
               <a:buNone/>
             </a:pPr>
             <a:r>
@@ -26126,7 +25973,7 @@
           <a:bodyPr wrap="square" lIns="0" tIns="0" rIns="0" bIns="0" rtlCol="0" anchor="ctr"/>
           <a:lstStyle/>
           <a:p>
-            <a:pPr indent="0" marL="0">
+            <a:pPr marL="0" indent="0">
               <a:buNone/>
             </a:pPr>
             <a:r>
@@ -26185,7 +26032,7 @@
           <a:bodyPr wrap="square" lIns="0" tIns="0" rIns="0" bIns="0" rtlCol="0" anchor="ctr"/>
           <a:lstStyle/>
           <a:p>
-            <a:pPr indent="0" marL="0">
+            <a:pPr marL="0" indent="0">
               <a:buNone/>
             </a:pPr>
             <a:r>
@@ -26249,7 +26096,7 @@
           <a:bodyPr wrap="square" lIns="0" tIns="0" rIns="0" bIns="0" rtlCol="0" anchor="ctr"/>
           <a:lstStyle/>
           <a:p>
-            <a:pPr algn="ctr" indent="0" marL="0">
+            <a:pPr marL="0" indent="0" algn="ctr">
               <a:buNone/>
             </a:pPr>
             <a:r>
@@ -26288,7 +26135,7 @@
           <a:bodyPr wrap="square" lIns="0" tIns="0" rIns="0" bIns="0" rtlCol="0" anchor="ctr"/>
           <a:lstStyle/>
           <a:p>
-            <a:pPr algn="ctr" indent="0" marL="0">
+            <a:pPr marL="0" indent="0" algn="ctr">
               <a:buNone/>
             </a:pPr>
             <a:r>
@@ -26352,7 +26199,7 @@
           <a:bodyPr wrap="square" lIns="0" tIns="0" rIns="0" bIns="0" rtlCol="0" anchor="ctr"/>
           <a:lstStyle/>
           <a:p>
-            <a:pPr algn="ctr" indent="0" marL="0">
+            <a:pPr marL="0" indent="0" algn="ctr">
               <a:buNone/>
             </a:pPr>
             <a:r>
@@ -26391,7 +26238,7 @@
           <a:bodyPr wrap="square" lIns="0" tIns="0" rIns="0" bIns="0" rtlCol="0" anchor="ctr"/>
           <a:lstStyle/>
           <a:p>
-            <a:pPr algn="ctr" indent="0" marL="0">
+            <a:pPr marL="0" indent="0" algn="ctr">
               <a:buNone/>
             </a:pPr>
             <a:r>
@@ -26455,7 +26302,7 @@
           <a:bodyPr wrap="square" lIns="0" tIns="0" rIns="0" bIns="0" rtlCol="0" anchor="ctr"/>
           <a:lstStyle/>
           <a:p>
-            <a:pPr algn="ctr" indent="0" marL="0">
+            <a:pPr marL="0" indent="0" algn="ctr">
               <a:buNone/>
             </a:pPr>
             <a:r>
@@ -26494,7 +26341,7 @@
           <a:bodyPr wrap="square" lIns="0" tIns="0" rIns="0" bIns="0" rtlCol="0" anchor="ctr"/>
           <a:lstStyle/>
           <a:p>
-            <a:pPr algn="ctr" indent="0" marL="0">
+            <a:pPr marL="0" indent="0" algn="ctr">
               <a:buNone/>
             </a:pPr>
             <a:r>
@@ -26558,7 +26405,7 @@
           <a:bodyPr wrap="square" lIns="0" tIns="0" rIns="0" bIns="0" rtlCol="0" anchor="ctr"/>
           <a:lstStyle/>
           <a:p>
-            <a:pPr algn="ctr" indent="0" marL="0">
+            <a:pPr marL="0" indent="0" algn="ctr">
               <a:buNone/>
             </a:pPr>
             <a:r>
@@ -26597,7 +26444,7 @@
           <a:bodyPr wrap="square" lIns="0" tIns="0" rIns="0" bIns="0" rtlCol="0" anchor="ctr"/>
           <a:lstStyle/>
           <a:p>
-            <a:pPr algn="ctr" indent="0" marL="0">
+            <a:pPr marL="0" indent="0" algn="ctr">
               <a:buNone/>
             </a:pPr>
             <a:r>
@@ -26656,7 +26503,7 @@
           <a:bodyPr wrap="square" lIns="0" tIns="0" rIns="0" bIns="0" rtlCol="0" anchor="ctr"/>
           <a:lstStyle/>
           <a:p>
-            <a:pPr indent="0" marL="0">
+            <a:pPr marL="0" indent="0">
               <a:buNone/>
             </a:pPr>
             <a:r>
@@ -26695,7 +26542,7 @@
           <a:bodyPr wrap="square" lIns="0" tIns="0" rIns="0" bIns="0" rtlCol="0" anchor="ctr"/>
           <a:lstStyle/>
           <a:p>
-            <a:pPr indent="0" marL="0">
+            <a:pPr marL="0" indent="0">
               <a:buNone/>
             </a:pPr>
             <a:r>
@@ -26734,7 +26581,7 @@
           <a:bodyPr wrap="square" lIns="0" tIns="0" rIns="0" bIns="0" rtlCol="0" anchor="ctr"/>
           <a:lstStyle/>
           <a:p>
-            <a:pPr indent="0" marL="0">
+            <a:pPr marL="0" indent="0">
               <a:buNone/>
             </a:pPr>
             <a:r>
@@ -26773,7 +26620,7 @@
           <a:bodyPr wrap="square" lIns="0" tIns="0" rIns="0" bIns="0" rtlCol="0" anchor="ctr"/>
           <a:lstStyle/>
           <a:p>
-            <a:pPr indent="0" marL="0">
+            <a:pPr marL="0" indent="0">
               <a:buNone/>
             </a:pPr>
             <a:r>
@@ -26812,7 +26659,7 @@
           <a:bodyPr wrap="square" lIns="0" tIns="0" rIns="0" bIns="0" rtlCol="0" anchor="ctr"/>
           <a:lstStyle/>
           <a:p>
-            <a:pPr indent="0" marL="0">
+            <a:pPr marL="0" indent="0">
               <a:buNone/>
             </a:pPr>
             <a:r>
@@ -26851,7 +26698,7 @@
           <a:bodyPr wrap="square" lIns="0" tIns="0" rIns="0" bIns="0" rtlCol="0" anchor="ctr"/>
           <a:lstStyle/>
           <a:p>
-            <a:pPr indent="0" marL="0">
+            <a:pPr marL="0" indent="0">
               <a:buNone/>
             </a:pPr>
             <a:r>
@@ -26890,7 +26737,7 @@
           <a:bodyPr wrap="square" lIns="0" tIns="0" rIns="0" bIns="0" rtlCol="0" anchor="ctr"/>
           <a:lstStyle/>
           <a:p>
-            <a:pPr indent="0" marL="0">
+            <a:pPr marL="0" indent="0">
               <a:buNone/>
             </a:pPr>
             <a:r>
@@ -26929,7 +26776,7 @@
           <a:bodyPr wrap="square" lIns="0" tIns="0" rIns="0" bIns="0" rtlCol="0" anchor="ctr"/>
           <a:lstStyle/>
           <a:p>
-            <a:pPr indent="0" marL="0">
+            <a:pPr marL="0" indent="0">
               <a:buNone/>
             </a:pPr>
             <a:r>
@@ -26968,7 +26815,7 @@
           <a:bodyPr wrap="square" lIns="0" tIns="0" rIns="0" bIns="0" rtlCol="0" anchor="ctr"/>
           <a:lstStyle/>
           <a:p>
-            <a:pPr indent="0" marL="0">
+            <a:pPr marL="0" indent="0">
               <a:buNone/>
             </a:pPr>
             <a:r>
@@ -27032,7 +26879,7 @@
           <a:bodyPr wrap="square" lIns="0" tIns="0" rIns="0" bIns="0" rtlCol="0" anchor="ctr"/>
           <a:lstStyle/>
           <a:p>
-            <a:pPr indent="0" marL="0">
+            <a:pPr marL="0" indent="0">
               <a:buNone/>
             </a:pPr>
             <a:r>
@@ -27114,7 +26961,7 @@
           <a:bodyPr wrap="square" lIns="0" tIns="0" rIns="0" bIns="0" rtlCol="0" anchor="ctr"/>
           <a:lstStyle/>
           <a:p>
-            <a:pPr indent="0" marL="0">
+            <a:pPr marL="0" indent="0">
               <a:buNone/>
             </a:pPr>
             <a:r>
@@ -27153,7 +27000,7 @@
           <a:bodyPr wrap="square" lIns="0" tIns="0" rIns="0" bIns="0" rtlCol="0" anchor="ctr"/>
           <a:lstStyle/>
           <a:p>
-            <a:pPr indent="0" marL="0">
+            <a:pPr marL="0" indent="0">
               <a:buNone/>
             </a:pPr>
             <a:r>
@@ -27170,7 +27017,7 @@
             <a:endParaRPr lang="en-US" sz="1300" dirty="0"/>
           </a:p>
           <a:p>
-            <a:pPr indent="0" marL="0">
+            <a:pPr marL="0" indent="0">
               <a:buNone/>
             </a:pPr>
             <a:r>
@@ -27187,7 +27034,7 @@
             <a:endParaRPr lang="en-US" sz="1300" dirty="0"/>
           </a:p>
           <a:p>
-            <a:pPr indent="0" marL="0">
+            <a:pPr marL="0" indent="0">
               <a:buNone/>
             </a:pPr>
             <a:r>
@@ -27246,7 +27093,7 @@
           <a:bodyPr wrap="square" lIns="0" tIns="0" rIns="0" bIns="0" rtlCol="0" anchor="ctr"/>
           <a:lstStyle/>
           <a:p>
-            <a:pPr indent="0" marL="0">
+            <a:pPr marL="0" indent="0">
               <a:buNone/>
             </a:pPr>
             <a:r>
@@ -27285,7 +27132,7 @@
           <a:bodyPr wrap="square" lIns="0" tIns="0" rIns="0" bIns="0" rtlCol="0" anchor="ctr"/>
           <a:lstStyle/>
           <a:p>
-            <a:pPr indent="0" marL="0">
+            <a:pPr marL="0" indent="0">
               <a:buNone/>
             </a:pPr>
             <a:r>
@@ -27349,7 +27196,7 @@
           <a:bodyPr wrap="square" lIns="0" tIns="0" rIns="0" bIns="0" rtlCol="0" anchor="ctr"/>
           <a:lstStyle/>
           <a:p>
-            <a:pPr algn="ctr" indent="0" marL="0">
+            <a:pPr marL="0" indent="0" algn="ctr">
               <a:buNone/>
             </a:pPr>
             <a:r>
@@ -27413,7 +27260,7 @@
           <a:bodyPr wrap="square" lIns="0" tIns="0" rIns="0" bIns="0" rtlCol="0" anchor="ctr"/>
           <a:lstStyle/>
           <a:p>
-            <a:pPr algn="ctr" indent="0" marL="0">
+            <a:pPr marL="0" indent="0" algn="ctr">
               <a:buNone/>
             </a:pPr>
             <a:r>
@@ -27477,7 +27324,7 @@
           <a:bodyPr wrap="square" lIns="0" tIns="0" rIns="0" bIns="0" rtlCol="0" anchor="ctr"/>
           <a:lstStyle/>
           <a:p>
-            <a:pPr algn="ctr" indent="0" marL="0">
+            <a:pPr marL="0" indent="0" algn="ctr">
               <a:buNone/>
             </a:pPr>
             <a:r>
@@ -27541,7 +27388,7 @@
           <a:bodyPr wrap="square" lIns="0" tIns="0" rIns="0" bIns="0" rtlCol="0" anchor="ctr"/>
           <a:lstStyle/>
           <a:p>
-            <a:pPr algn="ctr" indent="0" marL="0">
+            <a:pPr marL="0" indent="0" algn="ctr">
               <a:buNone/>
             </a:pPr>
             <a:r>
@@ -27605,7 +27452,7 @@
           <a:bodyPr wrap="square" lIns="0" tIns="0" rIns="0" bIns="0" rtlCol="0" anchor="ctr"/>
           <a:lstStyle/>
           <a:p>
-            <a:pPr algn="ctr" indent="0" marL="0">
+            <a:pPr marL="0" indent="0" algn="ctr">
               <a:buNone/>
             </a:pPr>
             <a:r>
@@ -27669,7 +27516,7 @@
           <a:bodyPr wrap="square" lIns="0" tIns="0" rIns="0" bIns="0" rtlCol="0" anchor="ctr"/>
           <a:lstStyle/>
           <a:p>
-            <a:pPr algn="ctr" indent="0" marL="0">
+            <a:pPr marL="0" indent="0" algn="ctr">
               <a:buNone/>
             </a:pPr>
             <a:r>
@@ -27733,7 +27580,7 @@
           <a:bodyPr wrap="square" lIns="0" tIns="0" rIns="0" bIns="0" rtlCol="0" anchor="ctr"/>
           <a:lstStyle/>
           <a:p>
-            <a:pPr algn="ctr" indent="0" marL="0">
+            <a:pPr marL="0" indent="0" algn="ctr">
               <a:buNone/>
             </a:pPr>
             <a:r>
@@ -27797,7 +27644,7 @@
           <a:bodyPr wrap="square" lIns="0" tIns="0" rIns="0" bIns="0" rtlCol="0" anchor="ctr"/>
           <a:lstStyle/>
           <a:p>
-            <a:pPr algn="ctr" indent="0" marL="0">
+            <a:pPr marL="0" indent="0" algn="ctr">
               <a:buNone/>
             </a:pPr>
             <a:r>
@@ -27836,7 +27683,7 @@
           <a:bodyPr wrap="square" lIns="0" tIns="0" rIns="0" bIns="0" rtlCol="0" anchor="ctr"/>
           <a:lstStyle/>
           <a:p>
-            <a:pPr indent="0" marL="0">
+            <a:pPr marL="0" indent="0">
               <a:buNone/>
             </a:pPr>
             <a:r>
@@ -27900,7 +27747,7 @@
           <a:bodyPr wrap="square" lIns="0" tIns="0" rIns="0" bIns="0" rtlCol="0" anchor="ctr"/>
           <a:lstStyle/>
           <a:p>
-            <a:pPr algn="ctr" indent="0" marL="0">
+            <a:pPr marL="0" indent="0" algn="ctr">
               <a:buNone/>
             </a:pPr>
             <a:r>
@@ -27964,7 +27811,7 @@
           <a:bodyPr wrap="square" lIns="0" tIns="0" rIns="0" bIns="0" rtlCol="0" anchor="ctr"/>
           <a:lstStyle/>
           <a:p>
-            <a:pPr algn="ctr" indent="0" marL="0">
+            <a:pPr marL="0" indent="0" algn="ctr">
               <a:buNone/>
             </a:pPr>
             <a:r>
@@ -28028,7 +27875,7 @@
           <a:bodyPr wrap="square" lIns="0" tIns="0" rIns="0" bIns="0" rtlCol="0" anchor="ctr"/>
           <a:lstStyle/>
           <a:p>
-            <a:pPr algn="ctr" indent="0" marL="0">
+            <a:pPr marL="0" indent="0" algn="ctr">
               <a:buNone/>
             </a:pPr>
             <a:r>
@@ -28092,7 +27939,7 @@
           <a:bodyPr wrap="square" lIns="0" tIns="0" rIns="0" bIns="0" rtlCol="0" anchor="ctr"/>
           <a:lstStyle/>
           <a:p>
-            <a:pPr algn="ctr" indent="0" marL="0">
+            <a:pPr marL="0" indent="0" algn="ctr">
               <a:buNone/>
             </a:pPr>
             <a:r>
@@ -28156,7 +28003,7 @@
           <a:bodyPr wrap="square" lIns="0" tIns="0" rIns="0" bIns="0" rtlCol="0" anchor="ctr"/>
           <a:lstStyle/>
           <a:p>
-            <a:pPr algn="ctr" indent="0" marL="0">
+            <a:pPr marL="0" indent="0" algn="ctr">
               <a:buNone/>
             </a:pPr>
             <a:r>
@@ -28220,7 +28067,7 @@
           <a:bodyPr wrap="square" lIns="0" tIns="0" rIns="0" bIns="0" rtlCol="0" anchor="ctr"/>
           <a:lstStyle/>
           <a:p>
-            <a:pPr algn="ctr" indent="0" marL="0">
+            <a:pPr marL="0" indent="0" algn="ctr">
               <a:buNone/>
             </a:pPr>
             <a:r>
@@ -28284,7 +28131,7 @@
           <a:bodyPr wrap="square" lIns="0" tIns="0" rIns="0" bIns="0" rtlCol="0" anchor="ctr"/>
           <a:lstStyle/>
           <a:p>
-            <a:pPr algn="ctr" indent="0" marL="0">
+            <a:pPr marL="0" indent="0" algn="ctr">
               <a:buNone/>
             </a:pPr>
             <a:r>
@@ -28348,7 +28195,7 @@
           <a:bodyPr wrap="square" lIns="0" tIns="0" rIns="0" bIns="0" rtlCol="0" anchor="ctr"/>
           <a:lstStyle/>
           <a:p>
-            <a:pPr algn="ctr" indent="0" marL="0">
+            <a:pPr marL="0" indent="0" algn="ctr">
               <a:buNone/>
             </a:pPr>
             <a:r>
@@ -28387,7 +28234,7 @@
           <a:bodyPr wrap="square" lIns="0" tIns="0" rIns="0" bIns="0" rtlCol="0" anchor="ctr"/>
           <a:lstStyle/>
           <a:p>
-            <a:pPr indent="0" marL="0">
+            <a:pPr marL="0" indent="0">
               <a:buNone/>
             </a:pPr>
             <a:r>
@@ -28426,7 +28273,7 @@
           <a:bodyPr wrap="square" lIns="0" tIns="0" rIns="0" bIns="0" rtlCol="0" anchor="ctr"/>
           <a:lstStyle/>
           <a:p>
-            <a:pPr indent="0" marL="0">
+            <a:pPr marL="0" indent="0">
               <a:buNone/>
             </a:pPr>
             <a:r>
@@ -28465,7 +28312,7 @@
           <a:bodyPr wrap="square" lIns="0" tIns="0" rIns="0" bIns="0" rtlCol="0" anchor="ctr"/>
           <a:lstStyle/>
           <a:p>
-            <a:pPr indent="0" marL="0">
+            <a:pPr marL="0" indent="0">
               <a:buNone/>
             </a:pPr>
             <a:r>
@@ -28504,7 +28351,7 @@
           <a:bodyPr wrap="square" lIns="0" tIns="0" rIns="0" bIns="0" rtlCol="0" anchor="ctr"/>
           <a:lstStyle/>
           <a:p>
-            <a:pPr indent="0" marL="0">
+            <a:pPr marL="0" indent="0">
               <a:buNone/>
             </a:pPr>
             <a:r>
@@ -28543,7 +28390,7 @@
           <a:bodyPr wrap="square" lIns="0" tIns="0" rIns="0" bIns="0" rtlCol="0" anchor="ctr"/>
           <a:lstStyle/>
           <a:p>
-            <a:pPr indent="0" marL="0">
+            <a:pPr marL="0" indent="0">
               <a:buNone/>
             </a:pPr>
             <a:r>
@@ -28582,7 +28429,7 @@
           <a:bodyPr wrap="square" lIns="0" tIns="0" rIns="0" bIns="0" rtlCol="0" anchor="ctr"/>
           <a:lstStyle/>
           <a:p>
-            <a:pPr indent="0" marL="0">
+            <a:pPr marL="0" indent="0">
               <a:buNone/>
             </a:pPr>
             <a:r>
@@ -28621,7 +28468,7 @@
           <a:bodyPr wrap="square" lIns="0" tIns="0" rIns="0" bIns="0" rtlCol="0" anchor="ctr"/>
           <a:lstStyle/>
           <a:p>
-            <a:pPr indent="0" marL="0">
+            <a:pPr marL="0" indent="0">
               <a:buNone/>
             </a:pPr>
             <a:r>
@@ -28685,7 +28532,7 @@
           <a:bodyPr wrap="square" lIns="0" tIns="0" rIns="0" bIns="0" rtlCol="0" anchor="ctr"/>
           <a:lstStyle/>
           <a:p>
-            <a:pPr indent="0" marL="0">
+            <a:pPr marL="0" indent="0">
               <a:buNone/>
             </a:pPr>
             <a:r>
@@ -28727,7 +28574,10 @@
         </p:spPr>
         <p:txBody>
           <a:bodyPr/>
-          <a:p/>
+          <a:lstStyle/>
+          <a:p>
+            <a:endParaRPr/>
+          </a:p>
         </p:txBody>
       </p:sp>
       <p:sp>
@@ -28751,7 +28601,10 @@
         </p:spPr>
         <p:txBody>
           <a:bodyPr/>
-          <a:p/>
+          <a:lstStyle/>
+          <a:p>
+            <a:endParaRPr/>
+          </a:p>
         </p:txBody>
       </p:sp>
       <p:sp>
@@ -28775,7 +28628,7 @@
           <a:bodyPr wrap="square" lIns="0" tIns="0" rIns="0" bIns="0" rtlCol="0" anchor="ctr"/>
           <a:lstStyle/>
           <a:p>
-            <a:pPr indent="0" marL="0">
+            <a:pPr marL="0" indent="0">
               <a:buNone/>
             </a:pPr>
             <a:r>
@@ -28814,7 +28667,7 @@
           <a:bodyPr wrap="square" lIns="0" tIns="0" rIns="0" bIns="0" rtlCol="0" anchor="ctr"/>
           <a:lstStyle/>
           <a:p>
-            <a:pPr indent="0" marL="0">
+            <a:pPr marL="0" indent="0">
               <a:buNone/>
             </a:pPr>
             <a:r>
@@ -28831,7 +28684,7 @@
             <a:endParaRPr lang="en-US" sz="1100" dirty="0"/>
           </a:p>
           <a:p>
-            <a:pPr indent="0" marL="0">
+            <a:pPr marL="0" indent="0">
               <a:buNone/>
             </a:pPr>
             <a:r>
@@ -28870,7 +28723,10 @@
         </p:spPr>
         <p:txBody>
           <a:bodyPr/>
-          <a:p/>
+          <a:lstStyle/>
+          <a:p>
+            <a:endParaRPr/>
+          </a:p>
         </p:txBody>
       </p:sp>
       <p:sp>
@@ -28894,7 +28750,7 @@
           <a:bodyPr wrap="square" lIns="0" tIns="0" rIns="0" bIns="0" rtlCol="0" anchor="ctr"/>
           <a:lstStyle/>
           <a:p>
-            <a:pPr indent="0" marL="0">
+            <a:pPr marL="0" indent="0">
               <a:buNone/>
             </a:pPr>
             <a:r>
@@ -28938,7 +28794,10 @@
         </p:spPr>
         <p:txBody>
           <a:bodyPr/>
-          <a:p/>
+          <a:lstStyle/>
+          <a:p>
+            <a:endParaRPr/>
+          </a:p>
         </p:txBody>
       </p:sp>
       <p:sp>
@@ -28962,7 +28821,7 @@
           <a:bodyPr wrap="square" lIns="0" tIns="0" rIns="0" bIns="0" rtlCol="0" anchor="ctr"/>
           <a:lstStyle/>
           <a:p>
-            <a:pPr algn="ctr" indent="0" marL="0">
+            <a:pPr marL="0" indent="0" algn="ctr">
               <a:buNone/>
             </a:pPr>
             <a:r>
@@ -29001,55 +28860,22 @@
           <a:bodyPr wrap="square" lIns="0" tIns="0" rIns="0" bIns="0" rtlCol="0" anchor="ctr"/>
           <a:lstStyle/>
           <a:p>
-            <a:pPr indent="0" marL="0">
+            <a:pPr marL="0" indent="0">
               <a:buNone/>
             </a:pPr>
             <a:endParaRPr lang="en-US" sz="1000" dirty="0"/>
-            <a:r>
-              <a:rPr lang="en-US" sz="1000" b="1" dirty="0">
-                <a:solidFill>
-                  <a:srgbClr val="333333"/>
-                </a:solidFill>
-                <a:latin typeface="Consolas" pitchFamily="34" charset="0"/>
-                <a:ea typeface="Consolas" pitchFamily="34" charset="-122"/>
-                <a:cs typeface="Consolas" pitchFamily="34" charset="-120"/>
-              </a:rPr>
-              <a:t>EE_Detect()</a:t>
-            </a:r>
-          </a:p>
-          <a:p>
-            <a:pPr indent="0" marL="0">
+          </a:p>
+          <a:p>
+            <a:pPr marL="0" indent="0">
               <a:buNone/>
             </a:pPr>
             <a:endParaRPr lang="en-US" sz="1000" dirty="0"/>
-            <a:r>
-              <a:rPr lang="en-US" sz="1000" b="1" dirty="0">
-                <a:solidFill>
-                  <a:srgbClr val="333333"/>
-                </a:solidFill>
-                <a:latin typeface="Consolas" pitchFamily="34" charset="0"/>
-                <a:ea typeface="Consolas" pitchFamily="34" charset="-122"/>
-                <a:cs typeface="Consolas" pitchFamily="34" charset="-120"/>
-              </a:rPr>
-              <a:t>쓰기+읽기 검증 (addr 255에 0xA5 기록 후 확인)</a:t>
-            </a:r>
-          </a:p>
-          <a:p>
-            <a:pPr indent="0" marL="0">
+          </a:p>
+          <a:p>
+            <a:pPr marL="0" indent="0">
               <a:buNone/>
             </a:pPr>
             <a:endParaRPr lang="en-US" sz="1000" dirty="0"/>
-            <a:r>
-              <a:rPr lang="en-US" sz="1000" b="1" dirty="0">
-                <a:solidFill>
-                  <a:srgbClr val="333333"/>
-                </a:solidFill>
-                <a:latin typeface="Consolas" pitchFamily="34" charset="0"/>
-                <a:ea typeface="Consolas" pitchFamily="34" charset="-122"/>
-                <a:cs typeface="Consolas" pitchFamily="34" charset="-120"/>
-              </a:rPr>
-              <a:t>0x00 초기화 칩도 확실히 감지  ← 버그 수정</a:t>
-            </a:r>
           </a:p>
         </p:txBody>
       </p:sp>
@@ -29097,7 +28923,7 @@
           <a:bodyPr wrap="square" lIns="0" tIns="0" rIns="0" bIns="0" rtlCol="0" anchor="ctr"/>
           <a:lstStyle/>
           <a:p>
-            <a:pPr algn="ctr" indent="0" marL="0">
+            <a:pPr marL="0" indent="0" algn="ctr">
               <a:buNone/>
             </a:pPr>
             <a:r>
@@ -29161,7 +28987,7 @@
           <a:bodyPr wrap="square" lIns="0" tIns="0" rIns="0" bIns="0" rtlCol="0" anchor="ctr"/>
           <a:lstStyle/>
           <a:p>
-            <a:pPr algn="ctr" indent="0" marL="0">
+            <a:pPr marL="0" indent="0" algn="ctr">
               <a:buNone/>
             </a:pPr>
             <a:r>
@@ -29200,7 +29026,7 @@
           <a:bodyPr wrap="square" lIns="0" tIns="0" rIns="0" bIns="0" rtlCol="0" anchor="ctr"/>
           <a:lstStyle/>
           <a:p>
-            <a:pPr indent="0" marL="0">
+            <a:pPr marL="0" indent="0">
               <a:buNone/>
             </a:pPr>
             <a:r>
@@ -29217,7 +29043,7 @@
             <a:endParaRPr lang="en-US" sz="1000" dirty="0"/>
           </a:p>
           <a:p>
-            <a:pPr indent="0" marL="0">
+            <a:pPr marL="0" indent="0">
               <a:buNone/>
             </a:pPr>
             <a:r>
@@ -29234,7 +29060,7 @@
             <a:endParaRPr lang="en-US" sz="1000" dirty="0"/>
           </a:p>
           <a:p>
-            <a:pPr indent="0" marL="0">
+            <a:pPr marL="0" indent="0">
               <a:buNone/>
             </a:pPr>
             <a:r>
@@ -29293,7 +29119,7 @@
           <a:bodyPr wrap="square" lIns="0" tIns="0" rIns="0" bIns="0" rtlCol="0" anchor="ctr"/>
           <a:lstStyle/>
           <a:p>
-            <a:pPr indent="0" marL="0">
+            <a:pPr marL="0" indent="0">
               <a:buNone/>
             </a:pPr>
             <a:r>
@@ -29332,7 +29158,7 @@
           <a:bodyPr wrap="square" lIns="0" tIns="0" rIns="0" bIns="0" rtlCol="0" anchor="ctr"/>
           <a:lstStyle/>
           <a:p>
-            <a:pPr indent="0" marL="0">
+            <a:pPr marL="0" indent="0">
               <a:buNone/>
             </a:pPr>
             <a:r>
@@ -29349,7 +29175,7 @@
             <a:endParaRPr lang="en-US" sz="1000" dirty="0"/>
           </a:p>
           <a:p>
-            <a:pPr indent="0" marL="0">
+            <a:pPr marL="0" indent="0">
               <a:buNone/>
             </a:pPr>
             <a:r>
@@ -29668,4 +29494,319 @@
     </a:ext>
   </a:extLst>
 </a:theme>
+</file>
+
+<file path=ppt/theme/theme2.xml><?xml version="1.0" encoding="utf-8"?>
+<a:theme xmlns:a="http://schemas.openxmlformats.org/drawingml/2006/main" name="Office 테마">
+  <a:themeElements>
+    <a:clrScheme name="Office">
+      <a:dk1>
+        <a:sysClr val="windowText" lastClr="000000"/>
+      </a:dk1>
+      <a:lt1>
+        <a:sysClr val="window" lastClr="FFFFFF"/>
+      </a:lt1>
+      <a:dk2>
+        <a:srgbClr val="0E2841"/>
+      </a:dk2>
+      <a:lt2>
+        <a:srgbClr val="E8E8E8"/>
+      </a:lt2>
+      <a:accent1>
+        <a:srgbClr val="156082"/>
+      </a:accent1>
+      <a:accent2>
+        <a:srgbClr val="E97132"/>
+      </a:accent2>
+      <a:accent3>
+        <a:srgbClr val="196B24"/>
+      </a:accent3>
+      <a:accent4>
+        <a:srgbClr val="0F9ED5"/>
+      </a:accent4>
+      <a:accent5>
+        <a:srgbClr val="A02B93"/>
+      </a:accent5>
+      <a:accent6>
+        <a:srgbClr val="4EA72E"/>
+      </a:accent6>
+      <a:hlink>
+        <a:srgbClr val="467886"/>
+      </a:hlink>
+      <a:folHlink>
+        <a:srgbClr val="96607D"/>
+      </a:folHlink>
+    </a:clrScheme>
+    <a:fontScheme name="Office">
+      <a:majorFont>
+        <a:latin typeface="맑은 고딕" panose="02110004020202020204"/>
+        <a:ea typeface=""/>
+        <a:cs typeface=""/>
+        <a:font script="Jpan" typeface="游ゴシック Light"/>
+        <a:font script="Hang" typeface="맑은 고딕"/>
+        <a:font script="Hans" typeface="等线 Light"/>
+        <a:font script="Hant" typeface="新細明體"/>
+        <a:font script="Arab" typeface="Times New Roman"/>
+        <a:font script="Hebr" typeface="Times New Roman"/>
+        <a:font script="Thai" typeface="Angsana New"/>
+        <a:font script="Ethi" typeface="Nyala"/>
+        <a:font script="Beng" typeface="Vrinda"/>
+        <a:font script="Gujr" typeface="Shruti"/>
+        <a:font script="Khmr" typeface="MoolBoran"/>
+        <a:font script="Knda" typeface="Tunga"/>
+        <a:font script="Guru" typeface="Raavi"/>
+        <a:font script="Cans" typeface="Euphemia"/>
+        <a:font script="Cher" typeface="Plantagenet Cherokee"/>
+        <a:font script="Yiii" typeface="Microsoft Yi Baiti"/>
+        <a:font script="Tibt" typeface="Microsoft Himalaya"/>
+        <a:font script="Thaa" typeface="MV Boli"/>
+        <a:font script="Deva" typeface="Mangal"/>
+        <a:font script="Telu" typeface="Gautami"/>
+        <a:font script="Taml" typeface="Latha"/>
+        <a:font script="Syrc" typeface="Estrangelo Edessa"/>
+        <a:font script="Orya" typeface="Kalinga"/>
+        <a:font script="Mlym" typeface="Kartika"/>
+        <a:font script="Laoo" typeface="DokChampa"/>
+        <a:font script="Sinh" typeface="Iskoola Pota"/>
+        <a:font script="Mong" typeface="Mongolian Baiti"/>
+        <a:font script="Viet" typeface="Times New Roman"/>
+        <a:font script="Uigh" typeface="Microsoft Uighur"/>
+        <a:font script="Geor" typeface="Sylfaen"/>
+        <a:font script="Armn" typeface="Arial"/>
+        <a:font script="Bugi" typeface="Leelawadee UI"/>
+        <a:font script="Bopo" typeface="Microsoft JhengHei"/>
+        <a:font script="Java" typeface="Javanese Text"/>
+        <a:font script="Lisu" typeface="Segoe UI"/>
+        <a:font script="Mymr" typeface="Myanmar Text"/>
+        <a:font script="Nkoo" typeface="Ebrima"/>
+        <a:font script="Olck" typeface="Nirmala UI"/>
+        <a:font script="Osma" typeface="Ebrima"/>
+        <a:font script="Phag" typeface="Phagspa"/>
+        <a:font script="Syrn" typeface="Estrangelo Edessa"/>
+        <a:font script="Syrj" typeface="Estrangelo Edessa"/>
+        <a:font script="Syre" typeface="Estrangelo Edessa"/>
+        <a:font script="Sora" typeface="Nirmala UI"/>
+        <a:font script="Tale" typeface="Microsoft Tai Le"/>
+        <a:font script="Talu" typeface="Microsoft New Tai Lue"/>
+        <a:font script="Tfng" typeface="Ebrima"/>
+      </a:majorFont>
+      <a:minorFont>
+        <a:latin typeface="맑은 고딕" panose="02110004020202020204"/>
+        <a:ea typeface=""/>
+        <a:cs typeface=""/>
+        <a:font script="Jpan" typeface="游ゴシック"/>
+        <a:font script="Hang" typeface="맑은 고딕"/>
+        <a:font script="Hans" typeface="等线"/>
+        <a:font script="Hant" typeface="新細明體"/>
+        <a:font script="Arab" typeface="Arial"/>
+        <a:font script="Hebr" typeface="Arial"/>
+        <a:font script="Thai" typeface="Cordia New"/>
+        <a:font script="Ethi" typeface="Nyala"/>
+        <a:font script="Beng" typeface="Vrinda"/>
+        <a:font script="Gujr" typeface="Shruti"/>
+        <a:font script="Khmr" typeface="DaunPenh"/>
+        <a:font script="Knda" typeface="Tunga"/>
+        <a:font script="Guru" typeface="Raavi"/>
+        <a:font script="Cans" typeface="Euphemia"/>
+        <a:font script="Cher" typeface="Plantagenet Cherokee"/>
+        <a:font script="Yiii" typeface="Microsoft Yi Baiti"/>
+        <a:font script="Tibt" typeface="Microsoft Himalaya"/>
+        <a:font script="Thaa" typeface="MV Boli"/>
+        <a:font script="Deva" typeface="Mangal"/>
+        <a:font script="Telu" typeface="Gautami"/>
+        <a:font script="Taml" typeface="Latha"/>
+        <a:font script="Syrc" typeface="Estrangelo Edessa"/>
+        <a:font script="Orya" typeface="Kalinga"/>
+        <a:font script="Mlym" typeface="Kartika"/>
+        <a:font script="Laoo" typeface="DokChampa"/>
+        <a:font script="Sinh" typeface="Iskoola Pota"/>
+        <a:font script="Mong" typeface="Mongolian Baiti"/>
+        <a:font script="Viet" typeface="Arial"/>
+        <a:font script="Uigh" typeface="Microsoft Uighur"/>
+        <a:font script="Geor" typeface="Sylfaen"/>
+        <a:font script="Armn" typeface="Arial"/>
+        <a:font script="Bugi" typeface="Leelawadee UI"/>
+        <a:font script="Bopo" typeface="Microsoft JhengHei"/>
+        <a:font script="Java" typeface="Javanese Text"/>
+        <a:font script="Lisu" typeface="Segoe UI"/>
+        <a:font script="Mymr" typeface="Myanmar Text"/>
+        <a:font script="Nkoo" typeface="Ebrima"/>
+        <a:font script="Olck" typeface="Nirmala UI"/>
+        <a:font script="Osma" typeface="Ebrima"/>
+        <a:font script="Phag" typeface="Phagspa"/>
+        <a:font script="Syrn" typeface="Estrangelo Edessa"/>
+        <a:font script="Syrj" typeface="Estrangelo Edessa"/>
+        <a:font script="Syre" typeface="Estrangelo Edessa"/>
+        <a:font script="Sora" typeface="Nirmala UI"/>
+        <a:font script="Tale" typeface="Microsoft Tai Le"/>
+        <a:font script="Talu" typeface="Microsoft New Tai Lue"/>
+        <a:font script="Tfng" typeface="Ebrima"/>
+      </a:minorFont>
+    </a:fontScheme>
+    <a:fmtScheme name="Office">
+      <a:fillStyleLst>
+        <a:solidFill>
+          <a:schemeClr val="phClr"/>
+        </a:solidFill>
+        <a:gradFill rotWithShape="1">
+          <a:gsLst>
+            <a:gs pos="0">
+              <a:schemeClr val="phClr">
+                <a:lumMod val="110000"/>
+                <a:satMod val="105000"/>
+                <a:tint val="67000"/>
+              </a:schemeClr>
+            </a:gs>
+            <a:gs pos="50000">
+              <a:schemeClr val="phClr">
+                <a:lumMod val="105000"/>
+                <a:satMod val="103000"/>
+                <a:tint val="73000"/>
+              </a:schemeClr>
+            </a:gs>
+            <a:gs pos="100000">
+              <a:schemeClr val="phClr">
+                <a:lumMod val="105000"/>
+                <a:satMod val="109000"/>
+                <a:tint val="81000"/>
+              </a:schemeClr>
+            </a:gs>
+          </a:gsLst>
+          <a:lin ang="5400000" scaled="0"/>
+        </a:gradFill>
+        <a:gradFill rotWithShape="1">
+          <a:gsLst>
+            <a:gs pos="0">
+              <a:schemeClr val="phClr">
+                <a:satMod val="103000"/>
+                <a:lumMod val="102000"/>
+                <a:tint val="94000"/>
+              </a:schemeClr>
+            </a:gs>
+            <a:gs pos="50000">
+              <a:schemeClr val="phClr">
+                <a:satMod val="110000"/>
+                <a:lumMod val="100000"/>
+                <a:shade val="100000"/>
+              </a:schemeClr>
+            </a:gs>
+            <a:gs pos="100000">
+              <a:schemeClr val="phClr">
+                <a:lumMod val="99000"/>
+                <a:satMod val="120000"/>
+                <a:shade val="78000"/>
+              </a:schemeClr>
+            </a:gs>
+          </a:gsLst>
+          <a:lin ang="5400000" scaled="0"/>
+        </a:gradFill>
+      </a:fillStyleLst>
+      <a:lnStyleLst>
+        <a:ln w="12700" cap="flat" cmpd="sng" algn="ctr">
+          <a:solidFill>
+            <a:schemeClr val="phClr"/>
+          </a:solidFill>
+          <a:prstDash val="solid"/>
+          <a:miter lim="800000"/>
+        </a:ln>
+        <a:ln w="19050" cap="flat" cmpd="sng" algn="ctr">
+          <a:solidFill>
+            <a:schemeClr val="phClr"/>
+          </a:solidFill>
+          <a:prstDash val="solid"/>
+          <a:miter lim="800000"/>
+        </a:ln>
+        <a:ln w="25400" cap="flat" cmpd="sng" algn="ctr">
+          <a:solidFill>
+            <a:schemeClr val="phClr"/>
+          </a:solidFill>
+          <a:prstDash val="solid"/>
+          <a:miter lim="800000"/>
+        </a:ln>
+      </a:lnStyleLst>
+      <a:effectStyleLst>
+        <a:effectStyle>
+          <a:effectLst/>
+        </a:effectStyle>
+        <a:effectStyle>
+          <a:effectLst/>
+        </a:effectStyle>
+        <a:effectStyle>
+          <a:effectLst>
+            <a:outerShdw blurRad="57150" dist="19050" dir="5400000" algn="ctr" rotWithShape="0">
+              <a:srgbClr val="000000">
+                <a:alpha val="63000"/>
+              </a:srgbClr>
+            </a:outerShdw>
+          </a:effectLst>
+        </a:effectStyle>
+      </a:effectStyleLst>
+      <a:bgFillStyleLst>
+        <a:solidFill>
+          <a:schemeClr val="phClr"/>
+        </a:solidFill>
+        <a:solidFill>
+          <a:schemeClr val="phClr">
+            <a:tint val="95000"/>
+            <a:satMod val="170000"/>
+          </a:schemeClr>
+        </a:solidFill>
+        <a:gradFill rotWithShape="1">
+          <a:gsLst>
+            <a:gs pos="0">
+              <a:schemeClr val="phClr">
+                <a:tint val="93000"/>
+                <a:satMod val="150000"/>
+                <a:shade val="98000"/>
+                <a:lumMod val="102000"/>
+              </a:schemeClr>
+            </a:gs>
+            <a:gs pos="50000">
+              <a:schemeClr val="phClr">
+                <a:tint val="98000"/>
+                <a:satMod val="130000"/>
+                <a:shade val="90000"/>
+                <a:lumMod val="103000"/>
+              </a:schemeClr>
+            </a:gs>
+            <a:gs pos="100000">
+              <a:schemeClr val="phClr">
+                <a:shade val="63000"/>
+                <a:satMod val="120000"/>
+              </a:schemeClr>
+            </a:gs>
+          </a:gsLst>
+          <a:lin ang="5400000" scaled="0"/>
+        </a:gradFill>
+      </a:bgFillStyleLst>
+    </a:fmtScheme>
+  </a:themeElements>
+  <a:objectDefaults>
+    <a:lnDef>
+      <a:spPr/>
+      <a:bodyPr/>
+      <a:lstStyle/>
+      <a:style>
+        <a:lnRef idx="2">
+          <a:schemeClr val="accent1"/>
+        </a:lnRef>
+        <a:fillRef idx="0">
+          <a:schemeClr val="accent1"/>
+        </a:fillRef>
+        <a:effectRef idx="1">
+          <a:schemeClr val="accent1"/>
+        </a:effectRef>
+        <a:fontRef idx="minor">
+          <a:schemeClr val="tx1"/>
+        </a:fontRef>
+      </a:style>
+    </a:lnDef>
+  </a:objectDefaults>
+  <a:extraClrSchemeLst/>
+  <a:extLst>
+    <a:ext uri="{05A4C25C-085E-4340-85A3-A5531E510DB2}">
+      <thm15:themeFamily xmlns:thm15="http://schemas.microsoft.com/office/thememl/2012/main" name="Office Theme" id="{2E142A2C-CD16-42D6-873A-C26D2A0506FA}" vid="{1BDDFF52-6CD6-40A5-AB3C-68EB2F1E4D0A}"/>
+    </a:ext>
+  </a:extLst>
+</a:theme>
 </file>
--- a/93c56_overview.pptx
+++ b/93c56_overview.pptx
@@ -5,7 +5,7 @@
     <p:sldMasterId id="2147483648" r:id="rId1"/>
   </p:sldMasterIdLst>
   <p:notesMasterIdLst>
-    <p:notesMasterId r:id="rId22"/>
+    <p:notesMasterId r:id="rId23"/>
   </p:notesMasterIdLst>
   <p:sldIdLst>
     <p:sldId id="256" r:id="rId2"/>
@@ -28,6 +28,7 @@
     <p:sldId id="273" r:id="rId19"/>
     <p:sldId id="274" r:id="rId20"/>
     <p:sldId id="275" r:id="rId21"/>
+    <p:sldId id="276" r:id="rId22"/>
   </p:sldIdLst>
   <p:sldSz cx="9144000" cy="5143500" type="screen16x9"/>
   <p:notesSz cx="5143500" cy="9144000"/>
@@ -1699,6 +1700,13 @@
             <a:prstDash val="solid"/>
           </a:ln>
         </p:spPr>
+        <p:txBody>
+          <a:bodyPr/>
+          <a:lstStyle/>
+          <a:p>
+            <a:endParaRPr lang="ko-KR" altLang="en-US"/>
+          </a:p>
+        </p:txBody>
       </p:sp>
       <p:sp>
         <p:nvSpPr>
@@ -1800,6 +1808,13 @@
             <a:prstDash val="solid"/>
           </a:ln>
         </p:spPr>
+        <p:txBody>
+          <a:bodyPr/>
+          <a:lstStyle/>
+          <a:p>
+            <a:endParaRPr lang="ko-KR" altLang="en-US"/>
+          </a:p>
+        </p:txBody>
       </p:sp>
       <p:sp>
         <p:nvSpPr>
@@ -3165,6 +3180,13 @@
             <a:prstDash val="solid"/>
           </a:ln>
         </p:spPr>
+        <p:txBody>
+          <a:bodyPr/>
+          <a:lstStyle/>
+          <a:p>
+            <a:endParaRPr lang="ko-KR" altLang="en-US"/>
+          </a:p>
+        </p:txBody>
       </p:sp>
       <p:sp>
         <p:nvSpPr>
@@ -3302,6 +3324,13 @@
           </a:solidFill>
           <a:ln/>
         </p:spPr>
+        <p:txBody>
+          <a:bodyPr/>
+          <a:lstStyle/>
+          <a:p>
+            <a:endParaRPr lang="ko-KR" altLang="en-US"/>
+          </a:p>
+        </p:txBody>
       </p:sp>
       <p:sp>
         <p:nvSpPr>
@@ -3361,6 +3390,13 @@
           </a:solidFill>
           <a:ln/>
         </p:spPr>
+        <p:txBody>
+          <a:bodyPr/>
+          <a:lstStyle/>
+          <a:p>
+            <a:endParaRPr lang="ko-KR" altLang="en-US"/>
+          </a:p>
+        </p:txBody>
       </p:sp>
       <p:sp>
         <p:nvSpPr>
@@ -3537,6 +3573,13 @@
           </a:solidFill>
           <a:ln/>
         </p:spPr>
+        <p:txBody>
+          <a:bodyPr/>
+          <a:lstStyle/>
+          <a:p>
+            <a:endParaRPr lang="ko-KR" altLang="en-US"/>
+          </a:p>
+        </p:txBody>
       </p:sp>
       <p:sp>
         <p:nvSpPr>
@@ -3713,6 +3756,13 @@
           </a:solidFill>
           <a:ln/>
         </p:spPr>
+        <p:txBody>
+          <a:bodyPr/>
+          <a:lstStyle/>
+          <a:p>
+            <a:endParaRPr lang="ko-KR" altLang="en-US"/>
+          </a:p>
+        </p:txBody>
       </p:sp>
       <p:sp>
         <p:nvSpPr>
@@ -3889,6 +3939,13 @@
           </a:solidFill>
           <a:ln/>
         </p:spPr>
+        <p:txBody>
+          <a:bodyPr/>
+          <a:lstStyle/>
+          <a:p>
+            <a:endParaRPr lang="ko-KR" altLang="en-US"/>
+          </a:p>
+        </p:txBody>
       </p:sp>
       <p:sp>
         <p:nvSpPr>
@@ -4065,6 +4122,13 @@
           </a:solidFill>
           <a:ln/>
         </p:spPr>
+        <p:txBody>
+          <a:bodyPr/>
+          <a:lstStyle/>
+          <a:p>
+            <a:endParaRPr lang="ko-KR" altLang="en-US"/>
+          </a:p>
+        </p:txBody>
       </p:sp>
       <p:sp>
         <p:nvSpPr>
@@ -4241,6 +4305,13 @@
           </a:solidFill>
           <a:ln/>
         </p:spPr>
+        <p:txBody>
+          <a:bodyPr/>
+          <a:lstStyle/>
+          <a:p>
+            <a:endParaRPr lang="ko-KR" altLang="en-US"/>
+          </a:p>
+        </p:txBody>
       </p:sp>
       <p:sp>
         <p:nvSpPr>
@@ -4417,6 +4488,13 @@
           </a:solidFill>
           <a:ln/>
         </p:spPr>
+        <p:txBody>
+          <a:bodyPr/>
+          <a:lstStyle/>
+          <a:p>
+            <a:endParaRPr lang="ko-KR" altLang="en-US"/>
+          </a:p>
+        </p:txBody>
       </p:sp>
       <p:sp>
         <p:nvSpPr>
@@ -4585,6 +4663,14 @@
 <file path=ppt/slides/slide12.xml><?xml version="1.0" encoding="utf-8"?>
 <p:sld xmlns:a="http://schemas.openxmlformats.org/drawingml/2006/main" xmlns:r="http://schemas.openxmlformats.org/officeDocument/2006/relationships" xmlns:p="http://schemas.openxmlformats.org/presentationml/2006/main">
   <p:cSld name="Slide 12">
+    <p:bg>
+      <p:bgPr>
+        <a:solidFill>
+          <a:srgbClr val="FFFFFF"/>
+        </a:solidFill>
+        <a:effectLst/>
+      </p:bgPr>
+    </p:bg>
     <p:spTree>
       <p:nvGrpSpPr>
         <p:cNvPr id="1" name=""/>
@@ -4601,1335 +4687,696 @@
       </p:grpSpPr>
       <p:sp>
         <p:nvSpPr>
-          <p:cNvPr id="2" name="Text 0"/>
-          <p:cNvSpPr/>
-          <p:nvPr/>
-        </p:nvSpPr>
-        <p:spPr>
-          <a:xfrm>
-            <a:off x="457200" y="182880"/>
-            <a:ext cx="8229600" cy="548640"/>
-          </a:xfrm>
-          <a:prstGeom prst="rect">
-            <a:avLst/>
-          </a:prstGeom>
-          <a:noFill/>
-          <a:ln/>
-        </p:spPr>
-        <p:txBody>
-          <a:bodyPr wrap="square" lIns="0" tIns="0" rIns="0" bIns="0" rtlCol="0" anchor="ctr"/>
-          <a:lstStyle/>
-          <a:p>
-            <a:pPr marL="0" indent="0">
-              <a:buNone/>
-            </a:pPr>
-            <a:r>
-              <a:rPr lang="en-US" sz="2800" b="1" dirty="0">
+          <p:cNvPr id="2" name="TextBox 1"/>
+          <p:cNvSpPr txBox="1"/>
+          <p:nvPr/>
+        </p:nvSpPr>
+        <p:spPr>
+          <a:xfrm>
+            <a:off x="457200" y="201168"/>
+            <a:ext cx="11247120" cy="640080"/>
+          </a:xfrm>
+          <a:prstGeom prst="rect">
+            <a:avLst/>
+          </a:prstGeom>
+          <a:noFill/>
+        </p:spPr>
+        <p:txBody>
+          <a:bodyPr wrap="square">
+            <a:spAutoFit/>
+          </a:bodyPr>
+          <a:lstStyle/>
+          <a:p>
+            <a:pPr algn="l"/>
+            <a:r>
+              <a:rPr sz="2800" b="1" i="0">
                 <a:solidFill>
                   <a:srgbClr val="000000"/>
                 </a:solidFill>
-                <a:latin typeface="Arial Black" pitchFamily="34" charset="0"/>
-                <a:ea typeface="Arial Black" pitchFamily="34" charset="-122"/>
-                <a:cs typeface="Arial Black" pitchFamily="34" charset="-120"/>
-              </a:rPr>
-              <a:t>음성 메시지 안내 (8종)</a:t>
-            </a:r>
-            <a:endParaRPr lang="en-US" sz="2800" dirty="0"/>
-          </a:p>
-        </p:txBody>
-      </p:sp>
-      <p:sp>
-        <p:nvSpPr>
-          <p:cNvPr id="3" name="Shape 1"/>
-          <p:cNvSpPr/>
-          <p:nvPr/>
-        </p:nvSpPr>
-        <p:spPr>
-          <a:xfrm>
-            <a:off x="457200" y="731520"/>
-            <a:ext cx="8229600" cy="0"/>
-          </a:xfrm>
-          <a:prstGeom prst="line">
-            <a:avLst/>
-          </a:prstGeom>
-          <a:noFill/>
-          <a:ln w="19050">
-            <a:solidFill>
-              <a:srgbClr val="000000"/>
-            </a:solidFill>
-            <a:prstDash val="solid"/>
+              </a:rPr>
+              <a:t>음성 메시지 안내 (7종)</a:t>
+            </a:r>
+          </a:p>
+        </p:txBody>
+      </p:sp>
+      <p:sp>
+        <p:nvSpPr>
+          <p:cNvPr id="3" name="Rectangle 2"/>
+          <p:cNvSpPr/>
+          <p:nvPr/>
+        </p:nvSpPr>
+        <p:spPr>
+          <a:xfrm>
+            <a:off x="457200" y="896112"/>
+            <a:ext cx="11247120" cy="18288"/>
+          </a:xfrm>
+          <a:prstGeom prst="rect">
+            <a:avLst/>
+          </a:prstGeom>
+          <a:solidFill>
+            <a:srgbClr val="BBBBBB"/>
+          </a:solidFill>
+          <a:ln>
+            <a:noFill/>
           </a:ln>
         </p:spPr>
-      </p:sp>
-      <p:sp>
-        <p:nvSpPr>
-          <p:cNvPr id="4" name="Text 2"/>
-          <p:cNvSpPr/>
-          <p:nvPr/>
-        </p:nvSpPr>
-        <p:spPr>
-          <a:xfrm>
-            <a:off x="640080" y="809244"/>
-            <a:ext cx="8229600" cy="274320"/>
-          </a:xfrm>
-          <a:prstGeom prst="rect">
-            <a:avLst/>
-          </a:prstGeom>
-          <a:noFill/>
-          <a:ln/>
-        </p:spPr>
-        <p:txBody>
-          <a:bodyPr wrap="square" lIns="0" tIns="0" rIns="0" bIns="0" rtlCol="0" anchor="ctr"/>
-          <a:lstStyle/>
-          <a:p>
-            <a:pPr marL="0" indent="0">
-              <a:buNone/>
-            </a:pPr>
-            <a:r>
-              <a:rPr lang="en-US" sz="1000" i="1" dirty="0">
-                <a:solidFill>
-                  <a:srgbClr val="666666"/>
-                </a:solidFill>
-                <a:latin typeface="Arial" pitchFamily="34" charset="0"/>
-                <a:ea typeface="Arial" pitchFamily="34" charset="-122"/>
-                <a:cs typeface="Arial" pitchFamily="34" charset="-120"/>
-              </a:rPr>
-              <a:t>gen_voice.py 로 Windows TTS(Heami)에서 자동 생성, 8kHz 16bit 모노 PCM</a:t>
-            </a:r>
-            <a:endParaRPr lang="en-US" sz="1000" dirty="0"/>
-          </a:p>
-        </p:txBody>
-      </p:sp>
-      <p:sp>
-        <p:nvSpPr>
-          <p:cNvPr id="5" name="Shape 3"/>
-          <p:cNvSpPr/>
-          <p:nvPr/>
-        </p:nvSpPr>
-        <p:spPr>
-          <a:xfrm>
-            <a:off x="457200" y="1143000"/>
-            <a:ext cx="8229600" cy="347472"/>
-          </a:xfrm>
-          <a:prstGeom prst="rect">
-            <a:avLst/>
-          </a:prstGeom>
-          <a:solidFill>
-            <a:srgbClr val="000000"/>
-          </a:solidFill>
-          <a:ln/>
-        </p:spPr>
-      </p:sp>
-      <p:sp>
-        <p:nvSpPr>
-          <p:cNvPr id="6" name="Text 4"/>
-          <p:cNvSpPr/>
-          <p:nvPr/>
-        </p:nvSpPr>
-        <p:spPr>
-          <a:xfrm>
-            <a:off x="548640" y="1143000"/>
-            <a:ext cx="365760" cy="347472"/>
-          </a:xfrm>
-          <a:prstGeom prst="rect">
-            <a:avLst/>
-          </a:prstGeom>
-          <a:noFill/>
-          <a:ln/>
-        </p:spPr>
-        <p:txBody>
-          <a:bodyPr wrap="square" lIns="0" tIns="0" rIns="0" bIns="0" rtlCol="0" anchor="ctr"/>
-          <a:lstStyle/>
-          <a:p>
-            <a:pPr marL="0" indent="0">
-              <a:buNone/>
-            </a:pPr>
-            <a:r>
-              <a:rPr lang="en-US" sz="1000" b="1" dirty="0">
-                <a:solidFill>
-                  <a:srgbClr val="FFFFFF"/>
-                </a:solidFill>
-                <a:latin typeface="Arial" pitchFamily="34" charset="0"/>
-                <a:ea typeface="Arial" pitchFamily="34" charset="-122"/>
-                <a:cs typeface="Arial" pitchFamily="34" charset="-120"/>
-              </a:rPr>
-              <a:t>#</a:t>
-            </a:r>
-            <a:endParaRPr lang="en-US" sz="1000" dirty="0"/>
-          </a:p>
-        </p:txBody>
-      </p:sp>
-      <p:sp>
-        <p:nvSpPr>
-          <p:cNvPr id="7" name="Text 5"/>
-          <p:cNvSpPr/>
-          <p:nvPr/>
-        </p:nvSpPr>
-        <p:spPr>
-          <a:xfrm>
-            <a:off x="1005840" y="1143000"/>
-            <a:ext cx="3657600" cy="347472"/>
-          </a:xfrm>
-          <a:prstGeom prst="rect">
-            <a:avLst/>
-          </a:prstGeom>
-          <a:noFill/>
-          <a:ln/>
-        </p:spPr>
-        <p:txBody>
-          <a:bodyPr wrap="square" lIns="0" tIns="0" rIns="0" bIns="0" rtlCol="0" anchor="ctr"/>
-          <a:lstStyle/>
-          <a:p>
-            <a:pPr marL="0" indent="0">
-              <a:buNone/>
-            </a:pPr>
-            <a:r>
-              <a:rPr lang="en-US" sz="1000" b="1" dirty="0">
-                <a:solidFill>
-                  <a:srgbClr val="FFFFFF"/>
-                </a:solidFill>
-                <a:latin typeface="Arial" pitchFamily="34" charset="0"/>
-                <a:ea typeface="Arial" pitchFamily="34" charset="-122"/>
-                <a:cs typeface="Arial" pitchFamily="34" charset="-120"/>
-              </a:rPr>
-              <a:t>음성 내용</a:t>
-            </a:r>
-            <a:endParaRPr lang="en-US" sz="1000" dirty="0"/>
-          </a:p>
-        </p:txBody>
-      </p:sp>
-      <p:sp>
-        <p:nvSpPr>
-          <p:cNvPr id="8" name="Text 6"/>
-          <p:cNvSpPr/>
-          <p:nvPr/>
-        </p:nvSpPr>
-        <p:spPr>
-          <a:xfrm>
-            <a:off x="4754880" y="1143000"/>
-            <a:ext cx="3931920" cy="347472"/>
-          </a:xfrm>
-          <a:prstGeom prst="rect">
-            <a:avLst/>
-          </a:prstGeom>
-          <a:noFill/>
-          <a:ln/>
-        </p:spPr>
-        <p:txBody>
-          <a:bodyPr wrap="square" lIns="0" tIns="0" rIns="0" bIns="0" rtlCol="0" anchor="ctr"/>
-          <a:lstStyle/>
-          <a:p>
-            <a:pPr marL="0" indent="0">
-              <a:buNone/>
-            </a:pPr>
-            <a:r>
-              <a:rPr lang="en-US" sz="1000" b="1" dirty="0">
-                <a:solidFill>
-                  <a:srgbClr val="FFFFFF"/>
-                </a:solidFill>
-                <a:latin typeface="Arial" pitchFamily="34" charset="0"/>
-                <a:ea typeface="Arial" pitchFamily="34" charset="-122"/>
-                <a:cs typeface="Arial" pitchFamily="34" charset="-120"/>
-              </a:rPr>
-              <a:t>사용 시점</a:t>
-            </a:r>
-            <a:endParaRPr lang="en-US" sz="1000" dirty="0"/>
-          </a:p>
-        </p:txBody>
-      </p:sp>
-      <p:sp>
-        <p:nvSpPr>
-          <p:cNvPr id="9" name="Shape 7"/>
-          <p:cNvSpPr/>
-          <p:nvPr/>
-        </p:nvSpPr>
-        <p:spPr>
-          <a:xfrm>
-            <a:off x="457200" y="1536192"/>
-            <a:ext cx="8229600" cy="384048"/>
-          </a:xfrm>
-          <a:prstGeom prst="rect">
-            <a:avLst/>
-          </a:prstGeom>
-          <a:solidFill>
-            <a:srgbClr val="DDDDDD"/>
-          </a:solidFill>
-          <a:ln/>
-        </p:spPr>
-      </p:sp>
-      <p:sp>
-        <p:nvSpPr>
-          <p:cNvPr id="10" name="Text 8"/>
-          <p:cNvSpPr/>
-          <p:nvPr/>
-        </p:nvSpPr>
-        <p:spPr>
-          <a:xfrm>
-            <a:off x="548640" y="1536192"/>
-            <a:ext cx="365760" cy="384048"/>
-          </a:xfrm>
-          <a:prstGeom prst="rect">
-            <a:avLst/>
-          </a:prstGeom>
-          <a:noFill/>
-          <a:ln/>
-        </p:spPr>
-        <p:txBody>
-          <a:bodyPr wrap="square" lIns="0" tIns="0" rIns="0" bIns="0" rtlCol="0" anchor="ctr"/>
-          <a:lstStyle/>
-          <a:p>
-            <a:pPr marL="0" indent="0" algn="ctr">
-              <a:buNone/>
-            </a:pPr>
-            <a:r>
-              <a:rPr lang="en-US" sz="1000" dirty="0">
-                <a:solidFill>
-                  <a:srgbClr val="666666"/>
-                </a:solidFill>
-                <a:latin typeface="Arial" pitchFamily="34" charset="0"/>
-                <a:ea typeface="Arial" pitchFamily="34" charset="-122"/>
-                <a:cs typeface="Arial" pitchFamily="34" charset="-120"/>
-              </a:rPr>
-              <a:t>0</a:t>
-            </a:r>
-            <a:endParaRPr lang="en-US" sz="1000" dirty="0"/>
-          </a:p>
-        </p:txBody>
-      </p:sp>
-      <p:sp>
-        <p:nvSpPr>
-          <p:cNvPr id="11" name="Text 9"/>
-          <p:cNvSpPr/>
-          <p:nvPr/>
-        </p:nvSpPr>
-        <p:spPr>
-          <a:xfrm>
-            <a:off x="1005840" y="1536192"/>
-            <a:ext cx="3657600" cy="384048"/>
-          </a:xfrm>
-          <a:prstGeom prst="rect">
-            <a:avLst/>
-          </a:prstGeom>
-          <a:noFill/>
-          <a:ln/>
-        </p:spPr>
-        <p:txBody>
-          <a:bodyPr wrap="square" lIns="0" tIns="0" rIns="0" bIns="0" rtlCol="0" anchor="ctr"/>
-          <a:lstStyle/>
-          <a:p>
-            <a:pPr marL="0" indent="0">
-              <a:buNone/>
-            </a:pPr>
-            <a:r>
-              <a:rPr lang="en-US" sz="1100" b="1" dirty="0">
-                <a:solidFill>
-                  <a:srgbClr val="000000"/>
-                </a:solidFill>
-                <a:latin typeface="Arial" pitchFamily="34" charset="0"/>
-                <a:ea typeface="Arial" pitchFamily="34" charset="-122"/>
-                <a:cs typeface="Arial" pitchFamily="34" charset="-120"/>
-              </a:rPr>
-              <a:t>이장치는 디에스이 아이엔시의 디아지 팁용 프로그래머입니다</a:t>
-            </a:r>
-            <a:endParaRPr lang="en-US" sz="1100" dirty="0"/>
-          </a:p>
-        </p:txBody>
-      </p:sp>
-      <p:sp>
-        <p:nvSpPr>
-          <p:cNvPr id="12" name="Text 10"/>
-          <p:cNvSpPr/>
-          <p:nvPr/>
-        </p:nvSpPr>
-        <p:spPr>
-          <a:xfrm>
-            <a:off x="4754880" y="1536192"/>
-            <a:ext cx="3931920" cy="384048"/>
-          </a:xfrm>
-          <a:prstGeom prst="rect">
-            <a:avLst/>
-          </a:prstGeom>
-          <a:noFill/>
-          <a:ln/>
-        </p:spPr>
-        <p:txBody>
-          <a:bodyPr wrap="square" lIns="0" tIns="0" rIns="0" bIns="0" rtlCol="0" anchor="ctr"/>
-          <a:lstStyle/>
-          <a:p>
-            <a:pPr marL="0" indent="0">
-              <a:buNone/>
-            </a:pPr>
-            <a:r>
-              <a:rPr lang="en-US" sz="1000" dirty="0">
-                <a:solidFill>
-                  <a:srgbClr val="333333"/>
-                </a:solidFill>
-                <a:latin typeface="Arial" pitchFamily="34" charset="0"/>
-                <a:ea typeface="Arial" pitchFamily="34" charset="-122"/>
-                <a:cs typeface="Arial" pitchFamily="34" charset="-120"/>
-              </a:rPr>
-              <a:t>전원 ON 직후 (최초 1회)</a:t>
-            </a:r>
-            <a:endParaRPr lang="en-US" sz="1000" dirty="0"/>
-          </a:p>
-        </p:txBody>
-      </p:sp>
-      <p:sp>
-        <p:nvSpPr>
-          <p:cNvPr id="13" name="Shape 11"/>
-          <p:cNvSpPr/>
-          <p:nvPr/>
-        </p:nvSpPr>
-        <p:spPr>
-          <a:xfrm>
-            <a:off x="457200" y="1938528"/>
-            <a:ext cx="8229600" cy="384048"/>
-          </a:xfrm>
-          <a:prstGeom prst="rect">
-            <a:avLst/>
-          </a:prstGeom>
-          <a:solidFill>
-            <a:srgbClr val="FFFFFF"/>
-          </a:solidFill>
-          <a:ln/>
-        </p:spPr>
-      </p:sp>
-      <p:sp>
-        <p:nvSpPr>
-          <p:cNvPr id="14" name="Text 12"/>
-          <p:cNvSpPr/>
-          <p:nvPr/>
-        </p:nvSpPr>
-        <p:spPr>
-          <a:xfrm>
-            <a:off x="548640" y="1938528"/>
-            <a:ext cx="365760" cy="384048"/>
-          </a:xfrm>
-          <a:prstGeom prst="rect">
-            <a:avLst/>
-          </a:prstGeom>
-          <a:noFill/>
-          <a:ln/>
-        </p:spPr>
-        <p:txBody>
-          <a:bodyPr wrap="square" lIns="0" tIns="0" rIns="0" bIns="0" rtlCol="0" anchor="ctr"/>
-          <a:lstStyle/>
-          <a:p>
-            <a:pPr marL="0" indent="0" algn="ctr">
-              <a:buNone/>
-            </a:pPr>
-            <a:r>
-              <a:rPr lang="en-US" sz="1000" dirty="0">
-                <a:solidFill>
-                  <a:srgbClr val="666666"/>
-                </a:solidFill>
-                <a:latin typeface="Arial" pitchFamily="34" charset="0"/>
-                <a:ea typeface="Arial" pitchFamily="34" charset="-122"/>
-                <a:cs typeface="Arial" pitchFamily="34" charset="-120"/>
-              </a:rPr>
-              <a:t>1</a:t>
-            </a:r>
-            <a:endParaRPr lang="en-US" sz="1000" dirty="0"/>
-          </a:p>
-        </p:txBody>
-      </p:sp>
-      <p:sp>
-        <p:nvSpPr>
-          <p:cNvPr id="15" name="Text 13"/>
-          <p:cNvSpPr/>
-          <p:nvPr/>
-        </p:nvSpPr>
-        <p:spPr>
-          <a:xfrm>
-            <a:off x="1005840" y="1938528"/>
-            <a:ext cx="3657600" cy="384048"/>
-          </a:xfrm>
-          <a:prstGeom prst="rect">
-            <a:avLst/>
-          </a:prstGeom>
-          <a:noFill/>
-          <a:ln/>
-        </p:spPr>
-        <p:txBody>
-          <a:bodyPr wrap="square" lIns="0" tIns="0" rIns="0" bIns="0" rtlCol="0" anchor="ctr"/>
-          <a:lstStyle/>
-          <a:p>
-            <a:pPr marL="0" indent="0">
-              <a:buNone/>
-            </a:pPr>
-            <a:r>
-              <a:rPr lang="en-US" sz="1100" b="1" dirty="0">
-                <a:solidFill>
-                  <a:srgbClr val="000000"/>
-                </a:solidFill>
-                <a:latin typeface="Arial" pitchFamily="34" charset="0"/>
-                <a:ea typeface="Arial" pitchFamily="34" charset="-122"/>
-                <a:cs typeface="Arial" pitchFamily="34" charset="-120"/>
-              </a:rPr>
-              <a:t>디아지용 팁 보드를 올려주세요</a:t>
-            </a:r>
-            <a:endParaRPr lang="en-US" sz="1100" dirty="0"/>
-          </a:p>
-        </p:txBody>
-      </p:sp>
-      <p:sp>
-        <p:nvSpPr>
-          <p:cNvPr id="16" name="Text 14"/>
-          <p:cNvSpPr/>
-          <p:nvPr/>
-        </p:nvSpPr>
-        <p:spPr>
-          <a:xfrm>
-            <a:off x="4754880" y="1938528"/>
-            <a:ext cx="3931920" cy="384048"/>
-          </a:xfrm>
-          <a:prstGeom prst="rect">
-            <a:avLst/>
-          </a:prstGeom>
-          <a:noFill/>
-          <a:ln/>
-        </p:spPr>
-        <p:txBody>
-          <a:bodyPr wrap="square" lIns="0" tIns="0" rIns="0" bIns="0" rtlCol="0" anchor="ctr"/>
-          <a:lstStyle/>
-          <a:p>
-            <a:pPr marL="0" indent="0">
-              <a:buNone/>
-            </a:pPr>
-            <a:r>
-              <a:rPr lang="en-US" sz="1000" dirty="0">
-                <a:solidFill>
-                  <a:srgbClr val="333333"/>
-                </a:solidFill>
-                <a:latin typeface="Arial" pitchFamily="34" charset="0"/>
-                <a:ea typeface="Arial" pitchFamily="34" charset="-122"/>
-                <a:cs typeface="Arial" pitchFamily="34" charset="-120"/>
-              </a:rPr>
-              <a:t>상태 A: LED 쇼 중 보드 대기</a:t>
-            </a:r>
-            <a:endParaRPr lang="en-US" sz="1000" dirty="0"/>
-          </a:p>
-        </p:txBody>
-      </p:sp>
-      <p:sp>
-        <p:nvSpPr>
-          <p:cNvPr id="17" name="Shape 15"/>
-          <p:cNvSpPr/>
-          <p:nvPr/>
-        </p:nvSpPr>
-        <p:spPr>
-          <a:xfrm>
-            <a:off x="457200" y="2340864"/>
-            <a:ext cx="8229600" cy="384048"/>
-          </a:xfrm>
-          <a:prstGeom prst="rect">
-            <a:avLst/>
-          </a:prstGeom>
-          <a:solidFill>
-            <a:srgbClr val="DDDDDD"/>
-          </a:solidFill>
-          <a:ln/>
-        </p:spPr>
-      </p:sp>
-      <p:sp>
-        <p:nvSpPr>
-          <p:cNvPr id="18" name="Text 16"/>
-          <p:cNvSpPr/>
-          <p:nvPr/>
-        </p:nvSpPr>
-        <p:spPr>
-          <a:xfrm>
-            <a:off x="548640" y="2340864"/>
-            <a:ext cx="365760" cy="384048"/>
-          </a:xfrm>
-          <a:prstGeom prst="rect">
-            <a:avLst/>
-          </a:prstGeom>
-          <a:noFill/>
-          <a:ln/>
-        </p:spPr>
-        <p:txBody>
-          <a:bodyPr wrap="square" lIns="0" tIns="0" rIns="0" bIns="0" rtlCol="0" anchor="ctr"/>
-          <a:lstStyle/>
-          <a:p>
-            <a:pPr marL="0" indent="0" algn="ctr">
-              <a:buNone/>
-            </a:pPr>
-            <a:r>
-              <a:rPr lang="en-US" sz="1000" dirty="0">
-                <a:solidFill>
-                  <a:srgbClr val="666666"/>
-                </a:solidFill>
-                <a:latin typeface="Arial" pitchFamily="34" charset="0"/>
-                <a:ea typeface="Arial" pitchFamily="34" charset="-122"/>
-                <a:cs typeface="Arial" pitchFamily="34" charset="-120"/>
-              </a:rPr>
-              <a:t>2</a:t>
-            </a:r>
-            <a:endParaRPr lang="en-US" sz="1000" dirty="0"/>
-          </a:p>
-        </p:txBody>
-      </p:sp>
-      <p:sp>
-        <p:nvSpPr>
-          <p:cNvPr id="19" name="Text 17"/>
-          <p:cNvSpPr/>
-          <p:nvPr/>
-        </p:nvSpPr>
-        <p:spPr>
-          <a:xfrm>
-            <a:off x="1005840" y="2340864"/>
-            <a:ext cx="3657600" cy="384048"/>
-          </a:xfrm>
-          <a:prstGeom prst="rect">
-            <a:avLst/>
-          </a:prstGeom>
-          <a:noFill/>
-          <a:ln/>
-        </p:spPr>
-        <p:txBody>
-          <a:bodyPr wrap="square" lIns="0" tIns="0" rIns="0" bIns="0" rtlCol="0" anchor="ctr"/>
-          <a:lstStyle/>
-          <a:p>
-            <a:pPr marL="0" indent="0">
-              <a:buNone/>
-            </a:pPr>
-            <a:r>
-              <a:rPr lang="en-US" sz="1100" b="1" dirty="0">
-                <a:solidFill>
-                  <a:srgbClr val="000000"/>
-                </a:solidFill>
-                <a:latin typeface="Arial" pitchFamily="34" charset="0"/>
-                <a:ea typeface="Arial" pitchFamily="34" charset="-122"/>
-                <a:cs typeface="Arial" pitchFamily="34" charset="-120"/>
-              </a:rPr>
-              <a:t>프로그램이 완료되었습니다</a:t>
-            </a:r>
-            <a:endParaRPr lang="en-US" sz="1100" dirty="0"/>
-          </a:p>
-        </p:txBody>
-      </p:sp>
-      <p:sp>
-        <p:nvSpPr>
-          <p:cNvPr id="20" name="Text 18"/>
-          <p:cNvSpPr/>
-          <p:nvPr/>
-        </p:nvSpPr>
-        <p:spPr>
-          <a:xfrm>
-            <a:off x="4754880" y="2340864"/>
-            <a:ext cx="3931920" cy="384048"/>
-          </a:xfrm>
-          <a:prstGeom prst="rect">
-            <a:avLst/>
-          </a:prstGeom>
-          <a:noFill/>
-          <a:ln/>
-        </p:spPr>
-        <p:txBody>
-          <a:bodyPr wrap="square" lIns="0" tIns="0" rIns="0" bIns="0" rtlCol="0" anchor="ctr"/>
-          <a:lstStyle/>
-          <a:p>
-            <a:pPr marL="0" indent="0">
-              <a:buNone/>
-            </a:pPr>
-            <a:r>
-              <a:rPr lang="en-US" sz="1000" dirty="0">
-                <a:solidFill>
-                  <a:srgbClr val="333333"/>
-                </a:solidFill>
-                <a:latin typeface="Arial" pitchFamily="34" charset="0"/>
-                <a:ea typeface="Arial" pitchFamily="34" charset="-122"/>
-                <a:cs typeface="Arial" pitchFamily="34" charset="-120"/>
-              </a:rPr>
-              <a:t>상태 E: 프로그래밍 성공 후</a:t>
-            </a:r>
-            <a:endParaRPr lang="en-US" sz="1000" dirty="0"/>
-          </a:p>
-        </p:txBody>
-      </p:sp>
-      <p:sp>
-        <p:nvSpPr>
-          <p:cNvPr id="21" name="Shape 19"/>
-          <p:cNvSpPr/>
-          <p:nvPr/>
-        </p:nvSpPr>
-        <p:spPr>
-          <a:xfrm>
-            <a:off x="457200" y="2743200"/>
-            <a:ext cx="8229600" cy="384048"/>
-          </a:xfrm>
-          <a:prstGeom prst="rect">
-            <a:avLst/>
-          </a:prstGeom>
-          <a:solidFill>
-            <a:srgbClr val="FFFFFF"/>
-          </a:solidFill>
-          <a:ln/>
-        </p:spPr>
-      </p:sp>
-      <p:sp>
-        <p:nvSpPr>
-          <p:cNvPr id="22" name="Text 20"/>
-          <p:cNvSpPr/>
-          <p:nvPr/>
-        </p:nvSpPr>
-        <p:spPr>
-          <a:xfrm>
-            <a:off x="548640" y="2743200"/>
-            <a:ext cx="365760" cy="384048"/>
-          </a:xfrm>
-          <a:prstGeom prst="rect">
-            <a:avLst/>
-          </a:prstGeom>
-          <a:noFill/>
-          <a:ln/>
-        </p:spPr>
-        <p:txBody>
-          <a:bodyPr wrap="square" lIns="0" tIns="0" rIns="0" bIns="0" rtlCol="0" anchor="ctr"/>
-          <a:lstStyle/>
-          <a:p>
-            <a:pPr marL="0" indent="0" algn="ctr">
-              <a:buNone/>
-            </a:pPr>
-            <a:r>
-              <a:rPr lang="en-US" sz="1000" dirty="0">
-                <a:solidFill>
-                  <a:srgbClr val="666666"/>
-                </a:solidFill>
-                <a:latin typeface="Arial" pitchFamily="34" charset="0"/>
-                <a:ea typeface="Arial" pitchFamily="34" charset="-122"/>
-                <a:cs typeface="Arial" pitchFamily="34" charset="-120"/>
-              </a:rPr>
-              <a:t>3</a:t>
-            </a:r>
-            <a:endParaRPr lang="en-US" sz="1000" dirty="0"/>
-          </a:p>
-        </p:txBody>
-      </p:sp>
-      <p:sp>
-        <p:nvSpPr>
-          <p:cNvPr id="23" name="Text 21"/>
-          <p:cNvSpPr/>
-          <p:nvPr/>
-        </p:nvSpPr>
-        <p:spPr>
-          <a:xfrm>
-            <a:off x="1005840" y="2743200"/>
-            <a:ext cx="3657600" cy="384048"/>
-          </a:xfrm>
-          <a:prstGeom prst="rect">
-            <a:avLst/>
-          </a:prstGeom>
-          <a:noFill/>
-          <a:ln/>
-        </p:spPr>
-        <p:txBody>
-          <a:bodyPr wrap="square" lIns="0" tIns="0" rIns="0" bIns="0" rtlCol="0" anchor="ctr"/>
-          <a:lstStyle/>
-          <a:p>
-            <a:pPr marL="0" indent="0">
-              <a:buNone/>
-            </a:pPr>
-            <a:r>
-              <a:rPr lang="en-US" sz="1100" b="1" dirty="0">
-                <a:solidFill>
-                  <a:srgbClr val="000000"/>
-                </a:solidFill>
-                <a:latin typeface="Arial" pitchFamily="34" charset="0"/>
-                <a:ea typeface="Arial" pitchFamily="34" charset="-122"/>
-                <a:cs typeface="Arial" pitchFamily="34" charset="-120"/>
-              </a:rPr>
-              <a:t>적색 표시는 불량입니다</a:t>
-            </a:r>
-            <a:endParaRPr lang="en-US" sz="1100" dirty="0"/>
-          </a:p>
-        </p:txBody>
-      </p:sp>
-      <p:sp>
-        <p:nvSpPr>
-          <p:cNvPr id="24" name="Text 22"/>
-          <p:cNvSpPr/>
-          <p:nvPr/>
-        </p:nvSpPr>
-        <p:spPr>
-          <a:xfrm>
-            <a:off x="4754880" y="2743200"/>
-            <a:ext cx="3931920" cy="384048"/>
-          </a:xfrm>
-          <a:prstGeom prst="rect">
-            <a:avLst/>
-          </a:prstGeom>
-          <a:noFill/>
-          <a:ln/>
-        </p:spPr>
-        <p:txBody>
-          <a:bodyPr wrap="square" lIns="0" tIns="0" rIns="0" bIns="0" rtlCol="0" anchor="ctr"/>
-          <a:lstStyle/>
-          <a:p>
-            <a:pPr marL="0" indent="0">
-              <a:buNone/>
-            </a:pPr>
-            <a:r>
-              <a:rPr lang="en-US" sz="1000" dirty="0">
-                <a:solidFill>
-                  <a:srgbClr val="333333"/>
-                </a:solidFill>
-                <a:latin typeface="Arial" pitchFamily="34" charset="0"/>
-                <a:ea typeface="Arial" pitchFamily="34" charset="-122"/>
-                <a:cs typeface="Arial" pitchFamily="34" charset="-120"/>
-              </a:rPr>
-              <a:t>상태 E: 불량 칩이 있을 때</a:t>
-            </a:r>
-            <a:endParaRPr lang="en-US" sz="1000" dirty="0"/>
-          </a:p>
-        </p:txBody>
-      </p:sp>
-      <p:sp>
-        <p:nvSpPr>
-          <p:cNvPr id="25" name="Shape 23"/>
-          <p:cNvSpPr/>
-          <p:nvPr/>
-        </p:nvSpPr>
-        <p:spPr>
-          <a:xfrm>
-            <a:off x="457200" y="3145536"/>
-            <a:ext cx="8229600" cy="384048"/>
-          </a:xfrm>
-          <a:prstGeom prst="rect">
-            <a:avLst/>
-          </a:prstGeom>
-          <a:solidFill>
-            <a:srgbClr val="DDDDDD"/>
-          </a:solidFill>
-          <a:ln/>
-        </p:spPr>
-      </p:sp>
-      <p:sp>
-        <p:nvSpPr>
-          <p:cNvPr id="26" name="Text 24"/>
-          <p:cNvSpPr/>
-          <p:nvPr/>
-        </p:nvSpPr>
-        <p:spPr>
-          <a:xfrm>
-            <a:off x="548640" y="3145536"/>
-            <a:ext cx="365760" cy="384048"/>
-          </a:xfrm>
-          <a:prstGeom prst="rect">
-            <a:avLst/>
-          </a:prstGeom>
-          <a:noFill/>
-          <a:ln/>
-        </p:spPr>
-        <p:txBody>
-          <a:bodyPr wrap="square" lIns="0" tIns="0" rIns="0" bIns="0" rtlCol="0" anchor="ctr"/>
-          <a:lstStyle/>
-          <a:p>
-            <a:pPr marL="0" indent="0" algn="ctr">
-              <a:buNone/>
-            </a:pPr>
-            <a:r>
-              <a:rPr lang="en-US" sz="1000" dirty="0">
-                <a:solidFill>
-                  <a:srgbClr val="666666"/>
-                </a:solidFill>
-                <a:latin typeface="Arial" pitchFamily="34" charset="0"/>
-                <a:ea typeface="Arial" pitchFamily="34" charset="-122"/>
-                <a:cs typeface="Arial" pitchFamily="34" charset="-120"/>
-              </a:rPr>
-              <a:t>4</a:t>
-            </a:r>
-            <a:endParaRPr lang="en-US" sz="1000" dirty="0"/>
-          </a:p>
-        </p:txBody>
-      </p:sp>
-      <p:sp>
-        <p:nvSpPr>
-          <p:cNvPr id="27" name="Text 25"/>
-          <p:cNvSpPr/>
-          <p:nvPr/>
-        </p:nvSpPr>
-        <p:spPr>
-          <a:xfrm>
-            <a:off x="1005840" y="3145536"/>
-            <a:ext cx="3657600" cy="384048"/>
-          </a:xfrm>
-          <a:prstGeom prst="rect">
-            <a:avLst/>
-          </a:prstGeom>
-          <a:noFill/>
-          <a:ln/>
-        </p:spPr>
-        <p:txBody>
-          <a:bodyPr wrap="square" lIns="0" tIns="0" rIns="0" bIns="0" rtlCol="0" anchor="ctr"/>
-          <a:lstStyle/>
-          <a:p>
-            <a:pPr marL="0" indent="0">
-              <a:buNone/>
-            </a:pPr>
-            <a:r>
-              <a:rPr lang="en-US" sz="1100" b="1" dirty="0">
-                <a:solidFill>
-                  <a:srgbClr val="000000"/>
-                </a:solidFill>
-                <a:latin typeface="Arial" pitchFamily="34" charset="0"/>
-                <a:ea typeface="Arial" pitchFamily="34" charset="-122"/>
-                <a:cs typeface="Arial" pitchFamily="34" charset="-120"/>
-              </a:rPr>
-              <a:t>보드를 분리하여 주십시요</a:t>
-            </a:r>
-            <a:endParaRPr lang="en-US" sz="1100" dirty="0"/>
-          </a:p>
-        </p:txBody>
-      </p:sp>
-      <p:sp>
-        <p:nvSpPr>
-          <p:cNvPr id="28" name="Text 26"/>
-          <p:cNvSpPr/>
-          <p:nvPr/>
-        </p:nvSpPr>
-        <p:spPr>
-          <a:xfrm>
-            <a:off x="4754880" y="3145536"/>
-            <a:ext cx="3931920" cy="384048"/>
-          </a:xfrm>
-          <a:prstGeom prst="rect">
-            <a:avLst/>
-          </a:prstGeom>
-          <a:noFill/>
-          <a:ln/>
-        </p:spPr>
-        <p:txBody>
-          <a:bodyPr wrap="square" lIns="0" tIns="0" rIns="0" bIns="0" rtlCol="0" anchor="ctr"/>
-          <a:lstStyle/>
-          <a:p>
-            <a:pPr marL="0" indent="0">
-              <a:buNone/>
-            </a:pPr>
-            <a:r>
-              <a:rPr lang="en-US" sz="1000" dirty="0">
-                <a:solidFill>
-                  <a:srgbClr val="333333"/>
-                </a:solidFill>
-                <a:latin typeface="Arial" pitchFamily="34" charset="0"/>
-                <a:ea typeface="Arial" pitchFamily="34" charset="-122"/>
-                <a:cs typeface="Arial" pitchFamily="34" charset="-120"/>
-              </a:rPr>
-              <a:t>상태 E: 보드 제거 요청 (30초 반복)</a:t>
-            </a:r>
-            <a:endParaRPr lang="en-US" sz="1000" dirty="0"/>
-          </a:p>
-        </p:txBody>
-      </p:sp>
-      <p:sp>
-        <p:nvSpPr>
-          <p:cNvPr id="29" name="Shape 27"/>
-          <p:cNvSpPr/>
-          <p:nvPr/>
-        </p:nvSpPr>
-        <p:spPr>
-          <a:xfrm>
-            <a:off x="457200" y="3547872"/>
-            <a:ext cx="8229600" cy="384048"/>
-          </a:xfrm>
-          <a:prstGeom prst="rect">
-            <a:avLst/>
-          </a:prstGeom>
-          <a:solidFill>
-            <a:srgbClr val="FFFFFF"/>
-          </a:solidFill>
-          <a:ln/>
-        </p:spPr>
-      </p:sp>
-      <p:sp>
-        <p:nvSpPr>
-          <p:cNvPr id="30" name="Text 28"/>
-          <p:cNvSpPr/>
-          <p:nvPr/>
-        </p:nvSpPr>
-        <p:spPr>
-          <a:xfrm>
-            <a:off x="548640" y="3547872"/>
-            <a:ext cx="365760" cy="384048"/>
-          </a:xfrm>
-          <a:prstGeom prst="rect">
-            <a:avLst/>
-          </a:prstGeom>
-          <a:noFill/>
-          <a:ln/>
-        </p:spPr>
-        <p:txBody>
-          <a:bodyPr wrap="square" lIns="0" tIns="0" rIns="0" bIns="0" rtlCol="0" anchor="ctr"/>
-          <a:lstStyle/>
-          <a:p>
-            <a:pPr marL="0" indent="0" algn="ctr">
-              <a:buNone/>
-            </a:pPr>
-            <a:r>
-              <a:rPr lang="en-US" sz="1000" dirty="0">
-                <a:solidFill>
-                  <a:srgbClr val="666666"/>
-                </a:solidFill>
-                <a:latin typeface="Arial" pitchFamily="34" charset="0"/>
-                <a:ea typeface="Arial" pitchFamily="34" charset="-122"/>
-                <a:cs typeface="Arial" pitchFamily="34" charset="-120"/>
-              </a:rPr>
-              <a:t>5</a:t>
-            </a:r>
-            <a:endParaRPr lang="en-US" sz="1000" dirty="0"/>
-          </a:p>
-        </p:txBody>
-      </p:sp>
-      <p:sp>
-        <p:nvSpPr>
-          <p:cNvPr id="31" name="Text 29"/>
-          <p:cNvSpPr/>
-          <p:nvPr/>
-        </p:nvSpPr>
-        <p:spPr>
-          <a:xfrm>
-            <a:off x="1005840" y="3547872"/>
-            <a:ext cx="3657600" cy="384048"/>
-          </a:xfrm>
-          <a:prstGeom prst="rect">
-            <a:avLst/>
-          </a:prstGeom>
-          <a:noFill/>
-          <a:ln/>
-        </p:spPr>
-        <p:txBody>
-          <a:bodyPr wrap="square" lIns="0" tIns="0" rIns="0" bIns="0" rtlCol="0" anchor="ctr"/>
-          <a:lstStyle/>
-          <a:p>
-            <a:pPr marL="0" indent="0">
-              <a:buNone/>
-            </a:pPr>
-            <a:r>
-              <a:rPr lang="en-US" sz="1100" b="1" dirty="0">
-                <a:solidFill>
-                  <a:srgbClr val="000000"/>
-                </a:solidFill>
-                <a:latin typeface="Arial" pitchFamily="34" charset="0"/>
-                <a:ea typeface="Arial" pitchFamily="34" charset="-122"/>
-                <a:cs typeface="Arial" pitchFamily="34" charset="-120"/>
-              </a:rPr>
-              <a:t>93C56 보드입니다</a:t>
-            </a:r>
-            <a:endParaRPr lang="en-US" sz="1100" dirty="0"/>
-          </a:p>
-        </p:txBody>
-      </p:sp>
-      <p:sp>
-        <p:nvSpPr>
-          <p:cNvPr id="32" name="Text 30"/>
-          <p:cNvSpPr/>
-          <p:nvPr/>
-        </p:nvSpPr>
-        <p:spPr>
-          <a:xfrm>
-            <a:off x="4754880" y="3547872"/>
-            <a:ext cx="3931920" cy="384048"/>
-          </a:xfrm>
-          <a:prstGeom prst="rect">
-            <a:avLst/>
-          </a:prstGeom>
-          <a:noFill/>
-          <a:ln/>
-        </p:spPr>
-        <p:txBody>
-          <a:bodyPr wrap="square" lIns="0" tIns="0" rIns="0" bIns="0" rtlCol="0" anchor="ctr"/>
-          <a:lstStyle/>
-          <a:p>
-            <a:pPr marL="0" indent="0">
-              <a:buNone/>
-            </a:pPr>
-            <a:r>
-              <a:rPr lang="en-US" sz="1000" dirty="0">
-                <a:solidFill>
-                  <a:srgbClr val="333333"/>
-                </a:solidFill>
-                <a:latin typeface="Arial" pitchFamily="34" charset="0"/>
-                <a:ea typeface="Arial" pitchFamily="34" charset="-122"/>
-                <a:cs typeface="Arial" pitchFamily="34" charset="-120"/>
-              </a:rPr>
-              <a:t>상태 B: 칩 식별 결과 93C56</a:t>
-            </a:r>
-            <a:endParaRPr lang="en-US" sz="1000" dirty="0"/>
-          </a:p>
-        </p:txBody>
-      </p:sp>
-      <p:sp>
-        <p:nvSpPr>
-          <p:cNvPr id="33" name="Shape 31"/>
-          <p:cNvSpPr/>
-          <p:nvPr/>
-        </p:nvSpPr>
-        <p:spPr>
-          <a:xfrm>
-            <a:off x="457200" y="3950208"/>
-            <a:ext cx="8229600" cy="384048"/>
-          </a:xfrm>
-          <a:prstGeom prst="rect">
-            <a:avLst/>
-          </a:prstGeom>
-          <a:solidFill>
-            <a:srgbClr val="DDDDDD"/>
-          </a:solidFill>
-          <a:ln/>
-        </p:spPr>
-      </p:sp>
-      <p:sp>
-        <p:nvSpPr>
-          <p:cNvPr id="34" name="Text 32"/>
-          <p:cNvSpPr/>
-          <p:nvPr/>
-        </p:nvSpPr>
-        <p:spPr>
-          <a:xfrm>
-            <a:off x="548640" y="3950208"/>
-            <a:ext cx="365760" cy="384048"/>
-          </a:xfrm>
-          <a:prstGeom prst="rect">
-            <a:avLst/>
-          </a:prstGeom>
-          <a:noFill/>
-          <a:ln/>
-        </p:spPr>
-        <p:txBody>
-          <a:bodyPr wrap="square" lIns="0" tIns="0" rIns="0" bIns="0" rtlCol="0" anchor="ctr"/>
-          <a:lstStyle/>
-          <a:p>
-            <a:pPr marL="0" indent="0" algn="ctr">
-              <a:buNone/>
-            </a:pPr>
-            <a:r>
-              <a:rPr lang="en-US" sz="1000" dirty="0">
-                <a:solidFill>
-                  <a:srgbClr val="666666"/>
-                </a:solidFill>
-                <a:latin typeface="Arial" pitchFamily="34" charset="0"/>
-                <a:ea typeface="Arial" pitchFamily="34" charset="-122"/>
-                <a:cs typeface="Arial" pitchFamily="34" charset="-120"/>
-              </a:rPr>
-              <a:t>6</a:t>
-            </a:r>
-            <a:endParaRPr lang="en-US" sz="1000" dirty="0"/>
-          </a:p>
-        </p:txBody>
-      </p:sp>
-      <p:sp>
-        <p:nvSpPr>
-          <p:cNvPr id="35" name="Text 33"/>
-          <p:cNvSpPr/>
-          <p:nvPr/>
-        </p:nvSpPr>
-        <p:spPr>
-          <a:xfrm>
-            <a:off x="1005840" y="3950208"/>
-            <a:ext cx="3657600" cy="384048"/>
-          </a:xfrm>
-          <a:prstGeom prst="rect">
-            <a:avLst/>
-          </a:prstGeom>
-          <a:noFill/>
-          <a:ln/>
-        </p:spPr>
-        <p:txBody>
-          <a:bodyPr wrap="square" lIns="0" tIns="0" rIns="0" bIns="0" rtlCol="0" anchor="ctr"/>
-          <a:lstStyle/>
-          <a:p>
-            <a:pPr marL="0" indent="0">
-              <a:buNone/>
-            </a:pPr>
-            <a:r>
-              <a:rPr lang="en-US" sz="1100" b="1" dirty="0">
-                <a:solidFill>
-                  <a:srgbClr val="000000"/>
-                </a:solidFill>
-                <a:latin typeface="Arial" pitchFamily="34" charset="0"/>
-                <a:ea typeface="Arial" pitchFamily="34" charset="-122"/>
-                <a:cs typeface="Arial" pitchFamily="34" charset="-120"/>
-              </a:rPr>
-              <a:t>93C46 보드입니다</a:t>
-            </a:r>
-            <a:endParaRPr lang="en-US" sz="1100" dirty="0"/>
-          </a:p>
-        </p:txBody>
-      </p:sp>
-      <p:sp>
-        <p:nvSpPr>
-          <p:cNvPr id="36" name="Text 34"/>
-          <p:cNvSpPr/>
-          <p:nvPr/>
-        </p:nvSpPr>
-        <p:spPr>
-          <a:xfrm>
-            <a:off x="4754880" y="3950208"/>
-            <a:ext cx="3931920" cy="384048"/>
-          </a:xfrm>
-          <a:prstGeom prst="rect">
-            <a:avLst/>
-          </a:prstGeom>
-          <a:noFill/>
-          <a:ln/>
-        </p:spPr>
-        <p:txBody>
-          <a:bodyPr wrap="square" lIns="0" tIns="0" rIns="0" bIns="0" rtlCol="0" anchor="ctr"/>
-          <a:lstStyle/>
-          <a:p>
-            <a:pPr marL="0" indent="0">
-              <a:buNone/>
-            </a:pPr>
-            <a:r>
-              <a:rPr lang="en-US" sz="1000" dirty="0">
-                <a:solidFill>
-                  <a:srgbClr val="333333"/>
-                </a:solidFill>
-                <a:latin typeface="Arial" pitchFamily="34" charset="0"/>
-                <a:ea typeface="Arial" pitchFamily="34" charset="-122"/>
-                <a:cs typeface="Arial" pitchFamily="34" charset="-120"/>
-              </a:rPr>
-              <a:t>상태 B: 칩 식별 결과 93C46</a:t>
-            </a:r>
-            <a:endParaRPr lang="en-US" sz="1000" dirty="0"/>
-          </a:p>
-        </p:txBody>
-      </p:sp>
-      <p:sp>
-        <p:nvSpPr>
-          <p:cNvPr id="37" name="Shape 35"/>
-          <p:cNvSpPr/>
-          <p:nvPr/>
-        </p:nvSpPr>
-        <p:spPr>
-          <a:xfrm>
-            <a:off x="457200" y="4352544"/>
-            <a:ext cx="8229600" cy="384048"/>
-          </a:xfrm>
-          <a:prstGeom prst="rect">
-            <a:avLst/>
-          </a:prstGeom>
-          <a:solidFill>
-            <a:srgbClr val="FFFFFF"/>
-          </a:solidFill>
-          <a:ln/>
-        </p:spPr>
-      </p:sp>
-      <p:sp>
-        <p:nvSpPr>
-          <p:cNvPr id="38" name="Text 36"/>
-          <p:cNvSpPr/>
-          <p:nvPr/>
-        </p:nvSpPr>
-        <p:spPr>
-          <a:xfrm>
-            <a:off x="548640" y="4352544"/>
-            <a:ext cx="365760" cy="384048"/>
-          </a:xfrm>
-          <a:prstGeom prst="rect">
-            <a:avLst/>
-          </a:prstGeom>
-          <a:noFill/>
-          <a:ln/>
-        </p:spPr>
-        <p:txBody>
-          <a:bodyPr wrap="square" lIns="0" tIns="0" rIns="0" bIns="0" rtlCol="0" anchor="ctr"/>
-          <a:lstStyle/>
-          <a:p>
-            <a:pPr marL="0" indent="0" algn="ctr">
-              <a:buNone/>
-            </a:pPr>
-            <a:r>
-              <a:rPr lang="en-US" sz="1000" dirty="0">
-                <a:solidFill>
-                  <a:srgbClr val="666666"/>
-                </a:solidFill>
-                <a:latin typeface="Arial" pitchFamily="34" charset="0"/>
-                <a:ea typeface="Arial" pitchFamily="34" charset="-122"/>
-                <a:cs typeface="Arial" pitchFamily="34" charset="-120"/>
-              </a:rPr>
-              <a:t>7</a:t>
-            </a:r>
-            <a:endParaRPr lang="en-US" sz="1000" dirty="0"/>
-          </a:p>
-        </p:txBody>
-      </p:sp>
-      <p:sp>
-        <p:nvSpPr>
-          <p:cNvPr id="39" name="Text 37"/>
-          <p:cNvSpPr/>
-          <p:nvPr/>
-        </p:nvSpPr>
-        <p:spPr>
-          <a:xfrm>
-            <a:off x="1005840" y="4352544"/>
-            <a:ext cx="3657600" cy="384048"/>
-          </a:xfrm>
-          <a:prstGeom prst="rect">
-            <a:avLst/>
-          </a:prstGeom>
-          <a:noFill/>
-          <a:ln/>
-        </p:spPr>
-        <p:txBody>
-          <a:bodyPr wrap="square" lIns="0" tIns="0" rIns="0" bIns="0" rtlCol="0" anchor="ctr"/>
-          <a:lstStyle/>
-          <a:p>
-            <a:pPr marL="0" indent="0">
-              <a:buNone/>
-            </a:pPr>
-            <a:r>
-              <a:rPr lang="en-US" sz="1100" b="1" dirty="0">
-                <a:solidFill>
-                  <a:srgbClr val="000000"/>
-                </a:solidFill>
-                <a:latin typeface="Arial" pitchFamily="34" charset="0"/>
-                <a:ea typeface="Arial" pitchFamily="34" charset="-122"/>
-                <a:cs typeface="Arial" pitchFamily="34" charset="-120"/>
-              </a:rPr>
-              <a:t>보드가 분리되었습니다</a:t>
-            </a:r>
-            <a:endParaRPr lang="en-US" sz="1100" dirty="0"/>
-          </a:p>
-        </p:txBody>
-      </p:sp>
-      <p:sp>
-        <p:nvSpPr>
-          <p:cNvPr id="40" name="Text 38"/>
-          <p:cNvSpPr/>
-          <p:nvPr/>
-        </p:nvSpPr>
-        <p:spPr>
-          <a:xfrm>
-            <a:off x="4754880" y="4352544"/>
-            <a:ext cx="3931920" cy="384048"/>
-          </a:xfrm>
-          <a:prstGeom prst="rect">
-            <a:avLst/>
-          </a:prstGeom>
-          <a:noFill/>
-          <a:ln/>
-        </p:spPr>
-        <p:txBody>
-          <a:bodyPr wrap="square" lIns="0" tIns="0" rIns="0" bIns="0" rtlCol="0" anchor="ctr"/>
-          <a:lstStyle/>
-          <a:p>
-            <a:pPr marL="0" indent="0">
-              <a:buNone/>
-            </a:pPr>
-            <a:r>
-              <a:rPr lang="en-US" sz="1000" dirty="0">
-                <a:solidFill>
-                  <a:srgbClr val="333333"/>
-                </a:solidFill>
-                <a:latin typeface="Arial" pitchFamily="34" charset="0"/>
-                <a:ea typeface="Arial" pitchFamily="34" charset="-122"/>
-                <a:cs typeface="Arial" pitchFamily="34" charset="-120"/>
-              </a:rPr>
-              <a:t>상태 E: 보드 제거 감지 직후</a:t>
-            </a:r>
-            <a:endParaRPr lang="en-US" sz="1000" dirty="0"/>
+        <p:style>
+          <a:lnRef idx="1">
+            <a:schemeClr val="accent1"/>
+          </a:lnRef>
+          <a:fillRef idx="3">
+            <a:schemeClr val="accent1"/>
+          </a:fillRef>
+          <a:effectRef idx="2">
+            <a:schemeClr val="accent1"/>
+          </a:effectRef>
+          <a:fontRef idx="minor">
+            <a:schemeClr val="lt1"/>
+          </a:fontRef>
+        </p:style>
+        <p:txBody>
+          <a:bodyPr rtlCol="0" anchor="ctr"/>
+          <a:lstStyle/>
+          <a:p>
+            <a:pPr algn="ctr"/>
+          </a:p>
+        </p:txBody>
+      </p:sp>
+      <p:sp>
+        <p:nvSpPr>
+          <p:cNvPr id="4" name="TextBox 3"/>
+          <p:cNvSpPr txBox="1"/>
+          <p:nvPr/>
+        </p:nvSpPr>
+        <p:spPr>
+          <a:xfrm>
+            <a:off x="457200" y="960120"/>
+            <a:ext cx="11247120" cy="347472"/>
+          </a:xfrm>
+          <a:prstGeom prst="rect">
+            <a:avLst/>
+          </a:prstGeom>
+          <a:noFill/>
+        </p:spPr>
+        <p:txBody>
+          <a:bodyPr wrap="square">
+            <a:spAutoFit/>
+          </a:bodyPr>
+          <a:lstStyle/>
+          <a:p>
+            <a:pPr algn="l"/>
+            <a:r>
+              <a:rPr sz="1300" b="0" i="1">
+                <a:solidFill>
+                  <a:srgbClr val="404040"/>
+                </a:solidFill>
+              </a:rPr>
+              <a:t>gen_voice.py — Windows TTS (Heami KO)  ·  16 kHz · 16-bit mono PCM</a:t>
+            </a:r>
+          </a:p>
+        </p:txBody>
+      </p:sp>
+      <p:graphicFrame>
+        <p:nvGraphicFramePr>
+          <p:cNvPr id="5" name="Table 4"/>
+          <p:cNvGraphicFramePr>
+            <a:graphicFrameLocks noGrp="1"/>
+          </p:cNvGraphicFramePr>
+          <p:nvPr/>
+        </p:nvGraphicFramePr>
+        <p:xfrm>
+          <a:off x="457200" y="1417320"/>
+          <a:ext cx="11247120" cy="4572000"/>
+        </p:xfrm>
+        <a:graphic>
+          <a:graphicData uri="http://schemas.openxmlformats.org/drawingml/2006/table">
+            <a:tbl>
+              <a:tblPr firstRow="1" bandRow="1">
+                <a:tableStyleId>{5C22544A-7EE6-4342-B048-85BDC9FD1C3A}</a:tableStyleId>
+              </a:tblPr>
+              <a:tblGrid>
+                <a:gridCol w="594360"/>
+                <a:gridCol w="6400800"/>
+                <a:gridCol w="4251960"/>
+              </a:tblGrid>
+              <a:tr h="571500">
+                <a:tc>
+                  <a:txBody>
+                    <a:bodyPr/>
+                    <a:lstStyle/>
+                    <a:p>
+                      <a:pPr algn="ctr"/>
+                      <a:r>
+                        <a:rPr sz="1300" b="1">
+                          <a:solidFill>
+                            <a:srgbClr val="000000"/>
+                          </a:solidFill>
+                        </a:rPr>
+                        <a:t>#</a:t>
+                      </a:r>
+                    </a:p>
+                  </a:txBody>
+                  <a:tcPr>
+                    <a:solidFill>
+                      <a:srgbClr val="D9D9D9"/>
+                    </a:solidFill>
+                  </a:tcPr>
+                </a:tc>
+                <a:tc>
+                  <a:txBody>
+                    <a:bodyPr/>
+                    <a:lstStyle/>
+                    <a:p>
+                      <a:pPr algn="ctr"/>
+                      <a:r>
+                        <a:rPr sz="1300" b="1">
+                          <a:solidFill>
+                            <a:srgbClr val="000000"/>
+                          </a:solidFill>
+                        </a:rPr>
+                        <a:t>음성 내용</a:t>
+                      </a:r>
+                    </a:p>
+                  </a:txBody>
+                  <a:tcPr>
+                    <a:solidFill>
+                      <a:srgbClr val="D9D9D9"/>
+                    </a:solidFill>
+                  </a:tcPr>
+                </a:tc>
+                <a:tc>
+                  <a:txBody>
+                    <a:bodyPr/>
+                    <a:lstStyle/>
+                    <a:p>
+                      <a:pPr algn="ctr"/>
+                      <a:r>
+                        <a:rPr sz="1300" b="1">
+                          <a:solidFill>
+                            <a:srgbClr val="000000"/>
+                          </a:solidFill>
+                        </a:rPr>
+                        <a:t>사용 시점</a:t>
+                      </a:r>
+                    </a:p>
+                  </a:txBody>
+                  <a:tcPr>
+                    <a:solidFill>
+                      <a:srgbClr val="D9D9D9"/>
+                    </a:solidFill>
+                  </a:tcPr>
+                </a:tc>
+              </a:tr>
+              <a:tr h="571500">
+                <a:tc>
+                  <a:txBody>
+                    <a:bodyPr/>
+                    <a:lstStyle/>
+                    <a:p>
+                      <a:r>
+                        <a:rPr sz="1200">
+                          <a:solidFill>
+                            <a:srgbClr val="000000"/>
+                          </a:solidFill>
+                        </a:rPr>
+                        <a:t>0</a:t>
+                      </a:r>
+                    </a:p>
+                  </a:txBody>
+                  <a:tcPr>
+                    <a:solidFill>
+                      <a:srgbClr val="F2F2F2"/>
+                    </a:solidFill>
+                  </a:tcPr>
+                </a:tc>
+                <a:tc>
+                  <a:txBody>
+                    <a:bodyPr/>
+                    <a:lstStyle/>
+                    <a:p>
+                      <a:r>
+                        <a:rPr sz="1200">
+                          <a:solidFill>
+                            <a:srgbClr val="000000"/>
+                          </a:solidFill>
+                        </a:rPr>
+                        <a:t>디아지용 팁 보드를 올려주세요</a:t>
+                      </a:r>
+                    </a:p>
+                  </a:txBody>
+                  <a:tcPr>
+                    <a:solidFill>
+                      <a:srgbClr val="F2F2F2"/>
+                    </a:solidFill>
+                  </a:tcPr>
+                </a:tc>
+                <a:tc>
+                  <a:txBody>
+                    <a:bodyPr/>
+                    <a:lstStyle/>
+                    <a:p>
+                      <a:r>
+                        <a:rPr sz="1200">
+                          <a:solidFill>
+                            <a:srgbClr val="000000"/>
+                          </a:solidFill>
+                        </a:rPr>
+                        <a:t>상태 A: LED 쇼 중 최초 안내</a:t>
+                      </a:r>
+                    </a:p>
+                  </a:txBody>
+                  <a:tcPr>
+                    <a:solidFill>
+                      <a:srgbClr val="F2F2F2"/>
+                    </a:solidFill>
+                  </a:tcPr>
+                </a:tc>
+              </a:tr>
+              <a:tr h="571500">
+                <a:tc>
+                  <a:txBody>
+                    <a:bodyPr/>
+                    <a:lstStyle/>
+                    <a:p>
+                      <a:r>
+                        <a:rPr sz="1200">
+                          <a:solidFill>
+                            <a:srgbClr val="000000"/>
+                          </a:solidFill>
+                        </a:rPr>
+                        <a:t>1</a:t>
+                      </a:r>
+                    </a:p>
+                  </a:txBody>
+                  <a:tcPr>
+                    <a:solidFill>
+                      <a:srgbClr val="FFFFFF"/>
+                    </a:solidFill>
+                  </a:tcPr>
+                </a:tc>
+                <a:tc>
+                  <a:txBody>
+                    <a:bodyPr/>
+                    <a:lstStyle/>
+                    <a:p>
+                      <a:r>
+                        <a:rPr sz="1200">
+                          <a:solidFill>
+                            <a:srgbClr val="000000"/>
+                          </a:solidFill>
+                        </a:rPr>
+                        <a:t>프로그램이 완료되었습니다</a:t>
+                      </a:r>
+                    </a:p>
+                  </a:txBody>
+                  <a:tcPr>
+                    <a:solidFill>
+                      <a:srgbClr val="FFFFFF"/>
+                    </a:solidFill>
+                  </a:tcPr>
+                </a:tc>
+                <a:tc>
+                  <a:txBody>
+                    <a:bodyPr/>
+                    <a:lstStyle/>
+                    <a:p>
+                      <a:r>
+                        <a:rPr sz="1200">
+                          <a:solidFill>
+                            <a:srgbClr val="000000"/>
+                          </a:solidFill>
+                        </a:rPr>
+                        <a:t>프로그래밍 완료 후</a:t>
+                      </a:r>
+                    </a:p>
+                  </a:txBody>
+                  <a:tcPr>
+                    <a:solidFill>
+                      <a:srgbClr val="FFFFFF"/>
+                    </a:solidFill>
+                  </a:tcPr>
+                </a:tc>
+              </a:tr>
+              <a:tr h="571500">
+                <a:tc>
+                  <a:txBody>
+                    <a:bodyPr/>
+                    <a:lstStyle/>
+                    <a:p>
+                      <a:r>
+                        <a:rPr sz="1200">
+                          <a:solidFill>
+                            <a:srgbClr val="000000"/>
+                          </a:solidFill>
+                        </a:rPr>
+                        <a:t>2</a:t>
+                      </a:r>
+                    </a:p>
+                  </a:txBody>
+                  <a:tcPr>
+                    <a:solidFill>
+                      <a:srgbClr val="F2F2F2"/>
+                    </a:solidFill>
+                  </a:tcPr>
+                </a:tc>
+                <a:tc>
+                  <a:txBody>
+                    <a:bodyPr/>
+                    <a:lstStyle/>
+                    <a:p>
+                      <a:r>
+                        <a:rPr sz="1200">
+                          <a:solidFill>
+                            <a:srgbClr val="000000"/>
+                          </a:solidFill>
+                        </a:rPr>
+                        <a:t>적색 표시는 불량입니다</a:t>
+                      </a:r>
+                    </a:p>
+                  </a:txBody>
+                  <a:tcPr>
+                    <a:solidFill>
+                      <a:srgbClr val="F2F2F2"/>
+                    </a:solidFill>
+                  </a:tcPr>
+                </a:tc>
+                <a:tc>
+                  <a:txBody>
+                    <a:bodyPr/>
+                    <a:lstStyle/>
+                    <a:p>
+                      <a:r>
+                        <a:rPr sz="1200">
+                          <a:solidFill>
+                            <a:srgbClr val="000000"/>
+                          </a:solidFill>
+                        </a:rPr>
+                        <a:t>불량 칩 존재 시</a:t>
+                      </a:r>
+                    </a:p>
+                  </a:txBody>
+                  <a:tcPr>
+                    <a:solidFill>
+                      <a:srgbClr val="F2F2F2"/>
+                    </a:solidFill>
+                  </a:tcPr>
+                </a:tc>
+              </a:tr>
+              <a:tr h="571500">
+                <a:tc>
+                  <a:txBody>
+                    <a:bodyPr/>
+                    <a:lstStyle/>
+                    <a:p>
+                      <a:r>
+                        <a:rPr sz="1200">
+                          <a:solidFill>
+                            <a:srgbClr val="000000"/>
+                          </a:solidFill>
+                        </a:rPr>
+                        <a:t>3</a:t>
+                      </a:r>
+                    </a:p>
+                  </a:txBody>
+                  <a:tcPr>
+                    <a:solidFill>
+                      <a:srgbClr val="FFFFFF"/>
+                    </a:solidFill>
+                  </a:tcPr>
+                </a:tc>
+                <a:tc>
+                  <a:txBody>
+                    <a:bodyPr/>
+                    <a:lstStyle/>
+                    <a:p>
+                      <a:r>
+                        <a:rPr sz="1200">
+                          <a:solidFill>
+                            <a:srgbClr val="000000"/>
+                          </a:solidFill>
+                        </a:rPr>
+                        <a:t>보드를 분리하여 주십시요</a:t>
+                      </a:r>
+                    </a:p>
+                  </a:txBody>
+                  <a:tcPr>
+                    <a:solidFill>
+                      <a:srgbClr val="FFFFFF"/>
+                    </a:solidFill>
+                  </a:tcPr>
+                </a:tc>
+                <a:tc>
+                  <a:txBody>
+                    <a:bodyPr/>
+                    <a:lstStyle/>
+                    <a:p>
+                      <a:r>
+                        <a:rPr sz="1200">
+                          <a:solidFill>
+                            <a:srgbClr val="000000"/>
+                          </a:solidFill>
+                        </a:rPr>
+                        <a:t>상태 E: 보드 제거 요청 (30초 반복)</a:t>
+                      </a:r>
+                    </a:p>
+                  </a:txBody>
+                  <a:tcPr>
+                    <a:solidFill>
+                      <a:srgbClr val="FFFFFF"/>
+                    </a:solidFill>
+                  </a:tcPr>
+                </a:tc>
+              </a:tr>
+              <a:tr h="571500">
+                <a:tc>
+                  <a:txBody>
+                    <a:bodyPr/>
+                    <a:lstStyle/>
+                    <a:p>
+                      <a:r>
+                        <a:rPr sz="1200">
+                          <a:solidFill>
+                            <a:srgbClr val="000000"/>
+                          </a:solidFill>
+                        </a:rPr>
+                        <a:t>4</a:t>
+                      </a:r>
+                    </a:p>
+                  </a:txBody>
+                  <a:tcPr>
+                    <a:solidFill>
+                      <a:srgbClr val="F2F2F2"/>
+                    </a:solidFill>
+                  </a:tcPr>
+                </a:tc>
+                <a:tc>
+                  <a:txBody>
+                    <a:bodyPr/>
+                    <a:lstStyle/>
+                    <a:p>
+                      <a:r>
+                        <a:rPr sz="1200">
+                          <a:solidFill>
+                            <a:srgbClr val="000000"/>
+                          </a:solidFill>
+                        </a:rPr>
+                        <a:t>보드가 분리되었습니다</a:t>
+                      </a:r>
+                    </a:p>
+                  </a:txBody>
+                  <a:tcPr>
+                    <a:solidFill>
+                      <a:srgbClr val="F2F2F2"/>
+                    </a:solidFill>
+                  </a:tcPr>
+                </a:tc>
+                <a:tc>
+                  <a:txBody>
+                    <a:bodyPr/>
+                    <a:lstStyle/>
+                    <a:p>
+                      <a:r>
+                        <a:rPr sz="1200">
+                          <a:solidFill>
+                            <a:srgbClr val="000000"/>
+                          </a:solidFill>
+                        </a:rPr>
+                        <a:t>상태 E: 보드 제거 감지 직후</a:t>
+                      </a:r>
+                    </a:p>
+                  </a:txBody>
+                  <a:tcPr>
+                    <a:solidFill>
+                      <a:srgbClr val="F2F2F2"/>
+                    </a:solidFill>
+                  </a:tcPr>
+                </a:tc>
+              </a:tr>
+              <a:tr h="571500">
+                <a:tc>
+                  <a:txBody>
+                    <a:bodyPr/>
+                    <a:lstStyle/>
+                    <a:p>
+                      <a:r>
+                        <a:rPr sz="1200">
+                          <a:solidFill>
+                            <a:srgbClr val="000000"/>
+                          </a:solidFill>
+                        </a:rPr>
+                        <a:t>5 *</a:t>
+                      </a:r>
+                    </a:p>
+                  </a:txBody>
+                  <a:tcPr>
+                    <a:solidFill>
+                      <a:srgbClr val="FFFFFF"/>
+                    </a:solidFill>
+                  </a:tcPr>
+                </a:tc>
+                <a:tc>
+                  <a:txBody>
+                    <a:bodyPr/>
+                    <a:lstStyle/>
+                    <a:p>
+                      <a:r>
+                        <a:rPr sz="1200">
+                          <a:solidFill>
+                            <a:srgbClr val="000000"/>
+                          </a:solidFill>
+                        </a:rPr>
+                        <a:t>새 보드를 올려 주십시요</a:t>
+                      </a:r>
+                    </a:p>
+                  </a:txBody>
+                  <a:tcPr>
+                    <a:solidFill>
+                      <a:srgbClr val="FFFFFF"/>
+                    </a:solidFill>
+                  </a:tcPr>
+                </a:tc>
+                <a:tc>
+                  <a:txBody>
+                    <a:bodyPr/>
+                    <a:lstStyle/>
+                    <a:p>
+                      <a:r>
+                        <a:rPr sz="1200">
+                          <a:solidFill>
+                            <a:srgbClr val="000000"/>
+                          </a:solidFill>
+                        </a:rPr>
+                        <a:t>보드 분리 후 + 10초마다 반복</a:t>
+                      </a:r>
+                    </a:p>
+                  </a:txBody>
+                  <a:tcPr>
+                    <a:solidFill>
+                      <a:srgbClr val="FFFFFF"/>
+                    </a:solidFill>
+                  </a:tcPr>
+                </a:tc>
+              </a:tr>
+              <a:tr h="571500">
+                <a:tc>
+                  <a:txBody>
+                    <a:bodyPr/>
+                    <a:lstStyle/>
+                    <a:p>
+                      <a:r>
+                        <a:rPr sz="1200">
+                          <a:solidFill>
+                            <a:srgbClr val="000000"/>
+                          </a:solidFill>
+                        </a:rPr>
+                        <a:t>6 *</a:t>
+                      </a:r>
+                    </a:p>
+                  </a:txBody>
+                  <a:tcPr>
+                    <a:solidFill>
+                      <a:srgbClr val="F2F2F2"/>
+                    </a:solidFill>
+                  </a:tcPr>
+                </a:tc>
+                <a:tc>
+                  <a:txBody>
+                    <a:bodyPr/>
+                    <a:lstStyle/>
+                    <a:p>
+                      <a:r>
+                        <a:rPr sz="1200">
+                          <a:solidFill>
+                            <a:srgbClr val="000000"/>
+                          </a:solidFill>
+                        </a:rPr>
+                        <a:t>프로그램을 시작합니다</a:t>
+                      </a:r>
+                    </a:p>
+                  </a:txBody>
+                  <a:tcPr>
+                    <a:solidFill>
+                      <a:srgbClr val="F2F2F2"/>
+                    </a:solidFill>
+                  </a:tcPr>
+                </a:tc>
+                <a:tc>
+                  <a:txBody>
+                    <a:bodyPr/>
+                    <a:lstStyle/>
+                    <a:p>
+                      <a:r>
+                        <a:rPr sz="1200">
+                          <a:solidFill>
+                            <a:srgbClr val="000000"/>
+                          </a:solidFill>
+                        </a:rPr>
+                        <a:t>2초 안정화 대기 후 프로그래밍 직전</a:t>
+                      </a:r>
+                    </a:p>
+                  </a:txBody>
+                  <a:tcPr>
+                    <a:solidFill>
+                      <a:srgbClr val="F2F2F2"/>
+                    </a:solidFill>
+                  </a:tcPr>
+                </a:tc>
+              </a:tr>
+            </a:tbl>
+          </a:graphicData>
+        </a:graphic>
+      </p:graphicFrame>
+      <p:sp>
+        <p:nvSpPr>
+          <p:cNvPr id="6" name="TextBox 5"/>
+          <p:cNvSpPr txBox="1"/>
+          <p:nvPr/>
+        </p:nvSpPr>
+        <p:spPr>
+          <a:xfrm>
+            <a:off x="457200" y="6217920"/>
+            <a:ext cx="11247120" cy="320040"/>
+          </a:xfrm>
+          <a:prstGeom prst="rect">
+            <a:avLst/>
+          </a:prstGeom>
+          <a:noFill/>
+        </p:spPr>
+        <p:txBody>
+          <a:bodyPr wrap="square">
+            <a:spAutoFit/>
+          </a:bodyPr>
+          <a:lstStyle/>
+          <a:p>
+            <a:pPr algn="l"/>
+            <a:r>
+              <a:rPr sz="1100" b="0" i="1">
+                <a:solidFill>
+                  <a:srgbClr val="404040"/>
+                </a:solidFill>
+              </a:rPr>
+              <a:t>* = Phase 2 신규 추가  /  8 kHz -&gt; 16 kHz 업그레이드 (자음 명료도 향상)  /  INTRO·IS_93C56·IS_93C46 3종 제거</a:t>
+            </a:r>
           </a:p>
         </p:txBody>
       </p:sp>
@@ -12524,7 +11971,7 @@
         </p:nvSpPr>
         <p:spPr>
           <a:xfrm>
-            <a:off x="274320" y="2926080"/>
+            <a:off x="338328" y="3322036"/>
             <a:ext cx="8595360" cy="292608"/>
           </a:xfrm>
           <a:prstGeom prst="rect">
@@ -12540,576 +11987,1062 @@
           <a:p>
             <a:pPr algn="l"/>
             <a:r>
-              <a:rPr sz="1400" b="1" i="0">
+              <a:rPr sz="1400" b="1" i="0" dirty="0">
                 <a:solidFill>
                   <a:srgbClr val="2E74B5"/>
                 </a:solidFill>
               </a:rPr>
-              <a:t>ee93c56.c — EE_IdentifyChip() 구현</a:t>
-            </a:r>
-          </a:p>
-        </p:txBody>
-      </p:sp>
-      <p:sp>
-        <p:nvSpPr>
-          <p:cNvPr id="15" name="Rectangle 14"/>
-          <p:cNvSpPr/>
-          <p:nvPr/>
-        </p:nvSpPr>
-        <p:spPr>
-          <a:xfrm>
-            <a:off x="274320" y="3255264"/>
-            <a:ext cx="1097280" cy="274320"/>
-          </a:xfrm>
-          <a:prstGeom prst="rect">
-            <a:avLst/>
-          </a:prstGeom>
-          <a:solidFill>
-            <a:srgbClr val="2E74B5"/>
-          </a:solidFill>
-          <a:ln>
+              <a:t>ee93c56.c — </a:t>
+            </a:r>
+            <a:r>
+              <a:rPr sz="1400" b="1" i="0" dirty="0" err="1">
+                <a:solidFill>
+                  <a:srgbClr val="2E74B5"/>
+                </a:solidFill>
+              </a:rPr>
+              <a:t>EE_IdentifyChip</a:t>
+            </a:r>
+            <a:r>
+              <a:rPr sz="1400" b="1" i="0" dirty="0">
+                <a:solidFill>
+                  <a:srgbClr val="2E74B5"/>
+                </a:solidFill>
+              </a:rPr>
+              <a:t>() </a:t>
+            </a:r>
+            <a:r>
+              <a:rPr sz="1400" b="1" i="0" dirty="0" err="1">
+                <a:solidFill>
+                  <a:srgbClr val="2E74B5"/>
+                </a:solidFill>
+              </a:rPr>
+              <a:t>구현</a:t>
+            </a:r>
+            <a:endParaRPr sz="1400" b="1" i="0" dirty="0">
+              <a:solidFill>
+                <a:srgbClr val="2E74B5"/>
+              </a:solidFill>
+            </a:endParaRPr>
+          </a:p>
+        </p:txBody>
+      </p:sp>
+      <p:grpSp>
+        <p:nvGrpSpPr>
+          <p:cNvPr id="30" name="그룹 29">
+            <a:extLst>
+              <a:ext uri="{FF2B5EF4-FFF2-40B4-BE49-F238E27FC236}">
+                <a16:creationId xmlns:a16="http://schemas.microsoft.com/office/drawing/2014/main" id="{39E54F2F-B07F-CAB9-7F2D-655B7CEB6E34}"/>
+              </a:ext>
+            </a:extLst>
+          </p:cNvPr>
+          <p:cNvGrpSpPr/>
+          <p:nvPr/>
+        </p:nvGrpSpPr>
+        <p:grpSpPr>
+          <a:xfrm>
+            <a:off x="292608" y="3657813"/>
+            <a:ext cx="1097280" cy="1444752"/>
+            <a:chOff x="274320" y="3502365"/>
+            <a:chExt cx="1097280" cy="1444752"/>
+          </a:xfrm>
+        </p:grpSpPr>
+        <p:sp>
+          <p:nvSpPr>
+            <p:cNvPr id="15" name="Rectangle 14"/>
+            <p:cNvSpPr/>
+            <p:nvPr/>
+          </p:nvSpPr>
+          <p:spPr>
+            <a:xfrm>
+              <a:off x="274320" y="3502365"/>
+              <a:ext cx="1097280" cy="274320"/>
+            </a:xfrm>
+            <a:prstGeom prst="rect">
+              <a:avLst/>
+            </a:prstGeom>
+            <a:solidFill>
+              <a:srgbClr val="2E74B5"/>
+            </a:solidFill>
+            <a:ln>
+              <a:noFill/>
+            </a:ln>
+          </p:spPr>
+          <p:style>
+            <a:lnRef idx="1">
+              <a:schemeClr val="accent1"/>
+            </a:lnRef>
+            <a:fillRef idx="3">
+              <a:schemeClr val="accent1"/>
+            </a:fillRef>
+            <a:effectRef idx="2">
+              <a:schemeClr val="accent1"/>
+            </a:effectRef>
+            <a:fontRef idx="minor">
+              <a:schemeClr val="lt1"/>
+            </a:fontRef>
+          </p:style>
+          <p:txBody>
+            <a:bodyPr rtlCol="0" anchor="ctr"/>
+            <a:lstStyle/>
+            <a:p>
+              <a:pPr algn="ctr"/>
+              <a:endParaRPr/>
+            </a:p>
+          </p:txBody>
+        </p:sp>
+        <p:sp>
+          <p:nvSpPr>
+            <p:cNvPr id="16" name="TextBox 15"/>
+            <p:cNvSpPr txBox="1"/>
+            <p:nvPr/>
+          </p:nvSpPr>
+          <p:spPr>
+            <a:xfrm>
+              <a:off x="320040" y="3538941"/>
+              <a:ext cx="1005840" cy="219456"/>
+            </a:xfrm>
+            <a:prstGeom prst="rect">
+              <a:avLst/>
+            </a:prstGeom>
             <a:noFill/>
-          </a:ln>
-        </p:spPr>
-        <p:style>
-          <a:lnRef idx="1">
-            <a:schemeClr val="accent1"/>
-          </a:lnRef>
-          <a:fillRef idx="3">
-            <a:schemeClr val="accent1"/>
-          </a:fillRef>
-          <a:effectRef idx="2">
-            <a:schemeClr val="accent1"/>
-          </a:effectRef>
-          <a:fontRef idx="minor">
-            <a:schemeClr val="lt1"/>
-          </a:fontRef>
-        </p:style>
-        <p:txBody>
-          <a:bodyPr rtlCol="0" anchor="ctr"/>
-          <a:lstStyle/>
-          <a:p>
-            <a:pPr algn="ctr"/>
-            <a:endParaRPr/>
-          </a:p>
-        </p:txBody>
-      </p:sp>
-      <p:sp>
-        <p:nvSpPr>
-          <p:cNvPr id="16" name="TextBox 15"/>
-          <p:cNvSpPr txBox="1"/>
-          <p:nvPr/>
-        </p:nvSpPr>
-        <p:spPr>
-          <a:xfrm>
-            <a:off x="320040" y="3291840"/>
-            <a:ext cx="1005840" cy="219456"/>
-          </a:xfrm>
-          <a:prstGeom prst="rect">
-            <a:avLst/>
-          </a:prstGeom>
-          <a:noFill/>
-        </p:spPr>
-        <p:txBody>
-          <a:bodyPr wrap="square">
-            <a:spAutoFit/>
-          </a:bodyPr>
-          <a:lstStyle/>
-          <a:p>
-            <a:pPr algn="l"/>
-            <a:r>
-              <a:rPr sz="1000" b="1" i="0">
-                <a:solidFill>
-                  <a:srgbClr val="FFFFFF"/>
-                </a:solidFill>
-              </a:rPr>
-              <a:t>기능</a:t>
-            </a:r>
-          </a:p>
-        </p:txBody>
-      </p:sp>
-      <p:sp>
-        <p:nvSpPr>
-          <p:cNvPr id="17" name="TextBox 16"/>
-          <p:cNvSpPr txBox="1"/>
-          <p:nvPr/>
-        </p:nvSpPr>
-        <p:spPr>
-          <a:xfrm>
-            <a:off x="1444752" y="3291840"/>
-            <a:ext cx="7406640" cy="256032"/>
-          </a:xfrm>
-          <a:prstGeom prst="rect">
-            <a:avLst/>
-          </a:prstGeom>
-          <a:noFill/>
-        </p:spPr>
-        <p:txBody>
-          <a:bodyPr wrap="square">
-            <a:spAutoFit/>
-          </a:bodyPr>
-          <a:lstStyle/>
-          <a:p>
-            <a:pPr algn="l"/>
-            <a:r>
-              <a:rPr sz="1000" b="0" i="0">
+          </p:spPr>
+          <p:txBody>
+            <a:bodyPr wrap="square">
+              <a:spAutoFit/>
+            </a:bodyPr>
+            <a:lstStyle/>
+            <a:p>
+              <a:pPr algn="l"/>
+              <a:r>
+                <a:rPr sz="1000" b="1" i="0">
+                  <a:solidFill>
+                    <a:srgbClr val="FFFFFF"/>
+                  </a:solidFill>
+                </a:rPr>
+                <a:t>기능</a:t>
+              </a:r>
+            </a:p>
+          </p:txBody>
+        </p:sp>
+        <p:sp>
+          <p:nvSpPr>
+            <p:cNvPr id="18" name="Rectangle 17"/>
+            <p:cNvSpPr/>
+            <p:nvPr/>
+          </p:nvSpPr>
+          <p:spPr>
+            <a:xfrm>
+              <a:off x="274320" y="3794973"/>
+              <a:ext cx="1097280" cy="274320"/>
+            </a:xfrm>
+            <a:prstGeom prst="rect">
+              <a:avLst/>
+            </a:prstGeom>
+            <a:solidFill>
+              <a:srgbClr val="2E74B5"/>
+            </a:solidFill>
+            <a:ln>
+              <a:noFill/>
+            </a:ln>
+          </p:spPr>
+          <p:style>
+            <a:lnRef idx="1">
+              <a:schemeClr val="accent1"/>
+            </a:lnRef>
+            <a:fillRef idx="3">
+              <a:schemeClr val="accent1"/>
+            </a:fillRef>
+            <a:effectRef idx="2">
+              <a:schemeClr val="accent1"/>
+            </a:effectRef>
+            <a:fontRef idx="minor">
+              <a:schemeClr val="lt1"/>
+            </a:fontRef>
+          </p:style>
+          <p:txBody>
+            <a:bodyPr rtlCol="0" anchor="ctr"/>
+            <a:lstStyle/>
+            <a:p>
+              <a:pPr algn="ctr"/>
+              <a:endParaRPr/>
+            </a:p>
+          </p:txBody>
+        </p:sp>
+        <p:sp>
+          <p:nvSpPr>
+            <p:cNvPr id="19" name="TextBox 18"/>
+            <p:cNvSpPr txBox="1"/>
+            <p:nvPr/>
+          </p:nvSpPr>
+          <p:spPr>
+            <a:xfrm>
+              <a:off x="320040" y="3831549"/>
+              <a:ext cx="1005840" cy="219456"/>
+            </a:xfrm>
+            <a:prstGeom prst="rect">
+              <a:avLst/>
+            </a:prstGeom>
+            <a:noFill/>
+          </p:spPr>
+          <p:txBody>
+            <a:bodyPr wrap="square">
+              <a:spAutoFit/>
+            </a:bodyPr>
+            <a:lstStyle/>
+            <a:p>
+              <a:pPr algn="l"/>
+              <a:r>
+                <a:rPr sz="1000" b="1" i="0">
+                  <a:solidFill>
+                    <a:srgbClr val="FFFFFF"/>
+                  </a:solidFill>
+                </a:rPr>
+                <a:t>방법</a:t>
+              </a:r>
+            </a:p>
+          </p:txBody>
+        </p:sp>
+        <p:sp>
+          <p:nvSpPr>
+            <p:cNvPr id="21" name="Rectangle 20"/>
+            <p:cNvSpPr/>
+            <p:nvPr/>
+          </p:nvSpPr>
+          <p:spPr>
+            <a:xfrm>
+              <a:off x="274320" y="4087581"/>
+              <a:ext cx="1097280" cy="274320"/>
+            </a:xfrm>
+            <a:prstGeom prst="rect">
+              <a:avLst/>
+            </a:prstGeom>
+            <a:solidFill>
+              <a:srgbClr val="2E74B5"/>
+            </a:solidFill>
+            <a:ln>
+              <a:noFill/>
+            </a:ln>
+          </p:spPr>
+          <p:style>
+            <a:lnRef idx="1">
+              <a:schemeClr val="accent1"/>
+            </a:lnRef>
+            <a:fillRef idx="3">
+              <a:schemeClr val="accent1"/>
+            </a:fillRef>
+            <a:effectRef idx="2">
+              <a:schemeClr val="accent1"/>
+            </a:effectRef>
+            <a:fontRef idx="minor">
+              <a:schemeClr val="lt1"/>
+            </a:fontRef>
+          </p:style>
+          <p:txBody>
+            <a:bodyPr rtlCol="0" anchor="ctr"/>
+            <a:lstStyle/>
+            <a:p>
+              <a:pPr algn="ctr"/>
+              <a:endParaRPr/>
+            </a:p>
+          </p:txBody>
+        </p:sp>
+        <p:sp>
+          <p:nvSpPr>
+            <p:cNvPr id="22" name="TextBox 21"/>
+            <p:cNvSpPr txBox="1"/>
+            <p:nvPr/>
+          </p:nvSpPr>
+          <p:spPr>
+            <a:xfrm>
+              <a:off x="320040" y="4124157"/>
+              <a:ext cx="1005840" cy="219456"/>
+            </a:xfrm>
+            <a:prstGeom prst="rect">
+              <a:avLst/>
+            </a:prstGeom>
+            <a:noFill/>
+          </p:spPr>
+          <p:txBody>
+            <a:bodyPr wrap="square">
+              <a:spAutoFit/>
+            </a:bodyPr>
+            <a:lstStyle/>
+            <a:p>
+              <a:pPr algn="l"/>
+              <a:r>
+                <a:rPr sz="1000" b="1" i="0">
+                  <a:solidFill>
+                    <a:srgbClr val="FFFFFF"/>
+                  </a:solidFill>
+                </a:rPr>
+                <a:t>방법</a:t>
+              </a:r>
+            </a:p>
+          </p:txBody>
+        </p:sp>
+        <p:sp>
+          <p:nvSpPr>
+            <p:cNvPr id="24" name="Rectangle 23"/>
+            <p:cNvSpPr/>
+            <p:nvPr/>
+          </p:nvSpPr>
+          <p:spPr>
+            <a:xfrm>
+              <a:off x="274320" y="4380189"/>
+              <a:ext cx="1097280" cy="274320"/>
+            </a:xfrm>
+            <a:prstGeom prst="rect">
+              <a:avLst/>
+            </a:prstGeom>
+            <a:solidFill>
+              <a:srgbClr val="2E74B5"/>
+            </a:solidFill>
+            <a:ln>
+              <a:noFill/>
+            </a:ln>
+          </p:spPr>
+          <p:style>
+            <a:lnRef idx="1">
+              <a:schemeClr val="accent1"/>
+            </a:lnRef>
+            <a:fillRef idx="3">
+              <a:schemeClr val="accent1"/>
+            </a:fillRef>
+            <a:effectRef idx="2">
+              <a:schemeClr val="accent1"/>
+            </a:effectRef>
+            <a:fontRef idx="minor">
+              <a:schemeClr val="lt1"/>
+            </a:fontRef>
+          </p:style>
+          <p:txBody>
+            <a:bodyPr rtlCol="0" anchor="ctr"/>
+            <a:lstStyle/>
+            <a:p>
+              <a:pPr algn="ctr"/>
+              <a:endParaRPr/>
+            </a:p>
+          </p:txBody>
+        </p:sp>
+        <p:sp>
+          <p:nvSpPr>
+            <p:cNvPr id="25" name="TextBox 24"/>
+            <p:cNvSpPr txBox="1"/>
+            <p:nvPr/>
+          </p:nvSpPr>
+          <p:spPr>
+            <a:xfrm>
+              <a:off x="320040" y="4416765"/>
+              <a:ext cx="1005840" cy="219456"/>
+            </a:xfrm>
+            <a:prstGeom prst="rect">
+              <a:avLst/>
+            </a:prstGeom>
+            <a:noFill/>
+          </p:spPr>
+          <p:txBody>
+            <a:bodyPr wrap="square">
+              <a:spAutoFit/>
+            </a:bodyPr>
+            <a:lstStyle/>
+            <a:p>
+              <a:pPr algn="l"/>
+              <a:r>
+                <a:rPr sz="1000" b="1" i="0">
+                  <a:solidFill>
+                    <a:srgbClr val="FFFFFF"/>
+                  </a:solidFill>
+                </a:rPr>
+                <a:t>결과</a:t>
+              </a:r>
+            </a:p>
+          </p:txBody>
+        </p:sp>
+        <p:sp>
+          <p:nvSpPr>
+            <p:cNvPr id="27" name="Rectangle 26"/>
+            <p:cNvSpPr/>
+            <p:nvPr/>
+          </p:nvSpPr>
+          <p:spPr>
+            <a:xfrm>
+              <a:off x="274320" y="4672797"/>
+              <a:ext cx="1097280" cy="274320"/>
+            </a:xfrm>
+            <a:prstGeom prst="rect">
+              <a:avLst/>
+            </a:prstGeom>
+            <a:solidFill>
+              <a:srgbClr val="2E74B5"/>
+            </a:solidFill>
+            <a:ln>
+              <a:noFill/>
+            </a:ln>
+          </p:spPr>
+          <p:style>
+            <a:lnRef idx="1">
+              <a:schemeClr val="accent1"/>
+            </a:lnRef>
+            <a:fillRef idx="3">
+              <a:schemeClr val="accent1"/>
+            </a:fillRef>
+            <a:effectRef idx="2">
+              <a:schemeClr val="accent1"/>
+            </a:effectRef>
+            <a:fontRef idx="minor">
+              <a:schemeClr val="lt1"/>
+            </a:fontRef>
+          </p:style>
+          <p:txBody>
+            <a:bodyPr rtlCol="0" anchor="ctr"/>
+            <a:lstStyle/>
+            <a:p>
+              <a:pPr algn="ctr"/>
+              <a:endParaRPr/>
+            </a:p>
+          </p:txBody>
+        </p:sp>
+        <p:sp>
+          <p:nvSpPr>
+            <p:cNvPr id="28" name="TextBox 27"/>
+            <p:cNvSpPr txBox="1"/>
+            <p:nvPr/>
+          </p:nvSpPr>
+          <p:spPr>
+            <a:xfrm>
+              <a:off x="320040" y="4709373"/>
+              <a:ext cx="1005840" cy="219456"/>
+            </a:xfrm>
+            <a:prstGeom prst="rect">
+              <a:avLst/>
+            </a:prstGeom>
+            <a:noFill/>
+          </p:spPr>
+          <p:txBody>
+            <a:bodyPr wrap="square">
+              <a:spAutoFit/>
+            </a:bodyPr>
+            <a:lstStyle/>
+            <a:p>
+              <a:pPr algn="l"/>
+              <a:r>
+                <a:rPr sz="1000" b="1" i="0">
+                  <a:solidFill>
+                    <a:srgbClr val="FFFFFF"/>
+                  </a:solidFill>
+                </a:rPr>
+                <a:t>한계</a:t>
+              </a:r>
+            </a:p>
+          </p:txBody>
+        </p:sp>
+      </p:grpSp>
+      <p:grpSp>
+        <p:nvGrpSpPr>
+          <p:cNvPr id="31" name="그룹 30">
+            <a:extLst>
+              <a:ext uri="{FF2B5EF4-FFF2-40B4-BE49-F238E27FC236}">
+                <a16:creationId xmlns:a16="http://schemas.microsoft.com/office/drawing/2014/main" id="{86BC0098-F6D6-CB4E-7F89-36A1E409AC83}"/>
+              </a:ext>
+            </a:extLst>
+          </p:cNvPr>
+          <p:cNvGrpSpPr/>
+          <p:nvPr/>
+        </p:nvGrpSpPr>
+        <p:grpSpPr>
+          <a:xfrm>
+            <a:off x="1444752" y="3616558"/>
+            <a:ext cx="7424928" cy="1471971"/>
+            <a:chOff x="1444752" y="3502365"/>
+            <a:chExt cx="7424928" cy="1471971"/>
+          </a:xfrm>
+        </p:grpSpPr>
+        <p:sp>
+          <p:nvSpPr>
+            <p:cNvPr id="17" name="TextBox 16"/>
+            <p:cNvSpPr txBox="1"/>
+            <p:nvPr/>
+          </p:nvSpPr>
+          <p:spPr>
+            <a:xfrm>
+              <a:off x="1444752" y="3502365"/>
+              <a:ext cx="7406640" cy="256032"/>
+            </a:xfrm>
+            <a:prstGeom prst="rect">
+              <a:avLst/>
+            </a:prstGeom>
+            <a:noFill/>
+          </p:spPr>
+          <p:txBody>
+            <a:bodyPr wrap="square">
+              <a:spAutoFit/>
+            </a:bodyPr>
+            <a:lstStyle/>
+            <a:p>
+              <a:pPr algn="l"/>
+              <a:r>
+                <a:rPr sz="1000" b="0" i="0" dirty="0">
+                  <a:solidFill>
+                    <a:srgbClr val="404040"/>
+                  </a:solidFill>
+                </a:rPr>
+                <a:t>93C56 vs 93C46 </a:t>
+              </a:r>
+              <a:r>
+                <a:rPr sz="1000" b="0" i="0" dirty="0" err="1">
+                  <a:solidFill>
+                    <a:srgbClr val="404040"/>
+                  </a:solidFill>
+                </a:rPr>
+                <a:t>자동</a:t>
+              </a:r>
+              <a:r>
+                <a:rPr sz="1000" b="0" i="0" dirty="0">
+                  <a:solidFill>
+                    <a:srgbClr val="404040"/>
+                  </a:solidFill>
+                </a:rPr>
+                <a:t> </a:t>
+              </a:r>
+              <a:r>
+                <a:rPr sz="1000" b="0" i="0" dirty="0" err="1">
+                  <a:solidFill>
+                    <a:srgbClr val="404040"/>
+                  </a:solidFill>
+                </a:rPr>
+                <a:t>식별</a:t>
+              </a:r>
+              <a:r>
+                <a:rPr sz="1000" b="0" i="0" dirty="0">
+                  <a:solidFill>
+                    <a:srgbClr val="404040"/>
+                  </a:solidFill>
+                </a:rPr>
+                <a:t> (</a:t>
+              </a:r>
+              <a:r>
+                <a:rPr sz="1000" b="0" i="0" dirty="0" err="1">
+                  <a:solidFill>
+                    <a:srgbClr val="404040"/>
+                  </a:solidFill>
+                </a:rPr>
+                <a:t>주소</a:t>
+              </a:r>
+              <a:r>
+                <a:rPr sz="1000" b="0" i="0" dirty="0">
+                  <a:solidFill>
+                    <a:srgbClr val="404040"/>
+                  </a:solidFill>
+                </a:rPr>
+                <a:t> </a:t>
+              </a:r>
+              <a:r>
+                <a:rPr sz="1000" b="0" i="0" dirty="0" err="1">
+                  <a:solidFill>
+                    <a:srgbClr val="404040"/>
+                  </a:solidFill>
+                </a:rPr>
+                <a:t>범위</a:t>
+              </a:r>
+              <a:r>
+                <a:rPr sz="1000" b="0" i="0" dirty="0">
+                  <a:solidFill>
+                    <a:srgbClr val="404040"/>
+                  </a:solidFill>
+                </a:rPr>
+                <a:t> </a:t>
+              </a:r>
+              <a:r>
+                <a:rPr sz="1000" b="0" i="0" dirty="0" err="1">
+                  <a:solidFill>
+                    <a:srgbClr val="404040"/>
+                  </a:solidFill>
+                </a:rPr>
+                <a:t>테스트</a:t>
+              </a:r>
+              <a:r>
+                <a:rPr sz="1000" b="0" i="0" dirty="0">
+                  <a:solidFill>
+                    <a:srgbClr val="404040"/>
+                  </a:solidFill>
+                </a:rPr>
+                <a:t> </a:t>
+              </a:r>
+              <a:r>
+                <a:rPr sz="1000" b="0" i="0" dirty="0" err="1">
+                  <a:solidFill>
+                    <a:srgbClr val="404040"/>
+                  </a:solidFill>
+                </a:rPr>
+                <a:t>방식</a:t>
+              </a:r>
+              <a:r>
+                <a:rPr sz="1000" b="0" i="0" dirty="0">
+                  <a:solidFill>
+                    <a:srgbClr val="404040"/>
+                  </a:solidFill>
+                </a:rPr>
+                <a:t>)</a:t>
+              </a:r>
+            </a:p>
+          </p:txBody>
+        </p:sp>
+        <p:sp>
+          <p:nvSpPr>
+            <p:cNvPr id="20" name="TextBox 19"/>
+            <p:cNvSpPr txBox="1"/>
+            <p:nvPr/>
+          </p:nvSpPr>
+          <p:spPr>
+            <a:xfrm>
+              <a:off x="1444752" y="3754569"/>
+              <a:ext cx="7406640" cy="256032"/>
+            </a:xfrm>
+            <a:prstGeom prst="rect">
+              <a:avLst/>
+            </a:prstGeom>
+            <a:noFill/>
+          </p:spPr>
+          <p:txBody>
+            <a:bodyPr wrap="square">
+              <a:spAutoFit/>
+            </a:bodyPr>
+            <a:lstStyle/>
+            <a:p>
+              <a:pPr algn="l"/>
+              <a:r>
+                <a:rPr sz="1000" b="0" i="0" dirty="0" err="1">
+                  <a:solidFill>
+                    <a:srgbClr val="404040"/>
+                  </a:solidFill>
+                </a:rPr>
+                <a:t>g_addr_bits</a:t>
+              </a:r>
+              <a:r>
+                <a:rPr sz="1000" b="0" i="0" dirty="0">
+                  <a:solidFill>
+                    <a:srgbClr val="404040"/>
+                  </a:solidFill>
+                </a:rPr>
+                <a:t>=8 (93C56)로 </a:t>
+              </a:r>
+              <a:r>
+                <a:rPr sz="1000" b="0" i="0" dirty="0" err="1">
+                  <a:solidFill>
+                    <a:srgbClr val="404040"/>
+                  </a:solidFill>
+                </a:rPr>
+                <a:t>addr</a:t>
+              </a:r>
+              <a:r>
+                <a:rPr sz="1000" b="0" i="0" dirty="0">
+                  <a:solidFill>
+                    <a:srgbClr val="404040"/>
+                  </a:solidFill>
+                </a:rPr>
+                <a:t> 200에 </a:t>
+              </a:r>
+              <a:r>
+                <a:rPr sz="1000" b="0" i="0" dirty="0" err="1">
+                  <a:solidFill>
+                    <a:srgbClr val="404040"/>
+                  </a:solidFill>
+                </a:rPr>
+                <a:t>쓰기</a:t>
+              </a:r>
+              <a:r>
+                <a:rPr sz="1000" b="0" i="0" dirty="0">
+                  <a:solidFill>
+                    <a:srgbClr val="404040"/>
+                  </a:solidFill>
+                </a:rPr>
+                <a:t>/</a:t>
+              </a:r>
+              <a:r>
+                <a:rPr sz="1000" b="0" i="0" dirty="0" err="1">
+                  <a:solidFill>
+                    <a:srgbClr val="404040"/>
+                  </a:solidFill>
+                </a:rPr>
+                <a:t>읽기</a:t>
+              </a:r>
+              <a:r>
+                <a:rPr sz="1000" b="0" i="0" dirty="0">
+                  <a:solidFill>
+                    <a:srgbClr val="404040"/>
+                  </a:solidFill>
+                </a:rPr>
+                <a:t> → </a:t>
+              </a:r>
+              <a:r>
+                <a:rPr sz="1000" b="0" i="0" dirty="0" err="1">
+                  <a:solidFill>
+                    <a:srgbClr val="404040"/>
+                  </a:solidFill>
+                </a:rPr>
+                <a:t>성공</a:t>
+              </a:r>
+              <a:r>
+                <a:rPr sz="1000" b="0" i="0" dirty="0">
+                  <a:solidFill>
+                    <a:srgbClr val="404040"/>
+                  </a:solidFill>
+                </a:rPr>
+                <a:t> 시 93C56</a:t>
+              </a:r>
+            </a:p>
+          </p:txBody>
+        </p:sp>
+        <p:sp>
+          <p:nvSpPr>
+            <p:cNvPr id="23" name="TextBox 22"/>
+            <p:cNvSpPr txBox="1"/>
+            <p:nvPr/>
+          </p:nvSpPr>
+          <p:spPr>
+            <a:xfrm>
+              <a:off x="1463040" y="4110547"/>
+              <a:ext cx="7406640" cy="256032"/>
+            </a:xfrm>
+            <a:prstGeom prst="rect">
+              <a:avLst/>
+            </a:prstGeom>
+            <a:noFill/>
+          </p:spPr>
+          <p:txBody>
+            <a:bodyPr wrap="square">
+              <a:spAutoFit/>
+            </a:bodyPr>
+            <a:lstStyle/>
+            <a:p>
+              <a:pPr algn="l"/>
+              <a:r>
+                <a:rPr sz="1000" b="0" i="0" dirty="0" err="1">
+                  <a:solidFill>
+                    <a:srgbClr val="404040"/>
+                  </a:solidFill>
+                </a:rPr>
+                <a:t>실패</a:t>
+              </a:r>
+              <a:r>
+                <a:rPr sz="1000" b="0" i="0" dirty="0">
+                  <a:solidFill>
+                    <a:srgbClr val="404040"/>
+                  </a:solidFill>
+                </a:rPr>
+                <a:t> 시 </a:t>
+              </a:r>
+              <a:r>
+                <a:rPr sz="1000" b="0" i="0" dirty="0" err="1">
+                  <a:solidFill>
+                    <a:srgbClr val="404040"/>
+                  </a:solidFill>
+                </a:rPr>
+                <a:t>g_addr_bits</a:t>
+              </a:r>
+              <a:r>
+                <a:rPr sz="1000" b="0" i="0" dirty="0">
+                  <a:solidFill>
+                    <a:srgbClr val="404040"/>
+                  </a:solidFill>
+                </a:rPr>
+                <a:t>=7 (93C46)로 </a:t>
+              </a:r>
+              <a:r>
+                <a:rPr sz="1000" b="0" i="0" dirty="0" err="1">
+                  <a:solidFill>
+                    <a:srgbClr val="404040"/>
+                  </a:solidFill>
+                </a:rPr>
+                <a:t>addr</a:t>
+              </a:r>
+              <a:r>
+                <a:rPr sz="1000" b="0" i="0" dirty="0">
+                  <a:solidFill>
+                    <a:srgbClr val="404040"/>
+                  </a:solidFill>
+                </a:rPr>
+                <a:t> 100에 </a:t>
+              </a:r>
+              <a:r>
+                <a:rPr sz="1000" b="0" i="0" dirty="0" err="1">
+                  <a:solidFill>
+                    <a:srgbClr val="404040"/>
+                  </a:solidFill>
+                </a:rPr>
+                <a:t>쓰기</a:t>
+              </a:r>
+              <a:r>
+                <a:rPr sz="1000" b="0" i="0" dirty="0">
+                  <a:solidFill>
+                    <a:srgbClr val="404040"/>
+                  </a:solidFill>
+                </a:rPr>
+                <a:t>/</a:t>
+              </a:r>
+              <a:r>
+                <a:rPr sz="1000" b="0" i="0" dirty="0" err="1">
+                  <a:solidFill>
+                    <a:srgbClr val="404040"/>
+                  </a:solidFill>
+                </a:rPr>
+                <a:t>읽기</a:t>
+              </a:r>
+              <a:r>
+                <a:rPr sz="1000" b="0" i="0" dirty="0">
+                  <a:solidFill>
+                    <a:srgbClr val="404040"/>
+                  </a:solidFill>
+                </a:rPr>
+                <a:t> </a:t>
+              </a:r>
+              <a:r>
+                <a:rPr sz="1000" b="0" i="0" dirty="0" err="1">
+                  <a:solidFill>
+                    <a:srgbClr val="404040"/>
+                  </a:solidFill>
+                </a:rPr>
+                <a:t>재시도</a:t>
+              </a:r>
+              <a:endParaRPr sz="1000" b="0" i="0" dirty="0">
                 <a:solidFill>
                   <a:srgbClr val="404040"/>
                 </a:solidFill>
-              </a:rPr>
-              <a:t>93C56 vs 93C46 자동 식별 (주소 범위 테스트 방식)</a:t>
-            </a:r>
-          </a:p>
-        </p:txBody>
-      </p:sp>
-      <p:sp>
-        <p:nvSpPr>
-          <p:cNvPr id="18" name="Rectangle 17"/>
-          <p:cNvSpPr/>
-          <p:nvPr/>
-        </p:nvSpPr>
-        <p:spPr>
-          <a:xfrm>
-            <a:off x="274320" y="3547872"/>
-            <a:ext cx="1097280" cy="274320"/>
-          </a:xfrm>
-          <a:prstGeom prst="rect">
-            <a:avLst/>
-          </a:prstGeom>
-          <a:solidFill>
-            <a:srgbClr val="2E74B5"/>
-          </a:solidFill>
-          <a:ln>
+              </a:endParaRPr>
+            </a:p>
+          </p:txBody>
+        </p:sp>
+        <p:sp>
+          <p:nvSpPr>
+            <p:cNvPr id="26" name="TextBox 25"/>
+            <p:cNvSpPr txBox="1"/>
+            <p:nvPr/>
+          </p:nvSpPr>
+          <p:spPr>
+            <a:xfrm>
+              <a:off x="1444752" y="4361476"/>
+              <a:ext cx="7406640" cy="256032"/>
+            </a:xfrm>
+            <a:prstGeom prst="rect">
+              <a:avLst/>
+            </a:prstGeom>
             <a:noFill/>
-          </a:ln>
-        </p:spPr>
-        <p:style>
-          <a:lnRef idx="1">
-            <a:schemeClr val="accent1"/>
-          </a:lnRef>
-          <a:fillRef idx="3">
-            <a:schemeClr val="accent1"/>
-          </a:fillRef>
-          <a:effectRef idx="2">
-            <a:schemeClr val="accent1"/>
-          </a:effectRef>
-          <a:fontRef idx="minor">
-            <a:schemeClr val="lt1"/>
-          </a:fontRef>
-        </p:style>
-        <p:txBody>
-          <a:bodyPr rtlCol="0" anchor="ctr"/>
-          <a:lstStyle/>
-          <a:p>
-            <a:pPr algn="ctr"/>
-            <a:endParaRPr/>
-          </a:p>
-        </p:txBody>
-      </p:sp>
-      <p:sp>
-        <p:nvSpPr>
-          <p:cNvPr id="19" name="TextBox 18"/>
-          <p:cNvSpPr txBox="1"/>
-          <p:nvPr/>
-        </p:nvSpPr>
-        <p:spPr>
-          <a:xfrm>
-            <a:off x="320040" y="3584448"/>
-            <a:ext cx="1005840" cy="219456"/>
-          </a:xfrm>
-          <a:prstGeom prst="rect">
-            <a:avLst/>
-          </a:prstGeom>
-          <a:noFill/>
-        </p:spPr>
-        <p:txBody>
-          <a:bodyPr wrap="square">
-            <a:spAutoFit/>
-          </a:bodyPr>
-          <a:lstStyle/>
-          <a:p>
-            <a:pPr algn="l"/>
-            <a:r>
-              <a:rPr sz="1000" b="1" i="0">
-                <a:solidFill>
-                  <a:srgbClr val="FFFFFF"/>
-                </a:solidFill>
-              </a:rPr>
-              <a:t>방법</a:t>
-            </a:r>
-          </a:p>
-        </p:txBody>
-      </p:sp>
-      <p:sp>
-        <p:nvSpPr>
-          <p:cNvPr id="20" name="TextBox 19"/>
-          <p:cNvSpPr txBox="1"/>
-          <p:nvPr/>
-        </p:nvSpPr>
-        <p:spPr>
-          <a:xfrm>
-            <a:off x="1444752" y="3584448"/>
-            <a:ext cx="7406640" cy="256032"/>
-          </a:xfrm>
-          <a:prstGeom prst="rect">
-            <a:avLst/>
-          </a:prstGeom>
-          <a:noFill/>
-        </p:spPr>
-        <p:txBody>
-          <a:bodyPr wrap="square">
-            <a:spAutoFit/>
-          </a:bodyPr>
-          <a:lstStyle/>
-          <a:p>
-            <a:pPr algn="l"/>
-            <a:r>
-              <a:rPr sz="1000" b="0" i="0">
-                <a:solidFill>
-                  <a:srgbClr val="404040"/>
-                </a:solidFill>
-              </a:rPr>
-              <a:t>g_addr_bits=8 (93C56)로 addr 200에 쓰기/읽기 → 성공 시 93C56</a:t>
-            </a:r>
-          </a:p>
-        </p:txBody>
-      </p:sp>
-      <p:sp>
-        <p:nvSpPr>
-          <p:cNvPr id="21" name="Rectangle 20"/>
-          <p:cNvSpPr/>
-          <p:nvPr/>
-        </p:nvSpPr>
-        <p:spPr>
-          <a:xfrm>
-            <a:off x="274320" y="3840480"/>
-            <a:ext cx="1097280" cy="274320"/>
-          </a:xfrm>
-          <a:prstGeom prst="rect">
-            <a:avLst/>
-          </a:prstGeom>
-          <a:solidFill>
-            <a:srgbClr val="2E74B5"/>
-          </a:solidFill>
-          <a:ln>
+          </p:spPr>
+          <p:txBody>
+            <a:bodyPr wrap="square">
+              <a:spAutoFit/>
+            </a:bodyPr>
+            <a:lstStyle/>
+            <a:p>
+              <a:pPr algn="l"/>
+              <a:r>
+                <a:rPr sz="1000" b="0" i="0" dirty="0" err="1">
+                  <a:solidFill>
+                    <a:srgbClr val="378638"/>
+                  </a:solidFill>
+                </a:rPr>
+                <a:t>g_chip_type</a:t>
+              </a:r>
+              <a:r>
+                <a:rPr sz="1000" b="0" i="0" dirty="0">
+                  <a:solidFill>
+                    <a:srgbClr val="378638"/>
+                  </a:solidFill>
+                </a:rPr>
+                <a:t>, </a:t>
+              </a:r>
+              <a:r>
+                <a:rPr sz="1000" b="0" i="0" dirty="0" err="1">
+                  <a:solidFill>
+                    <a:srgbClr val="378638"/>
+                  </a:solidFill>
+                </a:rPr>
+                <a:t>g_addr_bits</a:t>
+              </a:r>
+              <a:r>
+                <a:rPr sz="1000" b="0" i="0" dirty="0">
+                  <a:solidFill>
+                    <a:srgbClr val="378638"/>
+                  </a:solidFill>
+                </a:rPr>
+                <a:t>, </a:t>
+              </a:r>
+              <a:r>
+                <a:rPr sz="1000" b="0" i="0" dirty="0" err="1">
+                  <a:solidFill>
+                    <a:srgbClr val="378638"/>
+                  </a:solidFill>
+                </a:rPr>
+                <a:t>g_num_addrs</a:t>
+              </a:r>
+              <a:r>
+                <a:rPr sz="1000" b="0" i="0" dirty="0">
+                  <a:solidFill>
+                    <a:srgbClr val="378638"/>
+                  </a:solidFill>
+                </a:rPr>
+                <a:t> </a:t>
+              </a:r>
+              <a:r>
+                <a:rPr sz="1000" b="0" i="0" dirty="0" err="1">
+                  <a:solidFill>
+                    <a:srgbClr val="378638"/>
+                  </a:solidFill>
+                </a:rPr>
+                <a:t>전역</a:t>
+              </a:r>
+              <a:r>
+                <a:rPr sz="1000" b="0" i="0" dirty="0">
+                  <a:solidFill>
+                    <a:srgbClr val="378638"/>
+                  </a:solidFill>
+                </a:rPr>
+                <a:t> </a:t>
+              </a:r>
+              <a:r>
+                <a:rPr sz="1000" b="0" i="0" dirty="0" err="1">
+                  <a:solidFill>
+                    <a:srgbClr val="378638"/>
+                  </a:solidFill>
+                </a:rPr>
+                <a:t>변수</a:t>
+              </a:r>
+              <a:r>
+                <a:rPr sz="1000" b="0" i="0" dirty="0">
+                  <a:solidFill>
+                    <a:srgbClr val="378638"/>
+                  </a:solidFill>
+                </a:rPr>
+                <a:t> </a:t>
+              </a:r>
+              <a:r>
+                <a:rPr sz="1000" b="0" i="0" dirty="0" err="1">
+                  <a:solidFill>
+                    <a:srgbClr val="378638"/>
+                  </a:solidFill>
+                </a:rPr>
+                <a:t>자동</a:t>
+              </a:r>
+              <a:r>
+                <a:rPr sz="1000" b="0" i="0" dirty="0">
+                  <a:solidFill>
+                    <a:srgbClr val="378638"/>
+                  </a:solidFill>
+                </a:rPr>
+                <a:t> </a:t>
+              </a:r>
+              <a:r>
+                <a:rPr sz="1000" b="0" i="0" dirty="0" err="1">
+                  <a:solidFill>
+                    <a:srgbClr val="378638"/>
+                  </a:solidFill>
+                </a:rPr>
+                <a:t>설정</a:t>
+              </a:r>
+              <a:endParaRPr sz="1000" b="0" i="0" dirty="0">
+                <a:solidFill>
+                  <a:srgbClr val="378638"/>
+                </a:solidFill>
+              </a:endParaRPr>
+            </a:p>
+          </p:txBody>
+        </p:sp>
+        <p:sp>
+          <p:nvSpPr>
+            <p:cNvPr id="29" name="TextBox 28"/>
+            <p:cNvSpPr txBox="1"/>
+            <p:nvPr/>
+          </p:nvSpPr>
+          <p:spPr>
+            <a:xfrm>
+              <a:off x="1463040" y="4718304"/>
+              <a:ext cx="7406640" cy="256032"/>
+            </a:xfrm>
+            <a:prstGeom prst="rect">
+              <a:avLst/>
+            </a:prstGeom>
             <a:noFill/>
-          </a:ln>
-        </p:spPr>
-        <p:style>
-          <a:lnRef idx="1">
-            <a:schemeClr val="accent1"/>
-          </a:lnRef>
-          <a:fillRef idx="3">
-            <a:schemeClr val="accent1"/>
-          </a:fillRef>
-          <a:effectRef idx="2">
-            <a:schemeClr val="accent1"/>
-          </a:effectRef>
-          <a:fontRef idx="minor">
-            <a:schemeClr val="lt1"/>
-          </a:fontRef>
-        </p:style>
-        <p:txBody>
-          <a:bodyPr rtlCol="0" anchor="ctr"/>
-          <a:lstStyle/>
-          <a:p>
-            <a:pPr algn="ctr"/>
-            <a:endParaRPr/>
-          </a:p>
-        </p:txBody>
-      </p:sp>
-      <p:sp>
-        <p:nvSpPr>
-          <p:cNvPr id="22" name="TextBox 21"/>
-          <p:cNvSpPr txBox="1"/>
-          <p:nvPr/>
-        </p:nvSpPr>
-        <p:spPr>
-          <a:xfrm>
-            <a:off x="320040" y="3877056"/>
-            <a:ext cx="1005840" cy="219456"/>
-          </a:xfrm>
-          <a:prstGeom prst="rect">
-            <a:avLst/>
-          </a:prstGeom>
-          <a:noFill/>
-        </p:spPr>
-        <p:txBody>
-          <a:bodyPr wrap="square">
-            <a:spAutoFit/>
-          </a:bodyPr>
-          <a:lstStyle/>
-          <a:p>
-            <a:pPr algn="l"/>
-            <a:r>
-              <a:rPr sz="1000" b="1" i="0">
-                <a:solidFill>
-                  <a:srgbClr val="FFFFFF"/>
-                </a:solidFill>
-              </a:rPr>
-              <a:t>방법</a:t>
-            </a:r>
-          </a:p>
-        </p:txBody>
-      </p:sp>
-      <p:sp>
-        <p:nvSpPr>
-          <p:cNvPr id="23" name="TextBox 22"/>
-          <p:cNvSpPr txBox="1"/>
-          <p:nvPr/>
-        </p:nvSpPr>
-        <p:spPr>
-          <a:xfrm>
-            <a:off x="1444752" y="3877056"/>
-            <a:ext cx="7406640" cy="256032"/>
-          </a:xfrm>
-          <a:prstGeom prst="rect">
-            <a:avLst/>
-          </a:prstGeom>
-          <a:noFill/>
-        </p:spPr>
-        <p:txBody>
-          <a:bodyPr wrap="square">
-            <a:spAutoFit/>
-          </a:bodyPr>
-          <a:lstStyle/>
-          <a:p>
-            <a:pPr algn="l"/>
-            <a:r>
-              <a:rPr sz="1000" b="0" i="0">
-                <a:solidFill>
-                  <a:srgbClr val="404040"/>
-                </a:solidFill>
-              </a:rPr>
-              <a:t>실패 시 g_addr_bits=7 (93C46)로 addr 100에 쓰기/읽기 재시도</a:t>
-            </a:r>
-          </a:p>
-        </p:txBody>
-      </p:sp>
-      <p:sp>
-        <p:nvSpPr>
-          <p:cNvPr id="24" name="Rectangle 23"/>
-          <p:cNvSpPr/>
-          <p:nvPr/>
-        </p:nvSpPr>
-        <p:spPr>
-          <a:xfrm>
-            <a:off x="274320" y="4133088"/>
-            <a:ext cx="1097280" cy="274320"/>
-          </a:xfrm>
-          <a:prstGeom prst="rect">
-            <a:avLst/>
-          </a:prstGeom>
-          <a:solidFill>
-            <a:srgbClr val="2E74B5"/>
-          </a:solidFill>
-          <a:ln>
-            <a:noFill/>
-          </a:ln>
-        </p:spPr>
-        <p:style>
-          <a:lnRef idx="1">
-            <a:schemeClr val="accent1"/>
-          </a:lnRef>
-          <a:fillRef idx="3">
-            <a:schemeClr val="accent1"/>
-          </a:fillRef>
-          <a:effectRef idx="2">
-            <a:schemeClr val="accent1"/>
-          </a:effectRef>
-          <a:fontRef idx="minor">
-            <a:schemeClr val="lt1"/>
-          </a:fontRef>
-        </p:style>
-        <p:txBody>
-          <a:bodyPr rtlCol="0" anchor="ctr"/>
-          <a:lstStyle/>
-          <a:p>
-            <a:pPr algn="ctr"/>
-            <a:endParaRPr/>
-          </a:p>
-        </p:txBody>
-      </p:sp>
-      <p:sp>
-        <p:nvSpPr>
-          <p:cNvPr id="25" name="TextBox 24"/>
-          <p:cNvSpPr txBox="1"/>
-          <p:nvPr/>
-        </p:nvSpPr>
-        <p:spPr>
-          <a:xfrm>
-            <a:off x="320040" y="4169664"/>
-            <a:ext cx="1005840" cy="219456"/>
-          </a:xfrm>
-          <a:prstGeom prst="rect">
-            <a:avLst/>
-          </a:prstGeom>
-          <a:noFill/>
-        </p:spPr>
-        <p:txBody>
-          <a:bodyPr wrap="square">
-            <a:spAutoFit/>
-          </a:bodyPr>
-          <a:lstStyle/>
-          <a:p>
-            <a:pPr algn="l"/>
-            <a:r>
-              <a:rPr sz="1000" b="1" i="0">
-                <a:solidFill>
-                  <a:srgbClr val="FFFFFF"/>
-                </a:solidFill>
-              </a:rPr>
-              <a:t>결과</a:t>
-            </a:r>
-          </a:p>
-        </p:txBody>
-      </p:sp>
-      <p:sp>
-        <p:nvSpPr>
-          <p:cNvPr id="26" name="TextBox 25"/>
-          <p:cNvSpPr txBox="1"/>
-          <p:nvPr/>
-        </p:nvSpPr>
-        <p:spPr>
-          <a:xfrm>
-            <a:off x="1444752" y="4169664"/>
-            <a:ext cx="7406640" cy="256032"/>
-          </a:xfrm>
-          <a:prstGeom prst="rect">
-            <a:avLst/>
-          </a:prstGeom>
-          <a:noFill/>
-        </p:spPr>
-        <p:txBody>
-          <a:bodyPr wrap="square">
-            <a:spAutoFit/>
-          </a:bodyPr>
-          <a:lstStyle/>
-          <a:p>
-            <a:pPr algn="l"/>
-            <a:r>
-              <a:rPr sz="1000" b="0" i="0">
-                <a:solidFill>
-                  <a:srgbClr val="378638"/>
-                </a:solidFill>
-              </a:rPr>
-              <a:t>g_chip_type, g_addr_bits, g_num_addrs 전역 변수 자동 설정</a:t>
-            </a:r>
-          </a:p>
-        </p:txBody>
-      </p:sp>
-      <p:sp>
-        <p:nvSpPr>
-          <p:cNvPr id="27" name="Rectangle 26"/>
-          <p:cNvSpPr/>
-          <p:nvPr/>
-        </p:nvSpPr>
-        <p:spPr>
-          <a:xfrm>
-            <a:off x="274320" y="4425696"/>
-            <a:ext cx="1097280" cy="274320"/>
-          </a:xfrm>
-          <a:prstGeom prst="rect">
-            <a:avLst/>
-          </a:prstGeom>
-          <a:solidFill>
-            <a:srgbClr val="2E74B5"/>
-          </a:solidFill>
-          <a:ln>
-            <a:noFill/>
-          </a:ln>
-        </p:spPr>
-        <p:style>
-          <a:lnRef idx="1">
-            <a:schemeClr val="accent1"/>
-          </a:lnRef>
-          <a:fillRef idx="3">
-            <a:schemeClr val="accent1"/>
-          </a:fillRef>
-          <a:effectRef idx="2">
-            <a:schemeClr val="accent1"/>
-          </a:effectRef>
-          <a:fontRef idx="minor">
-            <a:schemeClr val="lt1"/>
-          </a:fontRef>
-        </p:style>
-        <p:txBody>
-          <a:bodyPr rtlCol="0" anchor="ctr"/>
-          <a:lstStyle/>
-          <a:p>
-            <a:pPr algn="ctr"/>
-            <a:endParaRPr/>
-          </a:p>
-        </p:txBody>
-      </p:sp>
-      <p:sp>
-        <p:nvSpPr>
-          <p:cNvPr id="28" name="TextBox 27"/>
-          <p:cNvSpPr txBox="1"/>
-          <p:nvPr/>
-        </p:nvSpPr>
-        <p:spPr>
-          <a:xfrm>
-            <a:off x="320040" y="4462272"/>
-            <a:ext cx="1005840" cy="219456"/>
-          </a:xfrm>
-          <a:prstGeom prst="rect">
-            <a:avLst/>
-          </a:prstGeom>
-          <a:noFill/>
-        </p:spPr>
-        <p:txBody>
-          <a:bodyPr wrap="square">
-            <a:spAutoFit/>
-          </a:bodyPr>
-          <a:lstStyle/>
-          <a:p>
-            <a:pPr algn="l"/>
-            <a:r>
-              <a:rPr sz="1000" b="1" i="0">
-                <a:solidFill>
-                  <a:srgbClr val="FFFFFF"/>
-                </a:solidFill>
-              </a:rPr>
-              <a:t>한계</a:t>
-            </a:r>
-          </a:p>
-        </p:txBody>
-      </p:sp>
-      <p:sp>
-        <p:nvSpPr>
-          <p:cNvPr id="29" name="TextBox 28"/>
-          <p:cNvSpPr txBox="1"/>
-          <p:nvPr/>
-        </p:nvSpPr>
-        <p:spPr>
-          <a:xfrm>
-            <a:off x="1444752" y="4462272"/>
-            <a:ext cx="7406640" cy="256032"/>
-          </a:xfrm>
-          <a:prstGeom prst="rect">
-            <a:avLst/>
-          </a:prstGeom>
-          <a:noFill/>
-        </p:spPr>
-        <p:txBody>
-          <a:bodyPr wrap="square">
-            <a:spAutoFit/>
-          </a:bodyPr>
-          <a:lstStyle/>
-          <a:p>
-            <a:pPr algn="l"/>
-            <a:r>
-              <a:rPr sz="1000" b="0" i="0">
+          </p:spPr>
+          <p:txBody>
+            <a:bodyPr wrap="square">
+              <a:spAutoFit/>
+            </a:bodyPr>
+            <a:lstStyle/>
+            <a:p>
+              <a:pPr algn="l"/>
+              <a:r>
+                <a:rPr sz="1000" b="0" i="0" dirty="0">
+                  <a:solidFill>
+                    <a:srgbClr val="ED7D31"/>
+                  </a:solidFill>
+                </a:rPr>
+                <a:t>칩 </a:t>
+              </a:r>
+              <a:r>
+                <a:rPr sz="1000" b="0" i="0" dirty="0" err="1">
+                  <a:solidFill>
+                    <a:srgbClr val="ED7D31"/>
+                  </a:solidFill>
+                </a:rPr>
+                <a:t>무반응</a:t>
+              </a:r>
+              <a:r>
+                <a:rPr sz="1000" b="0" i="0" dirty="0">
+                  <a:solidFill>
+                    <a:srgbClr val="ED7D31"/>
+                  </a:solidFill>
+                </a:rPr>
+                <a:t> (DO=LOW) 시 UNKNOWN </a:t>
+              </a:r>
+              <a:r>
+                <a:rPr sz="1000" b="0" i="0" dirty="0" err="1">
+                  <a:solidFill>
+                    <a:srgbClr val="ED7D31"/>
+                  </a:solidFill>
+                </a:rPr>
+                <a:t>반환</a:t>
+              </a:r>
+              <a:r>
+                <a:rPr sz="1000" b="0" i="0" dirty="0">
+                  <a:solidFill>
+                    <a:srgbClr val="ED7D31"/>
+                  </a:solidFill>
+                </a:rPr>
+                <a:t> → </a:t>
+              </a:r>
+              <a:r>
+                <a:rPr sz="1000" b="0" i="0" dirty="0" err="1">
+                  <a:solidFill>
+                    <a:srgbClr val="ED7D31"/>
+                  </a:solidFill>
+                </a:rPr>
+                <a:t>현재</a:t>
+              </a:r>
+              <a:r>
+                <a:rPr sz="1000" b="0" i="0" dirty="0">
+                  <a:solidFill>
+                    <a:srgbClr val="ED7D31"/>
+                  </a:solidFill>
+                </a:rPr>
+                <a:t> </a:t>
+              </a:r>
+              <a:r>
+                <a:rPr sz="1000" b="0" i="0" dirty="0" err="1">
+                  <a:solidFill>
+                    <a:srgbClr val="ED7D31"/>
+                  </a:solidFill>
+                </a:rPr>
+                <a:t>상황</a:t>
+              </a:r>
+              <a:endParaRPr sz="1000" b="0" i="0" dirty="0">
                 <a:solidFill>
                   <a:srgbClr val="ED7D31"/>
                 </a:solidFill>
-              </a:rPr>
-              <a:t>칩 무반응 (DO=LOW) 시 UNKNOWN 반환 → 현재 상황</a:t>
-            </a:r>
-          </a:p>
-        </p:txBody>
-      </p:sp>
+              </a:endParaRPr>
+            </a:p>
+          </p:txBody>
+        </p:sp>
+      </p:grpSp>
     </p:spTree>
   </p:cSld>
   <p:clrMapOvr>
@@ -17328,6 +17261,13 @@
             <a:prstDash val="solid"/>
           </a:ln>
         </p:spPr>
+        <p:txBody>
+          <a:bodyPr/>
+          <a:lstStyle/>
+          <a:p>
+            <a:endParaRPr lang="ko-KR" altLang="en-US"/>
+          </a:p>
+        </p:txBody>
       </p:sp>
       <p:sp>
         <p:nvSpPr>
@@ -17353,6 +17293,13 @@
             <a:prstDash val="solid"/>
           </a:ln>
         </p:spPr>
+        <p:txBody>
+          <a:bodyPr/>
+          <a:lstStyle/>
+          <a:p>
+            <a:endParaRPr lang="ko-KR" altLang="en-US"/>
+          </a:p>
+        </p:txBody>
       </p:sp>
       <p:sp>
         <p:nvSpPr>
@@ -17417,6 +17364,13 @@
             <a:prstDash val="solid"/>
           </a:ln>
         </p:spPr>
+        <p:txBody>
+          <a:bodyPr/>
+          <a:lstStyle/>
+          <a:p>
+            <a:endParaRPr lang="ko-KR" altLang="en-US"/>
+          </a:p>
+        </p:txBody>
       </p:sp>
       <p:sp>
         <p:nvSpPr>
@@ -17498,6 +17452,13 @@
             <a:prstDash val="solid"/>
           </a:ln>
         </p:spPr>
+        <p:txBody>
+          <a:bodyPr/>
+          <a:lstStyle/>
+          <a:p>
+            <a:endParaRPr lang="ko-KR" altLang="en-US"/>
+          </a:p>
+        </p:txBody>
       </p:sp>
       <p:sp>
         <p:nvSpPr>
@@ -17579,6 +17540,13 @@
             <a:prstDash val="solid"/>
           </a:ln>
         </p:spPr>
+        <p:txBody>
+          <a:bodyPr/>
+          <a:lstStyle/>
+          <a:p>
+            <a:endParaRPr lang="ko-KR" altLang="en-US"/>
+          </a:p>
+        </p:txBody>
       </p:sp>
       <p:sp>
         <p:nvSpPr>
@@ -17660,6 +17628,13 @@
             <a:prstDash val="solid"/>
           </a:ln>
         </p:spPr>
+        <p:txBody>
+          <a:bodyPr/>
+          <a:lstStyle/>
+          <a:p>
+            <a:endParaRPr lang="ko-KR" altLang="en-US"/>
+          </a:p>
+        </p:txBody>
       </p:sp>
       <p:sp>
         <p:nvSpPr>
@@ -17741,6 +17716,13 @@
             <a:prstDash val="dash"/>
           </a:ln>
         </p:spPr>
+        <p:txBody>
+          <a:bodyPr/>
+          <a:lstStyle/>
+          <a:p>
+            <a:endParaRPr lang="ko-KR" altLang="en-US"/>
+          </a:p>
+        </p:txBody>
       </p:sp>
       <p:sp>
         <p:nvSpPr>
@@ -17803,6 +17785,13 @@
             <a:prstDash val="solid"/>
           </a:ln>
         </p:spPr>
+        <p:txBody>
+          <a:bodyPr/>
+          <a:lstStyle/>
+          <a:p>
+            <a:endParaRPr lang="ko-KR" altLang="en-US"/>
+          </a:p>
+        </p:txBody>
       </p:sp>
       <p:sp>
         <p:nvSpPr>
@@ -17867,6 +17856,13 @@
             <a:prstDash val="solid"/>
           </a:ln>
         </p:spPr>
+        <p:txBody>
+          <a:bodyPr/>
+          <a:lstStyle/>
+          <a:p>
+            <a:endParaRPr lang="ko-KR" altLang="en-US"/>
+          </a:p>
+        </p:txBody>
       </p:sp>
       <p:sp>
         <p:nvSpPr>
@@ -17931,6 +17927,13 @@
             <a:prstDash val="solid"/>
           </a:ln>
         </p:spPr>
+        <p:txBody>
+          <a:bodyPr/>
+          <a:lstStyle/>
+          <a:p>
+            <a:endParaRPr lang="ko-KR" altLang="en-US"/>
+          </a:p>
+        </p:txBody>
       </p:sp>
       <p:sp>
         <p:nvSpPr>
@@ -18012,6 +18015,13 @@
             <a:prstDash val="solid"/>
           </a:ln>
         </p:spPr>
+        <p:txBody>
+          <a:bodyPr/>
+          <a:lstStyle/>
+          <a:p>
+            <a:endParaRPr lang="ko-KR" altLang="en-US"/>
+          </a:p>
+        </p:txBody>
       </p:sp>
       <p:sp>
         <p:nvSpPr>
@@ -18093,6 +18103,13 @@
             <a:prstDash val="solid"/>
           </a:ln>
         </p:spPr>
+        <p:txBody>
+          <a:bodyPr/>
+          <a:lstStyle/>
+          <a:p>
+            <a:endParaRPr lang="ko-KR" altLang="en-US"/>
+          </a:p>
+        </p:txBody>
       </p:sp>
       <p:sp>
         <p:nvSpPr>
@@ -18174,6 +18191,13 @@
             <a:prstDash val="solid"/>
           </a:ln>
         </p:spPr>
+        <p:txBody>
+          <a:bodyPr/>
+          <a:lstStyle/>
+          <a:p>
+            <a:endParaRPr lang="ko-KR" altLang="en-US"/>
+          </a:p>
+        </p:txBody>
       </p:sp>
       <p:sp>
         <p:nvSpPr>
@@ -18255,6 +18279,13 @@
             <a:prstDash val="solid"/>
           </a:ln>
         </p:spPr>
+        <p:txBody>
+          <a:bodyPr/>
+          <a:lstStyle/>
+          <a:p>
+            <a:endParaRPr lang="ko-KR" altLang="en-US"/>
+          </a:p>
+        </p:txBody>
       </p:sp>
       <p:sp>
         <p:nvSpPr>
@@ -18336,6 +18367,13 @@
             <a:prstDash val="solid"/>
           </a:ln>
         </p:spPr>
+        <p:txBody>
+          <a:bodyPr/>
+          <a:lstStyle/>
+          <a:p>
+            <a:endParaRPr lang="ko-KR" altLang="en-US"/>
+          </a:p>
+        </p:txBody>
       </p:sp>
       <p:sp>
         <p:nvSpPr>
@@ -18417,6 +18455,13 @@
             <a:prstDash val="solid"/>
           </a:ln>
         </p:spPr>
+        <p:txBody>
+          <a:bodyPr/>
+          <a:lstStyle/>
+          <a:p>
+            <a:endParaRPr lang="ko-KR" altLang="en-US"/>
+          </a:p>
+        </p:txBody>
       </p:sp>
       <p:sp>
         <p:nvSpPr>
@@ -18498,6 +18543,13 @@
             <a:prstDash val="solid"/>
           </a:ln>
         </p:spPr>
+        <p:txBody>
+          <a:bodyPr/>
+          <a:lstStyle/>
+          <a:p>
+            <a:endParaRPr lang="ko-KR" altLang="en-US"/>
+          </a:p>
+        </p:txBody>
       </p:sp>
       <p:sp>
         <p:nvSpPr>
@@ -18579,6 +18631,13 @@
             <a:prstDash val="solid"/>
           </a:ln>
         </p:spPr>
+        <p:txBody>
+          <a:bodyPr/>
+          <a:lstStyle/>
+          <a:p>
+            <a:endParaRPr lang="ko-KR" altLang="en-US"/>
+          </a:p>
+        </p:txBody>
       </p:sp>
       <p:sp>
         <p:nvSpPr>
@@ -18660,6 +18719,13 @@
             <a:prstDash val="solid"/>
           </a:ln>
         </p:spPr>
+        <p:txBody>
+          <a:bodyPr/>
+          <a:lstStyle/>
+          <a:p>
+            <a:endParaRPr lang="ko-KR" altLang="en-US"/>
+          </a:p>
+        </p:txBody>
       </p:sp>
       <p:sp>
         <p:nvSpPr>
@@ -18741,6 +18807,13 @@
             <a:prstDash val="solid"/>
           </a:ln>
         </p:spPr>
+        <p:txBody>
+          <a:bodyPr/>
+          <a:lstStyle/>
+          <a:p>
+            <a:endParaRPr lang="ko-KR" altLang="en-US"/>
+          </a:p>
+        </p:txBody>
       </p:sp>
       <p:sp>
         <p:nvSpPr>
@@ -18822,6 +18895,13 @@
             <a:prstDash val="solid"/>
           </a:ln>
         </p:spPr>
+        <p:txBody>
+          <a:bodyPr/>
+          <a:lstStyle/>
+          <a:p>
+            <a:endParaRPr lang="ko-KR" altLang="en-US"/>
+          </a:p>
+        </p:txBody>
       </p:sp>
       <p:sp>
         <p:nvSpPr>
@@ -21235,6 +21315,1045 @@
 </p:sld>
 </file>
 
+<file path=ppt/slides/slide21.xml><?xml version="1.0" encoding="utf-8"?>
+<p:sld xmlns:a="http://schemas.openxmlformats.org/drawingml/2006/main" xmlns:r="http://schemas.openxmlformats.org/officeDocument/2006/relationships" xmlns:p="http://schemas.openxmlformats.org/presentationml/2006/main">
+  <p:cSld>
+    <p:bg>
+      <p:bgPr>
+        <a:solidFill>
+          <a:srgbClr val="FFFFFF"/>
+        </a:solidFill>
+        <a:effectLst/>
+      </p:bgPr>
+    </p:bg>
+    <p:spTree>
+      <p:nvGrpSpPr>
+        <p:cNvPr id="1" name=""/>
+        <p:cNvGrpSpPr/>
+        <p:nvPr/>
+      </p:nvGrpSpPr>
+      <p:grpSpPr>
+        <a:xfrm>
+          <a:off x="0" y="0"/>
+          <a:ext cx="0" cy="0"/>
+          <a:chOff x="0" y="0"/>
+          <a:chExt cx="0" cy="0"/>
+        </a:xfrm>
+      </p:grpSpPr>
+      <p:sp>
+        <p:nvSpPr>
+          <p:cNvPr id="2" name="TextBox 1"/>
+          <p:cNvSpPr txBox="1"/>
+          <p:nvPr/>
+        </p:nvSpPr>
+        <p:spPr>
+          <a:xfrm>
+            <a:off x="457200" y="201168"/>
+            <a:ext cx="11247120" cy="640080"/>
+          </a:xfrm>
+          <a:prstGeom prst="rect">
+            <a:avLst/>
+          </a:prstGeom>
+          <a:noFill/>
+        </p:spPr>
+        <p:txBody>
+          <a:bodyPr wrap="square">
+            <a:spAutoFit/>
+          </a:bodyPr>
+          <a:lstStyle/>
+          <a:p>
+            <a:pPr algn="l"/>
+            <a:r>
+              <a:rPr sz="2800" b="1" i="0">
+                <a:solidFill>
+                  <a:srgbClr val="000000"/>
+                </a:solidFill>
+              </a:rPr>
+              <a:t>Phase 2 주요 업데이트 (2026.04)</a:t>
+            </a:r>
+          </a:p>
+        </p:txBody>
+      </p:sp>
+      <p:sp>
+        <p:nvSpPr>
+          <p:cNvPr id="3" name="Rectangle 2"/>
+          <p:cNvSpPr/>
+          <p:nvPr/>
+        </p:nvSpPr>
+        <p:spPr>
+          <a:xfrm>
+            <a:off x="457200" y="896112"/>
+            <a:ext cx="11247120" cy="18288"/>
+          </a:xfrm>
+          <a:prstGeom prst="rect">
+            <a:avLst/>
+          </a:prstGeom>
+          <a:solidFill>
+            <a:srgbClr val="BBBBBB"/>
+          </a:solidFill>
+          <a:ln>
+            <a:noFill/>
+          </a:ln>
+        </p:spPr>
+        <p:style>
+          <a:lnRef idx="1">
+            <a:schemeClr val="accent1"/>
+          </a:lnRef>
+          <a:fillRef idx="3">
+            <a:schemeClr val="accent1"/>
+          </a:fillRef>
+          <a:effectRef idx="2">
+            <a:schemeClr val="accent1"/>
+          </a:effectRef>
+          <a:fontRef idx="minor">
+            <a:schemeClr val="lt1"/>
+          </a:fontRef>
+        </p:style>
+        <p:txBody>
+          <a:bodyPr rtlCol="0" anchor="ctr"/>
+          <a:lstStyle/>
+          <a:p>
+            <a:pPr algn="ctr"/>
+          </a:p>
+        </p:txBody>
+      </p:sp>
+      <p:sp>
+        <p:nvSpPr>
+          <p:cNvPr id="4" name="TextBox 3"/>
+          <p:cNvSpPr txBox="1"/>
+          <p:nvPr/>
+        </p:nvSpPr>
+        <p:spPr>
+          <a:xfrm>
+            <a:off x="457200" y="960120"/>
+            <a:ext cx="11247120" cy="347472"/>
+          </a:xfrm>
+          <a:prstGeom prst="rect">
+            <a:avLst/>
+          </a:prstGeom>
+          <a:noFill/>
+        </p:spPr>
+        <p:txBody>
+          <a:bodyPr wrap="square">
+            <a:spAutoFit/>
+          </a:bodyPr>
+          <a:lstStyle/>
+          <a:p>
+            <a:pPr algn="l"/>
+            <a:r>
+              <a:rPr sz="1300" b="0" i="1">
+                <a:solidFill>
+                  <a:srgbClr val="404040"/>
+                </a:solidFill>
+              </a:rPr>
+              <a:t>대량 프로그래밍 모드 안정화  ·  음성 개선  ·  보드 감지 강화</a:t>
+            </a:r>
+          </a:p>
+        </p:txBody>
+      </p:sp>
+      <p:sp>
+        <p:nvSpPr>
+          <p:cNvPr id="5" name="TextBox 4"/>
+          <p:cNvSpPr txBox="1"/>
+          <p:nvPr/>
+        </p:nvSpPr>
+        <p:spPr>
+          <a:xfrm>
+            <a:off x="457200" y="1417320"/>
+            <a:ext cx="5577840" cy="347472"/>
+          </a:xfrm>
+          <a:prstGeom prst="rect">
+            <a:avLst/>
+          </a:prstGeom>
+          <a:noFill/>
+        </p:spPr>
+        <p:txBody>
+          <a:bodyPr wrap="square">
+            <a:spAutoFit/>
+          </a:bodyPr>
+          <a:lstStyle/>
+          <a:p>
+            <a:pPr algn="l"/>
+            <a:r>
+              <a:rPr sz="1400" b="1" i="0">
+                <a:solidFill>
+                  <a:srgbClr val="000000"/>
+                </a:solidFill>
+              </a:rPr>
+              <a:t>1. 보드 감지 개선</a:t>
+            </a:r>
+          </a:p>
+        </p:txBody>
+      </p:sp>
+      <p:sp>
+        <p:nvSpPr>
+          <p:cNvPr id="6" name="Rectangle 5"/>
+          <p:cNvSpPr/>
+          <p:nvPr/>
+        </p:nvSpPr>
+        <p:spPr>
+          <a:xfrm>
+            <a:off x="457200" y="1783080"/>
+            <a:ext cx="5486400" cy="18288"/>
+          </a:xfrm>
+          <a:prstGeom prst="rect">
+            <a:avLst/>
+          </a:prstGeom>
+          <a:solidFill>
+            <a:srgbClr val="BBBBBB"/>
+          </a:solidFill>
+          <a:ln>
+            <a:noFill/>
+          </a:ln>
+        </p:spPr>
+        <p:style>
+          <a:lnRef idx="1">
+            <a:schemeClr val="accent1"/>
+          </a:lnRef>
+          <a:fillRef idx="3">
+            <a:schemeClr val="accent1"/>
+          </a:fillRef>
+          <a:effectRef idx="2">
+            <a:schemeClr val="accent1"/>
+          </a:effectRef>
+          <a:fontRef idx="minor">
+            <a:schemeClr val="lt1"/>
+          </a:fontRef>
+        </p:style>
+        <p:txBody>
+          <a:bodyPr rtlCol="0" anchor="ctr"/>
+          <a:lstStyle/>
+          <a:p>
+            <a:pPr algn="ctr"/>
+          </a:p>
+        </p:txBody>
+      </p:sp>
+      <p:sp>
+        <p:nvSpPr>
+          <p:cNvPr id="7" name="TextBox 6"/>
+          <p:cNvSpPr txBox="1"/>
+          <p:nvPr/>
+        </p:nvSpPr>
+        <p:spPr>
+          <a:xfrm>
+            <a:off x="548640" y="1874520"/>
+            <a:ext cx="5394960" cy="292608"/>
+          </a:xfrm>
+          <a:prstGeom prst="rect">
+            <a:avLst/>
+          </a:prstGeom>
+          <a:noFill/>
+        </p:spPr>
+        <p:txBody>
+          <a:bodyPr wrap="square">
+            <a:spAutoFit/>
+          </a:bodyPr>
+          <a:lstStyle/>
+          <a:p>
+            <a:pPr algn="l"/>
+            <a:r>
+              <a:rPr sz="1200" b="1" i="0">
+                <a:solidFill>
+                  <a:srgbClr val="000000"/>
+                </a:solidFill>
+              </a:rPr>
+              <a:t>- HAL_GetTick() -&gt; osKernelGetTickCount()</a:t>
+            </a:r>
+          </a:p>
+        </p:txBody>
+      </p:sp>
+      <p:sp>
+        <p:nvSpPr>
+          <p:cNvPr id="8" name="TextBox 7"/>
+          <p:cNvSpPr txBox="1"/>
+          <p:nvPr/>
+        </p:nvSpPr>
+        <p:spPr>
+          <a:xfrm>
+            <a:off x="548640" y="2148840"/>
+            <a:ext cx="5394960" cy="347472"/>
+          </a:xfrm>
+          <a:prstGeom prst="rect">
+            <a:avLst/>
+          </a:prstGeom>
+          <a:noFill/>
+        </p:spPr>
+        <p:txBody>
+          <a:bodyPr wrap="square">
+            <a:spAutoFit/>
+          </a:bodyPr>
+          <a:lstStyle/>
+          <a:p>
+            <a:pPr algn="l"/>
+            <a:r>
+              <a:rPr sz="1100" b="0" i="0">
+                <a:solidFill>
+                  <a:srgbClr val="404040"/>
+                </a:solidFill>
+              </a:rPr>
+              <a:t>  FreeRTOS 환경에서 HAL 타이머가 0 반환 -&gt; 쓰로틀 무한 실패 수정</a:t>
+            </a:r>
+          </a:p>
+        </p:txBody>
+      </p:sp>
+      <p:sp>
+        <p:nvSpPr>
+          <p:cNvPr id="9" name="TextBox 8"/>
+          <p:cNvSpPr txBox="1"/>
+          <p:nvPr/>
+        </p:nvSpPr>
+        <p:spPr>
+          <a:xfrm>
+            <a:off x="548640" y="2532888"/>
+            <a:ext cx="5394960" cy="292608"/>
+          </a:xfrm>
+          <a:prstGeom prst="rect">
+            <a:avLst/>
+          </a:prstGeom>
+          <a:noFill/>
+        </p:spPr>
+        <p:txBody>
+          <a:bodyPr wrap="square">
+            <a:spAutoFit/>
+          </a:bodyPr>
+          <a:lstStyle/>
+          <a:p>
+            <a:pPr algn="l"/>
+            <a:r>
+              <a:rPr sz="1200" b="1" i="0">
+                <a:solidFill>
+                  <a:srgbClr val="000000"/>
+                </a:solidFill>
+              </a:rPr>
+              <a:t>- EE_Write 타임아웃 기반 존재 감지</a:t>
+            </a:r>
+          </a:p>
+        </p:txBody>
+      </p:sp>
+      <p:sp>
+        <p:nvSpPr>
+          <p:cNvPr id="10" name="TextBox 9"/>
+          <p:cNvSpPr txBox="1"/>
+          <p:nvPr/>
+        </p:nvSpPr>
+        <p:spPr>
+          <a:xfrm>
+            <a:off x="548640" y="2807208"/>
+            <a:ext cx="5394960" cy="347472"/>
+          </a:xfrm>
+          <a:prstGeom prst="rect">
+            <a:avLst/>
+          </a:prstGeom>
+          <a:noFill/>
+        </p:spPr>
+        <p:txBody>
+          <a:bodyPr wrap="square">
+            <a:spAutoFit/>
+          </a:bodyPr>
+          <a:lstStyle/>
+          <a:p>
+            <a:pPr algn="l"/>
+            <a:r>
+              <a:rPr sz="1100" b="0" i="0">
+                <a:solidFill>
+                  <a:srgbClr val="404040"/>
+                </a:solidFill>
+              </a:rPr>
+              <a:t>  이미 프로그래밍된 보드 재삽입 시 데이터 비교 오판 방지</a:t>
+            </a:r>
+          </a:p>
+        </p:txBody>
+      </p:sp>
+      <p:sp>
+        <p:nvSpPr>
+          <p:cNvPr id="11" name="TextBox 10"/>
+          <p:cNvSpPr txBox="1"/>
+          <p:nvPr/>
+        </p:nvSpPr>
+        <p:spPr>
+          <a:xfrm>
+            <a:off x="457200" y="3374136"/>
+            <a:ext cx="5577840" cy="347472"/>
+          </a:xfrm>
+          <a:prstGeom prst="rect">
+            <a:avLst/>
+          </a:prstGeom>
+          <a:noFill/>
+        </p:spPr>
+        <p:txBody>
+          <a:bodyPr wrap="square">
+            <a:spAutoFit/>
+          </a:bodyPr>
+          <a:lstStyle/>
+          <a:p>
+            <a:pPr algn="l"/>
+            <a:r>
+              <a:rPr sz="1400" b="1" i="0">
+                <a:solidFill>
+                  <a:srgbClr val="000000"/>
+                </a:solidFill>
+              </a:rPr>
+              <a:t>2. 2초 안정화 대기</a:t>
+            </a:r>
+          </a:p>
+        </p:txBody>
+      </p:sp>
+      <p:sp>
+        <p:nvSpPr>
+          <p:cNvPr id="12" name="Rectangle 11"/>
+          <p:cNvSpPr/>
+          <p:nvPr/>
+        </p:nvSpPr>
+        <p:spPr>
+          <a:xfrm>
+            <a:off x="457200" y="3739896"/>
+            <a:ext cx="5486400" cy="18288"/>
+          </a:xfrm>
+          <a:prstGeom prst="rect">
+            <a:avLst/>
+          </a:prstGeom>
+          <a:solidFill>
+            <a:srgbClr val="BBBBBB"/>
+          </a:solidFill>
+          <a:ln>
+            <a:noFill/>
+          </a:ln>
+        </p:spPr>
+        <p:style>
+          <a:lnRef idx="1">
+            <a:schemeClr val="accent1"/>
+          </a:lnRef>
+          <a:fillRef idx="3">
+            <a:schemeClr val="accent1"/>
+          </a:fillRef>
+          <a:effectRef idx="2">
+            <a:schemeClr val="accent1"/>
+          </a:effectRef>
+          <a:fontRef idx="minor">
+            <a:schemeClr val="lt1"/>
+          </a:fontRef>
+        </p:style>
+        <p:txBody>
+          <a:bodyPr rtlCol="0" anchor="ctr"/>
+          <a:lstStyle/>
+          <a:p>
+            <a:pPr algn="ctr"/>
+          </a:p>
+        </p:txBody>
+      </p:sp>
+      <p:sp>
+        <p:nvSpPr>
+          <p:cNvPr id="13" name="TextBox 12"/>
+          <p:cNvSpPr txBox="1"/>
+          <p:nvPr/>
+        </p:nvSpPr>
+        <p:spPr>
+          <a:xfrm>
+            <a:off x="548640" y="3831336"/>
+            <a:ext cx="5394960" cy="292608"/>
+          </a:xfrm>
+          <a:prstGeom prst="rect">
+            <a:avLst/>
+          </a:prstGeom>
+          <a:noFill/>
+        </p:spPr>
+        <p:txBody>
+          <a:bodyPr wrap="square">
+            <a:spAutoFit/>
+          </a:bodyPr>
+          <a:lstStyle/>
+          <a:p>
+            <a:pPr algn="l"/>
+            <a:r>
+              <a:rPr sz="1200" b="1" i="0">
+                <a:solidFill>
+                  <a:srgbClr val="000000"/>
+                </a:solidFill>
+              </a:rPr>
+              <a:t>- 보드 감지 후 즉시 프로그래밍 금지</a:t>
+            </a:r>
+          </a:p>
+        </p:txBody>
+      </p:sp>
+      <p:sp>
+        <p:nvSpPr>
+          <p:cNvPr id="14" name="TextBox 13"/>
+          <p:cNvSpPr txBox="1"/>
+          <p:nvPr/>
+        </p:nvSpPr>
+        <p:spPr>
+          <a:xfrm>
+            <a:off x="548640" y="4105656"/>
+            <a:ext cx="5394960" cy="347472"/>
+          </a:xfrm>
+          <a:prstGeom prst="rect">
+            <a:avLst/>
+          </a:prstGeom>
+          <a:noFill/>
+        </p:spPr>
+        <p:txBody>
+          <a:bodyPr wrap="square">
+            <a:spAutoFit/>
+          </a:bodyPr>
+          <a:lstStyle/>
+          <a:p>
+            <a:pPr algn="l"/>
+            <a:r>
+              <a:rPr sz="1100" b="0" i="0">
+                <a:solidFill>
+                  <a:srgbClr val="404040"/>
+                </a:solidFill>
+              </a:rPr>
+              <a:t>  파란 LED 전체 2초 점멸 -&gt; 사용자 보드 가압으로 접촉 확보</a:t>
+            </a:r>
+          </a:p>
+        </p:txBody>
+      </p:sp>
+      <p:sp>
+        <p:nvSpPr>
+          <p:cNvPr id="15" name="TextBox 14"/>
+          <p:cNvSpPr txBox="1"/>
+          <p:nvPr/>
+        </p:nvSpPr>
+        <p:spPr>
+          <a:xfrm>
+            <a:off x="548640" y="4489704"/>
+            <a:ext cx="5394960" cy="292608"/>
+          </a:xfrm>
+          <a:prstGeom prst="rect">
+            <a:avLst/>
+          </a:prstGeom>
+          <a:noFill/>
+        </p:spPr>
+        <p:txBody>
+          <a:bodyPr wrap="square">
+            <a:spAutoFit/>
+          </a:bodyPr>
+          <a:lstStyle/>
+          <a:p>
+            <a:pPr algn="l"/>
+            <a:r>
+              <a:rPr sz="1200" b="1" i="0">
+                <a:solidFill>
+                  <a:srgbClr val="000000"/>
+                </a:solidFill>
+              </a:rPr>
+              <a:t>- 2초 후 연결 재확인 (board_detect)</a:t>
+            </a:r>
+          </a:p>
+        </p:txBody>
+      </p:sp>
+      <p:sp>
+        <p:nvSpPr>
+          <p:cNvPr id="16" name="TextBox 15"/>
+          <p:cNvSpPr txBox="1"/>
+          <p:nvPr/>
+        </p:nvSpPr>
+        <p:spPr>
+          <a:xfrm>
+            <a:off x="548640" y="4764024"/>
+            <a:ext cx="5394960" cy="347472"/>
+          </a:xfrm>
+          <a:prstGeom prst="rect">
+            <a:avLst/>
+          </a:prstGeom>
+          <a:noFill/>
+        </p:spPr>
+        <p:txBody>
+          <a:bodyPr wrap="square">
+            <a:spAutoFit/>
+          </a:bodyPr>
+          <a:lstStyle/>
+          <a:p>
+            <a:pPr algn="l"/>
+            <a:r>
+              <a:rPr sz="1100" b="0" i="0">
+                <a:solidFill>
+                  <a:srgbClr val="404040"/>
+                </a:solidFill>
+              </a:rPr>
+              <a:t>  재확인 실패 시 State A 자동 재시작 (continue)</a:t>
+            </a:r>
+          </a:p>
+        </p:txBody>
+      </p:sp>
+      <p:sp>
+        <p:nvSpPr>
+          <p:cNvPr id="17" name="TextBox 16"/>
+          <p:cNvSpPr txBox="1"/>
+          <p:nvPr/>
+        </p:nvSpPr>
+        <p:spPr>
+          <a:xfrm>
+            <a:off x="6400800" y="1417320"/>
+            <a:ext cx="5577840" cy="347472"/>
+          </a:xfrm>
+          <a:prstGeom prst="rect">
+            <a:avLst/>
+          </a:prstGeom>
+          <a:noFill/>
+        </p:spPr>
+        <p:txBody>
+          <a:bodyPr wrap="square">
+            <a:spAutoFit/>
+          </a:bodyPr>
+          <a:lstStyle/>
+          <a:p>
+            <a:pPr algn="l"/>
+            <a:r>
+              <a:rPr sz="1400" b="1" i="0">
+                <a:solidFill>
+                  <a:srgbClr val="000000"/>
+                </a:solidFill>
+              </a:rPr>
+              <a:t>3. 음성 최적화 (최종 7종)</a:t>
+            </a:r>
+          </a:p>
+        </p:txBody>
+      </p:sp>
+      <p:sp>
+        <p:nvSpPr>
+          <p:cNvPr id="18" name="Rectangle 17"/>
+          <p:cNvSpPr/>
+          <p:nvPr/>
+        </p:nvSpPr>
+        <p:spPr>
+          <a:xfrm>
+            <a:off x="6400800" y="1783080"/>
+            <a:ext cx="5486400" cy="18288"/>
+          </a:xfrm>
+          <a:prstGeom prst="rect">
+            <a:avLst/>
+          </a:prstGeom>
+          <a:solidFill>
+            <a:srgbClr val="BBBBBB"/>
+          </a:solidFill>
+          <a:ln>
+            <a:noFill/>
+          </a:ln>
+        </p:spPr>
+        <p:style>
+          <a:lnRef idx="1">
+            <a:schemeClr val="accent1"/>
+          </a:lnRef>
+          <a:fillRef idx="3">
+            <a:schemeClr val="accent1"/>
+          </a:fillRef>
+          <a:effectRef idx="2">
+            <a:schemeClr val="accent1"/>
+          </a:effectRef>
+          <a:fontRef idx="minor">
+            <a:schemeClr val="lt1"/>
+          </a:fontRef>
+        </p:style>
+        <p:txBody>
+          <a:bodyPr rtlCol="0" anchor="ctr"/>
+          <a:lstStyle/>
+          <a:p>
+            <a:pPr algn="ctr"/>
+          </a:p>
+        </p:txBody>
+      </p:sp>
+      <p:sp>
+        <p:nvSpPr>
+          <p:cNvPr id="19" name="TextBox 18"/>
+          <p:cNvSpPr txBox="1"/>
+          <p:nvPr/>
+        </p:nvSpPr>
+        <p:spPr>
+          <a:xfrm>
+            <a:off x="6492240" y="1874520"/>
+            <a:ext cx="5394960" cy="292608"/>
+          </a:xfrm>
+          <a:prstGeom prst="rect">
+            <a:avLst/>
+          </a:prstGeom>
+          <a:noFill/>
+        </p:spPr>
+        <p:txBody>
+          <a:bodyPr wrap="square">
+            <a:spAutoFit/>
+          </a:bodyPr>
+          <a:lstStyle/>
+          <a:p>
+            <a:pPr algn="l"/>
+            <a:r>
+              <a:rPr sz="1200" b="1" i="0">
+                <a:solidFill>
+                  <a:srgbClr val="000000"/>
+                </a:solidFill>
+              </a:rPr>
+              <a:t>- 8 kHz -&gt; 16 kHz 업그레이드</a:t>
+            </a:r>
+          </a:p>
+        </p:txBody>
+      </p:sp>
+      <p:sp>
+        <p:nvSpPr>
+          <p:cNvPr id="20" name="TextBox 19"/>
+          <p:cNvSpPr txBox="1"/>
+          <p:nvPr/>
+        </p:nvSpPr>
+        <p:spPr>
+          <a:xfrm>
+            <a:off x="6492240" y="2148840"/>
+            <a:ext cx="5394960" cy="347472"/>
+          </a:xfrm>
+          <a:prstGeom prst="rect">
+            <a:avLst/>
+          </a:prstGeom>
+          <a:noFill/>
+        </p:spPr>
+        <p:txBody>
+          <a:bodyPr wrap="square">
+            <a:spAutoFit/>
+          </a:bodyPr>
+          <a:lstStyle/>
+          <a:p>
+            <a:pPr algn="l"/>
+            <a:r>
+              <a:rPr sz="1100" b="0" i="0">
+                <a:solidFill>
+                  <a:srgbClr val="404040"/>
+                </a:solidFill>
+              </a:rPr>
+              <a:t>  자음 (ㅅ/ㅈ/ㅊ) 명료도 향상 / Flash 사용량 조정</a:t>
+            </a:r>
+          </a:p>
+        </p:txBody>
+      </p:sp>
+      <p:sp>
+        <p:nvSpPr>
+          <p:cNvPr id="21" name="TextBox 20"/>
+          <p:cNvSpPr txBox="1"/>
+          <p:nvPr/>
+        </p:nvSpPr>
+        <p:spPr>
+          <a:xfrm>
+            <a:off x="6492240" y="2532888"/>
+            <a:ext cx="5394960" cy="292608"/>
+          </a:xfrm>
+          <a:prstGeom prst="rect">
+            <a:avLst/>
+          </a:prstGeom>
+          <a:noFill/>
+        </p:spPr>
+        <p:txBody>
+          <a:bodyPr wrap="square">
+            <a:spAutoFit/>
+          </a:bodyPr>
+          <a:lstStyle/>
+          <a:p>
+            <a:pPr algn="l"/>
+            <a:r>
+              <a:rPr sz="1200" b="1" i="0">
+                <a:solidFill>
+                  <a:srgbClr val="000000"/>
+                </a:solidFill>
+              </a:rPr>
+              <a:t>- 불필요 3종 제거 · 신규 2종 추가</a:t>
+            </a:r>
+          </a:p>
+        </p:txBody>
+      </p:sp>
+      <p:sp>
+        <p:nvSpPr>
+          <p:cNvPr id="22" name="TextBox 21"/>
+          <p:cNvSpPr txBox="1"/>
+          <p:nvPr/>
+        </p:nvSpPr>
+        <p:spPr>
+          <a:xfrm>
+            <a:off x="6492240" y="2807208"/>
+            <a:ext cx="5394960" cy="347472"/>
+          </a:xfrm>
+          <a:prstGeom prst="rect">
+            <a:avLst/>
+          </a:prstGeom>
+          <a:noFill/>
+        </p:spPr>
+        <p:txBody>
+          <a:bodyPr wrap="square">
+            <a:spAutoFit/>
+          </a:bodyPr>
+          <a:lstStyle/>
+          <a:p>
+            <a:pPr algn="l"/>
+            <a:r>
+              <a:rPr sz="1100" b="0" i="0">
+                <a:solidFill>
+                  <a:srgbClr val="404040"/>
+                </a:solidFill>
+              </a:rPr>
+              <a:t>  제거: INTRO·IS_93C56·IS_93C46 / 추가: #5 새 보드 · #6 프로그램 시작</a:t>
+            </a:r>
+          </a:p>
+        </p:txBody>
+      </p:sp>
+      <p:sp>
+        <p:nvSpPr>
+          <p:cNvPr id="23" name="TextBox 22"/>
+          <p:cNvSpPr txBox="1"/>
+          <p:nvPr/>
+        </p:nvSpPr>
+        <p:spPr>
+          <a:xfrm>
+            <a:off x="6400800" y="3374136"/>
+            <a:ext cx="5577840" cy="347472"/>
+          </a:xfrm>
+          <a:prstGeom prst="rect">
+            <a:avLst/>
+          </a:prstGeom>
+          <a:noFill/>
+        </p:spPr>
+        <p:txBody>
+          <a:bodyPr wrap="square">
+            <a:spAutoFit/>
+          </a:bodyPr>
+          <a:lstStyle/>
+          <a:p>
+            <a:pPr algn="l"/>
+            <a:r>
+              <a:rPr sz="1400" b="1" i="0">
+                <a:solidFill>
+                  <a:srgbClr val="000000"/>
+                </a:solidFill>
+              </a:rPr>
+              <a:t>4. 대기 화면 반복 안내</a:t>
+            </a:r>
+          </a:p>
+        </p:txBody>
+      </p:sp>
+      <p:sp>
+        <p:nvSpPr>
+          <p:cNvPr id="24" name="Rectangle 23"/>
+          <p:cNvSpPr/>
+          <p:nvPr/>
+        </p:nvSpPr>
+        <p:spPr>
+          <a:xfrm>
+            <a:off x="6400800" y="3739896"/>
+            <a:ext cx="5486400" cy="18288"/>
+          </a:xfrm>
+          <a:prstGeom prst="rect">
+            <a:avLst/>
+          </a:prstGeom>
+          <a:solidFill>
+            <a:srgbClr val="BBBBBB"/>
+          </a:solidFill>
+          <a:ln>
+            <a:noFill/>
+          </a:ln>
+        </p:spPr>
+        <p:style>
+          <a:lnRef idx="1">
+            <a:schemeClr val="accent1"/>
+          </a:lnRef>
+          <a:fillRef idx="3">
+            <a:schemeClr val="accent1"/>
+          </a:fillRef>
+          <a:effectRef idx="2">
+            <a:schemeClr val="accent1"/>
+          </a:effectRef>
+          <a:fontRef idx="minor">
+            <a:schemeClr val="lt1"/>
+          </a:fontRef>
+        </p:style>
+        <p:txBody>
+          <a:bodyPr rtlCol="0" anchor="ctr"/>
+          <a:lstStyle/>
+          <a:p>
+            <a:pPr algn="ctr"/>
+          </a:p>
+        </p:txBody>
+      </p:sp>
+      <p:sp>
+        <p:nvSpPr>
+          <p:cNvPr id="25" name="TextBox 24"/>
+          <p:cNvSpPr txBox="1"/>
+          <p:nvPr/>
+        </p:nvSpPr>
+        <p:spPr>
+          <a:xfrm>
+            <a:off x="6492240" y="3831336"/>
+            <a:ext cx="5394960" cy="292608"/>
+          </a:xfrm>
+          <a:prstGeom prst="rect">
+            <a:avLst/>
+          </a:prstGeom>
+          <a:noFill/>
+        </p:spPr>
+        <p:txBody>
+          <a:bodyPr wrap="square">
+            <a:spAutoFit/>
+          </a:bodyPr>
+          <a:lstStyle/>
+          <a:p>
+            <a:pPr algn="l"/>
+            <a:r>
+              <a:rPr sz="1200" b="1" i="0">
+                <a:solidFill>
+                  <a:srgbClr val="000000"/>
+                </a:solidFill>
+              </a:rPr>
+              <a:t>- 보드 미감지 상태 지속 시</a:t>
+            </a:r>
+          </a:p>
+        </p:txBody>
+      </p:sp>
+      <p:sp>
+        <p:nvSpPr>
+          <p:cNvPr id="26" name="TextBox 25"/>
+          <p:cNvSpPr txBox="1"/>
+          <p:nvPr/>
+        </p:nvSpPr>
+        <p:spPr>
+          <a:xfrm>
+            <a:off x="6492240" y="4105656"/>
+            <a:ext cx="5394960" cy="347472"/>
+          </a:xfrm>
+          <a:prstGeom prst="rect">
+            <a:avLst/>
+          </a:prstGeom>
+          <a:noFill/>
+        </p:spPr>
+        <p:txBody>
+          <a:bodyPr wrap="square">
+            <a:spAutoFit/>
+          </a:bodyPr>
+          <a:lstStyle/>
+          <a:p>
+            <a:pPr algn="l"/>
+            <a:r>
+              <a:rPr sz="1100" b="0" i="0">
+                <a:solidFill>
+                  <a:srgbClr val="404040"/>
+                </a:solidFill>
+              </a:rPr>
+              <a:t>  10초마다 '새 보드를 올려 주십시요' 자동 반복 출력</a:t>
+            </a:r>
+          </a:p>
+        </p:txBody>
+      </p:sp>
+      <p:sp>
+        <p:nvSpPr>
+          <p:cNvPr id="27" name="TextBox 26"/>
+          <p:cNvSpPr txBox="1"/>
+          <p:nvPr/>
+        </p:nvSpPr>
+        <p:spPr>
+          <a:xfrm>
+            <a:off x="6492240" y="4489704"/>
+            <a:ext cx="5394960" cy="292608"/>
+          </a:xfrm>
+          <a:prstGeom prst="rect">
+            <a:avLst/>
+          </a:prstGeom>
+          <a:noFill/>
+        </p:spPr>
+        <p:txBody>
+          <a:bodyPr wrap="square">
+            <a:spAutoFit/>
+          </a:bodyPr>
+          <a:lstStyle/>
+          <a:p>
+            <a:pPr algn="l"/>
+            <a:r>
+              <a:rPr sz="1200" b="1" i="0">
+                <a:solidFill>
+                  <a:srgbClr val="000000"/>
+                </a:solidFill>
+              </a:rPr>
+              <a:t>- 8가지 LED 쇼 패턴 내 체크포인트</a:t>
+            </a:r>
+          </a:p>
+        </p:txBody>
+      </p:sp>
+      <p:sp>
+        <p:nvSpPr>
+          <p:cNvPr id="28" name="TextBox 27"/>
+          <p:cNvSpPr txBox="1"/>
+          <p:nvPr/>
+        </p:nvSpPr>
+        <p:spPr>
+          <a:xfrm>
+            <a:off x="6492240" y="4764024"/>
+            <a:ext cx="5394960" cy="347472"/>
+          </a:xfrm>
+          <a:prstGeom prst="rect">
+            <a:avLst/>
+          </a:prstGeom>
+          <a:noFill/>
+        </p:spPr>
+        <p:txBody>
+          <a:bodyPr wrap="square">
+            <a:spAutoFit/>
+          </a:bodyPr>
+          <a:lstStyle/>
+          <a:p>
+            <a:pPr algn="l"/>
+            <a:r>
+              <a:rPr sz="1100" b="0" i="0">
+                <a:solidFill>
+                  <a:srgbClr val="404040"/>
+                </a:solidFill>
+              </a:rPr>
+              <a:t>  각 패턴 종료 시점마다 10초 경과 여부 판정</a:t>
+            </a:r>
+          </a:p>
+        </p:txBody>
+      </p:sp>
+      <p:sp>
+        <p:nvSpPr>
+          <p:cNvPr id="29" name="Rectangle 28"/>
+          <p:cNvSpPr/>
+          <p:nvPr/>
+        </p:nvSpPr>
+        <p:spPr>
+          <a:xfrm>
+            <a:off x="6035040" y="1417320"/>
+            <a:ext cx="18288" cy="5120640"/>
+          </a:xfrm>
+          <a:prstGeom prst="rect">
+            <a:avLst/>
+          </a:prstGeom>
+          <a:solidFill>
+            <a:srgbClr val="BBBBBB"/>
+          </a:solidFill>
+          <a:ln>
+            <a:noFill/>
+          </a:ln>
+        </p:spPr>
+        <p:style>
+          <a:lnRef idx="1">
+            <a:schemeClr val="accent1"/>
+          </a:lnRef>
+          <a:fillRef idx="3">
+            <a:schemeClr val="accent1"/>
+          </a:fillRef>
+          <a:effectRef idx="2">
+            <a:schemeClr val="accent1"/>
+          </a:effectRef>
+          <a:fontRef idx="minor">
+            <a:schemeClr val="lt1"/>
+          </a:fontRef>
+        </p:style>
+        <p:txBody>
+          <a:bodyPr rtlCol="0" anchor="ctr"/>
+          <a:lstStyle/>
+          <a:p>
+            <a:pPr algn="ctr"/>
+          </a:p>
+        </p:txBody>
+      </p:sp>
+    </p:spTree>
+  </p:cSld>
+  <p:clrMapOvr>
+    <a:masterClrMapping/>
+  </p:clrMapOvr>
+</p:sld>
+</file>
+
 <file path=ppt/slides/slide3.xml><?xml version="1.0" encoding="utf-8"?>
 <p:sld xmlns:a="http://schemas.openxmlformats.org/drawingml/2006/main" xmlns:r="http://schemas.openxmlformats.org/officeDocument/2006/relationships" xmlns:p="http://schemas.openxmlformats.org/presentationml/2006/main">
   <p:cSld name="Slide 3">
@@ -21313,6 +22432,13 @@
             <a:prstDash val="solid"/>
           </a:ln>
         </p:spPr>
+        <p:txBody>
+          <a:bodyPr/>
+          <a:lstStyle/>
+          <a:p>
+            <a:endParaRPr lang="ko-KR" altLang="en-US"/>
+          </a:p>
+        </p:txBody>
       </p:sp>
       <p:sp>
         <p:nvSpPr>
@@ -21333,6 +22459,13 @@
           </a:solidFill>
           <a:ln/>
         </p:spPr>
+        <p:txBody>
+          <a:bodyPr/>
+          <a:lstStyle/>
+          <a:p>
+            <a:endParaRPr lang="ko-KR" altLang="en-US"/>
+          </a:p>
+        </p:txBody>
       </p:sp>
       <p:sp>
         <p:nvSpPr>
@@ -21448,6 +22581,13 @@
           </a:solidFill>
           <a:ln/>
         </p:spPr>
+        <p:txBody>
+          <a:bodyPr/>
+          <a:lstStyle/>
+          <a:p>
+            <a:endParaRPr lang="ko-KR" altLang="en-US"/>
+          </a:p>
+        </p:txBody>
       </p:sp>
       <p:sp>
         <p:nvSpPr>
@@ -21563,6 +22703,13 @@
           </a:solidFill>
           <a:ln/>
         </p:spPr>
+        <p:txBody>
+          <a:bodyPr/>
+          <a:lstStyle/>
+          <a:p>
+            <a:endParaRPr lang="ko-KR" altLang="en-US"/>
+          </a:p>
+        </p:txBody>
       </p:sp>
       <p:sp>
         <p:nvSpPr>
@@ -21678,6 +22825,13 @@
           </a:solidFill>
           <a:ln/>
         </p:spPr>
+        <p:txBody>
+          <a:bodyPr/>
+          <a:lstStyle/>
+          <a:p>
+            <a:endParaRPr lang="ko-KR" altLang="en-US"/>
+          </a:p>
+        </p:txBody>
       </p:sp>
       <p:sp>
         <p:nvSpPr>
@@ -21793,6 +22947,13 @@
           </a:solidFill>
           <a:ln/>
         </p:spPr>
+        <p:txBody>
+          <a:bodyPr/>
+          <a:lstStyle/>
+          <a:p>
+            <a:endParaRPr lang="ko-KR" altLang="en-US"/>
+          </a:p>
+        </p:txBody>
       </p:sp>
       <p:sp>
         <p:nvSpPr>
@@ -21975,6 +23136,13 @@
             <a:prstDash val="solid"/>
           </a:ln>
         </p:spPr>
+        <p:txBody>
+          <a:bodyPr/>
+          <a:lstStyle/>
+          <a:p>
+            <a:endParaRPr lang="ko-KR" altLang="en-US"/>
+          </a:p>
+        </p:txBody>
       </p:sp>
       <p:sp>
         <p:nvSpPr>
@@ -21995,6 +23163,13 @@
           </a:solidFill>
           <a:ln/>
         </p:spPr>
+        <p:txBody>
+          <a:bodyPr/>
+          <a:lstStyle/>
+          <a:p>
+            <a:endParaRPr lang="ko-KR" altLang="en-US"/>
+          </a:p>
+        </p:txBody>
       </p:sp>
       <p:sp>
         <p:nvSpPr>
@@ -22176,6 +23351,13 @@
             <a:prstDash val="solid"/>
           </a:ln>
         </p:spPr>
+        <p:txBody>
+          <a:bodyPr/>
+          <a:lstStyle/>
+          <a:p>
+            <a:endParaRPr lang="ko-KR" altLang="en-US"/>
+          </a:p>
+        </p:txBody>
       </p:sp>
       <p:sp>
         <p:nvSpPr>
@@ -22374,6 +23556,13 @@
             <a:prstDash val="solid"/>
           </a:ln>
         </p:spPr>
+        <p:txBody>
+          <a:bodyPr/>
+          <a:lstStyle/>
+          <a:p>
+            <a:endParaRPr lang="ko-KR" altLang="en-US"/>
+          </a:p>
+        </p:txBody>
       </p:sp>
       <p:sp>
         <p:nvSpPr>
@@ -22572,6 +23761,13 @@
             <a:prstDash val="solid"/>
           </a:ln>
         </p:spPr>
+        <p:txBody>
+          <a:bodyPr/>
+          <a:lstStyle/>
+          <a:p>
+            <a:endParaRPr lang="ko-KR" altLang="en-US"/>
+          </a:p>
+        </p:txBody>
       </p:sp>
       <p:sp>
         <p:nvSpPr>
@@ -22765,6 +23961,13 @@
           </a:solidFill>
           <a:ln/>
         </p:spPr>
+        <p:txBody>
+          <a:bodyPr/>
+          <a:lstStyle/>
+          <a:p>
+            <a:endParaRPr lang="ko-KR" altLang="en-US"/>
+          </a:p>
+        </p:txBody>
       </p:sp>
       <p:sp>
         <p:nvSpPr>
@@ -22997,6 +24200,13 @@
             <a:prstDash val="solid"/>
           </a:ln>
         </p:spPr>
+        <p:txBody>
+          <a:bodyPr/>
+          <a:lstStyle/>
+          <a:p>
+            <a:endParaRPr lang="ko-KR" altLang="en-US"/>
+          </a:p>
+        </p:txBody>
       </p:sp>
       <p:sp>
         <p:nvSpPr>
@@ -23017,6 +24227,13 @@
           </a:solidFill>
           <a:ln/>
         </p:spPr>
+        <p:txBody>
+          <a:bodyPr/>
+          <a:lstStyle/>
+          <a:p>
+            <a:endParaRPr lang="ko-KR" altLang="en-US"/>
+          </a:p>
+        </p:txBody>
       </p:sp>
       <p:sp>
         <p:nvSpPr>
@@ -23174,6 +24391,13 @@
             <a:prstDash val="solid"/>
           </a:ln>
         </p:spPr>
+        <p:txBody>
+          <a:bodyPr/>
+          <a:lstStyle/>
+          <a:p>
+            <a:endParaRPr lang="ko-KR" altLang="en-US"/>
+          </a:p>
+        </p:txBody>
       </p:sp>
       <p:sp>
         <p:nvSpPr>
@@ -23194,6 +24418,13 @@
           </a:solidFill>
           <a:ln/>
         </p:spPr>
+        <p:txBody>
+          <a:bodyPr/>
+          <a:lstStyle/>
+          <a:p>
+            <a:endParaRPr lang="ko-KR" altLang="en-US"/>
+          </a:p>
+        </p:txBody>
       </p:sp>
       <p:sp>
         <p:nvSpPr>
@@ -23351,6 +24582,13 @@
             <a:prstDash val="solid"/>
           </a:ln>
         </p:spPr>
+        <p:txBody>
+          <a:bodyPr/>
+          <a:lstStyle/>
+          <a:p>
+            <a:endParaRPr lang="ko-KR" altLang="en-US"/>
+          </a:p>
+        </p:txBody>
       </p:sp>
       <p:sp>
         <p:nvSpPr>
@@ -23371,6 +24609,13 @@
           </a:solidFill>
           <a:ln/>
         </p:spPr>
+        <p:txBody>
+          <a:bodyPr/>
+          <a:lstStyle/>
+          <a:p>
+            <a:endParaRPr lang="ko-KR" altLang="en-US"/>
+          </a:p>
+        </p:txBody>
       </p:sp>
       <p:sp>
         <p:nvSpPr>
@@ -23528,6 +24773,13 @@
             <a:prstDash val="solid"/>
           </a:ln>
         </p:spPr>
+        <p:txBody>
+          <a:bodyPr/>
+          <a:lstStyle/>
+          <a:p>
+            <a:endParaRPr lang="ko-KR" altLang="en-US"/>
+          </a:p>
+        </p:txBody>
       </p:sp>
       <p:sp>
         <p:nvSpPr>
@@ -23548,6 +24800,13 @@
           </a:solidFill>
           <a:ln/>
         </p:spPr>
+        <p:txBody>
+          <a:bodyPr/>
+          <a:lstStyle/>
+          <a:p>
+            <a:endParaRPr lang="ko-KR" altLang="en-US"/>
+          </a:p>
+        </p:txBody>
       </p:sp>
       <p:sp>
         <p:nvSpPr>
@@ -23705,6 +24964,13 @@
             <a:prstDash val="solid"/>
           </a:ln>
         </p:spPr>
+        <p:txBody>
+          <a:bodyPr/>
+          <a:lstStyle/>
+          <a:p>
+            <a:endParaRPr lang="ko-KR" altLang="en-US"/>
+          </a:p>
+        </p:txBody>
       </p:sp>
       <p:sp>
         <p:nvSpPr>
@@ -23725,6 +24991,13 @@
           </a:solidFill>
           <a:ln/>
         </p:spPr>
+        <p:txBody>
+          <a:bodyPr/>
+          <a:lstStyle/>
+          <a:p>
+            <a:endParaRPr lang="ko-KR" altLang="en-US"/>
+          </a:p>
+        </p:txBody>
       </p:sp>
       <p:sp>
         <p:nvSpPr>
@@ -23985,6 +25258,13 @@
             <a:prstDash val="solid"/>
           </a:ln>
         </p:spPr>
+        <p:txBody>
+          <a:bodyPr/>
+          <a:lstStyle/>
+          <a:p>
+            <a:endParaRPr lang="ko-KR" altLang="en-US"/>
+          </a:p>
+        </p:txBody>
       </p:sp>
       <p:sp>
         <p:nvSpPr>
@@ -24005,6 +25285,13 @@
           </a:solidFill>
           <a:ln/>
         </p:spPr>
+        <p:txBody>
+          <a:bodyPr/>
+          <a:lstStyle/>
+          <a:p>
+            <a:endParaRPr lang="ko-KR" altLang="en-US"/>
+          </a:p>
+        </p:txBody>
       </p:sp>
       <p:sp>
         <p:nvSpPr>
@@ -24142,6 +25429,13 @@
           </a:solidFill>
           <a:ln/>
         </p:spPr>
+        <p:txBody>
+          <a:bodyPr/>
+          <a:lstStyle/>
+          <a:p>
+            <a:endParaRPr lang="ko-KR" altLang="en-US"/>
+          </a:p>
+        </p:txBody>
       </p:sp>
       <p:sp>
         <p:nvSpPr>
@@ -24279,6 +25573,13 @@
           </a:solidFill>
           <a:ln/>
         </p:spPr>
+        <p:txBody>
+          <a:bodyPr/>
+          <a:lstStyle/>
+          <a:p>
+            <a:endParaRPr lang="ko-KR" altLang="en-US"/>
+          </a:p>
+        </p:txBody>
       </p:sp>
       <p:sp>
         <p:nvSpPr>
@@ -24416,6 +25717,13 @@
           </a:solidFill>
           <a:ln/>
         </p:spPr>
+        <p:txBody>
+          <a:bodyPr/>
+          <a:lstStyle/>
+          <a:p>
+            <a:endParaRPr lang="ko-KR" altLang="en-US"/>
+          </a:p>
+        </p:txBody>
       </p:sp>
       <p:sp>
         <p:nvSpPr>
@@ -24553,6 +25861,13 @@
           </a:solidFill>
           <a:ln/>
         </p:spPr>
+        <p:txBody>
+          <a:bodyPr/>
+          <a:lstStyle/>
+          <a:p>
+            <a:endParaRPr lang="ko-KR" altLang="en-US"/>
+          </a:p>
+        </p:txBody>
       </p:sp>
       <p:sp>
         <p:nvSpPr>
@@ -24690,6 +26005,13 @@
           </a:solidFill>
           <a:ln/>
         </p:spPr>
+        <p:txBody>
+          <a:bodyPr/>
+          <a:lstStyle/>
+          <a:p>
+            <a:endParaRPr lang="ko-KR" altLang="en-US"/>
+          </a:p>
+        </p:txBody>
       </p:sp>
       <p:sp>
         <p:nvSpPr>
@@ -24827,6 +26149,13 @@
           </a:solidFill>
           <a:ln/>
         </p:spPr>
+        <p:txBody>
+          <a:bodyPr/>
+          <a:lstStyle/>
+          <a:p>
+            <a:endParaRPr lang="ko-KR" altLang="en-US"/>
+          </a:p>
+        </p:txBody>
       </p:sp>
       <p:sp>
         <p:nvSpPr>
@@ -24964,6 +26293,13 @@
           </a:solidFill>
           <a:ln/>
         </p:spPr>
+        <p:txBody>
+          <a:bodyPr/>
+          <a:lstStyle/>
+          <a:p>
+            <a:endParaRPr lang="ko-KR" altLang="en-US"/>
+          </a:p>
+        </p:txBody>
       </p:sp>
       <p:sp>
         <p:nvSpPr>
@@ -25207,6 +26543,13 @@
             <a:prstDash val="solid"/>
           </a:ln>
         </p:spPr>
+        <p:txBody>
+          <a:bodyPr/>
+          <a:lstStyle/>
+          <a:p>
+            <a:endParaRPr lang="ko-KR" altLang="en-US"/>
+          </a:p>
+        </p:txBody>
       </p:sp>
       <p:sp>
         <p:nvSpPr>
@@ -25227,6 +26570,13 @@
           </a:solidFill>
           <a:ln/>
         </p:spPr>
+        <p:txBody>
+          <a:bodyPr/>
+          <a:lstStyle/>
+          <a:p>
+            <a:endParaRPr lang="ko-KR" altLang="en-US"/>
+          </a:p>
+        </p:txBody>
       </p:sp>
       <p:sp>
         <p:nvSpPr>
@@ -25286,6 +26636,13 @@
           </a:solidFill>
           <a:ln/>
         </p:spPr>
+        <p:txBody>
+          <a:bodyPr/>
+          <a:lstStyle/>
+          <a:p>
+            <a:endParaRPr lang="ko-KR" altLang="en-US"/>
+          </a:p>
+        </p:txBody>
       </p:sp>
       <p:sp>
         <p:nvSpPr>
@@ -25423,6 +26780,13 @@
           </a:solidFill>
           <a:ln/>
         </p:spPr>
+        <p:txBody>
+          <a:bodyPr/>
+          <a:lstStyle/>
+          <a:p>
+            <a:endParaRPr lang="ko-KR" altLang="en-US"/>
+          </a:p>
+        </p:txBody>
       </p:sp>
       <p:sp>
         <p:nvSpPr>
@@ -25560,6 +26924,13 @@
           </a:solidFill>
           <a:ln/>
         </p:spPr>
+        <p:txBody>
+          <a:bodyPr/>
+          <a:lstStyle/>
+          <a:p>
+            <a:endParaRPr lang="ko-KR" altLang="en-US"/>
+          </a:p>
+        </p:txBody>
       </p:sp>
       <p:sp>
         <p:nvSpPr>
@@ -25697,6 +27068,13 @@
           </a:solidFill>
           <a:ln/>
         </p:spPr>
+        <p:txBody>
+          <a:bodyPr/>
+          <a:lstStyle/>
+          <a:p>
+            <a:endParaRPr lang="ko-KR" altLang="en-US"/>
+          </a:p>
+        </p:txBody>
       </p:sp>
       <p:sp>
         <p:nvSpPr>
@@ -25834,6 +27212,13 @@
           </a:solidFill>
           <a:ln/>
         </p:spPr>
+        <p:txBody>
+          <a:bodyPr/>
+          <a:lstStyle/>
+          <a:p>
+            <a:endParaRPr lang="ko-KR" altLang="en-US"/>
+          </a:p>
+        </p:txBody>
       </p:sp>
       <p:sp>
         <p:nvSpPr>
@@ -26010,6 +27395,13 @@
           </a:solidFill>
           <a:ln/>
         </p:spPr>
+        <p:txBody>
+          <a:bodyPr/>
+          <a:lstStyle/>
+          <a:p>
+            <a:endParaRPr lang="ko-KR" altLang="en-US"/>
+          </a:p>
+        </p:txBody>
       </p:sp>
       <p:sp>
         <p:nvSpPr>
@@ -26074,6 +27466,13 @@
             <a:prstDash val="solid"/>
           </a:ln>
         </p:spPr>
+        <p:txBody>
+          <a:bodyPr/>
+          <a:lstStyle/>
+          <a:p>
+            <a:endParaRPr lang="ko-KR" altLang="en-US"/>
+          </a:p>
+        </p:txBody>
       </p:sp>
       <p:sp>
         <p:nvSpPr>
@@ -26177,6 +27576,13 @@
             <a:prstDash val="solid"/>
           </a:ln>
         </p:spPr>
+        <p:txBody>
+          <a:bodyPr/>
+          <a:lstStyle/>
+          <a:p>
+            <a:endParaRPr lang="ko-KR" altLang="en-US"/>
+          </a:p>
+        </p:txBody>
       </p:sp>
       <p:sp>
         <p:nvSpPr>
@@ -26280,6 +27686,13 @@
             <a:prstDash val="solid"/>
           </a:ln>
         </p:spPr>
+        <p:txBody>
+          <a:bodyPr/>
+          <a:lstStyle/>
+          <a:p>
+            <a:endParaRPr lang="ko-KR" altLang="en-US"/>
+          </a:p>
+        </p:txBody>
       </p:sp>
       <p:sp>
         <p:nvSpPr>
@@ -26383,6 +27796,13 @@
             <a:prstDash val="solid"/>
           </a:ln>
         </p:spPr>
+        <p:txBody>
+          <a:bodyPr/>
+          <a:lstStyle/>
+          <a:p>
+            <a:endParaRPr lang="ko-KR" altLang="en-US"/>
+          </a:p>
+        </p:txBody>
       </p:sp>
       <p:sp>
         <p:nvSpPr>
@@ -26481,6 +27901,13 @@
           </a:solidFill>
           <a:ln/>
         </p:spPr>
+        <p:txBody>
+          <a:bodyPr/>
+          <a:lstStyle/>
+          <a:p>
+            <a:endParaRPr lang="ko-KR" altLang="en-US"/>
+          </a:p>
+        </p:txBody>
       </p:sp>
       <p:sp>
         <p:nvSpPr>
@@ -26919,6 +28346,13 @@
             <a:prstDash val="solid"/>
           </a:ln>
         </p:spPr>
+        <p:txBody>
+          <a:bodyPr/>
+          <a:lstStyle/>
+          <a:p>
+            <a:endParaRPr lang="ko-KR" altLang="en-US"/>
+          </a:p>
+        </p:txBody>
       </p:sp>
       <p:sp>
         <p:nvSpPr>
@@ -26939,6 +28373,13 @@
           </a:solidFill>
           <a:ln/>
         </p:spPr>
+        <p:txBody>
+          <a:bodyPr/>
+          <a:lstStyle/>
+          <a:p>
+            <a:endParaRPr lang="ko-KR" altLang="en-US"/>
+          </a:p>
+        </p:txBody>
       </p:sp>
       <p:sp>
         <p:nvSpPr>
@@ -27071,6 +28512,13 @@
           </a:solidFill>
           <a:ln/>
         </p:spPr>
+        <p:txBody>
+          <a:bodyPr/>
+          <a:lstStyle/>
+          <a:p>
+            <a:endParaRPr lang="ko-KR" altLang="en-US"/>
+          </a:p>
+        </p:txBody>
       </p:sp>
       <p:sp>
         <p:nvSpPr>
@@ -27174,6 +28622,13 @@
             <a:prstDash val="solid"/>
           </a:ln>
         </p:spPr>
+        <p:txBody>
+          <a:bodyPr/>
+          <a:lstStyle/>
+          <a:p>
+            <a:endParaRPr lang="ko-KR" altLang="en-US"/>
+          </a:p>
+        </p:txBody>
       </p:sp>
       <p:sp>
         <p:nvSpPr>
@@ -27238,6 +28693,13 @@
             <a:prstDash val="solid"/>
           </a:ln>
         </p:spPr>
+        <p:txBody>
+          <a:bodyPr/>
+          <a:lstStyle/>
+          <a:p>
+            <a:endParaRPr lang="ko-KR" altLang="en-US"/>
+          </a:p>
+        </p:txBody>
       </p:sp>
       <p:sp>
         <p:nvSpPr>
@@ -27302,6 +28764,13 @@
             <a:prstDash val="solid"/>
           </a:ln>
         </p:spPr>
+        <p:txBody>
+          <a:bodyPr/>
+          <a:lstStyle/>
+          <a:p>
+            <a:endParaRPr lang="ko-KR" altLang="en-US"/>
+          </a:p>
+        </p:txBody>
       </p:sp>
       <p:sp>
         <p:nvSpPr>
@@ -27366,6 +28835,13 @@
             <a:prstDash val="solid"/>
           </a:ln>
         </p:spPr>
+        <p:txBody>
+          <a:bodyPr/>
+          <a:lstStyle/>
+          <a:p>
+            <a:endParaRPr lang="ko-KR" altLang="en-US"/>
+          </a:p>
+        </p:txBody>
       </p:sp>
       <p:sp>
         <p:nvSpPr>
@@ -27430,6 +28906,13 @@
             <a:prstDash val="solid"/>
           </a:ln>
         </p:spPr>
+        <p:txBody>
+          <a:bodyPr/>
+          <a:lstStyle/>
+          <a:p>
+            <a:endParaRPr lang="ko-KR" altLang="en-US"/>
+          </a:p>
+        </p:txBody>
       </p:sp>
       <p:sp>
         <p:nvSpPr>
@@ -27494,6 +28977,13 @@
             <a:prstDash val="solid"/>
           </a:ln>
         </p:spPr>
+        <p:txBody>
+          <a:bodyPr/>
+          <a:lstStyle/>
+          <a:p>
+            <a:endParaRPr lang="ko-KR" altLang="en-US"/>
+          </a:p>
+        </p:txBody>
       </p:sp>
       <p:sp>
         <p:nvSpPr>
@@ -27558,6 +29048,13 @@
             <a:prstDash val="solid"/>
           </a:ln>
         </p:spPr>
+        <p:txBody>
+          <a:bodyPr/>
+          <a:lstStyle/>
+          <a:p>
+            <a:endParaRPr lang="ko-KR" altLang="en-US"/>
+          </a:p>
+        </p:txBody>
       </p:sp>
       <p:sp>
         <p:nvSpPr>
@@ -27622,6 +29119,13 @@
             <a:prstDash val="solid"/>
           </a:ln>
         </p:spPr>
+        <p:txBody>
+          <a:bodyPr/>
+          <a:lstStyle/>
+          <a:p>
+            <a:endParaRPr lang="ko-KR" altLang="en-US"/>
+          </a:p>
+        </p:txBody>
       </p:sp>
       <p:sp>
         <p:nvSpPr>
@@ -27725,6 +29229,13 @@
             <a:prstDash val="solid"/>
           </a:ln>
         </p:spPr>
+        <p:txBody>
+          <a:bodyPr/>
+          <a:lstStyle/>
+          <a:p>
+            <a:endParaRPr lang="ko-KR" altLang="en-US"/>
+          </a:p>
+        </p:txBody>
       </p:sp>
       <p:sp>
         <p:nvSpPr>
@@ -27789,6 +29300,13 @@
             <a:prstDash val="solid"/>
           </a:ln>
         </p:spPr>
+        <p:txBody>
+          <a:bodyPr/>
+          <a:lstStyle/>
+          <a:p>
+            <a:endParaRPr lang="ko-KR" altLang="en-US"/>
+          </a:p>
+        </p:txBody>
       </p:sp>
       <p:sp>
         <p:nvSpPr>
@@ -27853,6 +29371,13 @@
             <a:prstDash val="solid"/>
           </a:ln>
         </p:spPr>
+        <p:txBody>
+          <a:bodyPr/>
+          <a:lstStyle/>
+          <a:p>
+            <a:endParaRPr lang="ko-KR" altLang="en-US"/>
+          </a:p>
+        </p:txBody>
       </p:sp>
       <p:sp>
         <p:nvSpPr>
@@ -27917,6 +29442,13 @@
             <a:prstDash val="solid"/>
           </a:ln>
         </p:spPr>
+        <p:txBody>
+          <a:bodyPr/>
+          <a:lstStyle/>
+          <a:p>
+            <a:endParaRPr lang="ko-KR" altLang="en-US"/>
+          </a:p>
+        </p:txBody>
       </p:sp>
       <p:sp>
         <p:nvSpPr>
@@ -27981,6 +29513,13 @@
             <a:prstDash val="solid"/>
           </a:ln>
         </p:spPr>
+        <p:txBody>
+          <a:bodyPr/>
+          <a:lstStyle/>
+          <a:p>
+            <a:endParaRPr lang="ko-KR" altLang="en-US"/>
+          </a:p>
+        </p:txBody>
       </p:sp>
       <p:sp>
         <p:nvSpPr>
@@ -28045,6 +29584,13 @@
             <a:prstDash val="solid"/>
           </a:ln>
         </p:spPr>
+        <p:txBody>
+          <a:bodyPr/>
+          <a:lstStyle/>
+          <a:p>
+            <a:endParaRPr lang="ko-KR" altLang="en-US"/>
+          </a:p>
+        </p:txBody>
       </p:sp>
       <p:sp>
         <p:nvSpPr>
@@ -28109,6 +29655,13 @@
             <a:prstDash val="solid"/>
           </a:ln>
         </p:spPr>
+        <p:txBody>
+          <a:bodyPr/>
+          <a:lstStyle/>
+          <a:p>
+            <a:endParaRPr lang="ko-KR" altLang="en-US"/>
+          </a:p>
+        </p:txBody>
       </p:sp>
       <p:sp>
         <p:nvSpPr>
@@ -28173,6 +29726,13 @@
             <a:prstDash val="solid"/>
           </a:ln>
         </p:spPr>
+        <p:txBody>
+          <a:bodyPr/>
+          <a:lstStyle/>
+          <a:p>
+            <a:endParaRPr lang="ko-KR" altLang="en-US"/>
+          </a:p>
+        </p:txBody>
       </p:sp>
       <p:sp>
         <p:nvSpPr>
@@ -28901,6 +30461,13 @@
             <a:prstDash val="solid"/>
           </a:ln>
         </p:spPr>
+        <p:txBody>
+          <a:bodyPr/>
+          <a:lstStyle/>
+          <a:p>
+            <a:endParaRPr lang="ko-KR" altLang="en-US"/>
+          </a:p>
+        </p:txBody>
       </p:sp>
       <p:sp>
         <p:nvSpPr>
@@ -28965,6 +30532,13 @@
             <a:prstDash val="solid"/>
           </a:ln>
         </p:spPr>
+        <p:txBody>
+          <a:bodyPr/>
+          <a:lstStyle/>
+          <a:p>
+            <a:endParaRPr lang="ko-KR" altLang="en-US"/>
+          </a:p>
+        </p:txBody>
       </p:sp>
       <p:sp>
         <p:nvSpPr>
@@ -29097,6 +30671,13 @@
           </a:solidFill>
           <a:ln/>
         </p:spPr>
+        <p:txBody>
+          <a:bodyPr/>
+          <a:lstStyle/>
+          <a:p>
+            <a:endParaRPr lang="ko-KR" altLang="en-US"/>
+          </a:p>
+        </p:txBody>
       </p:sp>
       <p:sp>
         <p:nvSpPr>
